--- a/output/audit_deck.pptx
+++ b/output/audit_deck.pptx
@@ -11,9 +11,13 @@
     <p:sldId id="259" r:id="rId5"/>
     <p:sldId id="260" r:id="rId6"/>
     <p:sldId id="261" r:id="rId7"/>
+    <p:sldId id="262" r:id="rId8"/>
+    <p:sldId id="263" r:id="rId9"/>
+    <p:sldId id="264" r:id="rId10"/>
+    <p:sldId id="265" r:id="rId11"/>
   </p:sldIdLst>
   <p:notesMasterIdLst>
-    <p:notesMasterId r:id="rId8"/>
+    <p:notesMasterId r:id="rId12"/>
   </p:notesMasterIdLst>
   <p:sldSz cx="12192000" cy="6858000"/>
   <p:notesSz cx="6858000" cy="12192000"/>
@@ -1537,6 +1541,1366 @@
 </c:chartSpace>
 </file>
 
+<file path=ppt/charts/chart5.xml><?xml version="1.0" encoding="utf-8"?>
+<c:chartSpace xmlns:c="http://schemas.openxmlformats.org/drawingml/2006/chart" xmlns:a="http://schemas.openxmlformats.org/drawingml/2006/main" xmlns:r="http://schemas.openxmlformats.org/officeDocument/2006/relationships">
+  <c:date1904 val="0"/>
+  <c:roundedCorners val="1"/>
+  <c:chart>
+    <c:autoTitleDeleted val="1"/>
+    <c:plotArea>
+      <c:layout/>
+      <c:lineChart>
+        <c:varyColors val="0"/>
+        <c:ser>
+          <c:idx val="0"/>
+          <c:order val="0"/>
+          <c:tx>
+            <c:strRef>
+              <c:f>Sheet1!$B$1</c:f>
+              <c:strCache>
+                <c:ptCount val="1"/>
+                <c:pt idx="0">
+                  <c:v>EBITDA %</c:v>
+                </c:pt>
+              </c:strCache>
+            </c:strRef>
+          </c:tx>
+          <c:spPr>
+            <a:solidFill>
+              <a:srgbClr val="2D5F7C"/>
+            </a:solidFill>
+            <a:ln w="31750" cap="flat">
+              <a:solidFill>
+                <a:srgbClr val="2D5F7C"/>
+              </a:solidFill>
+              <a:prstDash val="solid"/>
+              <a:round/>
+            </a:ln>
+            <a:effectLst/>
+          </c:spPr>
+          <c:invertIfNegative val="0"/>
+          <c:dLbls>
+            <c:numFmt formatCode="#,##0" sourceLinked="0"/>
+            <c:txPr>
+              <a:bodyPr/>
+              <a:lstStyle/>
+              <a:p>
+                <a:pPr>
+                  <a:defRPr b="0" i="0" strike="noStrike" sz="1200" u="none">
+                    <a:solidFill>
+                      <a:srgbClr val="000000"/>
+                    </a:solidFill>
+                    <a:latin typeface="Arial"/>
+                  </a:defRPr>
+                </a:pPr>
+              </a:p>
+            </c:txPr>
+            <c:showLegendKey val="0"/>
+            <c:showVal val="0"/>
+            <c:showCatName val="0"/>
+            <c:showSerName val="0"/>
+            <c:showPercent val="0"/>
+            <c:showBubbleSize val="0"/>
+            <c:showLeaderLines val="0"/>
+          </c:dLbls>
+          <c:marker>
+            <c:symbol val="circle"/>
+            <c:size val="7"/>
+            <c:spPr>
+              <a:solidFill>
+                <a:srgbClr val="2D5F7C"/>
+              </a:solidFill>
+              <a:ln w="9525" cap="flat">
+                <a:solidFill>
+                  <a:srgbClr val="2D5F7C"/>
+                </a:solidFill>
+                <a:prstDash val="solid"/>
+                <a:round/>
+              </a:ln>
+              <a:effectLst/>
+            </c:spPr>
+          </c:marker>
+          <c:cat>
+            <c:multiLvlStrRef>
+              <c:f>Sheet1!$A$2:$A$12</c:f>
+              <c:multiLvlStrCache>
+                <c:ptCount val="11"/>
+                <c:lvl>
+                  <c:pt idx="0">
+                    <c:v>2025</c:v>
+                  </c:pt>
+                  <c:pt idx="1">
+                    <c:v>2026</c:v>
+                  </c:pt>
+                  <c:pt idx="2">
+                    <c:v>2027</c:v>
+                  </c:pt>
+                  <c:pt idx="3">
+                    <c:v>2028</c:v>
+                  </c:pt>
+                  <c:pt idx="4">
+                    <c:v>2029</c:v>
+                  </c:pt>
+                  <c:pt idx="5">
+                    <c:v>2030</c:v>
+                  </c:pt>
+                  <c:pt idx="6">
+                    <c:v>2031</c:v>
+                  </c:pt>
+                  <c:pt idx="7">
+                    <c:v>2032</c:v>
+                  </c:pt>
+                  <c:pt idx="8">
+                    <c:v>2033</c:v>
+                  </c:pt>
+                  <c:pt idx="9">
+                    <c:v>2034</c:v>
+                  </c:pt>
+                  <c:pt idx="10">
+                    <c:v>2035</c:v>
+                  </c:pt>
+                </c:lvl>
+              </c:multiLvlStrCache>
+            </c:multiLvlStrRef>
+          </c:cat>
+          <c:val>
+            <c:numRef>
+              <c:f>Sheet1!$B$2:$B$12</c:f>
+              <c:numCache>
+                <c:formatCode>General</c:formatCode>
+                <c:ptCount val="11"/>
+                <c:pt idx="0">
+                  <c:v>27.1</c:v>
+                </c:pt>
+                <c:pt idx="1">
+                  <c:v>21</c:v>
+                </c:pt>
+                <c:pt idx="2">
+                  <c:v>19.5</c:v>
+                </c:pt>
+                <c:pt idx="3">
+                  <c:v>24.2</c:v>
+                </c:pt>
+                <c:pt idx="4">
+                  <c:v>15.3</c:v>
+                </c:pt>
+                <c:pt idx="5">
+                  <c:v>33.4</c:v>
+                </c:pt>
+                <c:pt idx="6">
+                  <c:v>31.6</c:v>
+                </c:pt>
+                <c:pt idx="7">
+                  <c:v>30.8</c:v>
+                </c:pt>
+                <c:pt idx="8">
+                  <c:v>27.3</c:v>
+                </c:pt>
+                <c:pt idx="9">
+                  <c:v>28</c:v>
+                </c:pt>
+                <c:pt idx="10">
+                  <c:v>26.3</c:v>
+                </c:pt>
+              </c:numCache>
+            </c:numRef>
+          </c:val>
+          <c:smooth val="0"/>
+        </c:ser>
+        <c:dLbls>
+          <c:numFmt formatCode="#,##0" sourceLinked="0"/>
+          <c:txPr>
+            <a:bodyPr/>
+            <a:lstStyle/>
+            <a:p>
+              <a:pPr>
+                <a:defRPr b="0" i="0" strike="noStrike" sz="1200" u="none">
+                  <a:solidFill>
+                    <a:srgbClr val="000000"/>
+                  </a:solidFill>
+                  <a:latin typeface="Arial"/>
+                </a:defRPr>
+              </a:pPr>
+            </a:p>
+          </c:txPr>
+          <c:showLegendKey val="0"/>
+          <c:showVal val="0"/>
+          <c:showCatName val="0"/>
+          <c:showSerName val="0"/>
+          <c:showPercent val="0"/>
+          <c:showBubbleSize val="0"/>
+          <c:showLeaderLines val="0"/>
+        </c:dLbls>
+        <c:marker val="1"/>
+        <c:axId val="2094734554"/>
+        <c:axId val="2094734552"/>
+        <c:axId val="2094734556"/>
+      </c:lineChart>
+      <c:catAx>
+        <c:axId val="2094734554"/>
+        <c:scaling>
+          <c:orientation val="minMax"/>
+        </c:scaling>
+        <c:delete val="0"/>
+        <c:axPos val="b"/>
+        <c:numFmt formatCode="General" sourceLinked="1"/>
+        <c:majorTickMark val="out"/>
+        <c:minorTickMark val="none"/>
+        <c:tickLblPos val="low"/>
+        <c:spPr>
+          <a:ln w="12700" cap="flat">
+            <a:solidFill>
+              <a:srgbClr val="888888"/>
+            </a:solidFill>
+            <a:prstDash val="solid"/>
+            <a:round/>
+          </a:ln>
+        </c:spPr>
+        <c:txPr>
+          <a:bodyPr/>
+          <a:lstStyle/>
+          <a:p>
+            <a:pPr>
+              <a:defRPr sz="1000" b="0" i="0" u="none" strike="noStrike">
+                <a:solidFill>
+                  <a:srgbClr val="8A7968"/>
+                </a:solidFill>
+                <a:latin typeface="Calibri"/>
+              </a:defRPr>
+            </a:pPr>
+            <a:endParaRPr lang="en-US"/>
+          </a:p>
+        </c:txPr>
+        <c:crossAx val="2094734552"/>
+        <c:crosses val="autoZero"/>
+        <c:auto val="1"/>
+        <c:lblAlgn val="ctr"/>
+        <c:noMultiLvlLbl val="1"/>
+      </c:catAx>
+      <c:valAx>
+        <c:axId val="2094734552"/>
+        <c:scaling>
+          <c:orientation val="minMax"/>
+          <c:max val="35"/>
+          <c:min val="10"/>
+        </c:scaling>
+        <c:delete val="0"/>
+        <c:axPos val="l"/>
+        <c:majorGridlines>
+          <c:spPr>
+            <a:ln w="6350" cap="flat">
+              <a:solidFill>
+                <a:srgbClr val="C9B9A8"/>
+              </a:solidFill>
+              <a:prstDash val="solid"/>
+              <a:round/>
+            </a:ln>
+          </c:spPr>
+        </c:majorGridlines>
+        <c:title>
+          <c:tx>
+            <c:rich>
+              <a:bodyPr/>
+              <a:lstStyle/>
+              <a:p>
+                <a:pPr>
+                  <a:defRPr sz="1000" b="0" i="0" u="none" strike="noStrike">
+                    <a:solidFill>
+                      <a:srgbClr val="8A7968"/>
+                    </a:solidFill>
+                    <a:latin typeface="Calibri"/>
+                  </a:defRPr>
+                </a:pPr>
+                <a:r>
+                  <a:rPr sz="1000" b="0" i="0" u="none" strike="noStrike">
+                    <a:solidFill>
+                      <a:srgbClr val="8A7968"/>
+                    </a:solidFill>
+                    <a:latin typeface="Calibri"/>
+                  </a:rPr>
+                  <a:t>EBITDA %</a:t>
+                </a:r>
+              </a:p>
+            </c:rich>
+          </c:tx>
+          <c:layout/>
+          <c:overlay val="0"/>
+        </c:title>
+        <c:numFmt formatCode="0&quot;%&quot;" sourceLinked="0"/>
+        <c:majorTickMark val="out"/>
+        <c:minorTickMark val="none"/>
+        <c:tickLblPos val="nextTo"/>
+        <c:spPr>
+          <a:ln w="12700" cap="flat">
+            <a:solidFill>
+              <a:srgbClr val="888888"/>
+            </a:solidFill>
+            <a:prstDash val="solid"/>
+            <a:round/>
+          </a:ln>
+        </c:spPr>
+        <c:txPr>
+          <a:bodyPr/>
+          <a:lstStyle/>
+          <a:p>
+            <a:pPr>
+              <a:defRPr sz="1000" b="0" i="0" u="none" strike="noStrike">
+                <a:solidFill>
+                  <a:srgbClr val="8A7968"/>
+                </a:solidFill>
+                <a:latin typeface="Calibri"/>
+              </a:defRPr>
+            </a:pPr>
+            <a:endParaRPr lang="en-US"/>
+          </a:p>
+        </c:txPr>
+        <c:crossAx val="2094734554"/>
+        <c:crosses val="autoZero"/>
+        <c:crossBetween val="between"/>
+      </c:valAx>
+      <c:spPr>
+        <a:solidFill>
+          <a:srgbClr val="FFF5ED"/>
+        </a:solidFill>
+        <a:ln>
+          <a:noFill/>
+        </a:ln>
+        <a:effectLst/>
+      </c:spPr>
+    </c:plotArea>
+    <c:plotVisOnly val="1"/>
+    <c:dispBlanksAs val="span"/>
+  </c:chart>
+  <c:spPr>
+    <a:solidFill>
+      <a:srgbClr val="FFF5ED"/>
+    </a:solidFill>
+    <a:ln>
+      <a:noFill/>
+    </a:ln>
+    <a:effectLst/>
+  </c:spPr>
+  <c:externalData r:id="rId1">
+    <c:autoUpdate val="0"/>
+  </c:externalData>
+</c:chartSpace>
+</file>
+
+<file path=ppt/charts/chart6.xml><?xml version="1.0" encoding="utf-8"?>
+<c:chartSpace xmlns:c="http://schemas.openxmlformats.org/drawingml/2006/chart" xmlns:a="http://schemas.openxmlformats.org/drawingml/2006/main" xmlns:r="http://schemas.openxmlformats.org/officeDocument/2006/relationships">
+  <c:date1904 val="0"/>
+  <c:roundedCorners val="1"/>
+  <c:chart>
+    <c:autoTitleDeleted val="1"/>
+    <c:plotArea>
+      <c:layout/>
+      <c:doughnutChart>
+        <c:varyColors val="1"/>
+        <c:ser>
+          <c:idx val="0"/>
+          <c:order val="0"/>
+          <c:tx>
+            <c:strRef>
+              <c:f>Sheet1!$B$1</c:f>
+              <c:strCache>
+                <c:ptCount val="1"/>
+                <c:pt idx="0">
+                  <c:v>Revenue mix</c:v>
+                </c:pt>
+              </c:strCache>
+            </c:strRef>
+          </c:tx>
+          <c:spPr>
+            <a:solidFill>
+              <a:schemeClr val="accent1"/>
+            </a:solidFill>
+            <a:ln w="9525" cap="flat">
+              <a:solidFill>
+                <a:srgbClr val="F9F9F9"/>
+              </a:solidFill>
+              <a:prstDash val="solid"/>
+              <a:round/>
+            </a:ln>
+            <a:effectLst/>
+          </c:spPr>
+          <c:dPt>
+            <c:idx val="0"/>
+            <c:bubble3D val="0"/>
+            <c:spPr>
+              <a:solidFill>
+                <a:srgbClr val="2D5F7C"/>
+              </a:solidFill>
+              <a:effectLst/>
+            </c:spPr>
+          </c:dPt>
+          <c:dPt>
+            <c:idx val="1"/>
+            <c:bubble3D val="0"/>
+            <c:spPr>
+              <a:solidFill>
+                <a:srgbClr val="BFE5EF"/>
+              </a:solidFill>
+              <a:effectLst/>
+            </c:spPr>
+          </c:dPt>
+          <c:dPt>
+            <c:idx val="2"/>
+            <c:bubble3D val="0"/>
+            <c:spPr>
+              <a:solidFill>
+                <a:srgbClr val="B84C65"/>
+              </a:solidFill>
+              <a:effectLst/>
+            </c:spPr>
+          </c:dPt>
+          <c:dLbls>
+            <c:dLbl>
+              <c:idx val="0"/>
+              <c:numFmt formatCode="0%" sourceLinked="0"/>
+              <c:spPr/>
+              <c:txPr>
+                <a:bodyPr/>
+                <a:lstStyle/>
+                <a:p>
+                  <a:pPr>
+                    <a:defRPr sz="1000" b="0" i="0" u="none" strike="noStrike">
+                      <a:solidFill>
+                        <a:srgbClr val="353745"/>
+                      </a:solidFill>
+                      <a:latin typeface="Calibri"/>
+                    </a:defRPr>
+                  </a:pPr>
+                </a:p>
+              </c:txPr>
+              <c:showLegendKey val="0"/>
+              <c:showVal val="0"/>
+              <c:showCatName val="0"/>
+              <c:showSerName val="0"/>
+              <c:showPercent val="1"/>
+              <c:showBubbleSize val="0"/>
+            </c:dLbl>
+            <c:dLbl>
+              <c:idx val="1"/>
+              <c:numFmt formatCode="0%" sourceLinked="0"/>
+              <c:spPr/>
+              <c:txPr>
+                <a:bodyPr/>
+                <a:lstStyle/>
+                <a:p>
+                  <a:pPr>
+                    <a:defRPr sz="1000" b="0" i="0" u="none" strike="noStrike">
+                      <a:solidFill>
+                        <a:srgbClr val="353745"/>
+                      </a:solidFill>
+                      <a:latin typeface="Calibri"/>
+                    </a:defRPr>
+                  </a:pPr>
+                </a:p>
+              </c:txPr>
+              <c:showLegendKey val="0"/>
+              <c:showVal val="0"/>
+              <c:showCatName val="0"/>
+              <c:showSerName val="0"/>
+              <c:showPercent val="1"/>
+              <c:showBubbleSize val="0"/>
+            </c:dLbl>
+            <c:dLbl>
+              <c:idx val="2"/>
+              <c:numFmt formatCode="0%" sourceLinked="0"/>
+              <c:spPr/>
+              <c:txPr>
+                <a:bodyPr/>
+                <a:lstStyle/>
+                <a:p>
+                  <a:pPr>
+                    <a:defRPr sz="1000" b="0" i="0" u="none" strike="noStrike">
+                      <a:solidFill>
+                        <a:srgbClr val="353745"/>
+                      </a:solidFill>
+                      <a:latin typeface="Calibri"/>
+                    </a:defRPr>
+                  </a:pPr>
+                </a:p>
+              </c:txPr>
+              <c:showLegendKey val="0"/>
+              <c:showVal val="0"/>
+              <c:showCatName val="0"/>
+              <c:showSerName val="0"/>
+              <c:showPercent val="1"/>
+              <c:showBubbleSize val="0"/>
+            </c:dLbl>
+            <c:numFmt formatCode="0%" sourceLinked="0"/>
+            <c:txPr>
+              <a:bodyPr/>
+              <a:lstStyle/>
+              <a:p>
+                <a:pPr>
+                  <a:defRPr sz="1800" b="0" i="0" u="none" strike="noStrike">
+                    <a:solidFill>
+                      <a:srgbClr val="000000"/>
+                    </a:solidFill>
+                    <a:latin typeface="Arial"/>
+                  </a:defRPr>
+                </a:pPr>
+              </a:p>
+            </c:txPr>
+            <c:showLegendKey val="0"/>
+            <c:showVal val="0"/>
+            <c:showCatName val="1"/>
+            <c:showSerName val="0"/>
+            <c:showPercent val="1"/>
+            <c:showBubbleSize val="0"/>
+            <c:showLeaderLines val="0"/>
+          </c:dLbls>
+          <c:cat>
+            <c:strRef>
+              <c:f>Sheet1!$A$2:$A$4</c:f>
+              <c:strCache>
+                <c:ptCount val="3"/>
+                <c:pt idx="0">
+                  <c:v>Strategy</c:v>
+                </c:pt>
+                <c:pt idx="1">
+                  <c:v>Operations</c:v>
+                </c:pt>
+                <c:pt idx="2">
+                  <c:v>Technology</c:v>
+                </c:pt>
+              </c:strCache>
+            </c:strRef>
+          </c:cat>
+          <c:val>
+            <c:numRef>
+              <c:f>Sheet1!$B$2:$B$4</c:f>
+              <c:numCache>
+                <c:ptCount val="3"/>
+                <c:pt idx="0">
+                  <c:v>18.11</c:v>
+                </c:pt>
+                <c:pt idx="1">
+                  <c:v>20.61</c:v>
+                </c:pt>
+                <c:pt idx="2">
+                  <c:v>19.94</c:v>
+                </c:pt>
+              </c:numCache>
+            </c:numRef>
+          </c:val>
+        </c:ser>
+        <c:firstSliceAng val="0"/>
+        <c:holeSize val="65"/>
+      </c:doughnutChart>
+      <c:spPr>
+        <a:solidFill>
+          <a:srgbClr val="FFF5ED"/>
+        </a:solidFill>
+        <a:ln>
+          <a:noFill/>
+        </a:ln>
+        <a:effectLst/>
+      </c:spPr>
+    </c:plotArea>
+    <c:plotVisOnly val="1"/>
+    <c:dispBlanksAs val="span"/>
+  </c:chart>
+  <c:spPr>
+    <a:solidFill>
+      <a:srgbClr val="FFF5ED"/>
+    </a:solidFill>
+    <a:ln>
+      <a:noFill/>
+    </a:ln>
+    <a:effectLst/>
+  </c:spPr>
+  <c:externalData r:id="rId1">
+    <c:autoUpdate val="0"/>
+  </c:externalData>
+</c:chartSpace>
+</file>
+
+<file path=ppt/charts/chart7.xml><?xml version="1.0" encoding="utf-8"?>
+<c:chartSpace xmlns:c="http://schemas.openxmlformats.org/drawingml/2006/chart" xmlns:a="http://schemas.openxmlformats.org/drawingml/2006/main" xmlns:r="http://schemas.openxmlformats.org/officeDocument/2006/relationships">
+  <c:date1904 val="0"/>
+  <c:roundedCorners val="1"/>
+  <c:chart>
+    <c:autoTitleDeleted val="1"/>
+    <c:plotArea>
+      <c:layout/>
+      <c:scatterChart>
+        <c:scatterStyle val="lineMarker"/>
+        <c:varyColors val="0"/>
+        <c:ser>
+          <c:idx val="0"/>
+          <c:order val="0"/>
+          <c:tx>
+            <c:strRef>
+              <c:f>Sheet1!$B$1</c:f>
+              <c:strCache>
+                <c:ptCount val="1"/>
+                <c:pt idx="0">
+                  <c:v>EBITDA %</c:v>
+                </c:pt>
+              </c:strCache>
+            </c:strRef>
+          </c:tx>
+          <c:spPr>
+            <a:solidFill>
+              <a:srgbClr val="2D5F7C"/>
+            </a:solidFill>
+            <a:ln>
+              <a:noFill/>
+            </a:ln>
+            <a:effectLst/>
+          </c:spPr>
+          <c:marker>
+            <c:symbol val="circle"/>
+            <c:size val="9"/>
+            <c:spPr>
+              <a:solidFill>
+                <a:srgbClr val="2D5F7C"/>
+              </a:solidFill>
+              <a:ln w="12700" cap="flat">
+                <a:solidFill>
+                  <a:srgbClr val="2D5F7C"/>
+                </a:solidFill>
+                <a:prstDash val="solid"/>
+                <a:round/>
+              </a:ln>
+              <a:effectLst/>
+            </c:spPr>
+          </c:marker>
+          <c:xVal>
+            <c:numRef>
+              <c:f>Sheet1!$A$2:$A$12</c:f>
+              <c:numCache>
+                <c:formatCode>General</c:formatCode>
+                <c:ptCount val="11"/>
+                <c:pt idx="0">
+                  <c:v>71.3</c:v>
+                </c:pt>
+                <c:pt idx="1">
+                  <c:v>63.5</c:v>
+                </c:pt>
+                <c:pt idx="2">
+                  <c:v>62.4</c:v>
+                </c:pt>
+                <c:pt idx="3">
+                  <c:v>66</c:v>
+                </c:pt>
+                <c:pt idx="4">
+                  <c:v>59.6</c:v>
+                </c:pt>
+                <c:pt idx="5">
+                  <c:v>76.6</c:v>
+                </c:pt>
+                <c:pt idx="6">
+                  <c:v>75.5</c:v>
+                </c:pt>
+                <c:pt idx="7">
+                  <c:v>73.7</c:v>
+                </c:pt>
+                <c:pt idx="8">
+                  <c:v>70.5</c:v>
+                </c:pt>
+                <c:pt idx="9">
+                  <c:v>71</c:v>
+                </c:pt>
+                <c:pt idx="10">
+                  <c:v>67.5</c:v>
+                </c:pt>
+              </c:numCache>
+            </c:numRef>
+          </c:xVal>
+          <c:yVal>
+            <c:numRef>
+              <c:f>Sheet1!$B$2:$B$12</c:f>
+              <c:numCache>
+                <c:formatCode>General</c:formatCode>
+                <c:ptCount val="11"/>
+                <c:pt idx="0">
+                  <c:v>27.1</c:v>
+                </c:pt>
+                <c:pt idx="1">
+                  <c:v>21</c:v>
+                </c:pt>
+                <c:pt idx="2">
+                  <c:v>19.5</c:v>
+                </c:pt>
+                <c:pt idx="3">
+                  <c:v>24.2</c:v>
+                </c:pt>
+                <c:pt idx="4">
+                  <c:v>15.3</c:v>
+                </c:pt>
+                <c:pt idx="5">
+                  <c:v>33.4</c:v>
+                </c:pt>
+                <c:pt idx="6">
+                  <c:v>31.6</c:v>
+                </c:pt>
+                <c:pt idx="7">
+                  <c:v>30.8</c:v>
+                </c:pt>
+                <c:pt idx="8">
+                  <c:v>27.3</c:v>
+                </c:pt>
+                <c:pt idx="9">
+                  <c:v>28</c:v>
+                </c:pt>
+                <c:pt idx="10">
+                  <c:v>26.3</c:v>
+                </c:pt>
+              </c:numCache>
+            </c:numRef>
+          </c:yVal>
+          <c:smooth val="0"/>
+        </c:ser>
+        <c:dLbls>
+          <c:numFmt formatCode="General" sourceLinked="0"/>
+          <c:txPr>
+            <a:bodyPr/>
+            <a:lstStyle/>
+            <a:p>
+              <a:pPr>
+                <a:defRPr b="0" i="0" strike="noStrike" sz="1200" u="none">
+                  <a:solidFill>
+                    <a:srgbClr val="000000"/>
+                  </a:solidFill>
+                  <a:latin typeface="Arial"/>
+                </a:defRPr>
+              </a:pPr>
+            </a:p>
+          </c:txPr>
+          <c:showLegendKey val="0"/>
+          <c:showVal val="0"/>
+          <c:showCatName val="0"/>
+          <c:showSerName val="0"/>
+          <c:showPercent val="0"/>
+          <c:showBubbleSize val="0"/>
+        </c:dLbls>
+        <c:axId val="2094734554"/>
+        <c:axId val="2094734552"/>
+      </c:scatterChart>
+      <c:valAx>
+        <c:axId val="2094734554"/>
+        <c:scaling>
+          <c:orientation val="minMax"/>
+          <c:max val="80"/>
+          <c:min val="55"/>
+        </c:scaling>
+        <c:delete val="0"/>
+        <c:axPos val="b"/>
+        <c:majorGridlines>
+          <c:spPr>
+            <a:ln w="6350" cap="flat">
+              <a:solidFill>
+                <a:srgbClr val="C9B9A8"/>
+              </a:solidFill>
+              <a:prstDash val="solid"/>
+              <a:round/>
+            </a:ln>
+          </c:spPr>
+        </c:majorGridlines>
+        <c:title>
+          <c:tx>
+            <c:rich>
+              <a:bodyPr/>
+              <a:lstStyle/>
+              <a:p>
+                <a:pPr>
+                  <a:defRPr sz="1000" b="0" i="0" u="none" strike="noStrike">
+                    <a:solidFill>
+                      <a:srgbClr val="8A7968"/>
+                    </a:solidFill>
+                    <a:latin typeface="Calibri"/>
+                  </a:defRPr>
+                </a:pPr>
+                <a:r>
+                  <a:rPr sz="1000" b="0" i="0" u="none" strike="noStrike">
+                    <a:solidFill>
+                      <a:srgbClr val="8A7968"/>
+                    </a:solidFill>
+                    <a:latin typeface="Calibri"/>
+                  </a:rPr>
+                  <a:t>Utilization %</a:t>
+                </a:r>
+              </a:p>
+            </c:rich>
+          </c:tx>
+          <c:layout/>
+          <c:overlay val="0"/>
+        </c:title>
+        <c:numFmt formatCode="0&quot;%&quot;" sourceLinked="1"/>
+        <c:majorTickMark val="none"/>
+        <c:minorTickMark val="none"/>
+        <c:tickLblPos val="nextTo"/>
+        <c:spPr>
+          <a:ln w="12700" cap="flat">
+            <a:solidFill>
+              <a:srgbClr val="888888"/>
+            </a:solidFill>
+            <a:prstDash val="solid"/>
+            <a:round/>
+          </a:ln>
+        </c:spPr>
+        <c:txPr>
+          <a:bodyPr/>
+          <a:lstStyle/>
+          <a:p>
+            <a:pPr>
+              <a:defRPr sz="1000" b="0" i="0" u="none" strike="noStrike">
+                <a:solidFill>
+                  <a:srgbClr val="8A7968"/>
+                </a:solidFill>
+                <a:latin typeface="Calibri"/>
+              </a:defRPr>
+            </a:pPr>
+            <a:endParaRPr lang="en-US"/>
+          </a:p>
+        </c:txPr>
+        <c:crossAx val="2094734552"/>
+        <c:crosses val="autoZero"/>
+        <c:auto val="1"/>
+        <c:lblAlgn val="ctr"/>
+        <c:noMultiLvlLbl val="1"/>
+      </c:valAx>
+      <c:valAx>
+        <c:axId val="2094734552"/>
+        <c:scaling>
+          <c:orientation val="minMax"/>
+          <c:max val="35"/>
+          <c:min val="10"/>
+        </c:scaling>
+        <c:delete val="0"/>
+        <c:axPos val="l"/>
+        <c:majorGridlines>
+          <c:spPr>
+            <a:ln w="6350" cap="flat">
+              <a:solidFill>
+                <a:srgbClr val="C9B9A8"/>
+              </a:solidFill>
+              <a:prstDash val="solid"/>
+              <a:round/>
+            </a:ln>
+          </c:spPr>
+        </c:majorGridlines>
+        <c:title>
+          <c:tx>
+            <c:rich>
+              <a:bodyPr/>
+              <a:lstStyle/>
+              <a:p>
+                <a:pPr>
+                  <a:defRPr sz="1000" b="0" i="0" u="none" strike="noStrike">
+                    <a:solidFill>
+                      <a:srgbClr val="8A7968"/>
+                    </a:solidFill>
+                    <a:latin typeface="Calibri"/>
+                  </a:defRPr>
+                </a:pPr>
+                <a:r>
+                  <a:rPr sz="1000" b="0" i="0" u="none" strike="noStrike">
+                    <a:solidFill>
+                      <a:srgbClr val="8A7968"/>
+                    </a:solidFill>
+                    <a:latin typeface="Calibri"/>
+                  </a:rPr>
+                  <a:t>EBITDA %</a:t>
+                </a:r>
+              </a:p>
+            </c:rich>
+          </c:tx>
+          <c:layout/>
+          <c:overlay val="0"/>
+        </c:title>
+        <c:numFmt formatCode="0&quot;%&quot;" sourceLinked="0"/>
+        <c:majorTickMark val="none"/>
+        <c:minorTickMark val="none"/>
+        <c:tickLblPos val="nextTo"/>
+        <c:spPr>
+          <a:ln w="12700" cap="flat">
+            <a:solidFill>
+              <a:srgbClr val="888888"/>
+            </a:solidFill>
+            <a:prstDash val="solid"/>
+            <a:round/>
+          </a:ln>
+        </c:spPr>
+        <c:txPr>
+          <a:bodyPr/>
+          <a:lstStyle/>
+          <a:p>
+            <a:pPr>
+              <a:defRPr sz="1000" b="0" i="0" u="none" strike="noStrike">
+                <a:solidFill>
+                  <a:srgbClr val="8A7968"/>
+                </a:solidFill>
+                <a:latin typeface="Calibri"/>
+              </a:defRPr>
+            </a:pPr>
+            <a:endParaRPr lang="en-US"/>
+          </a:p>
+        </c:txPr>
+        <c:crossAx val="2094734554"/>
+        <c:crosses val="autoZero"/>
+        <c:crossBetween val="midCat"/>
+      </c:valAx>
+      <c:spPr>
+        <a:solidFill>
+          <a:srgbClr val="FFF5ED"/>
+        </a:solidFill>
+        <a:ln>
+          <a:noFill/>
+        </a:ln>
+        <a:effectLst/>
+      </c:spPr>
+    </c:plotArea>
+    <c:plotVisOnly val="1"/>
+    <c:dispBlanksAs val="span"/>
+    <c:showDLblsOverMax val="1"/>
+  </c:chart>
+  <c:spPr>
+    <a:solidFill>
+      <a:srgbClr val="FFF5ED"/>
+    </a:solidFill>
+    <a:ln>
+      <a:noFill/>
+    </a:ln>
+    <a:effectLst/>
+  </c:spPr>
+  <c:externalData r:id="rId1">
+    <c:autoUpdate val="0"/>
+  </c:externalData>
+</c:chartSpace>
+</file>
+
+<file path=ppt/charts/chart8.xml><?xml version="1.0" encoding="utf-8"?>
+<c:chartSpace xmlns:c="http://schemas.openxmlformats.org/drawingml/2006/chart" xmlns:a="http://schemas.openxmlformats.org/drawingml/2006/main" xmlns:r="http://schemas.openxmlformats.org/officeDocument/2006/relationships">
+  <c:date1904 val="0"/>
+  <c:roundedCorners val="1"/>
+  <c:chart>
+    <c:autoTitleDeleted val="1"/>
+    <c:plotArea>
+      <c:layout/>
+      <c:radarChart>
+        <c:radarStyle val="standard"/>
+        <c:varyColors val="0"/>
+        <c:ser>
+          <c:idx val="0"/>
+          <c:order val="0"/>
+          <c:tx>
+            <c:strRef>
+              <c:f>Sheet1!$B$1</c:f>
+              <c:strCache>
+                <c:ptCount val="1"/>
+                <c:pt idx="0">
+                  <c:v>Strategy</c:v>
+                </c:pt>
+              </c:strCache>
+            </c:strRef>
+          </c:tx>
+          <c:spPr>
+            <a:solidFill>
+              <a:srgbClr val="2D5F7C"/>
+            </a:solidFill>
+            <a:ln w="31750" cap="flat">
+              <a:solidFill>
+                <a:srgbClr val="2D5F7C"/>
+              </a:solidFill>
+              <a:prstDash val="solid"/>
+              <a:round/>
+            </a:ln>
+            <a:effectLst/>
+          </c:spPr>
+          <c:invertIfNegative val="0"/>
+          <c:marker>
+            <c:symbol val="circle"/>
+            <c:size val="6"/>
+            <c:spPr>
+              <a:solidFill>
+                <a:srgbClr val="2D5F7C"/>
+              </a:solidFill>
+              <a:ln w="9525" cap="flat">
+                <a:solidFill>
+                  <a:srgbClr val="2D5F7C"/>
+                </a:solidFill>
+                <a:prstDash val="solid"/>
+                <a:round/>
+              </a:ln>
+              <a:effectLst/>
+            </c:spPr>
+          </c:marker>
+          <c:cat>
+            <c:multiLvlStrRef>
+              <c:f>Sheet1!$A$2:$A$4</c:f>
+              <c:multiLvlStrCache>
+                <c:ptCount val="3"/>
+                <c:lvl>
+                  <c:pt idx="0">
+                    <c:v>2025 Rev</c:v>
+                  </c:pt>
+                  <c:pt idx="1">
+                    <c:v>2035 Rev</c:v>
+                  </c:pt>
+                  <c:pt idx="2">
+                    <c:v>10Y CAGR</c:v>
+                  </c:pt>
+                </c:lvl>
+              </c:multiLvlStrCache>
+            </c:multiLvlStrRef>
+          </c:cat>
+          <c:val>
+            <c:numRef>
+              <c:f>Sheet1!$B$2:$B$4</c:f>
+              <c:numCache>
+                <c:formatCode>General</c:formatCode>
+                <c:ptCount val="3"/>
+                <c:pt idx="0">
+                  <c:v>100</c:v>
+                </c:pt>
+                <c:pt idx="1">
+                  <c:v>0</c:v>
+                </c:pt>
+                <c:pt idx="2">
+                  <c:v>0</c:v>
+                </c:pt>
+              </c:numCache>
+            </c:numRef>
+          </c:val>
+        </c:ser>
+        <c:ser>
+          <c:idx val="1"/>
+          <c:order val="1"/>
+          <c:tx>
+            <c:strRef>
+              <c:f>Sheet1!$C$1</c:f>
+              <c:strCache>
+                <c:ptCount val="1"/>
+                <c:pt idx="0">
+                  <c:v>Operations</c:v>
+                </c:pt>
+              </c:strCache>
+            </c:strRef>
+          </c:tx>
+          <c:spPr>
+            <a:solidFill>
+              <a:srgbClr val="BFE5EF"/>
+            </a:solidFill>
+            <a:ln w="31750" cap="flat">
+              <a:solidFill>
+                <a:srgbClr val="BFE5EF"/>
+              </a:solidFill>
+              <a:prstDash val="solid"/>
+              <a:round/>
+            </a:ln>
+            <a:effectLst/>
+          </c:spPr>
+          <c:invertIfNegative val="0"/>
+          <c:marker>
+            <c:symbol val="circle"/>
+            <c:size val="6"/>
+            <c:spPr>
+              <a:solidFill>
+                <a:srgbClr val="BFE5EF"/>
+              </a:solidFill>
+              <a:ln w="9525" cap="flat">
+                <a:solidFill>
+                  <a:srgbClr val="BFE5EF"/>
+                </a:solidFill>
+                <a:prstDash val="solid"/>
+                <a:round/>
+              </a:ln>
+              <a:effectLst/>
+            </c:spPr>
+          </c:marker>
+          <c:cat>
+            <c:multiLvlStrRef>
+              <c:f>Sheet1!$A$2:$A$4</c:f>
+              <c:multiLvlStrCache>
+                <c:ptCount val="3"/>
+                <c:lvl>
+                  <c:pt idx="0">
+                    <c:v>2025 Rev</c:v>
+                  </c:pt>
+                  <c:pt idx="1">
+                    <c:v>2035 Rev</c:v>
+                  </c:pt>
+                  <c:pt idx="2">
+                    <c:v>10Y CAGR</c:v>
+                  </c:pt>
+                </c:lvl>
+              </c:multiLvlStrCache>
+            </c:multiLvlStrRef>
+          </c:cat>
+          <c:val>
+            <c:numRef>
+              <c:f>Sheet1!$C$2:$C$4</c:f>
+              <c:numCache>
+                <c:formatCode>General</c:formatCode>
+                <c:ptCount val="3"/>
+                <c:pt idx="0">
+                  <c:v>93</c:v>
+                </c:pt>
+                <c:pt idx="1">
+                  <c:v>100</c:v>
+                </c:pt>
+                <c:pt idx="2">
+                  <c:v>28</c:v>
+                </c:pt>
+              </c:numCache>
+            </c:numRef>
+          </c:val>
+        </c:ser>
+        <c:ser>
+          <c:idx val="2"/>
+          <c:order val="2"/>
+          <c:tx>
+            <c:strRef>
+              <c:f>Sheet1!$D$1</c:f>
+              <c:strCache>
+                <c:ptCount val="1"/>
+                <c:pt idx="0">
+                  <c:v>Technology</c:v>
+                </c:pt>
+              </c:strCache>
+            </c:strRef>
+          </c:tx>
+          <c:spPr>
+            <a:solidFill>
+              <a:srgbClr val="B84C65"/>
+            </a:solidFill>
+            <a:ln w="31750" cap="flat">
+              <a:solidFill>
+                <a:srgbClr val="B84C65"/>
+              </a:solidFill>
+              <a:prstDash val="solid"/>
+              <a:round/>
+            </a:ln>
+            <a:effectLst/>
+          </c:spPr>
+          <c:invertIfNegative val="0"/>
+          <c:marker>
+            <c:symbol val="circle"/>
+            <c:size val="6"/>
+            <c:spPr>
+              <a:solidFill>
+                <a:srgbClr val="B84C65"/>
+              </a:solidFill>
+              <a:ln w="9525" cap="flat">
+                <a:solidFill>
+                  <a:srgbClr val="B84C65"/>
+                </a:solidFill>
+                <a:prstDash val="solid"/>
+                <a:round/>
+              </a:ln>
+              <a:effectLst/>
+            </c:spPr>
+          </c:marker>
+          <c:cat>
+            <c:multiLvlStrRef>
+              <c:f>Sheet1!$A$2:$A$4</c:f>
+              <c:multiLvlStrCache>
+                <c:ptCount val="3"/>
+                <c:lvl>
+                  <c:pt idx="0">
+                    <c:v>2025 Rev</c:v>
+                  </c:pt>
+                  <c:pt idx="1">
+                    <c:v>2035 Rev</c:v>
+                  </c:pt>
+                  <c:pt idx="2">
+                    <c:v>10Y CAGR</c:v>
+                  </c:pt>
+                </c:lvl>
+              </c:multiLvlStrCache>
+            </c:multiLvlStrRef>
+          </c:cat>
+          <c:val>
+            <c:numRef>
+              <c:f>Sheet1!$D$2:$D$4</c:f>
+              <c:numCache>
+                <c:formatCode>General</c:formatCode>
+                <c:ptCount val="3"/>
+                <c:pt idx="0">
+                  <c:v>0</c:v>
+                </c:pt>
+                <c:pt idx="1">
+                  <c:v>73</c:v>
+                </c:pt>
+                <c:pt idx="2">
+                  <c:v>100</c:v>
+                </c:pt>
+              </c:numCache>
+            </c:numRef>
+          </c:val>
+        </c:ser>
+        <c:dLbls>
+          <c:numFmt formatCode="#,##0" sourceLinked="0"/>
+          <c:txPr>
+            <a:bodyPr/>
+            <a:lstStyle/>
+            <a:p>
+              <a:pPr>
+                <a:defRPr b="0" i="0" strike="noStrike" sz="1200" u="none">
+                  <a:solidFill>
+                    <a:srgbClr val="000000"/>
+                  </a:solidFill>
+                  <a:latin typeface="Arial"/>
+                </a:defRPr>
+              </a:pPr>
+            </a:p>
+          </c:txPr>
+          <c:showLegendKey val="0"/>
+          <c:showVal val="0"/>
+          <c:showCatName val="0"/>
+          <c:showSerName val="0"/>
+          <c:showPercent val="0"/>
+          <c:showBubbleSize val="0"/>
+          <c:showLeaderLines val="0"/>
+        </c:dLbls>
+        <c:axId val="2094734554"/>
+        <c:axId val="2094734552"/>
+        <c:axId val="2094734556"/>
+      </c:radarChart>
+      <c:catAx>
+        <c:axId val="2094734554"/>
+        <c:scaling>
+          <c:orientation val="minMax"/>
+        </c:scaling>
+        <c:delete val="0"/>
+        <c:axPos val="b"/>
+        <c:numFmt formatCode="General" sourceLinked="1"/>
+        <c:majorTickMark val="out"/>
+        <c:minorTickMark val="none"/>
+        <c:tickLblPos val="low"/>
+        <c:spPr>
+          <a:ln w="12700" cap="flat">
+            <a:solidFill>
+              <a:srgbClr val="888888"/>
+            </a:solidFill>
+            <a:prstDash val="solid"/>
+            <a:round/>
+          </a:ln>
+        </c:spPr>
+        <c:txPr>
+          <a:bodyPr/>
+          <a:lstStyle/>
+          <a:p>
+            <a:pPr>
+              <a:defRPr sz="1000" b="0" i="0" u="none" strike="noStrike">
+                <a:solidFill>
+                  <a:srgbClr val="8A7968"/>
+                </a:solidFill>
+                <a:latin typeface="Calibri"/>
+              </a:defRPr>
+            </a:pPr>
+            <a:endParaRPr lang="en-US"/>
+          </a:p>
+        </c:txPr>
+        <c:crossAx val="2094734552"/>
+        <c:crosses val="autoZero"/>
+        <c:auto val="1"/>
+        <c:lblAlgn val="ctr"/>
+        <c:noMultiLvlLbl val="1"/>
+      </c:catAx>
+      <c:valAx>
+        <c:axId val="2094734552"/>
+        <c:scaling>
+          <c:orientation val="minMax"/>
+        </c:scaling>
+        <c:delete val="0"/>
+        <c:axPos val="l"/>
+        <c:majorGridlines>
+          <c:spPr>
+            <a:ln w="5080" cap="flat">
+              <a:solidFill>
+                <a:srgbClr val="C9B9A8"/>
+              </a:solidFill>
+              <a:prstDash val="solid"/>
+              <a:round/>
+            </a:ln>
+          </c:spPr>
+        </c:majorGridlines>
+        <c:numFmt formatCode="General" sourceLinked="0"/>
+        <c:majorTickMark val="out"/>
+        <c:minorTickMark val="none"/>
+        <c:tickLblPos val="nextTo"/>
+        <c:spPr>
+          <a:ln w="12700" cap="flat">
+            <a:solidFill>
+              <a:srgbClr val="888888"/>
+            </a:solidFill>
+            <a:prstDash val="solid"/>
+            <a:round/>
+          </a:ln>
+        </c:spPr>
+        <c:txPr>
+          <a:bodyPr/>
+          <a:lstStyle/>
+          <a:p>
+            <a:pPr>
+              <a:defRPr sz="900" b="0" i="0" u="none" strike="noStrike">
+                <a:solidFill>
+                  <a:srgbClr val="8A7968"/>
+                </a:solidFill>
+                <a:latin typeface="Calibri"/>
+              </a:defRPr>
+            </a:pPr>
+            <a:endParaRPr lang="en-US"/>
+          </a:p>
+        </c:txPr>
+        <c:crossAx val="2094734554"/>
+        <c:crosses val="autoZero"/>
+        <c:crossBetween val="between"/>
+      </c:valAx>
+      <c:spPr>
+        <a:solidFill>
+          <a:srgbClr val="FFF5ED"/>
+        </a:solidFill>
+        <a:ln>
+          <a:noFill/>
+        </a:ln>
+        <a:effectLst/>
+      </c:spPr>
+    </c:plotArea>
+    <c:legend>
+      <c:legendPos val="b"/>
+      <c:overlay val="0"/>
+      <c:txPr>
+        <a:bodyPr/>
+        <a:lstStyle/>
+        <a:p>
+          <a:pPr>
+            <a:defRPr sz="1000">
+              <a:solidFill>
+                <a:srgbClr val="8A7968"/>
+              </a:solidFill>
+              <a:latin typeface="Calibri"/>
+              <a:cs typeface="Calibri"/>
+            </a:defRPr>
+          </a:pPr>
+          <a:endParaRPr lang="en-US"/>
+        </a:p>
+      </c:txPr>
+    </c:legend>
+    <c:plotVisOnly val="1"/>
+    <c:dispBlanksAs val="span"/>
+  </c:chart>
+  <c:spPr>
+    <a:solidFill>
+      <a:srgbClr val="FFF5ED"/>
+    </a:solidFill>
+    <a:ln>
+      <a:noFill/>
+    </a:ln>
+    <a:effectLst/>
+  </c:spPr>
+  <c:externalData r:id="rId1">
+    <c:autoUpdate val="0"/>
+  </c:externalData>
+</c:chartSpace>
+</file>
+
 <file path=ppt/notesMasters/notesMaster1.xml><?xml version="1.0" encoding="utf-8"?>
 <p:notesMaster xmlns:a="http://schemas.openxmlformats.org/drawingml/2006/main" xmlns:r="http://schemas.openxmlformats.org/officeDocument/2006/relationships" xmlns:p="http://schemas.openxmlformats.org/presentationml/2006/main">
   <p:cSld>
@@ -1974,6 +3338,94 @@
 </p:notes>
 </file>
 
+<file path=ppt/notesSlides/notesSlide10.xml><?xml version="1.0" encoding="utf-8"?>
+<p:notes xmlns:a="http://schemas.openxmlformats.org/drawingml/2006/main" xmlns:r="http://schemas.openxmlformats.org/officeDocument/2006/relationships" xmlns:p="http://schemas.openxmlformats.org/presentationml/2006/main">
+  <p:cSld>
+    <p:spTree>
+      <p:nvGrpSpPr>
+        <p:cNvPr id="1" name=""/>
+        <p:cNvGrpSpPr/>
+        <p:nvPr/>
+      </p:nvGrpSpPr>
+      <p:grpSpPr>
+        <a:xfrm>
+          <a:off x="0" y="0"/>
+          <a:ext cx="0" cy="0"/>
+          <a:chOff x="0" y="0"/>
+          <a:chExt cx="0" cy="0"/>
+        </a:xfrm>
+      </p:grpSpPr>
+      <p:sp>
+        <p:nvSpPr>
+          <p:cNvPr id="2" name="Slide Image Placeholder 1"/>
+          <p:cNvSpPr>
+            <a:spLocks noGrp="1" noRot="1" noChangeAspect="1"/>
+          </p:cNvSpPr>
+          <p:nvPr>
+            <p:ph type="sldImg"/>
+          </p:nvPr>
+        </p:nvSpPr>
+        <p:spPr/>
+      </p:sp>
+      <p:sp>
+        <p:nvSpPr>
+          <p:cNvPr id="3" name="Notes Placeholder 2"/>
+          <p:cNvSpPr>
+            <a:spLocks noGrp="1"/>
+          </p:cNvSpPr>
+          <p:nvPr>
+            <p:ph type="body" idx="1"/>
+          </p:nvPr>
+        </p:nvSpPr>
+        <p:spPr/>
+        <p:txBody>
+          <a:bodyPr/>
+          <a:lstStyle/>
+          <a:p>
+            <a:r>
+              <a:rPr lang="en-US" dirty="0"/>
+              <a:t/>
+            </a:r>
+            <a:endParaRPr lang="en-US" dirty="0"/>
+          </a:p>
+        </p:txBody>
+      </p:sp>
+      <p:sp>
+        <p:nvSpPr>
+          <p:cNvPr id="4" name="Slide Number Placeholder 3"/>
+          <p:cNvSpPr>
+            <a:spLocks noGrp="1"/>
+          </p:cNvSpPr>
+          <p:nvPr>
+            <p:ph type="sldNum" sz="quarter" idx="10"/>
+          </p:nvPr>
+        </p:nvSpPr>
+        <p:spPr/>
+        <p:txBody>
+          <a:bodyPr/>
+          <a:lstStyle/>
+          <a:p>
+            <a:fld id="{F7021451-1387-4CA6-816F-3879F97B5CBC}" type="slidenum">
+              <a:rPr lang="en-US"/>
+              <a:t>10</a:t>
+            </a:fld>
+            <a:endParaRPr lang="en-US"/>
+          </a:p>
+        </p:txBody>
+      </p:sp>
+    </p:spTree>
+    <p:extLst>
+      <p:ext uri="{BB962C8B-B14F-4D97-AF65-F5344CB8AC3E}">
+        <p14:creationId xmlns:p14="http://schemas.microsoft.com/office/powerpoint/2010/main" val="1024086991"/>
+      </p:ext>
+    </p:extLst>
+  </p:cSld>
+  <p:clrMapOvr>
+    <a:masterClrMapping/>
+  </p:clrMapOvr>
+</p:notes>
+</file>
+
 <file path=ppt/notesSlides/notesSlide2.xml><?xml version="1.0" encoding="utf-8"?>
 <p:notes xmlns:a="http://schemas.openxmlformats.org/drawingml/2006/main" xmlns:r="http://schemas.openxmlformats.org/officeDocument/2006/relationships" xmlns:p="http://schemas.openxmlformats.org/presentationml/2006/main">
   <p:cSld>
@@ -2396,6 +3848,270 @@
             <a:fld id="{F7021451-1387-4CA6-816F-3879F97B5CBC}" type="slidenum">
               <a:rPr lang="en-US"/>
               <a:t>6</a:t>
+            </a:fld>
+            <a:endParaRPr lang="en-US"/>
+          </a:p>
+        </p:txBody>
+      </p:sp>
+    </p:spTree>
+    <p:extLst>
+      <p:ext uri="{BB962C8B-B14F-4D97-AF65-F5344CB8AC3E}">
+        <p14:creationId xmlns:p14="http://schemas.microsoft.com/office/powerpoint/2010/main" val="1024086991"/>
+      </p:ext>
+    </p:extLst>
+  </p:cSld>
+  <p:clrMapOvr>
+    <a:masterClrMapping/>
+  </p:clrMapOvr>
+</p:notes>
+</file>
+
+<file path=ppt/notesSlides/notesSlide7.xml><?xml version="1.0" encoding="utf-8"?>
+<p:notes xmlns:a="http://schemas.openxmlformats.org/drawingml/2006/main" xmlns:r="http://schemas.openxmlformats.org/officeDocument/2006/relationships" xmlns:p="http://schemas.openxmlformats.org/presentationml/2006/main">
+  <p:cSld>
+    <p:spTree>
+      <p:nvGrpSpPr>
+        <p:cNvPr id="1" name=""/>
+        <p:cNvGrpSpPr/>
+        <p:nvPr/>
+      </p:nvGrpSpPr>
+      <p:grpSpPr>
+        <a:xfrm>
+          <a:off x="0" y="0"/>
+          <a:ext cx="0" cy="0"/>
+          <a:chOff x="0" y="0"/>
+          <a:chExt cx="0" cy="0"/>
+        </a:xfrm>
+      </p:grpSpPr>
+      <p:sp>
+        <p:nvSpPr>
+          <p:cNvPr id="2" name="Slide Image Placeholder 1"/>
+          <p:cNvSpPr>
+            <a:spLocks noGrp="1" noRot="1" noChangeAspect="1"/>
+          </p:cNvSpPr>
+          <p:nvPr>
+            <p:ph type="sldImg"/>
+          </p:nvPr>
+        </p:nvSpPr>
+        <p:spPr/>
+      </p:sp>
+      <p:sp>
+        <p:nvSpPr>
+          <p:cNvPr id="3" name="Notes Placeholder 2"/>
+          <p:cNvSpPr>
+            <a:spLocks noGrp="1"/>
+          </p:cNvSpPr>
+          <p:nvPr>
+            <p:ph type="body" idx="1"/>
+          </p:nvPr>
+        </p:nvSpPr>
+        <p:spPr/>
+        <p:txBody>
+          <a:bodyPr/>
+          <a:lstStyle/>
+          <a:p>
+            <a:r>
+              <a:rPr lang="en-US" dirty="0"/>
+              <a:t/>
+            </a:r>
+            <a:endParaRPr lang="en-US" dirty="0"/>
+          </a:p>
+        </p:txBody>
+      </p:sp>
+      <p:sp>
+        <p:nvSpPr>
+          <p:cNvPr id="4" name="Slide Number Placeholder 3"/>
+          <p:cNvSpPr>
+            <a:spLocks noGrp="1"/>
+          </p:cNvSpPr>
+          <p:nvPr>
+            <p:ph type="sldNum" sz="quarter" idx="10"/>
+          </p:nvPr>
+        </p:nvSpPr>
+        <p:spPr/>
+        <p:txBody>
+          <a:bodyPr/>
+          <a:lstStyle/>
+          <a:p>
+            <a:fld id="{F7021451-1387-4CA6-816F-3879F97B5CBC}" type="slidenum">
+              <a:rPr lang="en-US"/>
+              <a:t>7</a:t>
+            </a:fld>
+            <a:endParaRPr lang="en-US"/>
+          </a:p>
+        </p:txBody>
+      </p:sp>
+    </p:spTree>
+    <p:extLst>
+      <p:ext uri="{BB962C8B-B14F-4D97-AF65-F5344CB8AC3E}">
+        <p14:creationId xmlns:p14="http://schemas.microsoft.com/office/powerpoint/2010/main" val="1024086991"/>
+      </p:ext>
+    </p:extLst>
+  </p:cSld>
+  <p:clrMapOvr>
+    <a:masterClrMapping/>
+  </p:clrMapOvr>
+</p:notes>
+</file>
+
+<file path=ppt/notesSlides/notesSlide8.xml><?xml version="1.0" encoding="utf-8"?>
+<p:notes xmlns:a="http://schemas.openxmlformats.org/drawingml/2006/main" xmlns:r="http://schemas.openxmlformats.org/officeDocument/2006/relationships" xmlns:p="http://schemas.openxmlformats.org/presentationml/2006/main">
+  <p:cSld>
+    <p:spTree>
+      <p:nvGrpSpPr>
+        <p:cNvPr id="1" name=""/>
+        <p:cNvGrpSpPr/>
+        <p:nvPr/>
+      </p:nvGrpSpPr>
+      <p:grpSpPr>
+        <a:xfrm>
+          <a:off x="0" y="0"/>
+          <a:ext cx="0" cy="0"/>
+          <a:chOff x="0" y="0"/>
+          <a:chExt cx="0" cy="0"/>
+        </a:xfrm>
+      </p:grpSpPr>
+      <p:sp>
+        <p:nvSpPr>
+          <p:cNvPr id="2" name="Slide Image Placeholder 1"/>
+          <p:cNvSpPr>
+            <a:spLocks noGrp="1" noRot="1" noChangeAspect="1"/>
+          </p:cNvSpPr>
+          <p:nvPr>
+            <p:ph type="sldImg"/>
+          </p:nvPr>
+        </p:nvSpPr>
+        <p:spPr/>
+      </p:sp>
+      <p:sp>
+        <p:nvSpPr>
+          <p:cNvPr id="3" name="Notes Placeholder 2"/>
+          <p:cNvSpPr>
+            <a:spLocks noGrp="1"/>
+          </p:cNvSpPr>
+          <p:nvPr>
+            <p:ph type="body" idx="1"/>
+          </p:nvPr>
+        </p:nvSpPr>
+        <p:spPr/>
+        <p:txBody>
+          <a:bodyPr/>
+          <a:lstStyle/>
+          <a:p>
+            <a:r>
+              <a:rPr lang="en-US" dirty="0"/>
+              <a:t/>
+            </a:r>
+            <a:endParaRPr lang="en-US" dirty="0"/>
+          </a:p>
+        </p:txBody>
+      </p:sp>
+      <p:sp>
+        <p:nvSpPr>
+          <p:cNvPr id="4" name="Slide Number Placeholder 3"/>
+          <p:cNvSpPr>
+            <a:spLocks noGrp="1"/>
+          </p:cNvSpPr>
+          <p:nvPr>
+            <p:ph type="sldNum" sz="quarter" idx="10"/>
+          </p:nvPr>
+        </p:nvSpPr>
+        <p:spPr/>
+        <p:txBody>
+          <a:bodyPr/>
+          <a:lstStyle/>
+          <a:p>
+            <a:fld id="{F7021451-1387-4CA6-816F-3879F97B5CBC}" type="slidenum">
+              <a:rPr lang="en-US"/>
+              <a:t>8</a:t>
+            </a:fld>
+            <a:endParaRPr lang="en-US"/>
+          </a:p>
+        </p:txBody>
+      </p:sp>
+    </p:spTree>
+    <p:extLst>
+      <p:ext uri="{BB962C8B-B14F-4D97-AF65-F5344CB8AC3E}">
+        <p14:creationId xmlns:p14="http://schemas.microsoft.com/office/powerpoint/2010/main" val="1024086991"/>
+      </p:ext>
+    </p:extLst>
+  </p:cSld>
+  <p:clrMapOvr>
+    <a:masterClrMapping/>
+  </p:clrMapOvr>
+</p:notes>
+</file>
+
+<file path=ppt/notesSlides/notesSlide9.xml><?xml version="1.0" encoding="utf-8"?>
+<p:notes xmlns:a="http://schemas.openxmlformats.org/drawingml/2006/main" xmlns:r="http://schemas.openxmlformats.org/officeDocument/2006/relationships" xmlns:p="http://schemas.openxmlformats.org/presentationml/2006/main">
+  <p:cSld>
+    <p:spTree>
+      <p:nvGrpSpPr>
+        <p:cNvPr id="1" name=""/>
+        <p:cNvGrpSpPr/>
+        <p:nvPr/>
+      </p:nvGrpSpPr>
+      <p:grpSpPr>
+        <a:xfrm>
+          <a:off x="0" y="0"/>
+          <a:ext cx="0" cy="0"/>
+          <a:chOff x="0" y="0"/>
+          <a:chExt cx="0" cy="0"/>
+        </a:xfrm>
+      </p:grpSpPr>
+      <p:sp>
+        <p:nvSpPr>
+          <p:cNvPr id="2" name="Slide Image Placeholder 1"/>
+          <p:cNvSpPr>
+            <a:spLocks noGrp="1" noRot="1" noChangeAspect="1"/>
+          </p:cNvSpPr>
+          <p:nvPr>
+            <p:ph type="sldImg"/>
+          </p:nvPr>
+        </p:nvSpPr>
+        <p:spPr/>
+      </p:sp>
+      <p:sp>
+        <p:nvSpPr>
+          <p:cNvPr id="3" name="Notes Placeholder 2"/>
+          <p:cNvSpPr>
+            <a:spLocks noGrp="1"/>
+          </p:cNvSpPr>
+          <p:nvPr>
+            <p:ph type="body" idx="1"/>
+          </p:nvPr>
+        </p:nvSpPr>
+        <p:spPr/>
+        <p:txBody>
+          <a:bodyPr/>
+          <a:lstStyle/>
+          <a:p>
+            <a:r>
+              <a:rPr lang="en-US" dirty="0"/>
+              <a:t/>
+            </a:r>
+            <a:endParaRPr lang="en-US" dirty="0"/>
+          </a:p>
+        </p:txBody>
+      </p:sp>
+      <p:sp>
+        <p:nvSpPr>
+          <p:cNvPr id="4" name="Slide Number Placeholder 3"/>
+          <p:cNvSpPr>
+            <a:spLocks noGrp="1"/>
+          </p:cNvSpPr>
+          <p:nvPr>
+            <p:ph type="sldNum" sz="quarter" idx="10"/>
+          </p:nvPr>
+        </p:nvSpPr>
+        <p:spPr/>
+        <p:txBody>
+          <a:bodyPr/>
+          <a:lstStyle/>
+          <a:p>
+            <a:fld id="{F7021451-1387-4CA6-816F-3879F97B5CBC}" type="slidenum">
+              <a:rPr lang="en-US"/>
+              <a:t>9</a:t>
             </a:fld>
             <a:endParaRPr lang="en-US"/>
           </a:p>
@@ -2886,6 +4602,536 @@
 </p:sld>
 </file>
 
+<file path=ppt/slides/slide10.xml><?xml version="1.0" encoding="utf-8"?>
+<p:sld xmlns:a="http://schemas.openxmlformats.org/drawingml/2006/main" xmlns:r="http://schemas.openxmlformats.org/officeDocument/2006/relationships" xmlns:p="http://schemas.openxmlformats.org/presentationml/2006/main">
+  <p:cSld name="Slide 10">
+    <p:bg>
+      <p:bgPr>
+        <a:solidFill>
+          <a:srgbClr val="FFF5ED"/>
+        </a:solidFill>
+      </p:bgPr>
+    </p:bg>
+    <p:spTree>
+      <p:nvGrpSpPr>
+        <p:cNvPr id="1" name=""/>
+        <p:cNvGrpSpPr/>
+        <p:nvPr/>
+      </p:nvGrpSpPr>
+      <p:grpSpPr>
+        <a:xfrm>
+          <a:off x="0" y="0"/>
+          <a:ext cx="0" cy="0"/>
+          <a:chOff x="0" y="0"/>
+          <a:chExt cx="0" cy="0"/>
+        </a:xfrm>
+      </p:grpSpPr>
+      <p:sp>
+        <p:nvSpPr>
+          <p:cNvPr id="2" name="Text 0"/>
+          <p:cNvSpPr/>
+          <p:nvPr/>
+        </p:nvSpPr>
+        <p:spPr>
+          <a:xfrm>
+            <a:off x="548640" y="457200"/>
+            <a:ext cx="7315200" cy="256032"/>
+          </a:xfrm>
+          <a:prstGeom prst="rect">
+            <a:avLst/>
+          </a:prstGeom>
+          <a:noFill/>
+          <a:ln/>
+        </p:spPr>
+        <p:txBody>
+          <a:bodyPr wrap="square" lIns="0" tIns="0" rIns="0" bIns="0" rtlCol="0" anchor="t"/>
+          <a:lstStyle/>
+          <a:p>
+            <a:pPr indent="0" marL="0">
+              <a:buNone/>
+            </a:pPr>
+            <a:r>
+              <a:rPr lang="en-US" sz="1000" b="1" spc="200" kern="0" dirty="0">
+                <a:solidFill>
+                  <a:srgbClr val="8A7968"/>
+                </a:solidFill>
+                <a:latin typeface="Calibri" pitchFamily="34" charset="0"/>
+                <a:ea typeface="Calibri" pitchFamily="34" charset="-122"/>
+                <a:cs typeface="Calibri" pitchFamily="34" charset="-120"/>
+              </a:rPr>
+              <a:t>RADAR CHART  ·  NATIVE</a:t>
+            </a:r>
+            <a:endParaRPr lang="en-US" sz="1000" dirty="0"/>
+          </a:p>
+        </p:txBody>
+      </p:sp>
+      <p:sp>
+        <p:nvSpPr>
+          <p:cNvPr id="3" name="Text 1"/>
+          <p:cNvSpPr/>
+          <p:nvPr/>
+        </p:nvSpPr>
+        <p:spPr>
+          <a:xfrm>
+            <a:off x="548640" y="749808"/>
+            <a:ext cx="11091672" cy="640080"/>
+          </a:xfrm>
+          <a:prstGeom prst="rect">
+            <a:avLst/>
+          </a:prstGeom>
+          <a:noFill/>
+          <a:ln/>
+        </p:spPr>
+        <p:txBody>
+          <a:bodyPr wrap="square" lIns="0" tIns="0" rIns="0" bIns="0" rtlCol="0" anchor="t"/>
+          <a:lstStyle/>
+          <a:p>
+            <a:pPr indent="0" marL="0">
+              <a:buNone/>
+            </a:pPr>
+            <a:r>
+              <a:rPr lang="en-US" sz="3000" dirty="0">
+                <a:solidFill>
+                  <a:srgbClr val="353745"/>
+                </a:solidFill>
+                <a:latin typeface="Georgia" pitchFamily="34" charset="0"/>
+                <a:ea typeface="Georgia" pitchFamily="34" charset="-122"/>
+                <a:cs typeface="Georgia" pitchFamily="34" charset="-120"/>
+              </a:rPr>
+              <a:t>Different shapes, same book.</a:t>
+            </a:r>
+            <a:endParaRPr lang="en-US" sz="3000" dirty="0"/>
+          </a:p>
+        </p:txBody>
+      </p:sp>
+      <p:sp>
+        <p:nvSpPr>
+          <p:cNvPr id="4" name="Text 2"/>
+          <p:cNvSpPr/>
+          <p:nvPr/>
+        </p:nvSpPr>
+        <p:spPr>
+          <a:xfrm>
+            <a:off x="548640" y="1325880"/>
+            <a:ext cx="11091672" cy="292608"/>
+          </a:xfrm>
+          <a:prstGeom prst="rect">
+            <a:avLst/>
+          </a:prstGeom>
+          <a:noFill/>
+          <a:ln/>
+        </p:spPr>
+        <p:txBody>
+          <a:bodyPr wrap="square" lIns="0" tIns="0" rIns="0" bIns="0" rtlCol="0" anchor="t"/>
+          <a:lstStyle/>
+          <a:p>
+            <a:pPr indent="0" marL="0">
+              <a:buNone/>
+            </a:pPr>
+            <a:r>
+              <a:rPr lang="en-US" sz="1300" i="1" dirty="0">
+                <a:solidFill>
+                  <a:srgbClr val="353745"/>
+                </a:solidFill>
+                <a:latin typeface="Georgia" pitchFamily="34" charset="0"/>
+                <a:ea typeface="Georgia" pitchFamily="34" charset="-122"/>
+                <a:cs typeface="Georgia" pitchFamily="34" charset="-120"/>
+              </a:rPr>
+              <a:t>Three practices mapped across three normalized dimensions. Native radar handles this cleanly when axes are on a shared scale.</a:t>
+            </a:r>
+            <a:endParaRPr lang="en-US" sz="1300" dirty="0"/>
+          </a:p>
+        </p:txBody>
+      </p:sp>
+      <p:graphicFrame>
+        <p:nvGraphicFramePr>
+          <p:cNvPr id="5" name="Chart 0" descr=""/>
+          <p:cNvGraphicFramePr/>
+          <p:nvPr/>
+        </p:nvGraphicFramePr>
+        <p:xfrm>
+          <a:off x="640080" y="2011680"/>
+          <a:ext cx="5943600" cy="4023360"/>
+        </p:xfrm>
+        <a:graphic xmlns:a="http://schemas.openxmlformats.org/drawingml/2006/main">
+          <a:graphicData uri="http://schemas.openxmlformats.org/drawingml/2006/chart">
+            <c:chart xmlns:c="http://schemas.openxmlformats.org/drawingml/2006/chart" r:id="rId1"/>
+          </a:graphicData>
+        </a:graphic>
+      </p:graphicFrame>
+      <p:sp>
+        <p:nvSpPr>
+          <p:cNvPr id="6" name="Text 3"/>
+          <p:cNvSpPr/>
+          <p:nvPr/>
+        </p:nvSpPr>
+        <p:spPr>
+          <a:xfrm>
+            <a:off x="6766560" y="2103120"/>
+            <a:ext cx="4846320" cy="256032"/>
+          </a:xfrm>
+          <a:prstGeom prst="rect">
+            <a:avLst/>
+          </a:prstGeom>
+          <a:noFill/>
+          <a:ln/>
+        </p:spPr>
+        <p:txBody>
+          <a:bodyPr wrap="square" lIns="0" tIns="0" rIns="0" bIns="0" rtlCol="0" anchor="t"/>
+          <a:lstStyle/>
+          <a:p>
+            <a:pPr indent="0" marL="0">
+              <a:buNone/>
+            </a:pPr>
+            <a:r>
+              <a:rPr lang="en-US" sz="1000" b="1" spc="200" kern="0" dirty="0">
+                <a:solidFill>
+                  <a:srgbClr val="8A7968"/>
+                </a:solidFill>
+                <a:latin typeface="Calibri" pitchFamily="34" charset="0"/>
+                <a:ea typeface="Calibri" pitchFamily="34" charset="-122"/>
+                <a:cs typeface="Calibri" pitchFamily="34" charset="-120"/>
+              </a:rPr>
+              <a:t>READ THE SHAPES</a:t>
+            </a:r>
+            <a:endParaRPr lang="en-US" sz="1000" dirty="0"/>
+          </a:p>
+        </p:txBody>
+      </p:sp>
+      <p:sp>
+        <p:nvSpPr>
+          <p:cNvPr id="7" name="Shape 4"/>
+          <p:cNvSpPr/>
+          <p:nvPr/>
+        </p:nvSpPr>
+        <p:spPr>
+          <a:xfrm>
+            <a:off x="6766560" y="2377440"/>
+            <a:ext cx="1371600" cy="0"/>
+          </a:xfrm>
+          <a:prstGeom prst="line">
+            <a:avLst/>
+          </a:prstGeom>
+          <a:noFill/>
+          <a:ln w="19050">
+            <a:solidFill>
+              <a:srgbClr val="353745"/>
+            </a:solidFill>
+            <a:prstDash val="solid"/>
+          </a:ln>
+        </p:spPr>
+      </p:sp>
+      <p:sp>
+        <p:nvSpPr>
+          <p:cNvPr id="8" name="Shape 5"/>
+          <p:cNvSpPr/>
+          <p:nvPr/>
+        </p:nvSpPr>
+        <p:spPr>
+          <a:xfrm>
+            <a:off x="6766560" y="3044952"/>
+            <a:ext cx="128016" cy="128016"/>
+          </a:xfrm>
+          <a:prstGeom prst="rect">
+            <a:avLst/>
+          </a:prstGeom>
+          <a:solidFill>
+            <a:srgbClr val="2D5F7C"/>
+          </a:solidFill>
+          <a:ln/>
+        </p:spPr>
+      </p:sp>
+      <p:sp>
+        <p:nvSpPr>
+          <p:cNvPr id="9" name="Text 6"/>
+          <p:cNvSpPr/>
+          <p:nvPr/>
+        </p:nvSpPr>
+        <p:spPr>
+          <a:xfrm>
+            <a:off x="7040880" y="2971800"/>
+            <a:ext cx="4572000" cy="256032"/>
+          </a:xfrm>
+          <a:prstGeom prst="rect">
+            <a:avLst/>
+          </a:prstGeom>
+          <a:noFill/>
+          <a:ln/>
+        </p:spPr>
+        <p:txBody>
+          <a:bodyPr wrap="square" lIns="0" tIns="0" rIns="0" bIns="0" rtlCol="0" anchor="t"/>
+          <a:lstStyle/>
+          <a:p>
+            <a:pPr indent="0" marL="0">
+              <a:buNone/>
+            </a:pPr>
+            <a:r>
+              <a:rPr lang="en-US" sz="1100" b="1" spc="100" kern="0" dirty="0">
+                <a:solidFill>
+                  <a:srgbClr val="353745"/>
+                </a:solidFill>
+                <a:latin typeface="Calibri" pitchFamily="34" charset="0"/>
+                <a:ea typeface="Calibri" pitchFamily="34" charset="-122"/>
+                <a:cs typeface="Calibri" pitchFamily="34" charset="-120"/>
+              </a:rPr>
+              <a:t>Strategy</a:t>
+            </a:r>
+            <a:endParaRPr lang="en-US" sz="1100" dirty="0"/>
+          </a:p>
+        </p:txBody>
+      </p:sp>
+      <p:sp>
+        <p:nvSpPr>
+          <p:cNvPr id="10" name="Text 7"/>
+          <p:cNvSpPr/>
+          <p:nvPr/>
+        </p:nvSpPr>
+        <p:spPr>
+          <a:xfrm>
+            <a:off x="7040880" y="3227832"/>
+            <a:ext cx="4572000" cy="822960"/>
+          </a:xfrm>
+          <a:prstGeom prst="rect">
+            <a:avLst/>
+          </a:prstGeom>
+          <a:noFill/>
+          <a:ln/>
+        </p:spPr>
+        <p:txBody>
+          <a:bodyPr wrap="square" lIns="0" tIns="0" rIns="0" bIns="0" rtlCol="0" anchor="t"/>
+          <a:lstStyle/>
+          <a:p>
+            <a:pPr indent="0" marL="0">
+              <a:lnSpc>
+                <a:spcPts val="1400"/>
+              </a:lnSpc>
+              <a:buNone/>
+            </a:pPr>
+            <a:r>
+              <a:rPr lang="en-US" sz="1100" i="1" dirty="0">
+                <a:solidFill>
+                  <a:srgbClr val="8A7968"/>
+                </a:solidFill>
+                <a:latin typeface="Georgia" pitchFamily="34" charset="0"/>
+                <a:ea typeface="Georgia" pitchFamily="34" charset="-122"/>
+                <a:cs typeface="Georgia" pitchFamily="34" charset="-120"/>
+              </a:rPr>
+              <a:t>Largest in 2025, smallest in 2035. Slowest CAGR. A cyclical anchor, not a growth engine.</a:t>
+            </a:r>
+            <a:endParaRPr lang="en-US" sz="1100" dirty="0"/>
+          </a:p>
+        </p:txBody>
+      </p:sp>
+      <p:sp>
+        <p:nvSpPr>
+          <p:cNvPr id="11" name="Shape 8"/>
+          <p:cNvSpPr/>
+          <p:nvPr/>
+        </p:nvSpPr>
+        <p:spPr>
+          <a:xfrm>
+            <a:off x="6766560" y="4096512"/>
+            <a:ext cx="128016" cy="128016"/>
+          </a:xfrm>
+          <a:prstGeom prst="rect">
+            <a:avLst/>
+          </a:prstGeom>
+          <a:solidFill>
+            <a:srgbClr val="BFE5EF"/>
+          </a:solidFill>
+          <a:ln/>
+        </p:spPr>
+      </p:sp>
+      <p:sp>
+        <p:nvSpPr>
+          <p:cNvPr id="12" name="Text 9"/>
+          <p:cNvSpPr/>
+          <p:nvPr/>
+        </p:nvSpPr>
+        <p:spPr>
+          <a:xfrm>
+            <a:off x="7040880" y="4023360"/>
+            <a:ext cx="4572000" cy="256032"/>
+          </a:xfrm>
+          <a:prstGeom prst="rect">
+            <a:avLst/>
+          </a:prstGeom>
+          <a:noFill/>
+          <a:ln/>
+        </p:spPr>
+        <p:txBody>
+          <a:bodyPr wrap="square" lIns="0" tIns="0" rIns="0" bIns="0" rtlCol="0" anchor="t"/>
+          <a:lstStyle/>
+          <a:p>
+            <a:pPr indent="0" marL="0">
+              <a:buNone/>
+            </a:pPr>
+            <a:r>
+              <a:rPr lang="en-US" sz="1100" b="1" spc="100" kern="0" dirty="0">
+                <a:solidFill>
+                  <a:srgbClr val="353745"/>
+                </a:solidFill>
+                <a:latin typeface="Calibri" pitchFamily="34" charset="0"/>
+                <a:ea typeface="Calibri" pitchFamily="34" charset="-122"/>
+                <a:cs typeface="Calibri" pitchFamily="34" charset="-120"/>
+              </a:rPr>
+              <a:t>Operations</a:t>
+            </a:r>
+            <a:endParaRPr lang="en-US" sz="1100" dirty="0"/>
+          </a:p>
+        </p:txBody>
+      </p:sp>
+      <p:sp>
+        <p:nvSpPr>
+          <p:cNvPr id="13" name="Text 10"/>
+          <p:cNvSpPr/>
+          <p:nvPr/>
+        </p:nvSpPr>
+        <p:spPr>
+          <a:xfrm>
+            <a:off x="7040880" y="4279392"/>
+            <a:ext cx="4572000" cy="822960"/>
+          </a:xfrm>
+          <a:prstGeom prst="rect">
+            <a:avLst/>
+          </a:prstGeom>
+          <a:noFill/>
+          <a:ln/>
+        </p:spPr>
+        <p:txBody>
+          <a:bodyPr wrap="square" lIns="0" tIns="0" rIns="0" bIns="0" rtlCol="0" anchor="t"/>
+          <a:lstStyle/>
+          <a:p>
+            <a:pPr indent="0" marL="0">
+              <a:lnSpc>
+                <a:spcPts val="1400"/>
+              </a:lnSpc>
+              <a:buNone/>
+            </a:pPr>
+            <a:r>
+              <a:rPr lang="en-US" sz="1100" i="1" dirty="0">
+                <a:solidFill>
+                  <a:srgbClr val="8A7968"/>
+                </a:solidFill>
+                <a:latin typeface="Georgia" pitchFamily="34" charset="0"/>
+                <a:ea typeface="Georgia" pitchFamily="34" charset="-122"/>
+                <a:cs typeface="Georgia" pitchFamily="34" charset="-120"/>
+              </a:rPr>
+              <a:t>Smallest 2025 start for its eventual size. Strongest 2035 total — the balanced leader.</a:t>
+            </a:r>
+            <a:endParaRPr lang="en-US" sz="1100" dirty="0"/>
+          </a:p>
+        </p:txBody>
+      </p:sp>
+      <p:sp>
+        <p:nvSpPr>
+          <p:cNvPr id="14" name="Shape 11"/>
+          <p:cNvSpPr/>
+          <p:nvPr/>
+        </p:nvSpPr>
+        <p:spPr>
+          <a:xfrm>
+            <a:off x="6766560" y="5148072"/>
+            <a:ext cx="128016" cy="128016"/>
+          </a:xfrm>
+          <a:prstGeom prst="rect">
+            <a:avLst/>
+          </a:prstGeom>
+          <a:solidFill>
+            <a:srgbClr val="B84C65"/>
+          </a:solidFill>
+          <a:ln/>
+        </p:spPr>
+      </p:sp>
+      <p:sp>
+        <p:nvSpPr>
+          <p:cNvPr id="15" name="Text 12"/>
+          <p:cNvSpPr/>
+          <p:nvPr/>
+        </p:nvSpPr>
+        <p:spPr>
+          <a:xfrm>
+            <a:off x="7040880" y="5074920"/>
+            <a:ext cx="4572000" cy="256032"/>
+          </a:xfrm>
+          <a:prstGeom prst="rect">
+            <a:avLst/>
+          </a:prstGeom>
+          <a:noFill/>
+          <a:ln/>
+        </p:spPr>
+        <p:txBody>
+          <a:bodyPr wrap="square" lIns="0" tIns="0" rIns="0" bIns="0" rtlCol="0" anchor="t"/>
+          <a:lstStyle/>
+          <a:p>
+            <a:pPr indent="0" marL="0">
+              <a:buNone/>
+            </a:pPr>
+            <a:r>
+              <a:rPr lang="en-US" sz="1100" b="1" spc="100" kern="0" dirty="0">
+                <a:solidFill>
+                  <a:srgbClr val="353745"/>
+                </a:solidFill>
+                <a:latin typeface="Calibri" pitchFamily="34" charset="0"/>
+                <a:ea typeface="Calibri" pitchFamily="34" charset="-122"/>
+                <a:cs typeface="Calibri" pitchFamily="34" charset="-120"/>
+              </a:rPr>
+              <a:t>Technology</a:t>
+            </a:r>
+            <a:endParaRPr lang="en-US" sz="1100" dirty="0"/>
+          </a:p>
+        </p:txBody>
+      </p:sp>
+      <p:sp>
+        <p:nvSpPr>
+          <p:cNvPr id="16" name="Text 13"/>
+          <p:cNvSpPr/>
+          <p:nvPr/>
+        </p:nvSpPr>
+        <p:spPr>
+          <a:xfrm>
+            <a:off x="7040880" y="5330952"/>
+            <a:ext cx="4572000" cy="822960"/>
+          </a:xfrm>
+          <a:prstGeom prst="rect">
+            <a:avLst/>
+          </a:prstGeom>
+          <a:noFill/>
+          <a:ln/>
+        </p:spPr>
+        <p:txBody>
+          <a:bodyPr wrap="square" lIns="0" tIns="0" rIns="0" bIns="0" rtlCol="0" anchor="t"/>
+          <a:lstStyle/>
+          <a:p>
+            <a:pPr indent="0" marL="0">
+              <a:lnSpc>
+                <a:spcPts val="1400"/>
+              </a:lnSpc>
+              <a:buNone/>
+            </a:pPr>
+            <a:r>
+              <a:rPr lang="en-US" sz="1100" i="1" dirty="0">
+                <a:solidFill>
+                  <a:srgbClr val="8A7968"/>
+                </a:solidFill>
+                <a:latin typeface="Georgia" pitchFamily="34" charset="0"/>
+                <a:ea typeface="Georgia" pitchFamily="34" charset="-122"/>
+                <a:cs typeface="Georgia" pitchFamily="34" charset="-120"/>
+              </a:rPr>
+              <a:t>Smallest start, fastest CAGR. The growth story; still #2 by revenue in 2035.</a:t>
+            </a:r>
+            <a:endParaRPr lang="en-US" sz="1100" dirty="0"/>
+          </a:p>
+        </p:txBody>
+      </p:sp>
+    </p:spTree>
+  </p:cSld>
+  <p:clrMapOvr>
+    <a:masterClrMapping/>
+  </p:clrMapOvr>
+</p:sld>
+</file>
+
 <file path=ppt/slides/slide2.xml><?xml version="1.0" encoding="utf-8"?>
 <p:sld xmlns:a="http://schemas.openxmlformats.org/drawingml/2006/main" xmlns:r="http://schemas.openxmlformats.org/officeDocument/2006/relationships" xmlns:p="http://schemas.openxmlformats.org/presentationml/2006/main">
   <p:cSld name="Slide 2">
@@ -6751,6 +8997,1122 @@
                 <a:cs typeface="Georgia" pitchFamily="34" charset="-120"/>
               </a:rPr>
               <a:t> of EBITDA snap-back.</a:t>
+            </a:r>
+            <a:endParaRPr lang="en-US" sz="1200" dirty="0"/>
+          </a:p>
+        </p:txBody>
+      </p:sp>
+    </p:spTree>
+  </p:cSld>
+  <p:clrMapOvr>
+    <a:masterClrMapping/>
+  </p:clrMapOvr>
+</p:sld>
+</file>
+
+<file path=ppt/slides/slide7.xml><?xml version="1.0" encoding="utf-8"?>
+<p:sld xmlns:a="http://schemas.openxmlformats.org/drawingml/2006/main" xmlns:r="http://schemas.openxmlformats.org/officeDocument/2006/relationships" xmlns:p="http://schemas.openxmlformats.org/presentationml/2006/main">
+  <p:cSld name="Slide 7">
+    <p:bg>
+      <p:bgPr>
+        <a:solidFill>
+          <a:srgbClr val="FFF5ED"/>
+        </a:solidFill>
+      </p:bgPr>
+    </p:bg>
+    <p:spTree>
+      <p:nvGrpSpPr>
+        <p:cNvPr id="1" name=""/>
+        <p:cNvGrpSpPr/>
+        <p:nvPr/>
+      </p:nvGrpSpPr>
+      <p:grpSpPr>
+        <a:xfrm>
+          <a:off x="0" y="0"/>
+          <a:ext cx="0" cy="0"/>
+          <a:chOff x="0" y="0"/>
+          <a:chExt cx="0" cy="0"/>
+        </a:xfrm>
+      </p:grpSpPr>
+      <p:sp>
+        <p:nvSpPr>
+          <p:cNvPr id="2" name="Text 0"/>
+          <p:cNvSpPr/>
+          <p:nvPr/>
+        </p:nvSpPr>
+        <p:spPr>
+          <a:xfrm>
+            <a:off x="548640" y="457200"/>
+            <a:ext cx="7315200" cy="256032"/>
+          </a:xfrm>
+          <a:prstGeom prst="rect">
+            <a:avLst/>
+          </a:prstGeom>
+          <a:noFill/>
+          <a:ln/>
+        </p:spPr>
+        <p:txBody>
+          <a:bodyPr wrap="square" lIns="0" tIns="0" rIns="0" bIns="0" rtlCol="0" anchor="t"/>
+          <a:lstStyle/>
+          <a:p>
+            <a:pPr indent="0" marL="0">
+              <a:buNone/>
+            </a:pPr>
+            <a:r>
+              <a:rPr lang="en-US" sz="1000" b="1" spc="200" kern="0" dirty="0">
+                <a:solidFill>
+                  <a:srgbClr val="8A7968"/>
+                </a:solidFill>
+                <a:latin typeface="Calibri" pitchFamily="34" charset="0"/>
+                <a:ea typeface="Calibri" pitchFamily="34" charset="-122"/>
+                <a:cs typeface="Calibri" pitchFamily="34" charset="-120"/>
+              </a:rPr>
+              <a:t>LINE CHART  ·  NATIVE</a:t>
+            </a:r>
+            <a:endParaRPr lang="en-US" sz="1000" dirty="0"/>
+          </a:p>
+        </p:txBody>
+      </p:sp>
+      <p:sp>
+        <p:nvSpPr>
+          <p:cNvPr id="3" name="Text 1"/>
+          <p:cNvSpPr/>
+          <p:nvPr/>
+        </p:nvSpPr>
+        <p:spPr>
+          <a:xfrm>
+            <a:off x="548640" y="749808"/>
+            <a:ext cx="11091672" cy="640080"/>
+          </a:xfrm>
+          <a:prstGeom prst="rect">
+            <a:avLst/>
+          </a:prstGeom>
+          <a:noFill/>
+          <a:ln/>
+        </p:spPr>
+        <p:txBody>
+          <a:bodyPr wrap="square" lIns="0" tIns="0" rIns="0" bIns="0" rtlCol="0" anchor="t"/>
+          <a:lstStyle/>
+          <a:p>
+            <a:pPr indent="0" marL="0">
+              <a:buNone/>
+            </a:pPr>
+            <a:r>
+              <a:rPr lang="en-US" sz="3000" dirty="0">
+                <a:solidFill>
+                  <a:srgbClr val="353745"/>
+                </a:solidFill>
+                <a:latin typeface="Georgia" pitchFamily="34" charset="0"/>
+                <a:ea typeface="Georgia" pitchFamily="34" charset="-122"/>
+                <a:cs typeface="Georgia" pitchFamily="34" charset="-120"/>
+              </a:rPr>
+              <a:t>EBITDA % compressed, then snapped back.</a:t>
+            </a:r>
+            <a:endParaRPr lang="en-US" sz="3000" dirty="0"/>
+          </a:p>
+        </p:txBody>
+      </p:sp>
+      <p:sp>
+        <p:nvSpPr>
+          <p:cNvPr id="4" name="Text 2"/>
+          <p:cNvSpPr/>
+          <p:nvPr/>
+        </p:nvSpPr>
+        <p:spPr>
+          <a:xfrm>
+            <a:off x="548640" y="1325880"/>
+            <a:ext cx="11091672" cy="292608"/>
+          </a:xfrm>
+          <a:prstGeom prst="rect">
+            <a:avLst/>
+          </a:prstGeom>
+          <a:noFill/>
+          <a:ln/>
+        </p:spPr>
+        <p:txBody>
+          <a:bodyPr wrap="square" lIns="0" tIns="0" rIns="0" bIns="0" rtlCol="0" anchor="t"/>
+          <a:lstStyle/>
+          <a:p>
+            <a:pPr indent="0" marL="0">
+              <a:buNone/>
+            </a:pPr>
+            <a:r>
+              <a:rPr lang="en-US" sz="1300" i="1" dirty="0">
+                <a:solidFill>
+                  <a:srgbClr val="353745"/>
+                </a:solidFill>
+                <a:latin typeface="Georgia" pitchFamily="34" charset="0"/>
+                <a:ea typeface="Georgia" pitchFamily="34" charset="-122"/>
+                <a:cs typeface="Georgia" pitchFamily="34" charset="-120"/>
+              </a:rPr>
+              <a:t>Native pptxgenjs line chart. Saperia palette, axes, gridlines. Callout highlights the trough. No overlay — native handles this type cleanly.</a:t>
+            </a:r>
+            <a:endParaRPr lang="en-US" sz="1300" dirty="0"/>
+          </a:p>
+        </p:txBody>
+      </p:sp>
+      <p:graphicFrame>
+        <p:nvGraphicFramePr>
+          <p:cNvPr id="5" name="Chart 0" descr=""/>
+          <p:cNvGraphicFramePr/>
+          <p:nvPr/>
+        </p:nvGraphicFramePr>
+        <p:xfrm>
+          <a:off x="640080" y="2011680"/>
+          <a:ext cx="10908792" cy="4023360"/>
+        </p:xfrm>
+        <a:graphic xmlns:a="http://schemas.openxmlformats.org/drawingml/2006/main">
+          <a:graphicData uri="http://schemas.openxmlformats.org/drawingml/2006/chart">
+            <c:chart xmlns:c="http://schemas.openxmlformats.org/drawingml/2006/chart" r:id="rId1"/>
+          </a:graphicData>
+        </a:graphic>
+      </p:graphicFrame>
+      <p:sp>
+        <p:nvSpPr>
+          <p:cNvPr id="6" name="Text 3"/>
+          <p:cNvSpPr/>
+          <p:nvPr/>
+        </p:nvSpPr>
+        <p:spPr>
+          <a:xfrm>
+            <a:off x="548640" y="6172200"/>
+            <a:ext cx="11091672" cy="292608"/>
+          </a:xfrm>
+          <a:prstGeom prst="rect">
+            <a:avLst/>
+          </a:prstGeom>
+          <a:noFill/>
+          <a:ln/>
+        </p:spPr>
+        <p:txBody>
+          <a:bodyPr wrap="square" lIns="0" tIns="0" rIns="0" bIns="0" rtlCol="0" anchor="t"/>
+          <a:lstStyle/>
+          <a:p>
+            <a:pPr indent="0" marL="0">
+              <a:buNone/>
+            </a:pPr>
+            <a:r>
+              <a:rPr lang="en-US" sz="1200" i="1" dirty="0">
+                <a:solidFill>
+                  <a:srgbClr val="353745"/>
+                </a:solidFill>
+                <a:latin typeface="Georgia" pitchFamily="34" charset="0"/>
+                <a:ea typeface="Georgia" pitchFamily="34" charset="-122"/>
+                <a:cs typeface="Georgia" pitchFamily="34" charset="-120"/>
+              </a:rPr>
+              <a:t>2029 trough: </a:t>
+            </a:r>
+            <a:pPr indent="0" marL="0">
+              <a:buNone/>
+            </a:pPr>
+            <a:r>
+              <a:rPr lang="en-US" sz="1200" b="1" i="1" dirty="0">
+                <a:solidFill>
+                  <a:srgbClr val="353745"/>
+                </a:solidFill>
+                <a:highlight>
+                  <a:srgbClr val="C1FF72"/>
+                </a:highlight>
+                <a:latin typeface="Georgia" pitchFamily="34" charset="0"/>
+                <a:ea typeface="Georgia" pitchFamily="34" charset="-122"/>
+                <a:cs typeface="Georgia" pitchFamily="34" charset="-120"/>
+              </a:rPr>
+              <a:t>15.3%</a:t>
+            </a:r>
+            <a:pPr indent="0" marL="0">
+              <a:buNone/>
+            </a:pPr>
+            <a:r>
+              <a:rPr lang="en-US" sz="1200" i="1" dirty="0">
+                <a:solidFill>
+                  <a:srgbClr val="353745"/>
+                </a:solidFill>
+                <a:latin typeface="Georgia" pitchFamily="34" charset="0"/>
+                <a:ea typeface="Georgia" pitchFamily="34" charset="-122"/>
+                <a:cs typeface="Georgia" pitchFamily="34" charset="-120"/>
+              </a:rPr>
+              <a:t> — a 12-point compression from 2025. Back to 33% by 2030.</a:t>
+            </a:r>
+            <a:endParaRPr lang="en-US" sz="1200" dirty="0"/>
+          </a:p>
+        </p:txBody>
+      </p:sp>
+    </p:spTree>
+  </p:cSld>
+  <p:clrMapOvr>
+    <a:masterClrMapping/>
+  </p:clrMapOvr>
+</p:sld>
+</file>
+
+<file path=ppt/slides/slide8.xml><?xml version="1.0" encoding="utf-8"?>
+<p:sld xmlns:a="http://schemas.openxmlformats.org/drawingml/2006/main" xmlns:r="http://schemas.openxmlformats.org/officeDocument/2006/relationships" xmlns:p="http://schemas.openxmlformats.org/presentationml/2006/main">
+  <p:cSld name="Slide 8">
+    <p:bg>
+      <p:bgPr>
+        <a:solidFill>
+          <a:srgbClr val="FFF5ED"/>
+        </a:solidFill>
+      </p:bgPr>
+    </p:bg>
+    <p:spTree>
+      <p:nvGrpSpPr>
+        <p:cNvPr id="1" name=""/>
+        <p:cNvGrpSpPr/>
+        <p:nvPr/>
+      </p:nvGrpSpPr>
+      <p:grpSpPr>
+        <a:xfrm>
+          <a:off x="0" y="0"/>
+          <a:ext cx="0" cy="0"/>
+          <a:chOff x="0" y="0"/>
+          <a:chExt cx="0" cy="0"/>
+        </a:xfrm>
+      </p:grpSpPr>
+      <p:sp>
+        <p:nvSpPr>
+          <p:cNvPr id="2" name="Text 0"/>
+          <p:cNvSpPr/>
+          <p:nvPr/>
+        </p:nvSpPr>
+        <p:spPr>
+          <a:xfrm>
+            <a:off x="548640" y="457200"/>
+            <a:ext cx="7315200" cy="256032"/>
+          </a:xfrm>
+          <a:prstGeom prst="rect">
+            <a:avLst/>
+          </a:prstGeom>
+          <a:noFill/>
+          <a:ln/>
+        </p:spPr>
+        <p:txBody>
+          <a:bodyPr wrap="square" lIns="0" tIns="0" rIns="0" bIns="0" rtlCol="0" anchor="t"/>
+          <a:lstStyle/>
+          <a:p>
+            <a:pPr indent="0" marL="0">
+              <a:buNone/>
+            </a:pPr>
+            <a:r>
+              <a:rPr lang="en-US" sz="1000" b="1" spc="200" kern="0" dirty="0">
+                <a:solidFill>
+                  <a:srgbClr val="8A7968"/>
+                </a:solidFill>
+                <a:latin typeface="Calibri" pitchFamily="34" charset="0"/>
+                <a:ea typeface="Calibri" pitchFamily="34" charset="-122"/>
+                <a:cs typeface="Calibri" pitchFamily="34" charset="-120"/>
+              </a:rPr>
+              <a:t>DONUT CHART  ·  NATIVE</a:t>
+            </a:r>
+            <a:endParaRPr lang="en-US" sz="1000" dirty="0"/>
+          </a:p>
+        </p:txBody>
+      </p:sp>
+      <p:sp>
+        <p:nvSpPr>
+          <p:cNvPr id="3" name="Text 1"/>
+          <p:cNvSpPr/>
+          <p:nvPr/>
+        </p:nvSpPr>
+        <p:spPr>
+          <a:xfrm>
+            <a:off x="548640" y="749808"/>
+            <a:ext cx="11091672" cy="640080"/>
+          </a:xfrm>
+          <a:prstGeom prst="rect">
+            <a:avLst/>
+          </a:prstGeom>
+          <a:noFill/>
+          <a:ln/>
+        </p:spPr>
+        <p:txBody>
+          <a:bodyPr wrap="square" lIns="0" tIns="0" rIns="0" bIns="0" rtlCol="0" anchor="t"/>
+          <a:lstStyle/>
+          <a:p>
+            <a:pPr indent="0" marL="0">
+              <a:buNone/>
+            </a:pPr>
+            <a:r>
+              <a:rPr lang="en-US" sz="3000" dirty="0">
+                <a:solidFill>
+                  <a:srgbClr val="353745"/>
+                </a:solidFill>
+                <a:latin typeface="Georgia" pitchFamily="34" charset="0"/>
+                <a:ea typeface="Georgia" pitchFamily="34" charset="-122"/>
+                <a:cs typeface="Georgia" pitchFamily="34" charset="-120"/>
+              </a:rPr>
+              <a:t>Three practices, split close to thirds by 2035.</a:t>
+            </a:r>
+            <a:endParaRPr lang="en-US" sz="3000" dirty="0"/>
+          </a:p>
+        </p:txBody>
+      </p:sp>
+      <p:sp>
+        <p:nvSpPr>
+          <p:cNvPr id="4" name="Text 2"/>
+          <p:cNvSpPr/>
+          <p:nvPr/>
+        </p:nvSpPr>
+        <p:spPr>
+          <a:xfrm>
+            <a:off x="548640" y="1325880"/>
+            <a:ext cx="11091672" cy="292608"/>
+          </a:xfrm>
+          <a:prstGeom prst="rect">
+            <a:avLst/>
+          </a:prstGeom>
+          <a:noFill/>
+          <a:ln/>
+        </p:spPr>
+        <p:txBody>
+          <a:bodyPr wrap="square" lIns="0" tIns="0" rIns="0" bIns="0" rtlCol="0" anchor="t"/>
+          <a:lstStyle/>
+          <a:p>
+            <a:pPr indent="0" marL="0">
+              <a:buNone/>
+            </a:pPr>
+            <a:r>
+              <a:rPr lang="en-US" sz="1300" i="1" dirty="0">
+                <a:solidFill>
+                  <a:srgbClr val="353745"/>
+                </a:solidFill>
+                <a:latin typeface="Georgia" pitchFamily="34" charset="0"/>
+                <a:ea typeface="Georgia" pitchFamily="34" charset="-122"/>
+                <a:cs typeface="Georgia" pitchFamily="34" charset="-120"/>
+              </a:rPr>
+              <a:t>Native pptxgenjs doughnut. Text callouts on the right replace native labels (the common native weakness).</a:t>
+            </a:r>
+            <a:endParaRPr lang="en-US" sz="1300" dirty="0"/>
+          </a:p>
+        </p:txBody>
+      </p:sp>
+      <p:graphicFrame>
+        <p:nvGraphicFramePr>
+          <p:cNvPr id="5" name="Chart 0" descr=""/>
+          <p:cNvGraphicFramePr/>
+          <p:nvPr/>
+        </p:nvGraphicFramePr>
+        <p:xfrm>
+          <a:off x="640080" y="2011680"/>
+          <a:ext cx="5943600" cy="4023360"/>
+        </p:xfrm>
+        <a:graphic xmlns:a="http://schemas.openxmlformats.org/drawingml/2006/main">
+          <a:graphicData uri="http://schemas.openxmlformats.org/drawingml/2006/chart">
+            <c:chart xmlns:c="http://schemas.openxmlformats.org/drawingml/2006/chart" r:id="rId1"/>
+          </a:graphicData>
+        </a:graphic>
+      </p:graphicFrame>
+      <p:sp>
+        <p:nvSpPr>
+          <p:cNvPr id="6" name="Text 3"/>
+          <p:cNvSpPr/>
+          <p:nvPr/>
+        </p:nvSpPr>
+        <p:spPr>
+          <a:xfrm>
+            <a:off x="6766560" y="2103120"/>
+            <a:ext cx="4846320" cy="256032"/>
+          </a:xfrm>
+          <a:prstGeom prst="rect">
+            <a:avLst/>
+          </a:prstGeom>
+          <a:noFill/>
+          <a:ln/>
+        </p:spPr>
+        <p:txBody>
+          <a:bodyPr wrap="square" lIns="0" tIns="0" rIns="0" bIns="0" rtlCol="0" anchor="t"/>
+          <a:lstStyle/>
+          <a:p>
+            <a:pPr indent="0" marL="0">
+              <a:buNone/>
+            </a:pPr>
+            <a:r>
+              <a:rPr lang="en-US" sz="1000" b="1" spc="200" kern="0" dirty="0">
+                <a:solidFill>
+                  <a:srgbClr val="8A7968"/>
+                </a:solidFill>
+                <a:latin typeface="Calibri" pitchFamily="34" charset="0"/>
+                <a:ea typeface="Calibri" pitchFamily="34" charset="-122"/>
+                <a:cs typeface="Calibri" pitchFamily="34" charset="-120"/>
+              </a:rPr>
+              <a:t>2035 TOTAL</a:t>
+            </a:r>
+            <a:endParaRPr lang="en-US" sz="1000" dirty="0"/>
+          </a:p>
+        </p:txBody>
+      </p:sp>
+      <p:sp>
+        <p:nvSpPr>
+          <p:cNvPr id="7" name="Shape 4"/>
+          <p:cNvSpPr/>
+          <p:nvPr/>
+        </p:nvSpPr>
+        <p:spPr>
+          <a:xfrm>
+            <a:off x="6766560" y="2377440"/>
+            <a:ext cx="1371600" cy="0"/>
+          </a:xfrm>
+          <a:prstGeom prst="line">
+            <a:avLst/>
+          </a:prstGeom>
+          <a:noFill/>
+          <a:ln w="19050">
+            <a:solidFill>
+              <a:srgbClr val="353745"/>
+            </a:solidFill>
+            <a:prstDash val="solid"/>
+          </a:ln>
+        </p:spPr>
+      </p:sp>
+      <p:sp>
+        <p:nvSpPr>
+          <p:cNvPr id="8" name="Text 5"/>
+          <p:cNvSpPr/>
+          <p:nvPr/>
+        </p:nvSpPr>
+        <p:spPr>
+          <a:xfrm>
+            <a:off x="6766560" y="2468880"/>
+            <a:ext cx="4846320" cy="822960"/>
+          </a:xfrm>
+          <a:prstGeom prst="rect">
+            <a:avLst/>
+          </a:prstGeom>
+          <a:noFill/>
+          <a:ln/>
+        </p:spPr>
+        <p:txBody>
+          <a:bodyPr wrap="square" lIns="0" tIns="0" rIns="0" bIns="0" rtlCol="0" anchor="t"/>
+          <a:lstStyle/>
+          <a:p>
+            <a:pPr indent="0" marL="0">
+              <a:buNone/>
+            </a:pPr>
+            <a:r>
+              <a:rPr lang="en-US" sz="4400" dirty="0">
+                <a:solidFill>
+                  <a:srgbClr val="353745"/>
+                </a:solidFill>
+                <a:latin typeface="Georgia" pitchFamily="34" charset="0"/>
+                <a:ea typeface="Georgia" pitchFamily="34" charset="-122"/>
+                <a:cs typeface="Georgia" pitchFamily="34" charset="-120"/>
+              </a:rPr>
+              <a:t>$58.7M</a:t>
+            </a:r>
+            <a:endParaRPr lang="en-US" sz="4400" dirty="0"/>
+          </a:p>
+        </p:txBody>
+      </p:sp>
+      <p:sp>
+        <p:nvSpPr>
+          <p:cNvPr id="9" name="Shape 6"/>
+          <p:cNvSpPr/>
+          <p:nvPr/>
+        </p:nvSpPr>
+        <p:spPr>
+          <a:xfrm>
+            <a:off x="6766560" y="3639312"/>
+            <a:ext cx="128016" cy="128016"/>
+          </a:xfrm>
+          <a:prstGeom prst="rect">
+            <a:avLst/>
+          </a:prstGeom>
+          <a:solidFill>
+            <a:srgbClr val="BFE5EF"/>
+          </a:solidFill>
+          <a:ln/>
+        </p:spPr>
+      </p:sp>
+      <p:sp>
+        <p:nvSpPr>
+          <p:cNvPr id="10" name="Text 7"/>
+          <p:cNvSpPr/>
+          <p:nvPr/>
+        </p:nvSpPr>
+        <p:spPr>
+          <a:xfrm>
+            <a:off x="7040880" y="3566160"/>
+            <a:ext cx="4572000" cy="256032"/>
+          </a:xfrm>
+          <a:prstGeom prst="rect">
+            <a:avLst/>
+          </a:prstGeom>
+          <a:noFill/>
+          <a:ln/>
+        </p:spPr>
+        <p:txBody>
+          <a:bodyPr wrap="square" lIns="0" tIns="0" rIns="0" bIns="0" rtlCol="0" anchor="t"/>
+          <a:lstStyle/>
+          <a:p>
+            <a:pPr indent="0" marL="0">
+              <a:buNone/>
+            </a:pPr>
+            <a:r>
+              <a:rPr lang="en-US" sz="1100" b="1" spc="100" kern="0" dirty="0">
+                <a:solidFill>
+                  <a:srgbClr val="353745"/>
+                </a:solidFill>
+                <a:latin typeface="Calibri" pitchFamily="34" charset="0"/>
+                <a:ea typeface="Calibri" pitchFamily="34" charset="-122"/>
+                <a:cs typeface="Calibri" pitchFamily="34" charset="-120"/>
+              </a:rPr>
+              <a:t>Operations</a:t>
+            </a:r>
+            <a:endParaRPr lang="en-US" sz="1100" dirty="0"/>
+          </a:p>
+        </p:txBody>
+      </p:sp>
+      <p:sp>
+        <p:nvSpPr>
+          <p:cNvPr id="11" name="Text 8"/>
+          <p:cNvSpPr/>
+          <p:nvPr/>
+        </p:nvSpPr>
+        <p:spPr>
+          <a:xfrm>
+            <a:off x="7040880" y="3822192"/>
+            <a:ext cx="4572000" cy="256032"/>
+          </a:xfrm>
+          <a:prstGeom prst="rect">
+            <a:avLst/>
+          </a:prstGeom>
+          <a:noFill/>
+          <a:ln/>
+        </p:spPr>
+        <p:txBody>
+          <a:bodyPr wrap="square" lIns="0" tIns="0" rIns="0" bIns="0" rtlCol="0" anchor="t"/>
+          <a:lstStyle/>
+          <a:p>
+            <a:pPr indent="0" marL="0">
+              <a:buNone/>
+            </a:pPr>
+            <a:r>
+              <a:rPr lang="en-US" sz="1200" dirty="0">
+                <a:solidFill>
+                  <a:srgbClr val="353745"/>
+                </a:solidFill>
+                <a:latin typeface="Georgia" pitchFamily="34" charset="0"/>
+                <a:ea typeface="Georgia" pitchFamily="34" charset="-122"/>
+                <a:cs typeface="Georgia" pitchFamily="34" charset="-120"/>
+              </a:rPr>
+              <a:t>$20.6M  ·  35%</a:t>
+            </a:r>
+            <a:endParaRPr lang="en-US" sz="1200" dirty="0"/>
+          </a:p>
+        </p:txBody>
+      </p:sp>
+      <p:sp>
+        <p:nvSpPr>
+          <p:cNvPr id="12" name="Text 9"/>
+          <p:cNvSpPr/>
+          <p:nvPr/>
+        </p:nvSpPr>
+        <p:spPr>
+          <a:xfrm>
+            <a:off x="7040880" y="4069080"/>
+            <a:ext cx="4572000" cy="274320"/>
+          </a:xfrm>
+          <a:prstGeom prst="rect">
+            <a:avLst/>
+          </a:prstGeom>
+          <a:noFill/>
+          <a:ln/>
+        </p:spPr>
+        <p:txBody>
+          <a:bodyPr wrap="square" lIns="0" tIns="0" rIns="0" bIns="0" rtlCol="0" anchor="t"/>
+          <a:lstStyle/>
+          <a:p>
+            <a:pPr indent="0" marL="0">
+              <a:buNone/>
+            </a:pPr>
+            <a:r>
+              <a:rPr lang="en-US" sz="1100" i="1" dirty="0">
+                <a:solidFill>
+                  <a:srgbClr val="8A7968"/>
+                </a:solidFill>
+                <a:latin typeface="Georgia" pitchFamily="34" charset="0"/>
+                <a:ea typeface="Georgia" pitchFamily="34" charset="-122"/>
+                <a:cs typeface="Georgia" pitchFamily="34" charset="-120"/>
+              </a:rPr>
+              <a:t>Leader by 2035</a:t>
+            </a:r>
+            <a:endParaRPr lang="en-US" sz="1100" dirty="0"/>
+          </a:p>
+        </p:txBody>
+      </p:sp>
+      <p:sp>
+        <p:nvSpPr>
+          <p:cNvPr id="13" name="Shape 10"/>
+          <p:cNvSpPr/>
+          <p:nvPr/>
+        </p:nvSpPr>
+        <p:spPr>
+          <a:xfrm>
+            <a:off x="6766560" y="4553712"/>
+            <a:ext cx="128016" cy="128016"/>
+          </a:xfrm>
+          <a:prstGeom prst="rect">
+            <a:avLst/>
+          </a:prstGeom>
+          <a:solidFill>
+            <a:srgbClr val="B84C65"/>
+          </a:solidFill>
+          <a:ln/>
+        </p:spPr>
+      </p:sp>
+      <p:sp>
+        <p:nvSpPr>
+          <p:cNvPr id="14" name="Text 11"/>
+          <p:cNvSpPr/>
+          <p:nvPr/>
+        </p:nvSpPr>
+        <p:spPr>
+          <a:xfrm>
+            <a:off x="7040880" y="4480560"/>
+            <a:ext cx="4572000" cy="256032"/>
+          </a:xfrm>
+          <a:prstGeom prst="rect">
+            <a:avLst/>
+          </a:prstGeom>
+          <a:noFill/>
+          <a:ln/>
+        </p:spPr>
+        <p:txBody>
+          <a:bodyPr wrap="square" lIns="0" tIns="0" rIns="0" bIns="0" rtlCol="0" anchor="t"/>
+          <a:lstStyle/>
+          <a:p>
+            <a:pPr indent="0" marL="0">
+              <a:buNone/>
+            </a:pPr>
+            <a:r>
+              <a:rPr lang="en-US" sz="1100" b="1" spc="100" kern="0" dirty="0">
+                <a:solidFill>
+                  <a:srgbClr val="353745"/>
+                </a:solidFill>
+                <a:latin typeface="Calibri" pitchFamily="34" charset="0"/>
+                <a:ea typeface="Calibri" pitchFamily="34" charset="-122"/>
+                <a:cs typeface="Calibri" pitchFamily="34" charset="-120"/>
+              </a:rPr>
+              <a:t>Technology</a:t>
+            </a:r>
+            <a:endParaRPr lang="en-US" sz="1100" dirty="0"/>
+          </a:p>
+        </p:txBody>
+      </p:sp>
+      <p:sp>
+        <p:nvSpPr>
+          <p:cNvPr id="15" name="Text 12"/>
+          <p:cNvSpPr/>
+          <p:nvPr/>
+        </p:nvSpPr>
+        <p:spPr>
+          <a:xfrm>
+            <a:off x="7040880" y="4736592"/>
+            <a:ext cx="4572000" cy="256032"/>
+          </a:xfrm>
+          <a:prstGeom prst="rect">
+            <a:avLst/>
+          </a:prstGeom>
+          <a:noFill/>
+          <a:ln/>
+        </p:spPr>
+        <p:txBody>
+          <a:bodyPr wrap="square" lIns="0" tIns="0" rIns="0" bIns="0" rtlCol="0" anchor="t"/>
+          <a:lstStyle/>
+          <a:p>
+            <a:pPr indent="0" marL="0">
+              <a:buNone/>
+            </a:pPr>
+            <a:r>
+              <a:rPr lang="en-US" sz="1200" dirty="0">
+                <a:solidFill>
+                  <a:srgbClr val="353745"/>
+                </a:solidFill>
+                <a:latin typeface="Georgia" pitchFamily="34" charset="0"/>
+                <a:ea typeface="Georgia" pitchFamily="34" charset="-122"/>
+                <a:cs typeface="Georgia" pitchFamily="34" charset="-120"/>
+              </a:rPr>
+              <a:t>$19.9M  ·  34%</a:t>
+            </a:r>
+            <a:endParaRPr lang="en-US" sz="1200" dirty="0"/>
+          </a:p>
+        </p:txBody>
+      </p:sp>
+      <p:sp>
+        <p:nvSpPr>
+          <p:cNvPr id="16" name="Text 13"/>
+          <p:cNvSpPr/>
+          <p:nvPr/>
+        </p:nvSpPr>
+        <p:spPr>
+          <a:xfrm>
+            <a:off x="7040880" y="4983480"/>
+            <a:ext cx="4572000" cy="274320"/>
+          </a:xfrm>
+          <a:prstGeom prst="rect">
+            <a:avLst/>
+          </a:prstGeom>
+          <a:noFill/>
+          <a:ln/>
+        </p:spPr>
+        <p:txBody>
+          <a:bodyPr wrap="square" lIns="0" tIns="0" rIns="0" bIns="0" rtlCol="0" anchor="t"/>
+          <a:lstStyle/>
+          <a:p>
+            <a:pPr indent="0" marL="0">
+              <a:buNone/>
+            </a:pPr>
+            <a:r>
+              <a:rPr lang="en-US" sz="1100" i="1" dirty="0">
+                <a:solidFill>
+                  <a:srgbClr val="8A7968"/>
+                </a:solidFill>
+                <a:latin typeface="Georgia" pitchFamily="34" charset="0"/>
+                <a:ea typeface="Georgia" pitchFamily="34" charset="-122"/>
+                <a:cs typeface="Georgia" pitchFamily="34" charset="-120"/>
+              </a:rPr>
+              <a:t>Fastest grower</a:t>
+            </a:r>
+            <a:endParaRPr lang="en-US" sz="1100" dirty="0"/>
+          </a:p>
+        </p:txBody>
+      </p:sp>
+      <p:sp>
+        <p:nvSpPr>
+          <p:cNvPr id="17" name="Shape 14"/>
+          <p:cNvSpPr/>
+          <p:nvPr/>
+        </p:nvSpPr>
+        <p:spPr>
+          <a:xfrm>
+            <a:off x="6766560" y="5468112"/>
+            <a:ext cx="128016" cy="128016"/>
+          </a:xfrm>
+          <a:prstGeom prst="rect">
+            <a:avLst/>
+          </a:prstGeom>
+          <a:solidFill>
+            <a:srgbClr val="2D5F7C"/>
+          </a:solidFill>
+          <a:ln/>
+        </p:spPr>
+      </p:sp>
+      <p:sp>
+        <p:nvSpPr>
+          <p:cNvPr id="18" name="Text 15"/>
+          <p:cNvSpPr/>
+          <p:nvPr/>
+        </p:nvSpPr>
+        <p:spPr>
+          <a:xfrm>
+            <a:off x="7040880" y="5394960"/>
+            <a:ext cx="4572000" cy="256032"/>
+          </a:xfrm>
+          <a:prstGeom prst="rect">
+            <a:avLst/>
+          </a:prstGeom>
+          <a:noFill/>
+          <a:ln/>
+        </p:spPr>
+        <p:txBody>
+          <a:bodyPr wrap="square" lIns="0" tIns="0" rIns="0" bIns="0" rtlCol="0" anchor="t"/>
+          <a:lstStyle/>
+          <a:p>
+            <a:pPr indent="0" marL="0">
+              <a:buNone/>
+            </a:pPr>
+            <a:r>
+              <a:rPr lang="en-US" sz="1100" b="1" spc="100" kern="0" dirty="0">
+                <a:solidFill>
+                  <a:srgbClr val="353745"/>
+                </a:solidFill>
+                <a:latin typeface="Calibri" pitchFamily="34" charset="0"/>
+                <a:ea typeface="Calibri" pitchFamily="34" charset="-122"/>
+                <a:cs typeface="Calibri" pitchFamily="34" charset="-120"/>
+              </a:rPr>
+              <a:t>Strategy</a:t>
+            </a:r>
+            <a:endParaRPr lang="en-US" sz="1100" dirty="0"/>
+          </a:p>
+        </p:txBody>
+      </p:sp>
+      <p:sp>
+        <p:nvSpPr>
+          <p:cNvPr id="19" name="Text 16"/>
+          <p:cNvSpPr/>
+          <p:nvPr/>
+        </p:nvSpPr>
+        <p:spPr>
+          <a:xfrm>
+            <a:off x="7040880" y="5650992"/>
+            <a:ext cx="4572000" cy="256032"/>
+          </a:xfrm>
+          <a:prstGeom prst="rect">
+            <a:avLst/>
+          </a:prstGeom>
+          <a:noFill/>
+          <a:ln/>
+        </p:spPr>
+        <p:txBody>
+          <a:bodyPr wrap="square" lIns="0" tIns="0" rIns="0" bIns="0" rtlCol="0" anchor="t"/>
+          <a:lstStyle/>
+          <a:p>
+            <a:pPr indent="0" marL="0">
+              <a:buNone/>
+            </a:pPr>
+            <a:r>
+              <a:rPr lang="en-US" sz="1200" dirty="0">
+                <a:solidFill>
+                  <a:srgbClr val="353745"/>
+                </a:solidFill>
+                <a:latin typeface="Georgia" pitchFamily="34" charset="0"/>
+                <a:ea typeface="Georgia" pitchFamily="34" charset="-122"/>
+                <a:cs typeface="Georgia" pitchFamily="34" charset="-120"/>
+              </a:rPr>
+              <a:t>$18.1M  ·  31%</a:t>
+            </a:r>
+            <a:endParaRPr lang="en-US" sz="1200" dirty="0"/>
+          </a:p>
+        </p:txBody>
+      </p:sp>
+      <p:sp>
+        <p:nvSpPr>
+          <p:cNvPr id="20" name="Text 17"/>
+          <p:cNvSpPr/>
+          <p:nvPr/>
+        </p:nvSpPr>
+        <p:spPr>
+          <a:xfrm>
+            <a:off x="7040880" y="5897880"/>
+            <a:ext cx="4572000" cy="274320"/>
+          </a:xfrm>
+          <a:prstGeom prst="rect">
+            <a:avLst/>
+          </a:prstGeom>
+          <a:noFill/>
+          <a:ln/>
+        </p:spPr>
+        <p:txBody>
+          <a:bodyPr wrap="square" lIns="0" tIns="0" rIns="0" bIns="0" rtlCol="0" anchor="t"/>
+          <a:lstStyle/>
+          <a:p>
+            <a:pPr indent="0" marL="0">
+              <a:buNone/>
+            </a:pPr>
+            <a:r>
+              <a:rPr lang="en-US" sz="1100" i="1" dirty="0">
+                <a:solidFill>
+                  <a:srgbClr val="8A7968"/>
+                </a:solidFill>
+                <a:latin typeface="Georgia" pitchFamily="34" charset="0"/>
+                <a:ea typeface="Georgia" pitchFamily="34" charset="-122"/>
+                <a:cs typeface="Georgia" pitchFamily="34" charset="-120"/>
+              </a:rPr>
+              <a:t>Cyclical anchor</a:t>
+            </a:r>
+            <a:endParaRPr lang="en-US" sz="1100" dirty="0"/>
+          </a:p>
+        </p:txBody>
+      </p:sp>
+    </p:spTree>
+  </p:cSld>
+  <p:clrMapOvr>
+    <a:masterClrMapping/>
+  </p:clrMapOvr>
+</p:sld>
+</file>
+
+<file path=ppt/slides/slide9.xml><?xml version="1.0" encoding="utf-8"?>
+<p:sld xmlns:a="http://schemas.openxmlformats.org/drawingml/2006/main" xmlns:r="http://schemas.openxmlformats.org/officeDocument/2006/relationships" xmlns:p="http://schemas.openxmlformats.org/presentationml/2006/main">
+  <p:cSld name="Slide 9">
+    <p:bg>
+      <p:bgPr>
+        <a:solidFill>
+          <a:srgbClr val="FFF5ED"/>
+        </a:solidFill>
+      </p:bgPr>
+    </p:bg>
+    <p:spTree>
+      <p:nvGrpSpPr>
+        <p:cNvPr id="1" name=""/>
+        <p:cNvGrpSpPr/>
+        <p:nvPr/>
+      </p:nvGrpSpPr>
+      <p:grpSpPr>
+        <a:xfrm>
+          <a:off x="0" y="0"/>
+          <a:ext cx="0" cy="0"/>
+          <a:chOff x="0" y="0"/>
+          <a:chExt cx="0" cy="0"/>
+        </a:xfrm>
+      </p:grpSpPr>
+      <p:sp>
+        <p:nvSpPr>
+          <p:cNvPr id="2" name="Text 0"/>
+          <p:cNvSpPr/>
+          <p:nvPr/>
+        </p:nvSpPr>
+        <p:spPr>
+          <a:xfrm>
+            <a:off x="548640" y="457200"/>
+            <a:ext cx="7315200" cy="256032"/>
+          </a:xfrm>
+          <a:prstGeom prst="rect">
+            <a:avLst/>
+          </a:prstGeom>
+          <a:noFill/>
+          <a:ln/>
+        </p:spPr>
+        <p:txBody>
+          <a:bodyPr wrap="square" lIns="0" tIns="0" rIns="0" bIns="0" rtlCol="0" anchor="t"/>
+          <a:lstStyle/>
+          <a:p>
+            <a:pPr indent="0" marL="0">
+              <a:buNone/>
+            </a:pPr>
+            <a:r>
+              <a:rPr lang="en-US" sz="1000" b="1" spc="200" kern="0" dirty="0">
+                <a:solidFill>
+                  <a:srgbClr val="8A7968"/>
+                </a:solidFill>
+                <a:latin typeface="Calibri" pitchFamily="34" charset="0"/>
+                <a:ea typeface="Calibri" pitchFamily="34" charset="-122"/>
+                <a:cs typeface="Calibri" pitchFamily="34" charset="-120"/>
+              </a:rPr>
+              <a:t>SCATTER PLOT  ·  NATIVE</a:t>
+            </a:r>
+            <a:endParaRPr lang="en-US" sz="1000" dirty="0"/>
+          </a:p>
+        </p:txBody>
+      </p:sp>
+      <p:sp>
+        <p:nvSpPr>
+          <p:cNvPr id="3" name="Text 1"/>
+          <p:cNvSpPr/>
+          <p:nvPr/>
+        </p:nvSpPr>
+        <p:spPr>
+          <a:xfrm>
+            <a:off x="548640" y="749808"/>
+            <a:ext cx="11091672" cy="640080"/>
+          </a:xfrm>
+          <a:prstGeom prst="rect">
+            <a:avLst/>
+          </a:prstGeom>
+          <a:noFill/>
+          <a:ln/>
+        </p:spPr>
+        <p:txBody>
+          <a:bodyPr wrap="square" lIns="0" tIns="0" rIns="0" bIns="0" rtlCol="0" anchor="t"/>
+          <a:lstStyle/>
+          <a:p>
+            <a:pPr indent="0" marL="0">
+              <a:buNone/>
+            </a:pPr>
+            <a:r>
+              <a:rPr lang="en-US" sz="3000" dirty="0">
+                <a:solidFill>
+                  <a:srgbClr val="353745"/>
+                </a:solidFill>
+                <a:latin typeface="Georgia" pitchFamily="34" charset="0"/>
+                <a:ea typeface="Georgia" pitchFamily="34" charset="-122"/>
+                <a:cs typeface="Georgia" pitchFamily="34" charset="-120"/>
+              </a:rPr>
+              <a:t>Utilization predicts EBITDA margin.</a:t>
+            </a:r>
+            <a:endParaRPr lang="en-US" sz="3000" dirty="0"/>
+          </a:p>
+        </p:txBody>
+      </p:sp>
+      <p:sp>
+        <p:nvSpPr>
+          <p:cNvPr id="4" name="Text 2"/>
+          <p:cNvSpPr/>
+          <p:nvPr/>
+        </p:nvSpPr>
+        <p:spPr>
+          <a:xfrm>
+            <a:off x="548640" y="1325880"/>
+            <a:ext cx="11091672" cy="292608"/>
+          </a:xfrm>
+          <a:prstGeom prst="rect">
+            <a:avLst/>
+          </a:prstGeom>
+          <a:noFill/>
+          <a:ln/>
+        </p:spPr>
+        <p:txBody>
+          <a:bodyPr wrap="square" lIns="0" tIns="0" rIns="0" bIns="0" rtlCol="0" anchor="t"/>
+          <a:lstStyle/>
+          <a:p>
+            <a:pPr indent="0" marL="0">
+              <a:buNone/>
+            </a:pPr>
+            <a:r>
+              <a:rPr lang="en-US" sz="1300" i="1" dirty="0">
+                <a:solidFill>
+                  <a:srgbClr val="353745"/>
+                </a:solidFill>
+                <a:latin typeface="Georgia" pitchFamily="34" charset="0"/>
+                <a:ea typeface="Georgia" pitchFamily="34" charset="-122"/>
+                <a:cs typeface="Georgia" pitchFamily="34" charset="-120"/>
+              </a:rPr>
+              <a:t>Native pptxgenjs scatter chart (non-bubble). 11 years of (util, EBITDA %) points. Native handles scatter when sizing uniformity is fine.</a:t>
+            </a:r>
+            <a:endParaRPr lang="en-US" sz="1300" dirty="0"/>
+          </a:p>
+        </p:txBody>
+      </p:sp>
+      <p:graphicFrame>
+        <p:nvGraphicFramePr>
+          <p:cNvPr id="5" name="Chart 0" descr=""/>
+          <p:cNvGraphicFramePr/>
+          <p:nvPr/>
+        </p:nvGraphicFramePr>
+        <p:xfrm>
+          <a:off x="640080" y="2011680"/>
+          <a:ext cx="10908792" cy="4023360"/>
+        </p:xfrm>
+        <a:graphic xmlns:a="http://schemas.openxmlformats.org/drawingml/2006/main">
+          <a:graphicData uri="http://schemas.openxmlformats.org/drawingml/2006/chart">
+            <c:chart xmlns:c="http://schemas.openxmlformats.org/drawingml/2006/chart" r:id="rId1"/>
+          </a:graphicData>
+        </a:graphic>
+      </p:graphicFrame>
+      <p:sp>
+        <p:nvSpPr>
+          <p:cNvPr id="6" name="Text 3"/>
+          <p:cNvSpPr/>
+          <p:nvPr/>
+        </p:nvSpPr>
+        <p:spPr>
+          <a:xfrm>
+            <a:off x="548640" y="6172200"/>
+            <a:ext cx="11091672" cy="292608"/>
+          </a:xfrm>
+          <a:prstGeom prst="rect">
+            <a:avLst/>
+          </a:prstGeom>
+          <a:noFill/>
+          <a:ln/>
+        </p:spPr>
+        <p:txBody>
+          <a:bodyPr wrap="square" lIns="0" tIns="0" rIns="0" bIns="0" rtlCol="0" anchor="t"/>
+          <a:lstStyle/>
+          <a:p>
+            <a:pPr indent="0" marL="0">
+              <a:buNone/>
+            </a:pPr>
+            <a:r>
+              <a:rPr lang="en-US" sz="1200" i="1" dirty="0">
+                <a:solidFill>
+                  <a:srgbClr val="353745"/>
+                </a:solidFill>
+                <a:latin typeface="Georgia" pitchFamily="34" charset="0"/>
+                <a:ea typeface="Georgia" pitchFamily="34" charset="-122"/>
+                <a:cs typeface="Georgia" pitchFamily="34" charset="-120"/>
+              </a:rPr>
+              <a:t>Positive slope: every 10 utilization points ≈ +7 points of EBITDA. Pricing alone never closed the gap.</a:t>
             </a:r>
             <a:endParaRPr lang="en-US" sz="1200" dirty="0"/>
           </a:p>

--- a/output/audit_deck.pptx
+++ b/output/audit_deck.pptx
@@ -15,9 +15,13 @@
     <p:sldId id="263" r:id="rId9"/>
     <p:sldId id="264" r:id="rId10"/>
     <p:sldId id="265" r:id="rId11"/>
+    <p:sldId id="266" r:id="rId12"/>
+    <p:sldId id="267" r:id="rId13"/>
+    <p:sldId id="268" r:id="rId14"/>
+    <p:sldId id="269" r:id="rId15"/>
   </p:sldIdLst>
   <p:notesMasterIdLst>
-    <p:notesMasterId r:id="rId12"/>
+    <p:notesMasterId r:id="rId16"/>
   </p:notesMasterIdLst>
   <p:sldSz cx="12192000" cy="6858000"/>
   <p:notesSz cx="6858000" cy="12192000"/>
@@ -437,6 +441,1713 @@
 </c:chartSpace>
 </file>
 
+<file path=ppt/charts/chart10.xml><?xml version="1.0" encoding="utf-8"?>
+<c:chartSpace xmlns:c="http://schemas.openxmlformats.org/drawingml/2006/chart" xmlns:a="http://schemas.openxmlformats.org/drawingml/2006/main" xmlns:r="http://schemas.openxmlformats.org/officeDocument/2006/relationships">
+  <c:date1904 val="0"/>
+  <c:roundedCorners val="1"/>
+  <c:chart>
+    <c:autoTitleDeleted val="1"/>
+    <c:plotArea>
+      <c:layout/>
+      <c:doughnutChart>
+        <c:varyColors val="1"/>
+        <c:ser>
+          <c:idx val="0"/>
+          <c:order val="0"/>
+          <c:tx>
+            <c:strRef>
+              <c:f>Sheet1!$B$1</c:f>
+              <c:strCache>
+                <c:ptCount val="1"/>
+                <c:pt idx="0">
+                  <c:v>Revenue mix 2025</c:v>
+                </c:pt>
+              </c:strCache>
+            </c:strRef>
+          </c:tx>
+          <c:spPr>
+            <a:solidFill>
+              <a:schemeClr val="accent1"/>
+            </a:solidFill>
+            <a:ln w="9525" cap="flat">
+              <a:solidFill>
+                <a:srgbClr val="F9F9F9"/>
+              </a:solidFill>
+              <a:prstDash val="solid"/>
+              <a:round/>
+            </a:ln>
+            <a:effectLst/>
+          </c:spPr>
+          <c:dPt>
+            <c:idx val="0"/>
+            <c:bubble3D val="0"/>
+            <c:spPr>
+              <a:solidFill>
+                <a:srgbClr val="2D5F7C"/>
+              </a:solidFill>
+              <a:effectLst/>
+            </c:spPr>
+          </c:dPt>
+          <c:dPt>
+            <c:idx val="1"/>
+            <c:bubble3D val="0"/>
+            <c:spPr>
+              <a:solidFill>
+                <a:srgbClr val="BFE5EF"/>
+              </a:solidFill>
+              <a:effectLst/>
+            </c:spPr>
+          </c:dPt>
+          <c:dPt>
+            <c:idx val="2"/>
+            <c:bubble3D val="0"/>
+            <c:spPr>
+              <a:solidFill>
+                <a:srgbClr val="B84C65"/>
+              </a:solidFill>
+              <a:effectLst/>
+            </c:spPr>
+          </c:dPt>
+          <c:dLbls>
+            <c:dLbl>
+              <c:idx val="0"/>
+              <c:numFmt formatCode="General" sourceLinked="0"/>
+              <c:spPr/>
+              <c:txPr>
+                <a:bodyPr/>
+                <a:lstStyle/>
+                <a:p>
+                  <a:pPr>
+                    <a:defRPr sz="1200" b="0" i="0" u="none" strike="noStrike">
+                      <a:solidFill>
+                        <a:srgbClr val="000000"/>
+                      </a:solidFill>
+                      <a:latin typeface="Arial"/>
+                    </a:defRPr>
+                  </a:pPr>
+                </a:p>
+              </c:txPr>
+              <c:showLegendKey val="0"/>
+              <c:showVal val="0"/>
+              <c:showCatName val="0"/>
+              <c:showSerName val="0"/>
+              <c:showPercent val="0"/>
+              <c:showBubbleSize val="0"/>
+            </c:dLbl>
+            <c:dLbl>
+              <c:idx val="1"/>
+              <c:numFmt formatCode="General" sourceLinked="0"/>
+              <c:spPr/>
+              <c:txPr>
+                <a:bodyPr/>
+                <a:lstStyle/>
+                <a:p>
+                  <a:pPr>
+                    <a:defRPr sz="1200" b="0" i="0" u="none" strike="noStrike">
+                      <a:solidFill>
+                        <a:srgbClr val="000000"/>
+                      </a:solidFill>
+                      <a:latin typeface="Arial"/>
+                    </a:defRPr>
+                  </a:pPr>
+                </a:p>
+              </c:txPr>
+              <c:showLegendKey val="0"/>
+              <c:showVal val="0"/>
+              <c:showCatName val="0"/>
+              <c:showSerName val="0"/>
+              <c:showPercent val="0"/>
+              <c:showBubbleSize val="0"/>
+            </c:dLbl>
+            <c:dLbl>
+              <c:idx val="2"/>
+              <c:numFmt formatCode="General" sourceLinked="0"/>
+              <c:spPr/>
+              <c:txPr>
+                <a:bodyPr/>
+                <a:lstStyle/>
+                <a:p>
+                  <a:pPr>
+                    <a:defRPr sz="1200" b="0" i="0" u="none" strike="noStrike">
+                      <a:solidFill>
+                        <a:srgbClr val="000000"/>
+                      </a:solidFill>
+                      <a:latin typeface="Arial"/>
+                    </a:defRPr>
+                  </a:pPr>
+                </a:p>
+              </c:txPr>
+              <c:showLegendKey val="0"/>
+              <c:showVal val="0"/>
+              <c:showCatName val="0"/>
+              <c:showSerName val="0"/>
+              <c:showPercent val="0"/>
+              <c:showBubbleSize val="0"/>
+            </c:dLbl>
+            <c:numFmt formatCode="General" sourceLinked="0"/>
+            <c:txPr>
+              <a:bodyPr/>
+              <a:lstStyle/>
+              <a:p>
+                <a:pPr>
+                  <a:defRPr sz="1800" b="0" i="0" u="none" strike="noStrike">
+                    <a:solidFill>
+                      <a:srgbClr val="000000"/>
+                    </a:solidFill>
+                    <a:latin typeface="Arial"/>
+                  </a:defRPr>
+                </a:pPr>
+              </a:p>
+            </c:txPr>
+            <c:showLegendKey val="0"/>
+            <c:showVal val="0"/>
+            <c:showCatName val="1"/>
+            <c:showSerName val="0"/>
+            <c:showPercent val="1"/>
+            <c:showBubbleSize val="0"/>
+            <c:showLeaderLines val="0"/>
+          </c:dLbls>
+          <c:cat>
+            <c:strRef>
+              <c:f>Sheet1!$A$2:$A$4</c:f>
+              <c:strCache>
+                <c:ptCount val="3"/>
+                <c:pt idx="0">
+                  <c:v>Strategy</c:v>
+                </c:pt>
+                <c:pt idx="1">
+                  <c:v>Operations</c:v>
+                </c:pt>
+                <c:pt idx="2">
+                  <c:v>Technology</c:v>
+                </c:pt>
+              </c:strCache>
+            </c:strRef>
+          </c:cat>
+          <c:val>
+            <c:numRef>
+              <c:f>Sheet1!$B$2:$B$4</c:f>
+              <c:numCache>
+                <c:ptCount val="3"/>
+                <c:pt idx="0">
+                  <c:v>9.17</c:v>
+                </c:pt>
+                <c:pt idx="1">
+                  <c:v>8.97</c:v>
+                </c:pt>
+                <c:pt idx="2">
+                  <c:v>5.95</c:v>
+                </c:pt>
+              </c:numCache>
+            </c:numRef>
+          </c:val>
+        </c:ser>
+        <c:firstSliceAng val="0"/>
+        <c:holeSize val="65"/>
+      </c:doughnutChart>
+      <c:spPr>
+        <a:solidFill>
+          <a:srgbClr val="FFF5ED"/>
+        </a:solidFill>
+        <a:ln>
+          <a:noFill/>
+        </a:ln>
+        <a:effectLst/>
+      </c:spPr>
+    </c:plotArea>
+    <c:plotVisOnly val="1"/>
+    <c:dispBlanksAs val="span"/>
+  </c:chart>
+  <c:spPr>
+    <a:solidFill>
+      <a:srgbClr val="FFF5ED"/>
+    </a:solidFill>
+    <a:ln>
+      <a:noFill/>
+    </a:ln>
+    <a:effectLst/>
+  </c:spPr>
+  <c:externalData r:id="rId1">
+    <c:autoUpdate val="0"/>
+  </c:externalData>
+</c:chartSpace>
+</file>
+
+<file path=ppt/charts/chart11.xml><?xml version="1.0" encoding="utf-8"?>
+<c:chartSpace xmlns:c="http://schemas.openxmlformats.org/drawingml/2006/chart" xmlns:a="http://schemas.openxmlformats.org/drawingml/2006/main" xmlns:r="http://schemas.openxmlformats.org/officeDocument/2006/relationships">
+  <c:date1904 val="0"/>
+  <c:roundedCorners val="1"/>
+  <c:chart>
+    <c:autoTitleDeleted val="1"/>
+    <c:plotArea>
+      <c:layout/>
+      <c:doughnutChart>
+        <c:varyColors val="1"/>
+        <c:ser>
+          <c:idx val="0"/>
+          <c:order val="0"/>
+          <c:tx>
+            <c:strRef>
+              <c:f>Sheet1!$B$1</c:f>
+              <c:strCache>
+                <c:ptCount val="1"/>
+                <c:pt idx="0">
+                  <c:v>Revenue mix 2035</c:v>
+                </c:pt>
+              </c:strCache>
+            </c:strRef>
+          </c:tx>
+          <c:spPr>
+            <a:solidFill>
+              <a:schemeClr val="accent1"/>
+            </a:solidFill>
+            <a:ln w="9525" cap="flat">
+              <a:solidFill>
+                <a:srgbClr val="F9F9F9"/>
+              </a:solidFill>
+              <a:prstDash val="solid"/>
+              <a:round/>
+            </a:ln>
+            <a:effectLst/>
+          </c:spPr>
+          <c:dPt>
+            <c:idx val="0"/>
+            <c:bubble3D val="0"/>
+            <c:spPr>
+              <a:solidFill>
+                <a:srgbClr val="2D5F7C"/>
+              </a:solidFill>
+              <a:effectLst/>
+            </c:spPr>
+          </c:dPt>
+          <c:dPt>
+            <c:idx val="1"/>
+            <c:bubble3D val="0"/>
+            <c:spPr>
+              <a:solidFill>
+                <a:srgbClr val="BFE5EF"/>
+              </a:solidFill>
+              <a:effectLst/>
+            </c:spPr>
+          </c:dPt>
+          <c:dPt>
+            <c:idx val="2"/>
+            <c:bubble3D val="0"/>
+            <c:spPr>
+              <a:solidFill>
+                <a:srgbClr val="B84C65"/>
+              </a:solidFill>
+              <a:effectLst/>
+            </c:spPr>
+          </c:dPt>
+          <c:dLbls>
+            <c:dLbl>
+              <c:idx val="0"/>
+              <c:numFmt formatCode="General" sourceLinked="0"/>
+              <c:spPr/>
+              <c:txPr>
+                <a:bodyPr/>
+                <a:lstStyle/>
+                <a:p>
+                  <a:pPr>
+                    <a:defRPr sz="1200" b="0" i="0" u="none" strike="noStrike">
+                      <a:solidFill>
+                        <a:srgbClr val="000000"/>
+                      </a:solidFill>
+                      <a:latin typeface="Arial"/>
+                    </a:defRPr>
+                  </a:pPr>
+                </a:p>
+              </c:txPr>
+              <c:showLegendKey val="0"/>
+              <c:showVal val="0"/>
+              <c:showCatName val="0"/>
+              <c:showSerName val="0"/>
+              <c:showPercent val="0"/>
+              <c:showBubbleSize val="0"/>
+            </c:dLbl>
+            <c:dLbl>
+              <c:idx val="1"/>
+              <c:numFmt formatCode="General" sourceLinked="0"/>
+              <c:spPr/>
+              <c:txPr>
+                <a:bodyPr/>
+                <a:lstStyle/>
+                <a:p>
+                  <a:pPr>
+                    <a:defRPr sz="1200" b="0" i="0" u="none" strike="noStrike">
+                      <a:solidFill>
+                        <a:srgbClr val="000000"/>
+                      </a:solidFill>
+                      <a:latin typeface="Arial"/>
+                    </a:defRPr>
+                  </a:pPr>
+                </a:p>
+              </c:txPr>
+              <c:showLegendKey val="0"/>
+              <c:showVal val="0"/>
+              <c:showCatName val="0"/>
+              <c:showSerName val="0"/>
+              <c:showPercent val="0"/>
+              <c:showBubbleSize val="0"/>
+            </c:dLbl>
+            <c:dLbl>
+              <c:idx val="2"/>
+              <c:numFmt formatCode="General" sourceLinked="0"/>
+              <c:spPr/>
+              <c:txPr>
+                <a:bodyPr/>
+                <a:lstStyle/>
+                <a:p>
+                  <a:pPr>
+                    <a:defRPr sz="1200" b="0" i="0" u="none" strike="noStrike">
+                      <a:solidFill>
+                        <a:srgbClr val="000000"/>
+                      </a:solidFill>
+                      <a:latin typeface="Arial"/>
+                    </a:defRPr>
+                  </a:pPr>
+                </a:p>
+              </c:txPr>
+              <c:showLegendKey val="0"/>
+              <c:showVal val="0"/>
+              <c:showCatName val="0"/>
+              <c:showSerName val="0"/>
+              <c:showPercent val="0"/>
+              <c:showBubbleSize val="0"/>
+            </c:dLbl>
+            <c:numFmt formatCode="General" sourceLinked="0"/>
+            <c:txPr>
+              <a:bodyPr/>
+              <a:lstStyle/>
+              <a:p>
+                <a:pPr>
+                  <a:defRPr sz="1800" b="0" i="0" u="none" strike="noStrike">
+                    <a:solidFill>
+                      <a:srgbClr val="000000"/>
+                    </a:solidFill>
+                    <a:latin typeface="Arial"/>
+                  </a:defRPr>
+                </a:pPr>
+              </a:p>
+            </c:txPr>
+            <c:showLegendKey val="0"/>
+            <c:showVal val="0"/>
+            <c:showCatName val="1"/>
+            <c:showSerName val="0"/>
+            <c:showPercent val="1"/>
+            <c:showBubbleSize val="0"/>
+            <c:showLeaderLines val="0"/>
+          </c:dLbls>
+          <c:cat>
+            <c:strRef>
+              <c:f>Sheet1!$A$2:$A$4</c:f>
+              <c:strCache>
+                <c:ptCount val="3"/>
+                <c:pt idx="0">
+                  <c:v>Strategy</c:v>
+                </c:pt>
+                <c:pt idx="1">
+                  <c:v>Operations</c:v>
+                </c:pt>
+                <c:pt idx="2">
+                  <c:v>Technology</c:v>
+                </c:pt>
+              </c:strCache>
+            </c:strRef>
+          </c:cat>
+          <c:val>
+            <c:numRef>
+              <c:f>Sheet1!$B$2:$B$4</c:f>
+              <c:numCache>
+                <c:ptCount val="3"/>
+                <c:pt idx="0">
+                  <c:v>18.11</c:v>
+                </c:pt>
+                <c:pt idx="1">
+                  <c:v>20.61</c:v>
+                </c:pt>
+                <c:pt idx="2">
+                  <c:v>19.94</c:v>
+                </c:pt>
+              </c:numCache>
+            </c:numRef>
+          </c:val>
+        </c:ser>
+        <c:firstSliceAng val="0"/>
+        <c:holeSize val="65"/>
+      </c:doughnutChart>
+      <c:spPr>
+        <a:solidFill>
+          <a:srgbClr val="FFF5ED"/>
+        </a:solidFill>
+        <a:ln>
+          <a:noFill/>
+        </a:ln>
+        <a:effectLst/>
+      </c:spPr>
+    </c:plotArea>
+    <c:plotVisOnly val="1"/>
+    <c:dispBlanksAs val="span"/>
+  </c:chart>
+  <c:spPr>
+    <a:solidFill>
+      <a:srgbClr val="FFF5ED"/>
+    </a:solidFill>
+    <a:ln>
+      <a:noFill/>
+    </a:ln>
+    <a:effectLst/>
+  </c:spPr>
+  <c:externalData r:id="rId1">
+    <c:autoUpdate val="0"/>
+  </c:externalData>
+</c:chartSpace>
+</file>
+
+<file path=ppt/charts/chart12.xml><?xml version="1.0" encoding="utf-8"?>
+<c:chartSpace xmlns:c="http://schemas.openxmlformats.org/drawingml/2006/chart" xmlns:a="http://schemas.openxmlformats.org/drawingml/2006/main" xmlns:r="http://schemas.openxmlformats.org/officeDocument/2006/relationships">
+  <c:date1904 val="0"/>
+  <c:roundedCorners val="1"/>
+  <c:chart>
+    <c:autoTitleDeleted val="1"/>
+    <c:plotArea>
+      <c:layout/>
+      <c:scatterChart>
+        <c:scatterStyle val="lineMarker"/>
+        <c:varyColors val="0"/>
+        <c:ser>
+          <c:idx val="0"/>
+          <c:order val="0"/>
+          <c:tx>
+            <c:strRef>
+              <c:f>Sheet1!$B$1</c:f>
+              <c:strCache>
+                <c:ptCount val="1"/>
+                <c:pt idx="0">
+                  <c:v>Setup</c:v>
+                </c:pt>
+              </c:strCache>
+            </c:strRef>
+          </c:tx>
+          <c:spPr>
+            <a:solidFill>
+              <a:srgbClr val="8A7968"/>
+            </a:solidFill>
+            <a:ln>
+              <a:noFill/>
+            </a:ln>
+            <a:effectLst/>
+          </c:spPr>
+          <c:marker>
+            <c:symbol val="circle"/>
+            <c:size val="11"/>
+            <c:spPr>
+              <a:solidFill>
+                <a:srgbClr val="8A7968"/>
+              </a:solidFill>
+              <a:ln w="12700" cap="flat">
+                <a:solidFill>
+                  <a:srgbClr val="8A7968"/>
+                </a:solidFill>
+                <a:prstDash val="solid"/>
+                <a:round/>
+              </a:ln>
+              <a:effectLst/>
+            </c:spPr>
+          </c:marker>
+          <c:xVal>
+            <c:numRef>
+              <c:f>Sheet1!$A$2:$A$12</c:f>
+              <c:numCache>
+                <c:formatCode>General</c:formatCode>
+                <c:ptCount val="11"/>
+                <c:pt idx="0">
+                  <c:v>24.09</c:v>
+                </c:pt>
+                <c:pt idx="1">
+                  <c:v>22.34</c:v>
+                </c:pt>
+                <c:pt idx="2">
+                  <c:v>22.13</c:v>
+                </c:pt>
+                <c:pt idx="3">
+                  <c:v>25.62</c:v>
+                </c:pt>
+                <c:pt idx="4">
+                  <c:v>25.29</c:v>
+                </c:pt>
+                <c:pt idx="5">
+                  <c:v>34.24</c:v>
+                </c:pt>
+                <c:pt idx="6">
+                  <c:v>40.79</c:v>
+                </c:pt>
+                <c:pt idx="7">
+                  <c:v>47.79</c:v>
+                </c:pt>
+                <c:pt idx="8">
+                  <c:v>51.07</c:v>
+                </c:pt>
+                <c:pt idx="9">
+                  <c:v>55.99</c:v>
+                </c:pt>
+                <c:pt idx="10">
+                  <c:v>58.66</c:v>
+                </c:pt>
+              </c:numCache>
+            </c:numRef>
+          </c:xVal>
+          <c:yVal>
+            <c:numRef>
+              <c:f>Sheet1!$B$2:$B$12</c:f>
+              <c:numCache>
+                <c:formatCode>General</c:formatCode>
+                <c:ptCount val="11"/>
+                <c:pt idx="0">
+                  <c:v>6.53</c:v>
+                </c:pt>
+                <c:pt idx="1">
+                  <c:v/>
+                </c:pt>
+                <c:pt idx="2">
+                  <c:v/>
+                </c:pt>
+                <c:pt idx="3">
+                  <c:v/>
+                </c:pt>
+                <c:pt idx="4">
+                  <c:v/>
+                </c:pt>
+                <c:pt idx="5">
+                  <c:v/>
+                </c:pt>
+                <c:pt idx="6">
+                  <c:v/>
+                </c:pt>
+                <c:pt idx="7">
+                  <c:v/>
+                </c:pt>
+                <c:pt idx="8">
+                  <c:v/>
+                </c:pt>
+                <c:pt idx="9">
+                  <c:v/>
+                </c:pt>
+                <c:pt idx="10">
+                  <c:v/>
+                </c:pt>
+              </c:numCache>
+            </c:numRef>
+          </c:yVal>
+          <c:smooth val="0"/>
+        </c:ser>
+        <c:ser>
+          <c:idx val="1"/>
+          <c:order val="1"/>
+          <c:tx>
+            <c:strRef>
+              <c:f>Sheet1!$C$1</c:f>
+              <c:strCache>
+                <c:ptCount val="1"/>
+                <c:pt idx="0">
+                  <c:v>Compression</c:v>
+                </c:pt>
+              </c:strCache>
+            </c:strRef>
+          </c:tx>
+          <c:spPr>
+            <a:solidFill>
+              <a:srgbClr val="B84C65"/>
+            </a:solidFill>
+            <a:ln>
+              <a:noFill/>
+            </a:ln>
+            <a:effectLst/>
+          </c:spPr>
+          <c:marker>
+            <c:symbol val="circle"/>
+            <c:size val="11"/>
+            <c:spPr>
+              <a:solidFill>
+                <a:srgbClr val="B84C65"/>
+              </a:solidFill>
+              <a:ln w="12700" cap="flat">
+                <a:solidFill>
+                  <a:srgbClr val="B84C65"/>
+                </a:solidFill>
+                <a:prstDash val="solid"/>
+                <a:round/>
+              </a:ln>
+              <a:effectLst/>
+            </c:spPr>
+          </c:marker>
+          <c:xVal>
+            <c:numRef>
+              <c:f>Sheet1!$A$2:$A$12</c:f>
+              <c:numCache>
+                <c:formatCode>General</c:formatCode>
+                <c:ptCount val="11"/>
+                <c:pt idx="0">
+                  <c:v>24.09</c:v>
+                </c:pt>
+                <c:pt idx="1">
+                  <c:v>22.34</c:v>
+                </c:pt>
+                <c:pt idx="2">
+                  <c:v>22.13</c:v>
+                </c:pt>
+                <c:pt idx="3">
+                  <c:v>25.62</c:v>
+                </c:pt>
+                <c:pt idx="4">
+                  <c:v>25.29</c:v>
+                </c:pt>
+                <c:pt idx="5">
+                  <c:v>34.24</c:v>
+                </c:pt>
+                <c:pt idx="6">
+                  <c:v>40.79</c:v>
+                </c:pt>
+                <c:pt idx="7">
+                  <c:v>47.79</c:v>
+                </c:pt>
+                <c:pt idx="8">
+                  <c:v>51.07</c:v>
+                </c:pt>
+                <c:pt idx="9">
+                  <c:v>55.99</c:v>
+                </c:pt>
+                <c:pt idx="10">
+                  <c:v>58.66</c:v>
+                </c:pt>
+              </c:numCache>
+            </c:numRef>
+          </c:xVal>
+          <c:yVal>
+            <c:numRef>
+              <c:f>Sheet1!$C$2:$C$12</c:f>
+              <c:numCache>
+                <c:formatCode>General</c:formatCode>
+                <c:ptCount val="11"/>
+                <c:pt idx="0">
+                  <c:v/>
+                </c:pt>
+                <c:pt idx="1">
+                  <c:v>4.69</c:v>
+                </c:pt>
+                <c:pt idx="2">
+                  <c:v>4.32</c:v>
+                </c:pt>
+                <c:pt idx="3">
+                  <c:v>6.19</c:v>
+                </c:pt>
+                <c:pt idx="4">
+                  <c:v>3.87</c:v>
+                </c:pt>
+                <c:pt idx="5">
+                  <c:v/>
+                </c:pt>
+                <c:pt idx="6">
+                  <c:v/>
+                </c:pt>
+                <c:pt idx="7">
+                  <c:v/>
+                </c:pt>
+                <c:pt idx="8">
+                  <c:v/>
+                </c:pt>
+                <c:pt idx="9">
+                  <c:v/>
+                </c:pt>
+                <c:pt idx="10">
+                  <c:v/>
+                </c:pt>
+              </c:numCache>
+            </c:numRef>
+          </c:yVal>
+          <c:smooth val="0"/>
+        </c:ser>
+        <c:ser>
+          <c:idx val="2"/>
+          <c:order val="2"/>
+          <c:tx>
+            <c:strRef>
+              <c:f>Sheet1!$D$1</c:f>
+              <c:strCache>
+                <c:ptCount val="1"/>
+                <c:pt idx="0">
+                  <c:v>Recovery</c:v>
+                </c:pt>
+              </c:strCache>
+            </c:strRef>
+          </c:tx>
+          <c:spPr>
+            <a:solidFill>
+              <a:srgbClr val="4A5E6A"/>
+            </a:solidFill>
+            <a:ln>
+              <a:noFill/>
+            </a:ln>
+            <a:effectLst/>
+          </c:spPr>
+          <c:marker>
+            <c:symbol val="circle"/>
+            <c:size val="11"/>
+            <c:spPr>
+              <a:solidFill>
+                <a:srgbClr val="4A5E6A"/>
+              </a:solidFill>
+              <a:ln w="12700" cap="flat">
+                <a:solidFill>
+                  <a:srgbClr val="4A5E6A"/>
+                </a:solidFill>
+                <a:prstDash val="solid"/>
+                <a:round/>
+              </a:ln>
+              <a:effectLst/>
+            </c:spPr>
+          </c:marker>
+          <c:xVal>
+            <c:numRef>
+              <c:f>Sheet1!$A$2:$A$12</c:f>
+              <c:numCache>
+                <c:formatCode>General</c:formatCode>
+                <c:ptCount val="11"/>
+                <c:pt idx="0">
+                  <c:v>24.09</c:v>
+                </c:pt>
+                <c:pt idx="1">
+                  <c:v>22.34</c:v>
+                </c:pt>
+                <c:pt idx="2">
+                  <c:v>22.13</c:v>
+                </c:pt>
+                <c:pt idx="3">
+                  <c:v>25.62</c:v>
+                </c:pt>
+                <c:pt idx="4">
+                  <c:v>25.29</c:v>
+                </c:pt>
+                <c:pt idx="5">
+                  <c:v>34.24</c:v>
+                </c:pt>
+                <c:pt idx="6">
+                  <c:v>40.79</c:v>
+                </c:pt>
+                <c:pt idx="7">
+                  <c:v>47.79</c:v>
+                </c:pt>
+                <c:pt idx="8">
+                  <c:v>51.07</c:v>
+                </c:pt>
+                <c:pt idx="9">
+                  <c:v>55.99</c:v>
+                </c:pt>
+                <c:pt idx="10">
+                  <c:v>58.66</c:v>
+                </c:pt>
+              </c:numCache>
+            </c:numRef>
+          </c:xVal>
+          <c:yVal>
+            <c:numRef>
+              <c:f>Sheet1!$D$2:$D$12</c:f>
+              <c:numCache>
+                <c:formatCode>General</c:formatCode>
+                <c:ptCount val="11"/>
+                <c:pt idx="0">
+                  <c:v/>
+                </c:pt>
+                <c:pt idx="1">
+                  <c:v/>
+                </c:pt>
+                <c:pt idx="2">
+                  <c:v/>
+                </c:pt>
+                <c:pt idx="3">
+                  <c:v/>
+                </c:pt>
+                <c:pt idx="4">
+                  <c:v/>
+                </c:pt>
+                <c:pt idx="5">
+                  <c:v>11.43</c:v>
+                </c:pt>
+                <c:pt idx="6">
+                  <c:v>12.88</c:v>
+                </c:pt>
+                <c:pt idx="7">
+                  <c:v/>
+                </c:pt>
+                <c:pt idx="8">
+                  <c:v/>
+                </c:pt>
+                <c:pt idx="9">
+                  <c:v/>
+                </c:pt>
+                <c:pt idx="10">
+                  <c:v/>
+                </c:pt>
+              </c:numCache>
+            </c:numRef>
+          </c:yVal>
+          <c:smooth val="0"/>
+        </c:ser>
+        <c:ser>
+          <c:idx val="3"/>
+          <c:order val="3"/>
+          <c:tx>
+            <c:strRef>
+              <c:f>Sheet1!$E$1</c:f>
+              <c:strCache>
+                <c:ptCount val="1"/>
+                <c:pt idx="0">
+                  <c:v>Scale</c:v>
+                </c:pt>
+              </c:strCache>
+            </c:strRef>
+          </c:tx>
+          <c:spPr>
+            <a:solidFill>
+              <a:srgbClr val="2D5F7C"/>
+            </a:solidFill>
+            <a:ln>
+              <a:noFill/>
+            </a:ln>
+            <a:effectLst/>
+          </c:spPr>
+          <c:marker>
+            <c:symbol val="circle"/>
+            <c:size val="11"/>
+            <c:spPr>
+              <a:solidFill>
+                <a:srgbClr val="2D5F7C"/>
+              </a:solidFill>
+              <a:ln w="12700" cap="flat">
+                <a:solidFill>
+                  <a:srgbClr val="2D5F7C"/>
+                </a:solidFill>
+                <a:prstDash val="solid"/>
+                <a:round/>
+              </a:ln>
+              <a:effectLst/>
+            </c:spPr>
+          </c:marker>
+          <c:xVal>
+            <c:numRef>
+              <c:f>Sheet1!$A$2:$A$12</c:f>
+              <c:numCache>
+                <c:formatCode>General</c:formatCode>
+                <c:ptCount val="11"/>
+                <c:pt idx="0">
+                  <c:v>24.09</c:v>
+                </c:pt>
+                <c:pt idx="1">
+                  <c:v>22.34</c:v>
+                </c:pt>
+                <c:pt idx="2">
+                  <c:v>22.13</c:v>
+                </c:pt>
+                <c:pt idx="3">
+                  <c:v>25.62</c:v>
+                </c:pt>
+                <c:pt idx="4">
+                  <c:v>25.29</c:v>
+                </c:pt>
+                <c:pt idx="5">
+                  <c:v>34.24</c:v>
+                </c:pt>
+                <c:pt idx="6">
+                  <c:v>40.79</c:v>
+                </c:pt>
+                <c:pt idx="7">
+                  <c:v>47.79</c:v>
+                </c:pt>
+                <c:pt idx="8">
+                  <c:v>51.07</c:v>
+                </c:pt>
+                <c:pt idx="9">
+                  <c:v>55.99</c:v>
+                </c:pt>
+                <c:pt idx="10">
+                  <c:v>58.66</c:v>
+                </c:pt>
+              </c:numCache>
+            </c:numRef>
+          </c:xVal>
+          <c:yVal>
+            <c:numRef>
+              <c:f>Sheet1!$E$2:$E$12</c:f>
+              <c:numCache>
+                <c:formatCode>General</c:formatCode>
+                <c:ptCount val="11"/>
+                <c:pt idx="0">
+                  <c:v/>
+                </c:pt>
+                <c:pt idx="1">
+                  <c:v/>
+                </c:pt>
+                <c:pt idx="2">
+                  <c:v/>
+                </c:pt>
+                <c:pt idx="3">
+                  <c:v/>
+                </c:pt>
+                <c:pt idx="4">
+                  <c:v/>
+                </c:pt>
+                <c:pt idx="5">
+                  <c:v/>
+                </c:pt>
+                <c:pt idx="6">
+                  <c:v/>
+                </c:pt>
+                <c:pt idx="7">
+                  <c:v>14.72</c:v>
+                </c:pt>
+                <c:pt idx="8">
+                  <c:v>13.96</c:v>
+                </c:pt>
+                <c:pt idx="9">
+                  <c:v>15.65</c:v>
+                </c:pt>
+                <c:pt idx="10">
+                  <c:v>15.4</c:v>
+                </c:pt>
+              </c:numCache>
+            </c:numRef>
+          </c:yVal>
+          <c:smooth val="0"/>
+        </c:ser>
+        <c:dLbls>
+          <c:numFmt formatCode="General" sourceLinked="0"/>
+          <c:txPr>
+            <a:bodyPr/>
+            <a:lstStyle/>
+            <a:p>
+              <a:pPr>
+                <a:defRPr b="0" i="0" strike="noStrike" sz="1200" u="none">
+                  <a:solidFill>
+                    <a:srgbClr val="000000"/>
+                  </a:solidFill>
+                  <a:latin typeface="Arial"/>
+                </a:defRPr>
+              </a:pPr>
+            </a:p>
+          </c:txPr>
+          <c:showLegendKey val="0"/>
+          <c:showVal val="0"/>
+          <c:showCatName val="0"/>
+          <c:showSerName val="0"/>
+          <c:showPercent val="0"/>
+          <c:showBubbleSize val="0"/>
+        </c:dLbls>
+        <c:axId val="2094734554"/>
+        <c:axId val="2094734552"/>
+      </c:scatterChart>
+      <c:valAx>
+        <c:axId val="2094734554"/>
+        <c:scaling>
+          <c:orientation val="minMax"/>
+          <c:max val="60"/>
+          <c:min val="20"/>
+        </c:scaling>
+        <c:delete val="0"/>
+        <c:axPos val="b"/>
+        <c:majorGridlines>
+          <c:spPr>
+            <a:ln w="6350" cap="flat">
+              <a:solidFill>
+                <a:srgbClr val="C9B9A8"/>
+              </a:solidFill>
+              <a:prstDash val="solid"/>
+              <a:round/>
+            </a:ln>
+          </c:spPr>
+        </c:majorGridlines>
+        <c:title>
+          <c:tx>
+            <c:rich>
+              <a:bodyPr/>
+              <a:lstStyle/>
+              <a:p>
+                <a:pPr>
+                  <a:defRPr sz="1000" b="0" i="0" u="none" strike="noStrike">
+                    <a:solidFill>
+                      <a:srgbClr val="8A7968"/>
+                    </a:solidFill>
+                    <a:latin typeface="Calibri"/>
+                  </a:defRPr>
+                </a:pPr>
+                <a:r>
+                  <a:rPr sz="1000" b="0" i="0" u="none" strike="noStrike">
+                    <a:solidFill>
+                      <a:srgbClr val="8A7968"/>
+                    </a:solidFill>
+                    <a:latin typeface="Calibri"/>
+                  </a:rPr>
+                  <a:t>Revenue ($M)</a:t>
+                </a:r>
+              </a:p>
+            </c:rich>
+          </c:tx>
+          <c:layout/>
+          <c:overlay val="0"/>
+        </c:title>
+        <c:numFmt formatCode="$0&quot;M&quot;" sourceLinked="1"/>
+        <c:majorTickMark val="none"/>
+        <c:minorTickMark val="none"/>
+        <c:tickLblPos val="nextTo"/>
+        <c:spPr>
+          <a:ln w="12700" cap="flat">
+            <a:solidFill>
+              <a:srgbClr val="888888"/>
+            </a:solidFill>
+            <a:prstDash val="solid"/>
+            <a:round/>
+          </a:ln>
+        </c:spPr>
+        <c:txPr>
+          <a:bodyPr/>
+          <a:lstStyle/>
+          <a:p>
+            <a:pPr>
+              <a:defRPr sz="1000" b="0" i="0" u="none" strike="noStrike">
+                <a:solidFill>
+                  <a:srgbClr val="8A7968"/>
+                </a:solidFill>
+                <a:latin typeface="Calibri"/>
+              </a:defRPr>
+            </a:pPr>
+            <a:endParaRPr lang="en-US"/>
+          </a:p>
+        </c:txPr>
+        <c:crossAx val="2094734552"/>
+        <c:crosses val="autoZero"/>
+        <c:auto val="1"/>
+        <c:lblAlgn val="ctr"/>
+        <c:noMultiLvlLbl val="1"/>
+      </c:valAx>
+      <c:valAx>
+        <c:axId val="2094734552"/>
+        <c:scaling>
+          <c:orientation val="minMax"/>
+          <c:max val="18"/>
+          <c:min val="0"/>
+        </c:scaling>
+        <c:delete val="0"/>
+        <c:axPos val="l"/>
+        <c:majorGridlines>
+          <c:spPr>
+            <a:ln w="6350" cap="flat">
+              <a:solidFill>
+                <a:srgbClr val="C9B9A8"/>
+              </a:solidFill>
+              <a:prstDash val="solid"/>
+              <a:round/>
+            </a:ln>
+          </c:spPr>
+        </c:majorGridlines>
+        <c:title>
+          <c:tx>
+            <c:rich>
+              <a:bodyPr/>
+              <a:lstStyle/>
+              <a:p>
+                <a:pPr>
+                  <a:defRPr sz="1000" b="0" i="0" u="none" strike="noStrike">
+                    <a:solidFill>
+                      <a:srgbClr val="8A7968"/>
+                    </a:solidFill>
+                    <a:latin typeface="Calibri"/>
+                  </a:defRPr>
+                </a:pPr>
+                <a:r>
+                  <a:rPr sz="1000" b="0" i="0" u="none" strike="noStrike">
+                    <a:solidFill>
+                      <a:srgbClr val="8A7968"/>
+                    </a:solidFill>
+                    <a:latin typeface="Calibri"/>
+                  </a:rPr>
+                  <a:t>EBITDA ($M)</a:t>
+                </a:r>
+              </a:p>
+            </c:rich>
+          </c:tx>
+          <c:layout/>
+          <c:overlay val="0"/>
+        </c:title>
+        <c:numFmt formatCode="$0&quot;M&quot;" sourceLinked="0"/>
+        <c:majorTickMark val="none"/>
+        <c:minorTickMark val="none"/>
+        <c:tickLblPos val="nextTo"/>
+        <c:spPr>
+          <a:ln w="12700" cap="flat">
+            <a:solidFill>
+              <a:srgbClr val="888888"/>
+            </a:solidFill>
+            <a:prstDash val="solid"/>
+            <a:round/>
+          </a:ln>
+        </c:spPr>
+        <c:txPr>
+          <a:bodyPr/>
+          <a:lstStyle/>
+          <a:p>
+            <a:pPr>
+              <a:defRPr sz="1000" b="0" i="0" u="none" strike="noStrike">
+                <a:solidFill>
+                  <a:srgbClr val="8A7968"/>
+                </a:solidFill>
+                <a:latin typeface="Calibri"/>
+              </a:defRPr>
+            </a:pPr>
+            <a:endParaRPr lang="en-US"/>
+          </a:p>
+        </c:txPr>
+        <c:crossAx val="2094734554"/>
+        <c:crosses val="autoZero"/>
+        <c:crossBetween val="midCat"/>
+      </c:valAx>
+      <c:spPr>
+        <a:solidFill>
+          <a:srgbClr val="FFF5ED"/>
+        </a:solidFill>
+        <a:ln>
+          <a:noFill/>
+        </a:ln>
+        <a:effectLst/>
+      </c:spPr>
+    </c:plotArea>
+    <c:legend>
+      <c:legendPos val="b"/>
+      <c:overlay val="0"/>
+      <c:txPr>
+        <a:bodyPr/>
+        <a:lstStyle/>
+        <a:p>
+          <a:pPr>
+            <a:defRPr sz="1000">
+              <a:solidFill>
+                <a:srgbClr val="8A7968"/>
+              </a:solidFill>
+              <a:latin typeface="Calibri"/>
+              <a:cs typeface="Calibri"/>
+            </a:defRPr>
+          </a:pPr>
+          <a:endParaRPr lang="en-US"/>
+        </a:p>
+      </c:txPr>
+    </c:legend>
+    <c:plotVisOnly val="1"/>
+    <c:dispBlanksAs val="span"/>
+    <c:showDLblsOverMax val="1"/>
+  </c:chart>
+  <c:spPr>
+    <a:solidFill>
+      <a:srgbClr val="FFF5ED"/>
+    </a:solidFill>
+    <a:ln>
+      <a:noFill/>
+    </a:ln>
+    <a:effectLst/>
+  </c:spPr>
+  <c:externalData r:id="rId1">
+    <c:autoUpdate val="0"/>
+  </c:externalData>
+</c:chartSpace>
+</file>
+
+<file path=ppt/charts/chart13.xml><?xml version="1.0" encoding="utf-8"?>
+<c:chartSpace xmlns:c="http://schemas.openxmlformats.org/drawingml/2006/chart" xmlns:a="http://schemas.openxmlformats.org/drawingml/2006/main" xmlns:r="http://schemas.openxmlformats.org/officeDocument/2006/relationships">
+  <c:date1904 val="0"/>
+  <c:roundedCorners val="1"/>
+  <c:chart>
+    <c:autoTitleDeleted val="1"/>
+    <c:plotArea>
+      <c:layout/>
+      <c:radarChart>
+        <c:radarStyle val="filled"/>
+        <c:varyColors val="0"/>
+        <c:ser>
+          <c:idx val="0"/>
+          <c:order val="0"/>
+          <c:tx>
+            <c:strRef>
+              <c:f>Sheet1!$B$1</c:f>
+              <c:strCache>
+                <c:ptCount val="1"/>
+                <c:pt idx="0">
+                  <c:v>Strategy</c:v>
+                </c:pt>
+              </c:strCache>
+            </c:strRef>
+          </c:tx>
+          <c:spPr>
+            <a:solidFill>
+              <a:srgbClr val="2D5F7C">
+                <a:alpha val="25000"/>
+              </a:srgbClr>
+            </a:solidFill>
+            <a:ln w="19050" cap="flat">
+              <a:solidFill>
+                <a:srgbClr val="2D5F7C"/>
+              </a:solidFill>
+              <a:prstDash val="solid"/>
+              <a:round/>
+            </a:ln>
+            <a:effectLst/>
+          </c:spPr>
+          <c:invertIfNegative val="0"/>
+          <c:marker>
+            <c:symbol val="circle"/>
+            <c:size val="6"/>
+            <c:spPr>
+              <a:solidFill>
+                <a:srgbClr val="2D5F7C"/>
+              </a:solidFill>
+              <a:ln w="9525" cap="flat">
+                <a:solidFill>
+                  <a:srgbClr val="2D5F7C"/>
+                </a:solidFill>
+                <a:prstDash val="solid"/>
+                <a:round/>
+              </a:ln>
+              <a:effectLst/>
+            </c:spPr>
+          </c:marker>
+          <c:cat>
+            <c:multiLvlStrRef>
+              <c:f>Sheet1!$A$2:$A$7</c:f>
+              <c:multiLvlStrCache>
+                <c:ptCount val="6"/>
+                <c:lvl>
+                  <c:pt idx="0">
+                    <c:v>2025</c:v>
+                  </c:pt>
+                  <c:pt idx="1">
+                    <c:v>2027</c:v>
+                  </c:pt>
+                  <c:pt idx="2">
+                    <c:v>2029</c:v>
+                  </c:pt>
+                  <c:pt idx="3">
+                    <c:v>2031</c:v>
+                  </c:pt>
+                  <c:pt idx="4">
+                    <c:v>2033</c:v>
+                  </c:pt>
+                  <c:pt idx="5">
+                    <c:v>2035</c:v>
+                  </c:pt>
+                </c:lvl>
+              </c:multiLvlStrCache>
+            </c:multiLvlStrRef>
+          </c:cat>
+          <c:val>
+            <c:numRef>
+              <c:f>Sheet1!$B$2:$B$7</c:f>
+              <c:numCache>
+                <c:formatCode>General</c:formatCode>
+                <c:ptCount val="6"/>
+                <c:pt idx="0">
+                  <c:v>9.17</c:v>
+                </c:pt>
+                <c:pt idx="1">
+                  <c:v>8.27</c:v>
+                </c:pt>
+                <c:pt idx="2">
+                  <c:v>9.98</c:v>
+                </c:pt>
+                <c:pt idx="3">
+                  <c:v>12.93</c:v>
+                </c:pt>
+                <c:pt idx="4">
+                  <c:v>17.6</c:v>
+                </c:pt>
+                <c:pt idx="5">
+                  <c:v>18.11</c:v>
+                </c:pt>
+              </c:numCache>
+            </c:numRef>
+          </c:val>
+        </c:ser>
+        <c:ser>
+          <c:idx val="1"/>
+          <c:order val="1"/>
+          <c:tx>
+            <c:strRef>
+              <c:f>Sheet1!$C$1</c:f>
+              <c:strCache>
+                <c:ptCount val="1"/>
+                <c:pt idx="0">
+                  <c:v>Operations</c:v>
+                </c:pt>
+              </c:strCache>
+            </c:strRef>
+          </c:tx>
+          <c:spPr>
+            <a:solidFill>
+              <a:srgbClr val="BFE5EF">
+                <a:alpha val="25000"/>
+              </a:srgbClr>
+            </a:solidFill>
+            <a:ln w="19050" cap="flat">
+              <a:solidFill>
+                <a:srgbClr val="BFE5EF"/>
+              </a:solidFill>
+              <a:prstDash val="solid"/>
+              <a:round/>
+            </a:ln>
+            <a:effectLst/>
+          </c:spPr>
+          <c:invertIfNegative val="0"/>
+          <c:marker>
+            <c:symbol val="circle"/>
+            <c:size val="6"/>
+            <c:spPr>
+              <a:solidFill>
+                <a:srgbClr val="BFE5EF"/>
+              </a:solidFill>
+              <a:ln w="9525" cap="flat">
+                <a:solidFill>
+                  <a:srgbClr val="BFE5EF"/>
+                </a:solidFill>
+                <a:prstDash val="solid"/>
+                <a:round/>
+              </a:ln>
+              <a:effectLst/>
+            </c:spPr>
+          </c:marker>
+          <c:cat>
+            <c:multiLvlStrRef>
+              <c:f>Sheet1!$A$2:$A$7</c:f>
+              <c:multiLvlStrCache>
+                <c:ptCount val="6"/>
+                <c:lvl>
+                  <c:pt idx="0">
+                    <c:v>2025</c:v>
+                  </c:pt>
+                  <c:pt idx="1">
+                    <c:v>2027</c:v>
+                  </c:pt>
+                  <c:pt idx="2">
+                    <c:v>2029</c:v>
+                  </c:pt>
+                  <c:pt idx="3">
+                    <c:v>2031</c:v>
+                  </c:pt>
+                  <c:pt idx="4">
+                    <c:v>2033</c:v>
+                  </c:pt>
+                  <c:pt idx="5">
+                    <c:v>2035</c:v>
+                  </c:pt>
+                </c:lvl>
+              </c:multiLvlStrCache>
+            </c:multiLvlStrRef>
+          </c:cat>
+          <c:val>
+            <c:numRef>
+              <c:f>Sheet1!$C$2:$C$7</c:f>
+              <c:numCache>
+                <c:formatCode>General</c:formatCode>
+                <c:ptCount val="6"/>
+                <c:pt idx="0">
+                  <c:v>8.97</c:v>
+                </c:pt>
+                <c:pt idx="1">
+                  <c:v>7.28</c:v>
+                </c:pt>
+                <c:pt idx="2">
+                  <c:v>5.12</c:v>
+                </c:pt>
+                <c:pt idx="3">
+                  <c:v>13.29</c:v>
+                </c:pt>
+                <c:pt idx="4">
+                  <c:v>18.26</c:v>
+                </c:pt>
+                <c:pt idx="5">
+                  <c:v>20.61</c:v>
+                </c:pt>
+              </c:numCache>
+            </c:numRef>
+          </c:val>
+        </c:ser>
+        <c:ser>
+          <c:idx val="2"/>
+          <c:order val="2"/>
+          <c:tx>
+            <c:strRef>
+              <c:f>Sheet1!$D$1</c:f>
+              <c:strCache>
+                <c:ptCount val="1"/>
+                <c:pt idx="0">
+                  <c:v>Technology</c:v>
+                </c:pt>
+              </c:strCache>
+            </c:strRef>
+          </c:tx>
+          <c:spPr>
+            <a:solidFill>
+              <a:srgbClr val="B84C65">
+                <a:alpha val="25000"/>
+              </a:srgbClr>
+            </a:solidFill>
+            <a:ln w="19050" cap="flat">
+              <a:solidFill>
+                <a:srgbClr val="B84C65"/>
+              </a:solidFill>
+              <a:prstDash val="solid"/>
+              <a:round/>
+            </a:ln>
+            <a:effectLst/>
+          </c:spPr>
+          <c:invertIfNegative val="0"/>
+          <c:marker>
+            <c:symbol val="circle"/>
+            <c:size val="6"/>
+            <c:spPr>
+              <a:solidFill>
+                <a:srgbClr val="B84C65"/>
+              </a:solidFill>
+              <a:ln w="9525" cap="flat">
+                <a:solidFill>
+                  <a:srgbClr val="B84C65"/>
+                </a:solidFill>
+                <a:prstDash val="solid"/>
+                <a:round/>
+              </a:ln>
+              <a:effectLst/>
+            </c:spPr>
+          </c:marker>
+          <c:cat>
+            <c:multiLvlStrRef>
+              <c:f>Sheet1!$A$2:$A$7</c:f>
+              <c:multiLvlStrCache>
+                <c:ptCount val="6"/>
+                <c:lvl>
+                  <c:pt idx="0">
+                    <c:v>2025</c:v>
+                  </c:pt>
+                  <c:pt idx="1">
+                    <c:v>2027</c:v>
+                  </c:pt>
+                  <c:pt idx="2">
+                    <c:v>2029</c:v>
+                  </c:pt>
+                  <c:pt idx="3">
+                    <c:v>2031</c:v>
+                  </c:pt>
+                  <c:pt idx="4">
+                    <c:v>2033</c:v>
+                  </c:pt>
+                  <c:pt idx="5">
+                    <c:v>2035</c:v>
+                  </c:pt>
+                </c:lvl>
+              </c:multiLvlStrCache>
+            </c:multiLvlStrRef>
+          </c:cat>
+          <c:val>
+            <c:numRef>
+              <c:f>Sheet1!$D$2:$D$7</c:f>
+              <c:numCache>
+                <c:formatCode>General</c:formatCode>
+                <c:ptCount val="6"/>
+                <c:pt idx="0">
+                  <c:v>5.95</c:v>
+                </c:pt>
+                <c:pt idx="1">
+                  <c:v>6.57</c:v>
+                </c:pt>
+                <c:pt idx="2">
+                  <c:v>10.19</c:v>
+                </c:pt>
+                <c:pt idx="3">
+                  <c:v>14.57</c:v>
+                </c:pt>
+                <c:pt idx="4">
+                  <c:v>15.22</c:v>
+                </c:pt>
+                <c:pt idx="5">
+                  <c:v>19.94</c:v>
+                </c:pt>
+              </c:numCache>
+            </c:numRef>
+          </c:val>
+        </c:ser>
+        <c:dLbls>
+          <c:numFmt formatCode="#,##0" sourceLinked="0"/>
+          <c:txPr>
+            <a:bodyPr/>
+            <a:lstStyle/>
+            <a:p>
+              <a:pPr>
+                <a:defRPr b="0" i="0" strike="noStrike" sz="1200" u="none">
+                  <a:solidFill>
+                    <a:srgbClr val="000000"/>
+                  </a:solidFill>
+                  <a:latin typeface="Arial"/>
+                </a:defRPr>
+              </a:pPr>
+            </a:p>
+          </c:txPr>
+          <c:showLegendKey val="0"/>
+          <c:showVal val="0"/>
+          <c:showCatName val="0"/>
+          <c:showSerName val="0"/>
+          <c:showPercent val="0"/>
+          <c:showBubbleSize val="0"/>
+          <c:showLeaderLines val="0"/>
+        </c:dLbls>
+        <c:axId val="2094734554"/>
+        <c:axId val="2094734552"/>
+        <c:axId val="2094734556"/>
+      </c:radarChart>
+      <c:catAx>
+        <c:axId val="2094734554"/>
+        <c:scaling>
+          <c:orientation val="minMax"/>
+        </c:scaling>
+        <c:delete val="0"/>
+        <c:axPos val="b"/>
+        <c:numFmt formatCode="General" sourceLinked="1"/>
+        <c:majorTickMark val="out"/>
+        <c:minorTickMark val="none"/>
+        <c:tickLblPos val="low"/>
+        <c:spPr>
+          <a:ln w="12700" cap="flat">
+            <a:solidFill>
+              <a:srgbClr val="888888"/>
+            </a:solidFill>
+            <a:prstDash val="solid"/>
+            <a:round/>
+          </a:ln>
+        </c:spPr>
+        <c:txPr>
+          <a:bodyPr/>
+          <a:lstStyle/>
+          <a:p>
+            <a:pPr>
+              <a:defRPr sz="1000" b="0" i="0" u="none" strike="noStrike">
+                <a:solidFill>
+                  <a:srgbClr val="8A7968"/>
+                </a:solidFill>
+                <a:latin typeface="Calibri"/>
+              </a:defRPr>
+            </a:pPr>
+            <a:endParaRPr lang="en-US"/>
+          </a:p>
+        </c:txPr>
+        <c:crossAx val="2094734552"/>
+        <c:crosses val="autoZero"/>
+        <c:auto val="1"/>
+        <c:lblAlgn val="ctr"/>
+        <c:noMultiLvlLbl val="1"/>
+      </c:catAx>
+      <c:valAx>
+        <c:axId val="2094734552"/>
+        <c:scaling>
+          <c:orientation val="minMax"/>
+          <c:max val="22"/>
+          <c:min val="0"/>
+        </c:scaling>
+        <c:delete val="0"/>
+        <c:axPos val="l"/>
+        <c:majorGridlines>
+          <c:spPr>
+            <a:ln w="5080" cap="flat">
+              <a:solidFill>
+                <a:srgbClr val="C9B9A8"/>
+              </a:solidFill>
+              <a:prstDash val="solid"/>
+              <a:round/>
+            </a:ln>
+          </c:spPr>
+        </c:majorGridlines>
+        <c:numFmt formatCode="$0&quot;M&quot;" sourceLinked="0"/>
+        <c:majorTickMark val="out"/>
+        <c:minorTickMark val="none"/>
+        <c:tickLblPos val="nextTo"/>
+        <c:spPr>
+          <a:ln w="12700" cap="flat">
+            <a:solidFill>
+              <a:srgbClr val="888888"/>
+            </a:solidFill>
+            <a:prstDash val="solid"/>
+            <a:round/>
+          </a:ln>
+        </c:spPr>
+        <c:txPr>
+          <a:bodyPr/>
+          <a:lstStyle/>
+          <a:p>
+            <a:pPr>
+              <a:defRPr sz="900" b="0" i="0" u="none" strike="noStrike">
+                <a:solidFill>
+                  <a:srgbClr val="8A7968"/>
+                </a:solidFill>
+                <a:latin typeface="Calibri"/>
+              </a:defRPr>
+            </a:pPr>
+            <a:endParaRPr lang="en-US"/>
+          </a:p>
+        </c:txPr>
+        <c:crossAx val="2094734554"/>
+        <c:crosses val="autoZero"/>
+        <c:crossBetween val="between"/>
+      </c:valAx>
+      <c:spPr>
+        <a:solidFill>
+          <a:srgbClr val="FFF5ED"/>
+        </a:solidFill>
+        <a:ln>
+          <a:noFill/>
+        </a:ln>
+        <a:effectLst/>
+      </c:spPr>
+    </c:plotArea>
+    <c:legend>
+      <c:legendPos val="b"/>
+      <c:overlay val="0"/>
+      <c:txPr>
+        <a:bodyPr/>
+        <a:lstStyle/>
+        <a:p>
+          <a:pPr>
+            <a:defRPr sz="1000">
+              <a:solidFill>
+                <a:srgbClr val="8A7968"/>
+              </a:solidFill>
+              <a:latin typeface="Calibri"/>
+              <a:cs typeface="Calibri"/>
+            </a:defRPr>
+          </a:pPr>
+          <a:endParaRPr lang="en-US"/>
+        </a:p>
+      </c:txPr>
+    </c:legend>
+    <c:plotVisOnly val="1"/>
+    <c:dispBlanksAs val="span"/>
+  </c:chart>
+  <c:spPr>
+    <a:solidFill>
+      <a:srgbClr val="FFF5ED"/>
+    </a:solidFill>
+    <a:ln>
+      <a:noFill/>
+    </a:ln>
+    <a:effectLst/>
+  </c:spPr>
+  <c:externalData r:id="rId1">
+    <c:autoUpdate val="0"/>
+  </c:externalData>
+</c:chartSpace>
+</file>
+
 <file path=ppt/charts/chart2.xml><?xml version="1.0" encoding="utf-8"?>
 <c:chartSpace xmlns:c="http://schemas.openxmlformats.org/drawingml/2006/chart" xmlns:a="http://schemas.openxmlformats.org/drawingml/2006/main" xmlns:r="http://schemas.openxmlformats.org/officeDocument/2006/relationships">
   <c:date1904 val="0"/>
@@ -1956,18 +3667,18 @@
           <c:dLbls>
             <c:dLbl>
               <c:idx val="0"/>
-              <c:numFmt formatCode="0%" sourceLinked="0"/>
+              <c:numFmt formatCode="General" sourceLinked="0"/>
               <c:spPr/>
               <c:txPr>
                 <a:bodyPr/>
                 <a:lstStyle/>
                 <a:p>
                   <a:pPr>
-                    <a:defRPr sz="1000" b="0" i="0" u="none" strike="noStrike">
+                    <a:defRPr sz="1200" b="0" i="0" u="none" strike="noStrike">
                       <a:solidFill>
-                        <a:srgbClr val="353745"/>
+                        <a:srgbClr val="000000"/>
                       </a:solidFill>
-                      <a:latin typeface="Calibri"/>
+                      <a:latin typeface="Arial"/>
                     </a:defRPr>
                   </a:pPr>
                 </a:p>
@@ -1976,23 +3687,23 @@
               <c:showVal val="0"/>
               <c:showCatName val="0"/>
               <c:showSerName val="0"/>
-              <c:showPercent val="1"/>
+              <c:showPercent val="0"/>
               <c:showBubbleSize val="0"/>
             </c:dLbl>
             <c:dLbl>
               <c:idx val="1"/>
-              <c:numFmt formatCode="0%" sourceLinked="0"/>
+              <c:numFmt formatCode="General" sourceLinked="0"/>
               <c:spPr/>
               <c:txPr>
                 <a:bodyPr/>
                 <a:lstStyle/>
                 <a:p>
                   <a:pPr>
-                    <a:defRPr sz="1000" b="0" i="0" u="none" strike="noStrike">
+                    <a:defRPr sz="1200" b="0" i="0" u="none" strike="noStrike">
                       <a:solidFill>
-                        <a:srgbClr val="353745"/>
+                        <a:srgbClr val="000000"/>
                       </a:solidFill>
-                      <a:latin typeface="Calibri"/>
+                      <a:latin typeface="Arial"/>
                     </a:defRPr>
                   </a:pPr>
                 </a:p>
@@ -2001,23 +3712,23 @@
               <c:showVal val="0"/>
               <c:showCatName val="0"/>
               <c:showSerName val="0"/>
-              <c:showPercent val="1"/>
+              <c:showPercent val="0"/>
               <c:showBubbleSize val="0"/>
             </c:dLbl>
             <c:dLbl>
               <c:idx val="2"/>
-              <c:numFmt formatCode="0%" sourceLinked="0"/>
+              <c:numFmt formatCode="General" sourceLinked="0"/>
               <c:spPr/>
               <c:txPr>
                 <a:bodyPr/>
                 <a:lstStyle/>
                 <a:p>
                   <a:pPr>
-                    <a:defRPr sz="1000" b="0" i="0" u="none" strike="noStrike">
+                    <a:defRPr sz="1200" b="0" i="0" u="none" strike="noStrike">
                       <a:solidFill>
-                        <a:srgbClr val="353745"/>
+                        <a:srgbClr val="000000"/>
                       </a:solidFill>
-                      <a:latin typeface="Calibri"/>
+                      <a:latin typeface="Arial"/>
                     </a:defRPr>
                   </a:pPr>
                 </a:p>
@@ -2026,10 +3737,10 @@
               <c:showVal val="0"/>
               <c:showCatName val="0"/>
               <c:showSerName val="0"/>
-              <c:showPercent val="1"/>
+              <c:showPercent val="0"/>
               <c:showBubbleSize val="0"/>
             </c:dLbl>
-            <c:numFmt formatCode="0%" sourceLinked="0"/>
+            <c:numFmt formatCode="General" sourceLinked="0"/>
             <c:txPr>
               <a:bodyPr/>
               <a:lstStyle/>
@@ -2532,18 +4243,27 @@
           </c:marker>
           <c:cat>
             <c:multiLvlStrRef>
-              <c:f>Sheet1!$A$2:$A$4</c:f>
+              <c:f>Sheet1!$A$2:$A$7</c:f>
               <c:multiLvlStrCache>
-                <c:ptCount val="3"/>
+                <c:ptCount val="6"/>
                 <c:lvl>
                   <c:pt idx="0">
-                    <c:v>2025 Rev</c:v>
+                    <c:v>2025</c:v>
                   </c:pt>
                   <c:pt idx="1">
-                    <c:v>2035 Rev</c:v>
+                    <c:v>2027</c:v>
                   </c:pt>
                   <c:pt idx="2">
-                    <c:v>10Y CAGR</c:v>
+                    <c:v>2029</c:v>
+                  </c:pt>
+                  <c:pt idx="3">
+                    <c:v>2031</c:v>
+                  </c:pt>
+                  <c:pt idx="4">
+                    <c:v>2033</c:v>
+                  </c:pt>
+                  <c:pt idx="5">
+                    <c:v>2035</c:v>
                   </c:pt>
                 </c:lvl>
               </c:multiLvlStrCache>
@@ -2551,18 +4271,27 @@
           </c:cat>
           <c:val>
             <c:numRef>
-              <c:f>Sheet1!$B$2:$B$4</c:f>
+              <c:f>Sheet1!$B$2:$B$7</c:f>
               <c:numCache>
                 <c:formatCode>General</c:formatCode>
-                <c:ptCount val="3"/>
+                <c:ptCount val="6"/>
                 <c:pt idx="0">
-                  <c:v>100</c:v>
+                  <c:v>9.17</c:v>
                 </c:pt>
                 <c:pt idx="1">
-                  <c:v>0</c:v>
+                  <c:v>8.27</c:v>
                 </c:pt>
                 <c:pt idx="2">
-                  <c:v>0</c:v>
+                  <c:v>9.98</c:v>
+                </c:pt>
+                <c:pt idx="3">
+                  <c:v>12.93</c:v>
+                </c:pt>
+                <c:pt idx="4">
+                  <c:v>17.6</c:v>
+                </c:pt>
+                <c:pt idx="5">
+                  <c:v>18.11</c:v>
                 </c:pt>
               </c:numCache>
             </c:numRef>
@@ -2615,18 +4344,27 @@
           </c:marker>
           <c:cat>
             <c:multiLvlStrRef>
-              <c:f>Sheet1!$A$2:$A$4</c:f>
+              <c:f>Sheet1!$A$2:$A$7</c:f>
               <c:multiLvlStrCache>
-                <c:ptCount val="3"/>
+                <c:ptCount val="6"/>
                 <c:lvl>
                   <c:pt idx="0">
-                    <c:v>2025 Rev</c:v>
+                    <c:v>2025</c:v>
                   </c:pt>
                   <c:pt idx="1">
-                    <c:v>2035 Rev</c:v>
+                    <c:v>2027</c:v>
                   </c:pt>
                   <c:pt idx="2">
-                    <c:v>10Y CAGR</c:v>
+                    <c:v>2029</c:v>
+                  </c:pt>
+                  <c:pt idx="3">
+                    <c:v>2031</c:v>
+                  </c:pt>
+                  <c:pt idx="4">
+                    <c:v>2033</c:v>
+                  </c:pt>
+                  <c:pt idx="5">
+                    <c:v>2035</c:v>
                   </c:pt>
                 </c:lvl>
               </c:multiLvlStrCache>
@@ -2634,18 +4372,27 @@
           </c:cat>
           <c:val>
             <c:numRef>
-              <c:f>Sheet1!$C$2:$C$4</c:f>
+              <c:f>Sheet1!$C$2:$C$7</c:f>
               <c:numCache>
                 <c:formatCode>General</c:formatCode>
-                <c:ptCount val="3"/>
+                <c:ptCount val="6"/>
                 <c:pt idx="0">
-                  <c:v>93</c:v>
+                  <c:v>8.97</c:v>
                 </c:pt>
                 <c:pt idx="1">
-                  <c:v>100</c:v>
+                  <c:v>7.28</c:v>
                 </c:pt>
                 <c:pt idx="2">
-                  <c:v>28</c:v>
+                  <c:v>5.12</c:v>
+                </c:pt>
+                <c:pt idx="3">
+                  <c:v>13.29</c:v>
+                </c:pt>
+                <c:pt idx="4">
+                  <c:v>18.26</c:v>
+                </c:pt>
+                <c:pt idx="5">
+                  <c:v>20.61</c:v>
                 </c:pt>
               </c:numCache>
             </c:numRef>
@@ -2698,18 +4445,27 @@
           </c:marker>
           <c:cat>
             <c:multiLvlStrRef>
-              <c:f>Sheet1!$A$2:$A$4</c:f>
+              <c:f>Sheet1!$A$2:$A$7</c:f>
               <c:multiLvlStrCache>
-                <c:ptCount val="3"/>
+                <c:ptCount val="6"/>
                 <c:lvl>
                   <c:pt idx="0">
-                    <c:v>2025 Rev</c:v>
+                    <c:v>2025</c:v>
                   </c:pt>
                   <c:pt idx="1">
-                    <c:v>2035 Rev</c:v>
+                    <c:v>2027</c:v>
                   </c:pt>
                   <c:pt idx="2">
-                    <c:v>10Y CAGR</c:v>
+                    <c:v>2029</c:v>
+                  </c:pt>
+                  <c:pt idx="3">
+                    <c:v>2031</c:v>
+                  </c:pt>
+                  <c:pt idx="4">
+                    <c:v>2033</c:v>
+                  </c:pt>
+                  <c:pt idx="5">
+                    <c:v>2035</c:v>
                   </c:pt>
                 </c:lvl>
               </c:multiLvlStrCache>
@@ -2717,18 +4473,27 @@
           </c:cat>
           <c:val>
             <c:numRef>
-              <c:f>Sheet1!$D$2:$D$4</c:f>
+              <c:f>Sheet1!$D$2:$D$7</c:f>
               <c:numCache>
                 <c:formatCode>General</c:formatCode>
-                <c:ptCount val="3"/>
+                <c:ptCount val="6"/>
                 <c:pt idx="0">
-                  <c:v>0</c:v>
+                  <c:v>5.95</c:v>
                 </c:pt>
                 <c:pt idx="1">
-                  <c:v>73</c:v>
+                  <c:v>6.57</c:v>
                 </c:pt>
                 <c:pt idx="2">
-                  <c:v>100</c:v>
+                  <c:v>10.19</c:v>
+                </c:pt>
+                <c:pt idx="3">
+                  <c:v>14.57</c:v>
+                </c:pt>
+                <c:pt idx="4">
+                  <c:v>15.22</c:v>
+                </c:pt>
+                <c:pt idx="5">
+                  <c:v>19.94</c:v>
                 </c:pt>
               </c:numCache>
             </c:numRef>
@@ -2807,6 +4572,8 @@
         <c:axId val="2094734552"/>
         <c:scaling>
           <c:orientation val="minMax"/>
+          <c:max val="22"/>
+          <c:min val="0"/>
         </c:scaling>
         <c:delete val="0"/>
         <c:axPos val="l"/>
@@ -2821,7 +4588,7 @@
             </a:ln>
           </c:spPr>
         </c:majorGridlines>
-        <c:numFmt formatCode="General" sourceLinked="0"/>
+        <c:numFmt formatCode="$0&quot;M&quot;" sourceLinked="0"/>
         <c:majorTickMark val="out"/>
         <c:minorTickMark val="none"/>
         <c:tickLblPos val="nextTo"/>
@@ -2853,6 +4620,645 @@
         <c:crosses val="autoZero"/>
         <c:crossBetween val="between"/>
       </c:valAx>
+      <c:spPr>
+        <a:solidFill>
+          <a:srgbClr val="FFF5ED"/>
+        </a:solidFill>
+        <a:ln>
+          <a:noFill/>
+        </a:ln>
+        <a:effectLst/>
+      </c:spPr>
+    </c:plotArea>
+    <c:legend>
+      <c:legendPos val="b"/>
+      <c:overlay val="0"/>
+      <c:txPr>
+        <a:bodyPr/>
+        <a:lstStyle/>
+        <a:p>
+          <a:pPr>
+            <a:defRPr sz="1000">
+              <a:solidFill>
+                <a:srgbClr val="8A7968"/>
+              </a:solidFill>
+              <a:latin typeface="Calibri"/>
+              <a:cs typeface="Calibri"/>
+            </a:defRPr>
+          </a:pPr>
+          <a:endParaRPr lang="en-US"/>
+        </a:p>
+      </c:txPr>
+    </c:legend>
+    <c:plotVisOnly val="1"/>
+    <c:dispBlanksAs val="span"/>
+  </c:chart>
+  <c:spPr>
+    <a:solidFill>
+      <a:srgbClr val="FFF5ED"/>
+    </a:solidFill>
+    <a:ln>
+      <a:noFill/>
+    </a:ln>
+    <a:effectLst/>
+  </c:spPr>
+  <c:externalData r:id="rId1">
+    <c:autoUpdate val="0"/>
+  </c:externalData>
+</c:chartSpace>
+</file>
+
+<file path=ppt/charts/chart9.xml><?xml version="1.0" encoding="utf-8"?>
+<c:chartSpace xmlns:c="http://schemas.openxmlformats.org/drawingml/2006/chart" xmlns:a="http://schemas.openxmlformats.org/drawingml/2006/main" xmlns:r="http://schemas.openxmlformats.org/officeDocument/2006/relationships">
+  <c:date1904 val="0"/>
+  <c:roundedCorners val="1"/>
+  <c:chart>
+    <c:autoTitleDeleted val="1"/>
+    <c:plotArea>
+      <c:layout/>
+      <c:barChart>
+        <c:barDir val="col"/>
+        <c:grouping val="clustered"/>
+        <c:varyColors val="0"/>
+        <c:ser>
+          <c:idx val="0"/>
+          <c:order val="0"/>
+          <c:tx>
+            <c:strRef>
+              <c:f>Sheet1!$B$1</c:f>
+              <c:strCache>
+                <c:ptCount val="1"/>
+                <c:pt idx="0">
+                  <c:v>Revenue ($M)</c:v>
+                </c:pt>
+              </c:strCache>
+            </c:strRef>
+          </c:tx>
+          <c:spPr>
+            <a:solidFill>
+              <a:srgbClr val="2D5F7C"/>
+            </a:solidFill>
+            <a:effectLst/>
+          </c:spPr>
+          <c:invertIfNegative val="0"/>
+          <c:dLbls>
+            <c:numFmt formatCode="#,##0" sourceLinked="0"/>
+            <c:txPr>
+              <a:bodyPr/>
+              <a:lstStyle/>
+              <a:p>
+                <a:pPr>
+                  <a:defRPr b="0" i="0" strike="noStrike" sz="1200" u="none">
+                    <a:solidFill>
+                      <a:srgbClr val="000000"/>
+                    </a:solidFill>
+                    <a:latin typeface="Arial"/>
+                  </a:defRPr>
+                </a:pPr>
+              </a:p>
+            </c:txPr>
+            <c:showLegendKey val="0"/>
+            <c:showVal val="0"/>
+            <c:showCatName val="0"/>
+            <c:showSerName val="0"/>
+            <c:showPercent val="0"/>
+            <c:showBubbleSize val="0"/>
+            <c:showLeaderLines val="0"/>
+          </c:dLbls>
+          <c:cat>
+            <c:multiLvlStrRef>
+              <c:f>Sheet1!$A$2:$A$12</c:f>
+              <c:multiLvlStrCache>
+                <c:ptCount val="11"/>
+                <c:lvl>
+                  <c:pt idx="0">
+                    <c:v>2025</c:v>
+                  </c:pt>
+                  <c:pt idx="1">
+                    <c:v>2026</c:v>
+                  </c:pt>
+                  <c:pt idx="2">
+                    <c:v>2027</c:v>
+                  </c:pt>
+                  <c:pt idx="3">
+                    <c:v>2028</c:v>
+                  </c:pt>
+                  <c:pt idx="4">
+                    <c:v>2029</c:v>
+                  </c:pt>
+                  <c:pt idx="5">
+                    <c:v>2030</c:v>
+                  </c:pt>
+                  <c:pt idx="6">
+                    <c:v>2031</c:v>
+                  </c:pt>
+                  <c:pt idx="7">
+                    <c:v>2032</c:v>
+                  </c:pt>
+                  <c:pt idx="8">
+                    <c:v>2033</c:v>
+                  </c:pt>
+                  <c:pt idx="9">
+                    <c:v>2034</c:v>
+                  </c:pt>
+                  <c:pt idx="10">
+                    <c:v>2035</c:v>
+                  </c:pt>
+                </c:lvl>
+              </c:multiLvlStrCache>
+            </c:multiLvlStrRef>
+          </c:cat>
+          <c:val>
+            <c:numRef>
+              <c:f>Sheet1!$B$2:$B$12</c:f>
+              <c:numCache>
+                <c:formatCode>General</c:formatCode>
+                <c:ptCount val="11"/>
+                <c:pt idx="0">
+                  <c:v>24.1</c:v>
+                </c:pt>
+                <c:pt idx="1">
+                  <c:v>22.3</c:v>
+                </c:pt>
+                <c:pt idx="2">
+                  <c:v>22.1</c:v>
+                </c:pt>
+                <c:pt idx="3">
+                  <c:v>25.6</c:v>
+                </c:pt>
+                <c:pt idx="4">
+                  <c:v>25.3</c:v>
+                </c:pt>
+                <c:pt idx="5">
+                  <c:v>34.2</c:v>
+                </c:pt>
+                <c:pt idx="6">
+                  <c:v>40.8</c:v>
+                </c:pt>
+                <c:pt idx="7">
+                  <c:v>47.8</c:v>
+                </c:pt>
+                <c:pt idx="8">
+                  <c:v>51.1</c:v>
+                </c:pt>
+                <c:pt idx="9">
+                  <c:v>56</c:v>
+                </c:pt>
+                <c:pt idx="10">
+                  <c:v>58.7</c:v>
+                </c:pt>
+              </c:numCache>
+            </c:numRef>
+          </c:val>
+        </c:ser>
+        <c:dLbls>
+          <c:numFmt formatCode="#,##0" sourceLinked="0"/>
+          <c:txPr>
+            <a:bodyPr/>
+            <a:lstStyle/>
+            <a:p>
+              <a:pPr>
+                <a:defRPr b="0" i="0" strike="noStrike" sz="1200" u="none">
+                  <a:solidFill>
+                    <a:srgbClr val="000000"/>
+                  </a:solidFill>
+                  <a:latin typeface="Arial"/>
+                </a:defRPr>
+              </a:pPr>
+            </a:p>
+          </c:txPr>
+          <c:showLegendKey val="0"/>
+          <c:showVal val="0"/>
+          <c:showCatName val="0"/>
+          <c:showSerName val="0"/>
+          <c:showPercent val="0"/>
+          <c:showBubbleSize val="0"/>
+          <c:showLeaderLines val="0"/>
+        </c:dLbls>
+        <c:gapWidth val="55"/>
+        <c:overlap val="0"/>
+        <c:axId val="2094734554"/>
+        <c:axId val="2094734552"/>
+        <c:axId val="2094734556"/>
+      </c:barChart>
+      <c:lineChart>
+        <c:varyColors val="0"/>
+        <c:ser>
+          <c:idx val="1"/>
+          <c:order val="1"/>
+          <c:tx>
+            <c:strRef>
+              <c:f>Sheet1!$C$1</c:f>
+              <c:strCache>
+                <c:ptCount val="1"/>
+                <c:pt idx="0">
+                  <c:v>EBITDA %</c:v>
+                </c:pt>
+              </c:strCache>
+            </c:strRef>
+          </c:tx>
+          <c:spPr>
+            <a:solidFill>
+              <a:srgbClr val="B84C65"/>
+            </a:solidFill>
+            <a:ln w="31750" cap="flat">
+              <a:solidFill>
+                <a:srgbClr val="B84C65"/>
+              </a:solidFill>
+              <a:prstDash val="solid"/>
+              <a:round/>
+            </a:ln>
+            <a:effectLst/>
+          </c:spPr>
+          <c:invertIfNegative val="0"/>
+          <c:dLbls>
+            <c:numFmt formatCode="#,##0" sourceLinked="0"/>
+            <c:txPr>
+              <a:bodyPr/>
+              <a:lstStyle/>
+              <a:p>
+                <a:pPr>
+                  <a:defRPr b="0" i="0" strike="noStrike" sz="1200" u="none">
+                    <a:solidFill>
+                      <a:srgbClr val="000000"/>
+                    </a:solidFill>
+                    <a:latin typeface="Arial"/>
+                  </a:defRPr>
+                </a:pPr>
+              </a:p>
+            </c:txPr>
+            <c:showLegendKey val="0"/>
+            <c:showVal val="0"/>
+            <c:showCatName val="0"/>
+            <c:showSerName val="0"/>
+            <c:showPercent val="0"/>
+            <c:showBubbleSize val="0"/>
+            <c:showLeaderLines val="0"/>
+          </c:dLbls>
+          <c:marker>
+            <c:symbol val="circle"/>
+            <c:size val="7"/>
+            <c:spPr>
+              <a:solidFill>
+                <a:srgbClr val="B84C65"/>
+              </a:solidFill>
+              <a:ln w="9525" cap="flat">
+                <a:solidFill>
+                  <a:srgbClr val="B84C65"/>
+                </a:solidFill>
+                <a:prstDash val="solid"/>
+                <a:round/>
+              </a:ln>
+              <a:effectLst/>
+            </c:spPr>
+          </c:marker>
+          <c:cat>
+            <c:multiLvlStrRef>
+              <c:f>Sheet1!$A$2:$A$12</c:f>
+              <c:multiLvlStrCache>
+                <c:ptCount val="11"/>
+                <c:lvl>
+                  <c:pt idx="0">
+                    <c:v>2025</c:v>
+                  </c:pt>
+                  <c:pt idx="1">
+                    <c:v>2026</c:v>
+                  </c:pt>
+                  <c:pt idx="2">
+                    <c:v>2027</c:v>
+                  </c:pt>
+                  <c:pt idx="3">
+                    <c:v>2028</c:v>
+                  </c:pt>
+                  <c:pt idx="4">
+                    <c:v>2029</c:v>
+                  </c:pt>
+                  <c:pt idx="5">
+                    <c:v>2030</c:v>
+                  </c:pt>
+                  <c:pt idx="6">
+                    <c:v>2031</c:v>
+                  </c:pt>
+                  <c:pt idx="7">
+                    <c:v>2032</c:v>
+                  </c:pt>
+                  <c:pt idx="8">
+                    <c:v>2033</c:v>
+                  </c:pt>
+                  <c:pt idx="9">
+                    <c:v>2034</c:v>
+                  </c:pt>
+                  <c:pt idx="10">
+                    <c:v>2035</c:v>
+                  </c:pt>
+                </c:lvl>
+              </c:multiLvlStrCache>
+            </c:multiLvlStrRef>
+          </c:cat>
+          <c:val>
+            <c:numRef>
+              <c:f>Sheet1!$C$2:$C$12</c:f>
+              <c:numCache>
+                <c:formatCode>General</c:formatCode>
+                <c:ptCount val="11"/>
+                <c:pt idx="0">
+                  <c:v>27.1</c:v>
+                </c:pt>
+                <c:pt idx="1">
+                  <c:v>21</c:v>
+                </c:pt>
+                <c:pt idx="2">
+                  <c:v>19.5</c:v>
+                </c:pt>
+                <c:pt idx="3">
+                  <c:v>24.2</c:v>
+                </c:pt>
+                <c:pt idx="4">
+                  <c:v>15.3</c:v>
+                </c:pt>
+                <c:pt idx="5">
+                  <c:v>33.4</c:v>
+                </c:pt>
+                <c:pt idx="6">
+                  <c:v>31.6</c:v>
+                </c:pt>
+                <c:pt idx="7">
+                  <c:v>30.8</c:v>
+                </c:pt>
+                <c:pt idx="8">
+                  <c:v>27.3</c:v>
+                </c:pt>
+                <c:pt idx="9">
+                  <c:v>28</c:v>
+                </c:pt>
+                <c:pt idx="10">
+                  <c:v>26.3</c:v>
+                </c:pt>
+              </c:numCache>
+            </c:numRef>
+          </c:val>
+          <c:smooth val="0"/>
+        </c:ser>
+        <c:dLbls>
+          <c:numFmt formatCode="#,##0" sourceLinked="0"/>
+          <c:txPr>
+            <a:bodyPr/>
+            <a:lstStyle/>
+            <a:p>
+              <a:pPr>
+                <a:defRPr b="0" i="0" strike="noStrike" sz="1200" u="none">
+                  <a:solidFill>
+                    <a:srgbClr val="000000"/>
+                  </a:solidFill>
+                  <a:latin typeface="Arial"/>
+                </a:defRPr>
+              </a:pPr>
+            </a:p>
+          </c:txPr>
+          <c:showLegendKey val="0"/>
+          <c:showVal val="0"/>
+          <c:showCatName val="0"/>
+          <c:showSerName val="0"/>
+          <c:showPercent val="0"/>
+          <c:showBubbleSize val="0"/>
+          <c:showLeaderLines val="0"/>
+        </c:dLbls>
+        <c:marker val="1"/>
+        <c:axId val="2094734555"/>
+        <c:axId val="2094734553"/>
+        <c:axId val="2094734556"/>
+      </c:lineChart>
+      <c:catAx>
+        <c:axId val="2094734554"/>
+        <c:scaling>
+          <c:orientation val="minMax"/>
+        </c:scaling>
+        <c:delete val="0"/>
+        <c:axPos val="b"/>
+        <c:numFmt formatCode="General" sourceLinked="1"/>
+        <c:majorTickMark val="out"/>
+        <c:minorTickMark val="none"/>
+        <c:tickLblPos val="low"/>
+        <c:spPr>
+          <a:ln w="12700" cap="flat">
+            <a:solidFill>
+              <a:srgbClr val="888888"/>
+            </a:solidFill>
+            <a:prstDash val="solid"/>
+            <a:round/>
+          </a:ln>
+        </c:spPr>
+        <c:txPr>
+          <a:bodyPr/>
+          <a:lstStyle/>
+          <a:p>
+            <a:pPr>
+              <a:defRPr sz="1000" b="0" i="0" u="none" strike="noStrike">
+                <a:solidFill>
+                  <a:srgbClr val="8A7968"/>
+                </a:solidFill>
+                <a:latin typeface="Calibri"/>
+              </a:defRPr>
+            </a:pPr>
+            <a:endParaRPr lang="en-US"/>
+          </a:p>
+        </c:txPr>
+        <c:crossAx val="2094734552"/>
+        <c:crosses val="autoZero"/>
+        <c:auto val="1"/>
+        <c:lblAlgn val="ctr"/>
+        <c:noMultiLvlLbl val="1"/>
+      </c:catAx>
+      <c:valAx>
+        <c:axId val="2094734552"/>
+        <c:scaling>
+          <c:orientation val="minMax"/>
+        </c:scaling>
+        <c:delete val="0"/>
+        <c:axPos val="l"/>
+        <c:majorGridlines>
+          <c:spPr>
+            <a:ln w="6350" cap="flat">
+              <a:solidFill>
+                <a:srgbClr val="C9B9A8"/>
+              </a:solidFill>
+              <a:prstDash val="solid"/>
+              <a:round/>
+            </a:ln>
+          </c:spPr>
+        </c:majorGridlines>
+        <c:title>
+          <c:tx>
+            <c:rich>
+              <a:bodyPr/>
+              <a:lstStyle/>
+              <a:p>
+                <a:pPr>
+                  <a:defRPr sz="1000" b="0" i="0" u="none" strike="noStrike">
+                    <a:solidFill>
+                      <a:srgbClr val="8A7968"/>
+                    </a:solidFill>
+                    <a:latin typeface="Calibri"/>
+                  </a:defRPr>
+                </a:pPr>
+                <a:r>
+                  <a:rPr sz="1000" b="0" i="0" u="none" strike="noStrike">
+                    <a:solidFill>
+                      <a:srgbClr val="8A7968"/>
+                    </a:solidFill>
+                    <a:latin typeface="Calibri"/>
+                  </a:rPr>
+                  <a:t>Revenue ($M)</a:t>
+                </a:r>
+              </a:p>
+            </c:rich>
+          </c:tx>
+          <c:layout/>
+          <c:overlay val="0"/>
+        </c:title>
+        <c:numFmt formatCode="$0&quot;M&quot;" sourceLinked="0"/>
+        <c:majorTickMark val="out"/>
+        <c:minorTickMark val="none"/>
+        <c:tickLblPos val="nextTo"/>
+        <c:spPr>
+          <a:ln w="12700" cap="flat">
+            <a:solidFill>
+              <a:srgbClr val="888888"/>
+            </a:solidFill>
+            <a:prstDash val="solid"/>
+            <a:round/>
+          </a:ln>
+        </c:spPr>
+        <c:txPr>
+          <a:bodyPr/>
+          <a:lstStyle/>
+          <a:p>
+            <a:pPr>
+              <a:defRPr sz="1000" b="0" i="0" u="none" strike="noStrike">
+                <a:solidFill>
+                  <a:srgbClr val="8A7968"/>
+                </a:solidFill>
+                <a:latin typeface="Calibri"/>
+              </a:defRPr>
+            </a:pPr>
+            <a:endParaRPr lang="en-US"/>
+          </a:p>
+        </c:txPr>
+        <c:crossAx val="2094734554"/>
+        <c:crosses val="autoZero"/>
+        <c:crossBetween val="between"/>
+      </c:valAx>
+      <c:valAx>
+        <c:axId val="2094734553"/>
+        <c:scaling>
+          <c:orientation val="minMax"/>
+          <c:max val="40"/>
+          <c:min val="0"/>
+        </c:scaling>
+        <c:delete val="0"/>
+        <c:axPos val="r"/>
+        <c:title>
+          <c:tx>
+            <c:rich>
+              <a:bodyPr/>
+              <a:lstStyle/>
+              <a:p>
+                <a:pPr>
+                  <a:defRPr sz="1000" b="0" i="0" u="none" strike="noStrike">
+                    <a:solidFill>
+                      <a:srgbClr val="8A7968"/>
+                    </a:solidFill>
+                    <a:latin typeface="Calibri"/>
+                  </a:defRPr>
+                </a:pPr>
+                <a:r>
+                  <a:rPr sz="1000" b="0" i="0" u="none" strike="noStrike">
+                    <a:solidFill>
+                      <a:srgbClr val="8A7968"/>
+                    </a:solidFill>
+                    <a:latin typeface="Calibri"/>
+                  </a:rPr>
+                  <a:t>EBITDA %</a:t>
+                </a:r>
+              </a:p>
+            </c:rich>
+          </c:tx>
+          <c:layout/>
+          <c:overlay val="0"/>
+        </c:title>
+        <c:numFmt formatCode="0&quot;%&quot;" sourceLinked="0"/>
+        <c:majorTickMark val="out"/>
+        <c:minorTickMark val="none"/>
+        <c:tickLblPos val="nextTo"/>
+        <c:spPr>
+          <a:ln w="12700" cap="flat">
+            <a:solidFill>
+              <a:srgbClr val="888888"/>
+            </a:solidFill>
+            <a:prstDash val="solid"/>
+            <a:round/>
+          </a:ln>
+        </c:spPr>
+        <c:txPr>
+          <a:bodyPr/>
+          <a:lstStyle/>
+          <a:p>
+            <a:pPr>
+              <a:defRPr sz="1000" b="0" i="0" u="none" strike="noStrike">
+                <a:solidFill>
+                  <a:srgbClr val="8A7968"/>
+                </a:solidFill>
+                <a:latin typeface="Calibri"/>
+              </a:defRPr>
+            </a:pPr>
+            <a:endParaRPr lang="en-US"/>
+          </a:p>
+        </c:txPr>
+        <c:crossAx val="2094734555"/>
+        <c:crosses val="max"/>
+        <c:crossBetween val="between"/>
+      </c:valAx>
+      <c:catAx>
+        <c:axId val="2094734555"/>
+        <c:scaling>
+          <c:orientation val="minMax"/>
+        </c:scaling>
+        <c:delete val="1"/>
+        <c:axPos val="b"/>
+        <c:numFmt formatCode="General" sourceLinked="1"/>
+        <c:majorTickMark val="out"/>
+        <c:minorTickMark val="none"/>
+        <c:tickLblPos val="low"/>
+        <c:spPr>
+          <a:ln w="12700" cap="flat">
+            <a:solidFill>
+              <a:srgbClr val="888888"/>
+            </a:solidFill>
+            <a:prstDash val="solid"/>
+            <a:round/>
+          </a:ln>
+        </c:spPr>
+        <c:txPr>
+          <a:bodyPr/>
+          <a:lstStyle/>
+          <a:p>
+            <a:pPr>
+              <a:defRPr sz="1000" b="0" i="0" u="none" strike="noStrike">
+                <a:solidFill>
+                  <a:srgbClr val="8A7968"/>
+                </a:solidFill>
+                <a:latin typeface="Calibri"/>
+              </a:defRPr>
+            </a:pPr>
+            <a:endParaRPr lang="en-US"/>
+          </a:p>
+        </c:txPr>
+        <c:crossAx val="2094734553"/>
+        <c:crosses val="autoZero"/>
+        <c:auto val="1"/>
+        <c:lblAlgn val="ctr"/>
+        <c:noMultiLvlLbl val="1"/>
+      </c:catAx>
       <c:spPr>
         <a:solidFill>
           <a:srgbClr val="FFF5ED"/>
@@ -3408,6 +5814,358 @@
             <a:fld id="{F7021451-1387-4CA6-816F-3879F97B5CBC}" type="slidenum">
               <a:rPr lang="en-US"/>
               <a:t>10</a:t>
+            </a:fld>
+            <a:endParaRPr lang="en-US"/>
+          </a:p>
+        </p:txBody>
+      </p:sp>
+    </p:spTree>
+    <p:extLst>
+      <p:ext uri="{BB962C8B-B14F-4D97-AF65-F5344CB8AC3E}">
+        <p14:creationId xmlns:p14="http://schemas.microsoft.com/office/powerpoint/2010/main" val="1024086991"/>
+      </p:ext>
+    </p:extLst>
+  </p:cSld>
+  <p:clrMapOvr>
+    <a:masterClrMapping/>
+  </p:clrMapOvr>
+</p:notes>
+</file>
+
+<file path=ppt/notesSlides/notesSlide11.xml><?xml version="1.0" encoding="utf-8"?>
+<p:notes xmlns:a="http://schemas.openxmlformats.org/drawingml/2006/main" xmlns:r="http://schemas.openxmlformats.org/officeDocument/2006/relationships" xmlns:p="http://schemas.openxmlformats.org/presentationml/2006/main">
+  <p:cSld>
+    <p:spTree>
+      <p:nvGrpSpPr>
+        <p:cNvPr id="1" name=""/>
+        <p:cNvGrpSpPr/>
+        <p:nvPr/>
+      </p:nvGrpSpPr>
+      <p:grpSpPr>
+        <a:xfrm>
+          <a:off x="0" y="0"/>
+          <a:ext cx="0" cy="0"/>
+          <a:chOff x="0" y="0"/>
+          <a:chExt cx="0" cy="0"/>
+        </a:xfrm>
+      </p:grpSpPr>
+      <p:sp>
+        <p:nvSpPr>
+          <p:cNvPr id="2" name="Slide Image Placeholder 1"/>
+          <p:cNvSpPr>
+            <a:spLocks noGrp="1" noRot="1" noChangeAspect="1"/>
+          </p:cNvSpPr>
+          <p:nvPr>
+            <p:ph type="sldImg"/>
+          </p:nvPr>
+        </p:nvSpPr>
+        <p:spPr/>
+      </p:sp>
+      <p:sp>
+        <p:nvSpPr>
+          <p:cNvPr id="3" name="Notes Placeholder 2"/>
+          <p:cNvSpPr>
+            <a:spLocks noGrp="1"/>
+          </p:cNvSpPr>
+          <p:nvPr>
+            <p:ph type="body" idx="1"/>
+          </p:nvPr>
+        </p:nvSpPr>
+        <p:spPr/>
+        <p:txBody>
+          <a:bodyPr/>
+          <a:lstStyle/>
+          <a:p>
+            <a:r>
+              <a:rPr lang="en-US" dirty="0"/>
+              <a:t/>
+            </a:r>
+            <a:endParaRPr lang="en-US" dirty="0"/>
+          </a:p>
+        </p:txBody>
+      </p:sp>
+      <p:sp>
+        <p:nvSpPr>
+          <p:cNvPr id="4" name="Slide Number Placeholder 3"/>
+          <p:cNvSpPr>
+            <a:spLocks noGrp="1"/>
+          </p:cNvSpPr>
+          <p:nvPr>
+            <p:ph type="sldNum" sz="quarter" idx="10"/>
+          </p:nvPr>
+        </p:nvSpPr>
+        <p:spPr/>
+        <p:txBody>
+          <a:bodyPr/>
+          <a:lstStyle/>
+          <a:p>
+            <a:fld id="{F7021451-1387-4CA6-816F-3879F97B5CBC}" type="slidenum">
+              <a:rPr lang="en-US"/>
+              <a:t>11</a:t>
+            </a:fld>
+            <a:endParaRPr lang="en-US"/>
+          </a:p>
+        </p:txBody>
+      </p:sp>
+    </p:spTree>
+    <p:extLst>
+      <p:ext uri="{BB962C8B-B14F-4D97-AF65-F5344CB8AC3E}">
+        <p14:creationId xmlns:p14="http://schemas.microsoft.com/office/powerpoint/2010/main" val="1024086991"/>
+      </p:ext>
+    </p:extLst>
+  </p:cSld>
+  <p:clrMapOvr>
+    <a:masterClrMapping/>
+  </p:clrMapOvr>
+</p:notes>
+</file>
+
+<file path=ppt/notesSlides/notesSlide12.xml><?xml version="1.0" encoding="utf-8"?>
+<p:notes xmlns:a="http://schemas.openxmlformats.org/drawingml/2006/main" xmlns:r="http://schemas.openxmlformats.org/officeDocument/2006/relationships" xmlns:p="http://schemas.openxmlformats.org/presentationml/2006/main">
+  <p:cSld>
+    <p:spTree>
+      <p:nvGrpSpPr>
+        <p:cNvPr id="1" name=""/>
+        <p:cNvGrpSpPr/>
+        <p:nvPr/>
+      </p:nvGrpSpPr>
+      <p:grpSpPr>
+        <a:xfrm>
+          <a:off x="0" y="0"/>
+          <a:ext cx="0" cy="0"/>
+          <a:chOff x="0" y="0"/>
+          <a:chExt cx="0" cy="0"/>
+        </a:xfrm>
+      </p:grpSpPr>
+      <p:sp>
+        <p:nvSpPr>
+          <p:cNvPr id="2" name="Slide Image Placeholder 1"/>
+          <p:cNvSpPr>
+            <a:spLocks noGrp="1" noRot="1" noChangeAspect="1"/>
+          </p:cNvSpPr>
+          <p:nvPr>
+            <p:ph type="sldImg"/>
+          </p:nvPr>
+        </p:nvSpPr>
+        <p:spPr/>
+      </p:sp>
+      <p:sp>
+        <p:nvSpPr>
+          <p:cNvPr id="3" name="Notes Placeholder 2"/>
+          <p:cNvSpPr>
+            <a:spLocks noGrp="1"/>
+          </p:cNvSpPr>
+          <p:nvPr>
+            <p:ph type="body" idx="1"/>
+          </p:nvPr>
+        </p:nvSpPr>
+        <p:spPr/>
+        <p:txBody>
+          <a:bodyPr/>
+          <a:lstStyle/>
+          <a:p>
+            <a:r>
+              <a:rPr lang="en-US" dirty="0"/>
+              <a:t/>
+            </a:r>
+            <a:endParaRPr lang="en-US" dirty="0"/>
+          </a:p>
+        </p:txBody>
+      </p:sp>
+      <p:sp>
+        <p:nvSpPr>
+          <p:cNvPr id="4" name="Slide Number Placeholder 3"/>
+          <p:cNvSpPr>
+            <a:spLocks noGrp="1"/>
+          </p:cNvSpPr>
+          <p:nvPr>
+            <p:ph type="sldNum" sz="quarter" idx="10"/>
+          </p:nvPr>
+        </p:nvSpPr>
+        <p:spPr/>
+        <p:txBody>
+          <a:bodyPr/>
+          <a:lstStyle/>
+          <a:p>
+            <a:fld id="{F7021451-1387-4CA6-816F-3879F97B5CBC}" type="slidenum">
+              <a:rPr lang="en-US"/>
+              <a:t>12</a:t>
+            </a:fld>
+            <a:endParaRPr lang="en-US"/>
+          </a:p>
+        </p:txBody>
+      </p:sp>
+    </p:spTree>
+    <p:extLst>
+      <p:ext uri="{BB962C8B-B14F-4D97-AF65-F5344CB8AC3E}">
+        <p14:creationId xmlns:p14="http://schemas.microsoft.com/office/powerpoint/2010/main" val="1024086991"/>
+      </p:ext>
+    </p:extLst>
+  </p:cSld>
+  <p:clrMapOvr>
+    <a:masterClrMapping/>
+  </p:clrMapOvr>
+</p:notes>
+</file>
+
+<file path=ppt/notesSlides/notesSlide13.xml><?xml version="1.0" encoding="utf-8"?>
+<p:notes xmlns:a="http://schemas.openxmlformats.org/drawingml/2006/main" xmlns:r="http://schemas.openxmlformats.org/officeDocument/2006/relationships" xmlns:p="http://schemas.openxmlformats.org/presentationml/2006/main">
+  <p:cSld>
+    <p:spTree>
+      <p:nvGrpSpPr>
+        <p:cNvPr id="1" name=""/>
+        <p:cNvGrpSpPr/>
+        <p:nvPr/>
+      </p:nvGrpSpPr>
+      <p:grpSpPr>
+        <a:xfrm>
+          <a:off x="0" y="0"/>
+          <a:ext cx="0" cy="0"/>
+          <a:chOff x="0" y="0"/>
+          <a:chExt cx="0" cy="0"/>
+        </a:xfrm>
+      </p:grpSpPr>
+      <p:sp>
+        <p:nvSpPr>
+          <p:cNvPr id="2" name="Slide Image Placeholder 1"/>
+          <p:cNvSpPr>
+            <a:spLocks noGrp="1" noRot="1" noChangeAspect="1"/>
+          </p:cNvSpPr>
+          <p:nvPr>
+            <p:ph type="sldImg"/>
+          </p:nvPr>
+        </p:nvSpPr>
+        <p:spPr/>
+      </p:sp>
+      <p:sp>
+        <p:nvSpPr>
+          <p:cNvPr id="3" name="Notes Placeholder 2"/>
+          <p:cNvSpPr>
+            <a:spLocks noGrp="1"/>
+          </p:cNvSpPr>
+          <p:nvPr>
+            <p:ph type="body" idx="1"/>
+          </p:nvPr>
+        </p:nvSpPr>
+        <p:spPr/>
+        <p:txBody>
+          <a:bodyPr/>
+          <a:lstStyle/>
+          <a:p>
+            <a:r>
+              <a:rPr lang="en-US" dirty="0"/>
+              <a:t/>
+            </a:r>
+            <a:endParaRPr lang="en-US" dirty="0"/>
+          </a:p>
+        </p:txBody>
+      </p:sp>
+      <p:sp>
+        <p:nvSpPr>
+          <p:cNvPr id="4" name="Slide Number Placeholder 3"/>
+          <p:cNvSpPr>
+            <a:spLocks noGrp="1"/>
+          </p:cNvSpPr>
+          <p:nvPr>
+            <p:ph type="sldNum" sz="quarter" idx="10"/>
+          </p:nvPr>
+        </p:nvSpPr>
+        <p:spPr/>
+        <p:txBody>
+          <a:bodyPr/>
+          <a:lstStyle/>
+          <a:p>
+            <a:fld id="{F7021451-1387-4CA6-816F-3879F97B5CBC}" type="slidenum">
+              <a:rPr lang="en-US"/>
+              <a:t>13</a:t>
+            </a:fld>
+            <a:endParaRPr lang="en-US"/>
+          </a:p>
+        </p:txBody>
+      </p:sp>
+    </p:spTree>
+    <p:extLst>
+      <p:ext uri="{BB962C8B-B14F-4D97-AF65-F5344CB8AC3E}">
+        <p14:creationId xmlns:p14="http://schemas.microsoft.com/office/powerpoint/2010/main" val="1024086991"/>
+      </p:ext>
+    </p:extLst>
+  </p:cSld>
+  <p:clrMapOvr>
+    <a:masterClrMapping/>
+  </p:clrMapOvr>
+</p:notes>
+</file>
+
+<file path=ppt/notesSlides/notesSlide14.xml><?xml version="1.0" encoding="utf-8"?>
+<p:notes xmlns:a="http://schemas.openxmlformats.org/drawingml/2006/main" xmlns:r="http://schemas.openxmlformats.org/officeDocument/2006/relationships" xmlns:p="http://schemas.openxmlformats.org/presentationml/2006/main">
+  <p:cSld>
+    <p:spTree>
+      <p:nvGrpSpPr>
+        <p:cNvPr id="1" name=""/>
+        <p:cNvGrpSpPr/>
+        <p:nvPr/>
+      </p:nvGrpSpPr>
+      <p:grpSpPr>
+        <a:xfrm>
+          <a:off x="0" y="0"/>
+          <a:ext cx="0" cy="0"/>
+          <a:chOff x="0" y="0"/>
+          <a:chExt cx="0" cy="0"/>
+        </a:xfrm>
+      </p:grpSpPr>
+      <p:sp>
+        <p:nvSpPr>
+          <p:cNvPr id="2" name="Slide Image Placeholder 1"/>
+          <p:cNvSpPr>
+            <a:spLocks noGrp="1" noRot="1" noChangeAspect="1"/>
+          </p:cNvSpPr>
+          <p:nvPr>
+            <p:ph type="sldImg"/>
+          </p:nvPr>
+        </p:nvSpPr>
+        <p:spPr/>
+      </p:sp>
+      <p:sp>
+        <p:nvSpPr>
+          <p:cNvPr id="3" name="Notes Placeholder 2"/>
+          <p:cNvSpPr>
+            <a:spLocks noGrp="1"/>
+          </p:cNvSpPr>
+          <p:nvPr>
+            <p:ph type="body" idx="1"/>
+          </p:nvPr>
+        </p:nvSpPr>
+        <p:spPr/>
+        <p:txBody>
+          <a:bodyPr/>
+          <a:lstStyle/>
+          <a:p>
+            <a:r>
+              <a:rPr lang="en-US" dirty="0"/>
+              <a:t/>
+            </a:r>
+            <a:endParaRPr lang="en-US" dirty="0"/>
+          </a:p>
+        </p:txBody>
+      </p:sp>
+      <p:sp>
+        <p:nvSpPr>
+          <p:cNvPr id="4" name="Slide Number Placeholder 3"/>
+          <p:cNvSpPr>
+            <a:spLocks noGrp="1"/>
+          </p:cNvSpPr>
+          <p:nvPr>
+            <p:ph type="sldNum" sz="quarter" idx="10"/>
+          </p:nvPr>
+        </p:nvSpPr>
+        <p:spPr/>
+        <p:txBody>
+          <a:bodyPr/>
+          <a:lstStyle/>
+          <a:p>
+            <a:fld id="{F7021451-1387-4CA6-816F-3879F97B5CBC}" type="slidenum">
+              <a:rPr lang="en-US"/>
+              <a:t>14</a:t>
             </a:fld>
             <a:endParaRPr lang="en-US"/>
           </a:p>
@@ -4698,7 +7456,7 @@
                 <a:ea typeface="Georgia" pitchFamily="34" charset="-122"/>
                 <a:cs typeface="Georgia" pitchFamily="34" charset="-120"/>
               </a:rPr>
-              <a:t>Different shapes, same book.</a:t>
+              <a:t>Three practices, three different trajectories.</a:t>
             </a:r>
             <a:endParaRPr lang="en-US" sz="3000" dirty="0"/>
           </a:p>
@@ -4737,7 +7495,7 @@
                 <a:ea typeface="Georgia" pitchFamily="34" charset="-122"/>
                 <a:cs typeface="Georgia" pitchFamily="34" charset="-120"/>
               </a:rPr>
-              <a:t>Three practices mapped across three normalized dimensions. Native radar handles this cleanly when axes are on a shared scale.</a:t>
+              <a:t>Six time-points on six axes (every other year, 2025 to 2035). Revenue in $M — one shared scale, no normalization. Native handles multi-series radar when axes share units.</a:t>
             </a:r>
             <a:endParaRPr lang="en-US" sz="1300" dirty="0"/>
           </a:p>
@@ -4916,7 +7674,7 @@
                 <a:ea typeface="Georgia" pitchFamily="34" charset="-122"/>
                 <a:cs typeface="Georgia" pitchFamily="34" charset="-120"/>
               </a:rPr>
-              <a:t>Largest in 2025, smallest in 2035. Slowest CAGR. A cyclical anchor, not a growth engine.</a:t>
+              <a:t>Tightest shape. Shallow dip in 2027, steady climb after. Least cyclical.</a:t>
             </a:r>
             <a:endParaRPr lang="en-US" sz="1100" dirty="0"/>
           </a:p>
@@ -5017,7 +7775,7 @@
                 <a:ea typeface="Georgia" pitchFamily="34" charset="-122"/>
                 <a:cs typeface="Georgia" pitchFamily="34" charset="-120"/>
               </a:rPr>
-              <a:t>Smallest 2025 start for its eventual size. Strongest 2035 total — the balanced leader.</a:t>
+              <a:t>Deepest dent in 2029, then the biggest snap-back — ends largest in 2035.</a:t>
             </a:r>
             <a:endParaRPr lang="en-US" sz="1100" dirty="0"/>
           </a:p>
@@ -5118,9 +7876,1205 @@
                 <a:ea typeface="Georgia" pitchFamily="34" charset="-122"/>
                 <a:cs typeface="Georgia" pitchFamily="34" charset="-120"/>
               </a:rPr>
-              <a:t>Smallest start, fastest CAGR. The growth story; still #2 by revenue in 2035.</a:t>
+              <a:t>Grew through every year, downturn included. The most counter-cyclical practice.</a:t>
             </a:r>
             <a:endParaRPr lang="en-US" sz="1100" dirty="0"/>
+          </a:p>
+        </p:txBody>
+      </p:sp>
+    </p:spTree>
+  </p:cSld>
+  <p:clrMapOvr>
+    <a:masterClrMapping/>
+  </p:clrMapOvr>
+</p:sld>
+</file>
+
+<file path=ppt/slides/slide11.xml><?xml version="1.0" encoding="utf-8"?>
+<p:sld xmlns:a="http://schemas.openxmlformats.org/drawingml/2006/main" xmlns:r="http://schemas.openxmlformats.org/officeDocument/2006/relationships" xmlns:p="http://schemas.openxmlformats.org/presentationml/2006/main">
+  <p:cSld name="Slide 11">
+    <p:bg>
+      <p:bgPr>
+        <a:solidFill>
+          <a:srgbClr val="FFF5ED"/>
+        </a:solidFill>
+      </p:bgPr>
+    </p:bg>
+    <p:spTree>
+      <p:nvGrpSpPr>
+        <p:cNvPr id="1" name=""/>
+        <p:cNvGrpSpPr/>
+        <p:nvPr/>
+      </p:nvGrpSpPr>
+      <p:grpSpPr>
+        <a:xfrm>
+          <a:off x="0" y="0"/>
+          <a:ext cx="0" cy="0"/>
+          <a:chOff x="0" y="0"/>
+          <a:chExt cx="0" cy="0"/>
+        </a:xfrm>
+      </p:grpSpPr>
+      <p:sp>
+        <p:nvSpPr>
+          <p:cNvPr id="2" name="Text 0"/>
+          <p:cNvSpPr/>
+          <p:nvPr/>
+        </p:nvSpPr>
+        <p:spPr>
+          <a:xfrm>
+            <a:off x="548640" y="457200"/>
+            <a:ext cx="7315200" cy="256032"/>
+          </a:xfrm>
+          <a:prstGeom prst="rect">
+            <a:avLst/>
+          </a:prstGeom>
+          <a:noFill/>
+          <a:ln/>
+        </p:spPr>
+        <p:txBody>
+          <a:bodyPr wrap="square" lIns="0" tIns="0" rIns="0" bIns="0" rtlCol="0" anchor="t"/>
+          <a:lstStyle/>
+          <a:p>
+            <a:pPr indent="0" marL="0">
+              <a:buNone/>
+            </a:pPr>
+            <a:r>
+              <a:rPr lang="en-US" sz="1000" b="1" spc="200" kern="0" dirty="0">
+                <a:solidFill>
+                  <a:srgbClr val="8A7968"/>
+                </a:solidFill>
+                <a:latin typeface="Calibri" pitchFamily="34" charset="0"/>
+                <a:ea typeface="Calibri" pitchFamily="34" charset="-122"/>
+                <a:cs typeface="Calibri" pitchFamily="34" charset="-120"/>
+              </a:rPr>
+              <a:t>LINE CHART  ·  STRESS-TEST (DUAL-AXIS COMBO)</a:t>
+            </a:r>
+            <a:endParaRPr lang="en-US" sz="1000" dirty="0"/>
+          </a:p>
+        </p:txBody>
+      </p:sp>
+      <p:sp>
+        <p:nvSpPr>
+          <p:cNvPr id="3" name="Text 1"/>
+          <p:cNvSpPr/>
+          <p:nvPr/>
+        </p:nvSpPr>
+        <p:spPr>
+          <a:xfrm>
+            <a:off x="548640" y="749808"/>
+            <a:ext cx="11091672" cy="640080"/>
+          </a:xfrm>
+          <a:prstGeom prst="rect">
+            <a:avLst/>
+          </a:prstGeom>
+          <a:noFill/>
+          <a:ln/>
+        </p:spPr>
+        <p:txBody>
+          <a:bodyPr wrap="square" lIns="0" tIns="0" rIns="0" bIns="0" rtlCol="0" anchor="t"/>
+          <a:lstStyle/>
+          <a:p>
+            <a:pPr indent="0" marL="0">
+              <a:buNone/>
+            </a:pPr>
+            <a:r>
+              <a:rPr lang="en-US" sz="3000" dirty="0">
+                <a:solidFill>
+                  <a:srgbClr val="353745"/>
+                </a:solidFill>
+                <a:latin typeface="Georgia" pitchFamily="34" charset="0"/>
+                <a:ea typeface="Georgia" pitchFamily="34" charset="-122"/>
+                <a:cs typeface="Georgia" pitchFamily="34" charset="-120"/>
+              </a:rPr>
+              <a:t>Revenue bars, EBITDA % line, secondary axis.</a:t>
+            </a:r>
+            <a:endParaRPr lang="en-US" sz="3000" dirty="0"/>
+          </a:p>
+        </p:txBody>
+      </p:sp>
+      <p:sp>
+        <p:nvSpPr>
+          <p:cNvPr id="4" name="Text 2"/>
+          <p:cNvSpPr/>
+          <p:nvPr/>
+        </p:nvSpPr>
+        <p:spPr>
+          <a:xfrm>
+            <a:off x="548640" y="1325880"/>
+            <a:ext cx="11091672" cy="292608"/>
+          </a:xfrm>
+          <a:prstGeom prst="rect">
+            <a:avLst/>
+          </a:prstGeom>
+          <a:noFill/>
+          <a:ln/>
+        </p:spPr>
+        <p:txBody>
+          <a:bodyPr wrap="square" lIns="0" tIns="0" rIns="0" bIns="0" rtlCol="0" anchor="t"/>
+          <a:lstStyle/>
+          <a:p>
+            <a:pPr indent="0" marL="0">
+              <a:buNone/>
+            </a:pPr>
+            <a:r>
+              <a:rPr lang="en-US" sz="1300" i="1" dirty="0">
+                <a:solidFill>
+                  <a:srgbClr val="353745"/>
+                </a:solidFill>
+                <a:latin typeface="Georgia" pitchFamily="34" charset="0"/>
+                <a:ea typeface="Georgia" pitchFamily="34" charset="-122"/>
+                <a:cs typeface="Georgia" pitchFamily="34" charset="-120"/>
+              </a:rPr>
+              <a:t>Multi-type chart: native pptxgenjs pres.ChartType has no 'combo' — you pass an array of typed blocks. Each block has its own options. Tests secondary axis, per-series styling, legend mixing.</a:t>
+            </a:r>
+            <a:endParaRPr lang="en-US" sz="1300" dirty="0"/>
+          </a:p>
+        </p:txBody>
+      </p:sp>
+      <p:graphicFrame>
+        <p:nvGraphicFramePr>
+          <p:cNvPr id="5" name="Chart 0" descr=""/>
+          <p:cNvGraphicFramePr/>
+          <p:nvPr/>
+        </p:nvGraphicFramePr>
+        <p:xfrm>
+          <a:off x="640080" y="2011680"/>
+          <a:ext cx="10908792" cy="4023360"/>
+        </p:xfrm>
+        <a:graphic xmlns:a="http://schemas.openxmlformats.org/drawingml/2006/main">
+          <a:graphicData uri="http://schemas.openxmlformats.org/drawingml/2006/chart">
+            <c:chart xmlns:c="http://schemas.openxmlformats.org/drawingml/2006/chart" r:id="rId1"/>
+          </a:graphicData>
+        </a:graphic>
+      </p:graphicFrame>
+      <p:sp>
+        <p:nvSpPr>
+          <p:cNvPr id="6" name="Text 3"/>
+          <p:cNvSpPr/>
+          <p:nvPr/>
+        </p:nvSpPr>
+        <p:spPr>
+          <a:xfrm>
+            <a:off x="548640" y="6172200"/>
+            <a:ext cx="11091672" cy="292608"/>
+          </a:xfrm>
+          <a:prstGeom prst="rect">
+            <a:avLst/>
+          </a:prstGeom>
+          <a:noFill/>
+          <a:ln/>
+        </p:spPr>
+        <p:txBody>
+          <a:bodyPr wrap="square" lIns="0" tIns="0" rIns="0" bIns="0" rtlCol="0" anchor="t"/>
+          <a:lstStyle/>
+          <a:p>
+            <a:pPr indent="0" marL="0">
+              <a:buNone/>
+            </a:pPr>
+            <a:r>
+              <a:rPr lang="en-US" sz="1200" i="1" dirty="0">
+                <a:solidFill>
+                  <a:srgbClr val="353745"/>
+                </a:solidFill>
+                <a:latin typeface="Georgia" pitchFamily="34" charset="0"/>
+                <a:ea typeface="Georgia" pitchFamily="34" charset="-122"/>
+                <a:cs typeface="Georgia" pitchFamily="34" charset="-120"/>
+              </a:rPr>
+              <a:t>Combo charts are where native shines — secondary axis, mixed bar + line, per-series styling all work in one addChart call.</a:t>
+            </a:r>
+            <a:endParaRPr lang="en-US" sz="1200" dirty="0"/>
+          </a:p>
+        </p:txBody>
+      </p:sp>
+    </p:spTree>
+  </p:cSld>
+  <p:clrMapOvr>
+    <a:masterClrMapping/>
+  </p:clrMapOvr>
+</p:sld>
+</file>
+
+<file path=ppt/slides/slide12.xml><?xml version="1.0" encoding="utf-8"?>
+<p:sld xmlns:a="http://schemas.openxmlformats.org/drawingml/2006/main" xmlns:r="http://schemas.openxmlformats.org/officeDocument/2006/relationships" xmlns:p="http://schemas.openxmlformats.org/presentationml/2006/main">
+  <p:cSld name="Slide 12">
+    <p:bg>
+      <p:bgPr>
+        <a:solidFill>
+          <a:srgbClr val="FFF5ED"/>
+        </a:solidFill>
+      </p:bgPr>
+    </p:bg>
+    <p:spTree>
+      <p:nvGrpSpPr>
+        <p:cNvPr id="1" name=""/>
+        <p:cNvGrpSpPr/>
+        <p:nvPr/>
+      </p:nvGrpSpPr>
+      <p:grpSpPr>
+        <a:xfrm>
+          <a:off x="0" y="0"/>
+          <a:ext cx="0" cy="0"/>
+          <a:chOff x="0" y="0"/>
+          <a:chExt cx="0" cy="0"/>
+        </a:xfrm>
+      </p:grpSpPr>
+      <p:sp>
+        <p:nvSpPr>
+          <p:cNvPr id="2" name="Text 0"/>
+          <p:cNvSpPr/>
+          <p:nvPr/>
+        </p:nvSpPr>
+        <p:spPr>
+          <a:xfrm>
+            <a:off x="548640" y="457200"/>
+            <a:ext cx="7315200" cy="256032"/>
+          </a:xfrm>
+          <a:prstGeom prst="rect">
+            <a:avLst/>
+          </a:prstGeom>
+          <a:noFill/>
+          <a:ln/>
+        </p:spPr>
+        <p:txBody>
+          <a:bodyPr wrap="square" lIns="0" tIns="0" rIns="0" bIns="0" rtlCol="0" anchor="t"/>
+          <a:lstStyle/>
+          <a:p>
+            <a:pPr indent="0" marL="0">
+              <a:buNone/>
+            </a:pPr>
+            <a:r>
+              <a:rPr lang="en-US" sz="1000" b="1" spc="200" kern="0" dirty="0">
+                <a:solidFill>
+                  <a:srgbClr val="8A7968"/>
+                </a:solidFill>
+                <a:latin typeface="Calibri" pitchFamily="34" charset="0"/>
+                <a:ea typeface="Calibri" pitchFamily="34" charset="-122"/>
+                <a:cs typeface="Calibri" pitchFamily="34" charset="-120"/>
+              </a:rPr>
+              <a:t>DONUT CHART  ·  STRESS-TEST (COMPARISON)</a:t>
+            </a:r>
+            <a:endParaRPr lang="en-US" sz="1000" dirty="0"/>
+          </a:p>
+        </p:txBody>
+      </p:sp>
+      <p:sp>
+        <p:nvSpPr>
+          <p:cNvPr id="3" name="Text 1"/>
+          <p:cNvSpPr/>
+          <p:nvPr/>
+        </p:nvSpPr>
+        <p:spPr>
+          <a:xfrm>
+            <a:off x="548640" y="749808"/>
+            <a:ext cx="11091672" cy="640080"/>
+          </a:xfrm>
+          <a:prstGeom prst="rect">
+            <a:avLst/>
+          </a:prstGeom>
+          <a:noFill/>
+          <a:ln/>
+        </p:spPr>
+        <p:txBody>
+          <a:bodyPr wrap="square" lIns="0" tIns="0" rIns="0" bIns="0" rtlCol="0" anchor="t"/>
+          <a:lstStyle/>
+          <a:p>
+            <a:pPr indent="0" marL="0">
+              <a:buNone/>
+            </a:pPr>
+            <a:r>
+              <a:rPr lang="en-US" sz="3000" dirty="0">
+                <a:solidFill>
+                  <a:srgbClr val="353745"/>
+                </a:solidFill>
+                <a:latin typeface="Georgia" pitchFamily="34" charset="0"/>
+                <a:ea typeface="Georgia" pitchFamily="34" charset="-122"/>
+                <a:cs typeface="Georgia" pitchFamily="34" charset="-120"/>
+              </a:rPr>
+              <a:t>Practice mix, ten years apart.</a:t>
+            </a:r>
+            <a:endParaRPr lang="en-US" sz="3000" dirty="0"/>
+          </a:p>
+        </p:txBody>
+      </p:sp>
+      <p:sp>
+        <p:nvSpPr>
+          <p:cNvPr id="4" name="Text 2"/>
+          <p:cNvSpPr/>
+          <p:nvPr/>
+        </p:nvSpPr>
+        <p:spPr>
+          <a:xfrm>
+            <a:off x="548640" y="1325880"/>
+            <a:ext cx="11091672" cy="292608"/>
+          </a:xfrm>
+          <a:prstGeom prst="rect">
+            <a:avLst/>
+          </a:prstGeom>
+          <a:noFill/>
+          <a:ln/>
+        </p:spPr>
+        <p:txBody>
+          <a:bodyPr wrap="square" lIns="0" tIns="0" rIns="0" bIns="0" rtlCol="0" anchor="t"/>
+          <a:lstStyle/>
+          <a:p>
+            <a:pPr indent="0" marL="0">
+              <a:buNone/>
+            </a:pPr>
+            <a:r>
+              <a:rPr lang="en-US" sz="1300" i="1" dirty="0">
+                <a:solidFill>
+                  <a:srgbClr val="353745"/>
+                </a:solidFill>
+                <a:latin typeface="Georgia" pitchFamily="34" charset="0"/>
+                <a:ea typeface="Georgia" pitchFamily="34" charset="-122"/>
+                <a:cs typeface="Georgia" pitchFamily="34" charset="-120"/>
+              </a:rPr>
+              <a:t>Two donuts, same color mapping, different years. Tests whether two instances of native addChart can be visually locked together. Center callouts added as overlays — native donuts have no center text option.</a:t>
+            </a:r>
+            <a:endParaRPr lang="en-US" sz="1300" dirty="0"/>
+          </a:p>
+        </p:txBody>
+      </p:sp>
+      <p:graphicFrame>
+        <p:nvGraphicFramePr>
+          <p:cNvPr id="5" name="Chart 0" descr=""/>
+          <p:cNvGraphicFramePr/>
+          <p:nvPr/>
+        </p:nvGraphicFramePr>
+        <p:xfrm>
+          <a:off x="914400" y="2194560"/>
+          <a:ext cx="4114800" cy="3474720"/>
+        </p:xfrm>
+        <a:graphic xmlns:a="http://schemas.openxmlformats.org/drawingml/2006/main">
+          <a:graphicData uri="http://schemas.openxmlformats.org/drawingml/2006/chart">
+            <c:chart xmlns:c="http://schemas.openxmlformats.org/drawingml/2006/chart" r:id="rId1"/>
+          </a:graphicData>
+        </a:graphic>
+      </p:graphicFrame>
+      <p:sp>
+        <p:nvSpPr>
+          <p:cNvPr id="6" name="Text 3"/>
+          <p:cNvSpPr/>
+          <p:nvPr/>
+        </p:nvSpPr>
+        <p:spPr>
+          <a:xfrm>
+            <a:off x="914400" y="5715000"/>
+            <a:ext cx="4114800" cy="365760"/>
+          </a:xfrm>
+          <a:prstGeom prst="rect">
+            <a:avLst/>
+          </a:prstGeom>
+          <a:noFill/>
+          <a:ln/>
+        </p:spPr>
+        <p:txBody>
+          <a:bodyPr wrap="square" lIns="0" tIns="0" rIns="0" bIns="0" rtlCol="0" anchor="t"/>
+          <a:lstStyle/>
+          <a:p>
+            <a:pPr algn="ctr" indent="0" marL="0">
+              <a:buNone/>
+            </a:pPr>
+            <a:r>
+              <a:rPr lang="en-US" sz="2000" dirty="0">
+                <a:solidFill>
+                  <a:srgbClr val="353745"/>
+                </a:solidFill>
+                <a:latin typeface="Georgia" pitchFamily="34" charset="0"/>
+                <a:ea typeface="Georgia" pitchFamily="34" charset="-122"/>
+                <a:cs typeface="Georgia" pitchFamily="34" charset="-120"/>
+              </a:rPr>
+              <a:t>2025</a:t>
+            </a:r>
+            <a:endParaRPr lang="en-US" sz="2000" dirty="0"/>
+          </a:p>
+        </p:txBody>
+      </p:sp>
+      <p:sp>
+        <p:nvSpPr>
+          <p:cNvPr id="7" name="Text 4"/>
+          <p:cNvSpPr/>
+          <p:nvPr/>
+        </p:nvSpPr>
+        <p:spPr>
+          <a:xfrm>
+            <a:off x="914400" y="3767328"/>
+            <a:ext cx="4114800" cy="365760"/>
+          </a:xfrm>
+          <a:prstGeom prst="rect">
+            <a:avLst/>
+          </a:prstGeom>
+          <a:noFill/>
+          <a:ln/>
+        </p:spPr>
+        <p:txBody>
+          <a:bodyPr wrap="square" lIns="0" tIns="0" rIns="0" bIns="0" rtlCol="0" anchor="ctr"/>
+          <a:lstStyle/>
+          <a:p>
+            <a:pPr algn="ctr" indent="0" marL="0">
+              <a:buNone/>
+            </a:pPr>
+            <a:r>
+              <a:rPr lang="en-US" sz="1800" dirty="0">
+                <a:solidFill>
+                  <a:srgbClr val="353745"/>
+                </a:solidFill>
+                <a:latin typeface="Georgia" pitchFamily="34" charset="0"/>
+                <a:ea typeface="Georgia" pitchFamily="34" charset="-122"/>
+                <a:cs typeface="Georgia" pitchFamily="34" charset="-120"/>
+              </a:rPr>
+              <a:t>$24.1M</a:t>
+            </a:r>
+            <a:endParaRPr lang="en-US" sz="1800" dirty="0"/>
+          </a:p>
+        </p:txBody>
+      </p:sp>
+      <p:graphicFrame>
+        <p:nvGraphicFramePr>
+          <p:cNvPr id="8" name="Chart 1" descr=""/>
+          <p:cNvGraphicFramePr/>
+          <p:nvPr/>
+        </p:nvGraphicFramePr>
+        <p:xfrm>
+          <a:off x="7159752" y="2194560"/>
+          <a:ext cx="4114800" cy="3474720"/>
+        </p:xfrm>
+        <a:graphic xmlns:a="http://schemas.openxmlformats.org/drawingml/2006/main">
+          <a:graphicData uri="http://schemas.openxmlformats.org/drawingml/2006/chart">
+            <c:chart xmlns:c="http://schemas.openxmlformats.org/drawingml/2006/chart" r:id="rId2"/>
+          </a:graphicData>
+        </a:graphic>
+      </p:graphicFrame>
+      <p:sp>
+        <p:nvSpPr>
+          <p:cNvPr id="9" name="Text 5"/>
+          <p:cNvSpPr/>
+          <p:nvPr/>
+        </p:nvSpPr>
+        <p:spPr>
+          <a:xfrm>
+            <a:off x="7159752" y="5715000"/>
+            <a:ext cx="4114800" cy="365760"/>
+          </a:xfrm>
+          <a:prstGeom prst="rect">
+            <a:avLst/>
+          </a:prstGeom>
+          <a:noFill/>
+          <a:ln/>
+        </p:spPr>
+        <p:txBody>
+          <a:bodyPr wrap="square" lIns="0" tIns="0" rIns="0" bIns="0" rtlCol="0" anchor="t"/>
+          <a:lstStyle/>
+          <a:p>
+            <a:pPr algn="ctr" indent="0" marL="0">
+              <a:buNone/>
+            </a:pPr>
+            <a:r>
+              <a:rPr lang="en-US" sz="2000" dirty="0">
+                <a:solidFill>
+                  <a:srgbClr val="353745"/>
+                </a:solidFill>
+                <a:latin typeface="Georgia" pitchFamily="34" charset="0"/>
+                <a:ea typeface="Georgia" pitchFamily="34" charset="-122"/>
+                <a:cs typeface="Georgia" pitchFamily="34" charset="-120"/>
+              </a:rPr>
+              <a:t>2035</a:t>
+            </a:r>
+            <a:endParaRPr lang="en-US" sz="2000" dirty="0"/>
+          </a:p>
+        </p:txBody>
+      </p:sp>
+      <p:sp>
+        <p:nvSpPr>
+          <p:cNvPr id="10" name="Text 6"/>
+          <p:cNvSpPr/>
+          <p:nvPr/>
+        </p:nvSpPr>
+        <p:spPr>
+          <a:xfrm>
+            <a:off x="7159752" y="3767328"/>
+            <a:ext cx="4114800" cy="365760"/>
+          </a:xfrm>
+          <a:prstGeom prst="rect">
+            <a:avLst/>
+          </a:prstGeom>
+          <a:noFill/>
+          <a:ln/>
+        </p:spPr>
+        <p:txBody>
+          <a:bodyPr wrap="square" lIns="0" tIns="0" rIns="0" bIns="0" rtlCol="0" anchor="ctr"/>
+          <a:lstStyle/>
+          <a:p>
+            <a:pPr algn="ctr" indent="0" marL="0">
+              <a:buNone/>
+            </a:pPr>
+            <a:r>
+              <a:rPr lang="en-US" sz="1800" dirty="0">
+                <a:solidFill>
+                  <a:srgbClr val="353745"/>
+                </a:solidFill>
+                <a:latin typeface="Georgia" pitchFamily="34" charset="0"/>
+                <a:ea typeface="Georgia" pitchFamily="34" charset="-122"/>
+                <a:cs typeface="Georgia" pitchFamily="34" charset="-120"/>
+              </a:rPr>
+              <a:t>$58.7M</a:t>
+            </a:r>
+            <a:endParaRPr lang="en-US" sz="1800" dirty="0"/>
+          </a:p>
+        </p:txBody>
+      </p:sp>
+      <p:sp>
+        <p:nvSpPr>
+          <p:cNvPr id="11" name="Text 7"/>
+          <p:cNvSpPr/>
+          <p:nvPr/>
+        </p:nvSpPr>
+        <p:spPr>
+          <a:xfrm>
+            <a:off x="5728716" y="3657600"/>
+            <a:ext cx="731520" cy="548640"/>
+          </a:xfrm>
+          <a:prstGeom prst="rect">
+            <a:avLst/>
+          </a:prstGeom>
+          <a:noFill/>
+          <a:ln/>
+        </p:spPr>
+        <p:txBody>
+          <a:bodyPr wrap="square" lIns="0" tIns="0" rIns="0" bIns="0" rtlCol="0" anchor="ctr"/>
+          <a:lstStyle/>
+          <a:p>
+            <a:pPr algn="ctr" indent="0" marL="0">
+              <a:buNone/>
+            </a:pPr>
+            <a:r>
+              <a:rPr lang="en-US" sz="3600" dirty="0">
+                <a:solidFill>
+                  <a:srgbClr val="8A7968"/>
+                </a:solidFill>
+                <a:latin typeface="Georgia" pitchFamily="34" charset="0"/>
+                <a:ea typeface="Georgia" pitchFamily="34" charset="-122"/>
+                <a:cs typeface="Georgia" pitchFamily="34" charset="-120"/>
+              </a:rPr>
+              <a:t>→</a:t>
+            </a:r>
+            <a:endParaRPr lang="en-US" sz="3600" dirty="0"/>
+          </a:p>
+        </p:txBody>
+      </p:sp>
+      <p:sp>
+        <p:nvSpPr>
+          <p:cNvPr id="12" name="Text 8"/>
+          <p:cNvSpPr/>
+          <p:nvPr/>
+        </p:nvSpPr>
+        <p:spPr>
+          <a:xfrm>
+            <a:off x="548640" y="6172200"/>
+            <a:ext cx="11091672" cy="292608"/>
+          </a:xfrm>
+          <a:prstGeom prst="rect">
+            <a:avLst/>
+          </a:prstGeom>
+          <a:noFill/>
+          <a:ln/>
+        </p:spPr>
+        <p:txBody>
+          <a:bodyPr wrap="square" lIns="0" tIns="0" rIns="0" bIns="0" rtlCol="0" anchor="t"/>
+          <a:lstStyle/>
+          <a:p>
+            <a:pPr indent="0" marL="0">
+              <a:buNone/>
+            </a:pPr>
+            <a:r>
+              <a:rPr lang="en-US" sz="1200" i="1" dirty="0">
+                <a:solidFill>
+                  <a:srgbClr val="353745"/>
+                </a:solidFill>
+                <a:latin typeface="Georgia" pitchFamily="34" charset="0"/>
+                <a:ea typeface="Georgia" pitchFamily="34" charset="-122"/>
+                <a:cs typeface="Georgia" pitchFamily="34" charset="-120"/>
+              </a:rPr>
+              <a:t>Strategy went from 38% of revenue to 31%; Operations grew to the #1 share; Technology more than tripled in dollars.</a:t>
+            </a:r>
+            <a:endParaRPr lang="en-US" sz="1200" dirty="0"/>
+          </a:p>
+        </p:txBody>
+      </p:sp>
+    </p:spTree>
+  </p:cSld>
+  <p:clrMapOvr>
+    <a:masterClrMapping/>
+  </p:clrMapOvr>
+</p:sld>
+</file>
+
+<file path=ppt/slides/slide13.xml><?xml version="1.0" encoding="utf-8"?>
+<p:sld xmlns:a="http://schemas.openxmlformats.org/drawingml/2006/main" xmlns:r="http://schemas.openxmlformats.org/officeDocument/2006/relationships" xmlns:p="http://schemas.openxmlformats.org/presentationml/2006/main">
+  <p:cSld name="Slide 13">
+    <p:bg>
+      <p:bgPr>
+        <a:solidFill>
+          <a:srgbClr val="FFF5ED"/>
+        </a:solidFill>
+      </p:bgPr>
+    </p:bg>
+    <p:spTree>
+      <p:nvGrpSpPr>
+        <p:cNvPr id="1" name=""/>
+        <p:cNvGrpSpPr/>
+        <p:nvPr/>
+      </p:nvGrpSpPr>
+      <p:grpSpPr>
+        <a:xfrm>
+          <a:off x="0" y="0"/>
+          <a:ext cx="0" cy="0"/>
+          <a:chOff x="0" y="0"/>
+          <a:chExt cx="0" cy="0"/>
+        </a:xfrm>
+      </p:grpSpPr>
+      <p:sp>
+        <p:nvSpPr>
+          <p:cNvPr id="2" name="Text 0"/>
+          <p:cNvSpPr/>
+          <p:nvPr/>
+        </p:nvSpPr>
+        <p:spPr>
+          <a:xfrm>
+            <a:off x="548640" y="457200"/>
+            <a:ext cx="7315200" cy="256032"/>
+          </a:xfrm>
+          <a:prstGeom prst="rect">
+            <a:avLst/>
+          </a:prstGeom>
+          <a:noFill/>
+          <a:ln/>
+        </p:spPr>
+        <p:txBody>
+          <a:bodyPr wrap="square" lIns="0" tIns="0" rIns="0" bIns="0" rtlCol="0" anchor="t"/>
+          <a:lstStyle/>
+          <a:p>
+            <a:pPr indent="0" marL="0">
+              <a:buNone/>
+            </a:pPr>
+            <a:r>
+              <a:rPr lang="en-US" sz="1000" b="1" spc="200" kern="0" dirty="0">
+                <a:solidFill>
+                  <a:srgbClr val="8A7968"/>
+                </a:solidFill>
+                <a:latin typeface="Calibri" pitchFamily="34" charset="0"/>
+                <a:ea typeface="Calibri" pitchFamily="34" charset="-122"/>
+                <a:cs typeface="Calibri" pitchFamily="34" charset="-120"/>
+              </a:rPr>
+              <a:t>SCATTER PLOT  ·  STRESS-TEST (PHASED MULTI-SERIES)</a:t>
+            </a:r>
+            <a:endParaRPr lang="en-US" sz="1000" dirty="0"/>
+          </a:p>
+        </p:txBody>
+      </p:sp>
+      <p:sp>
+        <p:nvSpPr>
+          <p:cNvPr id="3" name="Text 1"/>
+          <p:cNvSpPr/>
+          <p:nvPr/>
+        </p:nvSpPr>
+        <p:spPr>
+          <a:xfrm>
+            <a:off x="548640" y="749808"/>
+            <a:ext cx="11091672" cy="640080"/>
+          </a:xfrm>
+          <a:prstGeom prst="rect">
+            <a:avLst/>
+          </a:prstGeom>
+          <a:noFill/>
+          <a:ln/>
+        </p:spPr>
+        <p:txBody>
+          <a:bodyPr wrap="square" lIns="0" tIns="0" rIns="0" bIns="0" rtlCol="0" anchor="t"/>
+          <a:lstStyle/>
+          <a:p>
+            <a:pPr indent="0" marL="0">
+              <a:buNone/>
+            </a:pPr>
+            <a:r>
+              <a:rPr lang="en-US" sz="3000" dirty="0">
+                <a:solidFill>
+                  <a:srgbClr val="353745"/>
+                </a:solidFill>
+                <a:latin typeface="Georgia" pitchFamily="34" charset="0"/>
+                <a:ea typeface="Georgia" pitchFamily="34" charset="-122"/>
+                <a:cs typeface="Georgia" pitchFamily="34" charset="-120"/>
+              </a:rPr>
+              <a:t>Revenue vs EBITDA $, colored by phase.</a:t>
+            </a:r>
+            <a:endParaRPr lang="en-US" sz="3000" dirty="0"/>
+          </a:p>
+        </p:txBody>
+      </p:sp>
+      <p:sp>
+        <p:nvSpPr>
+          <p:cNvPr id="4" name="Text 2"/>
+          <p:cNvSpPr/>
+          <p:nvPr/>
+        </p:nvSpPr>
+        <p:spPr>
+          <a:xfrm>
+            <a:off x="548640" y="1325880"/>
+            <a:ext cx="11091672" cy="292608"/>
+          </a:xfrm>
+          <a:prstGeom prst="rect">
+            <a:avLst/>
+          </a:prstGeom>
+          <a:noFill/>
+          <a:ln/>
+        </p:spPr>
+        <p:txBody>
+          <a:bodyPr wrap="square" lIns="0" tIns="0" rIns="0" bIns="0" rtlCol="0" anchor="t"/>
+          <a:lstStyle/>
+          <a:p>
+            <a:pPr indent="0" marL="0">
+              <a:buNone/>
+            </a:pPr>
+            <a:r>
+              <a:rPr lang="en-US" sz="1300" i="1" dirty="0">
+                <a:solidFill>
+                  <a:srgbClr val="353745"/>
+                </a:solidFill>
+                <a:latin typeface="Georgia" pitchFamily="34" charset="0"/>
+                <a:ea typeface="Georgia" pitchFamily="34" charset="-122"/>
+                <a:cs typeface="Georgia" pitchFamily="34" charset="-120"/>
+              </a:rPr>
+              <a:t>Four series (setup, compression, recovery, scale) sharing one x-axis. Tests pptxgenjs scatter's null-padding pattern for multi-series with non-overlapping x values.</a:t>
+            </a:r>
+            <a:endParaRPr lang="en-US" sz="1300" dirty="0"/>
+          </a:p>
+        </p:txBody>
+      </p:sp>
+      <p:graphicFrame>
+        <p:nvGraphicFramePr>
+          <p:cNvPr id="5" name="Chart 0" descr=""/>
+          <p:cNvGraphicFramePr/>
+          <p:nvPr/>
+        </p:nvGraphicFramePr>
+        <p:xfrm>
+          <a:off x="640080" y="2011680"/>
+          <a:ext cx="10908792" cy="4023360"/>
+        </p:xfrm>
+        <a:graphic xmlns:a="http://schemas.openxmlformats.org/drawingml/2006/main">
+          <a:graphicData uri="http://schemas.openxmlformats.org/drawingml/2006/chart">
+            <c:chart xmlns:c="http://schemas.openxmlformats.org/drawingml/2006/chart" r:id="rId1"/>
+          </a:graphicData>
+        </a:graphic>
+      </p:graphicFrame>
+      <p:sp>
+        <p:nvSpPr>
+          <p:cNvPr id="6" name="Text 3"/>
+          <p:cNvSpPr/>
+          <p:nvPr/>
+        </p:nvSpPr>
+        <p:spPr>
+          <a:xfrm>
+            <a:off x="548640" y="6172200"/>
+            <a:ext cx="11091672" cy="292608"/>
+          </a:xfrm>
+          <a:prstGeom prst="rect">
+            <a:avLst/>
+          </a:prstGeom>
+          <a:noFill/>
+          <a:ln/>
+        </p:spPr>
+        <p:txBody>
+          <a:bodyPr wrap="square" lIns="0" tIns="0" rIns="0" bIns="0" rtlCol="0" anchor="t"/>
+          <a:lstStyle/>
+          <a:p>
+            <a:pPr indent="0" marL="0">
+              <a:buNone/>
+            </a:pPr>
+            <a:r>
+              <a:rPr lang="en-US" sz="1200" i="1" dirty="0">
+                <a:solidFill>
+                  <a:srgbClr val="353745"/>
+                </a:solidFill>
+                <a:latin typeface="Georgia" pitchFamily="34" charset="0"/>
+                <a:ea typeface="Georgia" pitchFamily="34" charset="-122"/>
+                <a:cs typeface="Georgia" pitchFamily="34" charset="-120"/>
+              </a:rPr>
+              <a:t>Compression years sit in the bottom-left cluster. Scale years walk up the diagonal. Phase coloring surfaces structure the simple scatter hides.</a:t>
+            </a:r>
+            <a:endParaRPr lang="en-US" sz="1200" dirty="0"/>
+          </a:p>
+        </p:txBody>
+      </p:sp>
+    </p:spTree>
+  </p:cSld>
+  <p:clrMapOvr>
+    <a:masterClrMapping/>
+  </p:clrMapOvr>
+</p:sld>
+</file>
+
+<file path=ppt/slides/slide14.xml><?xml version="1.0" encoding="utf-8"?>
+<p:sld xmlns:a="http://schemas.openxmlformats.org/drawingml/2006/main" xmlns:r="http://schemas.openxmlformats.org/officeDocument/2006/relationships" xmlns:p="http://schemas.openxmlformats.org/presentationml/2006/main">
+  <p:cSld name="Slide 14">
+    <p:bg>
+      <p:bgPr>
+        <a:solidFill>
+          <a:srgbClr val="FFF5ED"/>
+        </a:solidFill>
+      </p:bgPr>
+    </p:bg>
+    <p:spTree>
+      <p:nvGrpSpPr>
+        <p:cNvPr id="1" name=""/>
+        <p:cNvGrpSpPr/>
+        <p:nvPr/>
+      </p:nvGrpSpPr>
+      <p:grpSpPr>
+        <a:xfrm>
+          <a:off x="0" y="0"/>
+          <a:ext cx="0" cy="0"/>
+          <a:chOff x="0" y="0"/>
+          <a:chExt cx="0" cy="0"/>
+        </a:xfrm>
+      </p:grpSpPr>
+      <p:sp>
+        <p:nvSpPr>
+          <p:cNvPr id="2" name="Text 0"/>
+          <p:cNvSpPr/>
+          <p:nvPr/>
+        </p:nvSpPr>
+        <p:spPr>
+          <a:xfrm>
+            <a:off x="548640" y="457200"/>
+            <a:ext cx="7315200" cy="256032"/>
+          </a:xfrm>
+          <a:prstGeom prst="rect">
+            <a:avLst/>
+          </a:prstGeom>
+          <a:noFill/>
+          <a:ln/>
+        </p:spPr>
+        <p:txBody>
+          <a:bodyPr wrap="square" lIns="0" tIns="0" rIns="0" bIns="0" rtlCol="0" anchor="t"/>
+          <a:lstStyle/>
+          <a:p>
+            <a:pPr indent="0" marL="0">
+              <a:buNone/>
+            </a:pPr>
+            <a:r>
+              <a:rPr lang="en-US" sz="1000" b="1" spc="200" kern="0" dirty="0">
+                <a:solidFill>
+                  <a:srgbClr val="8A7968"/>
+                </a:solidFill>
+                <a:latin typeface="Calibri" pitchFamily="34" charset="0"/>
+                <a:ea typeface="Calibri" pitchFamily="34" charset="-122"/>
+                <a:cs typeface="Calibri" pitchFamily="34" charset="-120"/>
+              </a:rPr>
+              <a:t>RADAR CHART  ·  STRESS-TEST (FILLED OVERLAY)</a:t>
+            </a:r>
+            <a:endParaRPr lang="en-US" sz="1000" dirty="0"/>
+          </a:p>
+        </p:txBody>
+      </p:sp>
+      <p:sp>
+        <p:nvSpPr>
+          <p:cNvPr id="3" name="Text 1"/>
+          <p:cNvSpPr/>
+          <p:nvPr/>
+        </p:nvSpPr>
+        <p:spPr>
+          <a:xfrm>
+            <a:off x="548640" y="749808"/>
+            <a:ext cx="11091672" cy="640080"/>
+          </a:xfrm>
+          <a:prstGeom prst="rect">
+            <a:avLst/>
+          </a:prstGeom>
+          <a:noFill/>
+          <a:ln/>
+        </p:spPr>
+        <p:txBody>
+          <a:bodyPr wrap="square" lIns="0" tIns="0" rIns="0" bIns="0" rtlCol="0" anchor="t"/>
+          <a:lstStyle/>
+          <a:p>
+            <a:pPr indent="0" marL="0">
+              <a:buNone/>
+            </a:pPr>
+            <a:r>
+              <a:rPr lang="en-US" sz="3000" dirty="0">
+                <a:solidFill>
+                  <a:srgbClr val="353745"/>
+                </a:solidFill>
+                <a:latin typeface="Georgia" pitchFamily="34" charset="0"/>
+                <a:ea typeface="Georgia" pitchFamily="34" charset="-122"/>
+                <a:cs typeface="Georgia" pitchFamily="34" charset="-120"/>
+              </a:rPr>
+              <a:t>Same three practices, filled regions.</a:t>
+            </a:r>
+            <a:endParaRPr lang="en-US" sz="3000" dirty="0"/>
+          </a:p>
+        </p:txBody>
+      </p:sp>
+      <p:sp>
+        <p:nvSpPr>
+          <p:cNvPr id="4" name="Text 2"/>
+          <p:cNvSpPr/>
+          <p:nvPr/>
+        </p:nvSpPr>
+        <p:spPr>
+          <a:xfrm>
+            <a:off x="548640" y="1325880"/>
+            <a:ext cx="11091672" cy="292608"/>
+          </a:xfrm>
+          <a:prstGeom prst="rect">
+            <a:avLst/>
+          </a:prstGeom>
+          <a:noFill/>
+          <a:ln/>
+        </p:spPr>
+        <p:txBody>
+          <a:bodyPr wrap="square" lIns="0" tIns="0" rIns="0" bIns="0" rtlCol="0" anchor="t"/>
+          <a:lstStyle/>
+          <a:p>
+            <a:pPr indent="0" marL="0">
+              <a:buNone/>
+            </a:pPr>
+            <a:r>
+              <a:rPr lang="en-US" sz="1300" i="1" dirty="0">
+                <a:solidFill>
+                  <a:srgbClr val="353745"/>
+                </a:solidFill>
+                <a:latin typeface="Georgia" pitchFamily="34" charset="0"/>
+                <a:ea typeface="Georgia" pitchFamily="34" charset="-122"/>
+                <a:cs typeface="Georgia" pitchFamily="34" charset="-120"/>
+              </a:rPr>
+              <a:t>radarStyle = 'filled' with transparency so all three practices read as overlapping shapes. Tests multi-series overlay legibility and whether native radar respects alpha.</a:t>
+            </a:r>
+            <a:endParaRPr lang="en-US" sz="1300" dirty="0"/>
+          </a:p>
+        </p:txBody>
+      </p:sp>
+      <p:graphicFrame>
+        <p:nvGraphicFramePr>
+          <p:cNvPr id="5" name="Chart 0" descr=""/>
+          <p:cNvGraphicFramePr/>
+          <p:nvPr/>
+        </p:nvGraphicFramePr>
+        <p:xfrm>
+          <a:off x="640080" y="2011680"/>
+          <a:ext cx="5943600" cy="4023360"/>
+        </p:xfrm>
+        <a:graphic xmlns:a="http://schemas.openxmlformats.org/drawingml/2006/main">
+          <a:graphicData uri="http://schemas.openxmlformats.org/drawingml/2006/chart">
+            <c:chart xmlns:c="http://schemas.openxmlformats.org/drawingml/2006/chart" r:id="rId1"/>
+          </a:graphicData>
+        </a:graphic>
+      </p:graphicFrame>
+      <p:sp>
+        <p:nvSpPr>
+          <p:cNvPr id="6" name="Text 3"/>
+          <p:cNvSpPr/>
+          <p:nvPr/>
+        </p:nvSpPr>
+        <p:spPr>
+          <a:xfrm>
+            <a:off x="6766560" y="2103120"/>
+            <a:ext cx="4846320" cy="256032"/>
+          </a:xfrm>
+          <a:prstGeom prst="rect">
+            <a:avLst/>
+          </a:prstGeom>
+          <a:noFill/>
+          <a:ln/>
+        </p:spPr>
+        <p:txBody>
+          <a:bodyPr wrap="square" lIns="0" tIns="0" rIns="0" bIns="0" rtlCol="0" anchor="t"/>
+          <a:lstStyle/>
+          <a:p>
+            <a:pPr indent="0" marL="0">
+              <a:buNone/>
+            </a:pPr>
+            <a:r>
+              <a:rPr lang="en-US" sz="1000" b="1" spc="200" kern="0" dirty="0">
+                <a:solidFill>
+                  <a:srgbClr val="8A7968"/>
+                </a:solidFill>
+                <a:latin typeface="Calibri" pitchFamily="34" charset="0"/>
+                <a:ea typeface="Calibri" pitchFamily="34" charset="-122"/>
+                <a:cs typeface="Calibri" pitchFamily="34" charset="-120"/>
+              </a:rPr>
+              <a:t>WHAT THE FILL REVEALS</a:t>
+            </a:r>
+            <a:endParaRPr lang="en-US" sz="1000" dirty="0"/>
+          </a:p>
+        </p:txBody>
+      </p:sp>
+      <p:sp>
+        <p:nvSpPr>
+          <p:cNvPr id="7" name="Shape 4"/>
+          <p:cNvSpPr/>
+          <p:nvPr/>
+        </p:nvSpPr>
+        <p:spPr>
+          <a:xfrm>
+            <a:off x="6766560" y="2377440"/>
+            <a:ext cx="1371600" cy="0"/>
+          </a:xfrm>
+          <a:prstGeom prst="line">
+            <a:avLst/>
+          </a:prstGeom>
+          <a:noFill/>
+          <a:ln w="19050">
+            <a:solidFill>
+              <a:srgbClr val="353745"/>
+            </a:solidFill>
+            <a:prstDash val="solid"/>
+          </a:ln>
+        </p:spPr>
+      </p:sp>
+      <p:sp>
+        <p:nvSpPr>
+          <p:cNvPr id="8" name="Text 5"/>
+          <p:cNvSpPr/>
+          <p:nvPr/>
+        </p:nvSpPr>
+        <p:spPr>
+          <a:xfrm>
+            <a:off x="6766560" y="2651760"/>
+            <a:ext cx="4846320" cy="1097280"/>
+          </a:xfrm>
+          <a:prstGeom prst="rect">
+            <a:avLst/>
+          </a:prstGeom>
+          <a:noFill/>
+          <a:ln/>
+        </p:spPr>
+        <p:txBody>
+          <a:bodyPr wrap="square" lIns="0" tIns="0" rIns="0" bIns="0" rtlCol="0" anchor="t"/>
+          <a:lstStyle/>
+          <a:p>
+            <a:pPr indent="0" marL="0">
+              <a:lnSpc>
+                <a:spcPts val="1500"/>
+              </a:lnSpc>
+              <a:buNone/>
+            </a:pPr>
+            <a:r>
+              <a:rPr lang="en-US" sz="1200" i="1" dirty="0">
+                <a:solidFill>
+                  <a:srgbClr val="8A7968"/>
+                </a:solidFill>
+                <a:latin typeface="Georgia" pitchFamily="34" charset="0"/>
+                <a:ea typeface="Georgia" pitchFamily="34" charset="-122"/>
+                <a:cs typeface="Georgia" pitchFamily="34" charset="-120"/>
+              </a:rPr>
+              <a:t>Filled overlay makes the area under each practice's shape comparable at a glance. Where line-only emphasizes trajectory, filled emphasizes cumulative footprint.</a:t>
+            </a:r>
+            <a:endParaRPr lang="en-US" sz="1200" dirty="0"/>
+          </a:p>
+        </p:txBody>
+      </p:sp>
+      <p:sp>
+        <p:nvSpPr>
+          <p:cNvPr id="9" name="Text 6"/>
+          <p:cNvSpPr/>
+          <p:nvPr/>
+        </p:nvSpPr>
+        <p:spPr>
+          <a:xfrm>
+            <a:off x="6766560" y="3931920"/>
+            <a:ext cx="4846320" cy="1097280"/>
+          </a:xfrm>
+          <a:prstGeom prst="rect">
+            <a:avLst/>
+          </a:prstGeom>
+          <a:noFill/>
+          <a:ln/>
+        </p:spPr>
+        <p:txBody>
+          <a:bodyPr wrap="square" lIns="0" tIns="0" rIns="0" bIns="0" rtlCol="0" anchor="t"/>
+          <a:lstStyle/>
+          <a:p>
+            <a:pPr indent="0" marL="0">
+              <a:lnSpc>
+                <a:spcPts val="1500"/>
+              </a:lnSpc>
+              <a:buNone/>
+            </a:pPr>
+            <a:r>
+              <a:rPr lang="en-US" sz="1200" i="1" dirty="0">
+                <a:solidFill>
+                  <a:srgbClr val="353745"/>
+                </a:solidFill>
+                <a:latin typeface="Georgia" pitchFamily="34" charset="0"/>
+                <a:ea typeface="Georgia" pitchFamily="34" charset="-122"/>
+                <a:cs typeface="Georgia" pitchFamily="34" charset="-120"/>
+              </a:rPr>
+              <a:t>Native ceiling shows here: three filled regions on six axes fight for legibility. At four-plus series, filled radar stops scaling.</a:t>
+            </a:r>
+            <a:endParaRPr lang="en-US" sz="1200" dirty="0"/>
+          </a:p>
+        </p:txBody>
+      </p:sp>
+      <p:sp>
+        <p:nvSpPr>
+          <p:cNvPr id="10" name="Shape 7"/>
+          <p:cNvSpPr/>
+          <p:nvPr/>
+        </p:nvSpPr>
+        <p:spPr>
+          <a:xfrm>
+            <a:off x="6766560" y="5303520"/>
+            <a:ext cx="4846320" cy="0"/>
+          </a:xfrm>
+          <a:prstGeom prst="line">
+            <a:avLst/>
+          </a:prstGeom>
+          <a:noFill/>
+          <a:ln w="6350">
+            <a:solidFill>
+              <a:srgbClr val="C9B9A8"/>
+            </a:solidFill>
+            <a:prstDash val="solid"/>
+          </a:ln>
+        </p:spPr>
+      </p:sp>
+      <p:sp>
+        <p:nvSpPr>
+          <p:cNvPr id="11" name="Text 8"/>
+          <p:cNvSpPr/>
+          <p:nvPr/>
+        </p:nvSpPr>
+        <p:spPr>
+          <a:xfrm>
+            <a:off x="6766560" y="5394960"/>
+            <a:ext cx="4846320" cy="274320"/>
+          </a:xfrm>
+          <a:prstGeom prst="rect">
+            <a:avLst/>
+          </a:prstGeom>
+          <a:noFill/>
+          <a:ln/>
+        </p:spPr>
+        <p:txBody>
+          <a:bodyPr wrap="square" lIns="0" tIns="0" rIns="0" bIns="0" rtlCol="0" anchor="t"/>
+          <a:lstStyle/>
+          <a:p>
+            <a:pPr indent="0" marL="0">
+              <a:buNone/>
+            </a:pPr>
+            <a:r>
+              <a:rPr lang="en-US" sz="1000" i="1" dirty="0">
+                <a:solidFill>
+                  <a:srgbClr val="8A7968"/>
+                </a:solidFill>
+                <a:latin typeface="Calibri" pitchFamily="34" charset="0"/>
+                <a:ea typeface="Calibri" pitchFamily="34" charset="-122"/>
+                <a:cs typeface="Calibri" pitchFamily="34" charset="-120"/>
+              </a:rPr>
+              <a:t>native limit: no per-axis scale, no conditional fill.</a:t>
+            </a:r>
+            <a:endParaRPr lang="en-US" sz="1000" dirty="0"/>
           </a:p>
         </p:txBody>
       </p:sp>

--- a/output/audit_deck.pptx
+++ b/output/audit_deck.pptx
@@ -13364,6 +13364,123 @@
         </p:nvSpPr>
         <p:spPr>
           <a:xfrm>
+            <a:off x="4172881" y="3142548"/>
+            <a:ext cx="914400" cy="365760"/>
+          </a:xfrm>
+          <a:prstGeom prst="rect">
+            <a:avLst/>
+          </a:prstGeom>
+          <a:noFill/>
+          <a:ln/>
+        </p:spPr>
+        <p:txBody>
+          <a:bodyPr wrap="square" lIns="0" tIns="0" rIns="0" bIns="0" rtlCol="0" anchor="ctr"/>
+          <a:lstStyle/>
+          <a:p>
+            <a:pPr algn="ctr" indent="0" marL="0">
+              <a:buNone/>
+            </a:pPr>
+            <a:r>
+              <a:rPr lang="en-US" sz="1800" dirty="0">
+                <a:solidFill>
+                  <a:srgbClr val="FFFFFF"/>
+                </a:solidFill>
+                <a:latin typeface="Georgia" pitchFamily="34" charset="0"/>
+                <a:ea typeface="Georgia" pitchFamily="34" charset="-122"/>
+                <a:cs typeface="Georgia" pitchFamily="34" charset="-120"/>
+              </a:rPr>
+              <a:t>31%</a:t>
+            </a:r>
+            <a:endParaRPr lang="en-US" sz="1800" dirty="0"/>
+          </a:p>
+        </p:txBody>
+      </p:sp>
+      <p:sp>
+        <p:nvSpPr>
+          <p:cNvPr id="7" name="Text 4"/>
+          <p:cNvSpPr/>
+          <p:nvPr/>
+        </p:nvSpPr>
+        <p:spPr>
+          <a:xfrm>
+            <a:off x="3275471" y="5068996"/>
+            <a:ext cx="914400" cy="365760"/>
+          </a:xfrm>
+          <a:prstGeom prst="rect">
+            <a:avLst/>
+          </a:prstGeom>
+          <a:noFill/>
+          <a:ln/>
+        </p:spPr>
+        <p:txBody>
+          <a:bodyPr wrap="square" lIns="0" tIns="0" rIns="0" bIns="0" rtlCol="0" anchor="ctr"/>
+          <a:lstStyle/>
+          <a:p>
+            <a:pPr algn="ctr" indent="0" marL="0">
+              <a:buNone/>
+            </a:pPr>
+            <a:r>
+              <a:rPr lang="en-US" sz="1800" dirty="0">
+                <a:solidFill>
+                  <a:srgbClr val="353745"/>
+                </a:solidFill>
+                <a:latin typeface="Georgia" pitchFamily="34" charset="0"/>
+                <a:ea typeface="Georgia" pitchFamily="34" charset="-122"/>
+                <a:cs typeface="Georgia" pitchFamily="34" charset="-120"/>
+              </a:rPr>
+              <a:t>35%</a:t>
+            </a:r>
+            <a:endParaRPr lang="en-US" sz="1800" dirty="0"/>
+          </a:p>
+        </p:txBody>
+      </p:sp>
+      <p:sp>
+        <p:nvSpPr>
+          <p:cNvPr id="8" name="Text 5"/>
+          <p:cNvSpPr/>
+          <p:nvPr/>
+        </p:nvSpPr>
+        <p:spPr>
+          <a:xfrm>
+            <a:off x="2073072" y="3245529"/>
+            <a:ext cx="914400" cy="365760"/>
+          </a:xfrm>
+          <a:prstGeom prst="rect">
+            <a:avLst/>
+          </a:prstGeom>
+          <a:noFill/>
+          <a:ln/>
+        </p:spPr>
+        <p:txBody>
+          <a:bodyPr wrap="square" lIns="0" tIns="0" rIns="0" bIns="0" rtlCol="0" anchor="ctr"/>
+          <a:lstStyle/>
+          <a:p>
+            <a:pPr algn="ctr" indent="0" marL="0">
+              <a:buNone/>
+            </a:pPr>
+            <a:r>
+              <a:rPr lang="en-US" sz="1800" dirty="0">
+                <a:solidFill>
+                  <a:srgbClr val="FFFFFF"/>
+                </a:solidFill>
+                <a:latin typeface="Georgia" pitchFamily="34" charset="0"/>
+                <a:ea typeface="Georgia" pitchFamily="34" charset="-122"/>
+                <a:cs typeface="Georgia" pitchFamily="34" charset="-120"/>
+              </a:rPr>
+              <a:t>34%</a:t>
+            </a:r>
+            <a:endParaRPr lang="en-US" sz="1800" dirty="0"/>
+          </a:p>
+        </p:txBody>
+      </p:sp>
+      <p:sp>
+        <p:nvSpPr>
+          <p:cNvPr id="9" name="Text 6"/>
+          <p:cNvSpPr/>
+          <p:nvPr/>
+        </p:nvSpPr>
+        <p:spPr>
+          <a:xfrm>
             <a:off x="6766560" y="2103120"/>
             <a:ext cx="4846320" cy="256032"/>
           </a:xfrm>
@@ -13397,7 +13514,7 @@
       </p:sp>
       <p:sp>
         <p:nvSpPr>
-          <p:cNvPr id="7" name="Shape 4"/>
+          <p:cNvPr id="10" name="Shape 7"/>
           <p:cNvSpPr/>
           <p:nvPr/>
         </p:nvSpPr>
@@ -13420,7 +13537,7 @@
       </p:sp>
       <p:sp>
         <p:nvSpPr>
-          <p:cNvPr id="8" name="Text 5"/>
+          <p:cNvPr id="11" name="Text 8"/>
           <p:cNvSpPr/>
           <p:nvPr/>
         </p:nvSpPr>
@@ -13459,7 +13576,7 @@
       </p:sp>
       <p:sp>
         <p:nvSpPr>
-          <p:cNvPr id="9" name="Shape 6"/>
+          <p:cNvPr id="12" name="Shape 9"/>
           <p:cNvSpPr/>
           <p:nvPr/>
         </p:nvSpPr>
@@ -13479,7 +13596,7 @@
       </p:sp>
       <p:sp>
         <p:nvSpPr>
-          <p:cNvPr id="10" name="Text 7"/>
+          <p:cNvPr id="13" name="Text 10"/>
           <p:cNvSpPr/>
           <p:nvPr/>
         </p:nvSpPr>
@@ -13518,7 +13635,7 @@
       </p:sp>
       <p:sp>
         <p:nvSpPr>
-          <p:cNvPr id="11" name="Text 8"/>
+          <p:cNvPr id="14" name="Text 11"/>
           <p:cNvSpPr/>
           <p:nvPr/>
         </p:nvSpPr>
@@ -13557,7 +13674,7 @@
       </p:sp>
       <p:sp>
         <p:nvSpPr>
-          <p:cNvPr id="12" name="Text 9"/>
+          <p:cNvPr id="15" name="Text 12"/>
           <p:cNvSpPr/>
           <p:nvPr/>
         </p:nvSpPr>
@@ -13596,7 +13713,7 @@
       </p:sp>
       <p:sp>
         <p:nvSpPr>
-          <p:cNvPr id="13" name="Shape 10"/>
+          <p:cNvPr id="16" name="Shape 13"/>
           <p:cNvSpPr/>
           <p:nvPr/>
         </p:nvSpPr>
@@ -13616,7 +13733,7 @@
       </p:sp>
       <p:sp>
         <p:nvSpPr>
-          <p:cNvPr id="14" name="Text 11"/>
+          <p:cNvPr id="17" name="Text 14"/>
           <p:cNvSpPr/>
           <p:nvPr/>
         </p:nvSpPr>
@@ -13655,7 +13772,7 @@
       </p:sp>
       <p:sp>
         <p:nvSpPr>
-          <p:cNvPr id="15" name="Text 12"/>
+          <p:cNvPr id="18" name="Text 15"/>
           <p:cNvSpPr/>
           <p:nvPr/>
         </p:nvSpPr>
@@ -13694,7 +13811,7 @@
       </p:sp>
       <p:sp>
         <p:nvSpPr>
-          <p:cNvPr id="16" name="Text 13"/>
+          <p:cNvPr id="19" name="Text 16"/>
           <p:cNvSpPr/>
           <p:nvPr/>
         </p:nvSpPr>
@@ -13733,7 +13850,7 @@
       </p:sp>
       <p:sp>
         <p:nvSpPr>
-          <p:cNvPr id="17" name="Shape 14"/>
+          <p:cNvPr id="20" name="Shape 17"/>
           <p:cNvSpPr/>
           <p:nvPr/>
         </p:nvSpPr>
@@ -13753,7 +13870,7 @@
       </p:sp>
       <p:sp>
         <p:nvSpPr>
-          <p:cNvPr id="18" name="Text 15"/>
+          <p:cNvPr id="21" name="Text 18"/>
           <p:cNvSpPr/>
           <p:nvPr/>
         </p:nvSpPr>
@@ -13792,7 +13909,7 @@
       </p:sp>
       <p:sp>
         <p:nvSpPr>
-          <p:cNvPr id="19" name="Text 16"/>
+          <p:cNvPr id="22" name="Text 19"/>
           <p:cNvSpPr/>
           <p:nvPr/>
         </p:nvSpPr>
@@ -13831,7 +13948,7 @@
       </p:sp>
       <p:sp>
         <p:nvSpPr>
-          <p:cNvPr id="20" name="Text 17"/>
+          <p:cNvPr id="23" name="Text 20"/>
           <p:cNvSpPr/>
           <p:nvPr/>
         </p:nvSpPr>

--- a/output/audit_deck.pptx
+++ b/output/audit_deck.pptx
@@ -13364,8 +13364,8 @@
         </p:nvSpPr>
         <p:spPr>
           <a:xfrm>
-            <a:off x="4172881" y="3142548"/>
-            <a:ext cx="914400" cy="365760"/>
+            <a:off x="3984325" y="3408955"/>
+            <a:ext cx="914400" cy="274320"/>
           </a:xfrm>
           <a:prstGeom prst="rect">
             <a:avLst/>
@@ -13381,7 +13381,7 @@
               <a:buNone/>
             </a:pPr>
             <a:r>
-              <a:rPr lang="en-US" sz="1800" dirty="0">
+              <a:rPr lang="en-US" sz="1400" b="1" dirty="0">
                 <a:solidFill>
                   <a:srgbClr val="FFFFFF"/>
                 </a:solidFill>
@@ -13391,7 +13391,7 @@
               </a:rPr>
               <a:t>31%</a:t>
             </a:r>
-            <a:endParaRPr lang="en-US" sz="1800" dirty="0"/>
+            <a:endParaRPr lang="en-US" sz="1400" dirty="0"/>
           </a:p>
         </p:txBody>
       </p:sp>
@@ -13403,8 +13403,8 @@
         </p:nvSpPr>
         <p:spPr>
           <a:xfrm>
-            <a:off x="3275471" y="5068996"/>
-            <a:ext cx="914400" cy="365760"/>
+            <a:off x="3253102" y="4978653"/>
+            <a:ext cx="914400" cy="274320"/>
           </a:xfrm>
           <a:prstGeom prst="rect">
             <a:avLst/>
@@ -13420,7 +13420,7 @@
               <a:buNone/>
             </a:pPr>
             <a:r>
-              <a:rPr lang="en-US" sz="1800" dirty="0">
+              <a:rPr lang="en-US" sz="1400" b="1" dirty="0">
                 <a:solidFill>
                   <a:srgbClr val="353745"/>
                 </a:solidFill>
@@ -13430,7 +13430,7 @@
               </a:rPr>
               <a:t>35%</a:t>
             </a:r>
-            <a:endParaRPr lang="en-US" sz="1800" dirty="0"/>
+            <a:endParaRPr lang="en-US" sz="1400" dirty="0"/>
           </a:p>
         </p:txBody>
       </p:sp>
@@ -13442,8 +13442,8 @@
         </p:nvSpPr>
         <p:spPr>
           <a:xfrm>
-            <a:off x="2073072" y="3245529"/>
-            <a:ext cx="914400" cy="365760"/>
+            <a:off x="2273370" y="3492865"/>
+            <a:ext cx="914400" cy="274320"/>
           </a:xfrm>
           <a:prstGeom prst="rect">
             <a:avLst/>
@@ -13459,7 +13459,7 @@
               <a:buNone/>
             </a:pPr>
             <a:r>
-              <a:rPr lang="en-US" sz="1800" dirty="0">
+              <a:rPr lang="en-US" sz="1400" b="1" dirty="0">
                 <a:solidFill>
                   <a:srgbClr val="FFFFFF"/>
                 </a:solidFill>
@@ -13469,7 +13469,7 @@
               </a:rPr>
               <a:t>34%</a:t>
             </a:r>
-            <a:endParaRPr lang="en-US" sz="1800" dirty="0"/>
+            <a:endParaRPr lang="en-US" sz="1400" dirty="0"/>
           </a:p>
         </p:txBody>
       </p:sp>

--- a/output/audit_deck.pptx
+++ b/output/audit_deck.pptx
@@ -19,9 +19,13 @@
     <p:sldId id="267" r:id="rId13"/>
     <p:sldId id="268" r:id="rId14"/>
     <p:sldId id="269" r:id="rId15"/>
+    <p:sldId id="270" r:id="rId16"/>
+    <p:sldId id="271" r:id="rId17"/>
+    <p:sldId id="272" r:id="rId18"/>
+    <p:sldId id="273" r:id="rId19"/>
   </p:sldIdLst>
   <p:notesMasterIdLst>
-    <p:notesMasterId r:id="rId16"/>
+    <p:notesMasterId r:id="rId20"/>
   </p:notesMasterIdLst>
   <p:sldSz cx="12192000" cy="6858000"/>
   <p:notesSz cx="6858000" cy="12192000"/>
@@ -6166,6 +6170,358 @@
             <a:fld id="{F7021451-1387-4CA6-816F-3879F97B5CBC}" type="slidenum">
               <a:rPr lang="en-US"/>
               <a:t>14</a:t>
+            </a:fld>
+            <a:endParaRPr lang="en-US"/>
+          </a:p>
+        </p:txBody>
+      </p:sp>
+    </p:spTree>
+    <p:extLst>
+      <p:ext uri="{BB962C8B-B14F-4D97-AF65-F5344CB8AC3E}">
+        <p14:creationId xmlns:p14="http://schemas.microsoft.com/office/powerpoint/2010/main" val="1024086991"/>
+      </p:ext>
+    </p:extLst>
+  </p:cSld>
+  <p:clrMapOvr>
+    <a:masterClrMapping/>
+  </p:clrMapOvr>
+</p:notes>
+</file>
+
+<file path=ppt/notesSlides/notesSlide15.xml><?xml version="1.0" encoding="utf-8"?>
+<p:notes xmlns:a="http://schemas.openxmlformats.org/drawingml/2006/main" xmlns:r="http://schemas.openxmlformats.org/officeDocument/2006/relationships" xmlns:p="http://schemas.openxmlformats.org/presentationml/2006/main">
+  <p:cSld>
+    <p:spTree>
+      <p:nvGrpSpPr>
+        <p:cNvPr id="1" name=""/>
+        <p:cNvGrpSpPr/>
+        <p:nvPr/>
+      </p:nvGrpSpPr>
+      <p:grpSpPr>
+        <a:xfrm>
+          <a:off x="0" y="0"/>
+          <a:ext cx="0" cy="0"/>
+          <a:chOff x="0" y="0"/>
+          <a:chExt cx="0" cy="0"/>
+        </a:xfrm>
+      </p:grpSpPr>
+      <p:sp>
+        <p:nvSpPr>
+          <p:cNvPr id="2" name="Slide Image Placeholder 1"/>
+          <p:cNvSpPr>
+            <a:spLocks noGrp="1" noRot="1" noChangeAspect="1"/>
+          </p:cNvSpPr>
+          <p:nvPr>
+            <p:ph type="sldImg"/>
+          </p:nvPr>
+        </p:nvSpPr>
+        <p:spPr/>
+      </p:sp>
+      <p:sp>
+        <p:nvSpPr>
+          <p:cNvPr id="3" name="Notes Placeholder 2"/>
+          <p:cNvSpPr>
+            <a:spLocks noGrp="1"/>
+          </p:cNvSpPr>
+          <p:nvPr>
+            <p:ph type="body" idx="1"/>
+          </p:nvPr>
+        </p:nvSpPr>
+        <p:spPr/>
+        <p:txBody>
+          <a:bodyPr/>
+          <a:lstStyle/>
+          <a:p>
+            <a:r>
+              <a:rPr lang="en-US" dirty="0"/>
+              <a:t/>
+            </a:r>
+            <a:endParaRPr lang="en-US" dirty="0"/>
+          </a:p>
+        </p:txBody>
+      </p:sp>
+      <p:sp>
+        <p:nvSpPr>
+          <p:cNvPr id="4" name="Slide Number Placeholder 3"/>
+          <p:cNvSpPr>
+            <a:spLocks noGrp="1"/>
+          </p:cNvSpPr>
+          <p:nvPr>
+            <p:ph type="sldNum" sz="quarter" idx="10"/>
+          </p:nvPr>
+        </p:nvSpPr>
+        <p:spPr/>
+        <p:txBody>
+          <a:bodyPr/>
+          <a:lstStyle/>
+          <a:p>
+            <a:fld id="{F7021451-1387-4CA6-816F-3879F97B5CBC}" type="slidenum">
+              <a:rPr lang="en-US"/>
+              <a:t>15</a:t>
+            </a:fld>
+            <a:endParaRPr lang="en-US"/>
+          </a:p>
+        </p:txBody>
+      </p:sp>
+    </p:spTree>
+    <p:extLst>
+      <p:ext uri="{BB962C8B-B14F-4D97-AF65-F5344CB8AC3E}">
+        <p14:creationId xmlns:p14="http://schemas.microsoft.com/office/powerpoint/2010/main" val="1024086991"/>
+      </p:ext>
+    </p:extLst>
+  </p:cSld>
+  <p:clrMapOvr>
+    <a:masterClrMapping/>
+  </p:clrMapOvr>
+</p:notes>
+</file>
+
+<file path=ppt/notesSlides/notesSlide16.xml><?xml version="1.0" encoding="utf-8"?>
+<p:notes xmlns:a="http://schemas.openxmlformats.org/drawingml/2006/main" xmlns:r="http://schemas.openxmlformats.org/officeDocument/2006/relationships" xmlns:p="http://schemas.openxmlformats.org/presentationml/2006/main">
+  <p:cSld>
+    <p:spTree>
+      <p:nvGrpSpPr>
+        <p:cNvPr id="1" name=""/>
+        <p:cNvGrpSpPr/>
+        <p:nvPr/>
+      </p:nvGrpSpPr>
+      <p:grpSpPr>
+        <a:xfrm>
+          <a:off x="0" y="0"/>
+          <a:ext cx="0" cy="0"/>
+          <a:chOff x="0" y="0"/>
+          <a:chExt cx="0" cy="0"/>
+        </a:xfrm>
+      </p:grpSpPr>
+      <p:sp>
+        <p:nvSpPr>
+          <p:cNvPr id="2" name="Slide Image Placeholder 1"/>
+          <p:cNvSpPr>
+            <a:spLocks noGrp="1" noRot="1" noChangeAspect="1"/>
+          </p:cNvSpPr>
+          <p:nvPr>
+            <p:ph type="sldImg"/>
+          </p:nvPr>
+        </p:nvSpPr>
+        <p:spPr/>
+      </p:sp>
+      <p:sp>
+        <p:nvSpPr>
+          <p:cNvPr id="3" name="Notes Placeholder 2"/>
+          <p:cNvSpPr>
+            <a:spLocks noGrp="1"/>
+          </p:cNvSpPr>
+          <p:nvPr>
+            <p:ph type="body" idx="1"/>
+          </p:nvPr>
+        </p:nvSpPr>
+        <p:spPr/>
+        <p:txBody>
+          <a:bodyPr/>
+          <a:lstStyle/>
+          <a:p>
+            <a:r>
+              <a:rPr lang="en-US" dirty="0"/>
+              <a:t/>
+            </a:r>
+            <a:endParaRPr lang="en-US" dirty="0"/>
+          </a:p>
+        </p:txBody>
+      </p:sp>
+      <p:sp>
+        <p:nvSpPr>
+          <p:cNvPr id="4" name="Slide Number Placeholder 3"/>
+          <p:cNvSpPr>
+            <a:spLocks noGrp="1"/>
+          </p:cNvSpPr>
+          <p:nvPr>
+            <p:ph type="sldNum" sz="quarter" idx="10"/>
+          </p:nvPr>
+        </p:nvSpPr>
+        <p:spPr/>
+        <p:txBody>
+          <a:bodyPr/>
+          <a:lstStyle/>
+          <a:p>
+            <a:fld id="{F7021451-1387-4CA6-816F-3879F97B5CBC}" type="slidenum">
+              <a:rPr lang="en-US"/>
+              <a:t>16</a:t>
+            </a:fld>
+            <a:endParaRPr lang="en-US"/>
+          </a:p>
+        </p:txBody>
+      </p:sp>
+    </p:spTree>
+    <p:extLst>
+      <p:ext uri="{BB962C8B-B14F-4D97-AF65-F5344CB8AC3E}">
+        <p14:creationId xmlns:p14="http://schemas.microsoft.com/office/powerpoint/2010/main" val="1024086991"/>
+      </p:ext>
+    </p:extLst>
+  </p:cSld>
+  <p:clrMapOvr>
+    <a:masterClrMapping/>
+  </p:clrMapOvr>
+</p:notes>
+</file>
+
+<file path=ppt/notesSlides/notesSlide17.xml><?xml version="1.0" encoding="utf-8"?>
+<p:notes xmlns:a="http://schemas.openxmlformats.org/drawingml/2006/main" xmlns:r="http://schemas.openxmlformats.org/officeDocument/2006/relationships" xmlns:p="http://schemas.openxmlformats.org/presentationml/2006/main">
+  <p:cSld>
+    <p:spTree>
+      <p:nvGrpSpPr>
+        <p:cNvPr id="1" name=""/>
+        <p:cNvGrpSpPr/>
+        <p:nvPr/>
+      </p:nvGrpSpPr>
+      <p:grpSpPr>
+        <a:xfrm>
+          <a:off x="0" y="0"/>
+          <a:ext cx="0" cy="0"/>
+          <a:chOff x="0" y="0"/>
+          <a:chExt cx="0" cy="0"/>
+        </a:xfrm>
+      </p:grpSpPr>
+      <p:sp>
+        <p:nvSpPr>
+          <p:cNvPr id="2" name="Slide Image Placeholder 1"/>
+          <p:cNvSpPr>
+            <a:spLocks noGrp="1" noRot="1" noChangeAspect="1"/>
+          </p:cNvSpPr>
+          <p:nvPr>
+            <p:ph type="sldImg"/>
+          </p:nvPr>
+        </p:nvSpPr>
+        <p:spPr/>
+      </p:sp>
+      <p:sp>
+        <p:nvSpPr>
+          <p:cNvPr id="3" name="Notes Placeholder 2"/>
+          <p:cNvSpPr>
+            <a:spLocks noGrp="1"/>
+          </p:cNvSpPr>
+          <p:nvPr>
+            <p:ph type="body" idx="1"/>
+          </p:nvPr>
+        </p:nvSpPr>
+        <p:spPr/>
+        <p:txBody>
+          <a:bodyPr/>
+          <a:lstStyle/>
+          <a:p>
+            <a:r>
+              <a:rPr lang="en-US" dirty="0"/>
+              <a:t/>
+            </a:r>
+            <a:endParaRPr lang="en-US" dirty="0"/>
+          </a:p>
+        </p:txBody>
+      </p:sp>
+      <p:sp>
+        <p:nvSpPr>
+          <p:cNvPr id="4" name="Slide Number Placeholder 3"/>
+          <p:cNvSpPr>
+            <a:spLocks noGrp="1"/>
+          </p:cNvSpPr>
+          <p:nvPr>
+            <p:ph type="sldNum" sz="quarter" idx="10"/>
+          </p:nvPr>
+        </p:nvSpPr>
+        <p:spPr/>
+        <p:txBody>
+          <a:bodyPr/>
+          <a:lstStyle/>
+          <a:p>
+            <a:fld id="{F7021451-1387-4CA6-816F-3879F97B5CBC}" type="slidenum">
+              <a:rPr lang="en-US"/>
+              <a:t>17</a:t>
+            </a:fld>
+            <a:endParaRPr lang="en-US"/>
+          </a:p>
+        </p:txBody>
+      </p:sp>
+    </p:spTree>
+    <p:extLst>
+      <p:ext uri="{BB962C8B-B14F-4D97-AF65-F5344CB8AC3E}">
+        <p14:creationId xmlns:p14="http://schemas.microsoft.com/office/powerpoint/2010/main" val="1024086991"/>
+      </p:ext>
+    </p:extLst>
+  </p:cSld>
+  <p:clrMapOvr>
+    <a:masterClrMapping/>
+  </p:clrMapOvr>
+</p:notes>
+</file>
+
+<file path=ppt/notesSlides/notesSlide18.xml><?xml version="1.0" encoding="utf-8"?>
+<p:notes xmlns:a="http://schemas.openxmlformats.org/drawingml/2006/main" xmlns:r="http://schemas.openxmlformats.org/officeDocument/2006/relationships" xmlns:p="http://schemas.openxmlformats.org/presentationml/2006/main">
+  <p:cSld>
+    <p:spTree>
+      <p:nvGrpSpPr>
+        <p:cNvPr id="1" name=""/>
+        <p:cNvGrpSpPr/>
+        <p:nvPr/>
+      </p:nvGrpSpPr>
+      <p:grpSpPr>
+        <a:xfrm>
+          <a:off x="0" y="0"/>
+          <a:ext cx="0" cy="0"/>
+          <a:chOff x="0" y="0"/>
+          <a:chExt cx="0" cy="0"/>
+        </a:xfrm>
+      </p:grpSpPr>
+      <p:sp>
+        <p:nvSpPr>
+          <p:cNvPr id="2" name="Slide Image Placeholder 1"/>
+          <p:cNvSpPr>
+            <a:spLocks noGrp="1" noRot="1" noChangeAspect="1"/>
+          </p:cNvSpPr>
+          <p:nvPr>
+            <p:ph type="sldImg"/>
+          </p:nvPr>
+        </p:nvSpPr>
+        <p:spPr/>
+      </p:sp>
+      <p:sp>
+        <p:nvSpPr>
+          <p:cNvPr id="3" name="Notes Placeholder 2"/>
+          <p:cNvSpPr>
+            <a:spLocks noGrp="1"/>
+          </p:cNvSpPr>
+          <p:nvPr>
+            <p:ph type="body" idx="1"/>
+          </p:nvPr>
+        </p:nvSpPr>
+        <p:spPr/>
+        <p:txBody>
+          <a:bodyPr/>
+          <a:lstStyle/>
+          <a:p>
+            <a:r>
+              <a:rPr lang="en-US" dirty="0"/>
+              <a:t/>
+            </a:r>
+            <a:endParaRPr lang="en-US" dirty="0"/>
+          </a:p>
+        </p:txBody>
+      </p:sp>
+      <p:sp>
+        <p:nvSpPr>
+          <p:cNvPr id="4" name="Slide Number Placeholder 3"/>
+          <p:cNvSpPr>
+            <a:spLocks noGrp="1"/>
+          </p:cNvSpPr>
+          <p:nvPr>
+            <p:ph type="sldNum" sz="quarter" idx="10"/>
+          </p:nvPr>
+        </p:nvSpPr>
+        <p:spPr/>
+        <p:txBody>
+          <a:bodyPr/>
+          <a:lstStyle/>
+          <a:p>
+            <a:fld id="{F7021451-1387-4CA6-816F-3879F97B5CBC}" type="slidenum">
+              <a:rPr lang="en-US"/>
+              <a:t>18</a:t>
             </a:fld>
             <a:endParaRPr lang="en-US"/>
           </a:p>
@@ -9086,6 +9442,4092 @@
 </p:sld>
 </file>
 
+<file path=ppt/slides/slide15.xml><?xml version="1.0" encoding="utf-8"?>
+<p:sld xmlns:a="http://schemas.openxmlformats.org/drawingml/2006/main" xmlns:r="http://schemas.openxmlformats.org/officeDocument/2006/relationships" xmlns:p="http://schemas.openxmlformats.org/presentationml/2006/main">
+  <p:cSld name="Slide 15">
+    <p:bg>
+      <p:bgPr>
+        <a:solidFill>
+          <a:srgbClr val="FFF5ED"/>
+        </a:solidFill>
+      </p:bgPr>
+    </p:bg>
+    <p:spTree>
+      <p:nvGrpSpPr>
+        <p:cNvPr id="1" name=""/>
+        <p:cNvGrpSpPr/>
+        <p:nvPr/>
+      </p:nvGrpSpPr>
+      <p:grpSpPr>
+        <a:xfrm>
+          <a:off x="0" y="0"/>
+          <a:ext cx="0" cy="0"/>
+          <a:chOff x="0" y="0"/>
+          <a:chExt cx="0" cy="0"/>
+        </a:xfrm>
+      </p:grpSpPr>
+      <p:sp>
+        <p:nvSpPr>
+          <p:cNvPr id="2" name="Text 0"/>
+          <p:cNvSpPr/>
+          <p:nvPr/>
+        </p:nvSpPr>
+        <p:spPr>
+          <a:xfrm>
+            <a:off x="548640" y="457200"/>
+            <a:ext cx="7315200" cy="256032"/>
+          </a:xfrm>
+          <a:prstGeom prst="rect">
+            <a:avLst/>
+          </a:prstGeom>
+          <a:noFill/>
+          <a:ln/>
+        </p:spPr>
+        <p:txBody>
+          <a:bodyPr wrap="square" lIns="0" tIns="0" rIns="0" bIns="0" rtlCol="0" anchor="t"/>
+          <a:lstStyle/>
+          <a:p>
+            <a:pPr indent="0" marL="0">
+              <a:buNone/>
+            </a:pPr>
+            <a:r>
+              <a:rPr lang="en-US" sz="1000" b="1" spc="200" kern="0" dirty="0">
+                <a:solidFill>
+                  <a:srgbClr val="8A7968"/>
+                </a:solidFill>
+                <a:latin typeface="Calibri" pitchFamily="34" charset="0"/>
+                <a:ea typeface="Calibri" pitchFamily="34" charset="-122"/>
+                <a:cs typeface="Calibri" pitchFamily="34" charset="-120"/>
+              </a:rPr>
+              <a:t>FUNNEL CHART  ·  ESCAPE-HATCH (SHAPES)</a:t>
+            </a:r>
+            <a:endParaRPr lang="en-US" sz="1000" dirty="0"/>
+          </a:p>
+        </p:txBody>
+      </p:sp>
+      <p:sp>
+        <p:nvSpPr>
+          <p:cNvPr id="3" name="Text 1"/>
+          <p:cNvSpPr/>
+          <p:nvPr/>
+        </p:nvSpPr>
+        <p:spPr>
+          <a:xfrm>
+            <a:off x="548640" y="749808"/>
+            <a:ext cx="11091672" cy="640080"/>
+          </a:xfrm>
+          <a:prstGeom prst="rect">
+            <a:avLst/>
+          </a:prstGeom>
+          <a:noFill/>
+          <a:ln/>
+        </p:spPr>
+        <p:txBody>
+          <a:bodyPr wrap="square" lIns="0" tIns="0" rIns="0" bIns="0" rtlCol="0" anchor="t"/>
+          <a:lstStyle/>
+          <a:p>
+            <a:pPr indent="0" marL="0">
+              <a:buNone/>
+            </a:pPr>
+            <a:r>
+              <a:rPr lang="en-US" sz="3000" dirty="0">
+                <a:solidFill>
+                  <a:srgbClr val="353745"/>
+                </a:solidFill>
+                <a:latin typeface="Georgia" pitchFamily="34" charset="0"/>
+                <a:ea typeface="Georgia" pitchFamily="34" charset="-122"/>
+                <a:cs typeface="Georgia" pitchFamily="34" charset="-120"/>
+              </a:rPr>
+              <a:t>A five-stage pipeline funnel.</a:t>
+            </a:r>
+            <a:endParaRPr lang="en-US" sz="3000" dirty="0"/>
+          </a:p>
+        </p:txBody>
+      </p:sp>
+      <p:sp>
+        <p:nvSpPr>
+          <p:cNvPr id="4" name="Text 2"/>
+          <p:cNvSpPr/>
+          <p:nvPr/>
+        </p:nvSpPr>
+        <p:spPr>
+          <a:xfrm>
+            <a:off x="548640" y="1325880"/>
+            <a:ext cx="11091672" cy="292608"/>
+          </a:xfrm>
+          <a:prstGeom prst="rect">
+            <a:avLst/>
+          </a:prstGeom>
+          <a:noFill/>
+          <a:ln/>
+        </p:spPr>
+        <p:txBody>
+          <a:bodyPr wrap="square" lIns="0" tIns="0" rIns="0" bIns="0" rtlCol="0" anchor="t"/>
+          <a:lstStyle/>
+          <a:p>
+            <a:pPr indent="0" marL="0">
+              <a:buNone/>
+            </a:pPr>
+            <a:r>
+              <a:rPr lang="en-US" sz="1300" i="1" dirty="0">
+                <a:solidFill>
+                  <a:srgbClr val="353745"/>
+                </a:solidFill>
+                <a:latin typeface="Georgia" pitchFamily="34" charset="0"/>
+                <a:ea typeface="Georgia" pitchFamily="34" charset="-122"/>
+                <a:cs typeface="Georgia" pitchFamily="34" charset="-120"/>
+              </a:rPr>
+              <a:t>PPT has a native funnel type but pptxgenjs cannot emit it. Built with shape trapezoids via claude-pptx-plot. Stage labels and values embedded; conversion rates on the right.</a:t>
+            </a:r>
+            <a:endParaRPr lang="en-US" sz="1300" dirty="0"/>
+          </a:p>
+        </p:txBody>
+      </p:sp>
+      <p:sp>
+        <p:nvSpPr>
+          <p:cNvPr id="5" name="Shape 3"/>
+          <p:cNvSpPr/>
+          <p:nvPr/>
+        </p:nvSpPr>
+        <p:spPr>
+          <a:xfrm flipV="1">
+            <a:off x="1828800" y="2011680"/>
+            <a:ext cx="5486400" cy="749808"/>
+          </a:xfrm>
+          <a:prstGeom prst="trapezoid">
+            <a:avLst/>
+          </a:prstGeom>
+          <a:solidFill>
+            <a:srgbClr val="2D5F7C">
+              <a:alpha val="82000"/>
+            </a:srgbClr>
+          </a:solidFill>
+          <a:ln w="6350">
+            <a:solidFill>
+              <a:srgbClr val="2D5F7C"/>
+            </a:solidFill>
+            <a:prstDash val="solid"/>
+          </a:ln>
+        </p:spPr>
+      </p:sp>
+      <p:sp>
+        <p:nvSpPr>
+          <p:cNvPr id="6" name="Text 4"/>
+          <p:cNvSpPr/>
+          <p:nvPr/>
+        </p:nvSpPr>
+        <p:spPr>
+          <a:xfrm>
+            <a:off x="1828800" y="2249424"/>
+            <a:ext cx="5486400" cy="274320"/>
+          </a:xfrm>
+          <a:prstGeom prst="rect">
+            <a:avLst/>
+          </a:prstGeom>
+          <a:noFill/>
+          <a:ln/>
+        </p:spPr>
+        <p:txBody>
+          <a:bodyPr wrap="square" lIns="0" tIns="0" rIns="0" bIns="0" rtlCol="0" anchor="ctr"/>
+          <a:lstStyle/>
+          <a:p>
+            <a:pPr algn="ctr" indent="0" marL="0">
+              <a:buNone/>
+            </a:pPr>
+            <a:r>
+              <a:rPr lang="en-US" sz="1100" b="1" dirty="0">
+                <a:solidFill>
+                  <a:srgbClr val="FFFFFF"/>
+                </a:solidFill>
+                <a:latin typeface="Calibri" pitchFamily="34" charset="0"/>
+                <a:ea typeface="Calibri" pitchFamily="34" charset="-122"/>
+                <a:cs typeface="Calibri" pitchFamily="34" charset="-120"/>
+              </a:rPr>
+              <a:t>Inbound leads</a:t>
+            </a:r>
+            <a:pPr algn="ctr" indent="0" marL="0">
+              <a:buNone/>
+            </a:pPr>
+            <a:r>
+              <a:rPr lang="en-US" sz="1100" dirty="0">
+                <a:solidFill>
+                  <a:srgbClr val="FFFFFF"/>
+                </a:solidFill>
+                <a:latin typeface="Calibri" pitchFamily="34" charset="0"/>
+                <a:ea typeface="Calibri" pitchFamily="34" charset="-122"/>
+                <a:cs typeface="Calibri" pitchFamily="34" charset="-120"/>
+              </a:rPr>
+              <a:t>  ·  500</a:t>
+            </a:r>
+            <a:endParaRPr lang="en-US" sz="1100" dirty="0"/>
+          </a:p>
+        </p:txBody>
+      </p:sp>
+      <p:sp>
+        <p:nvSpPr>
+          <p:cNvPr id="7" name="Shape 5"/>
+          <p:cNvSpPr/>
+          <p:nvPr/>
+        </p:nvSpPr>
+        <p:spPr>
+          <a:xfrm flipV="1">
+            <a:off x="2842591" y="2807208"/>
+            <a:ext cx="3458817" cy="749808"/>
+          </a:xfrm>
+          <a:prstGeom prst="trapezoid">
+            <a:avLst/>
+          </a:prstGeom>
+          <a:solidFill>
+            <a:srgbClr val="2D5F7C">
+              <a:alpha val="74000"/>
+            </a:srgbClr>
+          </a:solidFill>
+          <a:ln w="6350">
+            <a:solidFill>
+              <a:srgbClr val="2D5F7C"/>
+            </a:solidFill>
+            <a:prstDash val="solid"/>
+          </a:ln>
+        </p:spPr>
+      </p:sp>
+      <p:sp>
+        <p:nvSpPr>
+          <p:cNvPr id="8" name="Text 6"/>
+          <p:cNvSpPr/>
+          <p:nvPr/>
+        </p:nvSpPr>
+        <p:spPr>
+          <a:xfrm>
+            <a:off x="2842591" y="3044952"/>
+            <a:ext cx="3458817" cy="274320"/>
+          </a:xfrm>
+          <a:prstGeom prst="rect">
+            <a:avLst/>
+          </a:prstGeom>
+          <a:noFill/>
+          <a:ln/>
+        </p:spPr>
+        <p:txBody>
+          <a:bodyPr wrap="square" lIns="0" tIns="0" rIns="0" bIns="0" rtlCol="0" anchor="ctr"/>
+          <a:lstStyle/>
+          <a:p>
+            <a:pPr algn="ctr" indent="0" marL="0">
+              <a:buNone/>
+            </a:pPr>
+            <a:r>
+              <a:rPr lang="en-US" sz="1100" b="1" dirty="0">
+                <a:solidFill>
+                  <a:srgbClr val="FFFFFF"/>
+                </a:solidFill>
+                <a:latin typeface="Calibri" pitchFamily="34" charset="0"/>
+                <a:ea typeface="Calibri" pitchFamily="34" charset="-122"/>
+                <a:cs typeface="Calibri" pitchFamily="34" charset="-120"/>
+              </a:rPr>
+              <a:t>Qualified</a:t>
+            </a:r>
+            <a:pPr algn="ctr" indent="0" marL="0">
+              <a:buNone/>
+            </a:pPr>
+            <a:r>
+              <a:rPr lang="en-US" sz="1100" dirty="0">
+                <a:solidFill>
+                  <a:srgbClr val="FFFFFF"/>
+                </a:solidFill>
+                <a:latin typeface="Calibri" pitchFamily="34" charset="0"/>
+                <a:ea typeface="Calibri" pitchFamily="34" charset="-122"/>
+                <a:cs typeface="Calibri" pitchFamily="34" charset="-120"/>
+              </a:rPr>
+              <a:t>  ·  300</a:t>
+            </a:r>
+            <a:endParaRPr lang="en-US" sz="1100" dirty="0"/>
+          </a:p>
+        </p:txBody>
+      </p:sp>
+      <p:sp>
+        <p:nvSpPr>
+          <p:cNvPr id="9" name="Shape 7"/>
+          <p:cNvSpPr/>
+          <p:nvPr/>
+        </p:nvSpPr>
+        <p:spPr>
+          <a:xfrm flipV="1">
+            <a:off x="3602935" y="3602736"/>
+            <a:ext cx="1938130" cy="749808"/>
+          </a:xfrm>
+          <a:prstGeom prst="trapezoid">
+            <a:avLst/>
+          </a:prstGeom>
+          <a:solidFill>
+            <a:srgbClr val="2D5F7C">
+              <a:alpha val="66000"/>
+            </a:srgbClr>
+          </a:solidFill>
+          <a:ln w="6350">
+            <a:solidFill>
+              <a:srgbClr val="2D5F7C"/>
+            </a:solidFill>
+            <a:prstDash val="solid"/>
+          </a:ln>
+        </p:spPr>
+      </p:sp>
+      <p:sp>
+        <p:nvSpPr>
+          <p:cNvPr id="10" name="Text 8"/>
+          <p:cNvSpPr/>
+          <p:nvPr/>
+        </p:nvSpPr>
+        <p:spPr>
+          <a:xfrm>
+            <a:off x="3602935" y="3840480"/>
+            <a:ext cx="1938130" cy="274320"/>
+          </a:xfrm>
+          <a:prstGeom prst="rect">
+            <a:avLst/>
+          </a:prstGeom>
+          <a:noFill/>
+          <a:ln/>
+        </p:spPr>
+        <p:txBody>
+          <a:bodyPr wrap="square" lIns="0" tIns="0" rIns="0" bIns="0" rtlCol="0" anchor="ctr"/>
+          <a:lstStyle/>
+          <a:p>
+            <a:pPr algn="ctr" indent="0" marL="0">
+              <a:buNone/>
+            </a:pPr>
+            <a:r>
+              <a:rPr lang="en-US" sz="1100" b="1" dirty="0">
+                <a:solidFill>
+                  <a:srgbClr val="FFFFFF"/>
+                </a:solidFill>
+                <a:latin typeface="Calibri" pitchFamily="34" charset="0"/>
+                <a:ea typeface="Calibri" pitchFamily="34" charset="-122"/>
+                <a:cs typeface="Calibri" pitchFamily="34" charset="-120"/>
+              </a:rPr>
+              <a:t>Scoped / demo</a:t>
+            </a:r>
+            <a:pPr algn="ctr" indent="0" marL="0">
+              <a:buNone/>
+            </a:pPr>
+            <a:r>
+              <a:rPr lang="en-US" sz="1100" dirty="0">
+                <a:solidFill>
+                  <a:srgbClr val="FFFFFF"/>
+                </a:solidFill>
+                <a:latin typeface="Calibri" pitchFamily="34" charset="0"/>
+                <a:ea typeface="Calibri" pitchFamily="34" charset="-122"/>
+                <a:cs typeface="Calibri" pitchFamily="34" charset="-120"/>
+              </a:rPr>
+              <a:t>  ·  150</a:t>
+            </a:r>
+            <a:endParaRPr lang="en-US" sz="1100" dirty="0"/>
+          </a:p>
+        </p:txBody>
+      </p:sp>
+      <p:sp>
+        <p:nvSpPr>
+          <p:cNvPr id="11" name="Shape 9"/>
+          <p:cNvSpPr/>
+          <p:nvPr/>
+        </p:nvSpPr>
+        <p:spPr>
+          <a:xfrm flipV="1">
+            <a:off x="3932417" y="4398264"/>
+            <a:ext cx="1279166" cy="749808"/>
+          </a:xfrm>
+          <a:prstGeom prst="trapezoid">
+            <a:avLst/>
+          </a:prstGeom>
+          <a:solidFill>
+            <a:srgbClr val="2D5F7C">
+              <a:alpha val="58000"/>
+            </a:srgbClr>
+          </a:solidFill>
+          <a:ln w="6350">
+            <a:solidFill>
+              <a:srgbClr val="2D5F7C"/>
+            </a:solidFill>
+            <a:prstDash val="solid"/>
+          </a:ln>
+        </p:spPr>
+      </p:sp>
+      <p:sp>
+        <p:nvSpPr>
+          <p:cNvPr id="12" name="Text 10"/>
+          <p:cNvSpPr/>
+          <p:nvPr/>
+        </p:nvSpPr>
+        <p:spPr>
+          <a:xfrm>
+            <a:off x="3932417" y="4636008"/>
+            <a:ext cx="1279166" cy="274320"/>
+          </a:xfrm>
+          <a:prstGeom prst="rect">
+            <a:avLst/>
+          </a:prstGeom>
+          <a:noFill/>
+          <a:ln/>
+        </p:spPr>
+        <p:txBody>
+          <a:bodyPr wrap="square" lIns="0" tIns="0" rIns="0" bIns="0" rtlCol="0" anchor="ctr"/>
+          <a:lstStyle/>
+          <a:p>
+            <a:pPr algn="ctr" indent="0" marL="0">
+              <a:buNone/>
+            </a:pPr>
+            <a:r>
+              <a:rPr lang="en-US" sz="1100" b="1" dirty="0">
+                <a:solidFill>
+                  <a:srgbClr val="FFFFFF"/>
+                </a:solidFill>
+                <a:latin typeface="Calibri" pitchFamily="34" charset="0"/>
+                <a:ea typeface="Calibri" pitchFamily="34" charset="-122"/>
+                <a:cs typeface="Calibri" pitchFamily="34" charset="-120"/>
+              </a:rPr>
+              <a:t>Proposal sent</a:t>
+            </a:r>
+            <a:pPr algn="ctr" indent="0" marL="0">
+              <a:buNone/>
+            </a:pPr>
+            <a:r>
+              <a:rPr lang="en-US" sz="1100" dirty="0">
+                <a:solidFill>
+                  <a:srgbClr val="FFFFFF"/>
+                </a:solidFill>
+                <a:latin typeface="Calibri" pitchFamily="34" charset="0"/>
+                <a:ea typeface="Calibri" pitchFamily="34" charset="-122"/>
+                <a:cs typeface="Calibri" pitchFamily="34" charset="-120"/>
+              </a:rPr>
+              <a:t>  ·  85</a:t>
+            </a:r>
+            <a:endParaRPr lang="en-US" sz="1100" dirty="0"/>
+          </a:p>
+        </p:txBody>
+      </p:sp>
+      <p:sp>
+        <p:nvSpPr>
+          <p:cNvPr id="13" name="Shape 11"/>
+          <p:cNvSpPr/>
+          <p:nvPr/>
+        </p:nvSpPr>
+        <p:spPr>
+          <a:xfrm flipV="1">
+            <a:off x="4160520" y="5193792"/>
+            <a:ext cx="822960" cy="749808"/>
+          </a:xfrm>
+          <a:prstGeom prst="trapezoid">
+            <a:avLst/>
+          </a:prstGeom>
+          <a:solidFill>
+            <a:srgbClr val="2D5F7C">
+              <a:alpha val="50000"/>
+            </a:srgbClr>
+          </a:solidFill>
+          <a:ln w="6350">
+            <a:solidFill>
+              <a:srgbClr val="2D5F7C"/>
+            </a:solidFill>
+            <a:prstDash val="solid"/>
+          </a:ln>
+        </p:spPr>
+      </p:sp>
+      <p:sp>
+        <p:nvSpPr>
+          <p:cNvPr id="14" name="Text 12"/>
+          <p:cNvSpPr/>
+          <p:nvPr/>
+        </p:nvSpPr>
+        <p:spPr>
+          <a:xfrm>
+            <a:off x="4160520" y="5431536"/>
+            <a:ext cx="822960" cy="274320"/>
+          </a:xfrm>
+          <a:prstGeom prst="rect">
+            <a:avLst/>
+          </a:prstGeom>
+          <a:noFill/>
+          <a:ln/>
+        </p:spPr>
+        <p:txBody>
+          <a:bodyPr wrap="square" lIns="0" tIns="0" rIns="0" bIns="0" rtlCol="0" anchor="ctr"/>
+          <a:lstStyle/>
+          <a:p>
+            <a:pPr algn="ctr" indent="0" marL="0">
+              <a:buNone/>
+            </a:pPr>
+            <a:r>
+              <a:rPr lang="en-US" sz="1100" b="1" dirty="0">
+                <a:solidFill>
+                  <a:srgbClr val="FFFFFF"/>
+                </a:solidFill>
+                <a:latin typeface="Calibri" pitchFamily="34" charset="0"/>
+                <a:ea typeface="Calibri" pitchFamily="34" charset="-122"/>
+                <a:cs typeface="Calibri" pitchFamily="34" charset="-120"/>
+              </a:rPr>
+              <a:t>Closed-won</a:t>
+            </a:r>
+            <a:pPr algn="ctr" indent="0" marL="0">
+              <a:buNone/>
+            </a:pPr>
+            <a:r>
+              <a:rPr lang="en-US" sz="1100" dirty="0">
+                <a:solidFill>
+                  <a:srgbClr val="FFFFFF"/>
+                </a:solidFill>
+                <a:latin typeface="Calibri" pitchFamily="34" charset="0"/>
+                <a:ea typeface="Calibri" pitchFamily="34" charset="-122"/>
+                <a:cs typeface="Calibri" pitchFamily="34" charset="-120"/>
+              </a:rPr>
+              <a:t>  ·  40</a:t>
+            </a:r>
+            <a:endParaRPr lang="en-US" sz="1100" dirty="0"/>
+          </a:p>
+        </p:txBody>
+      </p:sp>
+      <p:sp>
+        <p:nvSpPr>
+          <p:cNvPr id="15" name="Text 13"/>
+          <p:cNvSpPr/>
+          <p:nvPr/>
+        </p:nvSpPr>
+        <p:spPr>
+          <a:xfrm>
+            <a:off x="8229600" y="2103120"/>
+            <a:ext cx="3200400" cy="256032"/>
+          </a:xfrm>
+          <a:prstGeom prst="rect">
+            <a:avLst/>
+          </a:prstGeom>
+          <a:noFill/>
+          <a:ln/>
+        </p:spPr>
+        <p:txBody>
+          <a:bodyPr wrap="square" lIns="0" tIns="0" rIns="0" bIns="0" rtlCol="0" anchor="t"/>
+          <a:lstStyle/>
+          <a:p>
+            <a:pPr indent="0" marL="0">
+              <a:buNone/>
+            </a:pPr>
+            <a:r>
+              <a:rPr lang="en-US" sz="1000" b="1" spc="200" kern="0" dirty="0">
+                <a:solidFill>
+                  <a:srgbClr val="8A7968"/>
+                </a:solidFill>
+                <a:latin typeface="Calibri" pitchFamily="34" charset="0"/>
+                <a:ea typeface="Calibri" pitchFamily="34" charset="-122"/>
+                <a:cs typeface="Calibri" pitchFamily="34" charset="-120"/>
+              </a:rPr>
+              <a:t>STAGE CONVERSION</a:t>
+            </a:r>
+            <a:endParaRPr lang="en-US" sz="1000" dirty="0"/>
+          </a:p>
+        </p:txBody>
+      </p:sp>
+      <p:sp>
+        <p:nvSpPr>
+          <p:cNvPr id="16" name="Shape 14"/>
+          <p:cNvSpPr/>
+          <p:nvPr/>
+        </p:nvSpPr>
+        <p:spPr>
+          <a:xfrm>
+            <a:off x="8229600" y="2377440"/>
+            <a:ext cx="1371600" cy="0"/>
+          </a:xfrm>
+          <a:prstGeom prst="line">
+            <a:avLst/>
+          </a:prstGeom>
+          <a:noFill/>
+          <a:ln w="19050">
+            <a:solidFill>
+              <a:srgbClr val="353745"/>
+            </a:solidFill>
+            <a:prstDash val="solid"/>
+          </a:ln>
+        </p:spPr>
+      </p:sp>
+      <p:sp>
+        <p:nvSpPr>
+          <p:cNvPr id="17" name="Text 15"/>
+          <p:cNvSpPr/>
+          <p:nvPr/>
+        </p:nvSpPr>
+        <p:spPr>
+          <a:xfrm>
+            <a:off x="8229600" y="2606040"/>
+            <a:ext cx="3200400" cy="219456"/>
+          </a:xfrm>
+          <a:prstGeom prst="rect">
+            <a:avLst/>
+          </a:prstGeom>
+          <a:noFill/>
+          <a:ln/>
+        </p:spPr>
+        <p:txBody>
+          <a:bodyPr wrap="square" lIns="0" tIns="0" rIns="0" bIns="0" rtlCol="0" anchor="t"/>
+          <a:lstStyle/>
+          <a:p>
+            <a:pPr indent="0" marL="0">
+              <a:buNone/>
+            </a:pPr>
+            <a:r>
+              <a:rPr lang="en-US" sz="900" spc="50" kern="0" dirty="0">
+                <a:solidFill>
+                  <a:srgbClr val="8A7968"/>
+                </a:solidFill>
+                <a:latin typeface="Calibri" pitchFamily="34" charset="0"/>
+                <a:ea typeface="Calibri" pitchFamily="34" charset="-122"/>
+                <a:cs typeface="Calibri" pitchFamily="34" charset="-120"/>
+              </a:rPr>
+              <a:t>Inbound leads → Qualified</a:t>
+            </a:r>
+            <a:endParaRPr lang="en-US" sz="900" dirty="0"/>
+          </a:p>
+        </p:txBody>
+      </p:sp>
+      <p:sp>
+        <p:nvSpPr>
+          <p:cNvPr id="18" name="Text 16"/>
+          <p:cNvSpPr/>
+          <p:nvPr/>
+        </p:nvSpPr>
+        <p:spPr>
+          <a:xfrm>
+            <a:off x="8229600" y="2807208"/>
+            <a:ext cx="3200400" cy="329184"/>
+          </a:xfrm>
+          <a:prstGeom prst="rect">
+            <a:avLst/>
+          </a:prstGeom>
+          <a:noFill/>
+          <a:ln/>
+        </p:spPr>
+        <p:txBody>
+          <a:bodyPr wrap="square" lIns="0" tIns="0" rIns="0" bIns="0" rtlCol="0" anchor="t"/>
+          <a:lstStyle/>
+          <a:p>
+            <a:pPr indent="0" marL="0">
+              <a:buNone/>
+            </a:pPr>
+            <a:r>
+              <a:rPr lang="en-US" sz="2000" dirty="0">
+                <a:solidFill>
+                  <a:srgbClr val="353745"/>
+                </a:solidFill>
+                <a:latin typeface="Georgia" pitchFamily="34" charset="0"/>
+                <a:ea typeface="Georgia" pitchFamily="34" charset="-122"/>
+                <a:cs typeface="Georgia" pitchFamily="34" charset="-120"/>
+              </a:rPr>
+              <a:t>60%</a:t>
+            </a:r>
+            <a:endParaRPr lang="en-US" sz="2000" dirty="0"/>
+          </a:p>
+        </p:txBody>
+      </p:sp>
+      <p:sp>
+        <p:nvSpPr>
+          <p:cNvPr id="19" name="Text 17"/>
+          <p:cNvSpPr/>
+          <p:nvPr/>
+        </p:nvSpPr>
+        <p:spPr>
+          <a:xfrm>
+            <a:off x="8229600" y="3264408"/>
+            <a:ext cx="3200400" cy="219456"/>
+          </a:xfrm>
+          <a:prstGeom prst="rect">
+            <a:avLst/>
+          </a:prstGeom>
+          <a:noFill/>
+          <a:ln/>
+        </p:spPr>
+        <p:txBody>
+          <a:bodyPr wrap="square" lIns="0" tIns="0" rIns="0" bIns="0" rtlCol="0" anchor="t"/>
+          <a:lstStyle/>
+          <a:p>
+            <a:pPr indent="0" marL="0">
+              <a:buNone/>
+            </a:pPr>
+            <a:r>
+              <a:rPr lang="en-US" sz="900" spc="50" kern="0" dirty="0">
+                <a:solidFill>
+                  <a:srgbClr val="8A7968"/>
+                </a:solidFill>
+                <a:latin typeface="Calibri" pitchFamily="34" charset="0"/>
+                <a:ea typeface="Calibri" pitchFamily="34" charset="-122"/>
+                <a:cs typeface="Calibri" pitchFamily="34" charset="-120"/>
+              </a:rPr>
+              <a:t>Qualified → Scoped / demo</a:t>
+            </a:r>
+            <a:endParaRPr lang="en-US" sz="900" dirty="0"/>
+          </a:p>
+        </p:txBody>
+      </p:sp>
+      <p:sp>
+        <p:nvSpPr>
+          <p:cNvPr id="20" name="Text 18"/>
+          <p:cNvSpPr/>
+          <p:nvPr/>
+        </p:nvSpPr>
+        <p:spPr>
+          <a:xfrm>
+            <a:off x="8229600" y="3465576"/>
+            <a:ext cx="3200400" cy="329184"/>
+          </a:xfrm>
+          <a:prstGeom prst="rect">
+            <a:avLst/>
+          </a:prstGeom>
+          <a:noFill/>
+          <a:ln/>
+        </p:spPr>
+        <p:txBody>
+          <a:bodyPr wrap="square" lIns="0" tIns="0" rIns="0" bIns="0" rtlCol="0" anchor="t"/>
+          <a:lstStyle/>
+          <a:p>
+            <a:pPr indent="0" marL="0">
+              <a:buNone/>
+            </a:pPr>
+            <a:r>
+              <a:rPr lang="en-US" sz="2000" dirty="0">
+                <a:solidFill>
+                  <a:srgbClr val="353745"/>
+                </a:solidFill>
+                <a:latin typeface="Georgia" pitchFamily="34" charset="0"/>
+                <a:ea typeface="Georgia" pitchFamily="34" charset="-122"/>
+                <a:cs typeface="Georgia" pitchFamily="34" charset="-120"/>
+              </a:rPr>
+              <a:t>50%</a:t>
+            </a:r>
+            <a:endParaRPr lang="en-US" sz="2000" dirty="0"/>
+          </a:p>
+        </p:txBody>
+      </p:sp>
+      <p:sp>
+        <p:nvSpPr>
+          <p:cNvPr id="21" name="Text 19"/>
+          <p:cNvSpPr/>
+          <p:nvPr/>
+        </p:nvSpPr>
+        <p:spPr>
+          <a:xfrm>
+            <a:off x="8229600" y="3922776"/>
+            <a:ext cx="3200400" cy="219456"/>
+          </a:xfrm>
+          <a:prstGeom prst="rect">
+            <a:avLst/>
+          </a:prstGeom>
+          <a:noFill/>
+          <a:ln/>
+        </p:spPr>
+        <p:txBody>
+          <a:bodyPr wrap="square" lIns="0" tIns="0" rIns="0" bIns="0" rtlCol="0" anchor="t"/>
+          <a:lstStyle/>
+          <a:p>
+            <a:pPr indent="0" marL="0">
+              <a:buNone/>
+            </a:pPr>
+            <a:r>
+              <a:rPr lang="en-US" sz="900" spc="50" kern="0" dirty="0">
+                <a:solidFill>
+                  <a:srgbClr val="8A7968"/>
+                </a:solidFill>
+                <a:latin typeface="Calibri" pitchFamily="34" charset="0"/>
+                <a:ea typeface="Calibri" pitchFamily="34" charset="-122"/>
+                <a:cs typeface="Calibri" pitchFamily="34" charset="-120"/>
+              </a:rPr>
+              <a:t>Scoped / demo → Proposal sent</a:t>
+            </a:r>
+            <a:endParaRPr lang="en-US" sz="900" dirty="0"/>
+          </a:p>
+        </p:txBody>
+      </p:sp>
+      <p:sp>
+        <p:nvSpPr>
+          <p:cNvPr id="22" name="Text 20"/>
+          <p:cNvSpPr/>
+          <p:nvPr/>
+        </p:nvSpPr>
+        <p:spPr>
+          <a:xfrm>
+            <a:off x="8229600" y="4123944"/>
+            <a:ext cx="3200400" cy="329184"/>
+          </a:xfrm>
+          <a:prstGeom prst="rect">
+            <a:avLst/>
+          </a:prstGeom>
+          <a:noFill/>
+          <a:ln/>
+        </p:spPr>
+        <p:txBody>
+          <a:bodyPr wrap="square" lIns="0" tIns="0" rIns="0" bIns="0" rtlCol="0" anchor="t"/>
+          <a:lstStyle/>
+          <a:p>
+            <a:pPr indent="0" marL="0">
+              <a:buNone/>
+            </a:pPr>
+            <a:r>
+              <a:rPr lang="en-US" sz="2000" dirty="0">
+                <a:solidFill>
+                  <a:srgbClr val="353745"/>
+                </a:solidFill>
+                <a:latin typeface="Georgia" pitchFamily="34" charset="0"/>
+                <a:ea typeface="Georgia" pitchFamily="34" charset="-122"/>
+                <a:cs typeface="Georgia" pitchFamily="34" charset="-120"/>
+              </a:rPr>
+              <a:t>57%</a:t>
+            </a:r>
+            <a:endParaRPr lang="en-US" sz="2000" dirty="0"/>
+          </a:p>
+        </p:txBody>
+      </p:sp>
+      <p:sp>
+        <p:nvSpPr>
+          <p:cNvPr id="23" name="Text 21"/>
+          <p:cNvSpPr/>
+          <p:nvPr/>
+        </p:nvSpPr>
+        <p:spPr>
+          <a:xfrm>
+            <a:off x="8229600" y="4581144"/>
+            <a:ext cx="3200400" cy="219456"/>
+          </a:xfrm>
+          <a:prstGeom prst="rect">
+            <a:avLst/>
+          </a:prstGeom>
+          <a:noFill/>
+          <a:ln/>
+        </p:spPr>
+        <p:txBody>
+          <a:bodyPr wrap="square" lIns="0" tIns="0" rIns="0" bIns="0" rtlCol="0" anchor="t"/>
+          <a:lstStyle/>
+          <a:p>
+            <a:pPr indent="0" marL="0">
+              <a:buNone/>
+            </a:pPr>
+            <a:r>
+              <a:rPr lang="en-US" sz="900" spc="50" kern="0" dirty="0">
+                <a:solidFill>
+                  <a:srgbClr val="8A7968"/>
+                </a:solidFill>
+                <a:latin typeface="Calibri" pitchFamily="34" charset="0"/>
+                <a:ea typeface="Calibri" pitchFamily="34" charset="-122"/>
+                <a:cs typeface="Calibri" pitchFamily="34" charset="-120"/>
+              </a:rPr>
+              <a:t>Proposal sent → Closed-won</a:t>
+            </a:r>
+            <a:endParaRPr lang="en-US" sz="900" dirty="0"/>
+          </a:p>
+        </p:txBody>
+      </p:sp>
+      <p:sp>
+        <p:nvSpPr>
+          <p:cNvPr id="24" name="Text 22"/>
+          <p:cNvSpPr/>
+          <p:nvPr/>
+        </p:nvSpPr>
+        <p:spPr>
+          <a:xfrm>
+            <a:off x="8229600" y="4782312"/>
+            <a:ext cx="3200400" cy="329184"/>
+          </a:xfrm>
+          <a:prstGeom prst="rect">
+            <a:avLst/>
+          </a:prstGeom>
+          <a:noFill/>
+          <a:ln/>
+        </p:spPr>
+        <p:txBody>
+          <a:bodyPr wrap="square" lIns="0" tIns="0" rIns="0" bIns="0" rtlCol="0" anchor="t"/>
+          <a:lstStyle/>
+          <a:p>
+            <a:pPr indent="0" marL="0">
+              <a:buNone/>
+            </a:pPr>
+            <a:r>
+              <a:rPr lang="en-US" sz="2000" dirty="0">
+                <a:solidFill>
+                  <a:srgbClr val="353745"/>
+                </a:solidFill>
+                <a:latin typeface="Georgia" pitchFamily="34" charset="0"/>
+                <a:ea typeface="Georgia" pitchFamily="34" charset="-122"/>
+                <a:cs typeface="Georgia" pitchFamily="34" charset="-120"/>
+              </a:rPr>
+              <a:t>47%</a:t>
+            </a:r>
+            <a:endParaRPr lang="en-US" sz="2000" dirty="0"/>
+          </a:p>
+        </p:txBody>
+      </p:sp>
+      <p:sp>
+        <p:nvSpPr>
+          <p:cNvPr id="25" name="Shape 23"/>
+          <p:cNvSpPr/>
+          <p:nvPr/>
+        </p:nvSpPr>
+        <p:spPr>
+          <a:xfrm>
+            <a:off x="8229600" y="5285232"/>
+            <a:ext cx="3200400" cy="0"/>
+          </a:xfrm>
+          <a:prstGeom prst="line">
+            <a:avLst/>
+          </a:prstGeom>
+          <a:noFill/>
+          <a:ln w="6350">
+            <a:solidFill>
+              <a:srgbClr val="C9B9A8"/>
+            </a:solidFill>
+            <a:prstDash val="solid"/>
+          </a:ln>
+        </p:spPr>
+      </p:sp>
+      <p:sp>
+        <p:nvSpPr>
+          <p:cNvPr id="26" name="Text 24"/>
+          <p:cNvSpPr/>
+          <p:nvPr/>
+        </p:nvSpPr>
+        <p:spPr>
+          <a:xfrm>
+            <a:off x="8229600" y="5376672"/>
+            <a:ext cx="3200400" cy="219456"/>
+          </a:xfrm>
+          <a:prstGeom prst="rect">
+            <a:avLst/>
+          </a:prstGeom>
+          <a:noFill/>
+          <a:ln/>
+        </p:spPr>
+        <p:txBody>
+          <a:bodyPr wrap="square" lIns="0" tIns="0" rIns="0" bIns="0" rtlCol="0" anchor="t"/>
+          <a:lstStyle/>
+          <a:p>
+            <a:pPr indent="0" marL="0">
+              <a:buNone/>
+            </a:pPr>
+            <a:r>
+              <a:rPr lang="en-US" sz="900" b="1" spc="150" kern="0" dirty="0">
+                <a:solidFill>
+                  <a:srgbClr val="8A7968"/>
+                </a:solidFill>
+                <a:latin typeface="Calibri" pitchFamily="34" charset="0"/>
+                <a:ea typeface="Calibri" pitchFamily="34" charset="-122"/>
+                <a:cs typeface="Calibri" pitchFamily="34" charset="-120"/>
+              </a:rPr>
+              <a:t>LEAD-TO-WIN</a:t>
+            </a:r>
+            <a:endParaRPr lang="en-US" sz="900" dirty="0"/>
+          </a:p>
+        </p:txBody>
+      </p:sp>
+      <p:sp>
+        <p:nvSpPr>
+          <p:cNvPr id="27" name="Text 25"/>
+          <p:cNvSpPr/>
+          <p:nvPr/>
+        </p:nvSpPr>
+        <p:spPr>
+          <a:xfrm>
+            <a:off x="8229600" y="5605272"/>
+            <a:ext cx="3200400" cy="502920"/>
+          </a:xfrm>
+          <a:prstGeom prst="rect">
+            <a:avLst/>
+          </a:prstGeom>
+          <a:noFill/>
+          <a:ln/>
+        </p:spPr>
+        <p:txBody>
+          <a:bodyPr wrap="square" lIns="0" tIns="0" rIns="0" bIns="0" rtlCol="0" anchor="t"/>
+          <a:lstStyle/>
+          <a:p>
+            <a:pPr indent="0" marL="0">
+              <a:buNone/>
+            </a:pPr>
+            <a:r>
+              <a:rPr lang="en-US" sz="3200" dirty="0">
+                <a:solidFill>
+                  <a:srgbClr val="353745"/>
+                </a:solidFill>
+                <a:highlight>
+                  <a:srgbClr val="C1FF72"/>
+                </a:highlight>
+                <a:latin typeface="Georgia" pitchFamily="34" charset="0"/>
+                <a:ea typeface="Georgia" pitchFamily="34" charset="-122"/>
+                <a:cs typeface="Georgia" pitchFamily="34" charset="-120"/>
+              </a:rPr>
+              <a:t>8.0%</a:t>
+            </a:r>
+            <a:endParaRPr lang="en-US" sz="3200" dirty="0"/>
+          </a:p>
+        </p:txBody>
+      </p:sp>
+    </p:spTree>
+  </p:cSld>
+  <p:clrMapOvr>
+    <a:masterClrMapping/>
+  </p:clrMapOvr>
+</p:sld>
+</file>
+
+<file path=ppt/slides/slide16.xml><?xml version="1.0" encoding="utf-8"?>
+<p:sld xmlns:a="http://schemas.openxmlformats.org/drawingml/2006/main" xmlns:r="http://schemas.openxmlformats.org/officeDocument/2006/relationships" xmlns:p="http://schemas.openxmlformats.org/presentationml/2006/main">
+  <p:cSld name="Slide 16">
+    <p:bg>
+      <p:bgPr>
+        <a:solidFill>
+          <a:srgbClr val="FFF5ED"/>
+        </a:solidFill>
+      </p:bgPr>
+    </p:bg>
+    <p:spTree>
+      <p:nvGrpSpPr>
+        <p:cNvPr id="1" name=""/>
+        <p:cNvGrpSpPr/>
+        <p:nvPr/>
+      </p:nvGrpSpPr>
+      <p:grpSpPr>
+        <a:xfrm>
+          <a:off x="0" y="0"/>
+          <a:ext cx="0" cy="0"/>
+          <a:chOff x="0" y="0"/>
+          <a:chExt cx="0" cy="0"/>
+        </a:xfrm>
+      </p:grpSpPr>
+      <p:sp>
+        <p:nvSpPr>
+          <p:cNvPr id="2" name="Text 0"/>
+          <p:cNvSpPr/>
+          <p:nvPr/>
+        </p:nvSpPr>
+        <p:spPr>
+          <a:xfrm>
+            <a:off x="548640" y="457200"/>
+            <a:ext cx="7315200" cy="256032"/>
+          </a:xfrm>
+          <a:prstGeom prst="rect">
+            <a:avLst/>
+          </a:prstGeom>
+          <a:noFill/>
+          <a:ln/>
+        </p:spPr>
+        <p:txBody>
+          <a:bodyPr wrap="square" lIns="0" tIns="0" rIns="0" bIns="0" rtlCol="0" anchor="t"/>
+          <a:lstStyle/>
+          <a:p>
+            <a:pPr indent="0" marL="0">
+              <a:buNone/>
+            </a:pPr>
+            <a:r>
+              <a:rPr lang="en-US" sz="1000" b="1" spc="200" kern="0" dirty="0">
+                <a:solidFill>
+                  <a:srgbClr val="8A7968"/>
+                </a:solidFill>
+                <a:latin typeface="Calibri" pitchFamily="34" charset="0"/>
+                <a:ea typeface="Calibri" pitchFamily="34" charset="-122"/>
+                <a:cs typeface="Calibri" pitchFamily="34" charset="-120"/>
+              </a:rPr>
+              <a:t>FUNNEL CHART  ·  STRESS-TEST (TWO-ERA COMPARISON)</a:t>
+            </a:r>
+            <a:endParaRPr lang="en-US" sz="1000" dirty="0"/>
+          </a:p>
+        </p:txBody>
+      </p:sp>
+      <p:sp>
+        <p:nvSpPr>
+          <p:cNvPr id="3" name="Text 1"/>
+          <p:cNvSpPr/>
+          <p:nvPr/>
+        </p:nvSpPr>
+        <p:spPr>
+          <a:xfrm>
+            <a:off x="548640" y="749808"/>
+            <a:ext cx="11091672" cy="640080"/>
+          </a:xfrm>
+          <a:prstGeom prst="rect">
+            <a:avLst/>
+          </a:prstGeom>
+          <a:noFill/>
+          <a:ln/>
+        </p:spPr>
+        <p:txBody>
+          <a:bodyPr wrap="square" lIns="0" tIns="0" rIns="0" bIns="0" rtlCol="0" anchor="t"/>
+          <a:lstStyle/>
+          <a:p>
+            <a:pPr indent="0" marL="0">
+              <a:buNone/>
+            </a:pPr>
+            <a:r>
+              <a:rPr lang="en-US" sz="3000" dirty="0">
+                <a:solidFill>
+                  <a:srgbClr val="353745"/>
+                </a:solidFill>
+                <a:latin typeface="Georgia" pitchFamily="34" charset="0"/>
+                <a:ea typeface="Georgia" pitchFamily="34" charset="-122"/>
+                <a:cs typeface="Georgia" pitchFamily="34" charset="-120"/>
+              </a:rPr>
+              <a:t>2025 pipeline vs 2035 pipeline.</a:t>
+            </a:r>
+            <a:endParaRPr lang="en-US" sz="3000" dirty="0"/>
+          </a:p>
+        </p:txBody>
+      </p:sp>
+      <p:sp>
+        <p:nvSpPr>
+          <p:cNvPr id="4" name="Text 2"/>
+          <p:cNvSpPr/>
+          <p:nvPr/>
+        </p:nvSpPr>
+        <p:spPr>
+          <a:xfrm>
+            <a:off x="548640" y="1325880"/>
+            <a:ext cx="11091672" cy="292608"/>
+          </a:xfrm>
+          <a:prstGeom prst="rect">
+            <a:avLst/>
+          </a:prstGeom>
+          <a:noFill/>
+          <a:ln/>
+        </p:spPr>
+        <p:txBody>
+          <a:bodyPr wrap="square" lIns="0" tIns="0" rIns="0" bIns="0" rtlCol="0" anchor="t"/>
+          <a:lstStyle/>
+          <a:p>
+            <a:pPr indent="0" marL="0">
+              <a:buNone/>
+            </a:pPr>
+            <a:r>
+              <a:rPr lang="en-US" sz="1300" i="1" dirty="0">
+                <a:solidFill>
+                  <a:srgbClr val="353745"/>
+                </a:solidFill>
+                <a:latin typeface="Georgia" pitchFamily="34" charset="0"/>
+                <a:ea typeface="Georgia" pitchFamily="34" charset="-122"/>
+                <a:cs typeface="Georgia" pitchFamily="34" charset="-120"/>
+              </a:rPr>
+              <a:t>Two funnels, same stages, ten years apart. Shape-based placement lets them share an x-axis logic and per-stage color coding — native would hit a wall here even if it existed.</a:t>
+            </a:r>
+            <a:endParaRPr lang="en-US" sz="1300" dirty="0"/>
+          </a:p>
+        </p:txBody>
+      </p:sp>
+      <p:sp>
+        <p:nvSpPr>
+          <p:cNvPr id="5" name="Shape 3"/>
+          <p:cNvSpPr/>
+          <p:nvPr/>
+        </p:nvSpPr>
+        <p:spPr>
+          <a:xfrm flipV="1">
+            <a:off x="914400" y="2194560"/>
+            <a:ext cx="4114800" cy="676656"/>
+          </a:xfrm>
+          <a:prstGeom prst="trapezoid">
+            <a:avLst/>
+          </a:prstGeom>
+          <a:solidFill>
+            <a:srgbClr val="B84C65">
+              <a:alpha val="82000"/>
+            </a:srgbClr>
+          </a:solidFill>
+          <a:ln w="6350">
+            <a:solidFill>
+              <a:srgbClr val="B84C65"/>
+            </a:solidFill>
+            <a:prstDash val="solid"/>
+          </a:ln>
+        </p:spPr>
+      </p:sp>
+      <p:sp>
+        <p:nvSpPr>
+          <p:cNvPr id="6" name="Text 4"/>
+          <p:cNvSpPr/>
+          <p:nvPr/>
+        </p:nvSpPr>
+        <p:spPr>
+          <a:xfrm>
+            <a:off x="914400" y="2395728"/>
+            <a:ext cx="4114800" cy="274320"/>
+          </a:xfrm>
+          <a:prstGeom prst="rect">
+            <a:avLst/>
+          </a:prstGeom>
+          <a:noFill/>
+          <a:ln/>
+        </p:spPr>
+        <p:txBody>
+          <a:bodyPr wrap="square" lIns="0" tIns="0" rIns="0" bIns="0" rtlCol="0" anchor="ctr"/>
+          <a:lstStyle/>
+          <a:p>
+            <a:pPr algn="ctr" indent="0" marL="0">
+              <a:buNone/>
+            </a:pPr>
+            <a:r>
+              <a:rPr lang="en-US" sz="1100" b="1" dirty="0">
+                <a:solidFill>
+                  <a:srgbClr val="FFFFFF"/>
+                </a:solidFill>
+                <a:latin typeface="Calibri" pitchFamily="34" charset="0"/>
+                <a:ea typeface="Calibri" pitchFamily="34" charset="-122"/>
+                <a:cs typeface="Calibri" pitchFamily="34" charset="-120"/>
+              </a:rPr>
+              <a:t>Leads</a:t>
+            </a:r>
+            <a:pPr algn="ctr" indent="0" marL="0">
+              <a:buNone/>
+            </a:pPr>
+            <a:r>
+              <a:rPr lang="en-US" sz="1100" dirty="0">
+                <a:solidFill>
+                  <a:srgbClr val="FFFFFF"/>
+                </a:solidFill>
+                <a:latin typeface="Calibri" pitchFamily="34" charset="0"/>
+                <a:ea typeface="Calibri" pitchFamily="34" charset="-122"/>
+                <a:cs typeface="Calibri" pitchFamily="34" charset="-120"/>
+              </a:rPr>
+              <a:t>  ·  450</a:t>
+            </a:r>
+            <a:endParaRPr lang="en-US" sz="1100" dirty="0"/>
+          </a:p>
+        </p:txBody>
+      </p:sp>
+      <p:sp>
+        <p:nvSpPr>
+          <p:cNvPr id="7" name="Shape 5"/>
+          <p:cNvSpPr/>
+          <p:nvPr/>
+        </p:nvSpPr>
+        <p:spPr>
+          <a:xfrm flipV="1">
+            <a:off x="1926832" y="2916936"/>
+            <a:ext cx="2089936" cy="676656"/>
+          </a:xfrm>
+          <a:prstGeom prst="trapezoid">
+            <a:avLst/>
+          </a:prstGeom>
+          <a:solidFill>
+            <a:srgbClr val="B84C65">
+              <a:alpha val="74000"/>
+            </a:srgbClr>
+          </a:solidFill>
+          <a:ln w="6350">
+            <a:solidFill>
+              <a:srgbClr val="B84C65"/>
+            </a:solidFill>
+            <a:prstDash val="solid"/>
+          </a:ln>
+        </p:spPr>
+      </p:sp>
+      <p:sp>
+        <p:nvSpPr>
+          <p:cNvPr id="8" name="Text 6"/>
+          <p:cNvSpPr/>
+          <p:nvPr/>
+        </p:nvSpPr>
+        <p:spPr>
+          <a:xfrm>
+            <a:off x="1926832" y="3118104"/>
+            <a:ext cx="2089936" cy="274320"/>
+          </a:xfrm>
+          <a:prstGeom prst="rect">
+            <a:avLst/>
+          </a:prstGeom>
+          <a:noFill/>
+          <a:ln/>
+        </p:spPr>
+        <p:txBody>
+          <a:bodyPr wrap="square" lIns="0" tIns="0" rIns="0" bIns="0" rtlCol="0" anchor="ctr"/>
+          <a:lstStyle/>
+          <a:p>
+            <a:pPr algn="ctr" indent="0" marL="0">
+              <a:buNone/>
+            </a:pPr>
+            <a:r>
+              <a:rPr lang="en-US" sz="1100" b="1" dirty="0">
+                <a:solidFill>
+                  <a:srgbClr val="FFFFFF"/>
+                </a:solidFill>
+                <a:latin typeface="Calibri" pitchFamily="34" charset="0"/>
+                <a:ea typeface="Calibri" pitchFamily="34" charset="-122"/>
+                <a:cs typeface="Calibri" pitchFamily="34" charset="-120"/>
+              </a:rPr>
+              <a:t>Qualified</a:t>
+            </a:r>
+            <a:pPr algn="ctr" indent="0" marL="0">
+              <a:buNone/>
+            </a:pPr>
+            <a:r>
+              <a:rPr lang="en-US" sz="1100" dirty="0">
+                <a:solidFill>
+                  <a:srgbClr val="FFFFFF"/>
+                </a:solidFill>
+                <a:latin typeface="Calibri" pitchFamily="34" charset="0"/>
+                <a:ea typeface="Calibri" pitchFamily="34" charset="-122"/>
+                <a:cs typeface="Calibri" pitchFamily="34" charset="-120"/>
+              </a:rPr>
+              <a:t>  ·  220</a:t>
+            </a:r>
+            <a:endParaRPr lang="en-US" sz="1100" dirty="0"/>
+          </a:p>
+        </p:txBody>
+      </p:sp>
+      <p:sp>
+        <p:nvSpPr>
+          <p:cNvPr id="9" name="Shape 7"/>
+          <p:cNvSpPr/>
+          <p:nvPr/>
+        </p:nvSpPr>
+        <p:spPr>
+          <a:xfrm flipV="1">
+            <a:off x="2477067" y="3639312"/>
+            <a:ext cx="989466" cy="676656"/>
+          </a:xfrm>
+          <a:prstGeom prst="trapezoid">
+            <a:avLst/>
+          </a:prstGeom>
+          <a:solidFill>
+            <a:srgbClr val="B84C65">
+              <a:alpha val="66000"/>
+            </a:srgbClr>
+          </a:solidFill>
+          <a:ln w="6350">
+            <a:solidFill>
+              <a:srgbClr val="B84C65"/>
+            </a:solidFill>
+            <a:prstDash val="solid"/>
+          </a:ln>
+        </p:spPr>
+      </p:sp>
+      <p:sp>
+        <p:nvSpPr>
+          <p:cNvPr id="10" name="Text 8"/>
+          <p:cNvSpPr/>
+          <p:nvPr/>
+        </p:nvSpPr>
+        <p:spPr>
+          <a:xfrm>
+            <a:off x="2477067" y="3840480"/>
+            <a:ext cx="989466" cy="274320"/>
+          </a:xfrm>
+          <a:prstGeom prst="rect">
+            <a:avLst/>
+          </a:prstGeom>
+          <a:noFill/>
+          <a:ln/>
+        </p:spPr>
+        <p:txBody>
+          <a:bodyPr wrap="square" lIns="0" tIns="0" rIns="0" bIns="0" rtlCol="0" anchor="ctr"/>
+          <a:lstStyle/>
+          <a:p>
+            <a:pPr algn="ctr" indent="0" marL="0">
+              <a:buNone/>
+            </a:pPr>
+            <a:r>
+              <a:rPr lang="en-US" sz="1100" b="1" dirty="0">
+                <a:solidFill>
+                  <a:srgbClr val="FFFFFF"/>
+                </a:solidFill>
+                <a:latin typeface="Calibri" pitchFamily="34" charset="0"/>
+                <a:ea typeface="Calibri" pitchFamily="34" charset="-122"/>
+                <a:cs typeface="Calibri" pitchFamily="34" charset="-120"/>
+              </a:rPr>
+              <a:t>Demo</a:t>
+            </a:r>
+            <a:pPr algn="ctr" indent="0" marL="0">
+              <a:buNone/>
+            </a:pPr>
+            <a:r>
+              <a:rPr lang="en-US" sz="1100" dirty="0">
+                <a:solidFill>
+                  <a:srgbClr val="FFFFFF"/>
+                </a:solidFill>
+                <a:latin typeface="Calibri" pitchFamily="34" charset="0"/>
+                <a:ea typeface="Calibri" pitchFamily="34" charset="-122"/>
+                <a:cs typeface="Calibri" pitchFamily="34" charset="-120"/>
+              </a:rPr>
+              <a:t>  ·  95</a:t>
+            </a:r>
+            <a:endParaRPr lang="en-US" sz="1100" dirty="0"/>
+          </a:p>
+        </p:txBody>
+      </p:sp>
+      <p:sp>
+        <p:nvSpPr>
+          <p:cNvPr id="11" name="Shape 9"/>
+          <p:cNvSpPr/>
+          <p:nvPr/>
+        </p:nvSpPr>
+        <p:spPr>
+          <a:xfrm flipV="1">
+            <a:off x="2675152" y="4361688"/>
+            <a:ext cx="593297" cy="676656"/>
+          </a:xfrm>
+          <a:prstGeom prst="trapezoid">
+            <a:avLst/>
+          </a:prstGeom>
+          <a:solidFill>
+            <a:srgbClr val="B84C65">
+              <a:alpha val="58000"/>
+            </a:srgbClr>
+          </a:solidFill>
+          <a:ln w="6350">
+            <a:solidFill>
+              <a:srgbClr val="B84C65"/>
+            </a:solidFill>
+            <a:prstDash val="solid"/>
+          </a:ln>
+        </p:spPr>
+      </p:sp>
+      <p:sp>
+        <p:nvSpPr>
+          <p:cNvPr id="12" name="Text 10"/>
+          <p:cNvSpPr/>
+          <p:nvPr/>
+        </p:nvSpPr>
+        <p:spPr>
+          <a:xfrm>
+            <a:off x="2675152" y="4562856"/>
+            <a:ext cx="593297" cy="274320"/>
+          </a:xfrm>
+          <a:prstGeom prst="rect">
+            <a:avLst/>
+          </a:prstGeom>
+          <a:noFill/>
+          <a:ln/>
+        </p:spPr>
+        <p:txBody>
+          <a:bodyPr wrap="square" lIns="0" tIns="0" rIns="0" bIns="0" rtlCol="0" anchor="ctr"/>
+          <a:lstStyle/>
+          <a:p>
+            <a:pPr algn="ctr" indent="0" marL="0">
+              <a:buNone/>
+            </a:pPr>
+            <a:r>
+              <a:rPr lang="en-US" sz="1100" b="1" dirty="0">
+                <a:solidFill>
+                  <a:srgbClr val="FFFFFF"/>
+                </a:solidFill>
+                <a:latin typeface="Calibri" pitchFamily="34" charset="0"/>
+                <a:ea typeface="Calibri" pitchFamily="34" charset="-122"/>
+                <a:cs typeface="Calibri" pitchFamily="34" charset="-120"/>
+              </a:rPr>
+              <a:t>Proposal</a:t>
+            </a:r>
+            <a:pPr algn="ctr" indent="0" marL="0">
+              <a:buNone/>
+            </a:pPr>
+            <a:r>
+              <a:rPr lang="en-US" sz="1100" dirty="0">
+                <a:solidFill>
+                  <a:srgbClr val="FFFFFF"/>
+                </a:solidFill>
+                <a:latin typeface="Calibri" pitchFamily="34" charset="0"/>
+                <a:ea typeface="Calibri" pitchFamily="34" charset="-122"/>
+                <a:cs typeface="Calibri" pitchFamily="34" charset="-120"/>
+              </a:rPr>
+              <a:t>  ·  50</a:t>
+            </a:r>
+            <a:endParaRPr lang="en-US" sz="1100" dirty="0"/>
+          </a:p>
+        </p:txBody>
+      </p:sp>
+      <p:sp>
+        <p:nvSpPr>
+          <p:cNvPr id="13" name="Shape 11"/>
+          <p:cNvSpPr/>
+          <p:nvPr/>
+        </p:nvSpPr>
+        <p:spPr>
+          <a:xfrm flipV="1">
+            <a:off x="2807208" y="5084064"/>
+            <a:ext cx="329184" cy="676656"/>
+          </a:xfrm>
+          <a:prstGeom prst="trapezoid">
+            <a:avLst/>
+          </a:prstGeom>
+          <a:solidFill>
+            <a:srgbClr val="B84C65">
+              <a:alpha val="50000"/>
+            </a:srgbClr>
+          </a:solidFill>
+          <a:ln w="6350">
+            <a:solidFill>
+              <a:srgbClr val="B84C65"/>
+            </a:solidFill>
+            <a:prstDash val="solid"/>
+          </a:ln>
+        </p:spPr>
+      </p:sp>
+      <p:sp>
+        <p:nvSpPr>
+          <p:cNvPr id="14" name="Text 12"/>
+          <p:cNvSpPr/>
+          <p:nvPr/>
+        </p:nvSpPr>
+        <p:spPr>
+          <a:xfrm>
+            <a:off x="2807208" y="5285232"/>
+            <a:ext cx="329184" cy="274320"/>
+          </a:xfrm>
+          <a:prstGeom prst="rect">
+            <a:avLst/>
+          </a:prstGeom>
+          <a:noFill/>
+          <a:ln/>
+        </p:spPr>
+        <p:txBody>
+          <a:bodyPr wrap="square" lIns="0" tIns="0" rIns="0" bIns="0" rtlCol="0" anchor="ctr"/>
+          <a:lstStyle/>
+          <a:p>
+            <a:pPr algn="ctr" indent="0" marL="0">
+              <a:buNone/>
+            </a:pPr>
+            <a:r>
+              <a:rPr lang="en-US" sz="1100" b="1" dirty="0">
+                <a:solidFill>
+                  <a:srgbClr val="FFFFFF"/>
+                </a:solidFill>
+                <a:latin typeface="Calibri" pitchFamily="34" charset="0"/>
+                <a:ea typeface="Calibri" pitchFamily="34" charset="-122"/>
+                <a:cs typeface="Calibri" pitchFamily="34" charset="-120"/>
+              </a:rPr>
+              <a:t>Won</a:t>
+            </a:r>
+            <a:pPr algn="ctr" indent="0" marL="0">
+              <a:buNone/>
+            </a:pPr>
+            <a:r>
+              <a:rPr lang="en-US" sz="1100" dirty="0">
+                <a:solidFill>
+                  <a:srgbClr val="FFFFFF"/>
+                </a:solidFill>
+                <a:latin typeface="Calibri" pitchFamily="34" charset="0"/>
+                <a:ea typeface="Calibri" pitchFamily="34" charset="-122"/>
+                <a:cs typeface="Calibri" pitchFamily="34" charset="-120"/>
+              </a:rPr>
+              <a:t>  ·  20</a:t>
+            </a:r>
+            <a:endParaRPr lang="en-US" sz="1100" dirty="0"/>
+          </a:p>
+        </p:txBody>
+      </p:sp>
+      <p:sp>
+        <p:nvSpPr>
+          <p:cNvPr id="15" name="Text 13"/>
+          <p:cNvSpPr/>
+          <p:nvPr/>
+        </p:nvSpPr>
+        <p:spPr>
+          <a:xfrm>
+            <a:off x="914400" y="5806440"/>
+            <a:ext cx="4114800" cy="365760"/>
+          </a:xfrm>
+          <a:prstGeom prst="rect">
+            <a:avLst/>
+          </a:prstGeom>
+          <a:noFill/>
+          <a:ln/>
+        </p:spPr>
+        <p:txBody>
+          <a:bodyPr wrap="square" lIns="0" tIns="0" rIns="0" bIns="0" rtlCol="0" anchor="t"/>
+          <a:lstStyle/>
+          <a:p>
+            <a:pPr algn="ctr" indent="0" marL="0">
+              <a:buNone/>
+            </a:pPr>
+            <a:r>
+              <a:rPr lang="en-US" sz="2000" dirty="0">
+                <a:solidFill>
+                  <a:srgbClr val="353745"/>
+                </a:solidFill>
+                <a:latin typeface="Georgia" pitchFamily="34" charset="0"/>
+                <a:ea typeface="Georgia" pitchFamily="34" charset="-122"/>
+                <a:cs typeface="Georgia" pitchFamily="34" charset="-120"/>
+              </a:rPr>
+              <a:t>2025</a:t>
+            </a:r>
+            <a:endParaRPr lang="en-US" sz="2000" dirty="0"/>
+          </a:p>
+        </p:txBody>
+      </p:sp>
+      <p:sp>
+        <p:nvSpPr>
+          <p:cNvPr id="16" name="Text 14"/>
+          <p:cNvSpPr/>
+          <p:nvPr/>
+        </p:nvSpPr>
+        <p:spPr>
+          <a:xfrm>
+            <a:off x="914400" y="6126480"/>
+            <a:ext cx="4114800" cy="256032"/>
+          </a:xfrm>
+          <a:prstGeom prst="rect">
+            <a:avLst/>
+          </a:prstGeom>
+          <a:noFill/>
+          <a:ln/>
+        </p:spPr>
+        <p:txBody>
+          <a:bodyPr wrap="square" lIns="0" tIns="0" rIns="0" bIns="0" rtlCol="0" anchor="t"/>
+          <a:lstStyle/>
+          <a:p>
+            <a:pPr algn="ctr" indent="0" marL="0">
+              <a:buNone/>
+            </a:pPr>
+            <a:r>
+              <a:rPr lang="en-US" sz="1100" i="1" dirty="0">
+                <a:solidFill>
+                  <a:srgbClr val="8A7968"/>
+                </a:solidFill>
+                <a:latin typeface="Georgia" pitchFamily="34" charset="0"/>
+                <a:ea typeface="Georgia" pitchFamily="34" charset="-122"/>
+                <a:cs typeface="Georgia" pitchFamily="34" charset="-120"/>
+              </a:rPr>
+              <a:t>4.4% lead-to-win</a:t>
+            </a:r>
+            <a:endParaRPr lang="en-US" sz="1100" dirty="0"/>
+          </a:p>
+        </p:txBody>
+      </p:sp>
+      <p:sp>
+        <p:nvSpPr>
+          <p:cNvPr id="17" name="Shape 15"/>
+          <p:cNvSpPr/>
+          <p:nvPr/>
+        </p:nvSpPr>
+        <p:spPr>
+          <a:xfrm flipV="1">
+            <a:off x="7132320" y="2194560"/>
+            <a:ext cx="4114800" cy="676656"/>
+          </a:xfrm>
+          <a:prstGeom prst="trapezoid">
+            <a:avLst/>
+          </a:prstGeom>
+          <a:solidFill>
+            <a:srgbClr val="2D5F7C">
+              <a:alpha val="82000"/>
+            </a:srgbClr>
+          </a:solidFill>
+          <a:ln w="6350">
+            <a:solidFill>
+              <a:srgbClr val="2D5F7C"/>
+            </a:solidFill>
+            <a:prstDash val="solid"/>
+          </a:ln>
+        </p:spPr>
+      </p:sp>
+      <p:sp>
+        <p:nvSpPr>
+          <p:cNvPr id="18" name="Text 16"/>
+          <p:cNvSpPr/>
+          <p:nvPr/>
+        </p:nvSpPr>
+        <p:spPr>
+          <a:xfrm>
+            <a:off x="7132320" y="2395728"/>
+            <a:ext cx="4114800" cy="274320"/>
+          </a:xfrm>
+          <a:prstGeom prst="rect">
+            <a:avLst/>
+          </a:prstGeom>
+          <a:noFill/>
+          <a:ln/>
+        </p:spPr>
+        <p:txBody>
+          <a:bodyPr wrap="square" lIns="0" tIns="0" rIns="0" bIns="0" rtlCol="0" anchor="ctr"/>
+          <a:lstStyle/>
+          <a:p>
+            <a:pPr algn="ctr" indent="0" marL="0">
+              <a:buNone/>
+            </a:pPr>
+            <a:r>
+              <a:rPr lang="en-US" sz="1100" b="1" dirty="0">
+                <a:solidFill>
+                  <a:srgbClr val="FFFFFF"/>
+                </a:solidFill>
+                <a:latin typeface="Calibri" pitchFamily="34" charset="0"/>
+                <a:ea typeface="Calibri" pitchFamily="34" charset="-122"/>
+                <a:cs typeface="Calibri" pitchFamily="34" charset="-120"/>
+              </a:rPr>
+              <a:t>Leads</a:t>
+            </a:r>
+            <a:pPr algn="ctr" indent="0" marL="0">
+              <a:buNone/>
+            </a:pPr>
+            <a:r>
+              <a:rPr lang="en-US" sz="1100" dirty="0">
+                <a:solidFill>
+                  <a:srgbClr val="FFFFFF"/>
+                </a:solidFill>
+                <a:latin typeface="Calibri" pitchFamily="34" charset="0"/>
+                <a:ea typeface="Calibri" pitchFamily="34" charset="-122"/>
+                <a:cs typeface="Calibri" pitchFamily="34" charset="-120"/>
+              </a:rPr>
+              <a:t>  ·  650</a:t>
+            </a:r>
+            <a:endParaRPr lang="en-US" sz="1100" dirty="0"/>
+          </a:p>
+        </p:txBody>
+      </p:sp>
+      <p:sp>
+        <p:nvSpPr>
+          <p:cNvPr id="19" name="Shape 17"/>
+          <p:cNvSpPr/>
+          <p:nvPr/>
+        </p:nvSpPr>
+        <p:spPr>
+          <a:xfrm flipV="1">
+            <a:off x="7889443" y="2916936"/>
+            <a:ext cx="2600554" cy="676656"/>
+          </a:xfrm>
+          <a:prstGeom prst="trapezoid">
+            <a:avLst/>
+          </a:prstGeom>
+          <a:solidFill>
+            <a:srgbClr val="2D5F7C">
+              <a:alpha val="74000"/>
+            </a:srgbClr>
+          </a:solidFill>
+          <a:ln w="6350">
+            <a:solidFill>
+              <a:srgbClr val="2D5F7C"/>
+            </a:solidFill>
+            <a:prstDash val="solid"/>
+          </a:ln>
+        </p:spPr>
+      </p:sp>
+      <p:sp>
+        <p:nvSpPr>
+          <p:cNvPr id="20" name="Text 18"/>
+          <p:cNvSpPr/>
+          <p:nvPr/>
+        </p:nvSpPr>
+        <p:spPr>
+          <a:xfrm>
+            <a:off x="7889443" y="3118104"/>
+            <a:ext cx="2600554" cy="274320"/>
+          </a:xfrm>
+          <a:prstGeom prst="rect">
+            <a:avLst/>
+          </a:prstGeom>
+          <a:noFill/>
+          <a:ln/>
+        </p:spPr>
+        <p:txBody>
+          <a:bodyPr wrap="square" lIns="0" tIns="0" rIns="0" bIns="0" rtlCol="0" anchor="ctr"/>
+          <a:lstStyle/>
+          <a:p>
+            <a:pPr algn="ctr" indent="0" marL="0">
+              <a:buNone/>
+            </a:pPr>
+            <a:r>
+              <a:rPr lang="en-US" sz="1100" b="1" dirty="0">
+                <a:solidFill>
+                  <a:srgbClr val="FFFFFF"/>
+                </a:solidFill>
+                <a:latin typeface="Calibri" pitchFamily="34" charset="0"/>
+                <a:ea typeface="Calibri" pitchFamily="34" charset="-122"/>
+                <a:cs typeface="Calibri" pitchFamily="34" charset="-120"/>
+              </a:rPr>
+              <a:t>Qualified</a:t>
+            </a:r>
+            <a:pPr algn="ctr" indent="0" marL="0">
+              <a:buNone/>
+            </a:pPr>
+            <a:r>
+              <a:rPr lang="en-US" sz="1100" dirty="0">
+                <a:solidFill>
+                  <a:srgbClr val="FFFFFF"/>
+                </a:solidFill>
+                <a:latin typeface="Calibri" pitchFamily="34" charset="0"/>
+                <a:ea typeface="Calibri" pitchFamily="34" charset="-122"/>
+                <a:cs typeface="Calibri" pitchFamily="34" charset="-120"/>
+              </a:rPr>
+              <a:t>  ·  420</a:t>
+            </a:r>
+            <a:endParaRPr lang="en-US" sz="1100" dirty="0"/>
+          </a:p>
+        </p:txBody>
+      </p:sp>
+      <p:sp>
+        <p:nvSpPr>
+          <p:cNvPr id="21" name="Shape 19"/>
+          <p:cNvSpPr/>
+          <p:nvPr/>
+        </p:nvSpPr>
+        <p:spPr>
+          <a:xfrm flipV="1">
+            <a:off x="8514893" y="3639312"/>
+            <a:ext cx="1349654" cy="676656"/>
+          </a:xfrm>
+          <a:prstGeom prst="trapezoid">
+            <a:avLst/>
+          </a:prstGeom>
+          <a:solidFill>
+            <a:srgbClr val="2D5F7C">
+              <a:alpha val="66000"/>
+            </a:srgbClr>
+          </a:solidFill>
+          <a:ln w="6350">
+            <a:solidFill>
+              <a:srgbClr val="2D5F7C"/>
+            </a:solidFill>
+            <a:prstDash val="solid"/>
+          </a:ln>
+        </p:spPr>
+      </p:sp>
+      <p:sp>
+        <p:nvSpPr>
+          <p:cNvPr id="22" name="Text 20"/>
+          <p:cNvSpPr/>
+          <p:nvPr/>
+        </p:nvSpPr>
+        <p:spPr>
+          <a:xfrm>
+            <a:off x="8514893" y="3840480"/>
+            <a:ext cx="1349654" cy="274320"/>
+          </a:xfrm>
+          <a:prstGeom prst="rect">
+            <a:avLst/>
+          </a:prstGeom>
+          <a:noFill/>
+          <a:ln/>
+        </p:spPr>
+        <p:txBody>
+          <a:bodyPr wrap="square" lIns="0" tIns="0" rIns="0" bIns="0" rtlCol="0" anchor="ctr"/>
+          <a:lstStyle/>
+          <a:p>
+            <a:pPr algn="ctr" indent="0" marL="0">
+              <a:buNone/>
+            </a:pPr>
+            <a:r>
+              <a:rPr lang="en-US" sz="1100" b="1" dirty="0">
+                <a:solidFill>
+                  <a:srgbClr val="FFFFFF"/>
+                </a:solidFill>
+                <a:latin typeface="Calibri" pitchFamily="34" charset="0"/>
+                <a:ea typeface="Calibri" pitchFamily="34" charset="-122"/>
+                <a:cs typeface="Calibri" pitchFamily="34" charset="-120"/>
+              </a:rPr>
+              <a:t>Demo</a:t>
+            </a:r>
+            <a:pPr algn="ctr" indent="0" marL="0">
+              <a:buNone/>
+            </a:pPr>
+            <a:r>
+              <a:rPr lang="en-US" sz="1100" dirty="0">
+                <a:solidFill>
+                  <a:srgbClr val="FFFFFF"/>
+                </a:solidFill>
+                <a:latin typeface="Calibri" pitchFamily="34" charset="0"/>
+                <a:ea typeface="Calibri" pitchFamily="34" charset="-122"/>
+                <a:cs typeface="Calibri" pitchFamily="34" charset="-120"/>
+              </a:rPr>
+              <a:t>  ·  230</a:t>
+            </a:r>
+            <a:endParaRPr lang="en-US" sz="1100" dirty="0"/>
+          </a:p>
+        </p:txBody>
+      </p:sp>
+      <p:sp>
+        <p:nvSpPr>
+          <p:cNvPr id="23" name="Shape 21"/>
+          <p:cNvSpPr/>
+          <p:nvPr/>
+        </p:nvSpPr>
+        <p:spPr>
+          <a:xfrm flipV="1">
+            <a:off x="8811158" y="4361688"/>
+            <a:ext cx="757123" cy="676656"/>
+          </a:xfrm>
+          <a:prstGeom prst="trapezoid">
+            <a:avLst/>
+          </a:prstGeom>
+          <a:solidFill>
+            <a:srgbClr val="2D5F7C">
+              <a:alpha val="58000"/>
+            </a:srgbClr>
+          </a:solidFill>
+          <a:ln w="6350">
+            <a:solidFill>
+              <a:srgbClr val="2D5F7C"/>
+            </a:solidFill>
+            <a:prstDash val="solid"/>
+          </a:ln>
+        </p:spPr>
+      </p:sp>
+      <p:sp>
+        <p:nvSpPr>
+          <p:cNvPr id="24" name="Text 22"/>
+          <p:cNvSpPr/>
+          <p:nvPr/>
+        </p:nvSpPr>
+        <p:spPr>
+          <a:xfrm>
+            <a:off x="8811158" y="4562856"/>
+            <a:ext cx="757123" cy="274320"/>
+          </a:xfrm>
+          <a:prstGeom prst="rect">
+            <a:avLst/>
+          </a:prstGeom>
+          <a:noFill/>
+          <a:ln/>
+        </p:spPr>
+        <p:txBody>
+          <a:bodyPr wrap="square" lIns="0" tIns="0" rIns="0" bIns="0" rtlCol="0" anchor="ctr"/>
+          <a:lstStyle/>
+          <a:p>
+            <a:pPr algn="ctr" indent="0" marL="0">
+              <a:buNone/>
+            </a:pPr>
+            <a:r>
+              <a:rPr lang="en-US" sz="1100" b="1" dirty="0">
+                <a:solidFill>
+                  <a:srgbClr val="FFFFFF"/>
+                </a:solidFill>
+                <a:latin typeface="Calibri" pitchFamily="34" charset="0"/>
+                <a:ea typeface="Calibri" pitchFamily="34" charset="-122"/>
+                <a:cs typeface="Calibri" pitchFamily="34" charset="-120"/>
+              </a:rPr>
+              <a:t>Proposal</a:t>
+            </a:r>
+            <a:pPr algn="ctr" indent="0" marL="0">
+              <a:buNone/>
+            </a:pPr>
+            <a:r>
+              <a:rPr lang="en-US" sz="1100" dirty="0">
+                <a:solidFill>
+                  <a:srgbClr val="FFFFFF"/>
+                </a:solidFill>
+                <a:latin typeface="Calibri" pitchFamily="34" charset="0"/>
+                <a:ea typeface="Calibri" pitchFamily="34" charset="-122"/>
+                <a:cs typeface="Calibri" pitchFamily="34" charset="-120"/>
+              </a:rPr>
+              <a:t>  ·  140</a:t>
+            </a:r>
+            <a:endParaRPr lang="en-US" sz="1100" dirty="0"/>
+          </a:p>
+        </p:txBody>
+      </p:sp>
+      <p:sp>
+        <p:nvSpPr>
+          <p:cNvPr id="25" name="Shape 23"/>
+          <p:cNvSpPr/>
+          <p:nvPr/>
+        </p:nvSpPr>
+        <p:spPr>
+          <a:xfrm flipV="1">
+            <a:off x="9025128" y="5084064"/>
+            <a:ext cx="329184" cy="676656"/>
+          </a:xfrm>
+          <a:prstGeom prst="trapezoid">
+            <a:avLst/>
+          </a:prstGeom>
+          <a:solidFill>
+            <a:srgbClr val="2D5F7C">
+              <a:alpha val="50000"/>
+            </a:srgbClr>
+          </a:solidFill>
+          <a:ln w="6350">
+            <a:solidFill>
+              <a:srgbClr val="2D5F7C"/>
+            </a:solidFill>
+            <a:prstDash val="solid"/>
+          </a:ln>
+        </p:spPr>
+      </p:sp>
+      <p:sp>
+        <p:nvSpPr>
+          <p:cNvPr id="26" name="Text 24"/>
+          <p:cNvSpPr/>
+          <p:nvPr/>
+        </p:nvSpPr>
+        <p:spPr>
+          <a:xfrm>
+            <a:off x="9025128" y="5285232"/>
+            <a:ext cx="329184" cy="274320"/>
+          </a:xfrm>
+          <a:prstGeom prst="rect">
+            <a:avLst/>
+          </a:prstGeom>
+          <a:noFill/>
+          <a:ln/>
+        </p:spPr>
+        <p:txBody>
+          <a:bodyPr wrap="square" lIns="0" tIns="0" rIns="0" bIns="0" rtlCol="0" anchor="ctr"/>
+          <a:lstStyle/>
+          <a:p>
+            <a:pPr algn="ctr" indent="0" marL="0">
+              <a:buNone/>
+            </a:pPr>
+            <a:r>
+              <a:rPr lang="en-US" sz="1100" b="1" dirty="0">
+                <a:solidFill>
+                  <a:srgbClr val="FFFFFF"/>
+                </a:solidFill>
+                <a:latin typeface="Calibri" pitchFamily="34" charset="0"/>
+                <a:ea typeface="Calibri" pitchFamily="34" charset="-122"/>
+                <a:cs typeface="Calibri" pitchFamily="34" charset="-120"/>
+              </a:rPr>
+              <a:t>Won</a:t>
+            </a:r>
+            <a:pPr algn="ctr" indent="0" marL="0">
+              <a:buNone/>
+            </a:pPr>
+            <a:r>
+              <a:rPr lang="en-US" sz="1100" dirty="0">
+                <a:solidFill>
+                  <a:srgbClr val="FFFFFF"/>
+                </a:solidFill>
+                <a:latin typeface="Calibri" pitchFamily="34" charset="0"/>
+                <a:ea typeface="Calibri" pitchFamily="34" charset="-122"/>
+                <a:cs typeface="Calibri" pitchFamily="34" charset="-120"/>
+              </a:rPr>
+              <a:t>  ·  75</a:t>
+            </a:r>
+            <a:endParaRPr lang="en-US" sz="1100" dirty="0"/>
+          </a:p>
+        </p:txBody>
+      </p:sp>
+      <p:sp>
+        <p:nvSpPr>
+          <p:cNvPr id="27" name="Text 25"/>
+          <p:cNvSpPr/>
+          <p:nvPr/>
+        </p:nvSpPr>
+        <p:spPr>
+          <a:xfrm>
+            <a:off x="7132320" y="5806440"/>
+            <a:ext cx="4114800" cy="365760"/>
+          </a:xfrm>
+          <a:prstGeom prst="rect">
+            <a:avLst/>
+          </a:prstGeom>
+          <a:noFill/>
+          <a:ln/>
+        </p:spPr>
+        <p:txBody>
+          <a:bodyPr wrap="square" lIns="0" tIns="0" rIns="0" bIns="0" rtlCol="0" anchor="t"/>
+          <a:lstStyle/>
+          <a:p>
+            <a:pPr algn="ctr" indent="0" marL="0">
+              <a:buNone/>
+            </a:pPr>
+            <a:r>
+              <a:rPr lang="en-US" sz="2000" dirty="0">
+                <a:solidFill>
+                  <a:srgbClr val="353745"/>
+                </a:solidFill>
+                <a:latin typeface="Georgia" pitchFamily="34" charset="0"/>
+                <a:ea typeface="Georgia" pitchFamily="34" charset="-122"/>
+                <a:cs typeface="Georgia" pitchFamily="34" charset="-120"/>
+              </a:rPr>
+              <a:t>2035</a:t>
+            </a:r>
+            <a:endParaRPr lang="en-US" sz="2000" dirty="0"/>
+          </a:p>
+        </p:txBody>
+      </p:sp>
+      <p:sp>
+        <p:nvSpPr>
+          <p:cNvPr id="28" name="Text 26"/>
+          <p:cNvSpPr/>
+          <p:nvPr/>
+        </p:nvSpPr>
+        <p:spPr>
+          <a:xfrm>
+            <a:off x="7132320" y="6126480"/>
+            <a:ext cx="4114800" cy="256032"/>
+          </a:xfrm>
+          <a:prstGeom prst="rect">
+            <a:avLst/>
+          </a:prstGeom>
+          <a:noFill/>
+          <a:ln/>
+        </p:spPr>
+        <p:txBody>
+          <a:bodyPr wrap="square" lIns="0" tIns="0" rIns="0" bIns="0" rtlCol="0" anchor="t"/>
+          <a:lstStyle/>
+          <a:p>
+            <a:pPr algn="ctr" indent="0" marL="0">
+              <a:buNone/>
+            </a:pPr>
+            <a:r>
+              <a:rPr lang="en-US" sz="1100" i="1" dirty="0">
+                <a:solidFill>
+                  <a:srgbClr val="8A7968"/>
+                </a:solidFill>
+                <a:latin typeface="Georgia" pitchFamily="34" charset="0"/>
+                <a:ea typeface="Georgia" pitchFamily="34" charset="-122"/>
+                <a:cs typeface="Georgia" pitchFamily="34" charset="-120"/>
+              </a:rPr>
+              <a:t>11.5% lead-to-win</a:t>
+            </a:r>
+            <a:endParaRPr lang="en-US" sz="1100" dirty="0"/>
+          </a:p>
+        </p:txBody>
+      </p:sp>
+      <p:sp>
+        <p:nvSpPr>
+          <p:cNvPr id="29" name="Text 27"/>
+          <p:cNvSpPr/>
+          <p:nvPr/>
+        </p:nvSpPr>
+        <p:spPr>
+          <a:xfrm>
+            <a:off x="5303520" y="3749040"/>
+            <a:ext cx="1554480" cy="731520"/>
+          </a:xfrm>
+          <a:prstGeom prst="rect">
+            <a:avLst/>
+          </a:prstGeom>
+          <a:noFill/>
+          <a:ln/>
+        </p:spPr>
+        <p:txBody>
+          <a:bodyPr wrap="square" lIns="0" tIns="0" rIns="0" bIns="0" rtlCol="0" anchor="ctr"/>
+          <a:lstStyle/>
+          <a:p>
+            <a:pPr algn="ctr" indent="0" marL="0">
+              <a:buNone/>
+            </a:pPr>
+            <a:r>
+              <a:rPr lang="en-US" sz="4400" dirty="0">
+                <a:solidFill>
+                  <a:srgbClr val="8A7968"/>
+                </a:solidFill>
+                <a:latin typeface="Georgia" pitchFamily="34" charset="0"/>
+                <a:ea typeface="Georgia" pitchFamily="34" charset="-122"/>
+                <a:cs typeface="Georgia" pitchFamily="34" charset="-120"/>
+              </a:rPr>
+              <a:t>→</a:t>
+            </a:r>
+            <a:endParaRPr lang="en-US" sz="4400" dirty="0"/>
+          </a:p>
+        </p:txBody>
+      </p:sp>
+      <p:sp>
+        <p:nvSpPr>
+          <p:cNvPr id="30" name="Text 28"/>
+          <p:cNvSpPr/>
+          <p:nvPr/>
+        </p:nvSpPr>
+        <p:spPr>
+          <a:xfrm>
+            <a:off x="4846320" y="4434840"/>
+            <a:ext cx="2468880" cy="274320"/>
+          </a:xfrm>
+          <a:prstGeom prst="rect">
+            <a:avLst/>
+          </a:prstGeom>
+          <a:noFill/>
+          <a:ln/>
+        </p:spPr>
+        <p:txBody>
+          <a:bodyPr wrap="square" lIns="0" tIns="0" rIns="0" bIns="0" rtlCol="0" anchor="t"/>
+          <a:lstStyle/>
+          <a:p>
+            <a:pPr algn="ctr" indent="0" marL="0">
+              <a:buNone/>
+            </a:pPr>
+            <a:r>
+              <a:rPr lang="en-US" sz="1200" i="1" dirty="0">
+                <a:solidFill>
+                  <a:srgbClr val="353745"/>
+                </a:solidFill>
+                <a:latin typeface="Georgia" pitchFamily="34" charset="0"/>
+                <a:ea typeface="Georgia" pitchFamily="34" charset="-122"/>
+                <a:cs typeface="Georgia" pitchFamily="34" charset="-120"/>
+              </a:rPr>
+              <a:t>2.6× efficiency</a:t>
+            </a:r>
+            <a:endParaRPr lang="en-US" sz="1200" dirty="0"/>
+          </a:p>
+        </p:txBody>
+      </p:sp>
+    </p:spTree>
+  </p:cSld>
+  <p:clrMapOvr>
+    <a:masterClrMapping/>
+  </p:clrMapOvr>
+</p:sld>
+</file>
+
+<file path=ppt/slides/slide17.xml><?xml version="1.0" encoding="utf-8"?>
+<p:sld xmlns:a="http://schemas.openxmlformats.org/drawingml/2006/main" xmlns:r="http://schemas.openxmlformats.org/officeDocument/2006/relationships" xmlns:p="http://schemas.openxmlformats.org/presentationml/2006/main">
+  <p:cSld name="Slide 17">
+    <p:bg>
+      <p:bgPr>
+        <a:solidFill>
+          <a:srgbClr val="FFF5ED"/>
+        </a:solidFill>
+      </p:bgPr>
+    </p:bg>
+    <p:spTree>
+      <p:nvGrpSpPr>
+        <p:cNvPr id="1" name=""/>
+        <p:cNvGrpSpPr/>
+        <p:nvPr/>
+      </p:nvGrpSpPr>
+      <p:grpSpPr>
+        <a:xfrm>
+          <a:off x="0" y="0"/>
+          <a:ext cx="0" cy="0"/>
+          <a:chOff x="0" y="0"/>
+          <a:chExt cx="0" cy="0"/>
+        </a:xfrm>
+      </p:grpSpPr>
+      <p:sp>
+        <p:nvSpPr>
+          <p:cNvPr id="2" name="Text 0"/>
+          <p:cNvSpPr/>
+          <p:nvPr/>
+        </p:nvSpPr>
+        <p:spPr>
+          <a:xfrm>
+            <a:off x="548640" y="457200"/>
+            <a:ext cx="7315200" cy="256032"/>
+          </a:xfrm>
+          <a:prstGeom prst="rect">
+            <a:avLst/>
+          </a:prstGeom>
+          <a:noFill/>
+          <a:ln/>
+        </p:spPr>
+        <p:txBody>
+          <a:bodyPr wrap="square" lIns="0" tIns="0" rIns="0" bIns="0" rtlCol="0" anchor="t"/>
+          <a:lstStyle/>
+          <a:p>
+            <a:pPr indent="0" marL="0">
+              <a:buNone/>
+            </a:pPr>
+            <a:r>
+              <a:rPr lang="en-US" sz="1000" b="1" spc="200" kern="0" dirty="0">
+                <a:solidFill>
+                  <a:srgbClr val="8A7968"/>
+                </a:solidFill>
+                <a:latin typeface="Calibri" pitchFamily="34" charset="0"/>
+                <a:ea typeface="Calibri" pitchFamily="34" charset="-122"/>
+                <a:cs typeface="Calibri" pitchFamily="34" charset="-120"/>
+              </a:rPr>
+              <a:t>TREEMAP  ·  ESCAPE-HATCH (SHAPES)</a:t>
+            </a:r>
+            <a:endParaRPr lang="en-US" sz="1000" dirty="0"/>
+          </a:p>
+        </p:txBody>
+      </p:sp>
+      <p:sp>
+        <p:nvSpPr>
+          <p:cNvPr id="3" name="Text 1"/>
+          <p:cNvSpPr/>
+          <p:nvPr/>
+        </p:nvSpPr>
+        <p:spPr>
+          <a:xfrm>
+            <a:off x="548640" y="749808"/>
+            <a:ext cx="11091672" cy="640080"/>
+          </a:xfrm>
+          <a:prstGeom prst="rect">
+            <a:avLst/>
+          </a:prstGeom>
+          <a:noFill/>
+          <a:ln/>
+        </p:spPr>
+        <p:txBody>
+          <a:bodyPr wrap="square" lIns="0" tIns="0" rIns="0" bIns="0" rtlCol="0" anchor="t"/>
+          <a:lstStyle/>
+          <a:p>
+            <a:pPr indent="0" marL="0">
+              <a:buNone/>
+            </a:pPr>
+            <a:r>
+              <a:rPr lang="en-US" sz="3000" dirty="0">
+                <a:solidFill>
+                  <a:srgbClr val="353745"/>
+                </a:solidFill>
+                <a:latin typeface="Georgia" pitchFamily="34" charset="0"/>
+                <a:ea typeface="Georgia" pitchFamily="34" charset="-122"/>
+                <a:cs typeface="Georgia" pitchFamily="34" charset="-120"/>
+              </a:rPr>
+              <a:t>2035 revenue by practice.</a:t>
+            </a:r>
+            <a:endParaRPr lang="en-US" sz="3000" dirty="0"/>
+          </a:p>
+        </p:txBody>
+      </p:sp>
+      <p:sp>
+        <p:nvSpPr>
+          <p:cNvPr id="4" name="Text 2"/>
+          <p:cNvSpPr/>
+          <p:nvPr/>
+        </p:nvSpPr>
+        <p:spPr>
+          <a:xfrm>
+            <a:off x="548640" y="1325880"/>
+            <a:ext cx="11091672" cy="292608"/>
+          </a:xfrm>
+          <a:prstGeom prst="rect">
+            <a:avLst/>
+          </a:prstGeom>
+          <a:noFill/>
+          <a:ln/>
+        </p:spPr>
+        <p:txBody>
+          <a:bodyPr wrap="square" lIns="0" tIns="0" rIns="0" bIns="0" rtlCol="0" anchor="t"/>
+          <a:lstStyle/>
+          <a:p>
+            <a:pPr indent="0" marL="0">
+              <a:buNone/>
+            </a:pPr>
+            <a:r>
+              <a:rPr lang="en-US" sz="1300" i="1" dirty="0">
+                <a:solidFill>
+                  <a:srgbClr val="353745"/>
+                </a:solidFill>
+                <a:latin typeface="Georgia" pitchFamily="34" charset="0"/>
+                <a:ea typeface="Georgia" pitchFamily="34" charset="-122"/>
+                <a:cs typeface="Georgia" pitchFamily="34" charset="-120"/>
+              </a:rPr>
+              <a:t>Another PPT-native type pptxgenjs cannot emit. Slice-and-dice layout in claude-pptx-plot — rectangles sized by value, colored by practice, labeled in situ.</a:t>
+            </a:r>
+            <a:endParaRPr lang="en-US" sz="1300" dirty="0"/>
+          </a:p>
+        </p:txBody>
+      </p:sp>
+      <p:sp>
+        <p:nvSpPr>
+          <p:cNvPr id="5" name="Shape 3"/>
+          <p:cNvSpPr/>
+          <p:nvPr/>
+        </p:nvSpPr>
+        <p:spPr>
+          <a:xfrm>
+            <a:off x="640080" y="2011680"/>
+            <a:ext cx="3800394" cy="4114800"/>
+          </a:xfrm>
+          <a:prstGeom prst="rect">
+            <a:avLst/>
+          </a:prstGeom>
+          <a:solidFill>
+            <a:srgbClr val="BFE5EF"/>
+          </a:solidFill>
+          <a:ln w="12700">
+            <a:solidFill>
+              <a:srgbClr val="FFF5ED"/>
+            </a:solidFill>
+            <a:prstDash val="solid"/>
+          </a:ln>
+        </p:spPr>
+      </p:sp>
+      <p:sp>
+        <p:nvSpPr>
+          <p:cNvPr id="6" name="Text 4"/>
+          <p:cNvSpPr/>
+          <p:nvPr/>
+        </p:nvSpPr>
+        <p:spPr>
+          <a:xfrm>
+            <a:off x="694944" y="2066544"/>
+            <a:ext cx="3690666" cy="274320"/>
+          </a:xfrm>
+          <a:prstGeom prst="rect">
+            <a:avLst/>
+          </a:prstGeom>
+          <a:noFill/>
+          <a:ln/>
+        </p:spPr>
+        <p:txBody>
+          <a:bodyPr wrap="square" lIns="0" tIns="0" rIns="0" bIns="0" rtlCol="0" anchor="t"/>
+          <a:lstStyle/>
+          <a:p>
+            <a:pPr indent="0" marL="0">
+              <a:buNone/>
+            </a:pPr>
+            <a:r>
+              <a:rPr lang="en-US" sz="1000" b="1" spc="100" kern="0" dirty="0">
+                <a:solidFill>
+                  <a:srgbClr val="FFFFFF"/>
+                </a:solidFill>
+                <a:latin typeface="Calibri" pitchFamily="34" charset="0"/>
+                <a:ea typeface="Calibri" pitchFamily="34" charset="-122"/>
+                <a:cs typeface="Calibri" pitchFamily="34" charset="-120"/>
+              </a:rPr>
+              <a:t>Operations</a:t>
+            </a:r>
+            <a:endParaRPr lang="en-US" sz="1000" dirty="0"/>
+          </a:p>
+        </p:txBody>
+      </p:sp>
+      <p:sp>
+        <p:nvSpPr>
+          <p:cNvPr id="7" name="Text 5"/>
+          <p:cNvSpPr/>
+          <p:nvPr/>
+        </p:nvSpPr>
+        <p:spPr>
+          <a:xfrm>
+            <a:off x="694944" y="2340864"/>
+            <a:ext cx="3690666" cy="274320"/>
+          </a:xfrm>
+          <a:prstGeom prst="rect">
+            <a:avLst/>
+          </a:prstGeom>
+          <a:noFill/>
+          <a:ln/>
+        </p:spPr>
+        <p:txBody>
+          <a:bodyPr wrap="square" lIns="0" tIns="0" rIns="0" bIns="0" rtlCol="0" anchor="t"/>
+          <a:lstStyle/>
+          <a:p>
+            <a:pPr indent="0" marL="0">
+              <a:buNone/>
+            </a:pPr>
+            <a:r>
+              <a:rPr lang="en-US" sz="1100" i="1" dirty="0">
+                <a:solidFill>
+                  <a:srgbClr val="FFFFFF"/>
+                </a:solidFill>
+                <a:latin typeface="Georgia" pitchFamily="34" charset="0"/>
+                <a:ea typeface="Georgia" pitchFamily="34" charset="-122"/>
+                <a:cs typeface="Georgia" pitchFamily="34" charset="-120"/>
+              </a:rPr>
+              <a:t>Leader by 2035</a:t>
+            </a:r>
+            <a:endParaRPr lang="en-US" sz="1100" dirty="0"/>
+          </a:p>
+        </p:txBody>
+      </p:sp>
+      <p:sp>
+        <p:nvSpPr>
+          <p:cNvPr id="8" name="Text 6"/>
+          <p:cNvSpPr/>
+          <p:nvPr/>
+        </p:nvSpPr>
+        <p:spPr>
+          <a:xfrm>
+            <a:off x="694944" y="5797296"/>
+            <a:ext cx="3690666" cy="274320"/>
+          </a:xfrm>
+          <a:prstGeom prst="rect">
+            <a:avLst/>
+          </a:prstGeom>
+          <a:noFill/>
+          <a:ln/>
+        </p:spPr>
+        <p:txBody>
+          <a:bodyPr wrap="square" lIns="0" tIns="0" rIns="0" bIns="0" rtlCol="0" anchor="b"/>
+          <a:lstStyle/>
+          <a:p>
+            <a:pPr indent="0" marL="0">
+              <a:buNone/>
+            </a:pPr>
+            <a:r>
+              <a:rPr lang="en-US" sz="1400" dirty="0">
+                <a:solidFill>
+                  <a:srgbClr val="FFFFFF"/>
+                </a:solidFill>
+                <a:latin typeface="Georgia" pitchFamily="34" charset="0"/>
+                <a:ea typeface="Georgia" pitchFamily="34" charset="-122"/>
+                <a:cs typeface="Georgia" pitchFamily="34" charset="-120"/>
+              </a:rPr>
+              <a:t>$20.6M</a:t>
+            </a:r>
+            <a:endParaRPr lang="en-US" sz="1400" dirty="0"/>
+          </a:p>
+        </p:txBody>
+      </p:sp>
+      <p:sp>
+        <p:nvSpPr>
+          <p:cNvPr id="9" name="Shape 7"/>
+          <p:cNvSpPr/>
+          <p:nvPr/>
+        </p:nvSpPr>
+        <p:spPr>
+          <a:xfrm>
+            <a:off x="4495338" y="2011680"/>
+            <a:ext cx="3675065" cy="4114800"/>
+          </a:xfrm>
+          <a:prstGeom prst="rect">
+            <a:avLst/>
+          </a:prstGeom>
+          <a:solidFill>
+            <a:srgbClr val="B84C65"/>
+          </a:solidFill>
+          <a:ln w="12700">
+            <a:solidFill>
+              <a:srgbClr val="FFF5ED"/>
+            </a:solidFill>
+            <a:prstDash val="solid"/>
+          </a:ln>
+        </p:spPr>
+      </p:sp>
+      <p:sp>
+        <p:nvSpPr>
+          <p:cNvPr id="10" name="Text 8"/>
+          <p:cNvSpPr/>
+          <p:nvPr/>
+        </p:nvSpPr>
+        <p:spPr>
+          <a:xfrm>
+            <a:off x="4550202" y="2066544"/>
+            <a:ext cx="3565337" cy="274320"/>
+          </a:xfrm>
+          <a:prstGeom prst="rect">
+            <a:avLst/>
+          </a:prstGeom>
+          <a:noFill/>
+          <a:ln/>
+        </p:spPr>
+        <p:txBody>
+          <a:bodyPr wrap="square" lIns="0" tIns="0" rIns="0" bIns="0" rtlCol="0" anchor="t"/>
+          <a:lstStyle/>
+          <a:p>
+            <a:pPr indent="0" marL="0">
+              <a:buNone/>
+            </a:pPr>
+            <a:r>
+              <a:rPr lang="en-US" sz="1000" b="1" spc="100" kern="0" dirty="0">
+                <a:solidFill>
+                  <a:srgbClr val="FFFFFF"/>
+                </a:solidFill>
+                <a:latin typeface="Calibri" pitchFamily="34" charset="0"/>
+                <a:ea typeface="Calibri" pitchFamily="34" charset="-122"/>
+                <a:cs typeface="Calibri" pitchFamily="34" charset="-120"/>
+              </a:rPr>
+              <a:t>Technology</a:t>
+            </a:r>
+            <a:endParaRPr lang="en-US" sz="1000" dirty="0"/>
+          </a:p>
+        </p:txBody>
+      </p:sp>
+      <p:sp>
+        <p:nvSpPr>
+          <p:cNvPr id="11" name="Text 9"/>
+          <p:cNvSpPr/>
+          <p:nvPr/>
+        </p:nvSpPr>
+        <p:spPr>
+          <a:xfrm>
+            <a:off x="4550202" y="2340864"/>
+            <a:ext cx="3565337" cy="274320"/>
+          </a:xfrm>
+          <a:prstGeom prst="rect">
+            <a:avLst/>
+          </a:prstGeom>
+          <a:noFill/>
+          <a:ln/>
+        </p:spPr>
+        <p:txBody>
+          <a:bodyPr wrap="square" lIns="0" tIns="0" rIns="0" bIns="0" rtlCol="0" anchor="t"/>
+          <a:lstStyle/>
+          <a:p>
+            <a:pPr indent="0" marL="0">
+              <a:buNone/>
+            </a:pPr>
+            <a:r>
+              <a:rPr lang="en-US" sz="1100" i="1" dirty="0">
+                <a:solidFill>
+                  <a:srgbClr val="FFFFFF"/>
+                </a:solidFill>
+                <a:latin typeface="Georgia" pitchFamily="34" charset="0"/>
+                <a:ea typeface="Georgia" pitchFamily="34" charset="-122"/>
+                <a:cs typeface="Georgia" pitchFamily="34" charset="-120"/>
+              </a:rPr>
+              <a:t>Fastest grower</a:t>
+            </a:r>
+            <a:endParaRPr lang="en-US" sz="1100" dirty="0"/>
+          </a:p>
+        </p:txBody>
+      </p:sp>
+      <p:sp>
+        <p:nvSpPr>
+          <p:cNvPr id="12" name="Text 10"/>
+          <p:cNvSpPr/>
+          <p:nvPr/>
+        </p:nvSpPr>
+        <p:spPr>
+          <a:xfrm>
+            <a:off x="4550202" y="5797296"/>
+            <a:ext cx="3565337" cy="274320"/>
+          </a:xfrm>
+          <a:prstGeom prst="rect">
+            <a:avLst/>
+          </a:prstGeom>
+          <a:noFill/>
+          <a:ln/>
+        </p:spPr>
+        <p:txBody>
+          <a:bodyPr wrap="square" lIns="0" tIns="0" rIns="0" bIns="0" rtlCol="0" anchor="b"/>
+          <a:lstStyle/>
+          <a:p>
+            <a:pPr indent="0" marL="0">
+              <a:buNone/>
+            </a:pPr>
+            <a:r>
+              <a:rPr lang="en-US" sz="1400" dirty="0">
+                <a:solidFill>
+                  <a:srgbClr val="FFFFFF"/>
+                </a:solidFill>
+                <a:latin typeface="Georgia" pitchFamily="34" charset="0"/>
+                <a:ea typeface="Georgia" pitchFamily="34" charset="-122"/>
+                <a:cs typeface="Georgia" pitchFamily="34" charset="-120"/>
+              </a:rPr>
+              <a:t>$19.9M</a:t>
+            </a:r>
+            <a:endParaRPr lang="en-US" sz="1400" dirty="0"/>
+          </a:p>
+        </p:txBody>
+      </p:sp>
+      <p:sp>
+        <p:nvSpPr>
+          <p:cNvPr id="13" name="Shape 11"/>
+          <p:cNvSpPr/>
+          <p:nvPr/>
+        </p:nvSpPr>
+        <p:spPr>
+          <a:xfrm>
+            <a:off x="8225266" y="2011680"/>
+            <a:ext cx="3387614" cy="4114800"/>
+          </a:xfrm>
+          <a:prstGeom prst="rect">
+            <a:avLst/>
+          </a:prstGeom>
+          <a:solidFill>
+            <a:srgbClr val="2D5F7C"/>
+          </a:solidFill>
+          <a:ln w="12700">
+            <a:solidFill>
+              <a:srgbClr val="FFF5ED"/>
+            </a:solidFill>
+            <a:prstDash val="solid"/>
+          </a:ln>
+        </p:spPr>
+      </p:sp>
+      <p:sp>
+        <p:nvSpPr>
+          <p:cNvPr id="14" name="Text 12"/>
+          <p:cNvSpPr/>
+          <p:nvPr/>
+        </p:nvSpPr>
+        <p:spPr>
+          <a:xfrm>
+            <a:off x="8280130" y="2066544"/>
+            <a:ext cx="3277886" cy="274320"/>
+          </a:xfrm>
+          <a:prstGeom prst="rect">
+            <a:avLst/>
+          </a:prstGeom>
+          <a:noFill/>
+          <a:ln/>
+        </p:spPr>
+        <p:txBody>
+          <a:bodyPr wrap="square" lIns="0" tIns="0" rIns="0" bIns="0" rtlCol="0" anchor="t"/>
+          <a:lstStyle/>
+          <a:p>
+            <a:pPr indent="0" marL="0">
+              <a:buNone/>
+            </a:pPr>
+            <a:r>
+              <a:rPr lang="en-US" sz="1000" b="1" spc="100" kern="0" dirty="0">
+                <a:solidFill>
+                  <a:srgbClr val="FFFFFF"/>
+                </a:solidFill>
+                <a:latin typeface="Calibri" pitchFamily="34" charset="0"/>
+                <a:ea typeface="Calibri" pitchFamily="34" charset="-122"/>
+                <a:cs typeface="Calibri" pitchFamily="34" charset="-120"/>
+              </a:rPr>
+              <a:t>Strategy</a:t>
+            </a:r>
+            <a:endParaRPr lang="en-US" sz="1000" dirty="0"/>
+          </a:p>
+        </p:txBody>
+      </p:sp>
+      <p:sp>
+        <p:nvSpPr>
+          <p:cNvPr id="15" name="Text 13"/>
+          <p:cNvSpPr/>
+          <p:nvPr/>
+        </p:nvSpPr>
+        <p:spPr>
+          <a:xfrm>
+            <a:off x="8280130" y="2340864"/>
+            <a:ext cx="3277886" cy="274320"/>
+          </a:xfrm>
+          <a:prstGeom prst="rect">
+            <a:avLst/>
+          </a:prstGeom>
+          <a:noFill/>
+          <a:ln/>
+        </p:spPr>
+        <p:txBody>
+          <a:bodyPr wrap="square" lIns="0" tIns="0" rIns="0" bIns="0" rtlCol="0" anchor="t"/>
+          <a:lstStyle/>
+          <a:p>
+            <a:pPr indent="0" marL="0">
+              <a:buNone/>
+            </a:pPr>
+            <a:r>
+              <a:rPr lang="en-US" sz="1100" i="1" dirty="0">
+                <a:solidFill>
+                  <a:srgbClr val="FFFFFF"/>
+                </a:solidFill>
+                <a:latin typeface="Georgia" pitchFamily="34" charset="0"/>
+                <a:ea typeface="Georgia" pitchFamily="34" charset="-122"/>
+                <a:cs typeface="Georgia" pitchFamily="34" charset="-120"/>
+              </a:rPr>
+              <a:t>Cyclical anchor</a:t>
+            </a:r>
+            <a:endParaRPr lang="en-US" sz="1100" dirty="0"/>
+          </a:p>
+        </p:txBody>
+      </p:sp>
+      <p:sp>
+        <p:nvSpPr>
+          <p:cNvPr id="16" name="Text 14"/>
+          <p:cNvSpPr/>
+          <p:nvPr/>
+        </p:nvSpPr>
+        <p:spPr>
+          <a:xfrm>
+            <a:off x="8280130" y="5797296"/>
+            <a:ext cx="3277886" cy="274320"/>
+          </a:xfrm>
+          <a:prstGeom prst="rect">
+            <a:avLst/>
+          </a:prstGeom>
+          <a:noFill/>
+          <a:ln/>
+        </p:spPr>
+        <p:txBody>
+          <a:bodyPr wrap="square" lIns="0" tIns="0" rIns="0" bIns="0" rtlCol="0" anchor="b"/>
+          <a:lstStyle/>
+          <a:p>
+            <a:pPr indent="0" marL="0">
+              <a:buNone/>
+            </a:pPr>
+            <a:r>
+              <a:rPr lang="en-US" sz="1400" dirty="0">
+                <a:solidFill>
+                  <a:srgbClr val="FFFFFF"/>
+                </a:solidFill>
+                <a:latin typeface="Georgia" pitchFamily="34" charset="0"/>
+                <a:ea typeface="Georgia" pitchFamily="34" charset="-122"/>
+                <a:cs typeface="Georgia" pitchFamily="34" charset="-120"/>
+              </a:rPr>
+              <a:t>$18.1M</a:t>
+            </a:r>
+            <a:endParaRPr lang="en-US" sz="1400" dirty="0"/>
+          </a:p>
+        </p:txBody>
+      </p:sp>
+      <p:sp>
+        <p:nvSpPr>
+          <p:cNvPr id="17" name="Text 15"/>
+          <p:cNvSpPr/>
+          <p:nvPr/>
+        </p:nvSpPr>
+        <p:spPr>
+          <a:xfrm>
+            <a:off x="548640" y="6263640"/>
+            <a:ext cx="11091672" cy="292608"/>
+          </a:xfrm>
+          <a:prstGeom prst="rect">
+            <a:avLst/>
+          </a:prstGeom>
+          <a:noFill/>
+          <a:ln/>
+        </p:spPr>
+        <p:txBody>
+          <a:bodyPr wrap="square" lIns="0" tIns="0" rIns="0" bIns="0" rtlCol="0" anchor="t"/>
+          <a:lstStyle/>
+          <a:p>
+            <a:pPr indent="0" marL="0">
+              <a:buNone/>
+            </a:pPr>
+            <a:r>
+              <a:rPr lang="en-US" sz="1200" i="1" dirty="0">
+                <a:solidFill>
+                  <a:srgbClr val="353745"/>
+                </a:solidFill>
+                <a:latin typeface="Georgia" pitchFamily="34" charset="0"/>
+                <a:ea typeface="Georgia" pitchFamily="34" charset="-122"/>
+                <a:cs typeface="Georgia" pitchFamily="34" charset="-120"/>
+              </a:rPr>
+              <a:t>With three nearly-equal segments, treemap reads like a horizontal composition bar. Its advantage shows at higher cardinality.</a:t>
+            </a:r>
+            <a:endParaRPr lang="en-US" sz="1200" dirty="0"/>
+          </a:p>
+        </p:txBody>
+      </p:sp>
+    </p:spTree>
+  </p:cSld>
+  <p:clrMapOvr>
+    <a:masterClrMapping/>
+  </p:clrMapOvr>
+</p:sld>
+</file>
+
+<file path=ppt/slides/slide18.xml><?xml version="1.0" encoding="utf-8"?>
+<p:sld xmlns:a="http://schemas.openxmlformats.org/drawingml/2006/main" xmlns:r="http://schemas.openxmlformats.org/officeDocument/2006/relationships" xmlns:p="http://schemas.openxmlformats.org/presentationml/2006/main">
+  <p:cSld name="Slide 18">
+    <p:bg>
+      <p:bgPr>
+        <a:solidFill>
+          <a:srgbClr val="FFF5ED"/>
+        </a:solidFill>
+      </p:bgPr>
+    </p:bg>
+    <p:spTree>
+      <p:nvGrpSpPr>
+        <p:cNvPr id="1" name=""/>
+        <p:cNvGrpSpPr/>
+        <p:nvPr/>
+      </p:nvGrpSpPr>
+      <p:grpSpPr>
+        <a:xfrm>
+          <a:off x="0" y="0"/>
+          <a:ext cx="0" cy="0"/>
+          <a:chOff x="0" y="0"/>
+          <a:chExt cx="0" cy="0"/>
+        </a:xfrm>
+      </p:grpSpPr>
+      <p:sp>
+        <p:nvSpPr>
+          <p:cNvPr id="2" name="Text 0"/>
+          <p:cNvSpPr/>
+          <p:nvPr/>
+        </p:nvSpPr>
+        <p:spPr>
+          <a:xfrm>
+            <a:off x="548640" y="457200"/>
+            <a:ext cx="7315200" cy="256032"/>
+          </a:xfrm>
+          <a:prstGeom prst="rect">
+            <a:avLst/>
+          </a:prstGeom>
+          <a:noFill/>
+          <a:ln/>
+        </p:spPr>
+        <p:txBody>
+          <a:bodyPr wrap="square" lIns="0" tIns="0" rIns="0" bIns="0" rtlCol="0" anchor="t"/>
+          <a:lstStyle/>
+          <a:p>
+            <a:pPr indent="0" marL="0">
+              <a:buNone/>
+            </a:pPr>
+            <a:r>
+              <a:rPr lang="en-US" sz="1000" b="1" spc="200" kern="0" dirty="0">
+                <a:solidFill>
+                  <a:srgbClr val="8A7968"/>
+                </a:solidFill>
+                <a:latin typeface="Calibri" pitchFamily="34" charset="0"/>
+                <a:ea typeface="Calibri" pitchFamily="34" charset="-122"/>
+                <a:cs typeface="Calibri" pitchFamily="34" charset="-120"/>
+              </a:rPr>
+              <a:t>TREEMAP  ·  STRESS-TEST (18 CELLS)</a:t>
+            </a:r>
+            <a:endParaRPr lang="en-US" sz="1000" dirty="0"/>
+          </a:p>
+        </p:txBody>
+      </p:sp>
+      <p:sp>
+        <p:nvSpPr>
+          <p:cNvPr id="3" name="Text 1"/>
+          <p:cNvSpPr/>
+          <p:nvPr/>
+        </p:nvSpPr>
+        <p:spPr>
+          <a:xfrm>
+            <a:off x="548640" y="749808"/>
+            <a:ext cx="11091672" cy="640080"/>
+          </a:xfrm>
+          <a:prstGeom prst="rect">
+            <a:avLst/>
+          </a:prstGeom>
+          <a:noFill/>
+          <a:ln/>
+        </p:spPr>
+        <p:txBody>
+          <a:bodyPr wrap="square" lIns="0" tIns="0" rIns="0" bIns="0" rtlCol="0" anchor="t"/>
+          <a:lstStyle/>
+          <a:p>
+            <a:pPr indent="0" marL="0">
+              <a:buNone/>
+            </a:pPr>
+            <a:r>
+              <a:rPr lang="en-US" sz="3000" dirty="0">
+                <a:solidFill>
+                  <a:srgbClr val="353745"/>
+                </a:solidFill>
+                <a:latin typeface="Georgia" pitchFamily="34" charset="0"/>
+                <a:ea typeface="Georgia" pitchFamily="34" charset="-122"/>
+                <a:cs typeface="Georgia" pitchFamily="34" charset="-120"/>
+              </a:rPr>
+              <a:t>Every practice-year as a cell.</a:t>
+            </a:r>
+            <a:endParaRPr lang="en-US" sz="3000" dirty="0"/>
+          </a:p>
+        </p:txBody>
+      </p:sp>
+      <p:sp>
+        <p:nvSpPr>
+          <p:cNvPr id="4" name="Text 2"/>
+          <p:cNvSpPr/>
+          <p:nvPr/>
+        </p:nvSpPr>
+        <p:spPr>
+          <a:xfrm>
+            <a:off x="548640" y="1325880"/>
+            <a:ext cx="11091672" cy="292608"/>
+          </a:xfrm>
+          <a:prstGeom prst="rect">
+            <a:avLst/>
+          </a:prstGeom>
+          <a:noFill/>
+          <a:ln/>
+        </p:spPr>
+        <p:txBody>
+          <a:bodyPr wrap="square" lIns="0" tIns="0" rIns="0" bIns="0" rtlCol="0" anchor="t"/>
+          <a:lstStyle/>
+          <a:p>
+            <a:pPr indent="0" marL="0">
+              <a:buNone/>
+            </a:pPr>
+            <a:r>
+              <a:rPr lang="en-US" sz="1300" i="1" dirty="0">
+                <a:solidFill>
+                  <a:srgbClr val="353745"/>
+                </a:solidFill>
+                <a:latin typeface="Georgia" pitchFamily="34" charset="0"/>
+                <a:ea typeface="Georgia" pitchFamily="34" charset="-122"/>
+                <a:cs typeface="Georgia" pitchFamily="34" charset="-120"/>
+              </a:rPr>
+              <a:t>Three practices × six years = 18 cells, sized by $M revenue, colored by practice. Slice-and-dice gets noisy at this density — shows where squarified algorithms would pay off.</a:t>
+            </a:r>
+            <a:endParaRPr lang="en-US" sz="1300" dirty="0"/>
+          </a:p>
+        </p:txBody>
+      </p:sp>
+      <p:sp>
+        <p:nvSpPr>
+          <p:cNvPr id="5" name="Shape 3"/>
+          <p:cNvSpPr/>
+          <p:nvPr/>
+        </p:nvSpPr>
+        <p:spPr>
+          <a:xfrm>
+            <a:off x="640080" y="2011680"/>
+            <a:ext cx="991121" cy="4023360"/>
+          </a:xfrm>
+          <a:prstGeom prst="rect">
+            <a:avLst/>
+          </a:prstGeom>
+          <a:solidFill>
+            <a:srgbClr val="BFE5EF"/>
+          </a:solidFill>
+          <a:ln w="12700">
+            <a:solidFill>
+              <a:srgbClr val="FFF5ED"/>
+            </a:solidFill>
+            <a:prstDash val="solid"/>
+          </a:ln>
+        </p:spPr>
+      </p:sp>
+      <p:sp>
+        <p:nvSpPr>
+          <p:cNvPr id="6" name="Text 4"/>
+          <p:cNvSpPr/>
+          <p:nvPr/>
+        </p:nvSpPr>
+        <p:spPr>
+          <a:xfrm>
+            <a:off x="694944" y="2066544"/>
+            <a:ext cx="881393" cy="274320"/>
+          </a:xfrm>
+          <a:prstGeom prst="rect">
+            <a:avLst/>
+          </a:prstGeom>
+          <a:noFill/>
+          <a:ln/>
+        </p:spPr>
+        <p:txBody>
+          <a:bodyPr wrap="square" lIns="0" tIns="0" rIns="0" bIns="0" rtlCol="0" anchor="t"/>
+          <a:lstStyle/>
+          <a:p>
+            <a:pPr indent="0" marL="0">
+              <a:buNone/>
+            </a:pPr>
+            <a:r>
+              <a:rPr lang="en-US" sz="1000" b="1" spc="100" kern="0" dirty="0">
+                <a:solidFill>
+                  <a:srgbClr val="FFFFFF"/>
+                </a:solidFill>
+                <a:latin typeface="Calibri" pitchFamily="34" charset="0"/>
+                <a:ea typeface="Calibri" pitchFamily="34" charset="-122"/>
+                <a:cs typeface="Calibri" pitchFamily="34" charset="-120"/>
+              </a:rPr>
+              <a:t>Oper 2035</a:t>
+            </a:r>
+            <a:endParaRPr lang="en-US" sz="1000" dirty="0"/>
+          </a:p>
+        </p:txBody>
+      </p:sp>
+      <p:sp>
+        <p:nvSpPr>
+          <p:cNvPr id="7" name="Text 5"/>
+          <p:cNvSpPr/>
+          <p:nvPr/>
+        </p:nvSpPr>
+        <p:spPr>
+          <a:xfrm>
+            <a:off x="694944" y="5705856"/>
+            <a:ext cx="881393" cy="274320"/>
+          </a:xfrm>
+          <a:prstGeom prst="rect">
+            <a:avLst/>
+          </a:prstGeom>
+          <a:noFill/>
+          <a:ln/>
+        </p:spPr>
+        <p:txBody>
+          <a:bodyPr wrap="square" lIns="0" tIns="0" rIns="0" bIns="0" rtlCol="0" anchor="b"/>
+          <a:lstStyle/>
+          <a:p>
+            <a:pPr indent="0" marL="0">
+              <a:buNone/>
+            </a:pPr>
+            <a:r>
+              <a:rPr lang="en-US" sz="1400" dirty="0">
+                <a:solidFill>
+                  <a:srgbClr val="FFFFFF"/>
+                </a:solidFill>
+                <a:latin typeface="Georgia" pitchFamily="34" charset="0"/>
+                <a:ea typeface="Georgia" pitchFamily="34" charset="-122"/>
+                <a:cs typeface="Georgia" pitchFamily="34" charset="-120"/>
+              </a:rPr>
+              <a:t>$20.6M</a:t>
+            </a:r>
+            <a:endParaRPr lang="en-US" sz="1400" dirty="0"/>
+          </a:p>
+        </p:txBody>
+      </p:sp>
+      <p:sp>
+        <p:nvSpPr>
+          <p:cNvPr id="8" name="Shape 6"/>
+          <p:cNvSpPr/>
+          <p:nvPr/>
+        </p:nvSpPr>
+        <p:spPr>
+          <a:xfrm>
+            <a:off x="1658633" y="2011680"/>
+            <a:ext cx="958010" cy="4023360"/>
+          </a:xfrm>
+          <a:prstGeom prst="rect">
+            <a:avLst/>
+          </a:prstGeom>
+          <a:solidFill>
+            <a:srgbClr val="B84C65"/>
+          </a:solidFill>
+          <a:ln w="12700">
+            <a:solidFill>
+              <a:srgbClr val="FFF5ED"/>
+            </a:solidFill>
+            <a:prstDash val="solid"/>
+          </a:ln>
+        </p:spPr>
+      </p:sp>
+      <p:sp>
+        <p:nvSpPr>
+          <p:cNvPr id="9" name="Text 7"/>
+          <p:cNvSpPr/>
+          <p:nvPr/>
+        </p:nvSpPr>
+        <p:spPr>
+          <a:xfrm>
+            <a:off x="1713497" y="2066544"/>
+            <a:ext cx="848282" cy="274320"/>
+          </a:xfrm>
+          <a:prstGeom prst="rect">
+            <a:avLst/>
+          </a:prstGeom>
+          <a:noFill/>
+          <a:ln/>
+        </p:spPr>
+        <p:txBody>
+          <a:bodyPr wrap="square" lIns="0" tIns="0" rIns="0" bIns="0" rtlCol="0" anchor="t"/>
+          <a:lstStyle/>
+          <a:p>
+            <a:pPr indent="0" marL="0">
+              <a:buNone/>
+            </a:pPr>
+            <a:r>
+              <a:rPr lang="en-US" sz="1000" b="1" spc="100" kern="0" dirty="0">
+                <a:solidFill>
+                  <a:srgbClr val="FFFFFF"/>
+                </a:solidFill>
+                <a:latin typeface="Calibri" pitchFamily="34" charset="0"/>
+                <a:ea typeface="Calibri" pitchFamily="34" charset="-122"/>
+                <a:cs typeface="Calibri" pitchFamily="34" charset="-120"/>
+              </a:rPr>
+              <a:t>Tech 2035</a:t>
+            </a:r>
+            <a:endParaRPr lang="en-US" sz="1000" dirty="0"/>
+          </a:p>
+        </p:txBody>
+      </p:sp>
+      <p:sp>
+        <p:nvSpPr>
+          <p:cNvPr id="10" name="Text 8"/>
+          <p:cNvSpPr/>
+          <p:nvPr/>
+        </p:nvSpPr>
+        <p:spPr>
+          <a:xfrm>
+            <a:off x="1713497" y="5705856"/>
+            <a:ext cx="848282" cy="274320"/>
+          </a:xfrm>
+          <a:prstGeom prst="rect">
+            <a:avLst/>
+          </a:prstGeom>
+          <a:noFill/>
+          <a:ln/>
+        </p:spPr>
+        <p:txBody>
+          <a:bodyPr wrap="square" lIns="0" tIns="0" rIns="0" bIns="0" rtlCol="0" anchor="b"/>
+          <a:lstStyle/>
+          <a:p>
+            <a:pPr indent="0" marL="0">
+              <a:buNone/>
+            </a:pPr>
+            <a:r>
+              <a:rPr lang="en-US" sz="1400" dirty="0">
+                <a:solidFill>
+                  <a:srgbClr val="FFFFFF"/>
+                </a:solidFill>
+                <a:latin typeface="Georgia" pitchFamily="34" charset="0"/>
+                <a:ea typeface="Georgia" pitchFamily="34" charset="-122"/>
+                <a:cs typeface="Georgia" pitchFamily="34" charset="-120"/>
+              </a:rPr>
+              <a:t>$19.9M</a:t>
+            </a:r>
+            <a:endParaRPr lang="en-US" sz="1400" dirty="0"/>
+          </a:p>
+        </p:txBody>
+      </p:sp>
+      <p:sp>
+        <p:nvSpPr>
+          <p:cNvPr id="11" name="Shape 9"/>
+          <p:cNvSpPr/>
+          <p:nvPr/>
+        </p:nvSpPr>
+        <p:spPr>
+          <a:xfrm>
+            <a:off x="2644075" y="2011680"/>
+            <a:ext cx="874984" cy="4023360"/>
+          </a:xfrm>
+          <a:prstGeom prst="rect">
+            <a:avLst/>
+          </a:prstGeom>
+          <a:solidFill>
+            <a:srgbClr val="BFE5EF"/>
+          </a:solidFill>
+          <a:ln w="12700">
+            <a:solidFill>
+              <a:srgbClr val="FFF5ED"/>
+            </a:solidFill>
+            <a:prstDash val="solid"/>
+          </a:ln>
+        </p:spPr>
+      </p:sp>
+      <p:sp>
+        <p:nvSpPr>
+          <p:cNvPr id="12" name="Text 10"/>
+          <p:cNvSpPr/>
+          <p:nvPr/>
+        </p:nvSpPr>
+        <p:spPr>
+          <a:xfrm>
+            <a:off x="2698939" y="2066544"/>
+            <a:ext cx="765256" cy="274320"/>
+          </a:xfrm>
+          <a:prstGeom prst="rect">
+            <a:avLst/>
+          </a:prstGeom>
+          <a:noFill/>
+          <a:ln/>
+        </p:spPr>
+        <p:txBody>
+          <a:bodyPr wrap="square" lIns="0" tIns="0" rIns="0" bIns="0" rtlCol="0" anchor="t"/>
+          <a:lstStyle/>
+          <a:p>
+            <a:pPr indent="0" marL="0">
+              <a:buNone/>
+            </a:pPr>
+            <a:r>
+              <a:rPr lang="en-US" sz="1000" b="1" spc="100" kern="0" dirty="0">
+                <a:solidFill>
+                  <a:srgbClr val="FFFFFF"/>
+                </a:solidFill>
+                <a:latin typeface="Calibri" pitchFamily="34" charset="0"/>
+                <a:ea typeface="Calibri" pitchFamily="34" charset="-122"/>
+                <a:cs typeface="Calibri" pitchFamily="34" charset="-120"/>
+              </a:rPr>
+              <a:t>Oper 2033</a:t>
+            </a:r>
+            <a:endParaRPr lang="en-US" sz="1000" dirty="0"/>
+          </a:p>
+        </p:txBody>
+      </p:sp>
+      <p:sp>
+        <p:nvSpPr>
+          <p:cNvPr id="13" name="Text 11"/>
+          <p:cNvSpPr/>
+          <p:nvPr/>
+        </p:nvSpPr>
+        <p:spPr>
+          <a:xfrm>
+            <a:off x="2698939" y="5705856"/>
+            <a:ext cx="765256" cy="274320"/>
+          </a:xfrm>
+          <a:prstGeom prst="rect">
+            <a:avLst/>
+          </a:prstGeom>
+          <a:noFill/>
+          <a:ln/>
+        </p:spPr>
+        <p:txBody>
+          <a:bodyPr wrap="square" lIns="0" tIns="0" rIns="0" bIns="0" rtlCol="0" anchor="b"/>
+          <a:lstStyle/>
+          <a:p>
+            <a:pPr indent="0" marL="0">
+              <a:buNone/>
+            </a:pPr>
+            <a:r>
+              <a:rPr lang="en-US" sz="1400" dirty="0">
+                <a:solidFill>
+                  <a:srgbClr val="FFFFFF"/>
+                </a:solidFill>
+                <a:latin typeface="Georgia" pitchFamily="34" charset="0"/>
+                <a:ea typeface="Georgia" pitchFamily="34" charset="-122"/>
+                <a:cs typeface="Georgia" pitchFamily="34" charset="-120"/>
+              </a:rPr>
+              <a:t>$18.3M</a:t>
+            </a:r>
+            <a:endParaRPr lang="en-US" sz="1400" dirty="0"/>
+          </a:p>
+        </p:txBody>
+      </p:sp>
+      <p:sp>
+        <p:nvSpPr>
+          <p:cNvPr id="14" name="Shape 12"/>
+          <p:cNvSpPr/>
+          <p:nvPr/>
+        </p:nvSpPr>
+        <p:spPr>
+          <a:xfrm>
+            <a:off x="3546491" y="2011680"/>
+            <a:ext cx="867571" cy="4023360"/>
+          </a:xfrm>
+          <a:prstGeom prst="rect">
+            <a:avLst/>
+          </a:prstGeom>
+          <a:solidFill>
+            <a:srgbClr val="2D5F7C"/>
+          </a:solidFill>
+          <a:ln w="12700">
+            <a:solidFill>
+              <a:srgbClr val="FFF5ED"/>
+            </a:solidFill>
+            <a:prstDash val="solid"/>
+          </a:ln>
+        </p:spPr>
+      </p:sp>
+      <p:sp>
+        <p:nvSpPr>
+          <p:cNvPr id="15" name="Text 13"/>
+          <p:cNvSpPr/>
+          <p:nvPr/>
+        </p:nvSpPr>
+        <p:spPr>
+          <a:xfrm>
+            <a:off x="3601355" y="2066544"/>
+            <a:ext cx="757843" cy="274320"/>
+          </a:xfrm>
+          <a:prstGeom prst="rect">
+            <a:avLst/>
+          </a:prstGeom>
+          <a:noFill/>
+          <a:ln/>
+        </p:spPr>
+        <p:txBody>
+          <a:bodyPr wrap="square" lIns="0" tIns="0" rIns="0" bIns="0" rtlCol="0" anchor="t"/>
+          <a:lstStyle/>
+          <a:p>
+            <a:pPr indent="0" marL="0">
+              <a:buNone/>
+            </a:pPr>
+            <a:r>
+              <a:rPr lang="en-US" sz="1000" b="1" spc="100" kern="0" dirty="0">
+                <a:solidFill>
+                  <a:srgbClr val="FFFFFF"/>
+                </a:solidFill>
+                <a:latin typeface="Calibri" pitchFamily="34" charset="0"/>
+                <a:ea typeface="Calibri" pitchFamily="34" charset="-122"/>
+                <a:cs typeface="Calibri" pitchFamily="34" charset="-120"/>
+              </a:rPr>
+              <a:t>Stra 2035</a:t>
+            </a:r>
+            <a:endParaRPr lang="en-US" sz="1000" dirty="0"/>
+          </a:p>
+        </p:txBody>
+      </p:sp>
+      <p:sp>
+        <p:nvSpPr>
+          <p:cNvPr id="16" name="Text 14"/>
+          <p:cNvSpPr/>
+          <p:nvPr/>
+        </p:nvSpPr>
+        <p:spPr>
+          <a:xfrm>
+            <a:off x="3601355" y="5705856"/>
+            <a:ext cx="757843" cy="274320"/>
+          </a:xfrm>
+          <a:prstGeom prst="rect">
+            <a:avLst/>
+          </a:prstGeom>
+          <a:noFill/>
+          <a:ln/>
+        </p:spPr>
+        <p:txBody>
+          <a:bodyPr wrap="square" lIns="0" tIns="0" rIns="0" bIns="0" rtlCol="0" anchor="b"/>
+          <a:lstStyle/>
+          <a:p>
+            <a:pPr indent="0" marL="0">
+              <a:buNone/>
+            </a:pPr>
+            <a:r>
+              <a:rPr lang="en-US" sz="1400" dirty="0">
+                <a:solidFill>
+                  <a:srgbClr val="FFFFFF"/>
+                </a:solidFill>
+                <a:latin typeface="Georgia" pitchFamily="34" charset="0"/>
+                <a:ea typeface="Georgia" pitchFamily="34" charset="-122"/>
+                <a:cs typeface="Georgia" pitchFamily="34" charset="-120"/>
+              </a:rPr>
+              <a:t>$18.1M</a:t>
+            </a:r>
+            <a:endParaRPr lang="en-US" sz="1400" dirty="0"/>
+          </a:p>
+        </p:txBody>
+      </p:sp>
+      <p:sp>
+        <p:nvSpPr>
+          <p:cNvPr id="17" name="Shape 15"/>
+          <p:cNvSpPr/>
+          <p:nvPr/>
+        </p:nvSpPr>
+        <p:spPr>
+          <a:xfrm>
+            <a:off x="4441493" y="2011680"/>
+            <a:ext cx="842366" cy="4023360"/>
+          </a:xfrm>
+          <a:prstGeom prst="rect">
+            <a:avLst/>
+          </a:prstGeom>
+          <a:solidFill>
+            <a:srgbClr val="2D5F7C"/>
+          </a:solidFill>
+          <a:ln w="12700">
+            <a:solidFill>
+              <a:srgbClr val="FFF5ED"/>
+            </a:solidFill>
+            <a:prstDash val="solid"/>
+          </a:ln>
+        </p:spPr>
+      </p:sp>
+      <p:sp>
+        <p:nvSpPr>
+          <p:cNvPr id="18" name="Text 16"/>
+          <p:cNvSpPr/>
+          <p:nvPr/>
+        </p:nvSpPr>
+        <p:spPr>
+          <a:xfrm>
+            <a:off x="4496357" y="2066544"/>
+            <a:ext cx="732638" cy="274320"/>
+          </a:xfrm>
+          <a:prstGeom prst="rect">
+            <a:avLst/>
+          </a:prstGeom>
+          <a:noFill/>
+          <a:ln/>
+        </p:spPr>
+        <p:txBody>
+          <a:bodyPr wrap="square" lIns="0" tIns="0" rIns="0" bIns="0" rtlCol="0" anchor="t"/>
+          <a:lstStyle/>
+          <a:p>
+            <a:pPr indent="0" marL="0">
+              <a:buNone/>
+            </a:pPr>
+            <a:r>
+              <a:rPr lang="en-US" sz="1000" b="1" spc="100" kern="0" dirty="0">
+                <a:solidFill>
+                  <a:srgbClr val="FFFFFF"/>
+                </a:solidFill>
+                <a:latin typeface="Calibri" pitchFamily="34" charset="0"/>
+                <a:ea typeface="Calibri" pitchFamily="34" charset="-122"/>
+                <a:cs typeface="Calibri" pitchFamily="34" charset="-120"/>
+              </a:rPr>
+              <a:t>Stra 2033</a:t>
+            </a:r>
+            <a:endParaRPr lang="en-US" sz="1000" dirty="0"/>
+          </a:p>
+        </p:txBody>
+      </p:sp>
+      <p:sp>
+        <p:nvSpPr>
+          <p:cNvPr id="19" name="Text 17"/>
+          <p:cNvSpPr/>
+          <p:nvPr/>
+        </p:nvSpPr>
+        <p:spPr>
+          <a:xfrm>
+            <a:off x="4496357" y="5705856"/>
+            <a:ext cx="732638" cy="274320"/>
+          </a:xfrm>
+          <a:prstGeom prst="rect">
+            <a:avLst/>
+          </a:prstGeom>
+          <a:noFill/>
+          <a:ln/>
+        </p:spPr>
+        <p:txBody>
+          <a:bodyPr wrap="square" lIns="0" tIns="0" rIns="0" bIns="0" rtlCol="0" anchor="b"/>
+          <a:lstStyle/>
+          <a:p>
+            <a:pPr indent="0" marL="0">
+              <a:buNone/>
+            </a:pPr>
+            <a:r>
+              <a:rPr lang="en-US" sz="1400" dirty="0">
+                <a:solidFill>
+                  <a:srgbClr val="FFFFFF"/>
+                </a:solidFill>
+                <a:latin typeface="Georgia" pitchFamily="34" charset="0"/>
+                <a:ea typeface="Georgia" pitchFamily="34" charset="-122"/>
+                <a:cs typeface="Georgia" pitchFamily="34" charset="-120"/>
+              </a:rPr>
+              <a:t>$17.6M</a:t>
+            </a:r>
+            <a:endParaRPr lang="en-US" sz="1400" dirty="0"/>
+          </a:p>
+        </p:txBody>
+      </p:sp>
+      <p:sp>
+        <p:nvSpPr>
+          <p:cNvPr id="20" name="Shape 18"/>
+          <p:cNvSpPr/>
+          <p:nvPr/>
+        </p:nvSpPr>
+        <p:spPr>
+          <a:xfrm>
+            <a:off x="5311291" y="2011680"/>
+            <a:ext cx="724746" cy="4023360"/>
+          </a:xfrm>
+          <a:prstGeom prst="rect">
+            <a:avLst/>
+          </a:prstGeom>
+          <a:solidFill>
+            <a:srgbClr val="B84C65"/>
+          </a:solidFill>
+          <a:ln w="12700">
+            <a:solidFill>
+              <a:srgbClr val="FFF5ED"/>
+            </a:solidFill>
+            <a:prstDash val="solid"/>
+          </a:ln>
+        </p:spPr>
+      </p:sp>
+      <p:sp>
+        <p:nvSpPr>
+          <p:cNvPr id="21" name="Shape 19"/>
+          <p:cNvSpPr/>
+          <p:nvPr/>
+        </p:nvSpPr>
+        <p:spPr>
+          <a:xfrm>
+            <a:off x="6063469" y="2011680"/>
+            <a:ext cx="692622" cy="4023360"/>
+          </a:xfrm>
+          <a:prstGeom prst="rect">
+            <a:avLst/>
+          </a:prstGeom>
+          <a:solidFill>
+            <a:srgbClr val="B84C65"/>
+          </a:solidFill>
+          <a:ln w="12700">
+            <a:solidFill>
+              <a:srgbClr val="FFF5ED"/>
+            </a:solidFill>
+            <a:prstDash val="solid"/>
+          </a:ln>
+        </p:spPr>
+      </p:sp>
+      <p:sp>
+        <p:nvSpPr>
+          <p:cNvPr id="22" name="Shape 20"/>
+          <p:cNvSpPr/>
+          <p:nvPr/>
+        </p:nvSpPr>
+        <p:spPr>
+          <a:xfrm>
+            <a:off x="6783524" y="2011680"/>
+            <a:ext cx="629364" cy="4023360"/>
+          </a:xfrm>
+          <a:prstGeom prst="rect">
+            <a:avLst/>
+          </a:prstGeom>
+          <a:solidFill>
+            <a:srgbClr val="BFE5EF"/>
+          </a:solidFill>
+          <a:ln w="12700">
+            <a:solidFill>
+              <a:srgbClr val="FFF5ED"/>
+            </a:solidFill>
+            <a:prstDash val="solid"/>
+          </a:ln>
+        </p:spPr>
+      </p:sp>
+      <p:sp>
+        <p:nvSpPr>
+          <p:cNvPr id="23" name="Shape 21"/>
+          <p:cNvSpPr/>
+          <p:nvPr/>
+        </p:nvSpPr>
+        <p:spPr>
+          <a:xfrm>
+            <a:off x="7440320" y="2011680"/>
+            <a:ext cx="611573" cy="4023360"/>
+          </a:xfrm>
+          <a:prstGeom prst="rect">
+            <a:avLst/>
+          </a:prstGeom>
+          <a:solidFill>
+            <a:srgbClr val="2D5F7C"/>
+          </a:solidFill>
+          <a:ln w="12700">
+            <a:solidFill>
+              <a:srgbClr val="FFF5ED"/>
+            </a:solidFill>
+            <a:prstDash val="solid"/>
+          </a:ln>
+        </p:spPr>
+      </p:sp>
+      <p:sp>
+        <p:nvSpPr>
+          <p:cNvPr id="24" name="Shape 22"/>
+          <p:cNvSpPr/>
+          <p:nvPr/>
+        </p:nvSpPr>
+        <p:spPr>
+          <a:xfrm>
+            <a:off x="8079325" y="2011680"/>
+            <a:ext cx="3533555" cy="545967"/>
+          </a:xfrm>
+          <a:prstGeom prst="rect">
+            <a:avLst/>
+          </a:prstGeom>
+          <a:solidFill>
+            <a:srgbClr val="B84C65"/>
+          </a:solidFill>
+          <a:ln w="12700">
+            <a:solidFill>
+              <a:srgbClr val="FFF5ED"/>
+            </a:solidFill>
+            <a:prstDash val="solid"/>
+          </a:ln>
+        </p:spPr>
+      </p:sp>
+      <p:sp>
+        <p:nvSpPr>
+          <p:cNvPr id="25" name="Shape 23"/>
+          <p:cNvSpPr/>
+          <p:nvPr/>
+        </p:nvSpPr>
+        <p:spPr>
+          <a:xfrm>
+            <a:off x="8079325" y="2585079"/>
+            <a:ext cx="547758" cy="3449961"/>
+          </a:xfrm>
+          <a:prstGeom prst="rect">
+            <a:avLst/>
+          </a:prstGeom>
+          <a:solidFill>
+            <a:srgbClr val="2D5F7C"/>
+          </a:solidFill>
+          <a:ln w="12700">
+            <a:solidFill>
+              <a:srgbClr val="FFF5ED"/>
+            </a:solidFill>
+            <a:prstDash val="solid"/>
+          </a:ln>
+        </p:spPr>
+      </p:sp>
+      <p:sp>
+        <p:nvSpPr>
+          <p:cNvPr id="26" name="Shape 24"/>
+          <p:cNvSpPr/>
+          <p:nvPr/>
+        </p:nvSpPr>
+        <p:spPr>
+          <a:xfrm>
+            <a:off x="8654515" y="2585079"/>
+            <a:ext cx="2958365" cy="588896"/>
+          </a:xfrm>
+          <a:prstGeom prst="rect">
+            <a:avLst/>
+          </a:prstGeom>
+          <a:solidFill>
+            <a:srgbClr val="2D5F7C"/>
+          </a:solidFill>
+          <a:ln w="12700">
+            <a:solidFill>
+              <a:srgbClr val="FFF5ED"/>
+            </a:solidFill>
+            <a:prstDash val="solid"/>
+          </a:ln>
+        </p:spPr>
+      </p:sp>
+      <p:sp>
+        <p:nvSpPr>
+          <p:cNvPr id="27" name="Shape 25"/>
+          <p:cNvSpPr/>
+          <p:nvPr/>
+        </p:nvSpPr>
+        <p:spPr>
+          <a:xfrm>
+            <a:off x="8654515" y="3201408"/>
+            <a:ext cx="601992" cy="2833632"/>
+          </a:xfrm>
+          <a:prstGeom prst="rect">
+            <a:avLst/>
+          </a:prstGeom>
+          <a:solidFill>
+            <a:srgbClr val="BFE5EF"/>
+          </a:solidFill>
+          <a:ln w="12700">
+            <a:solidFill>
+              <a:srgbClr val="FFF5ED"/>
+            </a:solidFill>
+            <a:prstDash val="solid"/>
+          </a:ln>
+        </p:spPr>
+      </p:sp>
+      <p:sp>
+        <p:nvSpPr>
+          <p:cNvPr id="28" name="Shape 26"/>
+          <p:cNvSpPr/>
+          <p:nvPr/>
+        </p:nvSpPr>
+        <p:spPr>
+          <a:xfrm>
+            <a:off x="9283939" y="3201408"/>
+            <a:ext cx="2328941" cy="678628"/>
+          </a:xfrm>
+          <a:prstGeom prst="rect">
+            <a:avLst/>
+          </a:prstGeom>
+          <a:solidFill>
+            <a:srgbClr val="2D5F7C"/>
+          </a:solidFill>
+          <a:ln w="12700">
+            <a:solidFill>
+              <a:srgbClr val="FFF5ED"/>
+            </a:solidFill>
+            <a:prstDash val="solid"/>
+          </a:ln>
+        </p:spPr>
+      </p:sp>
+      <p:sp>
+        <p:nvSpPr>
+          <p:cNvPr id="29" name="Shape 27"/>
+          <p:cNvSpPr/>
+          <p:nvPr/>
+        </p:nvSpPr>
+        <p:spPr>
+          <a:xfrm>
+            <a:off x="9283939" y="3907468"/>
+            <a:ext cx="652933" cy="2127572"/>
+          </a:xfrm>
+          <a:prstGeom prst="rect">
+            <a:avLst/>
+          </a:prstGeom>
+          <a:solidFill>
+            <a:srgbClr val="BFE5EF"/>
+          </a:solidFill>
+          <a:ln w="12700">
+            <a:solidFill>
+              <a:srgbClr val="FFF5ED"/>
+            </a:solidFill>
+            <a:prstDash val="solid"/>
+          </a:ln>
+        </p:spPr>
+      </p:sp>
+      <p:sp>
+        <p:nvSpPr>
+          <p:cNvPr id="30" name="Shape 28"/>
+          <p:cNvSpPr/>
+          <p:nvPr/>
+        </p:nvSpPr>
+        <p:spPr>
+          <a:xfrm>
+            <a:off x="9964304" y="3907468"/>
+            <a:ext cx="1648576" cy="764980"/>
+          </a:xfrm>
+          <a:prstGeom prst="rect">
+            <a:avLst/>
+          </a:prstGeom>
+          <a:solidFill>
+            <a:srgbClr val="B84C65"/>
+          </a:solidFill>
+          <a:ln w="12700">
+            <a:solidFill>
+              <a:srgbClr val="FFF5ED"/>
+            </a:solidFill>
+            <a:prstDash val="solid"/>
+          </a:ln>
+        </p:spPr>
+      </p:sp>
+      <p:sp>
+        <p:nvSpPr>
+          <p:cNvPr id="31" name="Text 29"/>
+          <p:cNvSpPr/>
+          <p:nvPr/>
+        </p:nvSpPr>
+        <p:spPr>
+          <a:xfrm>
+            <a:off x="10019168" y="3962332"/>
+            <a:ext cx="1538848" cy="274320"/>
+          </a:xfrm>
+          <a:prstGeom prst="rect">
+            <a:avLst/>
+          </a:prstGeom>
+          <a:noFill/>
+          <a:ln/>
+        </p:spPr>
+        <p:txBody>
+          <a:bodyPr wrap="square" lIns="0" tIns="0" rIns="0" bIns="0" rtlCol="0" anchor="t"/>
+          <a:lstStyle/>
+          <a:p>
+            <a:pPr indent="0" marL="0">
+              <a:buNone/>
+            </a:pPr>
+            <a:r>
+              <a:rPr lang="en-US" sz="1000" b="1" spc="100" kern="0" dirty="0">
+                <a:solidFill>
+                  <a:srgbClr val="FFFFFF"/>
+                </a:solidFill>
+                <a:latin typeface="Calibri" pitchFamily="34" charset="0"/>
+                <a:ea typeface="Calibri" pitchFamily="34" charset="-122"/>
+                <a:cs typeface="Calibri" pitchFamily="34" charset="-120"/>
+              </a:rPr>
+              <a:t>Tech 2027</a:t>
+            </a:r>
+            <a:endParaRPr lang="en-US" sz="1000" dirty="0"/>
+          </a:p>
+        </p:txBody>
+      </p:sp>
+      <p:sp>
+        <p:nvSpPr>
+          <p:cNvPr id="32" name="Text 30"/>
+          <p:cNvSpPr/>
+          <p:nvPr/>
+        </p:nvSpPr>
+        <p:spPr>
+          <a:xfrm>
+            <a:off x="10019168" y="4343264"/>
+            <a:ext cx="1538848" cy="274320"/>
+          </a:xfrm>
+          <a:prstGeom prst="rect">
+            <a:avLst/>
+          </a:prstGeom>
+          <a:noFill/>
+          <a:ln/>
+        </p:spPr>
+        <p:txBody>
+          <a:bodyPr wrap="square" lIns="0" tIns="0" rIns="0" bIns="0" rtlCol="0" anchor="b"/>
+          <a:lstStyle/>
+          <a:p>
+            <a:pPr indent="0" marL="0">
+              <a:buNone/>
+            </a:pPr>
+            <a:r>
+              <a:rPr lang="en-US" sz="1400" dirty="0">
+                <a:solidFill>
+                  <a:srgbClr val="FFFFFF"/>
+                </a:solidFill>
+                <a:latin typeface="Georgia" pitchFamily="34" charset="0"/>
+                <a:ea typeface="Georgia" pitchFamily="34" charset="-122"/>
+                <a:cs typeface="Georgia" pitchFamily="34" charset="-120"/>
+              </a:rPr>
+              <a:t>$6.6M</a:t>
+            </a:r>
+            <a:endParaRPr lang="en-US" sz="1400" dirty="0"/>
+          </a:p>
+        </p:txBody>
+      </p:sp>
+      <p:sp>
+        <p:nvSpPr>
+          <p:cNvPr id="33" name="Shape 31"/>
+          <p:cNvSpPr/>
+          <p:nvPr/>
+        </p:nvSpPr>
+        <p:spPr>
+          <a:xfrm>
+            <a:off x="9964304" y="4699880"/>
+            <a:ext cx="858659" cy="1335160"/>
+          </a:xfrm>
+          <a:prstGeom prst="rect">
+            <a:avLst/>
+          </a:prstGeom>
+          <a:solidFill>
+            <a:srgbClr val="B84C65"/>
+          </a:solidFill>
+          <a:ln w="12700">
+            <a:solidFill>
+              <a:srgbClr val="FFF5ED"/>
+            </a:solidFill>
+            <a:prstDash val="solid"/>
+          </a:ln>
+        </p:spPr>
+      </p:sp>
+      <p:sp>
+        <p:nvSpPr>
+          <p:cNvPr id="34" name="Text 32"/>
+          <p:cNvSpPr/>
+          <p:nvPr/>
+        </p:nvSpPr>
+        <p:spPr>
+          <a:xfrm>
+            <a:off x="10019168" y="4754744"/>
+            <a:ext cx="748931" cy="274320"/>
+          </a:xfrm>
+          <a:prstGeom prst="rect">
+            <a:avLst/>
+          </a:prstGeom>
+          <a:noFill/>
+          <a:ln/>
+        </p:spPr>
+        <p:txBody>
+          <a:bodyPr wrap="square" lIns="0" tIns="0" rIns="0" bIns="0" rtlCol="0" anchor="t"/>
+          <a:lstStyle/>
+          <a:p>
+            <a:pPr indent="0" marL="0">
+              <a:buNone/>
+            </a:pPr>
+            <a:r>
+              <a:rPr lang="en-US" sz="1000" b="1" spc="100" kern="0" dirty="0">
+                <a:solidFill>
+                  <a:srgbClr val="FFFFFF"/>
+                </a:solidFill>
+                <a:latin typeface="Calibri" pitchFamily="34" charset="0"/>
+                <a:ea typeface="Calibri" pitchFamily="34" charset="-122"/>
+                <a:cs typeface="Calibri" pitchFamily="34" charset="-120"/>
+              </a:rPr>
+              <a:t>Tech 2025</a:t>
+            </a:r>
+            <a:endParaRPr lang="en-US" sz="1000" dirty="0"/>
+          </a:p>
+        </p:txBody>
+      </p:sp>
+      <p:sp>
+        <p:nvSpPr>
+          <p:cNvPr id="35" name="Text 33"/>
+          <p:cNvSpPr/>
+          <p:nvPr/>
+        </p:nvSpPr>
+        <p:spPr>
+          <a:xfrm>
+            <a:off x="10019168" y="5705856"/>
+            <a:ext cx="748931" cy="274320"/>
+          </a:xfrm>
+          <a:prstGeom prst="rect">
+            <a:avLst/>
+          </a:prstGeom>
+          <a:noFill/>
+          <a:ln/>
+        </p:spPr>
+        <p:txBody>
+          <a:bodyPr wrap="square" lIns="0" tIns="0" rIns="0" bIns="0" rtlCol="0" anchor="b"/>
+          <a:lstStyle/>
+          <a:p>
+            <a:pPr indent="0" marL="0">
+              <a:buNone/>
+            </a:pPr>
+            <a:r>
+              <a:rPr lang="en-US" sz="1400" dirty="0">
+                <a:solidFill>
+                  <a:srgbClr val="FFFFFF"/>
+                </a:solidFill>
+                <a:latin typeface="Georgia" pitchFamily="34" charset="0"/>
+                <a:ea typeface="Georgia" pitchFamily="34" charset="-122"/>
+                <a:cs typeface="Georgia" pitchFamily="34" charset="-120"/>
+              </a:rPr>
+              <a:t>$6.0M</a:t>
+            </a:r>
+            <a:endParaRPr lang="en-US" sz="1400" dirty="0"/>
+          </a:p>
+        </p:txBody>
+      </p:sp>
+      <p:sp>
+        <p:nvSpPr>
+          <p:cNvPr id="36" name="Shape 34"/>
+          <p:cNvSpPr/>
+          <p:nvPr/>
+        </p:nvSpPr>
+        <p:spPr>
+          <a:xfrm>
+            <a:off x="10850395" y="4699880"/>
+            <a:ext cx="762485" cy="1335160"/>
+          </a:xfrm>
+          <a:prstGeom prst="rect">
+            <a:avLst/>
+          </a:prstGeom>
+          <a:solidFill>
+            <a:srgbClr val="BFE5EF"/>
+          </a:solidFill>
+          <a:ln w="12700">
+            <a:solidFill>
+              <a:srgbClr val="FFF5ED"/>
+            </a:solidFill>
+            <a:prstDash val="solid"/>
+          </a:ln>
+        </p:spPr>
+      </p:sp>
+      <p:sp>
+        <p:nvSpPr>
+          <p:cNvPr id="37" name="Text 35"/>
+          <p:cNvSpPr/>
+          <p:nvPr/>
+        </p:nvSpPr>
+        <p:spPr>
+          <a:xfrm>
+            <a:off x="10905259" y="4754744"/>
+            <a:ext cx="652757" cy="274320"/>
+          </a:xfrm>
+          <a:prstGeom prst="rect">
+            <a:avLst/>
+          </a:prstGeom>
+          <a:noFill/>
+          <a:ln/>
+        </p:spPr>
+        <p:txBody>
+          <a:bodyPr wrap="square" lIns="0" tIns="0" rIns="0" bIns="0" rtlCol="0" anchor="t"/>
+          <a:lstStyle/>
+          <a:p>
+            <a:pPr indent="0" marL="0">
+              <a:buNone/>
+            </a:pPr>
+            <a:r>
+              <a:rPr lang="en-US" sz="1000" b="1" spc="100" kern="0" dirty="0">
+                <a:solidFill>
+                  <a:srgbClr val="FFFFFF"/>
+                </a:solidFill>
+                <a:latin typeface="Calibri" pitchFamily="34" charset="0"/>
+                <a:ea typeface="Calibri" pitchFamily="34" charset="-122"/>
+                <a:cs typeface="Calibri" pitchFamily="34" charset="-120"/>
+              </a:rPr>
+              <a:t>Oper 2029</a:t>
+            </a:r>
+            <a:endParaRPr lang="en-US" sz="1000" dirty="0"/>
+          </a:p>
+        </p:txBody>
+      </p:sp>
+      <p:sp>
+        <p:nvSpPr>
+          <p:cNvPr id="38" name="Text 36"/>
+          <p:cNvSpPr/>
+          <p:nvPr/>
+        </p:nvSpPr>
+        <p:spPr>
+          <a:xfrm>
+            <a:off x="10905259" y="5705856"/>
+            <a:ext cx="652757" cy="274320"/>
+          </a:xfrm>
+          <a:prstGeom prst="rect">
+            <a:avLst/>
+          </a:prstGeom>
+          <a:noFill/>
+          <a:ln/>
+        </p:spPr>
+        <p:txBody>
+          <a:bodyPr wrap="square" lIns="0" tIns="0" rIns="0" bIns="0" rtlCol="0" anchor="b"/>
+          <a:lstStyle/>
+          <a:p>
+            <a:pPr indent="0" marL="0">
+              <a:buNone/>
+            </a:pPr>
+            <a:r>
+              <a:rPr lang="en-US" sz="1400" dirty="0">
+                <a:solidFill>
+                  <a:srgbClr val="FFFFFF"/>
+                </a:solidFill>
+                <a:latin typeface="Georgia" pitchFamily="34" charset="0"/>
+                <a:ea typeface="Georgia" pitchFamily="34" charset="-122"/>
+                <a:cs typeface="Georgia" pitchFamily="34" charset="-120"/>
+              </a:rPr>
+              <a:t>$5.1M</a:t>
+            </a:r>
+            <a:endParaRPr lang="en-US" sz="1400" dirty="0"/>
+          </a:p>
+        </p:txBody>
+      </p:sp>
+      <p:sp>
+        <p:nvSpPr>
+          <p:cNvPr id="39" name="Text 37"/>
+          <p:cNvSpPr/>
+          <p:nvPr/>
+        </p:nvSpPr>
+        <p:spPr>
+          <a:xfrm>
+            <a:off x="548640" y="6217920"/>
+            <a:ext cx="11091672" cy="292608"/>
+          </a:xfrm>
+          <a:prstGeom prst="rect">
+            <a:avLst/>
+          </a:prstGeom>
+          <a:noFill/>
+          <a:ln/>
+        </p:spPr>
+        <p:txBody>
+          <a:bodyPr wrap="square" lIns="0" tIns="0" rIns="0" bIns="0" rtlCol="0" anchor="t"/>
+          <a:lstStyle/>
+          <a:p>
+            <a:pPr indent="0" marL="0">
+              <a:buNone/>
+            </a:pPr>
+            <a:r>
+              <a:rPr lang="en-US" sz="1200" i="1" dirty="0">
+                <a:solidFill>
+                  <a:srgbClr val="353745"/>
+                </a:solidFill>
+                <a:latin typeface="Georgia" pitchFamily="34" charset="0"/>
+                <a:ea typeface="Georgia" pitchFamily="34" charset="-122"/>
+                <a:cs typeface="Georgia" pitchFamily="34" charset="-120"/>
+              </a:rPr>
+              <a:t>18 cells, sliced-and-diced. Each color is a practice; size is $M revenue in that year. Good for scanning dominance; bad for precise comparison.</a:t>
+            </a:r>
+            <a:endParaRPr lang="en-US" sz="1200" dirty="0"/>
+          </a:p>
+        </p:txBody>
+      </p:sp>
+    </p:spTree>
+  </p:cSld>
+  <p:clrMapOvr>
+    <a:masterClrMapping/>
+  </p:clrMapOvr>
+</p:sld>
+</file>
+
 <file path=ppt/slides/slide2.xml><?xml version="1.0" encoding="utf-8"?>
 <p:sld xmlns:a="http://schemas.openxmlformats.org/drawingml/2006/main" xmlns:r="http://schemas.openxmlformats.org/officeDocument/2006/relationships" xmlns:p="http://schemas.openxmlformats.org/presentationml/2006/main">
   <p:cSld name="Slide 2">

--- a/output/audit_deck.pptx
+++ b/output/audit_deck.pptx
@@ -23,9 +23,12 @@
     <p:sldId id="271" r:id="rId17"/>
     <p:sldId id="272" r:id="rId18"/>
     <p:sldId id="273" r:id="rId19"/>
+    <p:sldId id="274" r:id="rId20"/>
+    <p:sldId id="275" r:id="rId21"/>
+    <p:sldId id="276" r:id="rId22"/>
   </p:sldIdLst>
   <p:notesMasterIdLst>
-    <p:notesMasterId r:id="rId20"/>
+    <p:notesMasterId r:id="rId23"/>
   </p:notesMasterIdLst>
   <p:sldSz cx="12192000" cy="6858000"/>
   <p:notesSz cx="6858000" cy="12192000"/>
@@ -6540,6 +6543,94 @@
 </p:notes>
 </file>
 
+<file path=ppt/notesSlides/notesSlide19.xml><?xml version="1.0" encoding="utf-8"?>
+<p:notes xmlns:a="http://schemas.openxmlformats.org/drawingml/2006/main" xmlns:r="http://schemas.openxmlformats.org/officeDocument/2006/relationships" xmlns:p="http://schemas.openxmlformats.org/presentationml/2006/main">
+  <p:cSld>
+    <p:spTree>
+      <p:nvGrpSpPr>
+        <p:cNvPr id="1" name=""/>
+        <p:cNvGrpSpPr/>
+        <p:nvPr/>
+      </p:nvGrpSpPr>
+      <p:grpSpPr>
+        <a:xfrm>
+          <a:off x="0" y="0"/>
+          <a:ext cx="0" cy="0"/>
+          <a:chOff x="0" y="0"/>
+          <a:chExt cx="0" cy="0"/>
+        </a:xfrm>
+      </p:grpSpPr>
+      <p:sp>
+        <p:nvSpPr>
+          <p:cNvPr id="2" name="Slide Image Placeholder 1"/>
+          <p:cNvSpPr>
+            <a:spLocks noGrp="1" noRot="1" noChangeAspect="1"/>
+          </p:cNvSpPr>
+          <p:nvPr>
+            <p:ph type="sldImg"/>
+          </p:nvPr>
+        </p:nvSpPr>
+        <p:spPr/>
+      </p:sp>
+      <p:sp>
+        <p:nvSpPr>
+          <p:cNvPr id="3" name="Notes Placeholder 2"/>
+          <p:cNvSpPr>
+            <a:spLocks noGrp="1"/>
+          </p:cNvSpPr>
+          <p:nvPr>
+            <p:ph type="body" idx="1"/>
+          </p:nvPr>
+        </p:nvSpPr>
+        <p:spPr/>
+        <p:txBody>
+          <a:bodyPr/>
+          <a:lstStyle/>
+          <a:p>
+            <a:r>
+              <a:rPr lang="en-US" dirty="0"/>
+              <a:t/>
+            </a:r>
+            <a:endParaRPr lang="en-US" dirty="0"/>
+          </a:p>
+        </p:txBody>
+      </p:sp>
+      <p:sp>
+        <p:nvSpPr>
+          <p:cNvPr id="4" name="Slide Number Placeholder 3"/>
+          <p:cNvSpPr>
+            <a:spLocks noGrp="1"/>
+          </p:cNvSpPr>
+          <p:nvPr>
+            <p:ph type="sldNum" sz="quarter" idx="10"/>
+          </p:nvPr>
+        </p:nvSpPr>
+        <p:spPr/>
+        <p:txBody>
+          <a:bodyPr/>
+          <a:lstStyle/>
+          <a:p>
+            <a:fld id="{F7021451-1387-4CA6-816F-3879F97B5CBC}" type="slidenum">
+              <a:rPr lang="en-US"/>
+              <a:t>19</a:t>
+            </a:fld>
+            <a:endParaRPr lang="en-US"/>
+          </a:p>
+        </p:txBody>
+      </p:sp>
+    </p:spTree>
+    <p:extLst>
+      <p:ext uri="{BB962C8B-B14F-4D97-AF65-F5344CB8AC3E}">
+        <p14:creationId xmlns:p14="http://schemas.microsoft.com/office/powerpoint/2010/main" val="1024086991"/>
+      </p:ext>
+    </p:extLst>
+  </p:cSld>
+  <p:clrMapOvr>
+    <a:masterClrMapping/>
+  </p:clrMapOvr>
+</p:notes>
+</file>
+
 <file path=ppt/notesSlides/notesSlide2.xml><?xml version="1.0" encoding="utf-8"?>
 <p:notes xmlns:a="http://schemas.openxmlformats.org/drawingml/2006/main" xmlns:r="http://schemas.openxmlformats.org/officeDocument/2006/relationships" xmlns:p="http://schemas.openxmlformats.org/presentationml/2006/main">
   <p:cSld>
@@ -6610,6 +6701,182 @@
             <a:fld id="{F7021451-1387-4CA6-816F-3879F97B5CBC}" type="slidenum">
               <a:rPr lang="en-US"/>
               <a:t>2</a:t>
+            </a:fld>
+            <a:endParaRPr lang="en-US"/>
+          </a:p>
+        </p:txBody>
+      </p:sp>
+    </p:spTree>
+    <p:extLst>
+      <p:ext uri="{BB962C8B-B14F-4D97-AF65-F5344CB8AC3E}">
+        <p14:creationId xmlns:p14="http://schemas.microsoft.com/office/powerpoint/2010/main" val="1024086991"/>
+      </p:ext>
+    </p:extLst>
+  </p:cSld>
+  <p:clrMapOvr>
+    <a:masterClrMapping/>
+  </p:clrMapOvr>
+</p:notes>
+</file>
+
+<file path=ppt/notesSlides/notesSlide20.xml><?xml version="1.0" encoding="utf-8"?>
+<p:notes xmlns:a="http://schemas.openxmlformats.org/drawingml/2006/main" xmlns:r="http://schemas.openxmlformats.org/officeDocument/2006/relationships" xmlns:p="http://schemas.openxmlformats.org/presentationml/2006/main">
+  <p:cSld>
+    <p:spTree>
+      <p:nvGrpSpPr>
+        <p:cNvPr id="1" name=""/>
+        <p:cNvGrpSpPr/>
+        <p:nvPr/>
+      </p:nvGrpSpPr>
+      <p:grpSpPr>
+        <a:xfrm>
+          <a:off x="0" y="0"/>
+          <a:ext cx="0" cy="0"/>
+          <a:chOff x="0" y="0"/>
+          <a:chExt cx="0" cy="0"/>
+        </a:xfrm>
+      </p:grpSpPr>
+      <p:sp>
+        <p:nvSpPr>
+          <p:cNvPr id="2" name="Slide Image Placeholder 1"/>
+          <p:cNvSpPr>
+            <a:spLocks noGrp="1" noRot="1" noChangeAspect="1"/>
+          </p:cNvSpPr>
+          <p:nvPr>
+            <p:ph type="sldImg"/>
+          </p:nvPr>
+        </p:nvSpPr>
+        <p:spPr/>
+      </p:sp>
+      <p:sp>
+        <p:nvSpPr>
+          <p:cNvPr id="3" name="Notes Placeholder 2"/>
+          <p:cNvSpPr>
+            <a:spLocks noGrp="1"/>
+          </p:cNvSpPr>
+          <p:nvPr>
+            <p:ph type="body" idx="1"/>
+          </p:nvPr>
+        </p:nvSpPr>
+        <p:spPr/>
+        <p:txBody>
+          <a:bodyPr/>
+          <a:lstStyle/>
+          <a:p>
+            <a:r>
+              <a:rPr lang="en-US" dirty="0"/>
+              <a:t/>
+            </a:r>
+            <a:endParaRPr lang="en-US" dirty="0"/>
+          </a:p>
+        </p:txBody>
+      </p:sp>
+      <p:sp>
+        <p:nvSpPr>
+          <p:cNvPr id="4" name="Slide Number Placeholder 3"/>
+          <p:cNvSpPr>
+            <a:spLocks noGrp="1"/>
+          </p:cNvSpPr>
+          <p:nvPr>
+            <p:ph type="sldNum" sz="quarter" idx="10"/>
+          </p:nvPr>
+        </p:nvSpPr>
+        <p:spPr/>
+        <p:txBody>
+          <a:bodyPr/>
+          <a:lstStyle/>
+          <a:p>
+            <a:fld id="{F7021451-1387-4CA6-816F-3879F97B5CBC}" type="slidenum">
+              <a:rPr lang="en-US"/>
+              <a:t>20</a:t>
+            </a:fld>
+            <a:endParaRPr lang="en-US"/>
+          </a:p>
+        </p:txBody>
+      </p:sp>
+    </p:spTree>
+    <p:extLst>
+      <p:ext uri="{BB962C8B-B14F-4D97-AF65-F5344CB8AC3E}">
+        <p14:creationId xmlns:p14="http://schemas.microsoft.com/office/powerpoint/2010/main" val="1024086991"/>
+      </p:ext>
+    </p:extLst>
+  </p:cSld>
+  <p:clrMapOvr>
+    <a:masterClrMapping/>
+  </p:clrMapOvr>
+</p:notes>
+</file>
+
+<file path=ppt/notesSlides/notesSlide21.xml><?xml version="1.0" encoding="utf-8"?>
+<p:notes xmlns:a="http://schemas.openxmlformats.org/drawingml/2006/main" xmlns:r="http://schemas.openxmlformats.org/officeDocument/2006/relationships" xmlns:p="http://schemas.openxmlformats.org/presentationml/2006/main">
+  <p:cSld>
+    <p:spTree>
+      <p:nvGrpSpPr>
+        <p:cNvPr id="1" name=""/>
+        <p:cNvGrpSpPr/>
+        <p:nvPr/>
+      </p:nvGrpSpPr>
+      <p:grpSpPr>
+        <a:xfrm>
+          <a:off x="0" y="0"/>
+          <a:ext cx="0" cy="0"/>
+          <a:chOff x="0" y="0"/>
+          <a:chExt cx="0" cy="0"/>
+        </a:xfrm>
+      </p:grpSpPr>
+      <p:sp>
+        <p:nvSpPr>
+          <p:cNvPr id="2" name="Slide Image Placeholder 1"/>
+          <p:cNvSpPr>
+            <a:spLocks noGrp="1" noRot="1" noChangeAspect="1"/>
+          </p:cNvSpPr>
+          <p:nvPr>
+            <p:ph type="sldImg"/>
+          </p:nvPr>
+        </p:nvSpPr>
+        <p:spPr/>
+      </p:sp>
+      <p:sp>
+        <p:nvSpPr>
+          <p:cNvPr id="3" name="Notes Placeholder 2"/>
+          <p:cNvSpPr>
+            <a:spLocks noGrp="1"/>
+          </p:cNvSpPr>
+          <p:nvPr>
+            <p:ph type="body" idx="1"/>
+          </p:nvPr>
+        </p:nvSpPr>
+        <p:spPr/>
+        <p:txBody>
+          <a:bodyPr/>
+          <a:lstStyle/>
+          <a:p>
+            <a:r>
+              <a:rPr lang="en-US" dirty="0"/>
+              <a:t/>
+            </a:r>
+            <a:endParaRPr lang="en-US" dirty="0"/>
+          </a:p>
+        </p:txBody>
+      </p:sp>
+      <p:sp>
+        <p:nvSpPr>
+          <p:cNvPr id="4" name="Slide Number Placeholder 3"/>
+          <p:cNvSpPr>
+            <a:spLocks noGrp="1"/>
+          </p:cNvSpPr>
+          <p:nvPr>
+            <p:ph type="sldNum" sz="quarter" idx="10"/>
+          </p:nvPr>
+        </p:nvSpPr>
+        <p:spPr/>
+        <p:txBody>
+          <a:bodyPr/>
+          <a:lstStyle/>
+          <a:p>
+            <a:fld id="{F7021451-1387-4CA6-816F-3879F97B5CBC}" type="slidenum">
+              <a:rPr lang="en-US"/>
+              <a:t>21</a:t>
             </a:fld>
             <a:endParaRPr lang="en-US"/>
           </a:p>
@@ -13528,6 +13795,3150 @@
 </p:sld>
 </file>
 
+<file path=ppt/slides/slide19.xml><?xml version="1.0" encoding="utf-8"?>
+<p:sld xmlns:a="http://schemas.openxmlformats.org/drawingml/2006/main" xmlns:r="http://schemas.openxmlformats.org/officeDocument/2006/relationships" xmlns:p="http://schemas.openxmlformats.org/presentationml/2006/main">
+  <p:cSld name="Slide 19">
+    <p:bg>
+      <p:bgPr>
+        <a:solidFill>
+          <a:srgbClr val="FFF5ED"/>
+        </a:solidFill>
+      </p:bgPr>
+    </p:bg>
+    <p:spTree>
+      <p:nvGrpSpPr>
+        <p:cNvPr id="1" name=""/>
+        <p:cNvGrpSpPr/>
+        <p:nvPr/>
+      </p:nvGrpSpPr>
+      <p:grpSpPr>
+        <a:xfrm>
+          <a:off x="0" y="0"/>
+          <a:ext cx="0" cy="0"/>
+          <a:chOff x="0" y="0"/>
+          <a:chExt cx="0" cy="0"/>
+        </a:xfrm>
+      </p:grpSpPr>
+      <p:sp>
+        <p:nvSpPr>
+          <p:cNvPr id="2" name="Text 0"/>
+          <p:cNvSpPr/>
+          <p:nvPr/>
+        </p:nvSpPr>
+        <p:spPr>
+          <a:xfrm>
+            <a:off x="548640" y="457200"/>
+            <a:ext cx="7315200" cy="256032"/>
+          </a:xfrm>
+          <a:prstGeom prst="rect">
+            <a:avLst/>
+          </a:prstGeom>
+          <a:noFill/>
+          <a:ln/>
+        </p:spPr>
+        <p:txBody>
+          <a:bodyPr wrap="square" lIns="0" tIns="0" rIns="0" bIns="0" rtlCol="0" anchor="t"/>
+          <a:lstStyle/>
+          <a:p>
+            <a:pPr indent="0" marL="0">
+              <a:buNone/>
+            </a:pPr>
+            <a:r>
+              <a:rPr lang="en-US" sz="1000" b="1" spc="200" kern="0" dirty="0">
+                <a:solidFill>
+                  <a:srgbClr val="8A7968"/>
+                </a:solidFill>
+                <a:latin typeface="Calibri" pitchFamily="34" charset="0"/>
+                <a:ea typeface="Calibri" pitchFamily="34" charset="-122"/>
+                <a:cs typeface="Calibri" pitchFamily="34" charset="-120"/>
+              </a:rPr>
+              <a:t>SANKEY  ·  ESCAPE-HATCH (SHAPES, STRAIGHT RIBBONS)</a:t>
+            </a:r>
+            <a:endParaRPr lang="en-US" sz="1000" dirty="0"/>
+          </a:p>
+        </p:txBody>
+      </p:sp>
+      <p:sp>
+        <p:nvSpPr>
+          <p:cNvPr id="3" name="Text 1"/>
+          <p:cNvSpPr/>
+          <p:nvPr/>
+        </p:nvSpPr>
+        <p:spPr>
+          <a:xfrm>
+            <a:off x="548640" y="749808"/>
+            <a:ext cx="11091672" cy="640080"/>
+          </a:xfrm>
+          <a:prstGeom prst="rect">
+            <a:avLst/>
+          </a:prstGeom>
+          <a:noFill/>
+          <a:ln/>
+        </p:spPr>
+        <p:txBody>
+          <a:bodyPr wrap="square" lIns="0" tIns="0" rIns="0" bIns="0" rtlCol="0" anchor="t"/>
+          <a:lstStyle/>
+          <a:p>
+            <a:pPr indent="0" marL="0">
+              <a:buNone/>
+            </a:pPr>
+            <a:r>
+              <a:rPr lang="en-US" sz="3000" dirty="0">
+                <a:solidFill>
+                  <a:srgbClr val="353745"/>
+                </a:solidFill>
+                <a:latin typeface="Georgia" pitchFamily="34" charset="0"/>
+                <a:ea typeface="Georgia" pitchFamily="34" charset="-122"/>
+                <a:cs typeface="Georgia" pitchFamily="34" charset="-120"/>
+              </a:rPr>
+              <a:t>Revenue flow: where each dollar goes.</a:t>
+            </a:r>
+            <a:endParaRPr lang="en-US" sz="3000" dirty="0"/>
+          </a:p>
+        </p:txBody>
+      </p:sp>
+      <p:sp>
+        <p:nvSpPr>
+          <p:cNvPr id="4" name="Text 2"/>
+          <p:cNvSpPr/>
+          <p:nvPr/>
+        </p:nvSpPr>
+        <p:spPr>
+          <a:xfrm>
+            <a:off x="548640" y="1325880"/>
+            <a:ext cx="11091672" cy="292608"/>
+          </a:xfrm>
+          <a:prstGeom prst="rect">
+            <a:avLst/>
+          </a:prstGeom>
+          <a:noFill/>
+          <a:ln/>
+        </p:spPr>
+        <p:txBody>
+          <a:bodyPr wrap="square" lIns="0" tIns="0" rIns="0" bIns="0" rtlCol="0" anchor="t"/>
+          <a:lstStyle/>
+          <a:p>
+            <a:pPr indent="0" marL="0">
+              <a:buNone/>
+            </a:pPr>
+            <a:r>
+              <a:rPr lang="en-US" sz="1300" i="1" dirty="0">
+                <a:solidFill>
+                  <a:srgbClr val="353745"/>
+                </a:solidFill>
+                <a:latin typeface="Georgia" pitchFamily="34" charset="0"/>
+                <a:ea typeface="Georgia" pitchFamily="34" charset="-122"/>
+                <a:cs typeface="Georgia" pitchFamily="34" charset="-120"/>
+              </a:rPr>
+              <a:t>pptxgenjs addShape has no curve path, so ribbons are approximated by stacked thin rects (stair-stepped polygons). For true curves, matplotlib → PNG → addImage is the fallback.</a:t>
+            </a:r>
+            <a:endParaRPr lang="en-US" sz="1300" dirty="0"/>
+          </a:p>
+        </p:txBody>
+      </p:sp>
+      <p:sp>
+        <p:nvSpPr>
+          <p:cNvPr id="5" name="Shape 3"/>
+          <p:cNvSpPr/>
+          <p:nvPr/>
+        </p:nvSpPr>
+        <p:spPr>
+          <a:xfrm>
+            <a:off x="914400" y="2103120"/>
+            <a:ext cx="640080" cy="3840480"/>
+          </a:xfrm>
+          <a:prstGeom prst="rect">
+            <a:avLst/>
+          </a:prstGeom>
+          <a:solidFill>
+            <a:srgbClr val="353745"/>
+          </a:solidFill>
+          <a:ln/>
+        </p:spPr>
+      </p:sp>
+      <p:sp>
+        <p:nvSpPr>
+          <p:cNvPr id="6" name="Text 4"/>
+          <p:cNvSpPr/>
+          <p:nvPr/>
+        </p:nvSpPr>
+        <p:spPr>
+          <a:xfrm>
+            <a:off x="822960" y="2103120"/>
+            <a:ext cx="822960" cy="3840480"/>
+          </a:xfrm>
+          <a:prstGeom prst="rect">
+            <a:avLst/>
+          </a:prstGeom>
+          <a:noFill/>
+          <a:ln/>
+        </p:spPr>
+        <p:txBody>
+          <a:bodyPr wrap="square" lIns="0" tIns="0" rIns="0" bIns="0" rtlCol="0" anchor="ctr"/>
+          <a:lstStyle/>
+          <a:p>
+            <a:pPr algn="ctr" indent="0" marL="0">
+              <a:buNone/>
+            </a:pPr>
+            <a:r>
+              <a:rPr lang="en-US" sz="1000" b="1" dirty="0">
+                <a:solidFill>
+                  <a:srgbClr val="FFFFFF"/>
+                </a:solidFill>
+                <a:latin typeface="Calibri" pitchFamily="34" charset="0"/>
+                <a:ea typeface="Calibri" pitchFamily="34" charset="-122"/>
+                <a:cs typeface="Calibri" pitchFamily="34" charset="-120"/>
+              </a:rPr>
+              <a:t>Revenue</a:t>
+            </a:r>
+            <a:pPr algn="ctr" indent="0" marL="0">
+              <a:buNone/>
+            </a:pPr>
+            <a:endParaRPr lang="en-US" sz="1000" dirty="0"/>
+          </a:p>
+          <a:p>
+            <a:pPr algn="ctr" indent="0" marL="0">
+              <a:buNone/>
+            </a:pPr>
+            <a:r>
+              <a:rPr lang="en-US" sz="1000" dirty="0">
+                <a:solidFill>
+                  <a:srgbClr val="FFFFFF"/>
+                </a:solidFill>
+                <a:latin typeface="Calibri" pitchFamily="34" charset="0"/>
+                <a:ea typeface="Calibri" pitchFamily="34" charset="-122"/>
+                <a:cs typeface="Calibri" pitchFamily="34" charset="-120"/>
+              </a:rPr>
+              <a:t>$58.7M</a:t>
+            </a:r>
+            <a:endParaRPr lang="en-US" sz="1000" dirty="0"/>
+          </a:p>
+        </p:txBody>
+      </p:sp>
+      <p:sp>
+        <p:nvSpPr>
+          <p:cNvPr id="7" name="Shape 5"/>
+          <p:cNvSpPr/>
+          <p:nvPr/>
+        </p:nvSpPr>
+        <p:spPr>
+          <a:xfrm>
+            <a:off x="10607040" y="2103120"/>
+            <a:ext cx="640080" cy="1908455"/>
+          </a:xfrm>
+          <a:prstGeom prst="rect">
+            <a:avLst/>
+          </a:prstGeom>
+          <a:solidFill>
+            <a:srgbClr val="B84C65"/>
+          </a:solidFill>
+          <a:ln/>
+        </p:spPr>
+      </p:sp>
+      <p:sp>
+        <p:nvSpPr>
+          <p:cNvPr id="8" name="Text 6"/>
+          <p:cNvSpPr/>
+          <p:nvPr/>
+        </p:nvSpPr>
+        <p:spPr>
+          <a:xfrm>
+            <a:off x="10332720" y="2103120"/>
+            <a:ext cx="1188720" cy="1908455"/>
+          </a:xfrm>
+          <a:prstGeom prst="rect">
+            <a:avLst/>
+          </a:prstGeom>
+          <a:noFill/>
+          <a:ln/>
+        </p:spPr>
+        <p:txBody>
+          <a:bodyPr wrap="square" lIns="0" tIns="0" rIns="0" bIns="0" rtlCol="0" anchor="ctr"/>
+          <a:lstStyle/>
+          <a:p>
+            <a:pPr algn="ctr" indent="0" marL="0">
+              <a:buNone/>
+            </a:pPr>
+            <a:r>
+              <a:rPr lang="en-US" sz="1000" b="1" dirty="0">
+                <a:solidFill>
+                  <a:srgbClr val="FFFFFF"/>
+                </a:solidFill>
+                <a:latin typeface="Calibri" pitchFamily="34" charset="0"/>
+                <a:ea typeface="Calibri" pitchFamily="34" charset="-122"/>
+                <a:cs typeface="Calibri" pitchFamily="34" charset="-120"/>
+              </a:rPr>
+              <a:t>Cost of services</a:t>
+            </a:r>
+            <a:pPr algn="ctr" indent="0" marL="0">
+              <a:buNone/>
+            </a:pPr>
+            <a:endParaRPr lang="en-US" sz="1000" dirty="0"/>
+          </a:p>
+          <a:p>
+            <a:pPr algn="ctr" indent="0" marL="0">
+              <a:buNone/>
+            </a:pPr>
+            <a:r>
+              <a:rPr lang="en-US" sz="1000" dirty="0">
+                <a:solidFill>
+                  <a:srgbClr val="FFFFFF"/>
+                </a:solidFill>
+                <a:latin typeface="Calibri" pitchFamily="34" charset="0"/>
+                <a:ea typeface="Calibri" pitchFamily="34" charset="-122"/>
+                <a:cs typeface="Calibri" pitchFamily="34" charset="-120"/>
+              </a:rPr>
+              <a:t>$29.1M</a:t>
+            </a:r>
+            <a:endParaRPr lang="en-US" sz="1000" dirty="0"/>
+          </a:p>
+        </p:txBody>
+      </p:sp>
+      <p:sp>
+        <p:nvSpPr>
+          <p:cNvPr id="9" name="Shape 7"/>
+          <p:cNvSpPr/>
+          <p:nvPr/>
+        </p:nvSpPr>
+        <p:spPr>
+          <a:xfrm>
+            <a:off x="10607040" y="4011575"/>
+            <a:ext cx="640080" cy="923784"/>
+          </a:xfrm>
+          <a:prstGeom prst="rect">
+            <a:avLst/>
+          </a:prstGeom>
+          <a:solidFill>
+            <a:srgbClr val="8A7968"/>
+          </a:solidFill>
+          <a:ln/>
+        </p:spPr>
+      </p:sp>
+      <p:sp>
+        <p:nvSpPr>
+          <p:cNvPr id="10" name="Text 8"/>
+          <p:cNvSpPr/>
+          <p:nvPr/>
+        </p:nvSpPr>
+        <p:spPr>
+          <a:xfrm>
+            <a:off x="10332720" y="4011575"/>
+            <a:ext cx="1188720" cy="923784"/>
+          </a:xfrm>
+          <a:prstGeom prst="rect">
+            <a:avLst/>
+          </a:prstGeom>
+          <a:noFill/>
+          <a:ln/>
+        </p:spPr>
+        <p:txBody>
+          <a:bodyPr wrap="square" lIns="0" tIns="0" rIns="0" bIns="0" rtlCol="0" anchor="ctr"/>
+          <a:lstStyle/>
+          <a:p>
+            <a:pPr algn="ctr" indent="0" marL="0">
+              <a:buNone/>
+            </a:pPr>
+            <a:r>
+              <a:rPr lang="en-US" sz="1000" b="1" dirty="0">
+                <a:solidFill>
+                  <a:srgbClr val="FFFFFF"/>
+                </a:solidFill>
+                <a:latin typeface="Calibri" pitchFamily="34" charset="0"/>
+                <a:ea typeface="Calibri" pitchFamily="34" charset="-122"/>
+                <a:cs typeface="Calibri" pitchFamily="34" charset="-120"/>
+              </a:rPr>
+              <a:t>Opex</a:t>
+            </a:r>
+            <a:pPr algn="ctr" indent="0" marL="0">
+              <a:buNone/>
+            </a:pPr>
+            <a:endParaRPr lang="en-US" sz="1000" dirty="0"/>
+          </a:p>
+          <a:p>
+            <a:pPr algn="ctr" indent="0" marL="0">
+              <a:buNone/>
+            </a:pPr>
+            <a:r>
+              <a:rPr lang="en-US" sz="1000" dirty="0">
+                <a:solidFill>
+                  <a:srgbClr val="FFFFFF"/>
+                </a:solidFill>
+                <a:latin typeface="Calibri" pitchFamily="34" charset="0"/>
+                <a:ea typeface="Calibri" pitchFamily="34" charset="-122"/>
+                <a:cs typeface="Calibri" pitchFamily="34" charset="-120"/>
+              </a:rPr>
+              <a:t>$14.1M</a:t>
+            </a:r>
+            <a:endParaRPr lang="en-US" sz="1000" dirty="0"/>
+          </a:p>
+        </p:txBody>
+      </p:sp>
+      <p:sp>
+        <p:nvSpPr>
+          <p:cNvPr id="11" name="Shape 9"/>
+          <p:cNvSpPr/>
+          <p:nvPr/>
+        </p:nvSpPr>
+        <p:spPr>
+          <a:xfrm>
+            <a:off x="10607040" y="4935359"/>
+            <a:ext cx="640080" cy="1008241"/>
+          </a:xfrm>
+          <a:prstGeom prst="rect">
+            <a:avLst/>
+          </a:prstGeom>
+          <a:solidFill>
+            <a:srgbClr val="2D5F7C"/>
+          </a:solidFill>
+          <a:ln/>
+        </p:spPr>
+      </p:sp>
+      <p:sp>
+        <p:nvSpPr>
+          <p:cNvPr id="12" name="Text 10"/>
+          <p:cNvSpPr/>
+          <p:nvPr/>
+        </p:nvSpPr>
+        <p:spPr>
+          <a:xfrm>
+            <a:off x="10332720" y="4935359"/>
+            <a:ext cx="1188720" cy="1008241"/>
+          </a:xfrm>
+          <a:prstGeom prst="rect">
+            <a:avLst/>
+          </a:prstGeom>
+          <a:noFill/>
+          <a:ln/>
+        </p:spPr>
+        <p:txBody>
+          <a:bodyPr wrap="square" lIns="0" tIns="0" rIns="0" bIns="0" rtlCol="0" anchor="ctr"/>
+          <a:lstStyle/>
+          <a:p>
+            <a:pPr algn="ctr" indent="0" marL="0">
+              <a:buNone/>
+            </a:pPr>
+            <a:r>
+              <a:rPr lang="en-US" sz="1000" b="1" dirty="0">
+                <a:solidFill>
+                  <a:srgbClr val="FFFFFF"/>
+                </a:solidFill>
+                <a:latin typeface="Calibri" pitchFamily="34" charset="0"/>
+                <a:ea typeface="Calibri" pitchFamily="34" charset="-122"/>
+                <a:cs typeface="Calibri" pitchFamily="34" charset="-120"/>
+              </a:rPr>
+              <a:t>EBITDA</a:t>
+            </a:r>
+            <a:pPr algn="ctr" indent="0" marL="0">
+              <a:buNone/>
+            </a:pPr>
+            <a:endParaRPr lang="en-US" sz="1000" dirty="0"/>
+          </a:p>
+          <a:p>
+            <a:pPr algn="ctr" indent="0" marL="0">
+              <a:buNone/>
+            </a:pPr>
+            <a:r>
+              <a:rPr lang="en-US" sz="1000" dirty="0">
+                <a:solidFill>
+                  <a:srgbClr val="FFFFFF"/>
+                </a:solidFill>
+                <a:latin typeface="Calibri" pitchFamily="34" charset="0"/>
+                <a:ea typeface="Calibri" pitchFamily="34" charset="-122"/>
+                <a:cs typeface="Calibri" pitchFamily="34" charset="-120"/>
+              </a:rPr>
+              <a:t>$15.4M</a:t>
+            </a:r>
+            <a:endParaRPr lang="en-US" sz="1000" dirty="0"/>
+          </a:p>
+        </p:txBody>
+      </p:sp>
+      <p:sp>
+        <p:nvSpPr>
+          <p:cNvPr id="13" name="Shape 11"/>
+          <p:cNvSpPr/>
+          <p:nvPr/>
+        </p:nvSpPr>
+        <p:spPr>
+          <a:xfrm>
+            <a:off x="1554480" y="2103120"/>
+            <a:ext cx="235458" cy="1908455"/>
+          </a:xfrm>
+          <a:prstGeom prst="rect">
+            <a:avLst/>
+          </a:prstGeom>
+          <a:solidFill>
+            <a:srgbClr val="B84C65">
+              <a:alpha val="45000"/>
+            </a:srgbClr>
+          </a:solidFill>
+          <a:ln/>
+        </p:spPr>
+      </p:sp>
+      <p:sp>
+        <p:nvSpPr>
+          <p:cNvPr id="14" name="Shape 12"/>
+          <p:cNvSpPr/>
+          <p:nvPr/>
+        </p:nvSpPr>
+        <p:spPr>
+          <a:xfrm>
+            <a:off x="1780794" y="2103120"/>
+            <a:ext cx="235458" cy="1908455"/>
+          </a:xfrm>
+          <a:prstGeom prst="rect">
+            <a:avLst/>
+          </a:prstGeom>
+          <a:solidFill>
+            <a:srgbClr val="B84C65">
+              <a:alpha val="45000"/>
+            </a:srgbClr>
+          </a:solidFill>
+          <a:ln/>
+        </p:spPr>
+      </p:sp>
+      <p:sp>
+        <p:nvSpPr>
+          <p:cNvPr id="15" name="Shape 13"/>
+          <p:cNvSpPr/>
+          <p:nvPr/>
+        </p:nvSpPr>
+        <p:spPr>
+          <a:xfrm>
+            <a:off x="2007108" y="2103120"/>
+            <a:ext cx="235458" cy="1908455"/>
+          </a:xfrm>
+          <a:prstGeom prst="rect">
+            <a:avLst/>
+          </a:prstGeom>
+          <a:solidFill>
+            <a:srgbClr val="B84C65">
+              <a:alpha val="45000"/>
+            </a:srgbClr>
+          </a:solidFill>
+          <a:ln/>
+        </p:spPr>
+      </p:sp>
+      <p:sp>
+        <p:nvSpPr>
+          <p:cNvPr id="16" name="Shape 14"/>
+          <p:cNvSpPr/>
+          <p:nvPr/>
+        </p:nvSpPr>
+        <p:spPr>
+          <a:xfrm>
+            <a:off x="2233422" y="2103120"/>
+            <a:ext cx="235458" cy="1908455"/>
+          </a:xfrm>
+          <a:prstGeom prst="rect">
+            <a:avLst/>
+          </a:prstGeom>
+          <a:solidFill>
+            <a:srgbClr val="B84C65">
+              <a:alpha val="45000"/>
+            </a:srgbClr>
+          </a:solidFill>
+          <a:ln/>
+        </p:spPr>
+      </p:sp>
+      <p:sp>
+        <p:nvSpPr>
+          <p:cNvPr id="17" name="Shape 15"/>
+          <p:cNvSpPr/>
+          <p:nvPr/>
+        </p:nvSpPr>
+        <p:spPr>
+          <a:xfrm>
+            <a:off x="2459736" y="2103120"/>
+            <a:ext cx="235458" cy="1908455"/>
+          </a:xfrm>
+          <a:prstGeom prst="rect">
+            <a:avLst/>
+          </a:prstGeom>
+          <a:solidFill>
+            <a:srgbClr val="B84C65">
+              <a:alpha val="45000"/>
+            </a:srgbClr>
+          </a:solidFill>
+          <a:ln/>
+        </p:spPr>
+      </p:sp>
+      <p:sp>
+        <p:nvSpPr>
+          <p:cNvPr id="18" name="Shape 16"/>
+          <p:cNvSpPr/>
+          <p:nvPr/>
+        </p:nvSpPr>
+        <p:spPr>
+          <a:xfrm>
+            <a:off x="2686050" y="2103120"/>
+            <a:ext cx="235458" cy="1908455"/>
+          </a:xfrm>
+          <a:prstGeom prst="rect">
+            <a:avLst/>
+          </a:prstGeom>
+          <a:solidFill>
+            <a:srgbClr val="B84C65">
+              <a:alpha val="45000"/>
+            </a:srgbClr>
+          </a:solidFill>
+          <a:ln/>
+        </p:spPr>
+      </p:sp>
+      <p:sp>
+        <p:nvSpPr>
+          <p:cNvPr id="19" name="Shape 17"/>
+          <p:cNvSpPr/>
+          <p:nvPr/>
+        </p:nvSpPr>
+        <p:spPr>
+          <a:xfrm>
+            <a:off x="2912364" y="2103120"/>
+            <a:ext cx="235458" cy="1908455"/>
+          </a:xfrm>
+          <a:prstGeom prst="rect">
+            <a:avLst/>
+          </a:prstGeom>
+          <a:solidFill>
+            <a:srgbClr val="B84C65">
+              <a:alpha val="45000"/>
+            </a:srgbClr>
+          </a:solidFill>
+          <a:ln/>
+        </p:spPr>
+      </p:sp>
+      <p:sp>
+        <p:nvSpPr>
+          <p:cNvPr id="20" name="Shape 18"/>
+          <p:cNvSpPr/>
+          <p:nvPr/>
+        </p:nvSpPr>
+        <p:spPr>
+          <a:xfrm>
+            <a:off x="3138678" y="2103120"/>
+            <a:ext cx="235458" cy="1908455"/>
+          </a:xfrm>
+          <a:prstGeom prst="rect">
+            <a:avLst/>
+          </a:prstGeom>
+          <a:solidFill>
+            <a:srgbClr val="B84C65">
+              <a:alpha val="45000"/>
+            </a:srgbClr>
+          </a:solidFill>
+          <a:ln/>
+        </p:spPr>
+      </p:sp>
+      <p:sp>
+        <p:nvSpPr>
+          <p:cNvPr id="21" name="Shape 19"/>
+          <p:cNvSpPr/>
+          <p:nvPr/>
+        </p:nvSpPr>
+        <p:spPr>
+          <a:xfrm>
+            <a:off x="3364992" y="2103120"/>
+            <a:ext cx="235458" cy="1908455"/>
+          </a:xfrm>
+          <a:prstGeom prst="rect">
+            <a:avLst/>
+          </a:prstGeom>
+          <a:solidFill>
+            <a:srgbClr val="B84C65">
+              <a:alpha val="45000"/>
+            </a:srgbClr>
+          </a:solidFill>
+          <a:ln/>
+        </p:spPr>
+      </p:sp>
+      <p:sp>
+        <p:nvSpPr>
+          <p:cNvPr id="22" name="Shape 20"/>
+          <p:cNvSpPr/>
+          <p:nvPr/>
+        </p:nvSpPr>
+        <p:spPr>
+          <a:xfrm>
+            <a:off x="3591306" y="2103120"/>
+            <a:ext cx="235458" cy="1908455"/>
+          </a:xfrm>
+          <a:prstGeom prst="rect">
+            <a:avLst/>
+          </a:prstGeom>
+          <a:solidFill>
+            <a:srgbClr val="B84C65">
+              <a:alpha val="45000"/>
+            </a:srgbClr>
+          </a:solidFill>
+          <a:ln/>
+        </p:spPr>
+      </p:sp>
+      <p:sp>
+        <p:nvSpPr>
+          <p:cNvPr id="23" name="Shape 21"/>
+          <p:cNvSpPr/>
+          <p:nvPr/>
+        </p:nvSpPr>
+        <p:spPr>
+          <a:xfrm>
+            <a:off x="3817620" y="2103120"/>
+            <a:ext cx="235458" cy="1908455"/>
+          </a:xfrm>
+          <a:prstGeom prst="rect">
+            <a:avLst/>
+          </a:prstGeom>
+          <a:solidFill>
+            <a:srgbClr val="B84C65">
+              <a:alpha val="45000"/>
+            </a:srgbClr>
+          </a:solidFill>
+          <a:ln/>
+        </p:spPr>
+      </p:sp>
+      <p:sp>
+        <p:nvSpPr>
+          <p:cNvPr id="24" name="Shape 22"/>
+          <p:cNvSpPr/>
+          <p:nvPr/>
+        </p:nvSpPr>
+        <p:spPr>
+          <a:xfrm>
+            <a:off x="4043934" y="2103120"/>
+            <a:ext cx="235458" cy="1908455"/>
+          </a:xfrm>
+          <a:prstGeom prst="rect">
+            <a:avLst/>
+          </a:prstGeom>
+          <a:solidFill>
+            <a:srgbClr val="B84C65">
+              <a:alpha val="45000"/>
+            </a:srgbClr>
+          </a:solidFill>
+          <a:ln/>
+        </p:spPr>
+      </p:sp>
+      <p:sp>
+        <p:nvSpPr>
+          <p:cNvPr id="25" name="Shape 23"/>
+          <p:cNvSpPr/>
+          <p:nvPr/>
+        </p:nvSpPr>
+        <p:spPr>
+          <a:xfrm>
+            <a:off x="4270248" y="2103120"/>
+            <a:ext cx="235458" cy="1908455"/>
+          </a:xfrm>
+          <a:prstGeom prst="rect">
+            <a:avLst/>
+          </a:prstGeom>
+          <a:solidFill>
+            <a:srgbClr val="B84C65">
+              <a:alpha val="45000"/>
+            </a:srgbClr>
+          </a:solidFill>
+          <a:ln/>
+        </p:spPr>
+      </p:sp>
+      <p:sp>
+        <p:nvSpPr>
+          <p:cNvPr id="26" name="Shape 24"/>
+          <p:cNvSpPr/>
+          <p:nvPr/>
+        </p:nvSpPr>
+        <p:spPr>
+          <a:xfrm>
+            <a:off x="4496562" y="2103120"/>
+            <a:ext cx="235458" cy="1908455"/>
+          </a:xfrm>
+          <a:prstGeom prst="rect">
+            <a:avLst/>
+          </a:prstGeom>
+          <a:solidFill>
+            <a:srgbClr val="B84C65">
+              <a:alpha val="45000"/>
+            </a:srgbClr>
+          </a:solidFill>
+          <a:ln/>
+        </p:spPr>
+      </p:sp>
+      <p:sp>
+        <p:nvSpPr>
+          <p:cNvPr id="27" name="Shape 25"/>
+          <p:cNvSpPr/>
+          <p:nvPr/>
+        </p:nvSpPr>
+        <p:spPr>
+          <a:xfrm>
+            <a:off x="4722876" y="2103120"/>
+            <a:ext cx="235458" cy="1908455"/>
+          </a:xfrm>
+          <a:prstGeom prst="rect">
+            <a:avLst/>
+          </a:prstGeom>
+          <a:solidFill>
+            <a:srgbClr val="B84C65">
+              <a:alpha val="45000"/>
+            </a:srgbClr>
+          </a:solidFill>
+          <a:ln/>
+        </p:spPr>
+      </p:sp>
+      <p:sp>
+        <p:nvSpPr>
+          <p:cNvPr id="28" name="Shape 26"/>
+          <p:cNvSpPr/>
+          <p:nvPr/>
+        </p:nvSpPr>
+        <p:spPr>
+          <a:xfrm>
+            <a:off x="4949190" y="2103120"/>
+            <a:ext cx="235458" cy="1908455"/>
+          </a:xfrm>
+          <a:prstGeom prst="rect">
+            <a:avLst/>
+          </a:prstGeom>
+          <a:solidFill>
+            <a:srgbClr val="B84C65">
+              <a:alpha val="45000"/>
+            </a:srgbClr>
+          </a:solidFill>
+          <a:ln/>
+        </p:spPr>
+      </p:sp>
+      <p:sp>
+        <p:nvSpPr>
+          <p:cNvPr id="29" name="Shape 27"/>
+          <p:cNvSpPr/>
+          <p:nvPr/>
+        </p:nvSpPr>
+        <p:spPr>
+          <a:xfrm>
+            <a:off x="5175504" y="2103120"/>
+            <a:ext cx="235458" cy="1908455"/>
+          </a:xfrm>
+          <a:prstGeom prst="rect">
+            <a:avLst/>
+          </a:prstGeom>
+          <a:solidFill>
+            <a:srgbClr val="B84C65">
+              <a:alpha val="45000"/>
+            </a:srgbClr>
+          </a:solidFill>
+          <a:ln/>
+        </p:spPr>
+      </p:sp>
+      <p:sp>
+        <p:nvSpPr>
+          <p:cNvPr id="30" name="Shape 28"/>
+          <p:cNvSpPr/>
+          <p:nvPr/>
+        </p:nvSpPr>
+        <p:spPr>
+          <a:xfrm>
+            <a:off x="5401818" y="2103120"/>
+            <a:ext cx="235458" cy="1908455"/>
+          </a:xfrm>
+          <a:prstGeom prst="rect">
+            <a:avLst/>
+          </a:prstGeom>
+          <a:solidFill>
+            <a:srgbClr val="B84C65">
+              <a:alpha val="45000"/>
+            </a:srgbClr>
+          </a:solidFill>
+          <a:ln/>
+        </p:spPr>
+      </p:sp>
+      <p:sp>
+        <p:nvSpPr>
+          <p:cNvPr id="31" name="Shape 29"/>
+          <p:cNvSpPr/>
+          <p:nvPr/>
+        </p:nvSpPr>
+        <p:spPr>
+          <a:xfrm>
+            <a:off x="5628132" y="2103120"/>
+            <a:ext cx="235458" cy="1908455"/>
+          </a:xfrm>
+          <a:prstGeom prst="rect">
+            <a:avLst/>
+          </a:prstGeom>
+          <a:solidFill>
+            <a:srgbClr val="B84C65">
+              <a:alpha val="45000"/>
+            </a:srgbClr>
+          </a:solidFill>
+          <a:ln/>
+        </p:spPr>
+      </p:sp>
+      <p:sp>
+        <p:nvSpPr>
+          <p:cNvPr id="32" name="Shape 30"/>
+          <p:cNvSpPr/>
+          <p:nvPr/>
+        </p:nvSpPr>
+        <p:spPr>
+          <a:xfrm>
+            <a:off x="5854446" y="2103120"/>
+            <a:ext cx="235458" cy="1908455"/>
+          </a:xfrm>
+          <a:prstGeom prst="rect">
+            <a:avLst/>
+          </a:prstGeom>
+          <a:solidFill>
+            <a:srgbClr val="B84C65">
+              <a:alpha val="45000"/>
+            </a:srgbClr>
+          </a:solidFill>
+          <a:ln/>
+        </p:spPr>
+      </p:sp>
+      <p:sp>
+        <p:nvSpPr>
+          <p:cNvPr id="33" name="Shape 31"/>
+          <p:cNvSpPr/>
+          <p:nvPr/>
+        </p:nvSpPr>
+        <p:spPr>
+          <a:xfrm>
+            <a:off x="6080760" y="2103120"/>
+            <a:ext cx="235458" cy="1908455"/>
+          </a:xfrm>
+          <a:prstGeom prst="rect">
+            <a:avLst/>
+          </a:prstGeom>
+          <a:solidFill>
+            <a:srgbClr val="B84C65">
+              <a:alpha val="45000"/>
+            </a:srgbClr>
+          </a:solidFill>
+          <a:ln/>
+        </p:spPr>
+      </p:sp>
+      <p:sp>
+        <p:nvSpPr>
+          <p:cNvPr id="34" name="Shape 32"/>
+          <p:cNvSpPr/>
+          <p:nvPr/>
+        </p:nvSpPr>
+        <p:spPr>
+          <a:xfrm>
+            <a:off x="6307074" y="2103120"/>
+            <a:ext cx="235458" cy="1908455"/>
+          </a:xfrm>
+          <a:prstGeom prst="rect">
+            <a:avLst/>
+          </a:prstGeom>
+          <a:solidFill>
+            <a:srgbClr val="B84C65">
+              <a:alpha val="45000"/>
+            </a:srgbClr>
+          </a:solidFill>
+          <a:ln/>
+        </p:spPr>
+      </p:sp>
+      <p:sp>
+        <p:nvSpPr>
+          <p:cNvPr id="35" name="Shape 33"/>
+          <p:cNvSpPr/>
+          <p:nvPr/>
+        </p:nvSpPr>
+        <p:spPr>
+          <a:xfrm>
+            <a:off x="6533388" y="2103120"/>
+            <a:ext cx="235458" cy="1908455"/>
+          </a:xfrm>
+          <a:prstGeom prst="rect">
+            <a:avLst/>
+          </a:prstGeom>
+          <a:solidFill>
+            <a:srgbClr val="B84C65">
+              <a:alpha val="45000"/>
+            </a:srgbClr>
+          </a:solidFill>
+          <a:ln/>
+        </p:spPr>
+      </p:sp>
+      <p:sp>
+        <p:nvSpPr>
+          <p:cNvPr id="36" name="Shape 34"/>
+          <p:cNvSpPr/>
+          <p:nvPr/>
+        </p:nvSpPr>
+        <p:spPr>
+          <a:xfrm>
+            <a:off x="6759702" y="2103120"/>
+            <a:ext cx="235458" cy="1908455"/>
+          </a:xfrm>
+          <a:prstGeom prst="rect">
+            <a:avLst/>
+          </a:prstGeom>
+          <a:solidFill>
+            <a:srgbClr val="B84C65">
+              <a:alpha val="45000"/>
+            </a:srgbClr>
+          </a:solidFill>
+          <a:ln/>
+        </p:spPr>
+      </p:sp>
+      <p:sp>
+        <p:nvSpPr>
+          <p:cNvPr id="37" name="Shape 35"/>
+          <p:cNvSpPr/>
+          <p:nvPr/>
+        </p:nvSpPr>
+        <p:spPr>
+          <a:xfrm>
+            <a:off x="6986016" y="2103120"/>
+            <a:ext cx="235458" cy="1908455"/>
+          </a:xfrm>
+          <a:prstGeom prst="rect">
+            <a:avLst/>
+          </a:prstGeom>
+          <a:solidFill>
+            <a:srgbClr val="B84C65">
+              <a:alpha val="45000"/>
+            </a:srgbClr>
+          </a:solidFill>
+          <a:ln/>
+        </p:spPr>
+      </p:sp>
+      <p:sp>
+        <p:nvSpPr>
+          <p:cNvPr id="38" name="Shape 36"/>
+          <p:cNvSpPr/>
+          <p:nvPr/>
+        </p:nvSpPr>
+        <p:spPr>
+          <a:xfrm>
+            <a:off x="7212330" y="2103120"/>
+            <a:ext cx="235458" cy="1908455"/>
+          </a:xfrm>
+          <a:prstGeom prst="rect">
+            <a:avLst/>
+          </a:prstGeom>
+          <a:solidFill>
+            <a:srgbClr val="B84C65">
+              <a:alpha val="45000"/>
+            </a:srgbClr>
+          </a:solidFill>
+          <a:ln/>
+        </p:spPr>
+      </p:sp>
+      <p:sp>
+        <p:nvSpPr>
+          <p:cNvPr id="39" name="Shape 37"/>
+          <p:cNvSpPr/>
+          <p:nvPr/>
+        </p:nvSpPr>
+        <p:spPr>
+          <a:xfrm>
+            <a:off x="7438644" y="2103120"/>
+            <a:ext cx="235458" cy="1908455"/>
+          </a:xfrm>
+          <a:prstGeom prst="rect">
+            <a:avLst/>
+          </a:prstGeom>
+          <a:solidFill>
+            <a:srgbClr val="B84C65">
+              <a:alpha val="45000"/>
+            </a:srgbClr>
+          </a:solidFill>
+          <a:ln/>
+        </p:spPr>
+      </p:sp>
+      <p:sp>
+        <p:nvSpPr>
+          <p:cNvPr id="40" name="Shape 38"/>
+          <p:cNvSpPr/>
+          <p:nvPr/>
+        </p:nvSpPr>
+        <p:spPr>
+          <a:xfrm>
+            <a:off x="7664958" y="2103120"/>
+            <a:ext cx="235458" cy="1908455"/>
+          </a:xfrm>
+          <a:prstGeom prst="rect">
+            <a:avLst/>
+          </a:prstGeom>
+          <a:solidFill>
+            <a:srgbClr val="B84C65">
+              <a:alpha val="45000"/>
+            </a:srgbClr>
+          </a:solidFill>
+          <a:ln/>
+        </p:spPr>
+      </p:sp>
+      <p:sp>
+        <p:nvSpPr>
+          <p:cNvPr id="41" name="Shape 39"/>
+          <p:cNvSpPr/>
+          <p:nvPr/>
+        </p:nvSpPr>
+        <p:spPr>
+          <a:xfrm>
+            <a:off x="7891272" y="2103120"/>
+            <a:ext cx="235458" cy="1908455"/>
+          </a:xfrm>
+          <a:prstGeom prst="rect">
+            <a:avLst/>
+          </a:prstGeom>
+          <a:solidFill>
+            <a:srgbClr val="B84C65">
+              <a:alpha val="45000"/>
+            </a:srgbClr>
+          </a:solidFill>
+          <a:ln/>
+        </p:spPr>
+      </p:sp>
+      <p:sp>
+        <p:nvSpPr>
+          <p:cNvPr id="42" name="Shape 40"/>
+          <p:cNvSpPr/>
+          <p:nvPr/>
+        </p:nvSpPr>
+        <p:spPr>
+          <a:xfrm>
+            <a:off x="8117586" y="2103120"/>
+            <a:ext cx="235458" cy="1908455"/>
+          </a:xfrm>
+          <a:prstGeom prst="rect">
+            <a:avLst/>
+          </a:prstGeom>
+          <a:solidFill>
+            <a:srgbClr val="B84C65">
+              <a:alpha val="45000"/>
+            </a:srgbClr>
+          </a:solidFill>
+          <a:ln/>
+        </p:spPr>
+      </p:sp>
+      <p:sp>
+        <p:nvSpPr>
+          <p:cNvPr id="43" name="Shape 41"/>
+          <p:cNvSpPr/>
+          <p:nvPr/>
+        </p:nvSpPr>
+        <p:spPr>
+          <a:xfrm>
+            <a:off x="8343900" y="2103120"/>
+            <a:ext cx="235458" cy="1908455"/>
+          </a:xfrm>
+          <a:prstGeom prst="rect">
+            <a:avLst/>
+          </a:prstGeom>
+          <a:solidFill>
+            <a:srgbClr val="B84C65">
+              <a:alpha val="45000"/>
+            </a:srgbClr>
+          </a:solidFill>
+          <a:ln/>
+        </p:spPr>
+      </p:sp>
+      <p:sp>
+        <p:nvSpPr>
+          <p:cNvPr id="44" name="Shape 42"/>
+          <p:cNvSpPr/>
+          <p:nvPr/>
+        </p:nvSpPr>
+        <p:spPr>
+          <a:xfrm>
+            <a:off x="8570214" y="2103120"/>
+            <a:ext cx="235458" cy="1908455"/>
+          </a:xfrm>
+          <a:prstGeom prst="rect">
+            <a:avLst/>
+          </a:prstGeom>
+          <a:solidFill>
+            <a:srgbClr val="B84C65">
+              <a:alpha val="45000"/>
+            </a:srgbClr>
+          </a:solidFill>
+          <a:ln/>
+        </p:spPr>
+      </p:sp>
+      <p:sp>
+        <p:nvSpPr>
+          <p:cNvPr id="45" name="Shape 43"/>
+          <p:cNvSpPr/>
+          <p:nvPr/>
+        </p:nvSpPr>
+        <p:spPr>
+          <a:xfrm>
+            <a:off x="8796528" y="2103120"/>
+            <a:ext cx="235458" cy="1908455"/>
+          </a:xfrm>
+          <a:prstGeom prst="rect">
+            <a:avLst/>
+          </a:prstGeom>
+          <a:solidFill>
+            <a:srgbClr val="B84C65">
+              <a:alpha val="45000"/>
+            </a:srgbClr>
+          </a:solidFill>
+          <a:ln/>
+        </p:spPr>
+      </p:sp>
+      <p:sp>
+        <p:nvSpPr>
+          <p:cNvPr id="46" name="Shape 44"/>
+          <p:cNvSpPr/>
+          <p:nvPr/>
+        </p:nvSpPr>
+        <p:spPr>
+          <a:xfrm>
+            <a:off x="9022842" y="2103120"/>
+            <a:ext cx="235458" cy="1908455"/>
+          </a:xfrm>
+          <a:prstGeom prst="rect">
+            <a:avLst/>
+          </a:prstGeom>
+          <a:solidFill>
+            <a:srgbClr val="B84C65">
+              <a:alpha val="45000"/>
+            </a:srgbClr>
+          </a:solidFill>
+          <a:ln/>
+        </p:spPr>
+      </p:sp>
+      <p:sp>
+        <p:nvSpPr>
+          <p:cNvPr id="47" name="Shape 45"/>
+          <p:cNvSpPr/>
+          <p:nvPr/>
+        </p:nvSpPr>
+        <p:spPr>
+          <a:xfrm>
+            <a:off x="9249156" y="2103120"/>
+            <a:ext cx="235458" cy="1908455"/>
+          </a:xfrm>
+          <a:prstGeom prst="rect">
+            <a:avLst/>
+          </a:prstGeom>
+          <a:solidFill>
+            <a:srgbClr val="B84C65">
+              <a:alpha val="45000"/>
+            </a:srgbClr>
+          </a:solidFill>
+          <a:ln/>
+        </p:spPr>
+      </p:sp>
+      <p:sp>
+        <p:nvSpPr>
+          <p:cNvPr id="48" name="Shape 46"/>
+          <p:cNvSpPr/>
+          <p:nvPr/>
+        </p:nvSpPr>
+        <p:spPr>
+          <a:xfrm>
+            <a:off x="9475470" y="2103120"/>
+            <a:ext cx="235458" cy="1908455"/>
+          </a:xfrm>
+          <a:prstGeom prst="rect">
+            <a:avLst/>
+          </a:prstGeom>
+          <a:solidFill>
+            <a:srgbClr val="B84C65">
+              <a:alpha val="45000"/>
+            </a:srgbClr>
+          </a:solidFill>
+          <a:ln/>
+        </p:spPr>
+      </p:sp>
+      <p:sp>
+        <p:nvSpPr>
+          <p:cNvPr id="49" name="Shape 47"/>
+          <p:cNvSpPr/>
+          <p:nvPr/>
+        </p:nvSpPr>
+        <p:spPr>
+          <a:xfrm>
+            <a:off x="9701784" y="2103120"/>
+            <a:ext cx="235458" cy="1908455"/>
+          </a:xfrm>
+          <a:prstGeom prst="rect">
+            <a:avLst/>
+          </a:prstGeom>
+          <a:solidFill>
+            <a:srgbClr val="B84C65">
+              <a:alpha val="45000"/>
+            </a:srgbClr>
+          </a:solidFill>
+          <a:ln/>
+        </p:spPr>
+      </p:sp>
+      <p:sp>
+        <p:nvSpPr>
+          <p:cNvPr id="50" name="Shape 48"/>
+          <p:cNvSpPr/>
+          <p:nvPr/>
+        </p:nvSpPr>
+        <p:spPr>
+          <a:xfrm>
+            <a:off x="9928098" y="2103120"/>
+            <a:ext cx="235458" cy="1908455"/>
+          </a:xfrm>
+          <a:prstGeom prst="rect">
+            <a:avLst/>
+          </a:prstGeom>
+          <a:solidFill>
+            <a:srgbClr val="B84C65">
+              <a:alpha val="45000"/>
+            </a:srgbClr>
+          </a:solidFill>
+          <a:ln/>
+        </p:spPr>
+      </p:sp>
+      <p:sp>
+        <p:nvSpPr>
+          <p:cNvPr id="51" name="Shape 49"/>
+          <p:cNvSpPr/>
+          <p:nvPr/>
+        </p:nvSpPr>
+        <p:spPr>
+          <a:xfrm>
+            <a:off x="10154412" y="2103120"/>
+            <a:ext cx="235458" cy="1908455"/>
+          </a:xfrm>
+          <a:prstGeom prst="rect">
+            <a:avLst/>
+          </a:prstGeom>
+          <a:solidFill>
+            <a:srgbClr val="B84C65">
+              <a:alpha val="45000"/>
+            </a:srgbClr>
+          </a:solidFill>
+          <a:ln/>
+        </p:spPr>
+      </p:sp>
+      <p:sp>
+        <p:nvSpPr>
+          <p:cNvPr id="52" name="Shape 50"/>
+          <p:cNvSpPr/>
+          <p:nvPr/>
+        </p:nvSpPr>
+        <p:spPr>
+          <a:xfrm>
+            <a:off x="10380726" y="2103120"/>
+            <a:ext cx="235458" cy="1908455"/>
+          </a:xfrm>
+          <a:prstGeom prst="rect">
+            <a:avLst/>
+          </a:prstGeom>
+          <a:solidFill>
+            <a:srgbClr val="B84C65">
+              <a:alpha val="45000"/>
+            </a:srgbClr>
+          </a:solidFill>
+          <a:ln/>
+        </p:spPr>
+      </p:sp>
+      <p:sp>
+        <p:nvSpPr>
+          <p:cNvPr id="53" name="Shape 51"/>
+          <p:cNvSpPr/>
+          <p:nvPr/>
+        </p:nvSpPr>
+        <p:spPr>
+          <a:xfrm>
+            <a:off x="1554480" y="4011575"/>
+            <a:ext cx="235458" cy="923784"/>
+          </a:xfrm>
+          <a:prstGeom prst="rect">
+            <a:avLst/>
+          </a:prstGeom>
+          <a:solidFill>
+            <a:srgbClr val="8A7968">
+              <a:alpha val="45000"/>
+            </a:srgbClr>
+          </a:solidFill>
+          <a:ln/>
+        </p:spPr>
+      </p:sp>
+      <p:sp>
+        <p:nvSpPr>
+          <p:cNvPr id="54" name="Shape 52"/>
+          <p:cNvSpPr/>
+          <p:nvPr/>
+        </p:nvSpPr>
+        <p:spPr>
+          <a:xfrm>
+            <a:off x="1780794" y="4011575"/>
+            <a:ext cx="235458" cy="923784"/>
+          </a:xfrm>
+          <a:prstGeom prst="rect">
+            <a:avLst/>
+          </a:prstGeom>
+          <a:solidFill>
+            <a:srgbClr val="8A7968">
+              <a:alpha val="45000"/>
+            </a:srgbClr>
+          </a:solidFill>
+          <a:ln/>
+        </p:spPr>
+      </p:sp>
+      <p:sp>
+        <p:nvSpPr>
+          <p:cNvPr id="55" name="Shape 53"/>
+          <p:cNvSpPr/>
+          <p:nvPr/>
+        </p:nvSpPr>
+        <p:spPr>
+          <a:xfrm>
+            <a:off x="2007108" y="4011575"/>
+            <a:ext cx="235458" cy="923784"/>
+          </a:xfrm>
+          <a:prstGeom prst="rect">
+            <a:avLst/>
+          </a:prstGeom>
+          <a:solidFill>
+            <a:srgbClr val="8A7968">
+              <a:alpha val="45000"/>
+            </a:srgbClr>
+          </a:solidFill>
+          <a:ln/>
+        </p:spPr>
+      </p:sp>
+      <p:sp>
+        <p:nvSpPr>
+          <p:cNvPr id="56" name="Shape 54"/>
+          <p:cNvSpPr/>
+          <p:nvPr/>
+        </p:nvSpPr>
+        <p:spPr>
+          <a:xfrm>
+            <a:off x="2233422" y="4011575"/>
+            <a:ext cx="235458" cy="923784"/>
+          </a:xfrm>
+          <a:prstGeom prst="rect">
+            <a:avLst/>
+          </a:prstGeom>
+          <a:solidFill>
+            <a:srgbClr val="8A7968">
+              <a:alpha val="45000"/>
+            </a:srgbClr>
+          </a:solidFill>
+          <a:ln/>
+        </p:spPr>
+      </p:sp>
+      <p:sp>
+        <p:nvSpPr>
+          <p:cNvPr id="57" name="Shape 55"/>
+          <p:cNvSpPr/>
+          <p:nvPr/>
+        </p:nvSpPr>
+        <p:spPr>
+          <a:xfrm>
+            <a:off x="2459736" y="4011575"/>
+            <a:ext cx="235458" cy="923784"/>
+          </a:xfrm>
+          <a:prstGeom prst="rect">
+            <a:avLst/>
+          </a:prstGeom>
+          <a:solidFill>
+            <a:srgbClr val="8A7968">
+              <a:alpha val="45000"/>
+            </a:srgbClr>
+          </a:solidFill>
+          <a:ln/>
+        </p:spPr>
+      </p:sp>
+      <p:sp>
+        <p:nvSpPr>
+          <p:cNvPr id="58" name="Shape 56"/>
+          <p:cNvSpPr/>
+          <p:nvPr/>
+        </p:nvSpPr>
+        <p:spPr>
+          <a:xfrm>
+            <a:off x="2686050" y="4011575"/>
+            <a:ext cx="235458" cy="923784"/>
+          </a:xfrm>
+          <a:prstGeom prst="rect">
+            <a:avLst/>
+          </a:prstGeom>
+          <a:solidFill>
+            <a:srgbClr val="8A7968">
+              <a:alpha val="45000"/>
+            </a:srgbClr>
+          </a:solidFill>
+          <a:ln/>
+        </p:spPr>
+      </p:sp>
+      <p:sp>
+        <p:nvSpPr>
+          <p:cNvPr id="59" name="Shape 57"/>
+          <p:cNvSpPr/>
+          <p:nvPr/>
+        </p:nvSpPr>
+        <p:spPr>
+          <a:xfrm>
+            <a:off x="2912364" y="4011575"/>
+            <a:ext cx="235458" cy="923784"/>
+          </a:xfrm>
+          <a:prstGeom prst="rect">
+            <a:avLst/>
+          </a:prstGeom>
+          <a:solidFill>
+            <a:srgbClr val="8A7968">
+              <a:alpha val="45000"/>
+            </a:srgbClr>
+          </a:solidFill>
+          <a:ln/>
+        </p:spPr>
+      </p:sp>
+      <p:sp>
+        <p:nvSpPr>
+          <p:cNvPr id="60" name="Shape 58"/>
+          <p:cNvSpPr/>
+          <p:nvPr/>
+        </p:nvSpPr>
+        <p:spPr>
+          <a:xfrm>
+            <a:off x="3138678" y="4011575"/>
+            <a:ext cx="235458" cy="923784"/>
+          </a:xfrm>
+          <a:prstGeom prst="rect">
+            <a:avLst/>
+          </a:prstGeom>
+          <a:solidFill>
+            <a:srgbClr val="8A7968">
+              <a:alpha val="45000"/>
+            </a:srgbClr>
+          </a:solidFill>
+          <a:ln/>
+        </p:spPr>
+      </p:sp>
+      <p:sp>
+        <p:nvSpPr>
+          <p:cNvPr id="61" name="Shape 59"/>
+          <p:cNvSpPr/>
+          <p:nvPr/>
+        </p:nvSpPr>
+        <p:spPr>
+          <a:xfrm>
+            <a:off x="3364992" y="4011575"/>
+            <a:ext cx="235458" cy="923784"/>
+          </a:xfrm>
+          <a:prstGeom prst="rect">
+            <a:avLst/>
+          </a:prstGeom>
+          <a:solidFill>
+            <a:srgbClr val="8A7968">
+              <a:alpha val="45000"/>
+            </a:srgbClr>
+          </a:solidFill>
+          <a:ln/>
+        </p:spPr>
+      </p:sp>
+      <p:sp>
+        <p:nvSpPr>
+          <p:cNvPr id="62" name="Shape 60"/>
+          <p:cNvSpPr/>
+          <p:nvPr/>
+        </p:nvSpPr>
+        <p:spPr>
+          <a:xfrm>
+            <a:off x="3591306" y="4011575"/>
+            <a:ext cx="235458" cy="923784"/>
+          </a:xfrm>
+          <a:prstGeom prst="rect">
+            <a:avLst/>
+          </a:prstGeom>
+          <a:solidFill>
+            <a:srgbClr val="8A7968">
+              <a:alpha val="45000"/>
+            </a:srgbClr>
+          </a:solidFill>
+          <a:ln/>
+        </p:spPr>
+      </p:sp>
+      <p:sp>
+        <p:nvSpPr>
+          <p:cNvPr id="63" name="Shape 61"/>
+          <p:cNvSpPr/>
+          <p:nvPr/>
+        </p:nvSpPr>
+        <p:spPr>
+          <a:xfrm>
+            <a:off x="3817620" y="4011575"/>
+            <a:ext cx="235458" cy="923784"/>
+          </a:xfrm>
+          <a:prstGeom prst="rect">
+            <a:avLst/>
+          </a:prstGeom>
+          <a:solidFill>
+            <a:srgbClr val="8A7968">
+              <a:alpha val="45000"/>
+            </a:srgbClr>
+          </a:solidFill>
+          <a:ln/>
+        </p:spPr>
+      </p:sp>
+      <p:sp>
+        <p:nvSpPr>
+          <p:cNvPr id="64" name="Shape 62"/>
+          <p:cNvSpPr/>
+          <p:nvPr/>
+        </p:nvSpPr>
+        <p:spPr>
+          <a:xfrm>
+            <a:off x="4043934" y="4011575"/>
+            <a:ext cx="235458" cy="923784"/>
+          </a:xfrm>
+          <a:prstGeom prst="rect">
+            <a:avLst/>
+          </a:prstGeom>
+          <a:solidFill>
+            <a:srgbClr val="8A7968">
+              <a:alpha val="45000"/>
+            </a:srgbClr>
+          </a:solidFill>
+          <a:ln/>
+        </p:spPr>
+      </p:sp>
+      <p:sp>
+        <p:nvSpPr>
+          <p:cNvPr id="65" name="Shape 63"/>
+          <p:cNvSpPr/>
+          <p:nvPr/>
+        </p:nvSpPr>
+        <p:spPr>
+          <a:xfrm>
+            <a:off x="4270248" y="4011575"/>
+            <a:ext cx="235458" cy="923784"/>
+          </a:xfrm>
+          <a:prstGeom prst="rect">
+            <a:avLst/>
+          </a:prstGeom>
+          <a:solidFill>
+            <a:srgbClr val="8A7968">
+              <a:alpha val="45000"/>
+            </a:srgbClr>
+          </a:solidFill>
+          <a:ln/>
+        </p:spPr>
+      </p:sp>
+      <p:sp>
+        <p:nvSpPr>
+          <p:cNvPr id="66" name="Shape 64"/>
+          <p:cNvSpPr/>
+          <p:nvPr/>
+        </p:nvSpPr>
+        <p:spPr>
+          <a:xfrm>
+            <a:off x="4496562" y="4011575"/>
+            <a:ext cx="235458" cy="923784"/>
+          </a:xfrm>
+          <a:prstGeom prst="rect">
+            <a:avLst/>
+          </a:prstGeom>
+          <a:solidFill>
+            <a:srgbClr val="8A7968">
+              <a:alpha val="45000"/>
+            </a:srgbClr>
+          </a:solidFill>
+          <a:ln/>
+        </p:spPr>
+      </p:sp>
+      <p:sp>
+        <p:nvSpPr>
+          <p:cNvPr id="67" name="Shape 65"/>
+          <p:cNvSpPr/>
+          <p:nvPr/>
+        </p:nvSpPr>
+        <p:spPr>
+          <a:xfrm>
+            <a:off x="4722876" y="4011575"/>
+            <a:ext cx="235458" cy="923784"/>
+          </a:xfrm>
+          <a:prstGeom prst="rect">
+            <a:avLst/>
+          </a:prstGeom>
+          <a:solidFill>
+            <a:srgbClr val="8A7968">
+              <a:alpha val="45000"/>
+            </a:srgbClr>
+          </a:solidFill>
+          <a:ln/>
+        </p:spPr>
+      </p:sp>
+      <p:sp>
+        <p:nvSpPr>
+          <p:cNvPr id="68" name="Shape 66"/>
+          <p:cNvSpPr/>
+          <p:nvPr/>
+        </p:nvSpPr>
+        <p:spPr>
+          <a:xfrm>
+            <a:off x="4949190" y="4011575"/>
+            <a:ext cx="235458" cy="923784"/>
+          </a:xfrm>
+          <a:prstGeom prst="rect">
+            <a:avLst/>
+          </a:prstGeom>
+          <a:solidFill>
+            <a:srgbClr val="8A7968">
+              <a:alpha val="45000"/>
+            </a:srgbClr>
+          </a:solidFill>
+          <a:ln/>
+        </p:spPr>
+      </p:sp>
+      <p:sp>
+        <p:nvSpPr>
+          <p:cNvPr id="69" name="Shape 67"/>
+          <p:cNvSpPr/>
+          <p:nvPr/>
+        </p:nvSpPr>
+        <p:spPr>
+          <a:xfrm>
+            <a:off x="5175504" y="4011575"/>
+            <a:ext cx="235458" cy="923784"/>
+          </a:xfrm>
+          <a:prstGeom prst="rect">
+            <a:avLst/>
+          </a:prstGeom>
+          <a:solidFill>
+            <a:srgbClr val="8A7968">
+              <a:alpha val="45000"/>
+            </a:srgbClr>
+          </a:solidFill>
+          <a:ln/>
+        </p:spPr>
+      </p:sp>
+      <p:sp>
+        <p:nvSpPr>
+          <p:cNvPr id="70" name="Shape 68"/>
+          <p:cNvSpPr/>
+          <p:nvPr/>
+        </p:nvSpPr>
+        <p:spPr>
+          <a:xfrm>
+            <a:off x="5401818" y="4011575"/>
+            <a:ext cx="235458" cy="923784"/>
+          </a:xfrm>
+          <a:prstGeom prst="rect">
+            <a:avLst/>
+          </a:prstGeom>
+          <a:solidFill>
+            <a:srgbClr val="8A7968">
+              <a:alpha val="45000"/>
+            </a:srgbClr>
+          </a:solidFill>
+          <a:ln/>
+        </p:spPr>
+      </p:sp>
+      <p:sp>
+        <p:nvSpPr>
+          <p:cNvPr id="71" name="Shape 69"/>
+          <p:cNvSpPr/>
+          <p:nvPr/>
+        </p:nvSpPr>
+        <p:spPr>
+          <a:xfrm>
+            <a:off x="5628132" y="4011575"/>
+            <a:ext cx="235458" cy="923784"/>
+          </a:xfrm>
+          <a:prstGeom prst="rect">
+            <a:avLst/>
+          </a:prstGeom>
+          <a:solidFill>
+            <a:srgbClr val="8A7968">
+              <a:alpha val="45000"/>
+            </a:srgbClr>
+          </a:solidFill>
+          <a:ln/>
+        </p:spPr>
+      </p:sp>
+      <p:sp>
+        <p:nvSpPr>
+          <p:cNvPr id="72" name="Shape 70"/>
+          <p:cNvSpPr/>
+          <p:nvPr/>
+        </p:nvSpPr>
+        <p:spPr>
+          <a:xfrm>
+            <a:off x="5854446" y="4011575"/>
+            <a:ext cx="235458" cy="923784"/>
+          </a:xfrm>
+          <a:prstGeom prst="rect">
+            <a:avLst/>
+          </a:prstGeom>
+          <a:solidFill>
+            <a:srgbClr val="8A7968">
+              <a:alpha val="45000"/>
+            </a:srgbClr>
+          </a:solidFill>
+          <a:ln/>
+        </p:spPr>
+      </p:sp>
+      <p:sp>
+        <p:nvSpPr>
+          <p:cNvPr id="73" name="Shape 71"/>
+          <p:cNvSpPr/>
+          <p:nvPr/>
+        </p:nvSpPr>
+        <p:spPr>
+          <a:xfrm>
+            <a:off x="6080760" y="4011575"/>
+            <a:ext cx="235458" cy="923784"/>
+          </a:xfrm>
+          <a:prstGeom prst="rect">
+            <a:avLst/>
+          </a:prstGeom>
+          <a:solidFill>
+            <a:srgbClr val="8A7968">
+              <a:alpha val="45000"/>
+            </a:srgbClr>
+          </a:solidFill>
+          <a:ln/>
+        </p:spPr>
+      </p:sp>
+      <p:sp>
+        <p:nvSpPr>
+          <p:cNvPr id="74" name="Shape 72"/>
+          <p:cNvSpPr/>
+          <p:nvPr/>
+        </p:nvSpPr>
+        <p:spPr>
+          <a:xfrm>
+            <a:off x="6307074" y="4011575"/>
+            <a:ext cx="235458" cy="923784"/>
+          </a:xfrm>
+          <a:prstGeom prst="rect">
+            <a:avLst/>
+          </a:prstGeom>
+          <a:solidFill>
+            <a:srgbClr val="8A7968">
+              <a:alpha val="45000"/>
+            </a:srgbClr>
+          </a:solidFill>
+          <a:ln/>
+        </p:spPr>
+      </p:sp>
+      <p:sp>
+        <p:nvSpPr>
+          <p:cNvPr id="75" name="Shape 73"/>
+          <p:cNvSpPr/>
+          <p:nvPr/>
+        </p:nvSpPr>
+        <p:spPr>
+          <a:xfrm>
+            <a:off x="6533388" y="4011575"/>
+            <a:ext cx="235458" cy="923784"/>
+          </a:xfrm>
+          <a:prstGeom prst="rect">
+            <a:avLst/>
+          </a:prstGeom>
+          <a:solidFill>
+            <a:srgbClr val="8A7968">
+              <a:alpha val="45000"/>
+            </a:srgbClr>
+          </a:solidFill>
+          <a:ln/>
+        </p:spPr>
+      </p:sp>
+      <p:sp>
+        <p:nvSpPr>
+          <p:cNvPr id="76" name="Shape 74"/>
+          <p:cNvSpPr/>
+          <p:nvPr/>
+        </p:nvSpPr>
+        <p:spPr>
+          <a:xfrm>
+            <a:off x="6759702" y="4011575"/>
+            <a:ext cx="235458" cy="923784"/>
+          </a:xfrm>
+          <a:prstGeom prst="rect">
+            <a:avLst/>
+          </a:prstGeom>
+          <a:solidFill>
+            <a:srgbClr val="8A7968">
+              <a:alpha val="45000"/>
+            </a:srgbClr>
+          </a:solidFill>
+          <a:ln/>
+        </p:spPr>
+      </p:sp>
+      <p:sp>
+        <p:nvSpPr>
+          <p:cNvPr id="77" name="Shape 75"/>
+          <p:cNvSpPr/>
+          <p:nvPr/>
+        </p:nvSpPr>
+        <p:spPr>
+          <a:xfrm>
+            <a:off x="6986016" y="4011575"/>
+            <a:ext cx="235458" cy="923784"/>
+          </a:xfrm>
+          <a:prstGeom prst="rect">
+            <a:avLst/>
+          </a:prstGeom>
+          <a:solidFill>
+            <a:srgbClr val="8A7968">
+              <a:alpha val="45000"/>
+            </a:srgbClr>
+          </a:solidFill>
+          <a:ln/>
+        </p:spPr>
+      </p:sp>
+      <p:sp>
+        <p:nvSpPr>
+          <p:cNvPr id="78" name="Shape 76"/>
+          <p:cNvSpPr/>
+          <p:nvPr/>
+        </p:nvSpPr>
+        <p:spPr>
+          <a:xfrm>
+            <a:off x="7212330" y="4011575"/>
+            <a:ext cx="235458" cy="923784"/>
+          </a:xfrm>
+          <a:prstGeom prst="rect">
+            <a:avLst/>
+          </a:prstGeom>
+          <a:solidFill>
+            <a:srgbClr val="8A7968">
+              <a:alpha val="45000"/>
+            </a:srgbClr>
+          </a:solidFill>
+          <a:ln/>
+        </p:spPr>
+      </p:sp>
+      <p:sp>
+        <p:nvSpPr>
+          <p:cNvPr id="79" name="Shape 77"/>
+          <p:cNvSpPr/>
+          <p:nvPr/>
+        </p:nvSpPr>
+        <p:spPr>
+          <a:xfrm>
+            <a:off x="7438644" y="4011575"/>
+            <a:ext cx="235458" cy="923784"/>
+          </a:xfrm>
+          <a:prstGeom prst="rect">
+            <a:avLst/>
+          </a:prstGeom>
+          <a:solidFill>
+            <a:srgbClr val="8A7968">
+              <a:alpha val="45000"/>
+            </a:srgbClr>
+          </a:solidFill>
+          <a:ln/>
+        </p:spPr>
+      </p:sp>
+      <p:sp>
+        <p:nvSpPr>
+          <p:cNvPr id="80" name="Shape 78"/>
+          <p:cNvSpPr/>
+          <p:nvPr/>
+        </p:nvSpPr>
+        <p:spPr>
+          <a:xfrm>
+            <a:off x="7664958" y="4011575"/>
+            <a:ext cx="235458" cy="923784"/>
+          </a:xfrm>
+          <a:prstGeom prst="rect">
+            <a:avLst/>
+          </a:prstGeom>
+          <a:solidFill>
+            <a:srgbClr val="8A7968">
+              <a:alpha val="45000"/>
+            </a:srgbClr>
+          </a:solidFill>
+          <a:ln/>
+        </p:spPr>
+      </p:sp>
+      <p:sp>
+        <p:nvSpPr>
+          <p:cNvPr id="81" name="Shape 79"/>
+          <p:cNvSpPr/>
+          <p:nvPr/>
+        </p:nvSpPr>
+        <p:spPr>
+          <a:xfrm>
+            <a:off x="7891272" y="4011575"/>
+            <a:ext cx="235458" cy="923784"/>
+          </a:xfrm>
+          <a:prstGeom prst="rect">
+            <a:avLst/>
+          </a:prstGeom>
+          <a:solidFill>
+            <a:srgbClr val="8A7968">
+              <a:alpha val="45000"/>
+            </a:srgbClr>
+          </a:solidFill>
+          <a:ln/>
+        </p:spPr>
+      </p:sp>
+      <p:sp>
+        <p:nvSpPr>
+          <p:cNvPr id="82" name="Shape 80"/>
+          <p:cNvSpPr/>
+          <p:nvPr/>
+        </p:nvSpPr>
+        <p:spPr>
+          <a:xfrm>
+            <a:off x="8117586" y="4011575"/>
+            <a:ext cx="235458" cy="923784"/>
+          </a:xfrm>
+          <a:prstGeom prst="rect">
+            <a:avLst/>
+          </a:prstGeom>
+          <a:solidFill>
+            <a:srgbClr val="8A7968">
+              <a:alpha val="45000"/>
+            </a:srgbClr>
+          </a:solidFill>
+          <a:ln/>
+        </p:spPr>
+      </p:sp>
+      <p:sp>
+        <p:nvSpPr>
+          <p:cNvPr id="83" name="Shape 81"/>
+          <p:cNvSpPr/>
+          <p:nvPr/>
+        </p:nvSpPr>
+        <p:spPr>
+          <a:xfrm>
+            <a:off x="8343900" y="4011575"/>
+            <a:ext cx="235458" cy="923784"/>
+          </a:xfrm>
+          <a:prstGeom prst="rect">
+            <a:avLst/>
+          </a:prstGeom>
+          <a:solidFill>
+            <a:srgbClr val="8A7968">
+              <a:alpha val="45000"/>
+            </a:srgbClr>
+          </a:solidFill>
+          <a:ln/>
+        </p:spPr>
+      </p:sp>
+      <p:sp>
+        <p:nvSpPr>
+          <p:cNvPr id="84" name="Shape 82"/>
+          <p:cNvSpPr/>
+          <p:nvPr/>
+        </p:nvSpPr>
+        <p:spPr>
+          <a:xfrm>
+            <a:off x="8570214" y="4011575"/>
+            <a:ext cx="235458" cy="923784"/>
+          </a:xfrm>
+          <a:prstGeom prst="rect">
+            <a:avLst/>
+          </a:prstGeom>
+          <a:solidFill>
+            <a:srgbClr val="8A7968">
+              <a:alpha val="45000"/>
+            </a:srgbClr>
+          </a:solidFill>
+          <a:ln/>
+        </p:spPr>
+      </p:sp>
+      <p:sp>
+        <p:nvSpPr>
+          <p:cNvPr id="85" name="Shape 83"/>
+          <p:cNvSpPr/>
+          <p:nvPr/>
+        </p:nvSpPr>
+        <p:spPr>
+          <a:xfrm>
+            <a:off x="8796528" y="4011575"/>
+            <a:ext cx="235458" cy="923784"/>
+          </a:xfrm>
+          <a:prstGeom prst="rect">
+            <a:avLst/>
+          </a:prstGeom>
+          <a:solidFill>
+            <a:srgbClr val="8A7968">
+              <a:alpha val="45000"/>
+            </a:srgbClr>
+          </a:solidFill>
+          <a:ln/>
+        </p:spPr>
+      </p:sp>
+      <p:sp>
+        <p:nvSpPr>
+          <p:cNvPr id="86" name="Shape 84"/>
+          <p:cNvSpPr/>
+          <p:nvPr/>
+        </p:nvSpPr>
+        <p:spPr>
+          <a:xfrm>
+            <a:off x="9022842" y="4011575"/>
+            <a:ext cx="235458" cy="923784"/>
+          </a:xfrm>
+          <a:prstGeom prst="rect">
+            <a:avLst/>
+          </a:prstGeom>
+          <a:solidFill>
+            <a:srgbClr val="8A7968">
+              <a:alpha val="45000"/>
+            </a:srgbClr>
+          </a:solidFill>
+          <a:ln/>
+        </p:spPr>
+      </p:sp>
+      <p:sp>
+        <p:nvSpPr>
+          <p:cNvPr id="87" name="Shape 85"/>
+          <p:cNvSpPr/>
+          <p:nvPr/>
+        </p:nvSpPr>
+        <p:spPr>
+          <a:xfrm>
+            <a:off x="9249156" y="4011575"/>
+            <a:ext cx="235458" cy="923784"/>
+          </a:xfrm>
+          <a:prstGeom prst="rect">
+            <a:avLst/>
+          </a:prstGeom>
+          <a:solidFill>
+            <a:srgbClr val="8A7968">
+              <a:alpha val="45000"/>
+            </a:srgbClr>
+          </a:solidFill>
+          <a:ln/>
+        </p:spPr>
+      </p:sp>
+      <p:sp>
+        <p:nvSpPr>
+          <p:cNvPr id="88" name="Shape 86"/>
+          <p:cNvSpPr/>
+          <p:nvPr/>
+        </p:nvSpPr>
+        <p:spPr>
+          <a:xfrm>
+            <a:off x="9475470" y="4011575"/>
+            <a:ext cx="235458" cy="923784"/>
+          </a:xfrm>
+          <a:prstGeom prst="rect">
+            <a:avLst/>
+          </a:prstGeom>
+          <a:solidFill>
+            <a:srgbClr val="8A7968">
+              <a:alpha val="45000"/>
+            </a:srgbClr>
+          </a:solidFill>
+          <a:ln/>
+        </p:spPr>
+      </p:sp>
+      <p:sp>
+        <p:nvSpPr>
+          <p:cNvPr id="89" name="Shape 87"/>
+          <p:cNvSpPr/>
+          <p:nvPr/>
+        </p:nvSpPr>
+        <p:spPr>
+          <a:xfrm>
+            <a:off x="9701784" y="4011575"/>
+            <a:ext cx="235458" cy="923784"/>
+          </a:xfrm>
+          <a:prstGeom prst="rect">
+            <a:avLst/>
+          </a:prstGeom>
+          <a:solidFill>
+            <a:srgbClr val="8A7968">
+              <a:alpha val="45000"/>
+            </a:srgbClr>
+          </a:solidFill>
+          <a:ln/>
+        </p:spPr>
+      </p:sp>
+      <p:sp>
+        <p:nvSpPr>
+          <p:cNvPr id="90" name="Shape 88"/>
+          <p:cNvSpPr/>
+          <p:nvPr/>
+        </p:nvSpPr>
+        <p:spPr>
+          <a:xfrm>
+            <a:off x="9928098" y="4011575"/>
+            <a:ext cx="235458" cy="923784"/>
+          </a:xfrm>
+          <a:prstGeom prst="rect">
+            <a:avLst/>
+          </a:prstGeom>
+          <a:solidFill>
+            <a:srgbClr val="8A7968">
+              <a:alpha val="45000"/>
+            </a:srgbClr>
+          </a:solidFill>
+          <a:ln/>
+        </p:spPr>
+      </p:sp>
+      <p:sp>
+        <p:nvSpPr>
+          <p:cNvPr id="91" name="Shape 89"/>
+          <p:cNvSpPr/>
+          <p:nvPr/>
+        </p:nvSpPr>
+        <p:spPr>
+          <a:xfrm>
+            <a:off x="10154412" y="4011575"/>
+            <a:ext cx="235458" cy="923784"/>
+          </a:xfrm>
+          <a:prstGeom prst="rect">
+            <a:avLst/>
+          </a:prstGeom>
+          <a:solidFill>
+            <a:srgbClr val="8A7968">
+              <a:alpha val="45000"/>
+            </a:srgbClr>
+          </a:solidFill>
+          <a:ln/>
+        </p:spPr>
+      </p:sp>
+      <p:sp>
+        <p:nvSpPr>
+          <p:cNvPr id="92" name="Shape 90"/>
+          <p:cNvSpPr/>
+          <p:nvPr/>
+        </p:nvSpPr>
+        <p:spPr>
+          <a:xfrm>
+            <a:off x="10380726" y="4011575"/>
+            <a:ext cx="235458" cy="923784"/>
+          </a:xfrm>
+          <a:prstGeom prst="rect">
+            <a:avLst/>
+          </a:prstGeom>
+          <a:solidFill>
+            <a:srgbClr val="8A7968">
+              <a:alpha val="45000"/>
+            </a:srgbClr>
+          </a:solidFill>
+          <a:ln/>
+        </p:spPr>
+      </p:sp>
+      <p:sp>
+        <p:nvSpPr>
+          <p:cNvPr id="93" name="Shape 91"/>
+          <p:cNvSpPr/>
+          <p:nvPr/>
+        </p:nvSpPr>
+        <p:spPr>
+          <a:xfrm>
+            <a:off x="1554480" y="4935359"/>
+            <a:ext cx="235458" cy="1008241"/>
+          </a:xfrm>
+          <a:prstGeom prst="rect">
+            <a:avLst/>
+          </a:prstGeom>
+          <a:solidFill>
+            <a:srgbClr val="2D5F7C">
+              <a:alpha val="45000"/>
+            </a:srgbClr>
+          </a:solidFill>
+          <a:ln/>
+        </p:spPr>
+      </p:sp>
+      <p:sp>
+        <p:nvSpPr>
+          <p:cNvPr id="94" name="Shape 92"/>
+          <p:cNvSpPr/>
+          <p:nvPr/>
+        </p:nvSpPr>
+        <p:spPr>
+          <a:xfrm>
+            <a:off x="1780794" y="4935359"/>
+            <a:ext cx="235458" cy="1008241"/>
+          </a:xfrm>
+          <a:prstGeom prst="rect">
+            <a:avLst/>
+          </a:prstGeom>
+          <a:solidFill>
+            <a:srgbClr val="2D5F7C">
+              <a:alpha val="45000"/>
+            </a:srgbClr>
+          </a:solidFill>
+          <a:ln/>
+        </p:spPr>
+      </p:sp>
+      <p:sp>
+        <p:nvSpPr>
+          <p:cNvPr id="95" name="Shape 93"/>
+          <p:cNvSpPr/>
+          <p:nvPr/>
+        </p:nvSpPr>
+        <p:spPr>
+          <a:xfrm>
+            <a:off x="2007108" y="4935359"/>
+            <a:ext cx="235458" cy="1008241"/>
+          </a:xfrm>
+          <a:prstGeom prst="rect">
+            <a:avLst/>
+          </a:prstGeom>
+          <a:solidFill>
+            <a:srgbClr val="2D5F7C">
+              <a:alpha val="45000"/>
+            </a:srgbClr>
+          </a:solidFill>
+          <a:ln/>
+        </p:spPr>
+      </p:sp>
+      <p:sp>
+        <p:nvSpPr>
+          <p:cNvPr id="96" name="Shape 94"/>
+          <p:cNvSpPr/>
+          <p:nvPr/>
+        </p:nvSpPr>
+        <p:spPr>
+          <a:xfrm>
+            <a:off x="2233422" y="4935359"/>
+            <a:ext cx="235458" cy="1008241"/>
+          </a:xfrm>
+          <a:prstGeom prst="rect">
+            <a:avLst/>
+          </a:prstGeom>
+          <a:solidFill>
+            <a:srgbClr val="2D5F7C">
+              <a:alpha val="45000"/>
+            </a:srgbClr>
+          </a:solidFill>
+          <a:ln/>
+        </p:spPr>
+      </p:sp>
+      <p:sp>
+        <p:nvSpPr>
+          <p:cNvPr id="97" name="Shape 95"/>
+          <p:cNvSpPr/>
+          <p:nvPr/>
+        </p:nvSpPr>
+        <p:spPr>
+          <a:xfrm>
+            <a:off x="2459736" y="4935359"/>
+            <a:ext cx="235458" cy="1008241"/>
+          </a:xfrm>
+          <a:prstGeom prst="rect">
+            <a:avLst/>
+          </a:prstGeom>
+          <a:solidFill>
+            <a:srgbClr val="2D5F7C">
+              <a:alpha val="45000"/>
+            </a:srgbClr>
+          </a:solidFill>
+          <a:ln/>
+        </p:spPr>
+      </p:sp>
+      <p:sp>
+        <p:nvSpPr>
+          <p:cNvPr id="98" name="Shape 96"/>
+          <p:cNvSpPr/>
+          <p:nvPr/>
+        </p:nvSpPr>
+        <p:spPr>
+          <a:xfrm>
+            <a:off x="2686050" y="4935359"/>
+            <a:ext cx="235458" cy="1008241"/>
+          </a:xfrm>
+          <a:prstGeom prst="rect">
+            <a:avLst/>
+          </a:prstGeom>
+          <a:solidFill>
+            <a:srgbClr val="2D5F7C">
+              <a:alpha val="45000"/>
+            </a:srgbClr>
+          </a:solidFill>
+          <a:ln/>
+        </p:spPr>
+      </p:sp>
+      <p:sp>
+        <p:nvSpPr>
+          <p:cNvPr id="99" name="Shape 97"/>
+          <p:cNvSpPr/>
+          <p:nvPr/>
+        </p:nvSpPr>
+        <p:spPr>
+          <a:xfrm>
+            <a:off x="2912364" y="4935359"/>
+            <a:ext cx="235458" cy="1008241"/>
+          </a:xfrm>
+          <a:prstGeom prst="rect">
+            <a:avLst/>
+          </a:prstGeom>
+          <a:solidFill>
+            <a:srgbClr val="2D5F7C">
+              <a:alpha val="45000"/>
+            </a:srgbClr>
+          </a:solidFill>
+          <a:ln/>
+        </p:spPr>
+      </p:sp>
+      <p:sp>
+        <p:nvSpPr>
+          <p:cNvPr id="100" name="Shape 98"/>
+          <p:cNvSpPr/>
+          <p:nvPr/>
+        </p:nvSpPr>
+        <p:spPr>
+          <a:xfrm>
+            <a:off x="3138678" y="4935359"/>
+            <a:ext cx="235458" cy="1008241"/>
+          </a:xfrm>
+          <a:prstGeom prst="rect">
+            <a:avLst/>
+          </a:prstGeom>
+          <a:solidFill>
+            <a:srgbClr val="2D5F7C">
+              <a:alpha val="45000"/>
+            </a:srgbClr>
+          </a:solidFill>
+          <a:ln/>
+        </p:spPr>
+      </p:sp>
+      <p:sp>
+        <p:nvSpPr>
+          <p:cNvPr id="101" name="Shape 99"/>
+          <p:cNvSpPr/>
+          <p:nvPr/>
+        </p:nvSpPr>
+        <p:spPr>
+          <a:xfrm>
+            <a:off x="3364992" y="4935359"/>
+            <a:ext cx="235458" cy="1008241"/>
+          </a:xfrm>
+          <a:prstGeom prst="rect">
+            <a:avLst/>
+          </a:prstGeom>
+          <a:solidFill>
+            <a:srgbClr val="2D5F7C">
+              <a:alpha val="45000"/>
+            </a:srgbClr>
+          </a:solidFill>
+          <a:ln/>
+        </p:spPr>
+      </p:sp>
+      <p:sp>
+        <p:nvSpPr>
+          <p:cNvPr id="102" name="Shape 100"/>
+          <p:cNvSpPr/>
+          <p:nvPr/>
+        </p:nvSpPr>
+        <p:spPr>
+          <a:xfrm>
+            <a:off x="3591306" y="4935359"/>
+            <a:ext cx="235458" cy="1008241"/>
+          </a:xfrm>
+          <a:prstGeom prst="rect">
+            <a:avLst/>
+          </a:prstGeom>
+          <a:solidFill>
+            <a:srgbClr val="2D5F7C">
+              <a:alpha val="45000"/>
+            </a:srgbClr>
+          </a:solidFill>
+          <a:ln/>
+        </p:spPr>
+      </p:sp>
+      <p:sp>
+        <p:nvSpPr>
+          <p:cNvPr id="103" name="Shape 101"/>
+          <p:cNvSpPr/>
+          <p:nvPr/>
+        </p:nvSpPr>
+        <p:spPr>
+          <a:xfrm>
+            <a:off x="3817620" y="4935359"/>
+            <a:ext cx="235458" cy="1008241"/>
+          </a:xfrm>
+          <a:prstGeom prst="rect">
+            <a:avLst/>
+          </a:prstGeom>
+          <a:solidFill>
+            <a:srgbClr val="2D5F7C">
+              <a:alpha val="45000"/>
+            </a:srgbClr>
+          </a:solidFill>
+          <a:ln/>
+        </p:spPr>
+      </p:sp>
+      <p:sp>
+        <p:nvSpPr>
+          <p:cNvPr id="104" name="Shape 102"/>
+          <p:cNvSpPr/>
+          <p:nvPr/>
+        </p:nvSpPr>
+        <p:spPr>
+          <a:xfrm>
+            <a:off x="4043934" y="4935359"/>
+            <a:ext cx="235458" cy="1008241"/>
+          </a:xfrm>
+          <a:prstGeom prst="rect">
+            <a:avLst/>
+          </a:prstGeom>
+          <a:solidFill>
+            <a:srgbClr val="2D5F7C">
+              <a:alpha val="45000"/>
+            </a:srgbClr>
+          </a:solidFill>
+          <a:ln/>
+        </p:spPr>
+      </p:sp>
+      <p:sp>
+        <p:nvSpPr>
+          <p:cNvPr id="105" name="Shape 103"/>
+          <p:cNvSpPr/>
+          <p:nvPr/>
+        </p:nvSpPr>
+        <p:spPr>
+          <a:xfrm>
+            <a:off x="4270248" y="4935359"/>
+            <a:ext cx="235458" cy="1008241"/>
+          </a:xfrm>
+          <a:prstGeom prst="rect">
+            <a:avLst/>
+          </a:prstGeom>
+          <a:solidFill>
+            <a:srgbClr val="2D5F7C">
+              <a:alpha val="45000"/>
+            </a:srgbClr>
+          </a:solidFill>
+          <a:ln/>
+        </p:spPr>
+      </p:sp>
+      <p:sp>
+        <p:nvSpPr>
+          <p:cNvPr id="106" name="Shape 104"/>
+          <p:cNvSpPr/>
+          <p:nvPr/>
+        </p:nvSpPr>
+        <p:spPr>
+          <a:xfrm>
+            <a:off x="4496562" y="4935359"/>
+            <a:ext cx="235458" cy="1008241"/>
+          </a:xfrm>
+          <a:prstGeom prst="rect">
+            <a:avLst/>
+          </a:prstGeom>
+          <a:solidFill>
+            <a:srgbClr val="2D5F7C">
+              <a:alpha val="45000"/>
+            </a:srgbClr>
+          </a:solidFill>
+          <a:ln/>
+        </p:spPr>
+      </p:sp>
+      <p:sp>
+        <p:nvSpPr>
+          <p:cNvPr id="107" name="Shape 105"/>
+          <p:cNvSpPr/>
+          <p:nvPr/>
+        </p:nvSpPr>
+        <p:spPr>
+          <a:xfrm>
+            <a:off x="4722876" y="4935359"/>
+            <a:ext cx="235458" cy="1008241"/>
+          </a:xfrm>
+          <a:prstGeom prst="rect">
+            <a:avLst/>
+          </a:prstGeom>
+          <a:solidFill>
+            <a:srgbClr val="2D5F7C">
+              <a:alpha val="45000"/>
+            </a:srgbClr>
+          </a:solidFill>
+          <a:ln/>
+        </p:spPr>
+      </p:sp>
+      <p:sp>
+        <p:nvSpPr>
+          <p:cNvPr id="108" name="Shape 106"/>
+          <p:cNvSpPr/>
+          <p:nvPr/>
+        </p:nvSpPr>
+        <p:spPr>
+          <a:xfrm>
+            <a:off x="4949190" y="4935359"/>
+            <a:ext cx="235458" cy="1008241"/>
+          </a:xfrm>
+          <a:prstGeom prst="rect">
+            <a:avLst/>
+          </a:prstGeom>
+          <a:solidFill>
+            <a:srgbClr val="2D5F7C">
+              <a:alpha val="45000"/>
+            </a:srgbClr>
+          </a:solidFill>
+          <a:ln/>
+        </p:spPr>
+      </p:sp>
+      <p:sp>
+        <p:nvSpPr>
+          <p:cNvPr id="109" name="Shape 107"/>
+          <p:cNvSpPr/>
+          <p:nvPr/>
+        </p:nvSpPr>
+        <p:spPr>
+          <a:xfrm>
+            <a:off x="5175504" y="4935359"/>
+            <a:ext cx="235458" cy="1008241"/>
+          </a:xfrm>
+          <a:prstGeom prst="rect">
+            <a:avLst/>
+          </a:prstGeom>
+          <a:solidFill>
+            <a:srgbClr val="2D5F7C">
+              <a:alpha val="45000"/>
+            </a:srgbClr>
+          </a:solidFill>
+          <a:ln/>
+        </p:spPr>
+      </p:sp>
+      <p:sp>
+        <p:nvSpPr>
+          <p:cNvPr id="110" name="Shape 108"/>
+          <p:cNvSpPr/>
+          <p:nvPr/>
+        </p:nvSpPr>
+        <p:spPr>
+          <a:xfrm>
+            <a:off x="5401818" y="4935359"/>
+            <a:ext cx="235458" cy="1008241"/>
+          </a:xfrm>
+          <a:prstGeom prst="rect">
+            <a:avLst/>
+          </a:prstGeom>
+          <a:solidFill>
+            <a:srgbClr val="2D5F7C">
+              <a:alpha val="45000"/>
+            </a:srgbClr>
+          </a:solidFill>
+          <a:ln/>
+        </p:spPr>
+      </p:sp>
+      <p:sp>
+        <p:nvSpPr>
+          <p:cNvPr id="111" name="Shape 109"/>
+          <p:cNvSpPr/>
+          <p:nvPr/>
+        </p:nvSpPr>
+        <p:spPr>
+          <a:xfrm>
+            <a:off x="5628132" y="4935359"/>
+            <a:ext cx="235458" cy="1008241"/>
+          </a:xfrm>
+          <a:prstGeom prst="rect">
+            <a:avLst/>
+          </a:prstGeom>
+          <a:solidFill>
+            <a:srgbClr val="2D5F7C">
+              <a:alpha val="45000"/>
+            </a:srgbClr>
+          </a:solidFill>
+          <a:ln/>
+        </p:spPr>
+      </p:sp>
+      <p:sp>
+        <p:nvSpPr>
+          <p:cNvPr id="112" name="Shape 110"/>
+          <p:cNvSpPr/>
+          <p:nvPr/>
+        </p:nvSpPr>
+        <p:spPr>
+          <a:xfrm>
+            <a:off x="5854446" y="4935359"/>
+            <a:ext cx="235458" cy="1008241"/>
+          </a:xfrm>
+          <a:prstGeom prst="rect">
+            <a:avLst/>
+          </a:prstGeom>
+          <a:solidFill>
+            <a:srgbClr val="2D5F7C">
+              <a:alpha val="45000"/>
+            </a:srgbClr>
+          </a:solidFill>
+          <a:ln/>
+        </p:spPr>
+      </p:sp>
+      <p:sp>
+        <p:nvSpPr>
+          <p:cNvPr id="113" name="Shape 111"/>
+          <p:cNvSpPr/>
+          <p:nvPr/>
+        </p:nvSpPr>
+        <p:spPr>
+          <a:xfrm>
+            <a:off x="6080760" y="4935359"/>
+            <a:ext cx="235458" cy="1008241"/>
+          </a:xfrm>
+          <a:prstGeom prst="rect">
+            <a:avLst/>
+          </a:prstGeom>
+          <a:solidFill>
+            <a:srgbClr val="2D5F7C">
+              <a:alpha val="45000"/>
+            </a:srgbClr>
+          </a:solidFill>
+          <a:ln/>
+        </p:spPr>
+      </p:sp>
+      <p:sp>
+        <p:nvSpPr>
+          <p:cNvPr id="114" name="Shape 112"/>
+          <p:cNvSpPr/>
+          <p:nvPr/>
+        </p:nvSpPr>
+        <p:spPr>
+          <a:xfrm>
+            <a:off x="6307074" y="4935359"/>
+            <a:ext cx="235458" cy="1008241"/>
+          </a:xfrm>
+          <a:prstGeom prst="rect">
+            <a:avLst/>
+          </a:prstGeom>
+          <a:solidFill>
+            <a:srgbClr val="2D5F7C">
+              <a:alpha val="45000"/>
+            </a:srgbClr>
+          </a:solidFill>
+          <a:ln/>
+        </p:spPr>
+      </p:sp>
+      <p:sp>
+        <p:nvSpPr>
+          <p:cNvPr id="115" name="Shape 113"/>
+          <p:cNvSpPr/>
+          <p:nvPr/>
+        </p:nvSpPr>
+        <p:spPr>
+          <a:xfrm>
+            <a:off x="6533388" y="4935359"/>
+            <a:ext cx="235458" cy="1008241"/>
+          </a:xfrm>
+          <a:prstGeom prst="rect">
+            <a:avLst/>
+          </a:prstGeom>
+          <a:solidFill>
+            <a:srgbClr val="2D5F7C">
+              <a:alpha val="45000"/>
+            </a:srgbClr>
+          </a:solidFill>
+          <a:ln/>
+        </p:spPr>
+      </p:sp>
+      <p:sp>
+        <p:nvSpPr>
+          <p:cNvPr id="116" name="Shape 114"/>
+          <p:cNvSpPr/>
+          <p:nvPr/>
+        </p:nvSpPr>
+        <p:spPr>
+          <a:xfrm>
+            <a:off x="6759702" y="4935359"/>
+            <a:ext cx="235458" cy="1008241"/>
+          </a:xfrm>
+          <a:prstGeom prst="rect">
+            <a:avLst/>
+          </a:prstGeom>
+          <a:solidFill>
+            <a:srgbClr val="2D5F7C">
+              <a:alpha val="45000"/>
+            </a:srgbClr>
+          </a:solidFill>
+          <a:ln/>
+        </p:spPr>
+      </p:sp>
+      <p:sp>
+        <p:nvSpPr>
+          <p:cNvPr id="117" name="Shape 115"/>
+          <p:cNvSpPr/>
+          <p:nvPr/>
+        </p:nvSpPr>
+        <p:spPr>
+          <a:xfrm>
+            <a:off x="6986016" y="4935359"/>
+            <a:ext cx="235458" cy="1008241"/>
+          </a:xfrm>
+          <a:prstGeom prst="rect">
+            <a:avLst/>
+          </a:prstGeom>
+          <a:solidFill>
+            <a:srgbClr val="2D5F7C">
+              <a:alpha val="45000"/>
+            </a:srgbClr>
+          </a:solidFill>
+          <a:ln/>
+        </p:spPr>
+      </p:sp>
+      <p:sp>
+        <p:nvSpPr>
+          <p:cNvPr id="118" name="Shape 116"/>
+          <p:cNvSpPr/>
+          <p:nvPr/>
+        </p:nvSpPr>
+        <p:spPr>
+          <a:xfrm>
+            <a:off x="7212330" y="4935359"/>
+            <a:ext cx="235458" cy="1008241"/>
+          </a:xfrm>
+          <a:prstGeom prst="rect">
+            <a:avLst/>
+          </a:prstGeom>
+          <a:solidFill>
+            <a:srgbClr val="2D5F7C">
+              <a:alpha val="45000"/>
+            </a:srgbClr>
+          </a:solidFill>
+          <a:ln/>
+        </p:spPr>
+      </p:sp>
+      <p:sp>
+        <p:nvSpPr>
+          <p:cNvPr id="119" name="Shape 117"/>
+          <p:cNvSpPr/>
+          <p:nvPr/>
+        </p:nvSpPr>
+        <p:spPr>
+          <a:xfrm>
+            <a:off x="7438644" y="4935359"/>
+            <a:ext cx="235458" cy="1008241"/>
+          </a:xfrm>
+          <a:prstGeom prst="rect">
+            <a:avLst/>
+          </a:prstGeom>
+          <a:solidFill>
+            <a:srgbClr val="2D5F7C">
+              <a:alpha val="45000"/>
+            </a:srgbClr>
+          </a:solidFill>
+          <a:ln/>
+        </p:spPr>
+      </p:sp>
+      <p:sp>
+        <p:nvSpPr>
+          <p:cNvPr id="120" name="Shape 118"/>
+          <p:cNvSpPr/>
+          <p:nvPr/>
+        </p:nvSpPr>
+        <p:spPr>
+          <a:xfrm>
+            <a:off x="7664958" y="4935359"/>
+            <a:ext cx="235458" cy="1008241"/>
+          </a:xfrm>
+          <a:prstGeom prst="rect">
+            <a:avLst/>
+          </a:prstGeom>
+          <a:solidFill>
+            <a:srgbClr val="2D5F7C">
+              <a:alpha val="45000"/>
+            </a:srgbClr>
+          </a:solidFill>
+          <a:ln/>
+        </p:spPr>
+      </p:sp>
+      <p:sp>
+        <p:nvSpPr>
+          <p:cNvPr id="121" name="Shape 119"/>
+          <p:cNvSpPr/>
+          <p:nvPr/>
+        </p:nvSpPr>
+        <p:spPr>
+          <a:xfrm>
+            <a:off x="7891272" y="4935359"/>
+            <a:ext cx="235458" cy="1008241"/>
+          </a:xfrm>
+          <a:prstGeom prst="rect">
+            <a:avLst/>
+          </a:prstGeom>
+          <a:solidFill>
+            <a:srgbClr val="2D5F7C">
+              <a:alpha val="45000"/>
+            </a:srgbClr>
+          </a:solidFill>
+          <a:ln/>
+        </p:spPr>
+      </p:sp>
+      <p:sp>
+        <p:nvSpPr>
+          <p:cNvPr id="122" name="Shape 120"/>
+          <p:cNvSpPr/>
+          <p:nvPr/>
+        </p:nvSpPr>
+        <p:spPr>
+          <a:xfrm>
+            <a:off x="8117586" y="4935359"/>
+            <a:ext cx="235458" cy="1008241"/>
+          </a:xfrm>
+          <a:prstGeom prst="rect">
+            <a:avLst/>
+          </a:prstGeom>
+          <a:solidFill>
+            <a:srgbClr val="2D5F7C">
+              <a:alpha val="45000"/>
+            </a:srgbClr>
+          </a:solidFill>
+          <a:ln/>
+        </p:spPr>
+      </p:sp>
+      <p:sp>
+        <p:nvSpPr>
+          <p:cNvPr id="123" name="Shape 121"/>
+          <p:cNvSpPr/>
+          <p:nvPr/>
+        </p:nvSpPr>
+        <p:spPr>
+          <a:xfrm>
+            <a:off x="8343900" y="4935359"/>
+            <a:ext cx="235458" cy="1008241"/>
+          </a:xfrm>
+          <a:prstGeom prst="rect">
+            <a:avLst/>
+          </a:prstGeom>
+          <a:solidFill>
+            <a:srgbClr val="2D5F7C">
+              <a:alpha val="45000"/>
+            </a:srgbClr>
+          </a:solidFill>
+          <a:ln/>
+        </p:spPr>
+      </p:sp>
+      <p:sp>
+        <p:nvSpPr>
+          <p:cNvPr id="124" name="Shape 122"/>
+          <p:cNvSpPr/>
+          <p:nvPr/>
+        </p:nvSpPr>
+        <p:spPr>
+          <a:xfrm>
+            <a:off x="8570214" y="4935359"/>
+            <a:ext cx="235458" cy="1008241"/>
+          </a:xfrm>
+          <a:prstGeom prst="rect">
+            <a:avLst/>
+          </a:prstGeom>
+          <a:solidFill>
+            <a:srgbClr val="2D5F7C">
+              <a:alpha val="45000"/>
+            </a:srgbClr>
+          </a:solidFill>
+          <a:ln/>
+        </p:spPr>
+      </p:sp>
+      <p:sp>
+        <p:nvSpPr>
+          <p:cNvPr id="125" name="Shape 123"/>
+          <p:cNvSpPr/>
+          <p:nvPr/>
+        </p:nvSpPr>
+        <p:spPr>
+          <a:xfrm>
+            <a:off x="8796528" y="4935359"/>
+            <a:ext cx="235458" cy="1008241"/>
+          </a:xfrm>
+          <a:prstGeom prst="rect">
+            <a:avLst/>
+          </a:prstGeom>
+          <a:solidFill>
+            <a:srgbClr val="2D5F7C">
+              <a:alpha val="45000"/>
+            </a:srgbClr>
+          </a:solidFill>
+          <a:ln/>
+        </p:spPr>
+      </p:sp>
+      <p:sp>
+        <p:nvSpPr>
+          <p:cNvPr id="126" name="Shape 124"/>
+          <p:cNvSpPr/>
+          <p:nvPr/>
+        </p:nvSpPr>
+        <p:spPr>
+          <a:xfrm>
+            <a:off x="9022842" y="4935359"/>
+            <a:ext cx="235458" cy="1008241"/>
+          </a:xfrm>
+          <a:prstGeom prst="rect">
+            <a:avLst/>
+          </a:prstGeom>
+          <a:solidFill>
+            <a:srgbClr val="2D5F7C">
+              <a:alpha val="45000"/>
+            </a:srgbClr>
+          </a:solidFill>
+          <a:ln/>
+        </p:spPr>
+      </p:sp>
+      <p:sp>
+        <p:nvSpPr>
+          <p:cNvPr id="127" name="Shape 125"/>
+          <p:cNvSpPr/>
+          <p:nvPr/>
+        </p:nvSpPr>
+        <p:spPr>
+          <a:xfrm>
+            <a:off x="9249156" y="4935359"/>
+            <a:ext cx="235458" cy="1008241"/>
+          </a:xfrm>
+          <a:prstGeom prst="rect">
+            <a:avLst/>
+          </a:prstGeom>
+          <a:solidFill>
+            <a:srgbClr val="2D5F7C">
+              <a:alpha val="45000"/>
+            </a:srgbClr>
+          </a:solidFill>
+          <a:ln/>
+        </p:spPr>
+      </p:sp>
+      <p:sp>
+        <p:nvSpPr>
+          <p:cNvPr id="128" name="Shape 126"/>
+          <p:cNvSpPr/>
+          <p:nvPr/>
+        </p:nvSpPr>
+        <p:spPr>
+          <a:xfrm>
+            <a:off x="9475470" y="4935359"/>
+            <a:ext cx="235458" cy="1008241"/>
+          </a:xfrm>
+          <a:prstGeom prst="rect">
+            <a:avLst/>
+          </a:prstGeom>
+          <a:solidFill>
+            <a:srgbClr val="2D5F7C">
+              <a:alpha val="45000"/>
+            </a:srgbClr>
+          </a:solidFill>
+          <a:ln/>
+        </p:spPr>
+      </p:sp>
+      <p:sp>
+        <p:nvSpPr>
+          <p:cNvPr id="129" name="Shape 127"/>
+          <p:cNvSpPr/>
+          <p:nvPr/>
+        </p:nvSpPr>
+        <p:spPr>
+          <a:xfrm>
+            <a:off x="9701784" y="4935359"/>
+            <a:ext cx="235458" cy="1008241"/>
+          </a:xfrm>
+          <a:prstGeom prst="rect">
+            <a:avLst/>
+          </a:prstGeom>
+          <a:solidFill>
+            <a:srgbClr val="2D5F7C">
+              <a:alpha val="45000"/>
+            </a:srgbClr>
+          </a:solidFill>
+          <a:ln/>
+        </p:spPr>
+      </p:sp>
+      <p:sp>
+        <p:nvSpPr>
+          <p:cNvPr id="130" name="Shape 128"/>
+          <p:cNvSpPr/>
+          <p:nvPr/>
+        </p:nvSpPr>
+        <p:spPr>
+          <a:xfrm>
+            <a:off x="9928098" y="4935359"/>
+            <a:ext cx="235458" cy="1008241"/>
+          </a:xfrm>
+          <a:prstGeom prst="rect">
+            <a:avLst/>
+          </a:prstGeom>
+          <a:solidFill>
+            <a:srgbClr val="2D5F7C">
+              <a:alpha val="45000"/>
+            </a:srgbClr>
+          </a:solidFill>
+          <a:ln/>
+        </p:spPr>
+      </p:sp>
+      <p:sp>
+        <p:nvSpPr>
+          <p:cNvPr id="131" name="Shape 129"/>
+          <p:cNvSpPr/>
+          <p:nvPr/>
+        </p:nvSpPr>
+        <p:spPr>
+          <a:xfrm>
+            <a:off x="10154412" y="4935359"/>
+            <a:ext cx="235458" cy="1008241"/>
+          </a:xfrm>
+          <a:prstGeom prst="rect">
+            <a:avLst/>
+          </a:prstGeom>
+          <a:solidFill>
+            <a:srgbClr val="2D5F7C">
+              <a:alpha val="45000"/>
+            </a:srgbClr>
+          </a:solidFill>
+          <a:ln/>
+        </p:spPr>
+      </p:sp>
+      <p:sp>
+        <p:nvSpPr>
+          <p:cNvPr id="132" name="Shape 130"/>
+          <p:cNvSpPr/>
+          <p:nvPr/>
+        </p:nvSpPr>
+        <p:spPr>
+          <a:xfrm>
+            <a:off x="10380726" y="4935359"/>
+            <a:ext cx="235458" cy="1008241"/>
+          </a:xfrm>
+          <a:prstGeom prst="rect">
+            <a:avLst/>
+          </a:prstGeom>
+          <a:solidFill>
+            <a:srgbClr val="2D5F7C">
+              <a:alpha val="45000"/>
+            </a:srgbClr>
+          </a:solidFill>
+          <a:ln/>
+        </p:spPr>
+      </p:sp>
+      <p:sp>
+        <p:nvSpPr>
+          <p:cNvPr id="133" name="Text 131"/>
+          <p:cNvSpPr/>
+          <p:nvPr/>
+        </p:nvSpPr>
+        <p:spPr>
+          <a:xfrm>
+            <a:off x="548640" y="6172200"/>
+            <a:ext cx="11091672" cy="292608"/>
+          </a:xfrm>
+          <a:prstGeom prst="rect">
+            <a:avLst/>
+          </a:prstGeom>
+          <a:noFill/>
+          <a:ln/>
+        </p:spPr>
+        <p:txBody>
+          <a:bodyPr wrap="square" lIns="0" tIns="0" rIns="0" bIns="0" rtlCol="0" anchor="t"/>
+          <a:lstStyle/>
+          <a:p>
+            <a:pPr indent="0" marL="0">
+              <a:buNone/>
+            </a:pPr>
+            <a:r>
+              <a:rPr lang="en-US" sz="1200" i="1" dirty="0">
+                <a:solidFill>
+                  <a:srgbClr val="353745"/>
+                </a:solidFill>
+                <a:latin typeface="Georgia" pitchFamily="34" charset="0"/>
+                <a:ea typeface="Georgia" pitchFamily="34" charset="-122"/>
+                <a:cs typeface="Georgia" pitchFamily="34" charset="-120"/>
+              </a:rPr>
+              <a:t>For every $100 of 2035 revenue: $50 covers cost of services, $24 covers opex, $26 lands as EBITDA.</a:t>
+            </a:r>
+            <a:endParaRPr lang="en-US" sz="1200" dirty="0"/>
+          </a:p>
+        </p:txBody>
+      </p:sp>
+    </p:spTree>
+  </p:cSld>
+  <p:clrMapOvr>
+    <a:masterClrMapping/>
+  </p:clrMapOvr>
+</p:sld>
+</file>
+
 <file path=ppt/slides/slide2.xml><?xml version="1.0" encoding="utf-8"?>
 <p:sld xmlns:a="http://schemas.openxmlformats.org/drawingml/2006/main" xmlns:r="http://schemas.openxmlformats.org/officeDocument/2006/relationships" xmlns:p="http://schemas.openxmlformats.org/presentationml/2006/main">
   <p:cSld name="Slide 2">
@@ -13777,6 +17188,4569 @@
             <a:prstDash val="solid"/>
           </a:ln>
         </p:spPr>
+      </p:sp>
+    </p:spTree>
+  </p:cSld>
+  <p:clrMapOvr>
+    <a:masterClrMapping/>
+  </p:clrMapOvr>
+</p:sld>
+</file>
+
+<file path=ppt/slides/slide20.xml><?xml version="1.0" encoding="utf-8"?>
+<p:sld xmlns:a="http://schemas.openxmlformats.org/drawingml/2006/main" xmlns:r="http://schemas.openxmlformats.org/officeDocument/2006/relationships" xmlns:p="http://schemas.openxmlformats.org/presentationml/2006/main">
+  <p:cSld name="Slide 20">
+    <p:bg>
+      <p:bgPr>
+        <a:solidFill>
+          <a:srgbClr val="FFF5ED"/>
+        </a:solidFill>
+      </p:bgPr>
+    </p:bg>
+    <p:spTree>
+      <p:nvGrpSpPr>
+        <p:cNvPr id="1" name=""/>
+        <p:cNvGrpSpPr/>
+        <p:nvPr/>
+      </p:nvGrpSpPr>
+      <p:grpSpPr>
+        <a:xfrm>
+          <a:off x="0" y="0"/>
+          <a:ext cx="0" cy="0"/>
+          <a:chOff x="0" y="0"/>
+          <a:chExt cx="0" cy="0"/>
+        </a:xfrm>
+      </p:grpSpPr>
+      <p:sp>
+        <p:nvSpPr>
+          <p:cNvPr id="2" name="Text 0"/>
+          <p:cNvSpPr/>
+          <p:nvPr/>
+        </p:nvSpPr>
+        <p:spPr>
+          <a:xfrm>
+            <a:off x="548640" y="457200"/>
+            <a:ext cx="7315200" cy="256032"/>
+          </a:xfrm>
+          <a:prstGeom prst="rect">
+            <a:avLst/>
+          </a:prstGeom>
+          <a:noFill/>
+          <a:ln/>
+        </p:spPr>
+        <p:txBody>
+          <a:bodyPr wrap="square" lIns="0" tIns="0" rIns="0" bIns="0" rtlCol="0" anchor="t"/>
+          <a:lstStyle/>
+          <a:p>
+            <a:pPr indent="0" marL="0">
+              <a:buNone/>
+            </a:pPr>
+            <a:r>
+              <a:rPr lang="en-US" sz="1000" b="1" spc="200" kern="0" dirty="0">
+                <a:solidFill>
+                  <a:srgbClr val="8A7968"/>
+                </a:solidFill>
+                <a:latin typeface="Calibri" pitchFamily="34" charset="0"/>
+                <a:ea typeface="Calibri" pitchFamily="34" charset="-122"/>
+                <a:cs typeface="Calibri" pitchFamily="34" charset="-120"/>
+              </a:rPr>
+              <a:t>HEATMAP  ·  ESCAPE-HATCH (SHAPES)</a:t>
+            </a:r>
+            <a:endParaRPr lang="en-US" sz="1000" dirty="0"/>
+          </a:p>
+        </p:txBody>
+      </p:sp>
+      <p:sp>
+        <p:nvSpPr>
+          <p:cNvPr id="3" name="Text 1"/>
+          <p:cNvSpPr/>
+          <p:nvPr/>
+        </p:nvSpPr>
+        <p:spPr>
+          <a:xfrm>
+            <a:off x="548640" y="749808"/>
+            <a:ext cx="11091672" cy="640080"/>
+          </a:xfrm>
+          <a:prstGeom prst="rect">
+            <a:avLst/>
+          </a:prstGeom>
+          <a:noFill/>
+          <a:ln/>
+        </p:spPr>
+        <p:txBody>
+          <a:bodyPr wrap="square" lIns="0" tIns="0" rIns="0" bIns="0" rtlCol="0" anchor="t"/>
+          <a:lstStyle/>
+          <a:p>
+            <a:pPr indent="0" marL="0">
+              <a:buNone/>
+            </a:pPr>
+            <a:r>
+              <a:rPr lang="en-US" sz="3000" dirty="0">
+                <a:solidFill>
+                  <a:srgbClr val="353745"/>
+                </a:solidFill>
+                <a:latin typeface="Georgia" pitchFamily="34" charset="0"/>
+                <a:ea typeface="Georgia" pitchFamily="34" charset="-122"/>
+                <a:cs typeface="Georgia" pitchFamily="34" charset="-120"/>
+              </a:rPr>
+              <a:t>Practice × year revenue, intensity-coded.</a:t>
+            </a:r>
+            <a:endParaRPr lang="en-US" sz="3000" dirty="0"/>
+          </a:p>
+        </p:txBody>
+      </p:sp>
+      <p:sp>
+        <p:nvSpPr>
+          <p:cNvPr id="4" name="Text 2"/>
+          <p:cNvSpPr/>
+          <p:nvPr/>
+        </p:nvSpPr>
+        <p:spPr>
+          <a:xfrm>
+            <a:off x="548640" y="1325880"/>
+            <a:ext cx="11091672" cy="292608"/>
+          </a:xfrm>
+          <a:prstGeom prst="rect">
+            <a:avLst/>
+          </a:prstGeom>
+          <a:noFill/>
+          <a:ln/>
+        </p:spPr>
+        <p:txBody>
+          <a:bodyPr wrap="square" lIns="0" tIns="0" rIns="0" bIns="0" rtlCol="0" anchor="t"/>
+          <a:lstStyle/>
+          <a:p>
+            <a:pPr indent="0" marL="0">
+              <a:buNone/>
+            </a:pPr>
+            <a:r>
+              <a:rPr lang="en-US" sz="1300" i="1" dirty="0">
+                <a:solidFill>
+                  <a:srgbClr val="353745"/>
+                </a:solidFill>
+                <a:latin typeface="Georgia" pitchFamily="34" charset="0"/>
+                <a:ea typeface="Georgia" pitchFamily="34" charset="-122"/>
+                <a:cs typeface="Georgia" pitchFamily="34" charset="-120"/>
+              </a:rPr>
+              <a:t>3 × 11 grid of cells. Fill color interpolated linearly between light and STEEL based on $M revenue. Values printed in each cell. Native PPT has no heatmap type.</a:t>
+            </a:r>
+            <a:endParaRPr lang="en-US" sz="1300" dirty="0"/>
+          </a:p>
+        </p:txBody>
+      </p:sp>
+      <p:sp>
+        <p:nvSpPr>
+          <p:cNvPr id="5" name="Text 3"/>
+          <p:cNvSpPr/>
+          <p:nvPr/>
+        </p:nvSpPr>
+        <p:spPr>
+          <a:xfrm>
+            <a:off x="1645920" y="2103120"/>
+            <a:ext cx="900268" cy="256032"/>
+          </a:xfrm>
+          <a:prstGeom prst="rect">
+            <a:avLst/>
+          </a:prstGeom>
+          <a:noFill/>
+          <a:ln/>
+        </p:spPr>
+        <p:txBody>
+          <a:bodyPr wrap="square" lIns="0" tIns="0" rIns="0" bIns="0" rtlCol="0" anchor="b"/>
+          <a:lstStyle/>
+          <a:p>
+            <a:pPr algn="ctr" indent="0" marL="0">
+              <a:buNone/>
+            </a:pPr>
+            <a:r>
+              <a:rPr lang="en-US" sz="900" dirty="0">
+                <a:solidFill>
+                  <a:srgbClr val="8A7968"/>
+                </a:solidFill>
+                <a:latin typeface="Calibri" pitchFamily="34" charset="0"/>
+                <a:ea typeface="Calibri" pitchFamily="34" charset="-122"/>
+                <a:cs typeface="Calibri" pitchFamily="34" charset="-120"/>
+              </a:rPr>
+              <a:t>2025</a:t>
+            </a:r>
+            <a:endParaRPr lang="en-US" sz="900" dirty="0"/>
+          </a:p>
+        </p:txBody>
+      </p:sp>
+      <p:sp>
+        <p:nvSpPr>
+          <p:cNvPr id="6" name="Text 4"/>
+          <p:cNvSpPr/>
+          <p:nvPr/>
+        </p:nvSpPr>
+        <p:spPr>
+          <a:xfrm>
+            <a:off x="2546188" y="2103120"/>
+            <a:ext cx="900268" cy="256032"/>
+          </a:xfrm>
+          <a:prstGeom prst="rect">
+            <a:avLst/>
+          </a:prstGeom>
+          <a:noFill/>
+          <a:ln/>
+        </p:spPr>
+        <p:txBody>
+          <a:bodyPr wrap="square" lIns="0" tIns="0" rIns="0" bIns="0" rtlCol="0" anchor="b"/>
+          <a:lstStyle/>
+          <a:p>
+            <a:pPr algn="ctr" indent="0" marL="0">
+              <a:buNone/>
+            </a:pPr>
+            <a:r>
+              <a:rPr lang="en-US" sz="900" dirty="0">
+                <a:solidFill>
+                  <a:srgbClr val="8A7968"/>
+                </a:solidFill>
+                <a:latin typeface="Calibri" pitchFamily="34" charset="0"/>
+                <a:ea typeface="Calibri" pitchFamily="34" charset="-122"/>
+                <a:cs typeface="Calibri" pitchFamily="34" charset="-120"/>
+              </a:rPr>
+              <a:t>2026</a:t>
+            </a:r>
+            <a:endParaRPr lang="en-US" sz="900" dirty="0"/>
+          </a:p>
+        </p:txBody>
+      </p:sp>
+      <p:sp>
+        <p:nvSpPr>
+          <p:cNvPr id="7" name="Text 5"/>
+          <p:cNvSpPr/>
+          <p:nvPr/>
+        </p:nvSpPr>
+        <p:spPr>
+          <a:xfrm>
+            <a:off x="3446457" y="2103120"/>
+            <a:ext cx="900268" cy="256032"/>
+          </a:xfrm>
+          <a:prstGeom prst="rect">
+            <a:avLst/>
+          </a:prstGeom>
+          <a:noFill/>
+          <a:ln/>
+        </p:spPr>
+        <p:txBody>
+          <a:bodyPr wrap="square" lIns="0" tIns="0" rIns="0" bIns="0" rtlCol="0" anchor="b"/>
+          <a:lstStyle/>
+          <a:p>
+            <a:pPr algn="ctr" indent="0" marL="0">
+              <a:buNone/>
+            </a:pPr>
+            <a:r>
+              <a:rPr lang="en-US" sz="900" dirty="0">
+                <a:solidFill>
+                  <a:srgbClr val="8A7968"/>
+                </a:solidFill>
+                <a:latin typeface="Calibri" pitchFamily="34" charset="0"/>
+                <a:ea typeface="Calibri" pitchFamily="34" charset="-122"/>
+                <a:cs typeface="Calibri" pitchFamily="34" charset="-120"/>
+              </a:rPr>
+              <a:t>2027</a:t>
+            </a:r>
+            <a:endParaRPr lang="en-US" sz="900" dirty="0"/>
+          </a:p>
+        </p:txBody>
+      </p:sp>
+      <p:sp>
+        <p:nvSpPr>
+          <p:cNvPr id="8" name="Text 6"/>
+          <p:cNvSpPr/>
+          <p:nvPr/>
+        </p:nvSpPr>
+        <p:spPr>
+          <a:xfrm>
+            <a:off x="4346725" y="2103120"/>
+            <a:ext cx="900268" cy="256032"/>
+          </a:xfrm>
+          <a:prstGeom prst="rect">
+            <a:avLst/>
+          </a:prstGeom>
+          <a:noFill/>
+          <a:ln/>
+        </p:spPr>
+        <p:txBody>
+          <a:bodyPr wrap="square" lIns="0" tIns="0" rIns="0" bIns="0" rtlCol="0" anchor="b"/>
+          <a:lstStyle/>
+          <a:p>
+            <a:pPr algn="ctr" indent="0" marL="0">
+              <a:buNone/>
+            </a:pPr>
+            <a:r>
+              <a:rPr lang="en-US" sz="900" dirty="0">
+                <a:solidFill>
+                  <a:srgbClr val="8A7968"/>
+                </a:solidFill>
+                <a:latin typeface="Calibri" pitchFamily="34" charset="0"/>
+                <a:ea typeface="Calibri" pitchFamily="34" charset="-122"/>
+                <a:cs typeface="Calibri" pitchFamily="34" charset="-120"/>
+              </a:rPr>
+              <a:t>2028</a:t>
+            </a:r>
+            <a:endParaRPr lang="en-US" sz="900" dirty="0"/>
+          </a:p>
+        </p:txBody>
+      </p:sp>
+      <p:sp>
+        <p:nvSpPr>
+          <p:cNvPr id="9" name="Text 7"/>
+          <p:cNvSpPr/>
+          <p:nvPr/>
+        </p:nvSpPr>
+        <p:spPr>
+          <a:xfrm>
+            <a:off x="5246993" y="2103120"/>
+            <a:ext cx="900268" cy="256032"/>
+          </a:xfrm>
+          <a:prstGeom prst="rect">
+            <a:avLst/>
+          </a:prstGeom>
+          <a:noFill/>
+          <a:ln/>
+        </p:spPr>
+        <p:txBody>
+          <a:bodyPr wrap="square" lIns="0" tIns="0" rIns="0" bIns="0" rtlCol="0" anchor="b"/>
+          <a:lstStyle/>
+          <a:p>
+            <a:pPr algn="ctr" indent="0" marL="0">
+              <a:buNone/>
+            </a:pPr>
+            <a:r>
+              <a:rPr lang="en-US" sz="900" dirty="0">
+                <a:solidFill>
+                  <a:srgbClr val="8A7968"/>
+                </a:solidFill>
+                <a:latin typeface="Calibri" pitchFamily="34" charset="0"/>
+                <a:ea typeface="Calibri" pitchFamily="34" charset="-122"/>
+                <a:cs typeface="Calibri" pitchFamily="34" charset="-120"/>
+              </a:rPr>
+              <a:t>2029</a:t>
+            </a:r>
+            <a:endParaRPr lang="en-US" sz="900" dirty="0"/>
+          </a:p>
+        </p:txBody>
+      </p:sp>
+      <p:sp>
+        <p:nvSpPr>
+          <p:cNvPr id="10" name="Text 8"/>
+          <p:cNvSpPr/>
+          <p:nvPr/>
+        </p:nvSpPr>
+        <p:spPr>
+          <a:xfrm>
+            <a:off x="6147262" y="2103120"/>
+            <a:ext cx="900268" cy="256032"/>
+          </a:xfrm>
+          <a:prstGeom prst="rect">
+            <a:avLst/>
+          </a:prstGeom>
+          <a:noFill/>
+          <a:ln/>
+        </p:spPr>
+        <p:txBody>
+          <a:bodyPr wrap="square" lIns="0" tIns="0" rIns="0" bIns="0" rtlCol="0" anchor="b"/>
+          <a:lstStyle/>
+          <a:p>
+            <a:pPr algn="ctr" indent="0" marL="0">
+              <a:buNone/>
+            </a:pPr>
+            <a:r>
+              <a:rPr lang="en-US" sz="900" dirty="0">
+                <a:solidFill>
+                  <a:srgbClr val="8A7968"/>
+                </a:solidFill>
+                <a:latin typeface="Calibri" pitchFamily="34" charset="0"/>
+                <a:ea typeface="Calibri" pitchFamily="34" charset="-122"/>
+                <a:cs typeface="Calibri" pitchFamily="34" charset="-120"/>
+              </a:rPr>
+              <a:t>2030</a:t>
+            </a:r>
+            <a:endParaRPr lang="en-US" sz="900" dirty="0"/>
+          </a:p>
+        </p:txBody>
+      </p:sp>
+      <p:sp>
+        <p:nvSpPr>
+          <p:cNvPr id="11" name="Text 9"/>
+          <p:cNvSpPr/>
+          <p:nvPr/>
+        </p:nvSpPr>
+        <p:spPr>
+          <a:xfrm>
+            <a:off x="7047530" y="2103120"/>
+            <a:ext cx="900268" cy="256032"/>
+          </a:xfrm>
+          <a:prstGeom prst="rect">
+            <a:avLst/>
+          </a:prstGeom>
+          <a:noFill/>
+          <a:ln/>
+        </p:spPr>
+        <p:txBody>
+          <a:bodyPr wrap="square" lIns="0" tIns="0" rIns="0" bIns="0" rtlCol="0" anchor="b"/>
+          <a:lstStyle/>
+          <a:p>
+            <a:pPr algn="ctr" indent="0" marL="0">
+              <a:buNone/>
+            </a:pPr>
+            <a:r>
+              <a:rPr lang="en-US" sz="900" dirty="0">
+                <a:solidFill>
+                  <a:srgbClr val="8A7968"/>
+                </a:solidFill>
+                <a:latin typeface="Calibri" pitchFamily="34" charset="0"/>
+                <a:ea typeface="Calibri" pitchFamily="34" charset="-122"/>
+                <a:cs typeface="Calibri" pitchFamily="34" charset="-120"/>
+              </a:rPr>
+              <a:t>2031</a:t>
+            </a:r>
+            <a:endParaRPr lang="en-US" sz="900" dirty="0"/>
+          </a:p>
+        </p:txBody>
+      </p:sp>
+      <p:sp>
+        <p:nvSpPr>
+          <p:cNvPr id="12" name="Text 10"/>
+          <p:cNvSpPr/>
+          <p:nvPr/>
+        </p:nvSpPr>
+        <p:spPr>
+          <a:xfrm>
+            <a:off x="7947799" y="2103120"/>
+            <a:ext cx="900268" cy="256032"/>
+          </a:xfrm>
+          <a:prstGeom prst="rect">
+            <a:avLst/>
+          </a:prstGeom>
+          <a:noFill/>
+          <a:ln/>
+        </p:spPr>
+        <p:txBody>
+          <a:bodyPr wrap="square" lIns="0" tIns="0" rIns="0" bIns="0" rtlCol="0" anchor="b"/>
+          <a:lstStyle/>
+          <a:p>
+            <a:pPr algn="ctr" indent="0" marL="0">
+              <a:buNone/>
+            </a:pPr>
+            <a:r>
+              <a:rPr lang="en-US" sz="900" dirty="0">
+                <a:solidFill>
+                  <a:srgbClr val="8A7968"/>
+                </a:solidFill>
+                <a:latin typeface="Calibri" pitchFamily="34" charset="0"/>
+                <a:ea typeface="Calibri" pitchFamily="34" charset="-122"/>
+                <a:cs typeface="Calibri" pitchFamily="34" charset="-120"/>
+              </a:rPr>
+              <a:t>2032</a:t>
+            </a:r>
+            <a:endParaRPr lang="en-US" sz="900" dirty="0"/>
+          </a:p>
+        </p:txBody>
+      </p:sp>
+      <p:sp>
+        <p:nvSpPr>
+          <p:cNvPr id="13" name="Text 11"/>
+          <p:cNvSpPr/>
+          <p:nvPr/>
+        </p:nvSpPr>
+        <p:spPr>
+          <a:xfrm>
+            <a:off x="8848067" y="2103120"/>
+            <a:ext cx="900268" cy="256032"/>
+          </a:xfrm>
+          <a:prstGeom prst="rect">
+            <a:avLst/>
+          </a:prstGeom>
+          <a:noFill/>
+          <a:ln/>
+        </p:spPr>
+        <p:txBody>
+          <a:bodyPr wrap="square" lIns="0" tIns="0" rIns="0" bIns="0" rtlCol="0" anchor="b"/>
+          <a:lstStyle/>
+          <a:p>
+            <a:pPr algn="ctr" indent="0" marL="0">
+              <a:buNone/>
+            </a:pPr>
+            <a:r>
+              <a:rPr lang="en-US" sz="900" dirty="0">
+                <a:solidFill>
+                  <a:srgbClr val="8A7968"/>
+                </a:solidFill>
+                <a:latin typeface="Calibri" pitchFamily="34" charset="0"/>
+                <a:ea typeface="Calibri" pitchFamily="34" charset="-122"/>
+                <a:cs typeface="Calibri" pitchFamily="34" charset="-120"/>
+              </a:rPr>
+              <a:t>2033</a:t>
+            </a:r>
+            <a:endParaRPr lang="en-US" sz="900" dirty="0"/>
+          </a:p>
+        </p:txBody>
+      </p:sp>
+      <p:sp>
+        <p:nvSpPr>
+          <p:cNvPr id="14" name="Text 12"/>
+          <p:cNvSpPr/>
+          <p:nvPr/>
+        </p:nvSpPr>
+        <p:spPr>
+          <a:xfrm>
+            <a:off x="9748335" y="2103120"/>
+            <a:ext cx="900268" cy="256032"/>
+          </a:xfrm>
+          <a:prstGeom prst="rect">
+            <a:avLst/>
+          </a:prstGeom>
+          <a:noFill/>
+          <a:ln/>
+        </p:spPr>
+        <p:txBody>
+          <a:bodyPr wrap="square" lIns="0" tIns="0" rIns="0" bIns="0" rtlCol="0" anchor="b"/>
+          <a:lstStyle/>
+          <a:p>
+            <a:pPr algn="ctr" indent="0" marL="0">
+              <a:buNone/>
+            </a:pPr>
+            <a:r>
+              <a:rPr lang="en-US" sz="900" dirty="0">
+                <a:solidFill>
+                  <a:srgbClr val="8A7968"/>
+                </a:solidFill>
+                <a:latin typeface="Calibri" pitchFamily="34" charset="0"/>
+                <a:ea typeface="Calibri" pitchFamily="34" charset="-122"/>
+                <a:cs typeface="Calibri" pitchFamily="34" charset="-120"/>
+              </a:rPr>
+              <a:t>2034</a:t>
+            </a:r>
+            <a:endParaRPr lang="en-US" sz="900" dirty="0"/>
+          </a:p>
+        </p:txBody>
+      </p:sp>
+      <p:sp>
+        <p:nvSpPr>
+          <p:cNvPr id="15" name="Text 13"/>
+          <p:cNvSpPr/>
+          <p:nvPr/>
+        </p:nvSpPr>
+        <p:spPr>
+          <a:xfrm>
+            <a:off x="10648604" y="2103120"/>
+            <a:ext cx="900268" cy="256032"/>
+          </a:xfrm>
+          <a:prstGeom prst="rect">
+            <a:avLst/>
+          </a:prstGeom>
+          <a:noFill/>
+          <a:ln/>
+        </p:spPr>
+        <p:txBody>
+          <a:bodyPr wrap="square" lIns="0" tIns="0" rIns="0" bIns="0" rtlCol="0" anchor="b"/>
+          <a:lstStyle/>
+          <a:p>
+            <a:pPr algn="ctr" indent="0" marL="0">
+              <a:buNone/>
+            </a:pPr>
+            <a:r>
+              <a:rPr lang="en-US" sz="900" dirty="0">
+                <a:solidFill>
+                  <a:srgbClr val="8A7968"/>
+                </a:solidFill>
+                <a:latin typeface="Calibri" pitchFamily="34" charset="0"/>
+                <a:ea typeface="Calibri" pitchFamily="34" charset="-122"/>
+                <a:cs typeface="Calibri" pitchFamily="34" charset="-120"/>
+              </a:rPr>
+              <a:t>2035</a:t>
+            </a:r>
+            <a:endParaRPr lang="en-US" sz="900" dirty="0"/>
+          </a:p>
+        </p:txBody>
+      </p:sp>
+      <p:sp>
+        <p:nvSpPr>
+          <p:cNvPr id="16" name="Text 14"/>
+          <p:cNvSpPr/>
+          <p:nvPr/>
+        </p:nvSpPr>
+        <p:spPr>
+          <a:xfrm>
+            <a:off x="640080" y="2359152"/>
+            <a:ext cx="914400" cy="1072896"/>
+          </a:xfrm>
+          <a:prstGeom prst="rect">
+            <a:avLst/>
+          </a:prstGeom>
+          <a:noFill/>
+          <a:ln/>
+        </p:spPr>
+        <p:txBody>
+          <a:bodyPr wrap="square" lIns="0" tIns="0" rIns="0" bIns="0" rtlCol="0" anchor="ctr"/>
+          <a:lstStyle/>
+          <a:p>
+            <a:pPr algn="r" indent="0" marL="0">
+              <a:buNone/>
+            </a:pPr>
+            <a:r>
+              <a:rPr lang="en-US" sz="1000" b="1" dirty="0">
+                <a:solidFill>
+                  <a:srgbClr val="353745"/>
+                </a:solidFill>
+                <a:latin typeface="Calibri" pitchFamily="34" charset="0"/>
+                <a:ea typeface="Calibri" pitchFamily="34" charset="-122"/>
+                <a:cs typeface="Calibri" pitchFamily="34" charset="-120"/>
+              </a:rPr>
+              <a:t>Strategy</a:t>
+            </a:r>
+            <a:endParaRPr lang="en-US" sz="1000" dirty="0"/>
+          </a:p>
+        </p:txBody>
+      </p:sp>
+      <p:sp>
+        <p:nvSpPr>
+          <p:cNvPr id="17" name="Shape 15"/>
+          <p:cNvSpPr/>
+          <p:nvPr/>
+        </p:nvSpPr>
+        <p:spPr>
+          <a:xfrm>
+            <a:off x="1645920" y="2359152"/>
+            <a:ext cx="900268" cy="1072896"/>
+          </a:xfrm>
+          <a:prstGeom prst="rect">
+            <a:avLst/>
+          </a:prstGeom>
+          <a:solidFill>
+            <a:srgbClr val="C5C9C8"/>
+          </a:solidFill>
+          <a:ln w="12700">
+            <a:solidFill>
+              <a:srgbClr val="FFF5ED"/>
+            </a:solidFill>
+            <a:prstDash val="solid"/>
+          </a:ln>
+        </p:spPr>
+      </p:sp>
+      <p:sp>
+        <p:nvSpPr>
+          <p:cNvPr id="18" name="Text 16"/>
+          <p:cNvSpPr/>
+          <p:nvPr/>
+        </p:nvSpPr>
+        <p:spPr>
+          <a:xfrm>
+            <a:off x="1645920" y="2359152"/>
+            <a:ext cx="900268" cy="1072896"/>
+          </a:xfrm>
+          <a:prstGeom prst="rect">
+            <a:avLst/>
+          </a:prstGeom>
+          <a:noFill/>
+          <a:ln/>
+        </p:spPr>
+        <p:txBody>
+          <a:bodyPr wrap="square" lIns="0" tIns="0" rIns="0" bIns="0" rtlCol="0" anchor="ctr"/>
+          <a:lstStyle/>
+          <a:p>
+            <a:pPr algn="ctr" indent="0" marL="0">
+              <a:buNone/>
+            </a:pPr>
+            <a:r>
+              <a:rPr lang="en-US" sz="900" dirty="0">
+                <a:solidFill>
+                  <a:srgbClr val="353745"/>
+                </a:solidFill>
+                <a:latin typeface="Calibri" pitchFamily="34" charset="0"/>
+                <a:ea typeface="Calibri" pitchFamily="34" charset="-122"/>
+                <a:cs typeface="Calibri" pitchFamily="34" charset="-120"/>
+              </a:rPr>
+              <a:t>$9.2</a:t>
+            </a:r>
+            <a:endParaRPr lang="en-US" sz="900" dirty="0"/>
+          </a:p>
+        </p:txBody>
+      </p:sp>
+      <p:sp>
+        <p:nvSpPr>
+          <p:cNvPr id="19" name="Shape 17"/>
+          <p:cNvSpPr/>
+          <p:nvPr/>
+        </p:nvSpPr>
+        <p:spPr>
+          <a:xfrm>
+            <a:off x="2546188" y="2359152"/>
+            <a:ext cx="900268" cy="1072896"/>
+          </a:xfrm>
+          <a:prstGeom prst="rect">
+            <a:avLst/>
+          </a:prstGeom>
+          <a:solidFill>
+            <a:srgbClr val="C5C9C8"/>
+          </a:solidFill>
+          <a:ln w="12700">
+            <a:solidFill>
+              <a:srgbClr val="FFF5ED"/>
+            </a:solidFill>
+            <a:prstDash val="solid"/>
+          </a:ln>
+        </p:spPr>
+      </p:sp>
+      <p:sp>
+        <p:nvSpPr>
+          <p:cNvPr id="20" name="Text 18"/>
+          <p:cNvSpPr/>
+          <p:nvPr/>
+        </p:nvSpPr>
+        <p:spPr>
+          <a:xfrm>
+            <a:off x="2546188" y="2359152"/>
+            <a:ext cx="900268" cy="1072896"/>
+          </a:xfrm>
+          <a:prstGeom prst="rect">
+            <a:avLst/>
+          </a:prstGeom>
+          <a:noFill/>
+          <a:ln/>
+        </p:spPr>
+        <p:txBody>
+          <a:bodyPr wrap="square" lIns="0" tIns="0" rIns="0" bIns="0" rtlCol="0" anchor="ctr"/>
+          <a:lstStyle/>
+          <a:p>
+            <a:pPr algn="ctr" indent="0" marL="0">
+              <a:buNone/>
+            </a:pPr>
+            <a:r>
+              <a:rPr lang="en-US" sz="900" dirty="0">
+                <a:solidFill>
+                  <a:srgbClr val="353745"/>
+                </a:solidFill>
+                <a:latin typeface="Calibri" pitchFamily="34" charset="0"/>
+                <a:ea typeface="Calibri" pitchFamily="34" charset="-122"/>
+                <a:cs typeface="Calibri" pitchFamily="34" charset="-120"/>
+              </a:rPr>
+              <a:t>$9.2</a:t>
+            </a:r>
+            <a:endParaRPr lang="en-US" sz="900" dirty="0"/>
+          </a:p>
+        </p:txBody>
+      </p:sp>
+      <p:sp>
+        <p:nvSpPr>
+          <p:cNvPr id="21" name="Shape 19"/>
+          <p:cNvSpPr/>
+          <p:nvPr/>
+        </p:nvSpPr>
+        <p:spPr>
+          <a:xfrm>
+            <a:off x="3446457" y="2359152"/>
+            <a:ext cx="900268" cy="1072896"/>
+          </a:xfrm>
+          <a:prstGeom prst="rect">
+            <a:avLst/>
+          </a:prstGeom>
+          <a:solidFill>
+            <a:srgbClr val="D0D1CF"/>
+          </a:solidFill>
+          <a:ln w="12700">
+            <a:solidFill>
+              <a:srgbClr val="FFF5ED"/>
+            </a:solidFill>
+            <a:prstDash val="solid"/>
+          </a:ln>
+        </p:spPr>
+      </p:sp>
+      <p:sp>
+        <p:nvSpPr>
+          <p:cNvPr id="22" name="Text 20"/>
+          <p:cNvSpPr/>
+          <p:nvPr/>
+        </p:nvSpPr>
+        <p:spPr>
+          <a:xfrm>
+            <a:off x="3446457" y="2359152"/>
+            <a:ext cx="900268" cy="1072896"/>
+          </a:xfrm>
+          <a:prstGeom prst="rect">
+            <a:avLst/>
+          </a:prstGeom>
+          <a:noFill/>
+          <a:ln/>
+        </p:spPr>
+        <p:txBody>
+          <a:bodyPr wrap="square" lIns="0" tIns="0" rIns="0" bIns="0" rtlCol="0" anchor="ctr"/>
+          <a:lstStyle/>
+          <a:p>
+            <a:pPr algn="ctr" indent="0" marL="0">
+              <a:buNone/>
+            </a:pPr>
+            <a:r>
+              <a:rPr lang="en-US" sz="900" dirty="0">
+                <a:solidFill>
+                  <a:srgbClr val="353745"/>
+                </a:solidFill>
+                <a:latin typeface="Calibri" pitchFamily="34" charset="0"/>
+                <a:ea typeface="Calibri" pitchFamily="34" charset="-122"/>
+                <a:cs typeface="Calibri" pitchFamily="34" charset="-120"/>
+              </a:rPr>
+              <a:t>$8.3</a:t>
+            </a:r>
+            <a:endParaRPr lang="en-US" sz="900" dirty="0"/>
+          </a:p>
+        </p:txBody>
+      </p:sp>
+      <p:sp>
+        <p:nvSpPr>
+          <p:cNvPr id="23" name="Shape 21"/>
+          <p:cNvSpPr/>
+          <p:nvPr/>
+        </p:nvSpPr>
+        <p:spPr>
+          <a:xfrm>
+            <a:off x="4346725" y="2359152"/>
+            <a:ext cx="900268" cy="1072896"/>
+          </a:xfrm>
+          <a:prstGeom prst="rect">
+            <a:avLst/>
+          </a:prstGeom>
+          <a:solidFill>
+            <a:srgbClr val="B3BDC0"/>
+          </a:solidFill>
+          <a:ln w="12700">
+            <a:solidFill>
+              <a:srgbClr val="FFF5ED"/>
+            </a:solidFill>
+            <a:prstDash val="solid"/>
+          </a:ln>
+        </p:spPr>
+      </p:sp>
+      <p:sp>
+        <p:nvSpPr>
+          <p:cNvPr id="24" name="Text 22"/>
+          <p:cNvSpPr/>
+          <p:nvPr/>
+        </p:nvSpPr>
+        <p:spPr>
+          <a:xfrm>
+            <a:off x="4346725" y="2359152"/>
+            <a:ext cx="900268" cy="1072896"/>
+          </a:xfrm>
+          <a:prstGeom prst="rect">
+            <a:avLst/>
+          </a:prstGeom>
+          <a:noFill/>
+          <a:ln/>
+        </p:spPr>
+        <p:txBody>
+          <a:bodyPr wrap="square" lIns="0" tIns="0" rIns="0" bIns="0" rtlCol="0" anchor="ctr"/>
+          <a:lstStyle/>
+          <a:p>
+            <a:pPr algn="ctr" indent="0" marL="0">
+              <a:buNone/>
+            </a:pPr>
+            <a:r>
+              <a:rPr lang="en-US" sz="900" dirty="0">
+                <a:solidFill>
+                  <a:srgbClr val="353745"/>
+                </a:solidFill>
+                <a:latin typeface="Calibri" pitchFamily="34" charset="0"/>
+                <a:ea typeface="Calibri" pitchFamily="34" charset="-122"/>
+                <a:cs typeface="Calibri" pitchFamily="34" charset="-120"/>
+              </a:rPr>
+              <a:t>$10.5</a:t>
+            </a:r>
+            <a:endParaRPr lang="en-US" sz="900" dirty="0"/>
+          </a:p>
+        </p:txBody>
+      </p:sp>
+      <p:sp>
+        <p:nvSpPr>
+          <p:cNvPr id="25" name="Shape 23"/>
+          <p:cNvSpPr/>
+          <p:nvPr/>
+        </p:nvSpPr>
+        <p:spPr>
+          <a:xfrm>
+            <a:off x="5246993" y="2359152"/>
+            <a:ext cx="900268" cy="1072896"/>
+          </a:xfrm>
+          <a:prstGeom prst="rect">
+            <a:avLst/>
+          </a:prstGeom>
+          <a:solidFill>
+            <a:srgbClr val="BAC1C3"/>
+          </a:solidFill>
+          <a:ln w="12700">
+            <a:solidFill>
+              <a:srgbClr val="FFF5ED"/>
+            </a:solidFill>
+            <a:prstDash val="solid"/>
+          </a:ln>
+        </p:spPr>
+      </p:sp>
+      <p:sp>
+        <p:nvSpPr>
+          <p:cNvPr id="26" name="Text 24"/>
+          <p:cNvSpPr/>
+          <p:nvPr/>
+        </p:nvSpPr>
+        <p:spPr>
+          <a:xfrm>
+            <a:off x="5246993" y="2359152"/>
+            <a:ext cx="900268" cy="1072896"/>
+          </a:xfrm>
+          <a:prstGeom prst="rect">
+            <a:avLst/>
+          </a:prstGeom>
+          <a:noFill/>
+          <a:ln/>
+        </p:spPr>
+        <p:txBody>
+          <a:bodyPr wrap="square" lIns="0" tIns="0" rIns="0" bIns="0" rtlCol="0" anchor="ctr"/>
+          <a:lstStyle/>
+          <a:p>
+            <a:pPr algn="ctr" indent="0" marL="0">
+              <a:buNone/>
+            </a:pPr>
+            <a:r>
+              <a:rPr lang="en-US" sz="900" dirty="0">
+                <a:solidFill>
+                  <a:srgbClr val="353745"/>
+                </a:solidFill>
+                <a:latin typeface="Calibri" pitchFamily="34" charset="0"/>
+                <a:ea typeface="Calibri" pitchFamily="34" charset="-122"/>
+                <a:cs typeface="Calibri" pitchFamily="34" charset="-120"/>
+              </a:rPr>
+              <a:t>$10.0</a:t>
+            </a:r>
+            <a:endParaRPr lang="en-US" sz="900" dirty="0"/>
+          </a:p>
+        </p:txBody>
+      </p:sp>
+      <p:sp>
+        <p:nvSpPr>
+          <p:cNvPr id="27" name="Shape 25"/>
+          <p:cNvSpPr/>
+          <p:nvPr/>
+        </p:nvSpPr>
+        <p:spPr>
+          <a:xfrm>
+            <a:off x="6147262" y="2359152"/>
+            <a:ext cx="900268" cy="1072896"/>
+          </a:xfrm>
+          <a:prstGeom prst="rect">
+            <a:avLst/>
+          </a:prstGeom>
+          <a:solidFill>
+            <a:srgbClr val="879EAA"/>
+          </a:solidFill>
+          <a:ln w="12700">
+            <a:solidFill>
+              <a:srgbClr val="FFF5ED"/>
+            </a:solidFill>
+            <a:prstDash val="solid"/>
+          </a:ln>
+        </p:spPr>
+      </p:sp>
+      <p:sp>
+        <p:nvSpPr>
+          <p:cNvPr id="28" name="Text 26"/>
+          <p:cNvSpPr/>
+          <p:nvPr/>
+        </p:nvSpPr>
+        <p:spPr>
+          <a:xfrm>
+            <a:off x="6147262" y="2359152"/>
+            <a:ext cx="900268" cy="1072896"/>
+          </a:xfrm>
+          <a:prstGeom prst="rect">
+            <a:avLst/>
+          </a:prstGeom>
+          <a:noFill/>
+          <a:ln/>
+        </p:spPr>
+        <p:txBody>
+          <a:bodyPr wrap="square" lIns="0" tIns="0" rIns="0" bIns="0" rtlCol="0" anchor="ctr"/>
+          <a:lstStyle/>
+          <a:p>
+            <a:pPr algn="ctr" indent="0" marL="0">
+              <a:buNone/>
+            </a:pPr>
+            <a:r>
+              <a:rPr lang="en-US" sz="900" dirty="0">
+                <a:solidFill>
+                  <a:srgbClr val="FFFFFF"/>
+                </a:solidFill>
+                <a:latin typeface="Calibri" pitchFamily="34" charset="0"/>
+                <a:ea typeface="Calibri" pitchFamily="34" charset="-122"/>
+                <a:cs typeface="Calibri" pitchFamily="34" charset="-120"/>
+              </a:rPr>
+              <a:t>$13.8</a:t>
+            </a:r>
+            <a:endParaRPr lang="en-US" sz="900" dirty="0"/>
+          </a:p>
+        </p:txBody>
+      </p:sp>
+      <p:sp>
+        <p:nvSpPr>
+          <p:cNvPr id="29" name="Shape 27"/>
+          <p:cNvSpPr/>
+          <p:nvPr/>
+        </p:nvSpPr>
+        <p:spPr>
+          <a:xfrm>
+            <a:off x="7047530" y="2359152"/>
+            <a:ext cx="900268" cy="1072896"/>
+          </a:xfrm>
+          <a:prstGeom prst="rect">
+            <a:avLst/>
+          </a:prstGeom>
+          <a:solidFill>
+            <a:srgbClr val="93A7B0"/>
+          </a:solidFill>
+          <a:ln w="12700">
+            <a:solidFill>
+              <a:srgbClr val="FFF5ED"/>
+            </a:solidFill>
+            <a:prstDash val="solid"/>
+          </a:ln>
+        </p:spPr>
+      </p:sp>
+      <p:sp>
+        <p:nvSpPr>
+          <p:cNvPr id="30" name="Text 28"/>
+          <p:cNvSpPr/>
+          <p:nvPr/>
+        </p:nvSpPr>
+        <p:spPr>
+          <a:xfrm>
+            <a:off x="7047530" y="2359152"/>
+            <a:ext cx="900268" cy="1072896"/>
+          </a:xfrm>
+          <a:prstGeom prst="rect">
+            <a:avLst/>
+          </a:prstGeom>
+          <a:noFill/>
+          <a:ln/>
+        </p:spPr>
+        <p:txBody>
+          <a:bodyPr wrap="square" lIns="0" tIns="0" rIns="0" bIns="0" rtlCol="0" anchor="ctr"/>
+          <a:lstStyle/>
+          <a:p>
+            <a:pPr algn="ctr" indent="0" marL="0">
+              <a:buNone/>
+            </a:pPr>
+            <a:r>
+              <a:rPr lang="en-US" sz="900" dirty="0">
+                <a:solidFill>
+                  <a:srgbClr val="353745"/>
+                </a:solidFill>
+                <a:latin typeface="Calibri" pitchFamily="34" charset="0"/>
+                <a:ea typeface="Calibri" pitchFamily="34" charset="-122"/>
+                <a:cs typeface="Calibri" pitchFamily="34" charset="-120"/>
+              </a:rPr>
+              <a:t>$12.9</a:t>
+            </a:r>
+            <a:endParaRPr lang="en-US" sz="900" dirty="0"/>
+          </a:p>
+        </p:txBody>
+      </p:sp>
+      <p:sp>
+        <p:nvSpPr>
+          <p:cNvPr id="31" name="Shape 29"/>
+          <p:cNvSpPr/>
+          <p:nvPr/>
+        </p:nvSpPr>
+        <p:spPr>
+          <a:xfrm>
+            <a:off x="7947799" y="2359152"/>
+            <a:ext cx="900268" cy="1072896"/>
+          </a:xfrm>
+          <a:prstGeom prst="rect">
+            <a:avLst/>
+          </a:prstGeom>
+          <a:solidFill>
+            <a:srgbClr val="7793A2"/>
+          </a:solidFill>
+          <a:ln w="12700">
+            <a:solidFill>
+              <a:srgbClr val="FFF5ED"/>
+            </a:solidFill>
+            <a:prstDash val="solid"/>
+          </a:ln>
+        </p:spPr>
+      </p:sp>
+      <p:sp>
+        <p:nvSpPr>
+          <p:cNvPr id="32" name="Text 30"/>
+          <p:cNvSpPr/>
+          <p:nvPr/>
+        </p:nvSpPr>
+        <p:spPr>
+          <a:xfrm>
+            <a:off x="7947799" y="2359152"/>
+            <a:ext cx="900268" cy="1072896"/>
+          </a:xfrm>
+          <a:prstGeom prst="rect">
+            <a:avLst/>
+          </a:prstGeom>
+          <a:noFill/>
+          <a:ln/>
+        </p:spPr>
+        <p:txBody>
+          <a:bodyPr wrap="square" lIns="0" tIns="0" rIns="0" bIns="0" rtlCol="0" anchor="ctr"/>
+          <a:lstStyle/>
+          <a:p>
+            <a:pPr algn="ctr" indent="0" marL="0">
+              <a:buNone/>
+            </a:pPr>
+            <a:r>
+              <a:rPr lang="en-US" sz="900" dirty="0">
+                <a:solidFill>
+                  <a:srgbClr val="FFFFFF"/>
+                </a:solidFill>
+                <a:latin typeface="Calibri" pitchFamily="34" charset="0"/>
+                <a:ea typeface="Calibri" pitchFamily="34" charset="-122"/>
+                <a:cs typeface="Calibri" pitchFamily="34" charset="-120"/>
+              </a:rPr>
+              <a:t>$15.0</a:t>
+            </a:r>
+            <a:endParaRPr lang="en-US" sz="900" dirty="0"/>
+          </a:p>
+        </p:txBody>
+      </p:sp>
+      <p:sp>
+        <p:nvSpPr>
+          <p:cNvPr id="33" name="Shape 31"/>
+          <p:cNvSpPr/>
+          <p:nvPr/>
+        </p:nvSpPr>
+        <p:spPr>
+          <a:xfrm>
+            <a:off x="8848067" y="2359152"/>
+            <a:ext cx="900268" cy="1072896"/>
+          </a:xfrm>
+          <a:prstGeom prst="rect">
+            <a:avLst/>
+          </a:prstGeom>
+          <a:solidFill>
+            <a:srgbClr val="557B90"/>
+          </a:solidFill>
+          <a:ln w="12700">
+            <a:solidFill>
+              <a:srgbClr val="FFF5ED"/>
+            </a:solidFill>
+            <a:prstDash val="solid"/>
+          </a:ln>
+        </p:spPr>
+      </p:sp>
+      <p:sp>
+        <p:nvSpPr>
+          <p:cNvPr id="34" name="Text 32"/>
+          <p:cNvSpPr/>
+          <p:nvPr/>
+        </p:nvSpPr>
+        <p:spPr>
+          <a:xfrm>
+            <a:off x="8848067" y="2359152"/>
+            <a:ext cx="900268" cy="1072896"/>
+          </a:xfrm>
+          <a:prstGeom prst="rect">
+            <a:avLst/>
+          </a:prstGeom>
+          <a:noFill/>
+          <a:ln/>
+        </p:spPr>
+        <p:txBody>
+          <a:bodyPr wrap="square" lIns="0" tIns="0" rIns="0" bIns="0" rtlCol="0" anchor="ctr"/>
+          <a:lstStyle/>
+          <a:p>
+            <a:pPr algn="ctr" indent="0" marL="0">
+              <a:buNone/>
+            </a:pPr>
+            <a:r>
+              <a:rPr lang="en-US" sz="900" dirty="0">
+                <a:solidFill>
+                  <a:srgbClr val="FFFFFF"/>
+                </a:solidFill>
+                <a:latin typeface="Calibri" pitchFamily="34" charset="0"/>
+                <a:ea typeface="Calibri" pitchFamily="34" charset="-122"/>
+                <a:cs typeface="Calibri" pitchFamily="34" charset="-120"/>
+              </a:rPr>
+              <a:t>$17.6</a:t>
+            </a:r>
+            <a:endParaRPr lang="en-US" sz="900" dirty="0"/>
+          </a:p>
+        </p:txBody>
+      </p:sp>
+      <p:sp>
+        <p:nvSpPr>
+          <p:cNvPr id="35" name="Shape 33"/>
+          <p:cNvSpPr/>
+          <p:nvPr/>
+        </p:nvSpPr>
+        <p:spPr>
+          <a:xfrm>
+            <a:off x="9748335" y="2359152"/>
+            <a:ext cx="900268" cy="1072896"/>
+          </a:xfrm>
+          <a:prstGeom prst="rect">
+            <a:avLst/>
+          </a:prstGeom>
+          <a:solidFill>
+            <a:srgbClr val="49738A"/>
+          </a:solidFill>
+          <a:ln w="12700">
+            <a:solidFill>
+              <a:srgbClr val="FFF5ED"/>
+            </a:solidFill>
+            <a:prstDash val="solid"/>
+          </a:ln>
+        </p:spPr>
+      </p:sp>
+      <p:sp>
+        <p:nvSpPr>
+          <p:cNvPr id="36" name="Text 34"/>
+          <p:cNvSpPr/>
+          <p:nvPr/>
+        </p:nvSpPr>
+        <p:spPr>
+          <a:xfrm>
+            <a:off x="9748335" y="2359152"/>
+            <a:ext cx="900268" cy="1072896"/>
+          </a:xfrm>
+          <a:prstGeom prst="rect">
+            <a:avLst/>
+          </a:prstGeom>
+          <a:noFill/>
+          <a:ln/>
+        </p:spPr>
+        <p:txBody>
+          <a:bodyPr wrap="square" lIns="0" tIns="0" rIns="0" bIns="0" rtlCol="0" anchor="ctr"/>
+          <a:lstStyle/>
+          <a:p>
+            <a:pPr algn="ctr" indent="0" marL="0">
+              <a:buNone/>
+            </a:pPr>
+            <a:r>
+              <a:rPr lang="en-US" sz="900" dirty="0">
+                <a:solidFill>
+                  <a:srgbClr val="FFFFFF"/>
+                </a:solidFill>
+                <a:latin typeface="Calibri" pitchFamily="34" charset="0"/>
+                <a:ea typeface="Calibri" pitchFamily="34" charset="-122"/>
+                <a:cs typeface="Calibri" pitchFamily="34" charset="-120"/>
+              </a:rPr>
+              <a:t>$18.5</a:t>
+            </a:r>
+            <a:endParaRPr lang="en-US" sz="900" dirty="0"/>
+          </a:p>
+        </p:txBody>
+      </p:sp>
+      <p:sp>
+        <p:nvSpPr>
+          <p:cNvPr id="37" name="Shape 35"/>
+          <p:cNvSpPr/>
+          <p:nvPr/>
+        </p:nvSpPr>
+        <p:spPr>
+          <a:xfrm>
+            <a:off x="10648604" y="2359152"/>
+            <a:ext cx="900268" cy="1072896"/>
+          </a:xfrm>
+          <a:prstGeom prst="rect">
+            <a:avLst/>
+          </a:prstGeom>
+          <a:solidFill>
+            <a:srgbClr val="4E768D"/>
+          </a:solidFill>
+          <a:ln w="12700">
+            <a:solidFill>
+              <a:srgbClr val="FFF5ED"/>
+            </a:solidFill>
+            <a:prstDash val="solid"/>
+          </a:ln>
+        </p:spPr>
+      </p:sp>
+      <p:sp>
+        <p:nvSpPr>
+          <p:cNvPr id="38" name="Text 36"/>
+          <p:cNvSpPr/>
+          <p:nvPr/>
+        </p:nvSpPr>
+        <p:spPr>
+          <a:xfrm>
+            <a:off x="10648604" y="2359152"/>
+            <a:ext cx="900268" cy="1072896"/>
+          </a:xfrm>
+          <a:prstGeom prst="rect">
+            <a:avLst/>
+          </a:prstGeom>
+          <a:noFill/>
+          <a:ln/>
+        </p:spPr>
+        <p:txBody>
+          <a:bodyPr wrap="square" lIns="0" tIns="0" rIns="0" bIns="0" rtlCol="0" anchor="ctr"/>
+          <a:lstStyle/>
+          <a:p>
+            <a:pPr algn="ctr" indent="0" marL="0">
+              <a:buNone/>
+            </a:pPr>
+            <a:r>
+              <a:rPr lang="en-US" sz="900" dirty="0">
+                <a:solidFill>
+                  <a:srgbClr val="FFFFFF"/>
+                </a:solidFill>
+                <a:latin typeface="Calibri" pitchFamily="34" charset="0"/>
+                <a:ea typeface="Calibri" pitchFamily="34" charset="-122"/>
+                <a:cs typeface="Calibri" pitchFamily="34" charset="-120"/>
+              </a:rPr>
+              <a:t>$18.1</a:t>
+            </a:r>
+            <a:endParaRPr lang="en-US" sz="900" dirty="0"/>
+          </a:p>
+        </p:txBody>
+      </p:sp>
+      <p:sp>
+        <p:nvSpPr>
+          <p:cNvPr id="39" name="Text 37"/>
+          <p:cNvSpPr/>
+          <p:nvPr/>
+        </p:nvSpPr>
+        <p:spPr>
+          <a:xfrm>
+            <a:off x="640080" y="3432048"/>
+            <a:ext cx="914400" cy="1072896"/>
+          </a:xfrm>
+          <a:prstGeom prst="rect">
+            <a:avLst/>
+          </a:prstGeom>
+          <a:noFill/>
+          <a:ln/>
+        </p:spPr>
+        <p:txBody>
+          <a:bodyPr wrap="square" lIns="0" tIns="0" rIns="0" bIns="0" rtlCol="0" anchor="ctr"/>
+          <a:lstStyle/>
+          <a:p>
+            <a:pPr algn="r" indent="0" marL="0">
+              <a:buNone/>
+            </a:pPr>
+            <a:r>
+              <a:rPr lang="en-US" sz="1000" b="1" dirty="0">
+                <a:solidFill>
+                  <a:srgbClr val="353745"/>
+                </a:solidFill>
+                <a:latin typeface="Calibri" pitchFamily="34" charset="0"/>
+                <a:ea typeface="Calibri" pitchFamily="34" charset="-122"/>
+                <a:cs typeface="Calibri" pitchFamily="34" charset="-120"/>
+              </a:rPr>
+              <a:t>Operations</a:t>
+            </a:r>
+            <a:endParaRPr lang="en-US" sz="1000" dirty="0"/>
+          </a:p>
+        </p:txBody>
+      </p:sp>
+      <p:sp>
+        <p:nvSpPr>
+          <p:cNvPr id="40" name="Shape 38"/>
+          <p:cNvSpPr/>
+          <p:nvPr/>
+        </p:nvSpPr>
+        <p:spPr>
+          <a:xfrm>
+            <a:off x="1645920" y="3432048"/>
+            <a:ext cx="900268" cy="1072896"/>
+          </a:xfrm>
+          <a:prstGeom prst="rect">
+            <a:avLst/>
+          </a:prstGeom>
+          <a:solidFill>
+            <a:srgbClr val="C7CBCA"/>
+          </a:solidFill>
+          <a:ln w="12700">
+            <a:solidFill>
+              <a:srgbClr val="FFF5ED"/>
+            </a:solidFill>
+            <a:prstDash val="solid"/>
+          </a:ln>
+        </p:spPr>
+      </p:sp>
+      <p:sp>
+        <p:nvSpPr>
+          <p:cNvPr id="41" name="Text 39"/>
+          <p:cNvSpPr/>
+          <p:nvPr/>
+        </p:nvSpPr>
+        <p:spPr>
+          <a:xfrm>
+            <a:off x="1645920" y="3432048"/>
+            <a:ext cx="900268" cy="1072896"/>
+          </a:xfrm>
+          <a:prstGeom prst="rect">
+            <a:avLst/>
+          </a:prstGeom>
+          <a:noFill/>
+          <a:ln/>
+        </p:spPr>
+        <p:txBody>
+          <a:bodyPr wrap="square" lIns="0" tIns="0" rIns="0" bIns="0" rtlCol="0" anchor="ctr"/>
+          <a:lstStyle/>
+          <a:p>
+            <a:pPr algn="ctr" indent="0" marL="0">
+              <a:buNone/>
+            </a:pPr>
+            <a:r>
+              <a:rPr lang="en-US" sz="900" dirty="0">
+                <a:solidFill>
+                  <a:srgbClr val="353745"/>
+                </a:solidFill>
+                <a:latin typeface="Calibri" pitchFamily="34" charset="0"/>
+                <a:ea typeface="Calibri" pitchFamily="34" charset="-122"/>
+                <a:cs typeface="Calibri" pitchFamily="34" charset="-120"/>
+              </a:rPr>
+              <a:t>$9.0</a:t>
+            </a:r>
+            <a:endParaRPr lang="en-US" sz="900" dirty="0"/>
+          </a:p>
+        </p:txBody>
+      </p:sp>
+      <p:sp>
+        <p:nvSpPr>
+          <p:cNvPr id="42" name="Shape 40"/>
+          <p:cNvSpPr/>
+          <p:nvPr/>
+        </p:nvSpPr>
+        <p:spPr>
+          <a:xfrm>
+            <a:off x="2546188" y="3432048"/>
+            <a:ext cx="900268" cy="1072896"/>
+          </a:xfrm>
+          <a:prstGeom prst="rect">
+            <a:avLst/>
+          </a:prstGeom>
+          <a:solidFill>
+            <a:srgbClr val="DBD9D4"/>
+          </a:solidFill>
+          <a:ln w="12700">
+            <a:solidFill>
+              <a:srgbClr val="FFF5ED"/>
+            </a:solidFill>
+            <a:prstDash val="solid"/>
+          </a:ln>
+        </p:spPr>
+      </p:sp>
+      <p:sp>
+        <p:nvSpPr>
+          <p:cNvPr id="43" name="Text 41"/>
+          <p:cNvSpPr/>
+          <p:nvPr/>
+        </p:nvSpPr>
+        <p:spPr>
+          <a:xfrm>
+            <a:off x="2546188" y="3432048"/>
+            <a:ext cx="900268" cy="1072896"/>
+          </a:xfrm>
+          <a:prstGeom prst="rect">
+            <a:avLst/>
+          </a:prstGeom>
+          <a:noFill/>
+          <a:ln/>
+        </p:spPr>
+        <p:txBody>
+          <a:bodyPr wrap="square" lIns="0" tIns="0" rIns="0" bIns="0" rtlCol="0" anchor="ctr"/>
+          <a:lstStyle/>
+          <a:p>
+            <a:pPr algn="ctr" indent="0" marL="0">
+              <a:buNone/>
+            </a:pPr>
+            <a:r>
+              <a:rPr lang="en-US" sz="900" dirty="0">
+                <a:solidFill>
+                  <a:srgbClr val="353745"/>
+                </a:solidFill>
+                <a:latin typeface="Calibri" pitchFamily="34" charset="0"/>
+                <a:ea typeface="Calibri" pitchFamily="34" charset="-122"/>
+                <a:cs typeface="Calibri" pitchFamily="34" charset="-120"/>
+              </a:rPr>
+              <a:t>$7.5</a:t>
+            </a:r>
+            <a:endParaRPr lang="en-US" sz="900" dirty="0"/>
+          </a:p>
+        </p:txBody>
+      </p:sp>
+      <p:sp>
+        <p:nvSpPr>
+          <p:cNvPr id="44" name="Shape 42"/>
+          <p:cNvSpPr/>
+          <p:nvPr/>
+        </p:nvSpPr>
+        <p:spPr>
+          <a:xfrm>
+            <a:off x="3446457" y="3432048"/>
+            <a:ext cx="900268" cy="1072896"/>
+          </a:xfrm>
+          <a:prstGeom prst="rect">
+            <a:avLst/>
+          </a:prstGeom>
+          <a:solidFill>
+            <a:srgbClr val="DEDBD5"/>
+          </a:solidFill>
+          <a:ln w="12700">
+            <a:solidFill>
+              <a:srgbClr val="FFF5ED"/>
+            </a:solidFill>
+            <a:prstDash val="solid"/>
+          </a:ln>
+        </p:spPr>
+      </p:sp>
+      <p:sp>
+        <p:nvSpPr>
+          <p:cNvPr id="45" name="Text 43"/>
+          <p:cNvSpPr/>
+          <p:nvPr/>
+        </p:nvSpPr>
+        <p:spPr>
+          <a:xfrm>
+            <a:off x="3446457" y="3432048"/>
+            <a:ext cx="900268" cy="1072896"/>
+          </a:xfrm>
+          <a:prstGeom prst="rect">
+            <a:avLst/>
+          </a:prstGeom>
+          <a:noFill/>
+          <a:ln/>
+        </p:spPr>
+        <p:txBody>
+          <a:bodyPr wrap="square" lIns="0" tIns="0" rIns="0" bIns="0" rtlCol="0" anchor="ctr"/>
+          <a:lstStyle/>
+          <a:p>
+            <a:pPr algn="ctr" indent="0" marL="0">
+              <a:buNone/>
+            </a:pPr>
+            <a:r>
+              <a:rPr lang="en-US" sz="900" dirty="0">
+                <a:solidFill>
+                  <a:srgbClr val="353745"/>
+                </a:solidFill>
+                <a:latin typeface="Calibri" pitchFamily="34" charset="0"/>
+                <a:ea typeface="Calibri" pitchFamily="34" charset="-122"/>
+                <a:cs typeface="Calibri" pitchFamily="34" charset="-120"/>
+              </a:rPr>
+              <a:t>$7.3</a:t>
+            </a:r>
+            <a:endParaRPr lang="en-US" sz="900" dirty="0"/>
+          </a:p>
+        </p:txBody>
+      </p:sp>
+      <p:sp>
+        <p:nvSpPr>
+          <p:cNvPr id="46" name="Shape 44"/>
+          <p:cNvSpPr/>
+          <p:nvPr/>
+        </p:nvSpPr>
+        <p:spPr>
+          <a:xfrm>
+            <a:off x="4346725" y="3432048"/>
+            <a:ext cx="900268" cy="1072896"/>
+          </a:xfrm>
+          <a:prstGeom prst="rect">
+            <a:avLst/>
+          </a:prstGeom>
+          <a:solidFill>
+            <a:srgbClr val="D0D1CF"/>
+          </a:solidFill>
+          <a:ln w="12700">
+            <a:solidFill>
+              <a:srgbClr val="FFF5ED"/>
+            </a:solidFill>
+            <a:prstDash val="solid"/>
+          </a:ln>
+        </p:spPr>
+      </p:sp>
+      <p:sp>
+        <p:nvSpPr>
+          <p:cNvPr id="47" name="Text 45"/>
+          <p:cNvSpPr/>
+          <p:nvPr/>
+        </p:nvSpPr>
+        <p:spPr>
+          <a:xfrm>
+            <a:off x="4346725" y="3432048"/>
+            <a:ext cx="900268" cy="1072896"/>
+          </a:xfrm>
+          <a:prstGeom prst="rect">
+            <a:avLst/>
+          </a:prstGeom>
+          <a:noFill/>
+          <a:ln/>
+        </p:spPr>
+        <p:txBody>
+          <a:bodyPr wrap="square" lIns="0" tIns="0" rIns="0" bIns="0" rtlCol="0" anchor="ctr"/>
+          <a:lstStyle/>
+          <a:p>
+            <a:pPr algn="ctr" indent="0" marL="0">
+              <a:buNone/>
+            </a:pPr>
+            <a:r>
+              <a:rPr lang="en-US" sz="900" dirty="0">
+                <a:solidFill>
+                  <a:srgbClr val="353745"/>
+                </a:solidFill>
+                <a:latin typeface="Calibri" pitchFamily="34" charset="0"/>
+                <a:ea typeface="Calibri" pitchFamily="34" charset="-122"/>
+                <a:cs typeface="Calibri" pitchFamily="34" charset="-120"/>
+              </a:rPr>
+              <a:t>$8.3</a:t>
+            </a:r>
+            <a:endParaRPr lang="en-US" sz="900" dirty="0"/>
+          </a:p>
+        </p:txBody>
+      </p:sp>
+      <p:sp>
+        <p:nvSpPr>
+          <p:cNvPr id="48" name="Shape 46"/>
+          <p:cNvSpPr/>
+          <p:nvPr/>
+        </p:nvSpPr>
+        <p:spPr>
+          <a:xfrm>
+            <a:off x="5246993" y="3432048"/>
+            <a:ext cx="900268" cy="1072896"/>
+          </a:xfrm>
+          <a:prstGeom prst="rect">
+            <a:avLst/>
+          </a:prstGeom>
+          <a:solidFill>
+            <a:srgbClr val="FBEFE4"/>
+          </a:solidFill>
+          <a:ln w="12700">
+            <a:solidFill>
+              <a:srgbClr val="FFF5ED"/>
+            </a:solidFill>
+            <a:prstDash val="solid"/>
+          </a:ln>
+        </p:spPr>
+      </p:sp>
+      <p:sp>
+        <p:nvSpPr>
+          <p:cNvPr id="49" name="Text 47"/>
+          <p:cNvSpPr/>
+          <p:nvPr/>
+        </p:nvSpPr>
+        <p:spPr>
+          <a:xfrm>
+            <a:off x="5246993" y="3432048"/>
+            <a:ext cx="900268" cy="1072896"/>
+          </a:xfrm>
+          <a:prstGeom prst="rect">
+            <a:avLst/>
+          </a:prstGeom>
+          <a:noFill/>
+          <a:ln/>
+        </p:spPr>
+        <p:txBody>
+          <a:bodyPr wrap="square" lIns="0" tIns="0" rIns="0" bIns="0" rtlCol="0" anchor="ctr"/>
+          <a:lstStyle/>
+          <a:p>
+            <a:pPr algn="ctr" indent="0" marL="0">
+              <a:buNone/>
+            </a:pPr>
+            <a:r>
+              <a:rPr lang="en-US" sz="900" dirty="0">
+                <a:solidFill>
+                  <a:srgbClr val="353745"/>
+                </a:solidFill>
+                <a:latin typeface="Calibri" pitchFamily="34" charset="0"/>
+                <a:ea typeface="Calibri" pitchFamily="34" charset="-122"/>
+                <a:cs typeface="Calibri" pitchFamily="34" charset="-120"/>
+              </a:rPr>
+              <a:t>$5.1</a:t>
+            </a:r>
+            <a:endParaRPr lang="en-US" sz="900" dirty="0"/>
+          </a:p>
+        </p:txBody>
+      </p:sp>
+      <p:sp>
+        <p:nvSpPr>
+          <p:cNvPr id="50" name="Shape 48"/>
+          <p:cNvSpPr/>
+          <p:nvPr/>
+        </p:nvSpPr>
+        <p:spPr>
+          <a:xfrm>
+            <a:off x="6147262" y="3432048"/>
+            <a:ext cx="900268" cy="1072896"/>
+          </a:xfrm>
+          <a:prstGeom prst="rect">
+            <a:avLst/>
+          </a:prstGeom>
+          <a:solidFill>
+            <a:srgbClr val="BDC3C4"/>
+          </a:solidFill>
+          <a:ln w="12700">
+            <a:solidFill>
+              <a:srgbClr val="FFF5ED"/>
+            </a:solidFill>
+            <a:prstDash val="solid"/>
+          </a:ln>
+        </p:spPr>
+      </p:sp>
+      <p:sp>
+        <p:nvSpPr>
+          <p:cNvPr id="51" name="Text 49"/>
+          <p:cNvSpPr/>
+          <p:nvPr/>
+        </p:nvSpPr>
+        <p:spPr>
+          <a:xfrm>
+            <a:off x="6147262" y="3432048"/>
+            <a:ext cx="900268" cy="1072896"/>
+          </a:xfrm>
+          <a:prstGeom prst="rect">
+            <a:avLst/>
+          </a:prstGeom>
+          <a:noFill/>
+          <a:ln/>
+        </p:spPr>
+        <p:txBody>
+          <a:bodyPr wrap="square" lIns="0" tIns="0" rIns="0" bIns="0" rtlCol="0" anchor="ctr"/>
+          <a:lstStyle/>
+          <a:p>
+            <a:pPr algn="ctr" indent="0" marL="0">
+              <a:buNone/>
+            </a:pPr>
+            <a:r>
+              <a:rPr lang="en-US" sz="900" dirty="0">
+                <a:solidFill>
+                  <a:srgbClr val="353745"/>
+                </a:solidFill>
+                <a:latin typeface="Calibri" pitchFamily="34" charset="0"/>
+                <a:ea typeface="Calibri" pitchFamily="34" charset="-122"/>
+                <a:cs typeface="Calibri" pitchFamily="34" charset="-120"/>
+              </a:rPr>
+              <a:t>$9.8</a:t>
+            </a:r>
+            <a:endParaRPr lang="en-US" sz="900" dirty="0"/>
+          </a:p>
+        </p:txBody>
+      </p:sp>
+      <p:sp>
+        <p:nvSpPr>
+          <p:cNvPr id="52" name="Shape 50"/>
+          <p:cNvSpPr/>
+          <p:nvPr/>
+        </p:nvSpPr>
+        <p:spPr>
+          <a:xfrm>
+            <a:off x="7047530" y="3432048"/>
+            <a:ext cx="900268" cy="1072896"/>
+          </a:xfrm>
+          <a:prstGeom prst="rect">
+            <a:avLst/>
+          </a:prstGeom>
+          <a:solidFill>
+            <a:srgbClr val="8EA3AD"/>
+          </a:solidFill>
+          <a:ln w="12700">
+            <a:solidFill>
+              <a:srgbClr val="FFF5ED"/>
+            </a:solidFill>
+            <a:prstDash val="solid"/>
+          </a:ln>
+        </p:spPr>
+      </p:sp>
+      <p:sp>
+        <p:nvSpPr>
+          <p:cNvPr id="53" name="Text 51"/>
+          <p:cNvSpPr/>
+          <p:nvPr/>
+        </p:nvSpPr>
+        <p:spPr>
+          <a:xfrm>
+            <a:off x="7047530" y="3432048"/>
+            <a:ext cx="900268" cy="1072896"/>
+          </a:xfrm>
+          <a:prstGeom prst="rect">
+            <a:avLst/>
+          </a:prstGeom>
+          <a:noFill/>
+          <a:ln/>
+        </p:spPr>
+        <p:txBody>
+          <a:bodyPr wrap="square" lIns="0" tIns="0" rIns="0" bIns="0" rtlCol="0" anchor="ctr"/>
+          <a:lstStyle/>
+          <a:p>
+            <a:pPr algn="ctr" indent="0" marL="0">
+              <a:buNone/>
+            </a:pPr>
+            <a:r>
+              <a:rPr lang="en-US" sz="900" dirty="0">
+                <a:solidFill>
+                  <a:srgbClr val="353745"/>
+                </a:solidFill>
+                <a:latin typeface="Calibri" pitchFamily="34" charset="0"/>
+                <a:ea typeface="Calibri" pitchFamily="34" charset="-122"/>
+                <a:cs typeface="Calibri" pitchFamily="34" charset="-120"/>
+              </a:rPr>
+              <a:t>$13.3</a:t>
+            </a:r>
+            <a:endParaRPr lang="en-US" sz="900" dirty="0"/>
+          </a:p>
+        </p:txBody>
+      </p:sp>
+      <p:sp>
+        <p:nvSpPr>
+          <p:cNvPr id="54" name="Shape 52"/>
+          <p:cNvSpPr/>
+          <p:nvPr/>
+        </p:nvSpPr>
+        <p:spPr>
+          <a:xfrm>
+            <a:off x="7947799" y="3432048"/>
+            <a:ext cx="900268" cy="1072896"/>
+          </a:xfrm>
+          <a:prstGeom prst="rect">
+            <a:avLst/>
+          </a:prstGeom>
+          <a:solidFill>
+            <a:srgbClr val="608295"/>
+          </a:solidFill>
+          <a:ln w="12700">
+            <a:solidFill>
+              <a:srgbClr val="FFF5ED"/>
+            </a:solidFill>
+            <a:prstDash val="solid"/>
+          </a:ln>
+        </p:spPr>
+      </p:sp>
+      <p:sp>
+        <p:nvSpPr>
+          <p:cNvPr id="55" name="Text 53"/>
+          <p:cNvSpPr/>
+          <p:nvPr/>
+        </p:nvSpPr>
+        <p:spPr>
+          <a:xfrm>
+            <a:off x="7947799" y="3432048"/>
+            <a:ext cx="900268" cy="1072896"/>
+          </a:xfrm>
+          <a:prstGeom prst="rect">
+            <a:avLst/>
+          </a:prstGeom>
+          <a:noFill/>
+          <a:ln/>
+        </p:spPr>
+        <p:txBody>
+          <a:bodyPr wrap="square" lIns="0" tIns="0" rIns="0" bIns="0" rtlCol="0" anchor="ctr"/>
+          <a:lstStyle/>
+          <a:p>
+            <a:pPr algn="ctr" indent="0" marL="0">
+              <a:buNone/>
+            </a:pPr>
+            <a:r>
+              <a:rPr lang="en-US" sz="900" dirty="0">
+                <a:solidFill>
+                  <a:srgbClr val="FFFFFF"/>
+                </a:solidFill>
+                <a:latin typeface="Calibri" pitchFamily="34" charset="0"/>
+                <a:ea typeface="Calibri" pitchFamily="34" charset="-122"/>
+                <a:cs typeface="Calibri" pitchFamily="34" charset="-120"/>
+              </a:rPr>
+              <a:t>$16.8</a:t>
+            </a:r>
+            <a:endParaRPr lang="en-US" sz="900" dirty="0"/>
+          </a:p>
+        </p:txBody>
+      </p:sp>
+      <p:sp>
+        <p:nvSpPr>
+          <p:cNvPr id="56" name="Shape 54"/>
+          <p:cNvSpPr/>
+          <p:nvPr/>
+        </p:nvSpPr>
+        <p:spPr>
+          <a:xfrm>
+            <a:off x="8848067" y="3432048"/>
+            <a:ext cx="900268" cy="1072896"/>
+          </a:xfrm>
+          <a:prstGeom prst="rect">
+            <a:avLst/>
+          </a:prstGeom>
+          <a:solidFill>
+            <a:srgbClr val="4C748B"/>
+          </a:solidFill>
+          <a:ln w="12700">
+            <a:solidFill>
+              <a:srgbClr val="FFF5ED"/>
+            </a:solidFill>
+            <a:prstDash val="solid"/>
+          </a:ln>
+        </p:spPr>
+      </p:sp>
+      <p:sp>
+        <p:nvSpPr>
+          <p:cNvPr id="57" name="Text 55"/>
+          <p:cNvSpPr/>
+          <p:nvPr/>
+        </p:nvSpPr>
+        <p:spPr>
+          <a:xfrm>
+            <a:off x="8848067" y="3432048"/>
+            <a:ext cx="900268" cy="1072896"/>
+          </a:xfrm>
+          <a:prstGeom prst="rect">
+            <a:avLst/>
+          </a:prstGeom>
+          <a:noFill/>
+          <a:ln/>
+        </p:spPr>
+        <p:txBody>
+          <a:bodyPr wrap="square" lIns="0" tIns="0" rIns="0" bIns="0" rtlCol="0" anchor="ctr"/>
+          <a:lstStyle/>
+          <a:p>
+            <a:pPr algn="ctr" indent="0" marL="0">
+              <a:buNone/>
+            </a:pPr>
+            <a:r>
+              <a:rPr lang="en-US" sz="900" dirty="0">
+                <a:solidFill>
+                  <a:srgbClr val="FFFFFF"/>
+                </a:solidFill>
+                <a:latin typeface="Calibri" pitchFamily="34" charset="0"/>
+                <a:ea typeface="Calibri" pitchFamily="34" charset="-122"/>
+                <a:cs typeface="Calibri" pitchFamily="34" charset="-120"/>
+              </a:rPr>
+              <a:t>$18.3</a:t>
+            </a:r>
+            <a:endParaRPr lang="en-US" sz="900" dirty="0"/>
+          </a:p>
+        </p:txBody>
+      </p:sp>
+      <p:sp>
+        <p:nvSpPr>
+          <p:cNvPr id="58" name="Shape 56"/>
+          <p:cNvSpPr/>
+          <p:nvPr/>
+        </p:nvSpPr>
+        <p:spPr>
+          <a:xfrm>
+            <a:off x="9748335" y="3432048"/>
+            <a:ext cx="900268" cy="1072896"/>
+          </a:xfrm>
+          <a:prstGeom prst="rect">
+            <a:avLst/>
+          </a:prstGeom>
+          <a:solidFill>
+            <a:srgbClr val="4A738B"/>
+          </a:solidFill>
+          <a:ln w="12700">
+            <a:solidFill>
+              <a:srgbClr val="FFF5ED"/>
+            </a:solidFill>
+            <a:prstDash val="solid"/>
+          </a:ln>
+        </p:spPr>
+      </p:sp>
+      <p:sp>
+        <p:nvSpPr>
+          <p:cNvPr id="59" name="Text 57"/>
+          <p:cNvSpPr/>
+          <p:nvPr/>
+        </p:nvSpPr>
+        <p:spPr>
+          <a:xfrm>
+            <a:off x="9748335" y="3432048"/>
+            <a:ext cx="900268" cy="1072896"/>
+          </a:xfrm>
+          <a:prstGeom prst="rect">
+            <a:avLst/>
+          </a:prstGeom>
+          <a:noFill/>
+          <a:ln/>
+        </p:spPr>
+        <p:txBody>
+          <a:bodyPr wrap="square" lIns="0" tIns="0" rIns="0" bIns="0" rtlCol="0" anchor="ctr"/>
+          <a:lstStyle/>
+          <a:p>
+            <a:pPr algn="ctr" indent="0" marL="0">
+              <a:buNone/>
+            </a:pPr>
+            <a:r>
+              <a:rPr lang="en-US" sz="900" dirty="0">
+                <a:solidFill>
+                  <a:srgbClr val="FFFFFF"/>
+                </a:solidFill>
+                <a:latin typeface="Calibri" pitchFamily="34" charset="0"/>
+                <a:ea typeface="Calibri" pitchFamily="34" charset="-122"/>
+                <a:cs typeface="Calibri" pitchFamily="34" charset="-120"/>
+              </a:rPr>
+              <a:t>$18.4</a:t>
+            </a:r>
+            <a:endParaRPr lang="en-US" sz="900" dirty="0"/>
+          </a:p>
+        </p:txBody>
+      </p:sp>
+      <p:sp>
+        <p:nvSpPr>
+          <p:cNvPr id="60" name="Shape 58"/>
+          <p:cNvSpPr/>
+          <p:nvPr/>
+        </p:nvSpPr>
+        <p:spPr>
+          <a:xfrm>
+            <a:off x="10648604" y="3432048"/>
+            <a:ext cx="900268" cy="1072896"/>
+          </a:xfrm>
+          <a:prstGeom prst="rect">
+            <a:avLst/>
+          </a:prstGeom>
+          <a:solidFill>
+            <a:srgbClr val="2D5F7C"/>
+          </a:solidFill>
+          <a:ln w="12700">
+            <a:solidFill>
+              <a:srgbClr val="FFF5ED"/>
+            </a:solidFill>
+            <a:prstDash val="solid"/>
+          </a:ln>
+        </p:spPr>
+      </p:sp>
+      <p:sp>
+        <p:nvSpPr>
+          <p:cNvPr id="61" name="Text 59"/>
+          <p:cNvSpPr/>
+          <p:nvPr/>
+        </p:nvSpPr>
+        <p:spPr>
+          <a:xfrm>
+            <a:off x="10648604" y="3432048"/>
+            <a:ext cx="900268" cy="1072896"/>
+          </a:xfrm>
+          <a:prstGeom prst="rect">
+            <a:avLst/>
+          </a:prstGeom>
+          <a:noFill/>
+          <a:ln/>
+        </p:spPr>
+        <p:txBody>
+          <a:bodyPr wrap="square" lIns="0" tIns="0" rIns="0" bIns="0" rtlCol="0" anchor="ctr"/>
+          <a:lstStyle/>
+          <a:p>
+            <a:pPr algn="ctr" indent="0" marL="0">
+              <a:buNone/>
+            </a:pPr>
+            <a:r>
+              <a:rPr lang="en-US" sz="900" dirty="0">
+                <a:solidFill>
+                  <a:srgbClr val="FFFFFF"/>
+                </a:solidFill>
+                <a:latin typeface="Calibri" pitchFamily="34" charset="0"/>
+                <a:ea typeface="Calibri" pitchFamily="34" charset="-122"/>
+                <a:cs typeface="Calibri" pitchFamily="34" charset="-120"/>
+              </a:rPr>
+              <a:t>$20.6</a:t>
+            </a:r>
+            <a:endParaRPr lang="en-US" sz="900" dirty="0"/>
+          </a:p>
+        </p:txBody>
+      </p:sp>
+      <p:sp>
+        <p:nvSpPr>
+          <p:cNvPr id="62" name="Text 60"/>
+          <p:cNvSpPr/>
+          <p:nvPr/>
+        </p:nvSpPr>
+        <p:spPr>
+          <a:xfrm>
+            <a:off x="640080" y="4504944"/>
+            <a:ext cx="914400" cy="1072896"/>
+          </a:xfrm>
+          <a:prstGeom prst="rect">
+            <a:avLst/>
+          </a:prstGeom>
+          <a:noFill/>
+          <a:ln/>
+        </p:spPr>
+        <p:txBody>
+          <a:bodyPr wrap="square" lIns="0" tIns="0" rIns="0" bIns="0" rtlCol="0" anchor="ctr"/>
+          <a:lstStyle/>
+          <a:p>
+            <a:pPr algn="r" indent="0" marL="0">
+              <a:buNone/>
+            </a:pPr>
+            <a:r>
+              <a:rPr lang="en-US" sz="1000" b="1" dirty="0">
+                <a:solidFill>
+                  <a:srgbClr val="353745"/>
+                </a:solidFill>
+                <a:latin typeface="Calibri" pitchFamily="34" charset="0"/>
+                <a:ea typeface="Calibri" pitchFamily="34" charset="-122"/>
+                <a:cs typeface="Calibri" pitchFamily="34" charset="-120"/>
+              </a:rPr>
+              <a:t>Technology</a:t>
+            </a:r>
+            <a:endParaRPr lang="en-US" sz="1000" dirty="0"/>
+          </a:p>
+        </p:txBody>
+      </p:sp>
+      <p:sp>
+        <p:nvSpPr>
+          <p:cNvPr id="63" name="Shape 61"/>
+          <p:cNvSpPr/>
+          <p:nvPr/>
+        </p:nvSpPr>
+        <p:spPr>
+          <a:xfrm>
+            <a:off x="1645920" y="4504944"/>
+            <a:ext cx="900268" cy="1072896"/>
+          </a:xfrm>
+          <a:prstGeom prst="rect">
+            <a:avLst/>
+          </a:prstGeom>
+          <a:solidFill>
+            <a:srgbClr val="EFE7DE"/>
+          </a:solidFill>
+          <a:ln w="12700">
+            <a:solidFill>
+              <a:srgbClr val="FFF5ED"/>
+            </a:solidFill>
+            <a:prstDash val="solid"/>
+          </a:ln>
+        </p:spPr>
+      </p:sp>
+      <p:sp>
+        <p:nvSpPr>
+          <p:cNvPr id="64" name="Text 62"/>
+          <p:cNvSpPr/>
+          <p:nvPr/>
+        </p:nvSpPr>
+        <p:spPr>
+          <a:xfrm>
+            <a:off x="1645920" y="4504944"/>
+            <a:ext cx="900268" cy="1072896"/>
+          </a:xfrm>
+          <a:prstGeom prst="rect">
+            <a:avLst/>
+          </a:prstGeom>
+          <a:noFill/>
+          <a:ln/>
+        </p:spPr>
+        <p:txBody>
+          <a:bodyPr wrap="square" lIns="0" tIns="0" rIns="0" bIns="0" rtlCol="0" anchor="ctr"/>
+          <a:lstStyle/>
+          <a:p>
+            <a:pPr algn="ctr" indent="0" marL="0">
+              <a:buNone/>
+            </a:pPr>
+            <a:r>
+              <a:rPr lang="en-US" sz="900" dirty="0">
+                <a:solidFill>
+                  <a:srgbClr val="353745"/>
+                </a:solidFill>
+                <a:latin typeface="Calibri" pitchFamily="34" charset="0"/>
+                <a:ea typeface="Calibri" pitchFamily="34" charset="-122"/>
+                <a:cs typeface="Calibri" pitchFamily="34" charset="-120"/>
+              </a:rPr>
+              <a:t>$6.0</a:t>
+            </a:r>
+            <a:endParaRPr lang="en-US" sz="900" dirty="0"/>
+          </a:p>
+        </p:txBody>
+      </p:sp>
+      <p:sp>
+        <p:nvSpPr>
+          <p:cNvPr id="65" name="Shape 63"/>
+          <p:cNvSpPr/>
+          <p:nvPr/>
+        </p:nvSpPr>
+        <p:spPr>
+          <a:xfrm>
+            <a:off x="2546188" y="4504944"/>
+            <a:ext cx="900268" cy="1072896"/>
+          </a:xfrm>
+          <a:prstGeom prst="rect">
+            <a:avLst/>
+          </a:prstGeom>
+          <a:solidFill>
+            <a:srgbClr val="F3E9E0"/>
+          </a:solidFill>
+          <a:ln w="12700">
+            <a:solidFill>
+              <a:srgbClr val="FFF5ED"/>
+            </a:solidFill>
+            <a:prstDash val="solid"/>
+          </a:ln>
+        </p:spPr>
+      </p:sp>
+      <p:sp>
+        <p:nvSpPr>
+          <p:cNvPr id="66" name="Text 64"/>
+          <p:cNvSpPr/>
+          <p:nvPr/>
+        </p:nvSpPr>
+        <p:spPr>
+          <a:xfrm>
+            <a:off x="2546188" y="4504944"/>
+            <a:ext cx="900268" cy="1072896"/>
+          </a:xfrm>
+          <a:prstGeom prst="rect">
+            <a:avLst/>
+          </a:prstGeom>
+          <a:noFill/>
+          <a:ln/>
+        </p:spPr>
+        <p:txBody>
+          <a:bodyPr wrap="square" lIns="0" tIns="0" rIns="0" bIns="0" rtlCol="0" anchor="ctr"/>
+          <a:lstStyle/>
+          <a:p>
+            <a:pPr algn="ctr" indent="0" marL="0">
+              <a:buNone/>
+            </a:pPr>
+            <a:r>
+              <a:rPr lang="en-US" sz="900" dirty="0">
+                <a:solidFill>
+                  <a:srgbClr val="353745"/>
+                </a:solidFill>
+                <a:latin typeface="Calibri" pitchFamily="34" charset="0"/>
+                <a:ea typeface="Calibri" pitchFamily="34" charset="-122"/>
+                <a:cs typeface="Calibri" pitchFamily="34" charset="-120"/>
+              </a:rPr>
+              <a:t>$5.7</a:t>
+            </a:r>
+            <a:endParaRPr lang="en-US" sz="900" dirty="0"/>
+          </a:p>
+        </p:txBody>
+      </p:sp>
+      <p:sp>
+        <p:nvSpPr>
+          <p:cNvPr id="67" name="Shape 65"/>
+          <p:cNvSpPr/>
+          <p:nvPr/>
+        </p:nvSpPr>
+        <p:spPr>
+          <a:xfrm>
+            <a:off x="3446457" y="4504944"/>
+            <a:ext cx="900268" cy="1072896"/>
+          </a:xfrm>
+          <a:prstGeom prst="rect">
+            <a:avLst/>
+          </a:prstGeom>
+          <a:solidFill>
+            <a:srgbClr val="E7E1DA"/>
+          </a:solidFill>
+          <a:ln w="12700">
+            <a:solidFill>
+              <a:srgbClr val="FFF5ED"/>
+            </a:solidFill>
+            <a:prstDash val="solid"/>
+          </a:ln>
+        </p:spPr>
+      </p:sp>
+      <p:sp>
+        <p:nvSpPr>
+          <p:cNvPr id="68" name="Text 66"/>
+          <p:cNvSpPr/>
+          <p:nvPr/>
+        </p:nvSpPr>
+        <p:spPr>
+          <a:xfrm>
+            <a:off x="3446457" y="4504944"/>
+            <a:ext cx="900268" cy="1072896"/>
+          </a:xfrm>
+          <a:prstGeom prst="rect">
+            <a:avLst/>
+          </a:prstGeom>
+          <a:noFill/>
+          <a:ln/>
+        </p:spPr>
+        <p:txBody>
+          <a:bodyPr wrap="square" lIns="0" tIns="0" rIns="0" bIns="0" rtlCol="0" anchor="ctr"/>
+          <a:lstStyle/>
+          <a:p>
+            <a:pPr algn="ctr" indent="0" marL="0">
+              <a:buNone/>
+            </a:pPr>
+            <a:r>
+              <a:rPr lang="en-US" sz="900" dirty="0">
+                <a:solidFill>
+                  <a:srgbClr val="353745"/>
+                </a:solidFill>
+                <a:latin typeface="Calibri" pitchFamily="34" charset="0"/>
+                <a:ea typeface="Calibri" pitchFamily="34" charset="-122"/>
+                <a:cs typeface="Calibri" pitchFamily="34" charset="-120"/>
+              </a:rPr>
+              <a:t>$6.6</a:t>
+            </a:r>
+            <a:endParaRPr lang="en-US" sz="900" dirty="0"/>
+          </a:p>
+        </p:txBody>
+      </p:sp>
+      <p:sp>
+        <p:nvSpPr>
+          <p:cNvPr id="69" name="Shape 67"/>
+          <p:cNvSpPr/>
+          <p:nvPr/>
+        </p:nvSpPr>
+        <p:spPr>
+          <a:xfrm>
+            <a:off x="4346725" y="4504944"/>
+            <a:ext cx="900268" cy="1072896"/>
+          </a:xfrm>
+          <a:prstGeom prst="rect">
+            <a:avLst/>
+          </a:prstGeom>
+          <a:solidFill>
+            <a:srgbClr val="E4DFD9"/>
+          </a:solidFill>
+          <a:ln w="12700">
+            <a:solidFill>
+              <a:srgbClr val="FFF5ED"/>
+            </a:solidFill>
+            <a:prstDash val="solid"/>
+          </a:ln>
+        </p:spPr>
+      </p:sp>
+      <p:sp>
+        <p:nvSpPr>
+          <p:cNvPr id="70" name="Text 68"/>
+          <p:cNvSpPr/>
+          <p:nvPr/>
+        </p:nvSpPr>
+        <p:spPr>
+          <a:xfrm>
+            <a:off x="4346725" y="4504944"/>
+            <a:ext cx="900268" cy="1072896"/>
+          </a:xfrm>
+          <a:prstGeom prst="rect">
+            <a:avLst/>
+          </a:prstGeom>
+          <a:noFill/>
+          <a:ln/>
+        </p:spPr>
+        <p:txBody>
+          <a:bodyPr wrap="square" lIns="0" tIns="0" rIns="0" bIns="0" rtlCol="0" anchor="ctr"/>
+          <a:lstStyle/>
+          <a:p>
+            <a:pPr algn="ctr" indent="0" marL="0">
+              <a:buNone/>
+            </a:pPr>
+            <a:r>
+              <a:rPr lang="en-US" sz="900" dirty="0">
+                <a:solidFill>
+                  <a:srgbClr val="353745"/>
+                </a:solidFill>
+                <a:latin typeface="Calibri" pitchFamily="34" charset="0"/>
+                <a:ea typeface="Calibri" pitchFamily="34" charset="-122"/>
+                <a:cs typeface="Calibri" pitchFamily="34" charset="-120"/>
+              </a:rPr>
+              <a:t>$6.8</a:t>
+            </a:r>
+            <a:endParaRPr lang="en-US" sz="900" dirty="0"/>
+          </a:p>
+        </p:txBody>
+      </p:sp>
+      <p:sp>
+        <p:nvSpPr>
+          <p:cNvPr id="71" name="Shape 69"/>
+          <p:cNvSpPr/>
+          <p:nvPr/>
+        </p:nvSpPr>
+        <p:spPr>
+          <a:xfrm>
+            <a:off x="5246993" y="4504944"/>
+            <a:ext cx="900268" cy="1072896"/>
+          </a:xfrm>
+          <a:prstGeom prst="rect">
+            <a:avLst/>
+          </a:prstGeom>
+          <a:solidFill>
+            <a:srgbClr val="B7C0C2"/>
+          </a:solidFill>
+          <a:ln w="12700">
+            <a:solidFill>
+              <a:srgbClr val="FFF5ED"/>
+            </a:solidFill>
+            <a:prstDash val="solid"/>
+          </a:ln>
+        </p:spPr>
+      </p:sp>
+      <p:sp>
+        <p:nvSpPr>
+          <p:cNvPr id="72" name="Text 70"/>
+          <p:cNvSpPr/>
+          <p:nvPr/>
+        </p:nvSpPr>
+        <p:spPr>
+          <a:xfrm>
+            <a:off x="5246993" y="4504944"/>
+            <a:ext cx="900268" cy="1072896"/>
+          </a:xfrm>
+          <a:prstGeom prst="rect">
+            <a:avLst/>
+          </a:prstGeom>
+          <a:noFill/>
+          <a:ln/>
+        </p:spPr>
+        <p:txBody>
+          <a:bodyPr wrap="square" lIns="0" tIns="0" rIns="0" bIns="0" rtlCol="0" anchor="ctr"/>
+          <a:lstStyle/>
+          <a:p>
+            <a:pPr algn="ctr" indent="0" marL="0">
+              <a:buNone/>
+            </a:pPr>
+            <a:r>
+              <a:rPr lang="en-US" sz="900" dirty="0">
+                <a:solidFill>
+                  <a:srgbClr val="353745"/>
+                </a:solidFill>
+                <a:latin typeface="Calibri" pitchFamily="34" charset="0"/>
+                <a:ea typeface="Calibri" pitchFamily="34" charset="-122"/>
+                <a:cs typeface="Calibri" pitchFamily="34" charset="-120"/>
+              </a:rPr>
+              <a:t>$10.2</a:t>
+            </a:r>
+            <a:endParaRPr lang="en-US" sz="900" dirty="0"/>
+          </a:p>
+        </p:txBody>
+      </p:sp>
+      <p:sp>
+        <p:nvSpPr>
+          <p:cNvPr id="73" name="Shape 71"/>
+          <p:cNvSpPr/>
+          <p:nvPr/>
+        </p:nvSpPr>
+        <p:spPr>
+          <a:xfrm>
+            <a:off x="6147262" y="4504944"/>
+            <a:ext cx="900268" cy="1072896"/>
+          </a:xfrm>
+          <a:prstGeom prst="rect">
+            <a:avLst/>
+          </a:prstGeom>
+          <a:solidFill>
+            <a:srgbClr val="B2BCBF"/>
+          </a:solidFill>
+          <a:ln w="12700">
+            <a:solidFill>
+              <a:srgbClr val="FFF5ED"/>
+            </a:solidFill>
+            <a:prstDash val="solid"/>
+          </a:ln>
+        </p:spPr>
+      </p:sp>
+      <p:sp>
+        <p:nvSpPr>
+          <p:cNvPr id="74" name="Text 72"/>
+          <p:cNvSpPr/>
+          <p:nvPr/>
+        </p:nvSpPr>
+        <p:spPr>
+          <a:xfrm>
+            <a:off x="6147262" y="4504944"/>
+            <a:ext cx="900268" cy="1072896"/>
+          </a:xfrm>
+          <a:prstGeom prst="rect">
+            <a:avLst/>
+          </a:prstGeom>
+          <a:noFill/>
+          <a:ln/>
+        </p:spPr>
+        <p:txBody>
+          <a:bodyPr wrap="square" lIns="0" tIns="0" rIns="0" bIns="0" rtlCol="0" anchor="ctr"/>
+          <a:lstStyle/>
+          <a:p>
+            <a:pPr algn="ctr" indent="0" marL="0">
+              <a:buNone/>
+            </a:pPr>
+            <a:r>
+              <a:rPr lang="en-US" sz="900" dirty="0">
+                <a:solidFill>
+                  <a:srgbClr val="353745"/>
+                </a:solidFill>
+                <a:latin typeface="Calibri" pitchFamily="34" charset="0"/>
+                <a:ea typeface="Calibri" pitchFamily="34" charset="-122"/>
+                <a:cs typeface="Calibri" pitchFamily="34" charset="-120"/>
+              </a:rPr>
+              <a:t>$10.6</a:t>
+            </a:r>
+            <a:endParaRPr lang="en-US" sz="900" dirty="0"/>
+          </a:p>
+        </p:txBody>
+      </p:sp>
+      <p:sp>
+        <p:nvSpPr>
+          <p:cNvPr id="75" name="Shape 73"/>
+          <p:cNvSpPr/>
+          <p:nvPr/>
+        </p:nvSpPr>
+        <p:spPr>
+          <a:xfrm>
+            <a:off x="7047530" y="4504944"/>
+            <a:ext cx="900268" cy="1072896"/>
+          </a:xfrm>
+          <a:prstGeom prst="rect">
+            <a:avLst/>
+          </a:prstGeom>
+          <a:solidFill>
+            <a:srgbClr val="7D97A4"/>
+          </a:solidFill>
+          <a:ln w="12700">
+            <a:solidFill>
+              <a:srgbClr val="FFF5ED"/>
+            </a:solidFill>
+            <a:prstDash val="solid"/>
+          </a:ln>
+        </p:spPr>
+      </p:sp>
+      <p:sp>
+        <p:nvSpPr>
+          <p:cNvPr id="76" name="Text 74"/>
+          <p:cNvSpPr/>
+          <p:nvPr/>
+        </p:nvSpPr>
+        <p:spPr>
+          <a:xfrm>
+            <a:off x="7047530" y="4504944"/>
+            <a:ext cx="900268" cy="1072896"/>
+          </a:xfrm>
+          <a:prstGeom prst="rect">
+            <a:avLst/>
+          </a:prstGeom>
+          <a:noFill/>
+          <a:ln/>
+        </p:spPr>
+        <p:txBody>
+          <a:bodyPr wrap="square" lIns="0" tIns="0" rIns="0" bIns="0" rtlCol="0" anchor="ctr"/>
+          <a:lstStyle/>
+          <a:p>
+            <a:pPr algn="ctr" indent="0" marL="0">
+              <a:buNone/>
+            </a:pPr>
+            <a:r>
+              <a:rPr lang="en-US" sz="900" dirty="0">
+                <a:solidFill>
+                  <a:srgbClr val="FFFFFF"/>
+                </a:solidFill>
+                <a:latin typeface="Calibri" pitchFamily="34" charset="0"/>
+                <a:ea typeface="Calibri" pitchFamily="34" charset="-122"/>
+                <a:cs typeface="Calibri" pitchFamily="34" charset="-120"/>
+              </a:rPr>
+              <a:t>$14.6</a:t>
+            </a:r>
+            <a:endParaRPr lang="en-US" sz="900" dirty="0"/>
+          </a:p>
+        </p:txBody>
+      </p:sp>
+      <p:sp>
+        <p:nvSpPr>
+          <p:cNvPr id="77" name="Shape 75"/>
+          <p:cNvSpPr/>
+          <p:nvPr/>
+        </p:nvSpPr>
+        <p:spPr>
+          <a:xfrm>
+            <a:off x="7947799" y="4504944"/>
+            <a:ext cx="900268" cy="1072896"/>
+          </a:xfrm>
+          <a:prstGeom prst="rect">
+            <a:avLst/>
+          </a:prstGeom>
+          <a:solidFill>
+            <a:srgbClr val="6A8A9B"/>
+          </a:solidFill>
+          <a:ln w="12700">
+            <a:solidFill>
+              <a:srgbClr val="FFF5ED"/>
+            </a:solidFill>
+            <a:prstDash val="solid"/>
+          </a:ln>
+        </p:spPr>
+      </p:sp>
+      <p:sp>
+        <p:nvSpPr>
+          <p:cNvPr id="78" name="Text 76"/>
+          <p:cNvSpPr/>
+          <p:nvPr/>
+        </p:nvSpPr>
+        <p:spPr>
+          <a:xfrm>
+            <a:off x="7947799" y="4504944"/>
+            <a:ext cx="900268" cy="1072896"/>
+          </a:xfrm>
+          <a:prstGeom prst="rect">
+            <a:avLst/>
+          </a:prstGeom>
+          <a:noFill/>
+          <a:ln/>
+        </p:spPr>
+        <p:txBody>
+          <a:bodyPr wrap="square" lIns="0" tIns="0" rIns="0" bIns="0" rtlCol="0" anchor="ctr"/>
+          <a:lstStyle/>
+          <a:p>
+            <a:pPr algn="ctr" indent="0" marL="0">
+              <a:buNone/>
+            </a:pPr>
+            <a:r>
+              <a:rPr lang="en-US" sz="900" dirty="0">
+                <a:solidFill>
+                  <a:srgbClr val="FFFFFF"/>
+                </a:solidFill>
+                <a:latin typeface="Calibri" pitchFamily="34" charset="0"/>
+                <a:ea typeface="Calibri" pitchFamily="34" charset="-122"/>
+                <a:cs typeface="Calibri" pitchFamily="34" charset="-120"/>
+              </a:rPr>
+              <a:t>$16.0</a:t>
+            </a:r>
+            <a:endParaRPr lang="en-US" sz="900" dirty="0"/>
+          </a:p>
+        </p:txBody>
+      </p:sp>
+      <p:sp>
+        <p:nvSpPr>
+          <p:cNvPr id="79" name="Shape 77"/>
+          <p:cNvSpPr/>
+          <p:nvPr/>
+        </p:nvSpPr>
+        <p:spPr>
+          <a:xfrm>
+            <a:off x="8848067" y="4504944"/>
+            <a:ext cx="900268" cy="1072896"/>
+          </a:xfrm>
+          <a:prstGeom prst="rect">
+            <a:avLst/>
+          </a:prstGeom>
+          <a:solidFill>
+            <a:srgbClr val="7591A0"/>
+          </a:solidFill>
+          <a:ln w="12700">
+            <a:solidFill>
+              <a:srgbClr val="FFF5ED"/>
+            </a:solidFill>
+            <a:prstDash val="solid"/>
+          </a:ln>
+        </p:spPr>
+      </p:sp>
+      <p:sp>
+        <p:nvSpPr>
+          <p:cNvPr id="80" name="Text 78"/>
+          <p:cNvSpPr/>
+          <p:nvPr/>
+        </p:nvSpPr>
+        <p:spPr>
+          <a:xfrm>
+            <a:off x="8848067" y="4504944"/>
+            <a:ext cx="900268" cy="1072896"/>
+          </a:xfrm>
+          <a:prstGeom prst="rect">
+            <a:avLst/>
+          </a:prstGeom>
+          <a:noFill/>
+          <a:ln/>
+        </p:spPr>
+        <p:txBody>
+          <a:bodyPr wrap="square" lIns="0" tIns="0" rIns="0" bIns="0" rtlCol="0" anchor="ctr"/>
+          <a:lstStyle/>
+          <a:p>
+            <a:pPr algn="ctr" indent="0" marL="0">
+              <a:buNone/>
+            </a:pPr>
+            <a:r>
+              <a:rPr lang="en-US" sz="900" dirty="0">
+                <a:solidFill>
+                  <a:srgbClr val="FFFFFF"/>
+                </a:solidFill>
+                <a:latin typeface="Calibri" pitchFamily="34" charset="0"/>
+                <a:ea typeface="Calibri" pitchFamily="34" charset="-122"/>
+                <a:cs typeface="Calibri" pitchFamily="34" charset="-120"/>
+              </a:rPr>
+              <a:t>$15.2</a:t>
+            </a:r>
+            <a:endParaRPr lang="en-US" sz="900" dirty="0"/>
+          </a:p>
+        </p:txBody>
+      </p:sp>
+      <p:sp>
+        <p:nvSpPr>
+          <p:cNvPr id="81" name="Shape 79"/>
+          <p:cNvSpPr/>
+          <p:nvPr/>
+        </p:nvSpPr>
+        <p:spPr>
+          <a:xfrm>
+            <a:off x="9748335" y="4504944"/>
+            <a:ext cx="900268" cy="1072896"/>
+          </a:xfrm>
+          <a:prstGeom prst="rect">
+            <a:avLst/>
+          </a:prstGeom>
+          <a:solidFill>
+            <a:srgbClr val="426E87"/>
+          </a:solidFill>
+          <a:ln w="12700">
+            <a:solidFill>
+              <a:srgbClr val="FFF5ED"/>
+            </a:solidFill>
+            <a:prstDash val="solid"/>
+          </a:ln>
+        </p:spPr>
+      </p:sp>
+      <p:sp>
+        <p:nvSpPr>
+          <p:cNvPr id="82" name="Text 80"/>
+          <p:cNvSpPr/>
+          <p:nvPr/>
+        </p:nvSpPr>
+        <p:spPr>
+          <a:xfrm>
+            <a:off x="9748335" y="4504944"/>
+            <a:ext cx="900268" cy="1072896"/>
+          </a:xfrm>
+          <a:prstGeom prst="rect">
+            <a:avLst/>
+          </a:prstGeom>
+          <a:noFill/>
+          <a:ln/>
+        </p:spPr>
+        <p:txBody>
+          <a:bodyPr wrap="square" lIns="0" tIns="0" rIns="0" bIns="0" rtlCol="0" anchor="ctr"/>
+          <a:lstStyle/>
+          <a:p>
+            <a:pPr algn="ctr" indent="0" marL="0">
+              <a:buNone/>
+            </a:pPr>
+            <a:r>
+              <a:rPr lang="en-US" sz="900" dirty="0">
+                <a:solidFill>
+                  <a:srgbClr val="FFFFFF"/>
+                </a:solidFill>
+                <a:latin typeface="Calibri" pitchFamily="34" charset="0"/>
+                <a:ea typeface="Calibri" pitchFamily="34" charset="-122"/>
+                <a:cs typeface="Calibri" pitchFamily="34" charset="-120"/>
+              </a:rPr>
+              <a:t>$19.0</a:t>
+            </a:r>
+            <a:endParaRPr lang="en-US" sz="900" dirty="0"/>
+          </a:p>
+        </p:txBody>
+      </p:sp>
+      <p:sp>
+        <p:nvSpPr>
+          <p:cNvPr id="83" name="Shape 81"/>
+          <p:cNvSpPr/>
+          <p:nvPr/>
+        </p:nvSpPr>
+        <p:spPr>
+          <a:xfrm>
+            <a:off x="10648604" y="4504944"/>
+            <a:ext cx="900268" cy="1072896"/>
+          </a:xfrm>
+          <a:prstGeom prst="rect">
+            <a:avLst/>
+          </a:prstGeom>
+          <a:solidFill>
+            <a:srgbClr val="366681"/>
+          </a:solidFill>
+          <a:ln w="12700">
+            <a:solidFill>
+              <a:srgbClr val="FFF5ED"/>
+            </a:solidFill>
+            <a:prstDash val="solid"/>
+          </a:ln>
+        </p:spPr>
+      </p:sp>
+      <p:sp>
+        <p:nvSpPr>
+          <p:cNvPr id="84" name="Text 82"/>
+          <p:cNvSpPr/>
+          <p:nvPr/>
+        </p:nvSpPr>
+        <p:spPr>
+          <a:xfrm>
+            <a:off x="10648604" y="4504944"/>
+            <a:ext cx="900268" cy="1072896"/>
+          </a:xfrm>
+          <a:prstGeom prst="rect">
+            <a:avLst/>
+          </a:prstGeom>
+          <a:noFill/>
+          <a:ln/>
+        </p:spPr>
+        <p:txBody>
+          <a:bodyPr wrap="square" lIns="0" tIns="0" rIns="0" bIns="0" rtlCol="0" anchor="ctr"/>
+          <a:lstStyle/>
+          <a:p>
+            <a:pPr algn="ctr" indent="0" marL="0">
+              <a:buNone/>
+            </a:pPr>
+            <a:r>
+              <a:rPr lang="en-US" sz="900" dirty="0">
+                <a:solidFill>
+                  <a:srgbClr val="FFFFFF"/>
+                </a:solidFill>
+                <a:latin typeface="Calibri" pitchFamily="34" charset="0"/>
+                <a:ea typeface="Calibri" pitchFamily="34" charset="-122"/>
+                <a:cs typeface="Calibri" pitchFamily="34" charset="-120"/>
+              </a:rPr>
+              <a:t>$19.9</a:t>
+            </a:r>
+            <a:endParaRPr lang="en-US" sz="900" dirty="0"/>
+          </a:p>
+        </p:txBody>
+      </p:sp>
+      <p:sp>
+        <p:nvSpPr>
+          <p:cNvPr id="85" name="Shape 83"/>
+          <p:cNvSpPr/>
+          <p:nvPr/>
+        </p:nvSpPr>
+        <p:spPr>
+          <a:xfrm>
+            <a:off x="914400" y="5760720"/>
+            <a:ext cx="96012" cy="182880"/>
+          </a:xfrm>
+          <a:prstGeom prst="rect">
+            <a:avLst/>
+          </a:prstGeom>
+          <a:solidFill>
+            <a:srgbClr val="FBEFE4"/>
+          </a:solidFill>
+          <a:ln/>
+        </p:spPr>
+      </p:sp>
+      <p:sp>
+        <p:nvSpPr>
+          <p:cNvPr id="86" name="Shape 84"/>
+          <p:cNvSpPr/>
+          <p:nvPr/>
+        </p:nvSpPr>
+        <p:spPr>
+          <a:xfrm>
+            <a:off x="1005840" y="5760720"/>
+            <a:ext cx="96012" cy="182880"/>
+          </a:xfrm>
+          <a:prstGeom prst="rect">
+            <a:avLst/>
+          </a:prstGeom>
+          <a:solidFill>
+            <a:srgbClr val="F6EBE1"/>
+          </a:solidFill>
+          <a:ln/>
+        </p:spPr>
+      </p:sp>
+      <p:sp>
+        <p:nvSpPr>
+          <p:cNvPr id="87" name="Shape 85"/>
+          <p:cNvSpPr/>
+          <p:nvPr/>
+        </p:nvSpPr>
+        <p:spPr>
+          <a:xfrm>
+            <a:off x="1097280" y="5760720"/>
+            <a:ext cx="96012" cy="182880"/>
+          </a:xfrm>
+          <a:prstGeom prst="rect">
+            <a:avLst/>
+          </a:prstGeom>
+          <a:solidFill>
+            <a:srgbClr val="F0E8DF"/>
+          </a:solidFill>
+          <a:ln/>
+        </p:spPr>
+      </p:sp>
+      <p:sp>
+        <p:nvSpPr>
+          <p:cNvPr id="88" name="Shape 86"/>
+          <p:cNvSpPr/>
+          <p:nvPr/>
+        </p:nvSpPr>
+        <p:spPr>
+          <a:xfrm>
+            <a:off x="1188720" y="5760720"/>
+            <a:ext cx="96012" cy="182880"/>
+          </a:xfrm>
+          <a:prstGeom prst="rect">
+            <a:avLst/>
+          </a:prstGeom>
+          <a:solidFill>
+            <a:srgbClr val="EBE4DC"/>
+          </a:solidFill>
+          <a:ln/>
+        </p:spPr>
+      </p:sp>
+      <p:sp>
+        <p:nvSpPr>
+          <p:cNvPr id="89" name="Shape 87"/>
+          <p:cNvSpPr/>
+          <p:nvPr/>
+        </p:nvSpPr>
+        <p:spPr>
+          <a:xfrm>
+            <a:off x="1280160" y="5760720"/>
+            <a:ext cx="96012" cy="182880"/>
+          </a:xfrm>
+          <a:prstGeom prst="rect">
+            <a:avLst/>
+          </a:prstGeom>
+          <a:solidFill>
+            <a:srgbClr val="E6E0D9"/>
+          </a:solidFill>
+          <a:ln/>
+        </p:spPr>
+      </p:sp>
+      <p:sp>
+        <p:nvSpPr>
+          <p:cNvPr id="90" name="Shape 88"/>
+          <p:cNvSpPr/>
+          <p:nvPr/>
+        </p:nvSpPr>
+        <p:spPr>
+          <a:xfrm>
+            <a:off x="1371600" y="5760720"/>
+            <a:ext cx="96012" cy="182880"/>
+          </a:xfrm>
+          <a:prstGeom prst="rect">
+            <a:avLst/>
+          </a:prstGeom>
+          <a:solidFill>
+            <a:srgbClr val="E1DDD7"/>
+          </a:solidFill>
+          <a:ln/>
+        </p:spPr>
+      </p:sp>
+      <p:sp>
+        <p:nvSpPr>
+          <p:cNvPr id="91" name="Shape 89"/>
+          <p:cNvSpPr/>
+          <p:nvPr/>
+        </p:nvSpPr>
+        <p:spPr>
+          <a:xfrm>
+            <a:off x="1463040" y="5760720"/>
+            <a:ext cx="96012" cy="182880"/>
+          </a:xfrm>
+          <a:prstGeom prst="rect">
+            <a:avLst/>
+          </a:prstGeom>
+          <a:solidFill>
+            <a:srgbClr val="DBD9D4"/>
+          </a:solidFill>
+          <a:ln/>
+        </p:spPr>
+      </p:sp>
+      <p:sp>
+        <p:nvSpPr>
+          <p:cNvPr id="92" name="Shape 90"/>
+          <p:cNvSpPr/>
+          <p:nvPr/>
+        </p:nvSpPr>
+        <p:spPr>
+          <a:xfrm>
+            <a:off x="1554480" y="5760720"/>
+            <a:ext cx="96012" cy="182880"/>
+          </a:xfrm>
+          <a:prstGeom prst="rect">
+            <a:avLst/>
+          </a:prstGeom>
+          <a:solidFill>
+            <a:srgbClr val="D6D5D1"/>
+          </a:solidFill>
+          <a:ln/>
+        </p:spPr>
+      </p:sp>
+      <p:sp>
+        <p:nvSpPr>
+          <p:cNvPr id="93" name="Shape 91"/>
+          <p:cNvSpPr/>
+          <p:nvPr/>
+        </p:nvSpPr>
+        <p:spPr>
+          <a:xfrm>
+            <a:off x="1645920" y="5760720"/>
+            <a:ext cx="96012" cy="182880"/>
+          </a:xfrm>
+          <a:prstGeom prst="rect">
+            <a:avLst/>
+          </a:prstGeom>
+          <a:solidFill>
+            <a:srgbClr val="D1D1CF"/>
+          </a:solidFill>
+          <a:ln/>
+        </p:spPr>
+      </p:sp>
+      <p:sp>
+        <p:nvSpPr>
+          <p:cNvPr id="94" name="Shape 92"/>
+          <p:cNvSpPr/>
+          <p:nvPr/>
+        </p:nvSpPr>
+        <p:spPr>
+          <a:xfrm>
+            <a:off x="1737360" y="5760720"/>
+            <a:ext cx="96012" cy="182880"/>
+          </a:xfrm>
+          <a:prstGeom prst="rect">
+            <a:avLst/>
+          </a:prstGeom>
+          <a:solidFill>
+            <a:srgbClr val="CBCECC"/>
+          </a:solidFill>
+          <a:ln/>
+        </p:spPr>
+      </p:sp>
+      <p:sp>
+        <p:nvSpPr>
+          <p:cNvPr id="95" name="Shape 93"/>
+          <p:cNvSpPr/>
+          <p:nvPr/>
+        </p:nvSpPr>
+        <p:spPr>
+          <a:xfrm>
+            <a:off x="1828800" y="5760720"/>
+            <a:ext cx="96012" cy="182880"/>
+          </a:xfrm>
+          <a:prstGeom prst="rect">
+            <a:avLst/>
+          </a:prstGeom>
+          <a:solidFill>
+            <a:srgbClr val="C6CAC9"/>
+          </a:solidFill>
+          <a:ln/>
+        </p:spPr>
+      </p:sp>
+      <p:sp>
+        <p:nvSpPr>
+          <p:cNvPr id="96" name="Shape 94"/>
+          <p:cNvSpPr/>
+          <p:nvPr/>
+        </p:nvSpPr>
+        <p:spPr>
+          <a:xfrm>
+            <a:off x="1920240" y="5760720"/>
+            <a:ext cx="96012" cy="182880"/>
+          </a:xfrm>
+          <a:prstGeom prst="rect">
+            <a:avLst/>
+          </a:prstGeom>
+          <a:solidFill>
+            <a:srgbClr val="C1C6C7"/>
+          </a:solidFill>
+          <a:ln/>
+        </p:spPr>
+      </p:sp>
+      <p:sp>
+        <p:nvSpPr>
+          <p:cNvPr id="97" name="Shape 95"/>
+          <p:cNvSpPr/>
+          <p:nvPr/>
+        </p:nvSpPr>
+        <p:spPr>
+          <a:xfrm>
+            <a:off x="2011680" y="5760720"/>
+            <a:ext cx="96012" cy="182880"/>
+          </a:xfrm>
+          <a:prstGeom prst="rect">
+            <a:avLst/>
+          </a:prstGeom>
+          <a:solidFill>
+            <a:srgbClr val="BCC3C4"/>
+          </a:solidFill>
+          <a:ln/>
+        </p:spPr>
+      </p:sp>
+      <p:sp>
+        <p:nvSpPr>
+          <p:cNvPr id="98" name="Shape 96"/>
+          <p:cNvSpPr/>
+          <p:nvPr/>
+        </p:nvSpPr>
+        <p:spPr>
+          <a:xfrm>
+            <a:off x="2103120" y="5760720"/>
+            <a:ext cx="96012" cy="182880"/>
+          </a:xfrm>
+          <a:prstGeom prst="rect">
+            <a:avLst/>
+          </a:prstGeom>
+          <a:solidFill>
+            <a:srgbClr val="B6BFC1"/>
+          </a:solidFill>
+          <a:ln/>
+        </p:spPr>
+      </p:sp>
+      <p:sp>
+        <p:nvSpPr>
+          <p:cNvPr id="99" name="Shape 97"/>
+          <p:cNvSpPr/>
+          <p:nvPr/>
+        </p:nvSpPr>
+        <p:spPr>
+          <a:xfrm>
+            <a:off x="2194560" y="5760720"/>
+            <a:ext cx="96012" cy="182880"/>
+          </a:xfrm>
+          <a:prstGeom prst="rect">
+            <a:avLst/>
+          </a:prstGeom>
+          <a:solidFill>
+            <a:srgbClr val="B1BBBF"/>
+          </a:solidFill>
+          <a:ln/>
+        </p:spPr>
+      </p:sp>
+      <p:sp>
+        <p:nvSpPr>
+          <p:cNvPr id="100" name="Shape 98"/>
+          <p:cNvSpPr/>
+          <p:nvPr/>
+        </p:nvSpPr>
+        <p:spPr>
+          <a:xfrm>
+            <a:off x="2286000" y="5760720"/>
+            <a:ext cx="96012" cy="182880"/>
+          </a:xfrm>
+          <a:prstGeom prst="rect">
+            <a:avLst/>
+          </a:prstGeom>
+          <a:solidFill>
+            <a:srgbClr val="ACB8BC"/>
+          </a:solidFill>
+          <a:ln/>
+        </p:spPr>
+      </p:sp>
+      <p:sp>
+        <p:nvSpPr>
+          <p:cNvPr id="101" name="Shape 99"/>
+          <p:cNvSpPr/>
+          <p:nvPr/>
+        </p:nvSpPr>
+        <p:spPr>
+          <a:xfrm>
+            <a:off x="2377440" y="5760720"/>
+            <a:ext cx="96012" cy="182880"/>
+          </a:xfrm>
+          <a:prstGeom prst="rect">
+            <a:avLst/>
+          </a:prstGeom>
+          <a:solidFill>
+            <a:srgbClr val="A6B4B9"/>
+          </a:solidFill>
+          <a:ln/>
+        </p:spPr>
+      </p:sp>
+      <p:sp>
+        <p:nvSpPr>
+          <p:cNvPr id="102" name="Shape 100"/>
+          <p:cNvSpPr/>
+          <p:nvPr/>
+        </p:nvSpPr>
+        <p:spPr>
+          <a:xfrm>
+            <a:off x="2468880" y="5760720"/>
+            <a:ext cx="96012" cy="182880"/>
+          </a:xfrm>
+          <a:prstGeom prst="rect">
+            <a:avLst/>
+          </a:prstGeom>
+          <a:solidFill>
+            <a:srgbClr val="A1B0B7"/>
+          </a:solidFill>
+          <a:ln/>
+        </p:spPr>
+      </p:sp>
+      <p:sp>
+        <p:nvSpPr>
+          <p:cNvPr id="103" name="Shape 101"/>
+          <p:cNvSpPr/>
+          <p:nvPr/>
+        </p:nvSpPr>
+        <p:spPr>
+          <a:xfrm>
+            <a:off x="2560320" y="5760720"/>
+            <a:ext cx="96012" cy="182880"/>
+          </a:xfrm>
+          <a:prstGeom prst="rect">
+            <a:avLst/>
+          </a:prstGeom>
+          <a:solidFill>
+            <a:srgbClr val="9CADB4"/>
+          </a:solidFill>
+          <a:ln/>
+        </p:spPr>
+      </p:sp>
+      <p:sp>
+        <p:nvSpPr>
+          <p:cNvPr id="104" name="Shape 102"/>
+          <p:cNvSpPr/>
+          <p:nvPr/>
+        </p:nvSpPr>
+        <p:spPr>
+          <a:xfrm>
+            <a:off x="2651760" y="5760720"/>
+            <a:ext cx="96012" cy="182880"/>
+          </a:xfrm>
+          <a:prstGeom prst="rect">
+            <a:avLst/>
+          </a:prstGeom>
+          <a:solidFill>
+            <a:srgbClr val="97A9B1"/>
+          </a:solidFill>
+          <a:ln/>
+        </p:spPr>
+      </p:sp>
+      <p:sp>
+        <p:nvSpPr>
+          <p:cNvPr id="105" name="Shape 103"/>
+          <p:cNvSpPr/>
+          <p:nvPr/>
+        </p:nvSpPr>
+        <p:spPr>
+          <a:xfrm>
+            <a:off x="2743200" y="5760720"/>
+            <a:ext cx="96012" cy="182880"/>
+          </a:xfrm>
+          <a:prstGeom prst="rect">
+            <a:avLst/>
+          </a:prstGeom>
+          <a:solidFill>
+            <a:srgbClr val="91A5AF"/>
+          </a:solidFill>
+          <a:ln/>
+        </p:spPr>
+      </p:sp>
+      <p:sp>
+        <p:nvSpPr>
+          <p:cNvPr id="106" name="Shape 104"/>
+          <p:cNvSpPr/>
+          <p:nvPr/>
+        </p:nvSpPr>
+        <p:spPr>
+          <a:xfrm>
+            <a:off x="2834640" y="5760720"/>
+            <a:ext cx="96012" cy="182880"/>
+          </a:xfrm>
+          <a:prstGeom prst="rect">
+            <a:avLst/>
+          </a:prstGeom>
+          <a:solidFill>
+            <a:srgbClr val="8CA1AC"/>
+          </a:solidFill>
+          <a:ln/>
+        </p:spPr>
+      </p:sp>
+      <p:sp>
+        <p:nvSpPr>
+          <p:cNvPr id="107" name="Shape 105"/>
+          <p:cNvSpPr/>
+          <p:nvPr/>
+        </p:nvSpPr>
+        <p:spPr>
+          <a:xfrm>
+            <a:off x="2926080" y="5760720"/>
+            <a:ext cx="96012" cy="182880"/>
+          </a:xfrm>
+          <a:prstGeom prst="rect">
+            <a:avLst/>
+          </a:prstGeom>
+          <a:solidFill>
+            <a:srgbClr val="879EA9"/>
+          </a:solidFill>
+          <a:ln/>
+        </p:spPr>
+      </p:sp>
+      <p:sp>
+        <p:nvSpPr>
+          <p:cNvPr id="108" name="Shape 106"/>
+          <p:cNvSpPr/>
+          <p:nvPr/>
+        </p:nvSpPr>
+        <p:spPr>
+          <a:xfrm>
+            <a:off x="3017520" y="5760720"/>
+            <a:ext cx="96012" cy="182880"/>
+          </a:xfrm>
+          <a:prstGeom prst="rect">
+            <a:avLst/>
+          </a:prstGeom>
+          <a:solidFill>
+            <a:srgbClr val="829AA7"/>
+          </a:solidFill>
+          <a:ln/>
+        </p:spPr>
+      </p:sp>
+      <p:sp>
+        <p:nvSpPr>
+          <p:cNvPr id="109" name="Shape 107"/>
+          <p:cNvSpPr/>
+          <p:nvPr/>
+        </p:nvSpPr>
+        <p:spPr>
+          <a:xfrm>
+            <a:off x="3108960" y="5760720"/>
+            <a:ext cx="96012" cy="182880"/>
+          </a:xfrm>
+          <a:prstGeom prst="rect">
+            <a:avLst/>
+          </a:prstGeom>
+          <a:solidFill>
+            <a:srgbClr val="7C96A4"/>
+          </a:solidFill>
+          <a:ln/>
+        </p:spPr>
+      </p:sp>
+      <p:sp>
+        <p:nvSpPr>
+          <p:cNvPr id="110" name="Shape 108"/>
+          <p:cNvSpPr/>
+          <p:nvPr/>
+        </p:nvSpPr>
+        <p:spPr>
+          <a:xfrm>
+            <a:off x="3200400" y="5760720"/>
+            <a:ext cx="96012" cy="182880"/>
+          </a:xfrm>
+          <a:prstGeom prst="rect">
+            <a:avLst/>
+          </a:prstGeom>
+          <a:solidFill>
+            <a:srgbClr val="7793A1"/>
+          </a:solidFill>
+          <a:ln/>
+        </p:spPr>
+      </p:sp>
+      <p:sp>
+        <p:nvSpPr>
+          <p:cNvPr id="111" name="Shape 109"/>
+          <p:cNvSpPr/>
+          <p:nvPr/>
+        </p:nvSpPr>
+        <p:spPr>
+          <a:xfrm>
+            <a:off x="3291840" y="5760720"/>
+            <a:ext cx="96012" cy="182880"/>
+          </a:xfrm>
+          <a:prstGeom prst="rect">
+            <a:avLst/>
+          </a:prstGeom>
+          <a:solidFill>
+            <a:srgbClr val="728F9F"/>
+          </a:solidFill>
+          <a:ln/>
+        </p:spPr>
+      </p:sp>
+      <p:sp>
+        <p:nvSpPr>
+          <p:cNvPr id="112" name="Shape 110"/>
+          <p:cNvSpPr/>
+          <p:nvPr/>
+        </p:nvSpPr>
+        <p:spPr>
+          <a:xfrm>
+            <a:off x="3383280" y="5760720"/>
+            <a:ext cx="96012" cy="182880"/>
+          </a:xfrm>
+          <a:prstGeom prst="rect">
+            <a:avLst/>
+          </a:prstGeom>
+          <a:solidFill>
+            <a:srgbClr val="6C8B9C"/>
+          </a:solidFill>
+          <a:ln/>
+        </p:spPr>
+      </p:sp>
+      <p:sp>
+        <p:nvSpPr>
+          <p:cNvPr id="113" name="Shape 111"/>
+          <p:cNvSpPr/>
+          <p:nvPr/>
+        </p:nvSpPr>
+        <p:spPr>
+          <a:xfrm>
+            <a:off x="3474720" y="5760720"/>
+            <a:ext cx="96012" cy="182880"/>
+          </a:xfrm>
+          <a:prstGeom prst="rect">
+            <a:avLst/>
+          </a:prstGeom>
+          <a:solidFill>
+            <a:srgbClr val="678899"/>
+          </a:solidFill>
+          <a:ln/>
+        </p:spPr>
+      </p:sp>
+      <p:sp>
+        <p:nvSpPr>
+          <p:cNvPr id="114" name="Shape 112"/>
+          <p:cNvSpPr/>
+          <p:nvPr/>
+        </p:nvSpPr>
+        <p:spPr>
+          <a:xfrm>
+            <a:off x="3566160" y="5760720"/>
+            <a:ext cx="96012" cy="182880"/>
+          </a:xfrm>
+          <a:prstGeom prst="rect">
+            <a:avLst/>
+          </a:prstGeom>
+          <a:solidFill>
+            <a:srgbClr val="628497"/>
+          </a:solidFill>
+          <a:ln/>
+        </p:spPr>
+      </p:sp>
+      <p:sp>
+        <p:nvSpPr>
+          <p:cNvPr id="115" name="Shape 113"/>
+          <p:cNvSpPr/>
+          <p:nvPr/>
+        </p:nvSpPr>
+        <p:spPr>
+          <a:xfrm>
+            <a:off x="3657600" y="5760720"/>
+            <a:ext cx="96012" cy="182880"/>
+          </a:xfrm>
+          <a:prstGeom prst="rect">
+            <a:avLst/>
+          </a:prstGeom>
+          <a:solidFill>
+            <a:srgbClr val="5D8094"/>
+          </a:solidFill>
+          <a:ln/>
+        </p:spPr>
+      </p:sp>
+      <p:sp>
+        <p:nvSpPr>
+          <p:cNvPr id="116" name="Shape 114"/>
+          <p:cNvSpPr/>
+          <p:nvPr/>
+        </p:nvSpPr>
+        <p:spPr>
+          <a:xfrm>
+            <a:off x="3749040" y="5760720"/>
+            <a:ext cx="96012" cy="182880"/>
+          </a:xfrm>
+          <a:prstGeom prst="rect">
+            <a:avLst/>
+          </a:prstGeom>
+          <a:solidFill>
+            <a:srgbClr val="577D91"/>
+          </a:solidFill>
+          <a:ln/>
+        </p:spPr>
+      </p:sp>
+      <p:sp>
+        <p:nvSpPr>
+          <p:cNvPr id="117" name="Shape 115"/>
+          <p:cNvSpPr/>
+          <p:nvPr/>
+        </p:nvSpPr>
+        <p:spPr>
+          <a:xfrm>
+            <a:off x="3840480" y="5760720"/>
+            <a:ext cx="96012" cy="182880"/>
+          </a:xfrm>
+          <a:prstGeom prst="rect">
+            <a:avLst/>
+          </a:prstGeom>
+          <a:solidFill>
+            <a:srgbClr val="52798F"/>
+          </a:solidFill>
+          <a:ln/>
+        </p:spPr>
+      </p:sp>
+      <p:sp>
+        <p:nvSpPr>
+          <p:cNvPr id="118" name="Shape 116"/>
+          <p:cNvSpPr/>
+          <p:nvPr/>
+        </p:nvSpPr>
+        <p:spPr>
+          <a:xfrm>
+            <a:off x="3931920" y="5760720"/>
+            <a:ext cx="96012" cy="182880"/>
+          </a:xfrm>
+          <a:prstGeom prst="rect">
+            <a:avLst/>
+          </a:prstGeom>
+          <a:solidFill>
+            <a:srgbClr val="4D758C"/>
+          </a:solidFill>
+          <a:ln/>
+        </p:spPr>
+      </p:sp>
+      <p:sp>
+        <p:nvSpPr>
+          <p:cNvPr id="119" name="Shape 117"/>
+          <p:cNvSpPr/>
+          <p:nvPr/>
+        </p:nvSpPr>
+        <p:spPr>
+          <a:xfrm>
+            <a:off x="4023360" y="5760720"/>
+            <a:ext cx="96012" cy="182880"/>
+          </a:xfrm>
+          <a:prstGeom prst="rect">
+            <a:avLst/>
+          </a:prstGeom>
+          <a:solidFill>
+            <a:srgbClr val="477189"/>
+          </a:solidFill>
+          <a:ln/>
+        </p:spPr>
+      </p:sp>
+      <p:sp>
+        <p:nvSpPr>
+          <p:cNvPr id="120" name="Shape 118"/>
+          <p:cNvSpPr/>
+          <p:nvPr/>
+        </p:nvSpPr>
+        <p:spPr>
+          <a:xfrm>
+            <a:off x="4114800" y="5760720"/>
+            <a:ext cx="96012" cy="182880"/>
+          </a:xfrm>
+          <a:prstGeom prst="rect">
+            <a:avLst/>
+          </a:prstGeom>
+          <a:solidFill>
+            <a:srgbClr val="426E87"/>
+          </a:solidFill>
+          <a:ln/>
+        </p:spPr>
+      </p:sp>
+      <p:sp>
+        <p:nvSpPr>
+          <p:cNvPr id="121" name="Shape 119"/>
+          <p:cNvSpPr/>
+          <p:nvPr/>
+        </p:nvSpPr>
+        <p:spPr>
+          <a:xfrm>
+            <a:off x="4206240" y="5760720"/>
+            <a:ext cx="96012" cy="182880"/>
+          </a:xfrm>
+          <a:prstGeom prst="rect">
+            <a:avLst/>
+          </a:prstGeom>
+          <a:solidFill>
+            <a:srgbClr val="3D6A84"/>
+          </a:solidFill>
+          <a:ln/>
+        </p:spPr>
+      </p:sp>
+      <p:sp>
+        <p:nvSpPr>
+          <p:cNvPr id="122" name="Shape 120"/>
+          <p:cNvSpPr/>
+          <p:nvPr/>
+        </p:nvSpPr>
+        <p:spPr>
+          <a:xfrm>
+            <a:off x="4297680" y="5760720"/>
+            <a:ext cx="96012" cy="182880"/>
+          </a:xfrm>
+          <a:prstGeom prst="rect">
+            <a:avLst/>
+          </a:prstGeom>
+          <a:solidFill>
+            <a:srgbClr val="386681"/>
+          </a:solidFill>
+          <a:ln/>
+        </p:spPr>
+      </p:sp>
+      <p:sp>
+        <p:nvSpPr>
+          <p:cNvPr id="123" name="Shape 121"/>
+          <p:cNvSpPr/>
+          <p:nvPr/>
+        </p:nvSpPr>
+        <p:spPr>
+          <a:xfrm>
+            <a:off x="4389120" y="5760720"/>
+            <a:ext cx="96012" cy="182880"/>
+          </a:xfrm>
+          <a:prstGeom prst="rect">
+            <a:avLst/>
+          </a:prstGeom>
+          <a:solidFill>
+            <a:srgbClr val="32637F"/>
+          </a:solidFill>
+          <a:ln/>
+        </p:spPr>
+      </p:sp>
+      <p:sp>
+        <p:nvSpPr>
+          <p:cNvPr id="124" name="Shape 122"/>
+          <p:cNvSpPr/>
+          <p:nvPr/>
+        </p:nvSpPr>
+        <p:spPr>
+          <a:xfrm>
+            <a:off x="4480560" y="5760720"/>
+            <a:ext cx="96012" cy="182880"/>
+          </a:xfrm>
+          <a:prstGeom prst="rect">
+            <a:avLst/>
+          </a:prstGeom>
+          <a:solidFill>
+            <a:srgbClr val="2D5F7C"/>
+          </a:solidFill>
+          <a:ln/>
+        </p:spPr>
+      </p:sp>
+      <p:sp>
+        <p:nvSpPr>
+          <p:cNvPr id="125" name="Text 123"/>
+          <p:cNvSpPr/>
+          <p:nvPr/>
+        </p:nvSpPr>
+        <p:spPr>
+          <a:xfrm>
+            <a:off x="914400" y="5980176"/>
+            <a:ext cx="1645920" cy="201168"/>
+          </a:xfrm>
+          <a:prstGeom prst="rect">
+            <a:avLst/>
+          </a:prstGeom>
+          <a:noFill/>
+          <a:ln/>
+        </p:spPr>
+        <p:txBody>
+          <a:bodyPr wrap="square" lIns="0" tIns="0" rIns="0" bIns="0" rtlCol="0" anchor="t"/>
+          <a:lstStyle/>
+          <a:p>
+            <a:pPr algn="l" indent="0" marL="0">
+              <a:buNone/>
+            </a:pPr>
+            <a:r>
+              <a:rPr lang="en-US" sz="800" dirty="0">
+                <a:solidFill>
+                  <a:srgbClr val="8A7968"/>
+                </a:solidFill>
+                <a:latin typeface="Calibri" pitchFamily="34" charset="0"/>
+                <a:ea typeface="Calibri" pitchFamily="34" charset="-122"/>
+                <a:cs typeface="Calibri" pitchFamily="34" charset="-120"/>
+              </a:rPr>
+              <a:t>lower $M revenue</a:t>
+            </a:r>
+            <a:endParaRPr lang="en-US" sz="800" dirty="0"/>
+          </a:p>
+        </p:txBody>
+      </p:sp>
+      <p:sp>
+        <p:nvSpPr>
+          <p:cNvPr id="126" name="Text 124"/>
+          <p:cNvSpPr/>
+          <p:nvPr/>
+        </p:nvSpPr>
+        <p:spPr>
+          <a:xfrm>
+            <a:off x="3108960" y="5980176"/>
+            <a:ext cx="1463040" cy="201168"/>
+          </a:xfrm>
+          <a:prstGeom prst="rect">
+            <a:avLst/>
+          </a:prstGeom>
+          <a:noFill/>
+          <a:ln/>
+        </p:spPr>
+        <p:txBody>
+          <a:bodyPr wrap="square" lIns="0" tIns="0" rIns="0" bIns="0" rtlCol="0" anchor="t"/>
+          <a:lstStyle/>
+          <a:p>
+            <a:pPr algn="r" indent="0" marL="0">
+              <a:buNone/>
+            </a:pPr>
+            <a:r>
+              <a:rPr lang="en-US" sz="800" dirty="0">
+                <a:solidFill>
+                  <a:srgbClr val="8A7968"/>
+                </a:solidFill>
+                <a:latin typeface="Calibri" pitchFamily="34" charset="0"/>
+                <a:ea typeface="Calibri" pitchFamily="34" charset="-122"/>
+                <a:cs typeface="Calibri" pitchFamily="34" charset="-120"/>
+              </a:rPr>
+              <a:t>higher</a:t>
+            </a:r>
+            <a:endParaRPr lang="en-US" sz="800" dirty="0"/>
+          </a:p>
+        </p:txBody>
+      </p:sp>
+      <p:sp>
+        <p:nvSpPr>
+          <p:cNvPr id="127" name="Text 125"/>
+          <p:cNvSpPr/>
+          <p:nvPr/>
+        </p:nvSpPr>
+        <p:spPr>
+          <a:xfrm>
+            <a:off x="548640" y="6263640"/>
+            <a:ext cx="11091672" cy="292608"/>
+          </a:xfrm>
+          <a:prstGeom prst="rect">
+            <a:avLst/>
+          </a:prstGeom>
+          <a:noFill/>
+          <a:ln/>
+        </p:spPr>
+        <p:txBody>
+          <a:bodyPr wrap="square" lIns="0" tIns="0" rIns="0" bIns="0" rtlCol="0" anchor="t"/>
+          <a:lstStyle/>
+          <a:p>
+            <a:pPr indent="0" marL="0">
+              <a:buNone/>
+            </a:pPr>
+            <a:r>
+              <a:rPr lang="en-US" sz="1200" i="1" dirty="0">
+                <a:solidFill>
+                  <a:srgbClr val="353745"/>
+                </a:solidFill>
+                <a:latin typeface="Georgia" pitchFamily="34" charset="0"/>
+                <a:ea typeface="Georgia" pitchFamily="34" charset="-122"/>
+                <a:cs typeface="Georgia" pitchFamily="34" charset="-120"/>
+              </a:rPr>
+              <a:t>Scan across a row to see practice trajectory; scan down a column to see firm mix that year. The 2029 dent sits in the middle.</a:t>
+            </a:r>
+            <a:endParaRPr lang="en-US" sz="1200" dirty="0"/>
+          </a:p>
+        </p:txBody>
+      </p:sp>
+    </p:spTree>
+  </p:cSld>
+  <p:clrMapOvr>
+    <a:masterClrMapping/>
+  </p:clrMapOvr>
+</p:sld>
+</file>
+
+<file path=ppt/slides/slide21.xml><?xml version="1.0" encoding="utf-8"?>
+<p:sld xmlns:a="http://schemas.openxmlformats.org/drawingml/2006/main" xmlns:r="http://schemas.openxmlformats.org/officeDocument/2006/relationships" xmlns:p="http://schemas.openxmlformats.org/presentationml/2006/main">
+  <p:cSld name="Slide 21">
+    <p:bg>
+      <p:bgPr>
+        <a:solidFill>
+          <a:srgbClr val="FFF5ED"/>
+        </a:solidFill>
+      </p:bgPr>
+    </p:bg>
+    <p:spTree>
+      <p:nvGrpSpPr>
+        <p:cNvPr id="1" name=""/>
+        <p:cNvGrpSpPr/>
+        <p:nvPr/>
+      </p:nvGrpSpPr>
+      <p:grpSpPr>
+        <a:xfrm>
+          <a:off x="0" y="0"/>
+          <a:ext cx="0" cy="0"/>
+          <a:chOff x="0" y="0"/>
+          <a:chExt cx="0" cy="0"/>
+        </a:xfrm>
+      </p:grpSpPr>
+      <p:sp>
+        <p:nvSpPr>
+          <p:cNvPr id="2" name="Text 0"/>
+          <p:cNvSpPr/>
+          <p:nvPr/>
+        </p:nvSpPr>
+        <p:spPr>
+          <a:xfrm>
+            <a:off x="548640" y="457200"/>
+            <a:ext cx="7315200" cy="256032"/>
+          </a:xfrm>
+          <a:prstGeom prst="rect">
+            <a:avLst/>
+          </a:prstGeom>
+          <a:noFill/>
+          <a:ln/>
+        </p:spPr>
+        <p:txBody>
+          <a:bodyPr wrap="square" lIns="0" tIns="0" rIns="0" bIns="0" rtlCol="0" anchor="t"/>
+          <a:lstStyle/>
+          <a:p>
+            <a:pPr indent="0" marL="0">
+              <a:buNone/>
+            </a:pPr>
+            <a:r>
+              <a:rPr lang="en-US" sz="1000" b="1" spc="200" kern="0" dirty="0">
+                <a:solidFill>
+                  <a:srgbClr val="8A7968"/>
+                </a:solidFill>
+                <a:latin typeface="Calibri" pitchFamily="34" charset="0"/>
+                <a:ea typeface="Calibri" pitchFamily="34" charset="-122"/>
+                <a:cs typeface="Calibri" pitchFamily="34" charset="-120"/>
+              </a:rPr>
+              <a:t>GAUGE / TACHOMETER  ·  ESCAPE-HATCH (SHAPES)</a:t>
+            </a:r>
+            <a:endParaRPr lang="en-US" sz="1000" dirty="0"/>
+          </a:p>
+        </p:txBody>
+      </p:sp>
+      <p:sp>
+        <p:nvSpPr>
+          <p:cNvPr id="3" name="Text 1"/>
+          <p:cNvSpPr/>
+          <p:nvPr/>
+        </p:nvSpPr>
+        <p:spPr>
+          <a:xfrm>
+            <a:off x="548640" y="749808"/>
+            <a:ext cx="11091672" cy="640080"/>
+          </a:xfrm>
+          <a:prstGeom prst="rect">
+            <a:avLst/>
+          </a:prstGeom>
+          <a:noFill/>
+          <a:ln/>
+        </p:spPr>
+        <p:txBody>
+          <a:bodyPr wrap="square" lIns="0" tIns="0" rIns="0" bIns="0" rtlCol="0" anchor="t"/>
+          <a:lstStyle/>
+          <a:p>
+            <a:pPr indent="0" marL="0">
+              <a:buNone/>
+            </a:pPr>
+            <a:r>
+              <a:rPr lang="en-US" sz="3000" dirty="0">
+                <a:solidFill>
+                  <a:srgbClr val="353745"/>
+                </a:solidFill>
+                <a:latin typeface="Georgia" pitchFamily="34" charset="0"/>
+                <a:ea typeface="Georgia" pitchFamily="34" charset="-122"/>
+                <a:cs typeface="Georgia" pitchFamily="34" charset="-120"/>
+              </a:rPr>
+              <a:t>One number, three zones, one needle.</a:t>
+            </a:r>
+            <a:endParaRPr lang="en-US" sz="3000" dirty="0"/>
+          </a:p>
+        </p:txBody>
+      </p:sp>
+      <p:sp>
+        <p:nvSpPr>
+          <p:cNvPr id="4" name="Text 2"/>
+          <p:cNvSpPr/>
+          <p:nvPr/>
+        </p:nvSpPr>
+        <p:spPr>
+          <a:xfrm>
+            <a:off x="548640" y="1325880"/>
+            <a:ext cx="11091672" cy="292608"/>
+          </a:xfrm>
+          <a:prstGeom prst="rect">
+            <a:avLst/>
+          </a:prstGeom>
+          <a:noFill/>
+          <a:ln/>
+        </p:spPr>
+        <p:txBody>
+          <a:bodyPr wrap="square" lIns="0" tIns="0" rIns="0" bIns="0" rtlCol="0" anchor="t"/>
+          <a:lstStyle/>
+          <a:p>
+            <a:pPr indent="0" marL="0">
+              <a:buNone/>
+            </a:pPr>
+            <a:r>
+              <a:rPr lang="en-US" sz="1300" i="1" dirty="0">
+                <a:solidFill>
+                  <a:srgbClr val="353745"/>
+                </a:solidFill>
+                <a:latin typeface="Georgia" pitchFamily="34" charset="0"/>
+                <a:ea typeface="Georgia" pitchFamily="34" charset="-122"/>
+                <a:cs typeface="Georgia" pitchFamily="34" charset="-120"/>
+              </a:rPr>
+              <a:t>Half-circle gauge with segment zones (red / amber / green) and a needle pointing to the current value. Built from pptxgenjs blockArc presets plus a rotated rectangle needle.</a:t>
+            </a:r>
+            <a:endParaRPr lang="en-US" sz="1300" dirty="0"/>
+          </a:p>
+        </p:txBody>
+      </p:sp>
+      <p:sp>
+        <p:nvSpPr>
+          <p:cNvPr id="5" name="Shape 3"/>
+          <p:cNvSpPr/>
+          <p:nvPr/>
+        </p:nvSpPr>
+        <p:spPr>
+          <a:xfrm>
+            <a:off x="441198" y="2688336"/>
+            <a:ext cx="3474720" cy="3474720"/>
+          </a:xfrm>
+          <a:prstGeom prst="blockArc">
+            <a:avLst/>
+          </a:prstGeom>
+          <a:solidFill>
+            <a:srgbClr val="B84C65"/>
+          </a:solidFill>
+          <a:ln/>
+        </p:spPr>
+      </p:sp>
+      <p:sp>
+        <p:nvSpPr>
+          <p:cNvPr id="6" name="Shape 4"/>
+          <p:cNvSpPr/>
+          <p:nvPr/>
+        </p:nvSpPr>
+        <p:spPr>
+          <a:xfrm rot="4860000">
+            <a:off x="441198" y="2688336"/>
+            <a:ext cx="3474720" cy="3474720"/>
+          </a:xfrm>
+          <a:prstGeom prst="blockArc">
+            <a:avLst/>
+          </a:prstGeom>
+          <a:solidFill>
+            <a:srgbClr val="C5A55A"/>
+          </a:solidFill>
+          <a:ln/>
+        </p:spPr>
+      </p:sp>
+      <p:sp>
+        <p:nvSpPr>
+          <p:cNvPr id="7" name="Shape 5"/>
+          <p:cNvSpPr/>
+          <p:nvPr/>
+        </p:nvSpPr>
+        <p:spPr>
+          <a:xfrm rot="8100000">
+            <a:off x="441198" y="2688336"/>
+            <a:ext cx="3474720" cy="3474720"/>
+          </a:xfrm>
+          <a:prstGeom prst="blockArc">
+            <a:avLst/>
+          </a:prstGeom>
+          <a:solidFill>
+            <a:srgbClr val="2D5F7C"/>
+          </a:solidFill>
+          <a:ln/>
+        </p:spPr>
+      </p:sp>
+      <p:sp>
+        <p:nvSpPr>
+          <p:cNvPr id="8" name="Shape 6"/>
+          <p:cNvSpPr/>
+          <p:nvPr/>
+        </p:nvSpPr>
+        <p:spPr>
+          <a:xfrm rot="-43200">
+            <a:off x="2146554" y="2896819"/>
+            <a:ext cx="64008" cy="1528877"/>
+          </a:xfrm>
+          <a:prstGeom prst="rect">
+            <a:avLst/>
+          </a:prstGeom>
+          <a:solidFill>
+            <a:srgbClr val="353745"/>
+          </a:solidFill>
+          <a:ln/>
+        </p:spPr>
+      </p:sp>
+      <p:sp>
+        <p:nvSpPr>
+          <p:cNvPr id="9" name="Shape 7"/>
+          <p:cNvSpPr/>
+          <p:nvPr/>
+        </p:nvSpPr>
+        <p:spPr>
+          <a:xfrm>
+            <a:off x="2068830" y="4315968"/>
+            <a:ext cx="219456" cy="219456"/>
+          </a:xfrm>
+          <a:prstGeom prst="ellipse">
+            <a:avLst/>
+          </a:prstGeom>
+          <a:solidFill>
+            <a:srgbClr val="353745"/>
+          </a:solidFill>
+          <a:ln/>
+        </p:spPr>
+      </p:sp>
+      <p:sp>
+        <p:nvSpPr>
+          <p:cNvPr id="10" name="Text 8"/>
+          <p:cNvSpPr/>
+          <p:nvPr/>
+        </p:nvSpPr>
+        <p:spPr>
+          <a:xfrm>
+            <a:off x="1264158" y="4517136"/>
+            <a:ext cx="1828800" cy="502920"/>
+          </a:xfrm>
+          <a:prstGeom prst="rect">
+            <a:avLst/>
+          </a:prstGeom>
+          <a:noFill/>
+          <a:ln/>
+        </p:spPr>
+        <p:txBody>
+          <a:bodyPr wrap="square" lIns="0" tIns="0" rIns="0" bIns="0" rtlCol="0" anchor="ctr"/>
+          <a:lstStyle/>
+          <a:p>
+            <a:pPr algn="ctr" indent="0" marL="0">
+              <a:buNone/>
+            </a:pPr>
+            <a:r>
+              <a:rPr lang="en-US" sz="2800" dirty="0">
+                <a:solidFill>
+                  <a:srgbClr val="353745"/>
+                </a:solidFill>
+                <a:latin typeface="Georgia" pitchFamily="34" charset="0"/>
+                <a:ea typeface="Georgia" pitchFamily="34" charset="-122"/>
+                <a:cs typeface="Georgia" pitchFamily="34" charset="-120"/>
+              </a:rPr>
+              <a:t>67.6%</a:t>
+            </a:r>
+            <a:endParaRPr lang="en-US" sz="2800" dirty="0"/>
+          </a:p>
+        </p:txBody>
+      </p:sp>
+      <p:sp>
+        <p:nvSpPr>
+          <p:cNvPr id="11" name="Text 9"/>
+          <p:cNvSpPr/>
+          <p:nvPr/>
+        </p:nvSpPr>
+        <p:spPr>
+          <a:xfrm>
+            <a:off x="806958" y="5020056"/>
+            <a:ext cx="2743200" cy="274320"/>
+          </a:xfrm>
+          <a:prstGeom prst="rect">
+            <a:avLst/>
+          </a:prstGeom>
+          <a:noFill/>
+          <a:ln/>
+        </p:spPr>
+        <p:txBody>
+          <a:bodyPr wrap="square" lIns="0" tIns="0" rIns="0" bIns="0" rtlCol="0" anchor="t"/>
+          <a:lstStyle/>
+          <a:p>
+            <a:pPr algn="ctr" indent="0" marL="0">
+              <a:buNone/>
+            </a:pPr>
+            <a:r>
+              <a:rPr lang="en-US" sz="1000" b="1" spc="200" kern="0" dirty="0">
+                <a:solidFill>
+                  <a:srgbClr val="8A7968"/>
+                </a:solidFill>
+                <a:latin typeface="Calibri" pitchFamily="34" charset="0"/>
+                <a:ea typeface="Calibri" pitchFamily="34" charset="-122"/>
+                <a:cs typeface="Calibri" pitchFamily="34" charset="-120"/>
+              </a:rPr>
+              <a:t>UTILIZATION</a:t>
+            </a:r>
+            <a:endParaRPr lang="en-US" sz="1000" dirty="0"/>
+          </a:p>
+        </p:txBody>
+      </p:sp>
+      <p:sp>
+        <p:nvSpPr>
+          <p:cNvPr id="12" name="Text 10"/>
+          <p:cNvSpPr/>
+          <p:nvPr/>
+        </p:nvSpPr>
+        <p:spPr>
+          <a:xfrm>
+            <a:off x="441198" y="5394960"/>
+            <a:ext cx="3474720" cy="274320"/>
+          </a:xfrm>
+          <a:prstGeom prst="rect">
+            <a:avLst/>
+          </a:prstGeom>
+          <a:noFill/>
+          <a:ln/>
+        </p:spPr>
+        <p:txBody>
+          <a:bodyPr wrap="square" lIns="0" tIns="0" rIns="0" bIns="0" rtlCol="0" anchor="t"/>
+          <a:lstStyle/>
+          <a:p>
+            <a:pPr algn="ctr" indent="0" marL="0">
+              <a:buNone/>
+            </a:pPr>
+            <a:r>
+              <a:rPr lang="en-US" sz="1100" i="1" dirty="0">
+                <a:solidFill>
+                  <a:srgbClr val="8A7968"/>
+                </a:solidFill>
+                <a:latin typeface="Georgia" pitchFamily="34" charset="0"/>
+                <a:ea typeface="Georgia" pitchFamily="34" charset="-122"/>
+                <a:cs typeface="Georgia" pitchFamily="34" charset="-120"/>
+              </a:rPr>
+              <a:t>2035 actual · target 72%</a:t>
+            </a:r>
+            <a:endParaRPr lang="en-US" sz="1100" dirty="0"/>
+          </a:p>
+        </p:txBody>
+      </p:sp>
+      <p:sp>
+        <p:nvSpPr>
+          <p:cNvPr id="13" name="Shape 11"/>
+          <p:cNvSpPr/>
+          <p:nvPr/>
+        </p:nvSpPr>
+        <p:spPr>
+          <a:xfrm>
+            <a:off x="4357116" y="2688336"/>
+            <a:ext cx="3474720" cy="3474720"/>
+          </a:xfrm>
+          <a:prstGeom prst="blockArc">
+            <a:avLst/>
+          </a:prstGeom>
+          <a:solidFill>
+            <a:srgbClr val="B84C65"/>
+          </a:solidFill>
+          <a:ln/>
+        </p:spPr>
+      </p:sp>
+      <p:sp>
+        <p:nvSpPr>
+          <p:cNvPr id="14" name="Shape 12"/>
+          <p:cNvSpPr/>
+          <p:nvPr/>
+        </p:nvSpPr>
+        <p:spPr>
+          <a:xfrm rot="3780000">
+            <a:off x="4357116" y="2688336"/>
+            <a:ext cx="3474720" cy="3474720"/>
+          </a:xfrm>
+          <a:prstGeom prst="blockArc">
+            <a:avLst/>
+          </a:prstGeom>
+          <a:solidFill>
+            <a:srgbClr val="C5A55A"/>
+          </a:solidFill>
+          <a:ln/>
+        </p:spPr>
+      </p:sp>
+      <p:sp>
+        <p:nvSpPr>
+          <p:cNvPr id="15" name="Shape 13"/>
+          <p:cNvSpPr/>
+          <p:nvPr/>
+        </p:nvSpPr>
+        <p:spPr>
+          <a:xfrm rot="7560000">
+            <a:off x="4357116" y="2688336"/>
+            <a:ext cx="3474720" cy="3474720"/>
+          </a:xfrm>
+          <a:prstGeom prst="blockArc">
+            <a:avLst/>
+          </a:prstGeom>
+          <a:solidFill>
+            <a:srgbClr val="2D5F7C"/>
+          </a:solidFill>
+          <a:ln/>
+        </p:spPr>
+      </p:sp>
+      <p:sp>
+        <p:nvSpPr>
+          <p:cNvPr id="16" name="Shape 14"/>
+          <p:cNvSpPr/>
+          <p:nvPr/>
+        </p:nvSpPr>
+        <p:spPr>
+          <a:xfrm rot="2916000">
+            <a:off x="6062472" y="2896819"/>
+            <a:ext cx="64008" cy="1528877"/>
+          </a:xfrm>
+          <a:prstGeom prst="rect">
+            <a:avLst/>
+          </a:prstGeom>
+          <a:solidFill>
+            <a:srgbClr val="353745"/>
+          </a:solidFill>
+          <a:ln/>
+        </p:spPr>
+      </p:sp>
+      <p:sp>
+        <p:nvSpPr>
+          <p:cNvPr id="17" name="Shape 15"/>
+          <p:cNvSpPr/>
+          <p:nvPr/>
+        </p:nvSpPr>
+        <p:spPr>
+          <a:xfrm>
+            <a:off x="5984748" y="4315968"/>
+            <a:ext cx="219456" cy="219456"/>
+          </a:xfrm>
+          <a:prstGeom prst="ellipse">
+            <a:avLst/>
+          </a:prstGeom>
+          <a:solidFill>
+            <a:srgbClr val="353745"/>
+          </a:solidFill>
+          <a:ln/>
+        </p:spPr>
+      </p:sp>
+      <p:sp>
+        <p:nvSpPr>
+          <p:cNvPr id="18" name="Text 16"/>
+          <p:cNvSpPr/>
+          <p:nvPr/>
+        </p:nvSpPr>
+        <p:spPr>
+          <a:xfrm>
+            <a:off x="5180076" y="4517136"/>
+            <a:ext cx="1828800" cy="502920"/>
+          </a:xfrm>
+          <a:prstGeom prst="rect">
+            <a:avLst/>
+          </a:prstGeom>
+          <a:noFill/>
+          <a:ln/>
+        </p:spPr>
+        <p:txBody>
+          <a:bodyPr wrap="square" lIns="0" tIns="0" rIns="0" bIns="0" rtlCol="0" anchor="ctr"/>
+          <a:lstStyle/>
+          <a:p>
+            <a:pPr algn="ctr" indent="0" marL="0">
+              <a:buNone/>
+            </a:pPr>
+            <a:r>
+              <a:rPr lang="en-US" sz="2800" dirty="0">
+                <a:solidFill>
+                  <a:srgbClr val="353745"/>
+                </a:solidFill>
+                <a:latin typeface="Georgia" pitchFamily="34" charset="0"/>
+                <a:ea typeface="Georgia" pitchFamily="34" charset="-122"/>
+                <a:cs typeface="Georgia" pitchFamily="34" charset="-120"/>
+              </a:rPr>
+              <a:t>46.9%</a:t>
+            </a:r>
+            <a:endParaRPr lang="en-US" sz="2800" dirty="0"/>
+          </a:p>
+        </p:txBody>
+      </p:sp>
+      <p:sp>
+        <p:nvSpPr>
+          <p:cNvPr id="19" name="Text 17"/>
+          <p:cNvSpPr/>
+          <p:nvPr/>
+        </p:nvSpPr>
+        <p:spPr>
+          <a:xfrm>
+            <a:off x="4722876" y="5020056"/>
+            <a:ext cx="2743200" cy="274320"/>
+          </a:xfrm>
+          <a:prstGeom prst="rect">
+            <a:avLst/>
+          </a:prstGeom>
+          <a:noFill/>
+          <a:ln/>
+        </p:spPr>
+        <p:txBody>
+          <a:bodyPr wrap="square" lIns="0" tIns="0" rIns="0" bIns="0" rtlCol="0" anchor="t"/>
+          <a:lstStyle/>
+          <a:p>
+            <a:pPr algn="ctr" indent="0" marL="0">
+              <a:buNone/>
+            </a:pPr>
+            <a:r>
+              <a:rPr lang="en-US" sz="1000" b="1" spc="200" kern="0" dirty="0">
+                <a:solidFill>
+                  <a:srgbClr val="8A7968"/>
+                </a:solidFill>
+                <a:latin typeface="Calibri" pitchFamily="34" charset="0"/>
+                <a:ea typeface="Calibri" pitchFamily="34" charset="-122"/>
+                <a:cs typeface="Calibri" pitchFamily="34" charset="-120"/>
+              </a:rPr>
+              <a:t>WIN RATE</a:t>
+            </a:r>
+            <a:endParaRPr lang="en-US" sz="1000" dirty="0"/>
+          </a:p>
+        </p:txBody>
+      </p:sp>
+      <p:sp>
+        <p:nvSpPr>
+          <p:cNvPr id="20" name="Text 18"/>
+          <p:cNvSpPr/>
+          <p:nvPr/>
+        </p:nvSpPr>
+        <p:spPr>
+          <a:xfrm>
+            <a:off x="4357116" y="5394960"/>
+            <a:ext cx="3474720" cy="274320"/>
+          </a:xfrm>
+          <a:prstGeom prst="rect">
+            <a:avLst/>
+          </a:prstGeom>
+          <a:noFill/>
+          <a:ln/>
+        </p:spPr>
+        <p:txBody>
+          <a:bodyPr wrap="square" lIns="0" tIns="0" rIns="0" bIns="0" rtlCol="0" anchor="t"/>
+          <a:lstStyle/>
+          <a:p>
+            <a:pPr algn="ctr" indent="0" marL="0">
+              <a:buNone/>
+            </a:pPr>
+            <a:r>
+              <a:rPr lang="en-US" sz="1100" i="1" dirty="0">
+                <a:solidFill>
+                  <a:srgbClr val="8A7968"/>
+                </a:solidFill>
+                <a:latin typeface="Georgia" pitchFamily="34" charset="0"/>
+                <a:ea typeface="Georgia" pitchFamily="34" charset="-122"/>
+                <a:cs typeface="Georgia" pitchFamily="34" charset="-120"/>
+              </a:rPr>
+              <a:t>2035 actual · 10Y peak was 59.6%</a:t>
+            </a:r>
+            <a:endParaRPr lang="en-US" sz="1100" dirty="0"/>
+          </a:p>
+        </p:txBody>
+      </p:sp>
+      <p:sp>
+        <p:nvSpPr>
+          <p:cNvPr id="21" name="Shape 19"/>
+          <p:cNvSpPr/>
+          <p:nvPr/>
+        </p:nvSpPr>
+        <p:spPr>
+          <a:xfrm>
+            <a:off x="8273034" y="2688336"/>
+            <a:ext cx="3474720" cy="3474720"/>
+          </a:xfrm>
+          <a:prstGeom prst="blockArc">
+            <a:avLst/>
+          </a:prstGeom>
+          <a:solidFill>
+            <a:srgbClr val="B84C65"/>
+          </a:solidFill>
+          <a:ln/>
+        </p:spPr>
+      </p:sp>
+      <p:sp>
+        <p:nvSpPr>
+          <p:cNvPr id="22" name="Shape 20"/>
+          <p:cNvSpPr/>
+          <p:nvPr/>
+        </p:nvSpPr>
+        <p:spPr>
+          <a:xfrm rot="4320000">
+            <a:off x="8273034" y="2688336"/>
+            <a:ext cx="3474720" cy="3474720"/>
+          </a:xfrm>
+          <a:prstGeom prst="blockArc">
+            <a:avLst/>
+          </a:prstGeom>
+          <a:solidFill>
+            <a:srgbClr val="C5A55A"/>
+          </a:solidFill>
+          <a:ln/>
+        </p:spPr>
+      </p:sp>
+      <p:sp>
+        <p:nvSpPr>
+          <p:cNvPr id="23" name="Shape 21"/>
+          <p:cNvSpPr/>
+          <p:nvPr/>
+        </p:nvSpPr>
+        <p:spPr>
+          <a:xfrm rot="8100000">
+            <a:off x="8273034" y="2688336"/>
+            <a:ext cx="3474720" cy="3474720"/>
+          </a:xfrm>
+          <a:prstGeom prst="blockArc">
+            <a:avLst/>
+          </a:prstGeom>
+          <a:solidFill>
+            <a:srgbClr val="2D5F7C"/>
+          </a:solidFill>
+          <a:ln/>
+        </p:spPr>
+      </p:sp>
+      <p:sp>
+        <p:nvSpPr>
+          <p:cNvPr id="24" name="Shape 22"/>
+          <p:cNvSpPr/>
+          <p:nvPr/>
+        </p:nvSpPr>
+        <p:spPr>
+          <a:xfrm rot="-1641600">
+            <a:off x="9978390" y="2896819"/>
+            <a:ext cx="64008" cy="1528877"/>
+          </a:xfrm>
+          <a:prstGeom prst="rect">
+            <a:avLst/>
+          </a:prstGeom>
+          <a:solidFill>
+            <a:srgbClr val="353745"/>
+          </a:solidFill>
+          <a:ln/>
+        </p:spPr>
+      </p:sp>
+      <p:sp>
+        <p:nvSpPr>
+          <p:cNvPr id="25" name="Shape 23"/>
+          <p:cNvSpPr/>
+          <p:nvPr/>
+        </p:nvSpPr>
+        <p:spPr>
+          <a:xfrm>
+            <a:off x="9900666" y="4315968"/>
+            <a:ext cx="219456" cy="219456"/>
+          </a:xfrm>
+          <a:prstGeom prst="ellipse">
+            <a:avLst/>
+          </a:prstGeom>
+          <a:solidFill>
+            <a:srgbClr val="353745"/>
+          </a:solidFill>
+          <a:ln/>
+        </p:spPr>
+      </p:sp>
+      <p:sp>
+        <p:nvSpPr>
+          <p:cNvPr id="26" name="Text 24"/>
+          <p:cNvSpPr/>
+          <p:nvPr/>
+        </p:nvSpPr>
+        <p:spPr>
+          <a:xfrm>
+            <a:off x="9095994" y="4517136"/>
+            <a:ext cx="1828800" cy="502920"/>
+          </a:xfrm>
+          <a:prstGeom prst="rect">
+            <a:avLst/>
+          </a:prstGeom>
+          <a:noFill/>
+          <a:ln/>
+        </p:spPr>
+        <p:txBody>
+          <a:bodyPr wrap="square" lIns="0" tIns="0" rIns="0" bIns="0" rtlCol="0" anchor="ctr"/>
+          <a:lstStyle/>
+          <a:p>
+            <a:pPr algn="ctr" indent="0" marL="0">
+              <a:buNone/>
+            </a:pPr>
+            <a:r>
+              <a:rPr lang="en-US" sz="2800" dirty="0">
+                <a:solidFill>
+                  <a:srgbClr val="353745"/>
+                </a:solidFill>
+                <a:latin typeface="Georgia" pitchFamily="34" charset="0"/>
+                <a:ea typeface="Georgia" pitchFamily="34" charset="-122"/>
+                <a:cs typeface="Georgia" pitchFamily="34" charset="-120"/>
+              </a:rPr>
+              <a:t>26.3%</a:t>
+            </a:r>
+            <a:endParaRPr lang="en-US" sz="2800" dirty="0"/>
+          </a:p>
+        </p:txBody>
+      </p:sp>
+      <p:sp>
+        <p:nvSpPr>
+          <p:cNvPr id="27" name="Text 25"/>
+          <p:cNvSpPr/>
+          <p:nvPr/>
+        </p:nvSpPr>
+        <p:spPr>
+          <a:xfrm>
+            <a:off x="8638794" y="5020056"/>
+            <a:ext cx="2743200" cy="274320"/>
+          </a:xfrm>
+          <a:prstGeom prst="rect">
+            <a:avLst/>
+          </a:prstGeom>
+          <a:noFill/>
+          <a:ln/>
+        </p:spPr>
+        <p:txBody>
+          <a:bodyPr wrap="square" lIns="0" tIns="0" rIns="0" bIns="0" rtlCol="0" anchor="t"/>
+          <a:lstStyle/>
+          <a:p>
+            <a:pPr algn="ctr" indent="0" marL="0">
+              <a:buNone/>
+            </a:pPr>
+            <a:r>
+              <a:rPr lang="en-US" sz="1000" b="1" spc="200" kern="0" dirty="0">
+                <a:solidFill>
+                  <a:srgbClr val="8A7968"/>
+                </a:solidFill>
+                <a:latin typeface="Calibri" pitchFamily="34" charset="0"/>
+                <a:ea typeface="Calibri" pitchFamily="34" charset="-122"/>
+                <a:cs typeface="Calibri" pitchFamily="34" charset="-120"/>
+              </a:rPr>
+              <a:t>EBITDA MARGIN</a:t>
+            </a:r>
+            <a:endParaRPr lang="en-US" sz="1000" dirty="0"/>
+          </a:p>
+        </p:txBody>
+      </p:sp>
+      <p:sp>
+        <p:nvSpPr>
+          <p:cNvPr id="28" name="Text 26"/>
+          <p:cNvSpPr/>
+          <p:nvPr/>
+        </p:nvSpPr>
+        <p:spPr>
+          <a:xfrm>
+            <a:off x="8273034" y="5394960"/>
+            <a:ext cx="3474720" cy="274320"/>
+          </a:xfrm>
+          <a:prstGeom prst="rect">
+            <a:avLst/>
+          </a:prstGeom>
+          <a:noFill/>
+          <a:ln/>
+        </p:spPr>
+        <p:txBody>
+          <a:bodyPr wrap="square" lIns="0" tIns="0" rIns="0" bIns="0" rtlCol="0" anchor="t"/>
+          <a:lstStyle/>
+          <a:p>
+            <a:pPr algn="ctr" indent="0" marL="0">
+              <a:buNone/>
+            </a:pPr>
+            <a:r>
+              <a:rPr lang="en-US" sz="1100" i="1" dirty="0">
+                <a:solidFill>
+                  <a:srgbClr val="8A7968"/>
+                </a:solidFill>
+                <a:latin typeface="Georgia" pitchFamily="34" charset="0"/>
+                <a:ea typeface="Georgia" pitchFamily="34" charset="-122"/>
+                <a:cs typeface="Georgia" pitchFamily="34" charset="-120"/>
+              </a:rPr>
+              <a:t>2035 actual · 10Y peak 33.4%</a:t>
+            </a:r>
+            <a:endParaRPr lang="en-US" sz="1100" dirty="0"/>
+          </a:p>
+        </p:txBody>
+      </p:sp>
+      <p:sp>
+        <p:nvSpPr>
+          <p:cNvPr id="29" name="Text 27"/>
+          <p:cNvSpPr/>
+          <p:nvPr/>
+        </p:nvSpPr>
+        <p:spPr>
+          <a:xfrm>
+            <a:off x="548640" y="6080760"/>
+            <a:ext cx="11091672" cy="365760"/>
+          </a:xfrm>
+          <a:prstGeom prst="rect">
+            <a:avLst/>
+          </a:prstGeom>
+          <a:noFill/>
+          <a:ln/>
+        </p:spPr>
+        <p:txBody>
+          <a:bodyPr wrap="square" lIns="0" tIns="0" rIns="0" bIns="0" rtlCol="0" anchor="t"/>
+          <a:lstStyle/>
+          <a:p>
+            <a:pPr indent="0" marL="0">
+              <a:buNone/>
+            </a:pPr>
+            <a:r>
+              <a:rPr lang="en-US" sz="1200" i="1" dirty="0">
+                <a:solidFill>
+                  <a:srgbClr val="353745"/>
+                </a:solidFill>
+                <a:latin typeface="Georgia" pitchFamily="34" charset="0"/>
+                <a:ea typeface="Georgia" pitchFamily="34" charset="-122"/>
+                <a:cs typeface="Georgia" pitchFamily="34" charset="-120"/>
+              </a:rPr>
+              <a:t>Gauges are dashboard grammar — strong at a glance, weak at precision. Use for single-number KPI cards, not for trend or composition stories.</a:t>
+            </a:r>
+            <a:endParaRPr lang="en-US" sz="1200" dirty="0"/>
+          </a:p>
+        </p:txBody>
       </p:sp>
     </p:spTree>
   </p:cSld>

--- a/output/audit_deck.pptx
+++ b/output/audit_deck.pptx
@@ -17784,7 +17784,7 @@
                 <a:ea typeface="Georgia" pitchFamily="34" charset="-122"/>
                 <a:cs typeface="Georgia" pitchFamily="34" charset="-120"/>
               </a:rPr>
-              <a:t>Three KPIs, three half-dials.</a:t>
+              <a:t>Six KPIs, two categories, one panel.</a:t>
             </a:r>
             <a:endParaRPr lang="en-US" sz="3000" dirty="0"/>
           </a:p>
@@ -17823,7 +17823,7 @@
                 <a:ea typeface="Georgia" pitchFamily="34" charset="-122"/>
                 <a:cs typeface="Georgia" pitchFamily="34" charset="-120"/>
               </a:rPr>
-              <a:t>pptxgenjs's blockArc can't hit arbitrary start/end angles cleanly, so shape-based gauges look chunky. Generated via matplotlib Wedge, inserted as PNG. The handoff's established fallback for curve-heavy viz.</a:t>
+              <a:t>Rendered via matplotlib (Wedge arcs, needle, triangle target markers) and embedded as a PNG. pptxgenjs blockArc can't hit arbitrary angles cleanly; matplotlib handles curves natively. Categorical eyebrows group the metrics.</a:t>
             </a:r>
             <a:endParaRPr lang="en-US" sz="1300" dirty="0"/>
           </a:p>
@@ -17845,53 +17845,14 @@
         </p:blipFill>
         <p:spPr>
           <a:xfrm>
-            <a:off x="640080" y="2194560"/>
-            <a:ext cx="10908792" cy="3272638"/>
+            <a:off x="2665476" y="1920240"/>
+            <a:ext cx="6858000" cy="4572000"/>
           </a:xfrm>
           <a:prstGeom prst="rect">
             <a:avLst/>
           </a:prstGeom>
         </p:spPr>
       </p:pic>
-      <p:sp>
-        <p:nvSpPr>
-          <p:cNvPr id="6" name="Text 3"/>
-          <p:cNvSpPr/>
-          <p:nvPr/>
-        </p:nvSpPr>
-        <p:spPr>
-          <a:xfrm>
-            <a:off x="548640" y="6080760"/>
-            <a:ext cx="11091672" cy="365760"/>
-          </a:xfrm>
-          <a:prstGeom prst="rect">
-            <a:avLst/>
-          </a:prstGeom>
-          <a:noFill/>
-          <a:ln/>
-        </p:spPr>
-        <p:txBody>
-          <a:bodyPr wrap="square" lIns="0" tIns="0" rIns="0" bIns="0" rtlCol="0" anchor="t"/>
-          <a:lstStyle/>
-          <a:p>
-            <a:pPr indent="0" marL="0">
-              <a:buNone/>
-            </a:pPr>
-            <a:r>
-              <a:rPr lang="en-US" sz="1200" i="1" dirty="0">
-                <a:solidFill>
-                  <a:srgbClr val="353745"/>
-                </a:solidFill>
-                <a:latin typeface="Georgia" pitchFamily="34" charset="0"/>
-                <a:ea typeface="Georgia" pitchFamily="34" charset="-122"/>
-                <a:cs typeface="Georgia" pitchFamily="34" charset="-120"/>
-              </a:rPr>
-              <a:t>Gauges are dashboard grammar — strong at a glance, weak at precision. Good fit for single-number KPI cards; not for trends or composition.</a:t>
-            </a:r>
-            <a:endParaRPr lang="en-US" sz="1200" dirty="0"/>
-          </a:p>
-        </p:txBody>
-      </p:sp>
     </p:spTree>
   </p:cSld>
   <p:clrMapOvr>

--- a/output/audit_deck.pptx
+++ b/output/audit_deck.pptx
@@ -17745,7 +17745,7 @@
                 <a:ea typeface="Calibri" pitchFamily="34" charset="-122"/>
                 <a:cs typeface="Calibri" pitchFamily="34" charset="-120"/>
               </a:rPr>
-              <a:t>GAUGE / TACHOMETER  ·  ESCAPE-HATCH (MATPLOTLIB)</a:t>
+              <a:t>GAUGE / TACHOMETER  ·  HYBRID (ARC PNG + NATIVE OVERLAYS)</a:t>
             </a:r>
             <a:endParaRPr lang="en-US" sz="1000" dirty="0"/>
           </a:p>
@@ -17823,15 +17823,335 @@
                 <a:ea typeface="Georgia" pitchFamily="34" charset="-122"/>
                 <a:cs typeface="Georgia" pitchFamily="34" charset="-120"/>
               </a:rPr>
-              <a:t>Rendered via matplotlib (Wedge arcs, needle, triangle target markers) and embedded as a PNG. pptxgenjs blockArc can't hit arbitrary angles cleanly; matplotlib handles curves natively. Categorical eyebrows group the metrics.</a:t>
+              <a:t>Matplotlib supplies the arc zones only; every other element stays native so each gauge is independently editable. Pattern: minimize outsourcing to the absolute minimum required to get the job done.</a:t>
             </a:r>
             <a:endParaRPr lang="en-US" sz="1300" dirty="0"/>
+          </a:p>
+        </p:txBody>
+      </p:sp>
+      <p:sp>
+        <p:nvSpPr>
+          <p:cNvPr id="5" name="Text 3"/>
+          <p:cNvSpPr/>
+          <p:nvPr/>
+        </p:nvSpPr>
+        <p:spPr>
+          <a:xfrm>
+            <a:off x="548640" y="1920240"/>
+            <a:ext cx="11091672" cy="256032"/>
+          </a:xfrm>
+          <a:prstGeom prst="rect">
+            <a:avLst/>
+          </a:prstGeom>
+          <a:noFill/>
+          <a:ln/>
+        </p:spPr>
+        <p:txBody>
+          <a:bodyPr wrap="square" lIns="0" tIns="0" rIns="0" bIns="0" rtlCol="0" anchor="t"/>
+          <a:lstStyle/>
+          <a:p>
+            <a:pPr indent="0" marL="0">
+              <a:buNone/>
+            </a:pPr>
+            <a:r>
+              <a:rPr lang="en-US" sz="1000" b="1" spc="200" kern="0" dirty="0">
+                <a:solidFill>
+                  <a:srgbClr val="8A7968"/>
+                </a:solidFill>
+                <a:latin typeface="Calibri" pitchFamily="34" charset="0"/>
+                <a:ea typeface="Calibri" pitchFamily="34" charset="-122"/>
+                <a:cs typeface="Calibri" pitchFamily="34" charset="-120"/>
+              </a:rPr>
+              <a:t>THE MONEY WORKS</a:t>
+            </a:r>
+            <a:endParaRPr lang="en-US" sz="1000" dirty="0"/>
+          </a:p>
+        </p:txBody>
+      </p:sp>
+      <p:sp>
+        <p:nvSpPr>
+          <p:cNvPr id="6" name="Shape 4"/>
+          <p:cNvSpPr/>
+          <p:nvPr/>
+        </p:nvSpPr>
+        <p:spPr>
+          <a:xfrm>
+            <a:off x="548640" y="1920240"/>
+            <a:ext cx="11091672" cy="256032"/>
+          </a:xfrm>
+          <a:prstGeom prst="rect">
+            <a:avLst/>
+          </a:prstGeom>
+          <a:solidFill>
+            <a:srgbClr val="FFF5ED"/>
+          </a:solidFill>
+          <a:ln/>
+        </p:spPr>
+      </p:sp>
+      <p:sp>
+        <p:nvSpPr>
+          <p:cNvPr id="7" name="Text 5"/>
+          <p:cNvSpPr/>
+          <p:nvPr/>
+        </p:nvSpPr>
+        <p:spPr>
+          <a:xfrm>
+            <a:off x="548640" y="1920240"/>
+            <a:ext cx="11091672" cy="256032"/>
+          </a:xfrm>
+          <a:prstGeom prst="rect">
+            <a:avLst/>
+          </a:prstGeom>
+          <a:noFill/>
+          <a:ln/>
+        </p:spPr>
+        <p:txBody>
+          <a:bodyPr wrap="square" lIns="0" tIns="0" rIns="0" bIns="0" rtlCol="0" anchor="ctr"/>
+          <a:lstStyle/>
+          <a:p>
+            <a:pPr indent="0" marL="0">
+              <a:buNone/>
+            </a:pPr>
+            <a:r>
+              <a:rPr lang="en-US" sz="1100" b="1" spc="200" kern="0" dirty="0">
+                <a:solidFill>
+                  <a:srgbClr val="2D5F7C"/>
+                </a:solidFill>
+                <a:latin typeface="Calibri" pitchFamily="34" charset="0"/>
+                <a:ea typeface="Calibri" pitchFamily="34" charset="-122"/>
+                <a:cs typeface="Calibri" pitchFamily="34" charset="-120"/>
+              </a:rPr>
+              <a:t>THE MONEY WORKS</a:t>
+            </a:r>
+            <a:endParaRPr lang="en-US" sz="1100" dirty="0"/>
+          </a:p>
+        </p:txBody>
+      </p:sp>
+      <p:sp>
+        <p:nvSpPr>
+          <p:cNvPr id="8" name="Shape 6"/>
+          <p:cNvSpPr/>
+          <p:nvPr/>
+        </p:nvSpPr>
+        <p:spPr>
+          <a:xfrm>
+            <a:off x="548640" y="2176272"/>
+            <a:ext cx="11091672" cy="0"/>
+          </a:xfrm>
+          <a:prstGeom prst="line">
+            <a:avLst/>
+          </a:prstGeom>
+          <a:noFill/>
+          <a:ln w="6350">
+            <a:solidFill>
+              <a:srgbClr val="C9B9A8"/>
+            </a:solidFill>
+            <a:prstDash val="solid"/>
+          </a:ln>
+        </p:spPr>
+      </p:sp>
+      <p:sp>
+        <p:nvSpPr>
+          <p:cNvPr id="9" name="Text 7"/>
+          <p:cNvSpPr/>
+          <p:nvPr/>
+        </p:nvSpPr>
+        <p:spPr>
+          <a:xfrm>
+            <a:off x="548640" y="4343400"/>
+            <a:ext cx="11091672" cy="256032"/>
+          </a:xfrm>
+          <a:prstGeom prst="rect">
+            <a:avLst/>
+          </a:prstGeom>
+          <a:noFill/>
+          <a:ln/>
+        </p:spPr>
+        <p:txBody>
+          <a:bodyPr wrap="square" lIns="0" tIns="0" rIns="0" bIns="0" rtlCol="0" anchor="t"/>
+          <a:lstStyle/>
+          <a:p>
+            <a:pPr indent="0" marL="0">
+              <a:buNone/>
+            </a:pPr>
+            <a:r>
+              <a:rPr lang="en-US" sz="1000" b="1" spc="200" kern="0" dirty="0">
+                <a:solidFill>
+                  <a:srgbClr val="8A7968"/>
+                </a:solidFill>
+                <a:latin typeface="Calibri" pitchFamily="34" charset="0"/>
+                <a:ea typeface="Calibri" pitchFamily="34" charset="-122"/>
+                <a:cs typeface="Calibri" pitchFamily="34" charset="-120"/>
+              </a:rPr>
+              <a:t>THE PEOPLE PROBLEM</a:t>
+            </a:r>
+            <a:endParaRPr lang="en-US" sz="1000" dirty="0"/>
+          </a:p>
+        </p:txBody>
+      </p:sp>
+      <p:sp>
+        <p:nvSpPr>
+          <p:cNvPr id="10" name="Shape 8"/>
+          <p:cNvSpPr/>
+          <p:nvPr/>
+        </p:nvSpPr>
+        <p:spPr>
+          <a:xfrm>
+            <a:off x="548640" y="4343400"/>
+            <a:ext cx="11091672" cy="256032"/>
+          </a:xfrm>
+          <a:prstGeom prst="rect">
+            <a:avLst/>
+          </a:prstGeom>
+          <a:solidFill>
+            <a:srgbClr val="FFF5ED"/>
+          </a:solidFill>
+          <a:ln/>
+        </p:spPr>
+      </p:sp>
+      <p:sp>
+        <p:nvSpPr>
+          <p:cNvPr id="11" name="Text 9"/>
+          <p:cNvSpPr/>
+          <p:nvPr/>
+        </p:nvSpPr>
+        <p:spPr>
+          <a:xfrm>
+            <a:off x="548640" y="4343400"/>
+            <a:ext cx="11091672" cy="256032"/>
+          </a:xfrm>
+          <a:prstGeom prst="rect">
+            <a:avLst/>
+          </a:prstGeom>
+          <a:noFill/>
+          <a:ln/>
+        </p:spPr>
+        <p:txBody>
+          <a:bodyPr wrap="square" lIns="0" tIns="0" rIns="0" bIns="0" rtlCol="0" anchor="ctr"/>
+          <a:lstStyle/>
+          <a:p>
+            <a:pPr indent="0" marL="0">
+              <a:buNone/>
+            </a:pPr>
+            <a:r>
+              <a:rPr lang="en-US" sz="1100" b="1" spc="200" kern="0" dirty="0">
+                <a:solidFill>
+                  <a:srgbClr val="B84C65"/>
+                </a:solidFill>
+                <a:latin typeface="Calibri" pitchFamily="34" charset="0"/>
+                <a:ea typeface="Calibri" pitchFamily="34" charset="-122"/>
+                <a:cs typeface="Calibri" pitchFamily="34" charset="-120"/>
+              </a:rPr>
+              <a:t>THE PEOPLE PROBLEM</a:t>
+            </a:r>
+            <a:endParaRPr lang="en-US" sz="1100" dirty="0"/>
+          </a:p>
+        </p:txBody>
+      </p:sp>
+      <p:sp>
+        <p:nvSpPr>
+          <p:cNvPr id="12" name="Shape 10"/>
+          <p:cNvSpPr/>
+          <p:nvPr/>
+        </p:nvSpPr>
+        <p:spPr>
+          <a:xfrm>
+            <a:off x="548640" y="4599432"/>
+            <a:ext cx="11091672" cy="0"/>
+          </a:xfrm>
+          <a:prstGeom prst="line">
+            <a:avLst/>
+          </a:prstGeom>
+          <a:noFill/>
+          <a:ln w="6350">
+            <a:solidFill>
+              <a:srgbClr val="C9B9A8"/>
+            </a:solidFill>
+            <a:prstDash val="solid"/>
+          </a:ln>
+        </p:spPr>
+      </p:sp>
+      <p:sp>
+        <p:nvSpPr>
+          <p:cNvPr id="13" name="Text 11"/>
+          <p:cNvSpPr/>
+          <p:nvPr/>
+        </p:nvSpPr>
+        <p:spPr>
+          <a:xfrm>
+            <a:off x="548640" y="2240280"/>
+            <a:ext cx="3520440" cy="256032"/>
+          </a:xfrm>
+          <a:prstGeom prst="rect">
+            <a:avLst/>
+          </a:prstGeom>
+          <a:noFill/>
+          <a:ln/>
+        </p:spPr>
+        <p:txBody>
+          <a:bodyPr wrap="square" lIns="0" tIns="0" rIns="0" bIns="0" rtlCol="0" anchor="ctr"/>
+          <a:lstStyle/>
+          <a:p>
+            <a:pPr algn="ctr" indent="0" marL="0">
+              <a:buNone/>
+            </a:pPr>
+            <a:r>
+              <a:rPr lang="en-US" sz="1200" b="1" dirty="0">
+                <a:solidFill>
+                  <a:srgbClr val="353745"/>
+                </a:solidFill>
+                <a:latin typeface="Calibri" pitchFamily="34" charset="0"/>
+                <a:ea typeface="Calibri" pitchFamily="34" charset="-122"/>
+                <a:cs typeface="Calibri" pitchFamily="34" charset="-120"/>
+              </a:rPr>
+              <a:t>Realization Rate</a:t>
+            </a:r>
+            <a:endParaRPr lang="en-US" sz="1200" dirty="0"/>
+          </a:p>
+        </p:txBody>
+      </p:sp>
+      <p:sp>
+        <p:nvSpPr>
+          <p:cNvPr id="14" name="Text 12"/>
+          <p:cNvSpPr/>
+          <p:nvPr/>
+        </p:nvSpPr>
+        <p:spPr>
+          <a:xfrm>
+            <a:off x="548640" y="2496312"/>
+            <a:ext cx="3520440" cy="201168"/>
+          </a:xfrm>
+          <a:prstGeom prst="rect">
+            <a:avLst/>
+          </a:prstGeom>
+          <a:noFill/>
+          <a:ln/>
+        </p:spPr>
+        <p:txBody>
+          <a:bodyPr wrap="square" lIns="0" tIns="0" rIns="0" bIns="0" rtlCol="0" anchor="ctr"/>
+          <a:lstStyle/>
+          <a:p>
+            <a:pPr algn="ctr" indent="0" marL="0">
+              <a:buNone/>
+            </a:pPr>
+            <a:r>
+              <a:rPr lang="en-US" sz="1000" i="1" dirty="0">
+                <a:solidFill>
+                  <a:srgbClr val="8A7968"/>
+                </a:solidFill>
+                <a:latin typeface="Georgia" pitchFamily="34" charset="0"/>
+                <a:ea typeface="Georgia" pitchFamily="34" charset="-122"/>
+                <a:cs typeface="Georgia" pitchFamily="34" charset="-120"/>
+              </a:rPr>
+              <a:t>Billed vs. worked value</a:t>
+            </a:r>
+            <a:endParaRPr lang="en-US" sz="1000" dirty="0"/>
           </a:p>
         </p:txBody>
       </p:sp>
       <p:pic>
         <p:nvPicPr>
-          <p:cNvPr id="5" name="Image 0" descr="/Users/nathansaperia/Downloads/PPTX Chart Builder/claude-pptx-plot/assets/gauges.png">    </p:cNvPr>
+          <p:cNvPr id="15" name="Image 0" descr="/Users/nathansaperia/Downloads/PPTX Chart Builder/claude-pptx-plot/assets/gauge_arc.png">    </p:cNvPr>
           <p:cNvPicPr>
             <a:picLocks noChangeAspect="1"/>
           </p:cNvPicPr>
@@ -17845,14 +18165,3560 @@
         </p:blipFill>
         <p:spPr>
           <a:xfrm>
-            <a:off x="2665476" y="1920240"/>
-            <a:ext cx="6858000" cy="4572000"/>
+            <a:off x="1394460" y="2743200"/>
+            <a:ext cx="1828800" cy="914400"/>
           </a:xfrm>
           <a:prstGeom prst="rect">
             <a:avLst/>
           </a:prstGeom>
         </p:spPr>
       </p:pic>
+      <p:sp>
+        <p:nvSpPr>
+          <p:cNvPr id="16" name="Shape 13"/>
+          <p:cNvSpPr/>
+          <p:nvPr/>
+        </p:nvSpPr>
+        <p:spPr>
+          <a:xfrm flipH="1" flipV="1">
+            <a:off x="1509914" y="3077131"/>
+            <a:ext cx="59181" cy="42998"/>
+          </a:xfrm>
+          <a:prstGeom prst="line">
+            <a:avLst/>
+          </a:prstGeom>
+          <a:noFill/>
+          <a:ln w="6350">
+            <a:solidFill>
+              <a:srgbClr val="8A7968"/>
+            </a:solidFill>
+            <a:prstDash val="solid"/>
+          </a:ln>
+        </p:spPr>
+      </p:sp>
+      <p:sp>
+        <p:nvSpPr>
+          <p:cNvPr id="17" name="Text 14"/>
+          <p:cNvSpPr/>
+          <p:nvPr/>
+        </p:nvSpPr>
+        <p:spPr>
+          <a:xfrm>
+            <a:off x="1190383" y="2890552"/>
+            <a:ext cx="402336" cy="201168"/>
+          </a:xfrm>
+          <a:prstGeom prst="rect">
+            <a:avLst/>
+          </a:prstGeom>
+          <a:noFill/>
+          <a:ln/>
+        </p:spPr>
+        <p:txBody>
+          <a:bodyPr wrap="square" lIns="0" tIns="0" rIns="0" bIns="0" rtlCol="0" anchor="ctr"/>
+          <a:lstStyle/>
+          <a:p>
+            <a:pPr algn="ctr" indent="0" marL="0">
+              <a:buNone/>
+            </a:pPr>
+            <a:r>
+              <a:rPr lang="en-US" sz="800" dirty="0">
+                <a:solidFill>
+                  <a:srgbClr val="8A7968"/>
+                </a:solidFill>
+                <a:latin typeface="Calibri" pitchFamily="34" charset="0"/>
+                <a:ea typeface="Calibri" pitchFamily="34" charset="-122"/>
+                <a:cs typeface="Calibri" pitchFamily="34" charset="-120"/>
+              </a:rPr>
+              <a:t>60</a:t>
+            </a:r>
+            <a:endParaRPr lang="en-US" sz="800" dirty="0"/>
+          </a:p>
+        </p:txBody>
+      </p:sp>
+      <p:sp>
+        <p:nvSpPr>
+          <p:cNvPr id="18" name="Shape 15"/>
+          <p:cNvSpPr/>
+          <p:nvPr/>
+        </p:nvSpPr>
+        <p:spPr>
+          <a:xfrm flipH="1" flipV="1">
+            <a:off x="2003690" y="2718382"/>
+            <a:ext cx="22605" cy="69572"/>
+          </a:xfrm>
+          <a:prstGeom prst="line">
+            <a:avLst/>
+          </a:prstGeom>
+          <a:noFill/>
+          <a:ln w="6350">
+            <a:solidFill>
+              <a:srgbClr val="8A7968"/>
+            </a:solidFill>
+            <a:prstDash val="solid"/>
+          </a:ln>
+        </p:spPr>
+      </p:sp>
+      <p:sp>
+        <p:nvSpPr>
+          <p:cNvPr id="19" name="Text 16"/>
+          <p:cNvSpPr/>
+          <p:nvPr/>
+        </p:nvSpPr>
+        <p:spPr>
+          <a:xfrm>
+            <a:off x="1757311" y="2478655"/>
+            <a:ext cx="402336" cy="201168"/>
+          </a:xfrm>
+          <a:prstGeom prst="rect">
+            <a:avLst/>
+          </a:prstGeom>
+          <a:noFill/>
+          <a:ln/>
+        </p:spPr>
+        <p:txBody>
+          <a:bodyPr wrap="square" lIns="0" tIns="0" rIns="0" bIns="0" rtlCol="0" anchor="ctr"/>
+          <a:lstStyle/>
+          <a:p>
+            <a:pPr algn="ctr" indent="0" marL="0">
+              <a:buNone/>
+            </a:pPr>
+            <a:r>
+              <a:rPr lang="en-US" sz="800" dirty="0">
+                <a:solidFill>
+                  <a:srgbClr val="8A7968"/>
+                </a:solidFill>
+                <a:latin typeface="Calibri" pitchFamily="34" charset="0"/>
+                <a:ea typeface="Calibri" pitchFamily="34" charset="-122"/>
+                <a:cs typeface="Calibri" pitchFamily="34" charset="-120"/>
+              </a:rPr>
+              <a:t>70</a:t>
+            </a:r>
+            <a:endParaRPr lang="en-US" sz="800" dirty="0"/>
+          </a:p>
+        </p:txBody>
+      </p:sp>
+      <p:sp>
+        <p:nvSpPr>
+          <p:cNvPr id="20" name="Shape 17"/>
+          <p:cNvSpPr/>
+          <p:nvPr/>
+        </p:nvSpPr>
+        <p:spPr>
+          <a:xfrm flipV="1">
+            <a:off x="2591425" y="2718382"/>
+            <a:ext cx="22605" cy="69572"/>
+          </a:xfrm>
+          <a:prstGeom prst="line">
+            <a:avLst/>
+          </a:prstGeom>
+          <a:noFill/>
+          <a:ln w="6350">
+            <a:solidFill>
+              <a:srgbClr val="8A7968"/>
+            </a:solidFill>
+            <a:prstDash val="solid"/>
+          </a:ln>
+        </p:spPr>
+      </p:sp>
+      <p:sp>
+        <p:nvSpPr>
+          <p:cNvPr id="21" name="Text 18"/>
+          <p:cNvSpPr/>
+          <p:nvPr/>
+        </p:nvSpPr>
+        <p:spPr>
+          <a:xfrm>
+            <a:off x="2458073" y="2478655"/>
+            <a:ext cx="402336" cy="201168"/>
+          </a:xfrm>
+          <a:prstGeom prst="rect">
+            <a:avLst/>
+          </a:prstGeom>
+          <a:noFill/>
+          <a:ln/>
+        </p:spPr>
+        <p:txBody>
+          <a:bodyPr wrap="square" lIns="0" tIns="0" rIns="0" bIns="0" rtlCol="0" anchor="ctr"/>
+          <a:lstStyle/>
+          <a:p>
+            <a:pPr algn="ctr" indent="0" marL="0">
+              <a:buNone/>
+            </a:pPr>
+            <a:r>
+              <a:rPr lang="en-US" sz="800" dirty="0">
+                <a:solidFill>
+                  <a:srgbClr val="8A7968"/>
+                </a:solidFill>
+                <a:latin typeface="Calibri" pitchFamily="34" charset="0"/>
+                <a:ea typeface="Calibri" pitchFamily="34" charset="-122"/>
+                <a:cs typeface="Calibri" pitchFamily="34" charset="-120"/>
+              </a:rPr>
+              <a:t>80</a:t>
+            </a:r>
+            <a:endParaRPr lang="en-US" sz="800" dirty="0"/>
+          </a:p>
+        </p:txBody>
+      </p:sp>
+      <p:sp>
+        <p:nvSpPr>
+          <p:cNvPr id="22" name="Shape 19"/>
+          <p:cNvSpPr/>
+          <p:nvPr/>
+        </p:nvSpPr>
+        <p:spPr>
+          <a:xfrm flipV="1">
+            <a:off x="3048625" y="3077131"/>
+            <a:ext cx="59181" cy="42998"/>
+          </a:xfrm>
+          <a:prstGeom prst="line">
+            <a:avLst/>
+          </a:prstGeom>
+          <a:noFill/>
+          <a:ln w="6350">
+            <a:solidFill>
+              <a:srgbClr val="8A7968"/>
+            </a:solidFill>
+            <a:prstDash val="solid"/>
+          </a:ln>
+        </p:spPr>
+      </p:sp>
+      <p:sp>
+        <p:nvSpPr>
+          <p:cNvPr id="23" name="Text 20"/>
+          <p:cNvSpPr/>
+          <p:nvPr/>
+        </p:nvSpPr>
+        <p:spPr>
+          <a:xfrm>
+            <a:off x="3025001" y="2890552"/>
+            <a:ext cx="402336" cy="201168"/>
+          </a:xfrm>
+          <a:prstGeom prst="rect">
+            <a:avLst/>
+          </a:prstGeom>
+          <a:noFill/>
+          <a:ln/>
+        </p:spPr>
+        <p:txBody>
+          <a:bodyPr wrap="square" lIns="0" tIns="0" rIns="0" bIns="0" rtlCol="0" anchor="ctr"/>
+          <a:lstStyle/>
+          <a:p>
+            <a:pPr algn="ctr" indent="0" marL="0">
+              <a:buNone/>
+            </a:pPr>
+            <a:r>
+              <a:rPr lang="en-US" sz="800" dirty="0">
+                <a:solidFill>
+                  <a:srgbClr val="8A7968"/>
+                </a:solidFill>
+                <a:latin typeface="Calibri" pitchFamily="34" charset="0"/>
+                <a:ea typeface="Calibri" pitchFamily="34" charset="-122"/>
+                <a:cs typeface="Calibri" pitchFamily="34" charset="-120"/>
+              </a:rPr>
+              <a:t>90</a:t>
+            </a:r>
+            <a:endParaRPr lang="en-US" sz="800" dirty="0"/>
+          </a:p>
+        </p:txBody>
+      </p:sp>
+      <p:sp>
+        <p:nvSpPr>
+          <p:cNvPr id="24" name="Text 21"/>
+          <p:cNvSpPr/>
+          <p:nvPr/>
+        </p:nvSpPr>
+        <p:spPr>
+          <a:xfrm>
+            <a:off x="1156716" y="3584448"/>
+            <a:ext cx="228600" cy="201168"/>
+          </a:xfrm>
+          <a:prstGeom prst="rect">
+            <a:avLst/>
+          </a:prstGeom>
+          <a:noFill/>
+          <a:ln/>
+        </p:spPr>
+        <p:txBody>
+          <a:bodyPr wrap="square" lIns="0" tIns="0" rIns="0" bIns="0" rtlCol="0" anchor="ctr"/>
+          <a:lstStyle/>
+          <a:p>
+            <a:pPr algn="r" indent="0" marL="0">
+              <a:buNone/>
+            </a:pPr>
+            <a:r>
+              <a:rPr lang="en-US" sz="800" dirty="0">
+                <a:solidFill>
+                  <a:srgbClr val="8A7968"/>
+                </a:solidFill>
+                <a:latin typeface="Calibri" pitchFamily="34" charset="0"/>
+                <a:ea typeface="Calibri" pitchFamily="34" charset="-122"/>
+                <a:cs typeface="Calibri" pitchFamily="34" charset="-120"/>
+              </a:rPr>
+              <a:t>50</a:t>
+            </a:r>
+            <a:endParaRPr lang="en-US" sz="800" dirty="0"/>
+          </a:p>
+        </p:txBody>
+      </p:sp>
+      <p:sp>
+        <p:nvSpPr>
+          <p:cNvPr id="25" name="Text 22"/>
+          <p:cNvSpPr/>
+          <p:nvPr/>
+        </p:nvSpPr>
+        <p:spPr>
+          <a:xfrm>
+            <a:off x="3232404" y="3584448"/>
+            <a:ext cx="228600" cy="201168"/>
+          </a:xfrm>
+          <a:prstGeom prst="rect">
+            <a:avLst/>
+          </a:prstGeom>
+          <a:noFill/>
+          <a:ln/>
+        </p:spPr>
+        <p:txBody>
+          <a:bodyPr wrap="square" lIns="0" tIns="0" rIns="0" bIns="0" rtlCol="0" anchor="ctr"/>
+          <a:lstStyle/>
+          <a:p>
+            <a:pPr algn="l" indent="0" marL="0">
+              <a:buNone/>
+            </a:pPr>
+            <a:r>
+              <a:rPr lang="en-US" sz="800" dirty="0">
+                <a:solidFill>
+                  <a:srgbClr val="8A7968"/>
+                </a:solidFill>
+                <a:latin typeface="Calibri" pitchFamily="34" charset="0"/>
+                <a:ea typeface="Calibri" pitchFamily="34" charset="-122"/>
+                <a:cs typeface="Calibri" pitchFamily="34" charset="-120"/>
+              </a:rPr>
+              <a:t>100</a:t>
+            </a:r>
+            <a:endParaRPr lang="en-US" sz="800" dirty="0"/>
+          </a:p>
+        </p:txBody>
+      </p:sp>
+      <p:sp>
+        <p:nvSpPr>
+          <p:cNvPr id="26" name="Shape 23"/>
+          <p:cNvSpPr/>
+          <p:nvPr/>
+        </p:nvSpPr>
+        <p:spPr>
+          <a:xfrm rot="14040000">
+            <a:off x="3324909" y="2808885"/>
+            <a:ext cx="128016" cy="128016"/>
+          </a:xfrm>
+          <a:prstGeom prst="triangle">
+            <a:avLst/>
+          </a:prstGeom>
+          <a:solidFill>
+            <a:srgbClr val="2D5F7C"/>
+          </a:solidFill>
+          <a:ln/>
+        </p:spPr>
+      </p:sp>
+      <p:sp>
+        <p:nvSpPr>
+          <p:cNvPr id="27" name="Shape 24"/>
+          <p:cNvSpPr/>
+          <p:nvPr/>
+        </p:nvSpPr>
+        <p:spPr>
+          <a:xfrm flipV="1">
+            <a:off x="2308860" y="3295521"/>
+            <a:ext cx="769458" cy="362079"/>
+          </a:xfrm>
+          <a:prstGeom prst="line">
+            <a:avLst/>
+          </a:prstGeom>
+          <a:noFill/>
+          <a:ln w="27940">
+            <a:solidFill>
+              <a:srgbClr val="B84C65"/>
+            </a:solidFill>
+            <a:prstDash val="solid"/>
+          </a:ln>
+        </p:spPr>
+      </p:sp>
+      <p:sp>
+        <p:nvSpPr>
+          <p:cNvPr id="28" name="Shape 25"/>
+          <p:cNvSpPr/>
+          <p:nvPr/>
+        </p:nvSpPr>
+        <p:spPr>
+          <a:xfrm>
+            <a:off x="2208276" y="3557016"/>
+            <a:ext cx="201168" cy="201168"/>
+          </a:xfrm>
+          <a:prstGeom prst="ellipse">
+            <a:avLst/>
+          </a:prstGeom>
+          <a:solidFill>
+            <a:srgbClr val="353745"/>
+          </a:solidFill>
+          <a:ln/>
+        </p:spPr>
+      </p:sp>
+      <p:sp>
+        <p:nvSpPr>
+          <p:cNvPr id="29" name="Text 26"/>
+          <p:cNvSpPr/>
+          <p:nvPr/>
+        </p:nvSpPr>
+        <p:spPr>
+          <a:xfrm>
+            <a:off x="548640" y="3785616"/>
+            <a:ext cx="3520440" cy="457200"/>
+          </a:xfrm>
+          <a:prstGeom prst="rect">
+            <a:avLst/>
+          </a:prstGeom>
+          <a:noFill/>
+          <a:ln/>
+        </p:spPr>
+        <p:txBody>
+          <a:bodyPr wrap="square" lIns="0" tIns="0" rIns="0" bIns="0" rtlCol="0" anchor="t"/>
+          <a:lstStyle/>
+          <a:p>
+            <a:pPr algn="ctr" indent="0" marL="0">
+              <a:buNone/>
+            </a:pPr>
+            <a:r>
+              <a:rPr lang="en-US" sz="2200" dirty="0">
+                <a:solidFill>
+                  <a:srgbClr val="353745"/>
+                </a:solidFill>
+                <a:latin typeface="Georgia" pitchFamily="34" charset="0"/>
+                <a:ea typeface="Georgia" pitchFamily="34" charset="-122"/>
+                <a:cs typeface="Georgia" pitchFamily="34" charset="-120"/>
+              </a:rPr>
+              <a:t>93%</a:t>
+            </a:r>
+            <a:endParaRPr lang="en-US" sz="2200" dirty="0"/>
+          </a:p>
+        </p:txBody>
+      </p:sp>
+      <p:sp>
+        <p:nvSpPr>
+          <p:cNvPr id="30" name="Text 27"/>
+          <p:cNvSpPr/>
+          <p:nvPr/>
+        </p:nvSpPr>
+        <p:spPr>
+          <a:xfrm>
+            <a:off x="548640" y="4224528"/>
+            <a:ext cx="3520440" cy="219456"/>
+          </a:xfrm>
+          <a:prstGeom prst="rect">
+            <a:avLst/>
+          </a:prstGeom>
+          <a:noFill/>
+          <a:ln/>
+        </p:spPr>
+        <p:txBody>
+          <a:bodyPr wrap="square" lIns="0" tIns="0" rIns="0" bIns="0" rtlCol="0" anchor="t"/>
+          <a:lstStyle/>
+          <a:p>
+            <a:pPr algn="ctr" indent="0" marL="0">
+              <a:buNone/>
+            </a:pPr>
+            <a:r>
+              <a:rPr lang="en-US" sz="900" i="1" dirty="0">
+                <a:solidFill>
+                  <a:srgbClr val="353745"/>
+                </a:solidFill>
+                <a:latin typeface="Georgia" pitchFamily="34" charset="0"/>
+                <a:ea typeface="Georgia" pitchFamily="34" charset="-122"/>
+                <a:cs typeface="Georgia" pitchFamily="34" charset="-120"/>
+              </a:rPr>
+              <a:t>Target: 90%</a:t>
+            </a:r>
+            <a:endParaRPr lang="en-US" sz="900" dirty="0"/>
+          </a:p>
+        </p:txBody>
+      </p:sp>
+      <p:sp>
+        <p:nvSpPr>
+          <p:cNvPr id="31" name="Text 28"/>
+          <p:cNvSpPr/>
+          <p:nvPr/>
+        </p:nvSpPr>
+        <p:spPr>
+          <a:xfrm>
+            <a:off x="548640" y="4471416"/>
+            <a:ext cx="3520440" cy="219456"/>
+          </a:xfrm>
+          <a:prstGeom prst="rect">
+            <a:avLst/>
+          </a:prstGeom>
+          <a:noFill/>
+          <a:ln/>
+        </p:spPr>
+        <p:txBody>
+          <a:bodyPr wrap="square" lIns="0" tIns="0" rIns="0" bIns="0" rtlCol="0" anchor="t"/>
+          <a:lstStyle/>
+          <a:p>
+            <a:pPr algn="ctr" indent="0" marL="0">
+              <a:buNone/>
+            </a:pPr>
+            <a:r>
+              <a:rPr lang="en-US" sz="900" b="1" dirty="0">
+                <a:solidFill>
+                  <a:srgbClr val="2D5F7C"/>
+                </a:solidFill>
+                <a:latin typeface="Calibri" pitchFamily="34" charset="0"/>
+                <a:ea typeface="Calibri" pitchFamily="34" charset="-122"/>
+                <a:cs typeface="Calibri" pitchFamily="34" charset="-120"/>
+              </a:rPr>
+              <a:t>+3.0 above target</a:t>
+            </a:r>
+            <a:endParaRPr lang="en-US" sz="900" dirty="0"/>
+          </a:p>
+        </p:txBody>
+      </p:sp>
+      <p:sp>
+        <p:nvSpPr>
+          <p:cNvPr id="32" name="Text 29"/>
+          <p:cNvSpPr/>
+          <p:nvPr/>
+        </p:nvSpPr>
+        <p:spPr>
+          <a:xfrm>
+            <a:off x="4334256" y="2240280"/>
+            <a:ext cx="3520440" cy="256032"/>
+          </a:xfrm>
+          <a:prstGeom prst="rect">
+            <a:avLst/>
+          </a:prstGeom>
+          <a:noFill/>
+          <a:ln/>
+        </p:spPr>
+        <p:txBody>
+          <a:bodyPr wrap="square" lIns="0" tIns="0" rIns="0" bIns="0" rtlCol="0" anchor="ctr"/>
+          <a:lstStyle/>
+          <a:p>
+            <a:pPr algn="ctr" indent="0" marL="0">
+              <a:buNone/>
+            </a:pPr>
+            <a:r>
+              <a:rPr lang="en-US" sz="1200" b="1" dirty="0">
+                <a:solidFill>
+                  <a:srgbClr val="353745"/>
+                </a:solidFill>
+                <a:latin typeface="Calibri" pitchFamily="34" charset="0"/>
+                <a:ea typeface="Calibri" pitchFamily="34" charset="-122"/>
+                <a:cs typeface="Calibri" pitchFamily="34" charset="-120"/>
+              </a:rPr>
+              <a:t>Collection Rate</a:t>
+            </a:r>
+            <a:endParaRPr lang="en-US" sz="1200" dirty="0"/>
+          </a:p>
+        </p:txBody>
+      </p:sp>
+      <p:sp>
+        <p:nvSpPr>
+          <p:cNvPr id="33" name="Text 30"/>
+          <p:cNvSpPr/>
+          <p:nvPr/>
+        </p:nvSpPr>
+        <p:spPr>
+          <a:xfrm>
+            <a:off x="4334256" y="2496312"/>
+            <a:ext cx="3520440" cy="201168"/>
+          </a:xfrm>
+          <a:prstGeom prst="rect">
+            <a:avLst/>
+          </a:prstGeom>
+          <a:noFill/>
+          <a:ln/>
+        </p:spPr>
+        <p:txBody>
+          <a:bodyPr wrap="square" lIns="0" tIns="0" rIns="0" bIns="0" rtlCol="0" anchor="ctr"/>
+          <a:lstStyle/>
+          <a:p>
+            <a:pPr algn="ctr" indent="0" marL="0">
+              <a:buNone/>
+            </a:pPr>
+            <a:r>
+              <a:rPr lang="en-US" sz="1000" i="1" dirty="0">
+                <a:solidFill>
+                  <a:srgbClr val="8A7968"/>
+                </a:solidFill>
+                <a:latin typeface="Georgia" pitchFamily="34" charset="0"/>
+                <a:ea typeface="Georgia" pitchFamily="34" charset="-122"/>
+                <a:cs typeface="Georgia" pitchFamily="34" charset="-120"/>
+              </a:rPr>
+              <a:t>Collected vs. billed</a:t>
+            </a:r>
+            <a:endParaRPr lang="en-US" sz="1000" dirty="0"/>
+          </a:p>
+        </p:txBody>
+      </p:sp>
+      <p:pic>
+        <p:nvPicPr>
+          <p:cNvPr id="34" name="Image 1" descr="/Users/nathansaperia/Downloads/PPTX Chart Builder/claude-pptx-plot/assets/gauge_arc.png">    </p:cNvPr>
+          <p:cNvPicPr>
+            <a:picLocks noChangeAspect="1"/>
+          </p:cNvPicPr>
+          <p:nvPr/>
+        </p:nvPicPr>
+        <p:blipFill>
+          <a:blip r:embed="rId2"/>
+          <a:stretch>
+            <a:fillRect/>
+          </a:stretch>
+        </p:blipFill>
+        <p:spPr>
+          <a:xfrm>
+            <a:off x="5180076" y="2743200"/>
+            <a:ext cx="1828800" cy="914400"/>
+          </a:xfrm>
+          <a:prstGeom prst="rect">
+            <a:avLst/>
+          </a:prstGeom>
+        </p:spPr>
+      </p:pic>
+      <p:sp>
+        <p:nvSpPr>
+          <p:cNvPr id="35" name="Shape 31"/>
+          <p:cNvSpPr/>
+          <p:nvPr/>
+        </p:nvSpPr>
+        <p:spPr>
+          <a:xfrm flipH="1" flipV="1">
+            <a:off x="5295530" y="3077131"/>
+            <a:ext cx="59181" cy="42998"/>
+          </a:xfrm>
+          <a:prstGeom prst="line">
+            <a:avLst/>
+          </a:prstGeom>
+          <a:noFill/>
+          <a:ln w="6350">
+            <a:solidFill>
+              <a:srgbClr val="8A7968"/>
+            </a:solidFill>
+            <a:prstDash val="solid"/>
+          </a:ln>
+        </p:spPr>
+      </p:sp>
+      <p:sp>
+        <p:nvSpPr>
+          <p:cNvPr id="36" name="Text 32"/>
+          <p:cNvSpPr/>
+          <p:nvPr/>
+        </p:nvSpPr>
+        <p:spPr>
+          <a:xfrm>
+            <a:off x="4975999" y="2890552"/>
+            <a:ext cx="402336" cy="201168"/>
+          </a:xfrm>
+          <a:prstGeom prst="rect">
+            <a:avLst/>
+          </a:prstGeom>
+          <a:noFill/>
+          <a:ln/>
+        </p:spPr>
+        <p:txBody>
+          <a:bodyPr wrap="square" lIns="0" tIns="0" rIns="0" bIns="0" rtlCol="0" anchor="ctr"/>
+          <a:lstStyle/>
+          <a:p>
+            <a:pPr algn="ctr" indent="0" marL="0">
+              <a:buNone/>
+            </a:pPr>
+            <a:r>
+              <a:rPr lang="en-US" sz="800" dirty="0">
+                <a:solidFill>
+                  <a:srgbClr val="8A7968"/>
+                </a:solidFill>
+                <a:latin typeface="Calibri" pitchFamily="34" charset="0"/>
+                <a:ea typeface="Calibri" pitchFamily="34" charset="-122"/>
+                <a:cs typeface="Calibri" pitchFamily="34" charset="-120"/>
+              </a:rPr>
+              <a:t>60</a:t>
+            </a:r>
+            <a:endParaRPr lang="en-US" sz="800" dirty="0"/>
+          </a:p>
+        </p:txBody>
+      </p:sp>
+      <p:sp>
+        <p:nvSpPr>
+          <p:cNvPr id="37" name="Shape 33"/>
+          <p:cNvSpPr/>
+          <p:nvPr/>
+        </p:nvSpPr>
+        <p:spPr>
+          <a:xfrm flipH="1" flipV="1">
+            <a:off x="5789306" y="2718382"/>
+            <a:ext cx="22605" cy="69572"/>
+          </a:xfrm>
+          <a:prstGeom prst="line">
+            <a:avLst/>
+          </a:prstGeom>
+          <a:noFill/>
+          <a:ln w="6350">
+            <a:solidFill>
+              <a:srgbClr val="8A7968"/>
+            </a:solidFill>
+            <a:prstDash val="solid"/>
+          </a:ln>
+        </p:spPr>
+      </p:sp>
+      <p:sp>
+        <p:nvSpPr>
+          <p:cNvPr id="38" name="Text 34"/>
+          <p:cNvSpPr/>
+          <p:nvPr/>
+        </p:nvSpPr>
+        <p:spPr>
+          <a:xfrm>
+            <a:off x="5542927" y="2478655"/>
+            <a:ext cx="402336" cy="201168"/>
+          </a:xfrm>
+          <a:prstGeom prst="rect">
+            <a:avLst/>
+          </a:prstGeom>
+          <a:noFill/>
+          <a:ln/>
+        </p:spPr>
+        <p:txBody>
+          <a:bodyPr wrap="square" lIns="0" tIns="0" rIns="0" bIns="0" rtlCol="0" anchor="ctr"/>
+          <a:lstStyle/>
+          <a:p>
+            <a:pPr algn="ctr" indent="0" marL="0">
+              <a:buNone/>
+            </a:pPr>
+            <a:r>
+              <a:rPr lang="en-US" sz="800" dirty="0">
+                <a:solidFill>
+                  <a:srgbClr val="8A7968"/>
+                </a:solidFill>
+                <a:latin typeface="Calibri" pitchFamily="34" charset="0"/>
+                <a:ea typeface="Calibri" pitchFamily="34" charset="-122"/>
+                <a:cs typeface="Calibri" pitchFamily="34" charset="-120"/>
+              </a:rPr>
+              <a:t>70</a:t>
+            </a:r>
+            <a:endParaRPr lang="en-US" sz="800" dirty="0"/>
+          </a:p>
+        </p:txBody>
+      </p:sp>
+      <p:sp>
+        <p:nvSpPr>
+          <p:cNvPr id="39" name="Shape 35"/>
+          <p:cNvSpPr/>
+          <p:nvPr/>
+        </p:nvSpPr>
+        <p:spPr>
+          <a:xfrm flipV="1">
+            <a:off x="6377041" y="2718382"/>
+            <a:ext cx="22605" cy="69572"/>
+          </a:xfrm>
+          <a:prstGeom prst="line">
+            <a:avLst/>
+          </a:prstGeom>
+          <a:noFill/>
+          <a:ln w="6350">
+            <a:solidFill>
+              <a:srgbClr val="8A7968"/>
+            </a:solidFill>
+            <a:prstDash val="solid"/>
+          </a:ln>
+        </p:spPr>
+      </p:sp>
+      <p:sp>
+        <p:nvSpPr>
+          <p:cNvPr id="40" name="Text 36"/>
+          <p:cNvSpPr/>
+          <p:nvPr/>
+        </p:nvSpPr>
+        <p:spPr>
+          <a:xfrm>
+            <a:off x="6243689" y="2478655"/>
+            <a:ext cx="402336" cy="201168"/>
+          </a:xfrm>
+          <a:prstGeom prst="rect">
+            <a:avLst/>
+          </a:prstGeom>
+          <a:noFill/>
+          <a:ln/>
+        </p:spPr>
+        <p:txBody>
+          <a:bodyPr wrap="square" lIns="0" tIns="0" rIns="0" bIns="0" rtlCol="0" anchor="ctr"/>
+          <a:lstStyle/>
+          <a:p>
+            <a:pPr algn="ctr" indent="0" marL="0">
+              <a:buNone/>
+            </a:pPr>
+            <a:r>
+              <a:rPr lang="en-US" sz="800" dirty="0">
+                <a:solidFill>
+                  <a:srgbClr val="8A7968"/>
+                </a:solidFill>
+                <a:latin typeface="Calibri" pitchFamily="34" charset="0"/>
+                <a:ea typeface="Calibri" pitchFamily="34" charset="-122"/>
+                <a:cs typeface="Calibri" pitchFamily="34" charset="-120"/>
+              </a:rPr>
+              <a:t>80</a:t>
+            </a:r>
+            <a:endParaRPr lang="en-US" sz="800" dirty="0"/>
+          </a:p>
+        </p:txBody>
+      </p:sp>
+      <p:sp>
+        <p:nvSpPr>
+          <p:cNvPr id="41" name="Shape 37"/>
+          <p:cNvSpPr/>
+          <p:nvPr/>
+        </p:nvSpPr>
+        <p:spPr>
+          <a:xfrm flipV="1">
+            <a:off x="6834241" y="3077131"/>
+            <a:ext cx="59181" cy="42998"/>
+          </a:xfrm>
+          <a:prstGeom prst="line">
+            <a:avLst/>
+          </a:prstGeom>
+          <a:noFill/>
+          <a:ln w="6350">
+            <a:solidFill>
+              <a:srgbClr val="8A7968"/>
+            </a:solidFill>
+            <a:prstDash val="solid"/>
+          </a:ln>
+        </p:spPr>
+      </p:sp>
+      <p:sp>
+        <p:nvSpPr>
+          <p:cNvPr id="42" name="Text 38"/>
+          <p:cNvSpPr/>
+          <p:nvPr/>
+        </p:nvSpPr>
+        <p:spPr>
+          <a:xfrm>
+            <a:off x="6810617" y="2890552"/>
+            <a:ext cx="402336" cy="201168"/>
+          </a:xfrm>
+          <a:prstGeom prst="rect">
+            <a:avLst/>
+          </a:prstGeom>
+          <a:noFill/>
+          <a:ln/>
+        </p:spPr>
+        <p:txBody>
+          <a:bodyPr wrap="square" lIns="0" tIns="0" rIns="0" bIns="0" rtlCol="0" anchor="ctr"/>
+          <a:lstStyle/>
+          <a:p>
+            <a:pPr algn="ctr" indent="0" marL="0">
+              <a:buNone/>
+            </a:pPr>
+            <a:r>
+              <a:rPr lang="en-US" sz="800" dirty="0">
+                <a:solidFill>
+                  <a:srgbClr val="8A7968"/>
+                </a:solidFill>
+                <a:latin typeface="Calibri" pitchFamily="34" charset="0"/>
+                <a:ea typeface="Calibri" pitchFamily="34" charset="-122"/>
+                <a:cs typeface="Calibri" pitchFamily="34" charset="-120"/>
+              </a:rPr>
+              <a:t>90</a:t>
+            </a:r>
+            <a:endParaRPr lang="en-US" sz="800" dirty="0"/>
+          </a:p>
+        </p:txBody>
+      </p:sp>
+      <p:sp>
+        <p:nvSpPr>
+          <p:cNvPr id="43" name="Text 39"/>
+          <p:cNvSpPr/>
+          <p:nvPr/>
+        </p:nvSpPr>
+        <p:spPr>
+          <a:xfrm>
+            <a:off x="4942332" y="3584448"/>
+            <a:ext cx="228600" cy="201168"/>
+          </a:xfrm>
+          <a:prstGeom prst="rect">
+            <a:avLst/>
+          </a:prstGeom>
+          <a:noFill/>
+          <a:ln/>
+        </p:spPr>
+        <p:txBody>
+          <a:bodyPr wrap="square" lIns="0" tIns="0" rIns="0" bIns="0" rtlCol="0" anchor="ctr"/>
+          <a:lstStyle/>
+          <a:p>
+            <a:pPr algn="r" indent="0" marL="0">
+              <a:buNone/>
+            </a:pPr>
+            <a:r>
+              <a:rPr lang="en-US" sz="800" dirty="0">
+                <a:solidFill>
+                  <a:srgbClr val="8A7968"/>
+                </a:solidFill>
+                <a:latin typeface="Calibri" pitchFamily="34" charset="0"/>
+                <a:ea typeface="Calibri" pitchFamily="34" charset="-122"/>
+                <a:cs typeface="Calibri" pitchFamily="34" charset="-120"/>
+              </a:rPr>
+              <a:t>50</a:t>
+            </a:r>
+            <a:endParaRPr lang="en-US" sz="800" dirty="0"/>
+          </a:p>
+        </p:txBody>
+      </p:sp>
+      <p:sp>
+        <p:nvSpPr>
+          <p:cNvPr id="44" name="Text 40"/>
+          <p:cNvSpPr/>
+          <p:nvPr/>
+        </p:nvSpPr>
+        <p:spPr>
+          <a:xfrm>
+            <a:off x="7018020" y="3584448"/>
+            <a:ext cx="228600" cy="201168"/>
+          </a:xfrm>
+          <a:prstGeom prst="rect">
+            <a:avLst/>
+          </a:prstGeom>
+          <a:noFill/>
+          <a:ln/>
+        </p:spPr>
+        <p:txBody>
+          <a:bodyPr wrap="square" lIns="0" tIns="0" rIns="0" bIns="0" rtlCol="0" anchor="ctr"/>
+          <a:lstStyle/>
+          <a:p>
+            <a:pPr algn="l" indent="0" marL="0">
+              <a:buNone/>
+            </a:pPr>
+            <a:r>
+              <a:rPr lang="en-US" sz="800" dirty="0">
+                <a:solidFill>
+                  <a:srgbClr val="8A7968"/>
+                </a:solidFill>
+                <a:latin typeface="Calibri" pitchFamily="34" charset="0"/>
+                <a:ea typeface="Calibri" pitchFamily="34" charset="-122"/>
+                <a:cs typeface="Calibri" pitchFamily="34" charset="-120"/>
+              </a:rPr>
+              <a:t>100</a:t>
+            </a:r>
+            <a:endParaRPr lang="en-US" sz="800" dirty="0"/>
+          </a:p>
+        </p:txBody>
+      </p:sp>
+      <p:sp>
+        <p:nvSpPr>
+          <p:cNvPr id="45" name="Shape 41"/>
+          <p:cNvSpPr/>
+          <p:nvPr/>
+        </p:nvSpPr>
+        <p:spPr>
+          <a:xfrm rot="14040000">
+            <a:off x="7110525" y="2808885"/>
+            <a:ext cx="128016" cy="128016"/>
+          </a:xfrm>
+          <a:prstGeom prst="triangle">
+            <a:avLst/>
+          </a:prstGeom>
+          <a:solidFill>
+            <a:srgbClr val="2D5F7C"/>
+          </a:solidFill>
+          <a:ln/>
+        </p:spPr>
+      </p:sp>
+      <p:sp>
+        <p:nvSpPr>
+          <p:cNvPr id="46" name="Shape 42"/>
+          <p:cNvSpPr/>
+          <p:nvPr/>
+        </p:nvSpPr>
+        <p:spPr>
+          <a:xfrm flipV="1">
+            <a:off x="6094476" y="3295521"/>
+            <a:ext cx="769458" cy="362079"/>
+          </a:xfrm>
+          <a:prstGeom prst="line">
+            <a:avLst/>
+          </a:prstGeom>
+          <a:noFill/>
+          <a:ln w="27940">
+            <a:solidFill>
+              <a:srgbClr val="B84C65"/>
+            </a:solidFill>
+            <a:prstDash val="solid"/>
+          </a:ln>
+        </p:spPr>
+      </p:sp>
+      <p:sp>
+        <p:nvSpPr>
+          <p:cNvPr id="47" name="Shape 43"/>
+          <p:cNvSpPr/>
+          <p:nvPr/>
+        </p:nvSpPr>
+        <p:spPr>
+          <a:xfrm>
+            <a:off x="5993892" y="3557016"/>
+            <a:ext cx="201168" cy="201168"/>
+          </a:xfrm>
+          <a:prstGeom prst="ellipse">
+            <a:avLst/>
+          </a:prstGeom>
+          <a:solidFill>
+            <a:srgbClr val="353745"/>
+          </a:solidFill>
+          <a:ln/>
+        </p:spPr>
+      </p:sp>
+      <p:sp>
+        <p:nvSpPr>
+          <p:cNvPr id="48" name="Text 44"/>
+          <p:cNvSpPr/>
+          <p:nvPr/>
+        </p:nvSpPr>
+        <p:spPr>
+          <a:xfrm>
+            <a:off x="4334256" y="3785616"/>
+            <a:ext cx="3520440" cy="457200"/>
+          </a:xfrm>
+          <a:prstGeom prst="rect">
+            <a:avLst/>
+          </a:prstGeom>
+          <a:noFill/>
+          <a:ln/>
+        </p:spPr>
+        <p:txBody>
+          <a:bodyPr wrap="square" lIns="0" tIns="0" rIns="0" bIns="0" rtlCol="0" anchor="t"/>
+          <a:lstStyle/>
+          <a:p>
+            <a:pPr algn="ctr" indent="0" marL="0">
+              <a:buNone/>
+            </a:pPr>
+            <a:r>
+              <a:rPr lang="en-US" sz="2200" dirty="0">
+                <a:solidFill>
+                  <a:srgbClr val="353745"/>
+                </a:solidFill>
+                <a:latin typeface="Georgia" pitchFamily="34" charset="0"/>
+                <a:ea typeface="Georgia" pitchFamily="34" charset="-122"/>
+                <a:cs typeface="Georgia" pitchFamily="34" charset="-120"/>
+              </a:rPr>
+              <a:t>93%</a:t>
+            </a:r>
+            <a:endParaRPr lang="en-US" sz="2200" dirty="0"/>
+          </a:p>
+        </p:txBody>
+      </p:sp>
+      <p:sp>
+        <p:nvSpPr>
+          <p:cNvPr id="49" name="Text 45"/>
+          <p:cNvSpPr/>
+          <p:nvPr/>
+        </p:nvSpPr>
+        <p:spPr>
+          <a:xfrm>
+            <a:off x="4334256" y="4224528"/>
+            <a:ext cx="3520440" cy="219456"/>
+          </a:xfrm>
+          <a:prstGeom prst="rect">
+            <a:avLst/>
+          </a:prstGeom>
+          <a:noFill/>
+          <a:ln/>
+        </p:spPr>
+        <p:txBody>
+          <a:bodyPr wrap="square" lIns="0" tIns="0" rIns="0" bIns="0" rtlCol="0" anchor="t"/>
+          <a:lstStyle/>
+          <a:p>
+            <a:pPr algn="ctr" indent="0" marL="0">
+              <a:buNone/>
+            </a:pPr>
+            <a:r>
+              <a:rPr lang="en-US" sz="900" i="1" dirty="0">
+                <a:solidFill>
+                  <a:srgbClr val="353745"/>
+                </a:solidFill>
+                <a:latin typeface="Georgia" pitchFamily="34" charset="0"/>
+                <a:ea typeface="Georgia" pitchFamily="34" charset="-122"/>
+                <a:cs typeface="Georgia" pitchFamily="34" charset="-120"/>
+              </a:rPr>
+              <a:t>Target: 90%</a:t>
+            </a:r>
+            <a:endParaRPr lang="en-US" sz="900" dirty="0"/>
+          </a:p>
+        </p:txBody>
+      </p:sp>
+      <p:sp>
+        <p:nvSpPr>
+          <p:cNvPr id="50" name="Text 46"/>
+          <p:cNvSpPr/>
+          <p:nvPr/>
+        </p:nvSpPr>
+        <p:spPr>
+          <a:xfrm>
+            <a:off x="4334256" y="4471416"/>
+            <a:ext cx="3520440" cy="219456"/>
+          </a:xfrm>
+          <a:prstGeom prst="rect">
+            <a:avLst/>
+          </a:prstGeom>
+          <a:noFill/>
+          <a:ln/>
+        </p:spPr>
+        <p:txBody>
+          <a:bodyPr wrap="square" lIns="0" tIns="0" rIns="0" bIns="0" rtlCol="0" anchor="t"/>
+          <a:lstStyle/>
+          <a:p>
+            <a:pPr algn="ctr" indent="0" marL="0">
+              <a:buNone/>
+            </a:pPr>
+            <a:r>
+              <a:rPr lang="en-US" sz="900" b="1" dirty="0">
+                <a:solidFill>
+                  <a:srgbClr val="2D5F7C"/>
+                </a:solidFill>
+                <a:latin typeface="Calibri" pitchFamily="34" charset="0"/>
+                <a:ea typeface="Calibri" pitchFamily="34" charset="-122"/>
+                <a:cs typeface="Calibri" pitchFamily="34" charset="-120"/>
+              </a:rPr>
+              <a:t>+3.0 above target</a:t>
+            </a:r>
+            <a:endParaRPr lang="en-US" sz="900" dirty="0"/>
+          </a:p>
+        </p:txBody>
+      </p:sp>
+      <p:sp>
+        <p:nvSpPr>
+          <p:cNvPr id="51" name="Text 47"/>
+          <p:cNvSpPr/>
+          <p:nvPr/>
+        </p:nvSpPr>
+        <p:spPr>
+          <a:xfrm>
+            <a:off x="8119872" y="2240280"/>
+            <a:ext cx="3520440" cy="256032"/>
+          </a:xfrm>
+          <a:prstGeom prst="rect">
+            <a:avLst/>
+          </a:prstGeom>
+          <a:noFill/>
+          <a:ln/>
+        </p:spPr>
+        <p:txBody>
+          <a:bodyPr wrap="square" lIns="0" tIns="0" rIns="0" bIns="0" rtlCol="0" anchor="ctr"/>
+          <a:lstStyle/>
+          <a:p>
+            <a:pPr algn="ctr" indent="0" marL="0">
+              <a:buNone/>
+            </a:pPr>
+            <a:r>
+              <a:rPr lang="en-US" sz="1200" b="1" dirty="0">
+                <a:solidFill>
+                  <a:srgbClr val="353745"/>
+                </a:solidFill>
+                <a:latin typeface="Calibri" pitchFamily="34" charset="0"/>
+                <a:ea typeface="Calibri" pitchFamily="34" charset="-122"/>
+                <a:cs typeface="Calibri" pitchFamily="34" charset="-120"/>
+              </a:rPr>
+              <a:t>EBITDA Margin</a:t>
+            </a:r>
+            <a:endParaRPr lang="en-US" sz="1200" dirty="0"/>
+          </a:p>
+        </p:txBody>
+      </p:sp>
+      <p:sp>
+        <p:nvSpPr>
+          <p:cNvPr id="52" name="Text 48"/>
+          <p:cNvSpPr/>
+          <p:nvPr/>
+        </p:nvSpPr>
+        <p:spPr>
+          <a:xfrm>
+            <a:off x="8119872" y="2496312"/>
+            <a:ext cx="3520440" cy="201168"/>
+          </a:xfrm>
+          <a:prstGeom prst="rect">
+            <a:avLst/>
+          </a:prstGeom>
+          <a:noFill/>
+          <a:ln/>
+        </p:spPr>
+        <p:txBody>
+          <a:bodyPr wrap="square" lIns="0" tIns="0" rIns="0" bIns="0" rtlCol="0" anchor="ctr"/>
+          <a:lstStyle/>
+          <a:p>
+            <a:pPr algn="ctr" indent="0" marL="0">
+              <a:buNone/>
+            </a:pPr>
+            <a:r>
+              <a:rPr lang="en-US" sz="1000" i="1" dirty="0">
+                <a:solidFill>
+                  <a:srgbClr val="8A7968"/>
+                </a:solidFill>
+                <a:latin typeface="Georgia" pitchFamily="34" charset="0"/>
+                <a:ea typeface="Georgia" pitchFamily="34" charset="-122"/>
+                <a:cs typeface="Georgia" pitchFamily="34" charset="-120"/>
+              </a:rPr>
+              <a:t>Profitability after expenses</a:t>
+            </a:r>
+            <a:endParaRPr lang="en-US" sz="1000" dirty="0"/>
+          </a:p>
+        </p:txBody>
+      </p:sp>
+      <p:pic>
+        <p:nvPicPr>
+          <p:cNvPr id="53" name="Image 2" descr="/Users/nathansaperia/Downloads/PPTX Chart Builder/claude-pptx-plot/assets/gauge_arc.png">    </p:cNvPr>
+          <p:cNvPicPr>
+            <a:picLocks noChangeAspect="1"/>
+          </p:cNvPicPr>
+          <p:nvPr/>
+        </p:nvPicPr>
+        <p:blipFill>
+          <a:blip r:embed="rId3"/>
+          <a:stretch>
+            <a:fillRect/>
+          </a:stretch>
+        </p:blipFill>
+        <p:spPr>
+          <a:xfrm>
+            <a:off x="8965692" y="2743200"/>
+            <a:ext cx="1828800" cy="914400"/>
+          </a:xfrm>
+          <a:prstGeom prst="rect">
+            <a:avLst/>
+          </a:prstGeom>
+        </p:spPr>
+      </p:pic>
+      <p:sp>
+        <p:nvSpPr>
+          <p:cNvPr id="54" name="Shape 49"/>
+          <p:cNvSpPr/>
+          <p:nvPr/>
+        </p:nvSpPr>
+        <p:spPr>
+          <a:xfrm flipH="1" flipV="1">
+            <a:off x="9081146" y="3077131"/>
+            <a:ext cx="59181" cy="42998"/>
+          </a:xfrm>
+          <a:prstGeom prst="line">
+            <a:avLst/>
+          </a:prstGeom>
+          <a:noFill/>
+          <a:ln w="6350">
+            <a:solidFill>
+              <a:srgbClr val="8A7968"/>
+            </a:solidFill>
+            <a:prstDash val="solid"/>
+          </a:ln>
+        </p:spPr>
+      </p:sp>
+      <p:sp>
+        <p:nvSpPr>
+          <p:cNvPr id="55" name="Text 50"/>
+          <p:cNvSpPr/>
+          <p:nvPr/>
+        </p:nvSpPr>
+        <p:spPr>
+          <a:xfrm>
+            <a:off x="8761615" y="2890552"/>
+            <a:ext cx="402336" cy="201168"/>
+          </a:xfrm>
+          <a:prstGeom prst="rect">
+            <a:avLst/>
+          </a:prstGeom>
+          <a:noFill/>
+          <a:ln/>
+        </p:spPr>
+        <p:txBody>
+          <a:bodyPr wrap="square" lIns="0" tIns="0" rIns="0" bIns="0" rtlCol="0" anchor="ctr"/>
+          <a:lstStyle/>
+          <a:p>
+            <a:pPr algn="ctr" indent="0" marL="0">
+              <a:buNone/>
+            </a:pPr>
+            <a:r>
+              <a:rPr lang="en-US" sz="800" dirty="0">
+                <a:solidFill>
+                  <a:srgbClr val="8A7968"/>
+                </a:solidFill>
+                <a:latin typeface="Calibri" pitchFamily="34" charset="0"/>
+                <a:ea typeface="Calibri" pitchFamily="34" charset="-122"/>
+                <a:cs typeface="Calibri" pitchFamily="34" charset="-120"/>
+              </a:rPr>
+              <a:t>12</a:t>
+            </a:r>
+            <a:endParaRPr lang="en-US" sz="800" dirty="0"/>
+          </a:p>
+        </p:txBody>
+      </p:sp>
+      <p:sp>
+        <p:nvSpPr>
+          <p:cNvPr id="56" name="Shape 51"/>
+          <p:cNvSpPr/>
+          <p:nvPr/>
+        </p:nvSpPr>
+        <p:spPr>
+          <a:xfrm flipH="1" flipV="1">
+            <a:off x="9574922" y="2718382"/>
+            <a:ext cx="22605" cy="69572"/>
+          </a:xfrm>
+          <a:prstGeom prst="line">
+            <a:avLst/>
+          </a:prstGeom>
+          <a:noFill/>
+          <a:ln w="6350">
+            <a:solidFill>
+              <a:srgbClr val="8A7968"/>
+            </a:solidFill>
+            <a:prstDash val="solid"/>
+          </a:ln>
+        </p:spPr>
+      </p:sp>
+      <p:sp>
+        <p:nvSpPr>
+          <p:cNvPr id="57" name="Text 52"/>
+          <p:cNvSpPr/>
+          <p:nvPr/>
+        </p:nvSpPr>
+        <p:spPr>
+          <a:xfrm>
+            <a:off x="9328543" y="2478655"/>
+            <a:ext cx="402336" cy="201168"/>
+          </a:xfrm>
+          <a:prstGeom prst="rect">
+            <a:avLst/>
+          </a:prstGeom>
+          <a:noFill/>
+          <a:ln/>
+        </p:spPr>
+        <p:txBody>
+          <a:bodyPr wrap="square" lIns="0" tIns="0" rIns="0" bIns="0" rtlCol="0" anchor="ctr"/>
+          <a:lstStyle/>
+          <a:p>
+            <a:pPr algn="ctr" indent="0" marL="0">
+              <a:buNone/>
+            </a:pPr>
+            <a:r>
+              <a:rPr lang="en-US" sz="800" dirty="0">
+                <a:solidFill>
+                  <a:srgbClr val="8A7968"/>
+                </a:solidFill>
+                <a:latin typeface="Calibri" pitchFamily="34" charset="0"/>
+                <a:ea typeface="Calibri" pitchFamily="34" charset="-122"/>
+                <a:cs typeface="Calibri" pitchFamily="34" charset="-120"/>
+              </a:rPr>
+              <a:t>24</a:t>
+            </a:r>
+            <a:endParaRPr lang="en-US" sz="800" dirty="0"/>
+          </a:p>
+        </p:txBody>
+      </p:sp>
+      <p:sp>
+        <p:nvSpPr>
+          <p:cNvPr id="58" name="Shape 53"/>
+          <p:cNvSpPr/>
+          <p:nvPr/>
+        </p:nvSpPr>
+        <p:spPr>
+          <a:xfrm flipV="1">
+            <a:off x="10162657" y="2718382"/>
+            <a:ext cx="22605" cy="69572"/>
+          </a:xfrm>
+          <a:prstGeom prst="line">
+            <a:avLst/>
+          </a:prstGeom>
+          <a:noFill/>
+          <a:ln w="6350">
+            <a:solidFill>
+              <a:srgbClr val="8A7968"/>
+            </a:solidFill>
+            <a:prstDash val="solid"/>
+          </a:ln>
+        </p:spPr>
+      </p:sp>
+      <p:sp>
+        <p:nvSpPr>
+          <p:cNvPr id="59" name="Text 54"/>
+          <p:cNvSpPr/>
+          <p:nvPr/>
+        </p:nvSpPr>
+        <p:spPr>
+          <a:xfrm>
+            <a:off x="10029305" y="2478655"/>
+            <a:ext cx="402336" cy="201168"/>
+          </a:xfrm>
+          <a:prstGeom prst="rect">
+            <a:avLst/>
+          </a:prstGeom>
+          <a:noFill/>
+          <a:ln/>
+        </p:spPr>
+        <p:txBody>
+          <a:bodyPr wrap="square" lIns="0" tIns="0" rIns="0" bIns="0" rtlCol="0" anchor="ctr"/>
+          <a:lstStyle/>
+          <a:p>
+            <a:pPr algn="ctr" indent="0" marL="0">
+              <a:buNone/>
+            </a:pPr>
+            <a:r>
+              <a:rPr lang="en-US" sz="800" dirty="0">
+                <a:solidFill>
+                  <a:srgbClr val="8A7968"/>
+                </a:solidFill>
+                <a:latin typeface="Calibri" pitchFamily="34" charset="0"/>
+                <a:ea typeface="Calibri" pitchFamily="34" charset="-122"/>
+                <a:cs typeface="Calibri" pitchFamily="34" charset="-120"/>
+              </a:rPr>
+              <a:t>36</a:t>
+            </a:r>
+            <a:endParaRPr lang="en-US" sz="800" dirty="0"/>
+          </a:p>
+        </p:txBody>
+      </p:sp>
+      <p:sp>
+        <p:nvSpPr>
+          <p:cNvPr id="60" name="Shape 55"/>
+          <p:cNvSpPr/>
+          <p:nvPr/>
+        </p:nvSpPr>
+        <p:spPr>
+          <a:xfrm flipV="1">
+            <a:off x="10619857" y="3077131"/>
+            <a:ext cx="59181" cy="42998"/>
+          </a:xfrm>
+          <a:prstGeom prst="line">
+            <a:avLst/>
+          </a:prstGeom>
+          <a:noFill/>
+          <a:ln w="6350">
+            <a:solidFill>
+              <a:srgbClr val="8A7968"/>
+            </a:solidFill>
+            <a:prstDash val="solid"/>
+          </a:ln>
+        </p:spPr>
+      </p:sp>
+      <p:sp>
+        <p:nvSpPr>
+          <p:cNvPr id="61" name="Text 56"/>
+          <p:cNvSpPr/>
+          <p:nvPr/>
+        </p:nvSpPr>
+        <p:spPr>
+          <a:xfrm>
+            <a:off x="10596233" y="2890552"/>
+            <a:ext cx="402336" cy="201168"/>
+          </a:xfrm>
+          <a:prstGeom prst="rect">
+            <a:avLst/>
+          </a:prstGeom>
+          <a:noFill/>
+          <a:ln/>
+        </p:spPr>
+        <p:txBody>
+          <a:bodyPr wrap="square" lIns="0" tIns="0" rIns="0" bIns="0" rtlCol="0" anchor="ctr"/>
+          <a:lstStyle/>
+          <a:p>
+            <a:pPr algn="ctr" indent="0" marL="0">
+              <a:buNone/>
+            </a:pPr>
+            <a:r>
+              <a:rPr lang="en-US" sz="800" dirty="0">
+                <a:solidFill>
+                  <a:srgbClr val="8A7968"/>
+                </a:solidFill>
+                <a:latin typeface="Calibri" pitchFamily="34" charset="0"/>
+                <a:ea typeface="Calibri" pitchFamily="34" charset="-122"/>
+                <a:cs typeface="Calibri" pitchFamily="34" charset="-120"/>
+              </a:rPr>
+              <a:t>48</a:t>
+            </a:r>
+            <a:endParaRPr lang="en-US" sz="800" dirty="0"/>
+          </a:p>
+        </p:txBody>
+      </p:sp>
+      <p:sp>
+        <p:nvSpPr>
+          <p:cNvPr id="62" name="Text 57"/>
+          <p:cNvSpPr/>
+          <p:nvPr/>
+        </p:nvSpPr>
+        <p:spPr>
+          <a:xfrm>
+            <a:off x="8727948" y="3584448"/>
+            <a:ext cx="228600" cy="201168"/>
+          </a:xfrm>
+          <a:prstGeom prst="rect">
+            <a:avLst/>
+          </a:prstGeom>
+          <a:noFill/>
+          <a:ln/>
+        </p:spPr>
+        <p:txBody>
+          <a:bodyPr wrap="square" lIns="0" tIns="0" rIns="0" bIns="0" rtlCol="0" anchor="ctr"/>
+          <a:lstStyle/>
+          <a:p>
+            <a:pPr algn="r" indent="0" marL="0">
+              <a:buNone/>
+            </a:pPr>
+            <a:r>
+              <a:rPr lang="en-US" sz="800" dirty="0">
+                <a:solidFill>
+                  <a:srgbClr val="8A7968"/>
+                </a:solidFill>
+                <a:latin typeface="Calibri" pitchFamily="34" charset="0"/>
+                <a:ea typeface="Calibri" pitchFamily="34" charset="-122"/>
+                <a:cs typeface="Calibri" pitchFamily="34" charset="-120"/>
+              </a:rPr>
+              <a:t>0</a:t>
+            </a:r>
+            <a:endParaRPr lang="en-US" sz="800" dirty="0"/>
+          </a:p>
+        </p:txBody>
+      </p:sp>
+      <p:sp>
+        <p:nvSpPr>
+          <p:cNvPr id="63" name="Text 58"/>
+          <p:cNvSpPr/>
+          <p:nvPr/>
+        </p:nvSpPr>
+        <p:spPr>
+          <a:xfrm>
+            <a:off x="10803636" y="3584448"/>
+            <a:ext cx="228600" cy="201168"/>
+          </a:xfrm>
+          <a:prstGeom prst="rect">
+            <a:avLst/>
+          </a:prstGeom>
+          <a:noFill/>
+          <a:ln/>
+        </p:spPr>
+        <p:txBody>
+          <a:bodyPr wrap="square" lIns="0" tIns="0" rIns="0" bIns="0" rtlCol="0" anchor="ctr"/>
+          <a:lstStyle/>
+          <a:p>
+            <a:pPr algn="l" indent="0" marL="0">
+              <a:buNone/>
+            </a:pPr>
+            <a:r>
+              <a:rPr lang="en-US" sz="800" dirty="0">
+                <a:solidFill>
+                  <a:srgbClr val="8A7968"/>
+                </a:solidFill>
+                <a:latin typeface="Calibri" pitchFamily="34" charset="0"/>
+                <a:ea typeface="Calibri" pitchFamily="34" charset="-122"/>
+                <a:cs typeface="Calibri" pitchFamily="34" charset="-120"/>
+              </a:rPr>
+              <a:t>60</a:t>
+            </a:r>
+            <a:endParaRPr lang="en-US" sz="800" dirty="0"/>
+          </a:p>
+        </p:txBody>
+      </p:sp>
+      <p:sp>
+        <p:nvSpPr>
+          <p:cNvPr id="64" name="Shape 59"/>
+          <p:cNvSpPr/>
+          <p:nvPr/>
+        </p:nvSpPr>
+        <p:spPr>
+          <a:xfrm rot="9900000">
+            <a:off x="9470554" y="2304058"/>
+            <a:ext cx="128016" cy="128016"/>
+          </a:xfrm>
+          <a:prstGeom prst="triangle">
+            <a:avLst/>
+          </a:prstGeom>
+          <a:solidFill>
+            <a:srgbClr val="2D5F7C"/>
+          </a:solidFill>
+          <a:ln/>
+        </p:spPr>
+      </p:sp>
+      <p:sp>
+        <p:nvSpPr>
+          <p:cNvPr id="65" name="Shape 60"/>
+          <p:cNvSpPr/>
+          <p:nvPr/>
+        </p:nvSpPr>
+        <p:spPr>
+          <a:xfrm flipH="1" flipV="1">
+            <a:off x="9716373" y="2823117"/>
+            <a:ext cx="163719" cy="834483"/>
+          </a:xfrm>
+          <a:prstGeom prst="line">
+            <a:avLst/>
+          </a:prstGeom>
+          <a:noFill/>
+          <a:ln w="27940">
+            <a:solidFill>
+              <a:srgbClr val="B84C65"/>
+            </a:solidFill>
+            <a:prstDash val="solid"/>
+          </a:ln>
+        </p:spPr>
+      </p:sp>
+      <p:sp>
+        <p:nvSpPr>
+          <p:cNvPr id="66" name="Shape 61"/>
+          <p:cNvSpPr/>
+          <p:nvPr/>
+        </p:nvSpPr>
+        <p:spPr>
+          <a:xfrm>
+            <a:off x="9779508" y="3557016"/>
+            <a:ext cx="201168" cy="201168"/>
+          </a:xfrm>
+          <a:prstGeom prst="ellipse">
+            <a:avLst/>
+          </a:prstGeom>
+          <a:solidFill>
+            <a:srgbClr val="353745"/>
+          </a:solidFill>
+          <a:ln/>
+        </p:spPr>
+      </p:sp>
+      <p:sp>
+        <p:nvSpPr>
+          <p:cNvPr id="67" name="Text 62"/>
+          <p:cNvSpPr/>
+          <p:nvPr/>
+        </p:nvSpPr>
+        <p:spPr>
+          <a:xfrm>
+            <a:off x="8119872" y="3785616"/>
+            <a:ext cx="3520440" cy="457200"/>
+          </a:xfrm>
+          <a:prstGeom prst="rect">
+            <a:avLst/>
+          </a:prstGeom>
+          <a:noFill/>
+          <a:ln/>
+        </p:spPr>
+        <p:txBody>
+          <a:bodyPr wrap="square" lIns="0" tIns="0" rIns="0" bIns="0" rtlCol="0" anchor="t"/>
+          <a:lstStyle/>
+          <a:p>
+            <a:pPr algn="ctr" indent="0" marL="0">
+              <a:buNone/>
+            </a:pPr>
+            <a:r>
+              <a:rPr lang="en-US" sz="2200" dirty="0">
+                <a:solidFill>
+                  <a:srgbClr val="353745"/>
+                </a:solidFill>
+                <a:latin typeface="Georgia" pitchFamily="34" charset="0"/>
+                <a:ea typeface="Georgia" pitchFamily="34" charset="-122"/>
+                <a:cs typeface="Georgia" pitchFamily="34" charset="-120"/>
+              </a:rPr>
+              <a:t>26.3%</a:t>
+            </a:r>
+            <a:endParaRPr lang="en-US" sz="2200" dirty="0"/>
+          </a:p>
+        </p:txBody>
+      </p:sp>
+      <p:sp>
+        <p:nvSpPr>
+          <p:cNvPr id="68" name="Text 63"/>
+          <p:cNvSpPr/>
+          <p:nvPr/>
+        </p:nvSpPr>
+        <p:spPr>
+          <a:xfrm>
+            <a:off x="8119872" y="4224528"/>
+            <a:ext cx="3520440" cy="219456"/>
+          </a:xfrm>
+          <a:prstGeom prst="rect">
+            <a:avLst/>
+          </a:prstGeom>
+          <a:noFill/>
+          <a:ln/>
+        </p:spPr>
+        <p:txBody>
+          <a:bodyPr wrap="square" lIns="0" tIns="0" rIns="0" bIns="0" rtlCol="0" anchor="t"/>
+          <a:lstStyle/>
+          <a:p>
+            <a:pPr algn="ctr" indent="0" marL="0">
+              <a:buNone/>
+            </a:pPr>
+            <a:r>
+              <a:rPr lang="en-US" sz="900" i="1" dirty="0">
+                <a:solidFill>
+                  <a:srgbClr val="353745"/>
+                </a:solidFill>
+                <a:latin typeface="Georgia" pitchFamily="34" charset="0"/>
+                <a:ea typeface="Georgia" pitchFamily="34" charset="-122"/>
+                <a:cs typeface="Georgia" pitchFamily="34" charset="-120"/>
+              </a:rPr>
+              <a:t>Target: 25%</a:t>
+            </a:r>
+            <a:endParaRPr lang="en-US" sz="900" dirty="0"/>
+          </a:p>
+        </p:txBody>
+      </p:sp>
+      <p:sp>
+        <p:nvSpPr>
+          <p:cNvPr id="69" name="Text 64"/>
+          <p:cNvSpPr/>
+          <p:nvPr/>
+        </p:nvSpPr>
+        <p:spPr>
+          <a:xfrm>
+            <a:off x="8119872" y="4471416"/>
+            <a:ext cx="3520440" cy="219456"/>
+          </a:xfrm>
+          <a:prstGeom prst="rect">
+            <a:avLst/>
+          </a:prstGeom>
+          <a:noFill/>
+          <a:ln/>
+        </p:spPr>
+        <p:txBody>
+          <a:bodyPr wrap="square" lIns="0" tIns="0" rIns="0" bIns="0" rtlCol="0" anchor="t"/>
+          <a:lstStyle/>
+          <a:p>
+            <a:pPr algn="ctr" indent="0" marL="0">
+              <a:buNone/>
+            </a:pPr>
+            <a:r>
+              <a:rPr lang="en-US" sz="900" b="1" dirty="0">
+                <a:solidFill>
+                  <a:srgbClr val="2D5F7C"/>
+                </a:solidFill>
+                <a:latin typeface="Calibri" pitchFamily="34" charset="0"/>
+                <a:ea typeface="Calibri" pitchFamily="34" charset="-122"/>
+                <a:cs typeface="Calibri" pitchFamily="34" charset="-120"/>
+              </a:rPr>
+              <a:t>+1.3 above target</a:t>
+            </a:r>
+            <a:endParaRPr lang="en-US" sz="900" dirty="0"/>
+          </a:p>
+        </p:txBody>
+      </p:sp>
+      <p:sp>
+        <p:nvSpPr>
+          <p:cNvPr id="70" name="Text 65"/>
+          <p:cNvSpPr/>
+          <p:nvPr/>
+        </p:nvSpPr>
+        <p:spPr>
+          <a:xfrm>
+            <a:off x="548640" y="4663440"/>
+            <a:ext cx="3520440" cy="256032"/>
+          </a:xfrm>
+          <a:prstGeom prst="rect">
+            <a:avLst/>
+          </a:prstGeom>
+          <a:noFill/>
+          <a:ln/>
+        </p:spPr>
+        <p:txBody>
+          <a:bodyPr wrap="square" lIns="0" tIns="0" rIns="0" bIns="0" rtlCol="0" anchor="ctr"/>
+          <a:lstStyle/>
+          <a:p>
+            <a:pPr algn="ctr" indent="0" marL="0">
+              <a:buNone/>
+            </a:pPr>
+            <a:r>
+              <a:rPr lang="en-US" sz="1200" b="1" dirty="0">
+                <a:solidFill>
+                  <a:srgbClr val="353745"/>
+                </a:solidFill>
+                <a:latin typeface="Calibri" pitchFamily="34" charset="0"/>
+                <a:ea typeface="Calibri" pitchFamily="34" charset="-122"/>
+                <a:cs typeface="Calibri" pitchFamily="34" charset="-120"/>
+              </a:rPr>
+              <a:t>Utilization Rate</a:t>
+            </a:r>
+            <a:endParaRPr lang="en-US" sz="1200" dirty="0"/>
+          </a:p>
+        </p:txBody>
+      </p:sp>
+      <p:sp>
+        <p:nvSpPr>
+          <p:cNvPr id="71" name="Text 66"/>
+          <p:cNvSpPr/>
+          <p:nvPr/>
+        </p:nvSpPr>
+        <p:spPr>
+          <a:xfrm>
+            <a:off x="548640" y="4919472"/>
+            <a:ext cx="3520440" cy="201168"/>
+          </a:xfrm>
+          <a:prstGeom prst="rect">
+            <a:avLst/>
+          </a:prstGeom>
+          <a:noFill/>
+          <a:ln/>
+        </p:spPr>
+        <p:txBody>
+          <a:bodyPr wrap="square" lIns="0" tIns="0" rIns="0" bIns="0" rtlCol="0" anchor="ctr"/>
+          <a:lstStyle/>
+          <a:p>
+            <a:pPr algn="ctr" indent="0" marL="0">
+              <a:buNone/>
+            </a:pPr>
+            <a:r>
+              <a:rPr lang="en-US" sz="1000" i="1" dirty="0">
+                <a:solidFill>
+                  <a:srgbClr val="8A7968"/>
+                </a:solidFill>
+                <a:latin typeface="Georgia" pitchFamily="34" charset="0"/>
+                <a:ea typeface="Georgia" pitchFamily="34" charset="-122"/>
+                <a:cs typeface="Georgia" pitchFamily="34" charset="-120"/>
+              </a:rPr>
+              <a:t>Billable vs. total hours</a:t>
+            </a:r>
+            <a:endParaRPr lang="en-US" sz="1000" dirty="0"/>
+          </a:p>
+        </p:txBody>
+      </p:sp>
+      <p:pic>
+        <p:nvPicPr>
+          <p:cNvPr id="72" name="Image 3" descr="/Users/nathansaperia/Downloads/PPTX Chart Builder/claude-pptx-plot/assets/gauge_arc.png">    </p:cNvPr>
+          <p:cNvPicPr>
+            <a:picLocks noChangeAspect="1"/>
+          </p:cNvPicPr>
+          <p:nvPr/>
+        </p:nvPicPr>
+        <p:blipFill>
+          <a:blip r:embed="rId4"/>
+          <a:stretch>
+            <a:fillRect/>
+          </a:stretch>
+        </p:blipFill>
+        <p:spPr>
+          <a:xfrm>
+            <a:off x="1394460" y="5166360"/>
+            <a:ext cx="1828800" cy="914400"/>
+          </a:xfrm>
+          <a:prstGeom prst="rect">
+            <a:avLst/>
+          </a:prstGeom>
+        </p:spPr>
+      </p:pic>
+      <p:sp>
+        <p:nvSpPr>
+          <p:cNvPr id="73" name="Shape 67"/>
+          <p:cNvSpPr/>
+          <p:nvPr/>
+        </p:nvSpPr>
+        <p:spPr>
+          <a:xfrm flipH="1" flipV="1">
+            <a:off x="1509914" y="5500291"/>
+            <a:ext cx="59181" cy="42998"/>
+          </a:xfrm>
+          <a:prstGeom prst="line">
+            <a:avLst/>
+          </a:prstGeom>
+          <a:noFill/>
+          <a:ln w="6350">
+            <a:solidFill>
+              <a:srgbClr val="8A7968"/>
+            </a:solidFill>
+            <a:prstDash val="solid"/>
+          </a:ln>
+        </p:spPr>
+      </p:sp>
+      <p:sp>
+        <p:nvSpPr>
+          <p:cNvPr id="74" name="Text 68"/>
+          <p:cNvSpPr/>
+          <p:nvPr/>
+        </p:nvSpPr>
+        <p:spPr>
+          <a:xfrm>
+            <a:off x="1190383" y="5313712"/>
+            <a:ext cx="402336" cy="201168"/>
+          </a:xfrm>
+          <a:prstGeom prst="rect">
+            <a:avLst/>
+          </a:prstGeom>
+          <a:noFill/>
+          <a:ln/>
+        </p:spPr>
+        <p:txBody>
+          <a:bodyPr wrap="square" lIns="0" tIns="0" rIns="0" bIns="0" rtlCol="0" anchor="ctr"/>
+          <a:lstStyle/>
+          <a:p>
+            <a:pPr algn="ctr" indent="0" marL="0">
+              <a:buNone/>
+            </a:pPr>
+            <a:r>
+              <a:rPr lang="en-US" sz="800" dirty="0">
+                <a:solidFill>
+                  <a:srgbClr val="8A7968"/>
+                </a:solidFill>
+                <a:latin typeface="Calibri" pitchFamily="34" charset="0"/>
+                <a:ea typeface="Calibri" pitchFamily="34" charset="-122"/>
+                <a:cs typeface="Calibri" pitchFamily="34" charset="-120"/>
+              </a:rPr>
+              <a:t>42</a:t>
+            </a:r>
+            <a:endParaRPr lang="en-US" sz="800" dirty="0"/>
+          </a:p>
+        </p:txBody>
+      </p:sp>
+      <p:sp>
+        <p:nvSpPr>
+          <p:cNvPr id="75" name="Shape 69"/>
+          <p:cNvSpPr/>
+          <p:nvPr/>
+        </p:nvSpPr>
+        <p:spPr>
+          <a:xfrm flipH="1" flipV="1">
+            <a:off x="2003690" y="5141542"/>
+            <a:ext cx="22605" cy="69572"/>
+          </a:xfrm>
+          <a:prstGeom prst="line">
+            <a:avLst/>
+          </a:prstGeom>
+          <a:noFill/>
+          <a:ln w="6350">
+            <a:solidFill>
+              <a:srgbClr val="8A7968"/>
+            </a:solidFill>
+            <a:prstDash val="solid"/>
+          </a:ln>
+        </p:spPr>
+      </p:sp>
+      <p:sp>
+        <p:nvSpPr>
+          <p:cNvPr id="76" name="Text 70"/>
+          <p:cNvSpPr/>
+          <p:nvPr/>
+        </p:nvSpPr>
+        <p:spPr>
+          <a:xfrm>
+            <a:off x="1757311" y="4901815"/>
+            <a:ext cx="402336" cy="201168"/>
+          </a:xfrm>
+          <a:prstGeom prst="rect">
+            <a:avLst/>
+          </a:prstGeom>
+          <a:noFill/>
+          <a:ln/>
+        </p:spPr>
+        <p:txBody>
+          <a:bodyPr wrap="square" lIns="0" tIns="0" rIns="0" bIns="0" rtlCol="0" anchor="ctr"/>
+          <a:lstStyle/>
+          <a:p>
+            <a:pPr algn="ctr" indent="0" marL="0">
+              <a:buNone/>
+            </a:pPr>
+            <a:r>
+              <a:rPr lang="en-US" sz="800" dirty="0">
+                <a:solidFill>
+                  <a:srgbClr val="8A7968"/>
+                </a:solidFill>
+                <a:latin typeface="Calibri" pitchFamily="34" charset="0"/>
+                <a:ea typeface="Calibri" pitchFamily="34" charset="-122"/>
+                <a:cs typeface="Calibri" pitchFamily="34" charset="-120"/>
+              </a:rPr>
+              <a:t>54</a:t>
+            </a:r>
+            <a:endParaRPr lang="en-US" sz="800" dirty="0"/>
+          </a:p>
+        </p:txBody>
+      </p:sp>
+      <p:sp>
+        <p:nvSpPr>
+          <p:cNvPr id="77" name="Shape 71"/>
+          <p:cNvSpPr/>
+          <p:nvPr/>
+        </p:nvSpPr>
+        <p:spPr>
+          <a:xfrm flipV="1">
+            <a:off x="2591425" y="5141542"/>
+            <a:ext cx="22605" cy="69572"/>
+          </a:xfrm>
+          <a:prstGeom prst="line">
+            <a:avLst/>
+          </a:prstGeom>
+          <a:noFill/>
+          <a:ln w="6350">
+            <a:solidFill>
+              <a:srgbClr val="8A7968"/>
+            </a:solidFill>
+            <a:prstDash val="solid"/>
+          </a:ln>
+        </p:spPr>
+      </p:sp>
+      <p:sp>
+        <p:nvSpPr>
+          <p:cNvPr id="78" name="Text 72"/>
+          <p:cNvSpPr/>
+          <p:nvPr/>
+        </p:nvSpPr>
+        <p:spPr>
+          <a:xfrm>
+            <a:off x="2458073" y="4901815"/>
+            <a:ext cx="402336" cy="201168"/>
+          </a:xfrm>
+          <a:prstGeom prst="rect">
+            <a:avLst/>
+          </a:prstGeom>
+          <a:noFill/>
+          <a:ln/>
+        </p:spPr>
+        <p:txBody>
+          <a:bodyPr wrap="square" lIns="0" tIns="0" rIns="0" bIns="0" rtlCol="0" anchor="ctr"/>
+          <a:lstStyle/>
+          <a:p>
+            <a:pPr algn="ctr" indent="0" marL="0">
+              <a:buNone/>
+            </a:pPr>
+            <a:r>
+              <a:rPr lang="en-US" sz="800" dirty="0">
+                <a:solidFill>
+                  <a:srgbClr val="8A7968"/>
+                </a:solidFill>
+                <a:latin typeface="Calibri" pitchFamily="34" charset="0"/>
+                <a:ea typeface="Calibri" pitchFamily="34" charset="-122"/>
+                <a:cs typeface="Calibri" pitchFamily="34" charset="-120"/>
+              </a:rPr>
+              <a:t>66</a:t>
+            </a:r>
+            <a:endParaRPr lang="en-US" sz="800" dirty="0"/>
+          </a:p>
+        </p:txBody>
+      </p:sp>
+      <p:sp>
+        <p:nvSpPr>
+          <p:cNvPr id="79" name="Shape 73"/>
+          <p:cNvSpPr/>
+          <p:nvPr/>
+        </p:nvSpPr>
+        <p:spPr>
+          <a:xfrm flipV="1">
+            <a:off x="3048625" y="5500291"/>
+            <a:ext cx="59181" cy="42998"/>
+          </a:xfrm>
+          <a:prstGeom prst="line">
+            <a:avLst/>
+          </a:prstGeom>
+          <a:noFill/>
+          <a:ln w="6350">
+            <a:solidFill>
+              <a:srgbClr val="8A7968"/>
+            </a:solidFill>
+            <a:prstDash val="solid"/>
+          </a:ln>
+        </p:spPr>
+      </p:sp>
+      <p:sp>
+        <p:nvSpPr>
+          <p:cNvPr id="80" name="Text 74"/>
+          <p:cNvSpPr/>
+          <p:nvPr/>
+        </p:nvSpPr>
+        <p:spPr>
+          <a:xfrm>
+            <a:off x="3025001" y="5313712"/>
+            <a:ext cx="402336" cy="201168"/>
+          </a:xfrm>
+          <a:prstGeom prst="rect">
+            <a:avLst/>
+          </a:prstGeom>
+          <a:noFill/>
+          <a:ln/>
+        </p:spPr>
+        <p:txBody>
+          <a:bodyPr wrap="square" lIns="0" tIns="0" rIns="0" bIns="0" rtlCol="0" anchor="ctr"/>
+          <a:lstStyle/>
+          <a:p>
+            <a:pPr algn="ctr" indent="0" marL="0">
+              <a:buNone/>
+            </a:pPr>
+            <a:r>
+              <a:rPr lang="en-US" sz="800" dirty="0">
+                <a:solidFill>
+                  <a:srgbClr val="8A7968"/>
+                </a:solidFill>
+                <a:latin typeface="Calibri" pitchFamily="34" charset="0"/>
+                <a:ea typeface="Calibri" pitchFamily="34" charset="-122"/>
+                <a:cs typeface="Calibri" pitchFamily="34" charset="-120"/>
+              </a:rPr>
+              <a:t>78</a:t>
+            </a:r>
+            <a:endParaRPr lang="en-US" sz="800" dirty="0"/>
+          </a:p>
+        </p:txBody>
+      </p:sp>
+      <p:sp>
+        <p:nvSpPr>
+          <p:cNvPr id="81" name="Text 75"/>
+          <p:cNvSpPr/>
+          <p:nvPr/>
+        </p:nvSpPr>
+        <p:spPr>
+          <a:xfrm>
+            <a:off x="1156716" y="6007608"/>
+            <a:ext cx="228600" cy="201168"/>
+          </a:xfrm>
+          <a:prstGeom prst="rect">
+            <a:avLst/>
+          </a:prstGeom>
+          <a:noFill/>
+          <a:ln/>
+        </p:spPr>
+        <p:txBody>
+          <a:bodyPr wrap="square" lIns="0" tIns="0" rIns="0" bIns="0" rtlCol="0" anchor="ctr"/>
+          <a:lstStyle/>
+          <a:p>
+            <a:pPr algn="r" indent="0" marL="0">
+              <a:buNone/>
+            </a:pPr>
+            <a:r>
+              <a:rPr lang="en-US" sz="800" dirty="0">
+                <a:solidFill>
+                  <a:srgbClr val="8A7968"/>
+                </a:solidFill>
+                <a:latin typeface="Calibri" pitchFamily="34" charset="0"/>
+                <a:ea typeface="Calibri" pitchFamily="34" charset="-122"/>
+                <a:cs typeface="Calibri" pitchFamily="34" charset="-120"/>
+              </a:rPr>
+              <a:t>30</a:t>
+            </a:r>
+            <a:endParaRPr lang="en-US" sz="800" dirty="0"/>
+          </a:p>
+        </p:txBody>
+      </p:sp>
+      <p:sp>
+        <p:nvSpPr>
+          <p:cNvPr id="82" name="Text 76"/>
+          <p:cNvSpPr/>
+          <p:nvPr/>
+        </p:nvSpPr>
+        <p:spPr>
+          <a:xfrm>
+            <a:off x="3232404" y="6007608"/>
+            <a:ext cx="228600" cy="201168"/>
+          </a:xfrm>
+          <a:prstGeom prst="rect">
+            <a:avLst/>
+          </a:prstGeom>
+          <a:noFill/>
+          <a:ln/>
+        </p:spPr>
+        <p:txBody>
+          <a:bodyPr wrap="square" lIns="0" tIns="0" rIns="0" bIns="0" rtlCol="0" anchor="ctr"/>
+          <a:lstStyle/>
+          <a:p>
+            <a:pPr algn="l" indent="0" marL="0">
+              <a:buNone/>
+            </a:pPr>
+            <a:r>
+              <a:rPr lang="en-US" sz="800" dirty="0">
+                <a:solidFill>
+                  <a:srgbClr val="8A7968"/>
+                </a:solidFill>
+                <a:latin typeface="Calibri" pitchFamily="34" charset="0"/>
+                <a:ea typeface="Calibri" pitchFamily="34" charset="-122"/>
+                <a:cs typeface="Calibri" pitchFamily="34" charset="-120"/>
+              </a:rPr>
+              <a:t>90</a:t>
+            </a:r>
+            <a:endParaRPr lang="en-US" sz="800" dirty="0"/>
+          </a:p>
+        </p:txBody>
+      </p:sp>
+      <p:sp>
+        <p:nvSpPr>
+          <p:cNvPr id="83" name="Shape 77"/>
+          <p:cNvSpPr/>
+          <p:nvPr/>
+        </p:nvSpPr>
+        <p:spPr>
+          <a:xfrm rot="12960000">
+            <a:off x="3029559" y="4936695"/>
+            <a:ext cx="128016" cy="128016"/>
+          </a:xfrm>
+          <a:prstGeom prst="triangle">
+            <a:avLst/>
+          </a:prstGeom>
+          <a:solidFill>
+            <a:srgbClr val="2D5F7C"/>
+          </a:solidFill>
+          <a:ln/>
+        </p:spPr>
+      </p:sp>
+      <p:sp>
+        <p:nvSpPr>
+          <p:cNvPr id="84" name="Shape 78"/>
+          <p:cNvSpPr/>
+          <p:nvPr/>
+        </p:nvSpPr>
+        <p:spPr>
+          <a:xfrm flipV="1">
+            <a:off x="2308860" y="5296815"/>
+            <a:ext cx="329540" cy="783945"/>
+          </a:xfrm>
+          <a:prstGeom prst="line">
+            <a:avLst/>
+          </a:prstGeom>
+          <a:noFill/>
+          <a:ln w="27940">
+            <a:solidFill>
+              <a:srgbClr val="B84C65"/>
+            </a:solidFill>
+            <a:prstDash val="solid"/>
+          </a:ln>
+        </p:spPr>
+      </p:sp>
+      <p:sp>
+        <p:nvSpPr>
+          <p:cNvPr id="85" name="Shape 79"/>
+          <p:cNvSpPr/>
+          <p:nvPr/>
+        </p:nvSpPr>
+        <p:spPr>
+          <a:xfrm>
+            <a:off x="2208276" y="5980176"/>
+            <a:ext cx="201168" cy="201168"/>
+          </a:xfrm>
+          <a:prstGeom prst="ellipse">
+            <a:avLst/>
+          </a:prstGeom>
+          <a:solidFill>
+            <a:srgbClr val="353745"/>
+          </a:solidFill>
+          <a:ln/>
+        </p:spPr>
+      </p:sp>
+      <p:sp>
+        <p:nvSpPr>
+          <p:cNvPr id="86" name="Text 80"/>
+          <p:cNvSpPr/>
+          <p:nvPr/>
+        </p:nvSpPr>
+        <p:spPr>
+          <a:xfrm>
+            <a:off x="548640" y="6208776"/>
+            <a:ext cx="3520440" cy="457200"/>
+          </a:xfrm>
+          <a:prstGeom prst="rect">
+            <a:avLst/>
+          </a:prstGeom>
+          <a:noFill/>
+          <a:ln/>
+        </p:spPr>
+        <p:txBody>
+          <a:bodyPr wrap="square" lIns="0" tIns="0" rIns="0" bIns="0" rtlCol="0" anchor="t"/>
+          <a:lstStyle/>
+          <a:p>
+            <a:pPr algn="ctr" indent="0" marL="0">
+              <a:buNone/>
+            </a:pPr>
+            <a:r>
+              <a:rPr lang="en-US" sz="2200" dirty="0">
+                <a:solidFill>
+                  <a:srgbClr val="353745"/>
+                </a:solidFill>
+                <a:latin typeface="Georgia" pitchFamily="34" charset="0"/>
+                <a:ea typeface="Georgia" pitchFamily="34" charset="-122"/>
+                <a:cs typeface="Georgia" pitchFamily="34" charset="-120"/>
+              </a:rPr>
+              <a:t>68%</a:t>
+            </a:r>
+            <a:endParaRPr lang="en-US" sz="2200" dirty="0"/>
+          </a:p>
+        </p:txBody>
+      </p:sp>
+      <p:sp>
+        <p:nvSpPr>
+          <p:cNvPr id="87" name="Text 81"/>
+          <p:cNvSpPr/>
+          <p:nvPr/>
+        </p:nvSpPr>
+        <p:spPr>
+          <a:xfrm>
+            <a:off x="548640" y="6647688"/>
+            <a:ext cx="3520440" cy="219456"/>
+          </a:xfrm>
+          <a:prstGeom prst="rect">
+            <a:avLst/>
+          </a:prstGeom>
+          <a:noFill/>
+          <a:ln/>
+        </p:spPr>
+        <p:txBody>
+          <a:bodyPr wrap="square" lIns="0" tIns="0" rIns="0" bIns="0" rtlCol="0" anchor="t"/>
+          <a:lstStyle/>
+          <a:p>
+            <a:pPr algn="ctr" indent="0" marL="0">
+              <a:buNone/>
+            </a:pPr>
+            <a:r>
+              <a:rPr lang="en-US" sz="900" i="1" dirty="0">
+                <a:solidFill>
+                  <a:srgbClr val="353745"/>
+                </a:solidFill>
+                <a:latin typeface="Georgia" pitchFamily="34" charset="0"/>
+                <a:ea typeface="Georgia" pitchFamily="34" charset="-122"/>
+                <a:cs typeface="Georgia" pitchFamily="34" charset="-120"/>
+              </a:rPr>
+              <a:t>Target: 72%</a:t>
+            </a:r>
+            <a:endParaRPr lang="en-US" sz="900" dirty="0"/>
+          </a:p>
+        </p:txBody>
+      </p:sp>
+      <p:sp>
+        <p:nvSpPr>
+          <p:cNvPr id="88" name="Text 82"/>
+          <p:cNvSpPr/>
+          <p:nvPr/>
+        </p:nvSpPr>
+        <p:spPr>
+          <a:xfrm>
+            <a:off x="548640" y="6894576"/>
+            <a:ext cx="3520440" cy="219456"/>
+          </a:xfrm>
+          <a:prstGeom prst="rect">
+            <a:avLst/>
+          </a:prstGeom>
+          <a:noFill/>
+          <a:ln/>
+        </p:spPr>
+        <p:txBody>
+          <a:bodyPr wrap="square" lIns="0" tIns="0" rIns="0" bIns="0" rtlCol="0" anchor="t"/>
+          <a:lstStyle/>
+          <a:p>
+            <a:pPr algn="ctr" indent="0" marL="0">
+              <a:buNone/>
+            </a:pPr>
+            <a:r>
+              <a:rPr lang="en-US" sz="900" b="1" dirty="0">
+                <a:solidFill>
+                  <a:srgbClr val="B84C65"/>
+                </a:solidFill>
+                <a:latin typeface="Calibri" pitchFamily="34" charset="0"/>
+                <a:ea typeface="Calibri" pitchFamily="34" charset="-122"/>
+                <a:cs typeface="Calibri" pitchFamily="34" charset="-120"/>
+              </a:rPr>
+              <a:t>-4.4 below target</a:t>
+            </a:r>
+            <a:endParaRPr lang="en-US" sz="900" dirty="0"/>
+          </a:p>
+        </p:txBody>
+      </p:sp>
+      <p:sp>
+        <p:nvSpPr>
+          <p:cNvPr id="89" name="Text 83"/>
+          <p:cNvSpPr/>
+          <p:nvPr/>
+        </p:nvSpPr>
+        <p:spPr>
+          <a:xfrm>
+            <a:off x="4334256" y="4663440"/>
+            <a:ext cx="3520440" cy="256032"/>
+          </a:xfrm>
+          <a:prstGeom prst="rect">
+            <a:avLst/>
+          </a:prstGeom>
+          <a:noFill/>
+          <a:ln/>
+        </p:spPr>
+        <p:txBody>
+          <a:bodyPr wrap="square" lIns="0" tIns="0" rIns="0" bIns="0" rtlCol="0" anchor="ctr"/>
+          <a:lstStyle/>
+          <a:p>
+            <a:pPr algn="ctr" indent="0" marL="0">
+              <a:buNone/>
+            </a:pPr>
+            <a:r>
+              <a:rPr lang="en-US" sz="1200" b="1" dirty="0">
+                <a:solidFill>
+                  <a:srgbClr val="353745"/>
+                </a:solidFill>
+                <a:latin typeface="Calibri" pitchFamily="34" charset="0"/>
+                <a:ea typeface="Calibri" pitchFamily="34" charset="-122"/>
+                <a:cs typeface="Calibri" pitchFamily="34" charset="-120"/>
+              </a:rPr>
+              <a:t>Annualized Turnover</a:t>
+            </a:r>
+            <a:endParaRPr lang="en-US" sz="1200" dirty="0"/>
+          </a:p>
+        </p:txBody>
+      </p:sp>
+      <p:sp>
+        <p:nvSpPr>
+          <p:cNvPr id="90" name="Text 84"/>
+          <p:cNvSpPr/>
+          <p:nvPr/>
+        </p:nvSpPr>
+        <p:spPr>
+          <a:xfrm>
+            <a:off x="4334256" y="4919472"/>
+            <a:ext cx="3520440" cy="201168"/>
+          </a:xfrm>
+          <a:prstGeom prst="rect">
+            <a:avLst/>
+          </a:prstGeom>
+          <a:noFill/>
+          <a:ln/>
+        </p:spPr>
+        <p:txBody>
+          <a:bodyPr wrap="square" lIns="0" tIns="0" rIns="0" bIns="0" rtlCol="0" anchor="ctr"/>
+          <a:lstStyle/>
+          <a:p>
+            <a:pPr algn="ctr" indent="0" marL="0">
+              <a:buNone/>
+            </a:pPr>
+            <a:r>
+              <a:rPr lang="en-US" sz="1000" i="1" dirty="0">
+                <a:solidFill>
+                  <a:srgbClr val="8A7968"/>
+                </a:solidFill>
+                <a:latin typeface="Georgia" pitchFamily="34" charset="0"/>
+                <a:ea typeface="Georgia" pitchFamily="34" charset="-122"/>
+                <a:cs typeface="Georgia" pitchFamily="34" charset="-120"/>
+              </a:rPr>
+              <a:t>Departures / headcount</a:t>
+            </a:r>
+            <a:endParaRPr lang="en-US" sz="1000" dirty="0"/>
+          </a:p>
+        </p:txBody>
+      </p:sp>
+      <p:pic>
+        <p:nvPicPr>
+          <p:cNvPr id="91" name="Image 4" descr="/Users/nathansaperia/Downloads/PPTX Chart Builder/claude-pptx-plot/assets/gauge_arc.png">    </p:cNvPr>
+          <p:cNvPicPr>
+            <a:picLocks noChangeAspect="1"/>
+          </p:cNvPicPr>
+          <p:nvPr/>
+        </p:nvPicPr>
+        <p:blipFill>
+          <a:blip r:embed="rId5"/>
+          <a:stretch>
+            <a:fillRect/>
+          </a:stretch>
+        </p:blipFill>
+        <p:spPr>
+          <a:xfrm flipH="1">
+            <a:off x="5180076" y="5166360"/>
+            <a:ext cx="1828800" cy="914400"/>
+          </a:xfrm>
+          <a:prstGeom prst="rect">
+            <a:avLst/>
+          </a:prstGeom>
+        </p:spPr>
+      </p:pic>
+      <p:sp>
+        <p:nvSpPr>
+          <p:cNvPr id="92" name="Shape 85"/>
+          <p:cNvSpPr/>
+          <p:nvPr/>
+        </p:nvSpPr>
+        <p:spPr>
+          <a:xfrm flipH="1" flipV="1">
+            <a:off x="5295530" y="5500291"/>
+            <a:ext cx="59181" cy="42998"/>
+          </a:xfrm>
+          <a:prstGeom prst="line">
+            <a:avLst/>
+          </a:prstGeom>
+          <a:noFill/>
+          <a:ln w="6350">
+            <a:solidFill>
+              <a:srgbClr val="8A7968"/>
+            </a:solidFill>
+            <a:prstDash val="solid"/>
+          </a:ln>
+        </p:spPr>
+      </p:sp>
+      <p:sp>
+        <p:nvSpPr>
+          <p:cNvPr id="93" name="Text 86"/>
+          <p:cNvSpPr/>
+          <p:nvPr/>
+        </p:nvSpPr>
+        <p:spPr>
+          <a:xfrm>
+            <a:off x="4975999" y="5313712"/>
+            <a:ext cx="402336" cy="201168"/>
+          </a:xfrm>
+          <a:prstGeom prst="rect">
+            <a:avLst/>
+          </a:prstGeom>
+          <a:noFill/>
+          <a:ln/>
+        </p:spPr>
+        <p:txBody>
+          <a:bodyPr wrap="square" lIns="0" tIns="0" rIns="0" bIns="0" rtlCol="0" anchor="ctr"/>
+          <a:lstStyle/>
+          <a:p>
+            <a:pPr algn="ctr" indent="0" marL="0">
+              <a:buNone/>
+            </a:pPr>
+            <a:r>
+              <a:rPr lang="en-US" sz="800" dirty="0">
+                <a:solidFill>
+                  <a:srgbClr val="8A7968"/>
+                </a:solidFill>
+                <a:latin typeface="Calibri" pitchFamily="34" charset="0"/>
+                <a:ea typeface="Calibri" pitchFamily="34" charset="-122"/>
+                <a:cs typeface="Calibri" pitchFamily="34" charset="-120"/>
+              </a:rPr>
+              <a:t>8</a:t>
+            </a:r>
+            <a:endParaRPr lang="en-US" sz="800" dirty="0"/>
+          </a:p>
+        </p:txBody>
+      </p:sp>
+      <p:sp>
+        <p:nvSpPr>
+          <p:cNvPr id="94" name="Shape 87"/>
+          <p:cNvSpPr/>
+          <p:nvPr/>
+        </p:nvSpPr>
+        <p:spPr>
+          <a:xfrm flipH="1" flipV="1">
+            <a:off x="5789306" y="5141542"/>
+            <a:ext cx="22605" cy="69572"/>
+          </a:xfrm>
+          <a:prstGeom prst="line">
+            <a:avLst/>
+          </a:prstGeom>
+          <a:noFill/>
+          <a:ln w="6350">
+            <a:solidFill>
+              <a:srgbClr val="8A7968"/>
+            </a:solidFill>
+            <a:prstDash val="solid"/>
+          </a:ln>
+        </p:spPr>
+      </p:sp>
+      <p:sp>
+        <p:nvSpPr>
+          <p:cNvPr id="95" name="Text 88"/>
+          <p:cNvSpPr/>
+          <p:nvPr/>
+        </p:nvSpPr>
+        <p:spPr>
+          <a:xfrm>
+            <a:off x="5542927" y="4901815"/>
+            <a:ext cx="402336" cy="201168"/>
+          </a:xfrm>
+          <a:prstGeom prst="rect">
+            <a:avLst/>
+          </a:prstGeom>
+          <a:noFill/>
+          <a:ln/>
+        </p:spPr>
+        <p:txBody>
+          <a:bodyPr wrap="square" lIns="0" tIns="0" rIns="0" bIns="0" rtlCol="0" anchor="ctr"/>
+          <a:lstStyle/>
+          <a:p>
+            <a:pPr algn="ctr" indent="0" marL="0">
+              <a:buNone/>
+            </a:pPr>
+            <a:r>
+              <a:rPr lang="en-US" sz="800" dirty="0">
+                <a:solidFill>
+                  <a:srgbClr val="8A7968"/>
+                </a:solidFill>
+                <a:latin typeface="Calibri" pitchFamily="34" charset="0"/>
+                <a:ea typeface="Calibri" pitchFamily="34" charset="-122"/>
+                <a:cs typeface="Calibri" pitchFamily="34" charset="-120"/>
+              </a:rPr>
+              <a:t>16</a:t>
+            </a:r>
+            <a:endParaRPr lang="en-US" sz="800" dirty="0"/>
+          </a:p>
+        </p:txBody>
+      </p:sp>
+      <p:sp>
+        <p:nvSpPr>
+          <p:cNvPr id="96" name="Shape 89"/>
+          <p:cNvSpPr/>
+          <p:nvPr/>
+        </p:nvSpPr>
+        <p:spPr>
+          <a:xfrm flipV="1">
+            <a:off x="6377041" y="5141542"/>
+            <a:ext cx="22605" cy="69572"/>
+          </a:xfrm>
+          <a:prstGeom prst="line">
+            <a:avLst/>
+          </a:prstGeom>
+          <a:noFill/>
+          <a:ln w="6350">
+            <a:solidFill>
+              <a:srgbClr val="8A7968"/>
+            </a:solidFill>
+            <a:prstDash val="solid"/>
+          </a:ln>
+        </p:spPr>
+      </p:sp>
+      <p:sp>
+        <p:nvSpPr>
+          <p:cNvPr id="97" name="Text 90"/>
+          <p:cNvSpPr/>
+          <p:nvPr/>
+        </p:nvSpPr>
+        <p:spPr>
+          <a:xfrm>
+            <a:off x="6243689" y="4901815"/>
+            <a:ext cx="402336" cy="201168"/>
+          </a:xfrm>
+          <a:prstGeom prst="rect">
+            <a:avLst/>
+          </a:prstGeom>
+          <a:noFill/>
+          <a:ln/>
+        </p:spPr>
+        <p:txBody>
+          <a:bodyPr wrap="square" lIns="0" tIns="0" rIns="0" bIns="0" rtlCol="0" anchor="ctr"/>
+          <a:lstStyle/>
+          <a:p>
+            <a:pPr algn="ctr" indent="0" marL="0">
+              <a:buNone/>
+            </a:pPr>
+            <a:r>
+              <a:rPr lang="en-US" sz="800" dirty="0">
+                <a:solidFill>
+                  <a:srgbClr val="8A7968"/>
+                </a:solidFill>
+                <a:latin typeface="Calibri" pitchFamily="34" charset="0"/>
+                <a:ea typeface="Calibri" pitchFamily="34" charset="-122"/>
+                <a:cs typeface="Calibri" pitchFamily="34" charset="-120"/>
+              </a:rPr>
+              <a:t>24</a:t>
+            </a:r>
+            <a:endParaRPr lang="en-US" sz="800" dirty="0"/>
+          </a:p>
+        </p:txBody>
+      </p:sp>
+      <p:sp>
+        <p:nvSpPr>
+          <p:cNvPr id="98" name="Shape 91"/>
+          <p:cNvSpPr/>
+          <p:nvPr/>
+        </p:nvSpPr>
+        <p:spPr>
+          <a:xfrm flipV="1">
+            <a:off x="6834241" y="5500291"/>
+            <a:ext cx="59181" cy="42998"/>
+          </a:xfrm>
+          <a:prstGeom prst="line">
+            <a:avLst/>
+          </a:prstGeom>
+          <a:noFill/>
+          <a:ln w="6350">
+            <a:solidFill>
+              <a:srgbClr val="8A7968"/>
+            </a:solidFill>
+            <a:prstDash val="solid"/>
+          </a:ln>
+        </p:spPr>
+      </p:sp>
+      <p:sp>
+        <p:nvSpPr>
+          <p:cNvPr id="99" name="Text 92"/>
+          <p:cNvSpPr/>
+          <p:nvPr/>
+        </p:nvSpPr>
+        <p:spPr>
+          <a:xfrm>
+            <a:off x="6810617" y="5313712"/>
+            <a:ext cx="402336" cy="201168"/>
+          </a:xfrm>
+          <a:prstGeom prst="rect">
+            <a:avLst/>
+          </a:prstGeom>
+          <a:noFill/>
+          <a:ln/>
+        </p:spPr>
+        <p:txBody>
+          <a:bodyPr wrap="square" lIns="0" tIns="0" rIns="0" bIns="0" rtlCol="0" anchor="ctr"/>
+          <a:lstStyle/>
+          <a:p>
+            <a:pPr algn="ctr" indent="0" marL="0">
+              <a:buNone/>
+            </a:pPr>
+            <a:r>
+              <a:rPr lang="en-US" sz="800" dirty="0">
+                <a:solidFill>
+                  <a:srgbClr val="8A7968"/>
+                </a:solidFill>
+                <a:latin typeface="Calibri" pitchFamily="34" charset="0"/>
+                <a:ea typeface="Calibri" pitchFamily="34" charset="-122"/>
+                <a:cs typeface="Calibri" pitchFamily="34" charset="-120"/>
+              </a:rPr>
+              <a:t>32</a:t>
+            </a:r>
+            <a:endParaRPr lang="en-US" sz="800" dirty="0"/>
+          </a:p>
+        </p:txBody>
+      </p:sp>
+      <p:sp>
+        <p:nvSpPr>
+          <p:cNvPr id="100" name="Text 93"/>
+          <p:cNvSpPr/>
+          <p:nvPr/>
+        </p:nvSpPr>
+        <p:spPr>
+          <a:xfrm>
+            <a:off x="4942332" y="6007608"/>
+            <a:ext cx="228600" cy="201168"/>
+          </a:xfrm>
+          <a:prstGeom prst="rect">
+            <a:avLst/>
+          </a:prstGeom>
+          <a:noFill/>
+          <a:ln/>
+        </p:spPr>
+        <p:txBody>
+          <a:bodyPr wrap="square" lIns="0" tIns="0" rIns="0" bIns="0" rtlCol="0" anchor="ctr"/>
+          <a:lstStyle/>
+          <a:p>
+            <a:pPr algn="r" indent="0" marL="0">
+              <a:buNone/>
+            </a:pPr>
+            <a:r>
+              <a:rPr lang="en-US" sz="800" dirty="0">
+                <a:solidFill>
+                  <a:srgbClr val="8A7968"/>
+                </a:solidFill>
+                <a:latin typeface="Calibri" pitchFamily="34" charset="0"/>
+                <a:ea typeface="Calibri" pitchFamily="34" charset="-122"/>
+                <a:cs typeface="Calibri" pitchFamily="34" charset="-120"/>
+              </a:rPr>
+              <a:t>0</a:t>
+            </a:r>
+            <a:endParaRPr lang="en-US" sz="800" dirty="0"/>
+          </a:p>
+        </p:txBody>
+      </p:sp>
+      <p:sp>
+        <p:nvSpPr>
+          <p:cNvPr id="101" name="Text 94"/>
+          <p:cNvSpPr/>
+          <p:nvPr/>
+        </p:nvSpPr>
+        <p:spPr>
+          <a:xfrm>
+            <a:off x="7018020" y="6007608"/>
+            <a:ext cx="228600" cy="201168"/>
+          </a:xfrm>
+          <a:prstGeom prst="rect">
+            <a:avLst/>
+          </a:prstGeom>
+          <a:noFill/>
+          <a:ln/>
+        </p:spPr>
+        <p:txBody>
+          <a:bodyPr wrap="square" lIns="0" tIns="0" rIns="0" bIns="0" rtlCol="0" anchor="ctr"/>
+          <a:lstStyle/>
+          <a:p>
+            <a:pPr algn="l" indent="0" marL="0">
+              <a:buNone/>
+            </a:pPr>
+            <a:r>
+              <a:rPr lang="en-US" sz="800" dirty="0">
+                <a:solidFill>
+                  <a:srgbClr val="8A7968"/>
+                </a:solidFill>
+                <a:latin typeface="Calibri" pitchFamily="34" charset="0"/>
+                <a:ea typeface="Calibri" pitchFamily="34" charset="-122"/>
+                <a:cs typeface="Calibri" pitchFamily="34" charset="-120"/>
+              </a:rPr>
+              <a:t>40</a:t>
+            </a:r>
+            <a:endParaRPr lang="en-US" sz="800" dirty="0"/>
+          </a:p>
+        </p:txBody>
+      </p:sp>
+      <p:sp>
+        <p:nvSpPr>
+          <p:cNvPr id="102" name="Shape 95"/>
+          <p:cNvSpPr/>
+          <p:nvPr/>
+        </p:nvSpPr>
+        <p:spPr>
+          <a:xfrm rot="9450000">
+            <a:off x="5519576" y="4783351"/>
+            <a:ext cx="128016" cy="128016"/>
+          </a:xfrm>
+          <a:prstGeom prst="triangle">
+            <a:avLst/>
+          </a:prstGeom>
+          <a:solidFill>
+            <a:srgbClr val="2D5F7C"/>
+          </a:solidFill>
+          <a:ln/>
+        </p:spPr>
+      </p:sp>
+      <p:sp>
+        <p:nvSpPr>
+          <p:cNvPr id="103" name="Shape 96"/>
+          <p:cNvSpPr/>
+          <p:nvPr/>
+        </p:nvSpPr>
+        <p:spPr>
+          <a:xfrm flipH="1" flipV="1">
+            <a:off x="5369398" y="5636431"/>
+            <a:ext cx="725078" cy="444329"/>
+          </a:xfrm>
+          <a:prstGeom prst="line">
+            <a:avLst/>
+          </a:prstGeom>
+          <a:noFill/>
+          <a:ln w="27940">
+            <a:solidFill>
+              <a:srgbClr val="B84C65"/>
+            </a:solidFill>
+            <a:prstDash val="solid"/>
+          </a:ln>
+        </p:spPr>
+      </p:sp>
+      <p:sp>
+        <p:nvSpPr>
+          <p:cNvPr id="104" name="Shape 97"/>
+          <p:cNvSpPr/>
+          <p:nvPr/>
+        </p:nvSpPr>
+        <p:spPr>
+          <a:xfrm>
+            <a:off x="5993892" y="5980176"/>
+            <a:ext cx="201168" cy="201168"/>
+          </a:xfrm>
+          <a:prstGeom prst="ellipse">
+            <a:avLst/>
+          </a:prstGeom>
+          <a:solidFill>
+            <a:srgbClr val="353745"/>
+          </a:solidFill>
+          <a:ln/>
+        </p:spPr>
+      </p:sp>
+      <p:sp>
+        <p:nvSpPr>
+          <p:cNvPr id="105" name="Text 98"/>
+          <p:cNvSpPr/>
+          <p:nvPr/>
+        </p:nvSpPr>
+        <p:spPr>
+          <a:xfrm>
+            <a:off x="4334256" y="6208776"/>
+            <a:ext cx="3520440" cy="457200"/>
+          </a:xfrm>
+          <a:prstGeom prst="rect">
+            <a:avLst/>
+          </a:prstGeom>
+          <a:noFill/>
+          <a:ln/>
+        </p:spPr>
+        <p:txBody>
+          <a:bodyPr wrap="square" lIns="0" tIns="0" rIns="0" bIns="0" rtlCol="0" anchor="t"/>
+          <a:lstStyle/>
+          <a:p>
+            <a:pPr algn="ctr" indent="0" marL="0">
+              <a:buNone/>
+            </a:pPr>
+            <a:r>
+              <a:rPr lang="en-US" sz="2200" dirty="0">
+                <a:solidFill>
+                  <a:srgbClr val="353745"/>
+                </a:solidFill>
+                <a:latin typeface="Georgia" pitchFamily="34" charset="0"/>
+                <a:ea typeface="Georgia" pitchFamily="34" charset="-122"/>
+                <a:cs typeface="Georgia" pitchFamily="34" charset="-120"/>
+              </a:rPr>
+              <a:t>7%</a:t>
+            </a:r>
+            <a:endParaRPr lang="en-US" sz="2200" dirty="0"/>
+          </a:p>
+        </p:txBody>
+      </p:sp>
+      <p:sp>
+        <p:nvSpPr>
+          <p:cNvPr id="106" name="Text 99"/>
+          <p:cNvSpPr/>
+          <p:nvPr/>
+        </p:nvSpPr>
+        <p:spPr>
+          <a:xfrm>
+            <a:off x="4334256" y="6647688"/>
+            <a:ext cx="3520440" cy="219456"/>
+          </a:xfrm>
+          <a:prstGeom prst="rect">
+            <a:avLst/>
+          </a:prstGeom>
+          <a:noFill/>
+          <a:ln/>
+        </p:spPr>
+        <p:txBody>
+          <a:bodyPr wrap="square" lIns="0" tIns="0" rIns="0" bIns="0" rtlCol="0" anchor="t"/>
+          <a:lstStyle/>
+          <a:p>
+            <a:pPr algn="ctr" indent="0" marL="0">
+              <a:buNone/>
+            </a:pPr>
+            <a:r>
+              <a:rPr lang="en-US" sz="900" i="1" dirty="0">
+                <a:solidFill>
+                  <a:srgbClr val="353745"/>
+                </a:solidFill>
+                <a:latin typeface="Georgia" pitchFamily="34" charset="0"/>
+                <a:ea typeface="Georgia" pitchFamily="34" charset="-122"/>
+                <a:cs typeface="Georgia" pitchFamily="34" charset="-120"/>
+              </a:rPr>
+              <a:t>Target: &lt;15%</a:t>
+            </a:r>
+            <a:endParaRPr lang="en-US" sz="900" dirty="0"/>
+          </a:p>
+        </p:txBody>
+      </p:sp>
+      <p:sp>
+        <p:nvSpPr>
+          <p:cNvPr id="107" name="Text 100"/>
+          <p:cNvSpPr/>
+          <p:nvPr/>
+        </p:nvSpPr>
+        <p:spPr>
+          <a:xfrm>
+            <a:off x="4334256" y="6894576"/>
+            <a:ext cx="3520440" cy="219456"/>
+          </a:xfrm>
+          <a:prstGeom prst="rect">
+            <a:avLst/>
+          </a:prstGeom>
+          <a:noFill/>
+          <a:ln/>
+        </p:spPr>
+        <p:txBody>
+          <a:bodyPr wrap="square" lIns="0" tIns="0" rIns="0" bIns="0" rtlCol="0" anchor="t"/>
+          <a:lstStyle/>
+          <a:p>
+            <a:pPr algn="ctr" indent="0" marL="0">
+              <a:buNone/>
+            </a:pPr>
+            <a:r>
+              <a:rPr lang="en-US" sz="900" b="1" dirty="0">
+                <a:solidFill>
+                  <a:srgbClr val="2D5F7C"/>
+                </a:solidFill>
+                <a:latin typeface="Calibri" pitchFamily="34" charset="0"/>
+                <a:ea typeface="Calibri" pitchFamily="34" charset="-122"/>
+                <a:cs typeface="Calibri" pitchFamily="34" charset="-120"/>
+              </a:rPr>
+              <a:t>-8.0 below target</a:t>
+            </a:r>
+            <a:endParaRPr lang="en-US" sz="900" dirty="0"/>
+          </a:p>
+        </p:txBody>
+      </p:sp>
+      <p:sp>
+        <p:nvSpPr>
+          <p:cNvPr id="108" name="Text 101"/>
+          <p:cNvSpPr/>
+          <p:nvPr/>
+        </p:nvSpPr>
+        <p:spPr>
+          <a:xfrm>
+            <a:off x="8119872" y="4663440"/>
+            <a:ext cx="3520440" cy="256032"/>
+          </a:xfrm>
+          <a:prstGeom prst="rect">
+            <a:avLst/>
+          </a:prstGeom>
+          <a:noFill/>
+          <a:ln/>
+        </p:spPr>
+        <p:txBody>
+          <a:bodyPr wrap="square" lIns="0" tIns="0" rIns="0" bIns="0" rtlCol="0" anchor="ctr"/>
+          <a:lstStyle/>
+          <a:p>
+            <a:pPr algn="ctr" indent="0" marL="0">
+              <a:buNone/>
+            </a:pPr>
+            <a:r>
+              <a:rPr lang="en-US" sz="1200" b="1" dirty="0">
+                <a:solidFill>
+                  <a:srgbClr val="353745"/>
+                </a:solidFill>
+                <a:latin typeface="Calibri" pitchFamily="34" charset="0"/>
+                <a:ea typeface="Calibri" pitchFamily="34" charset="-122"/>
+                <a:cs typeface="Calibri" pitchFamily="34" charset="-120"/>
+              </a:rPr>
+              <a:t>Leverage Ratio</a:t>
+            </a:r>
+            <a:endParaRPr lang="en-US" sz="1200" dirty="0"/>
+          </a:p>
+        </p:txBody>
+      </p:sp>
+      <p:sp>
+        <p:nvSpPr>
+          <p:cNvPr id="109" name="Text 102"/>
+          <p:cNvSpPr/>
+          <p:nvPr/>
+        </p:nvSpPr>
+        <p:spPr>
+          <a:xfrm>
+            <a:off x="8119872" y="4919472"/>
+            <a:ext cx="3520440" cy="201168"/>
+          </a:xfrm>
+          <a:prstGeom prst="rect">
+            <a:avLst/>
+          </a:prstGeom>
+          <a:noFill/>
+          <a:ln/>
+        </p:spPr>
+        <p:txBody>
+          <a:bodyPr wrap="square" lIns="0" tIns="0" rIns="0" bIns="0" rtlCol="0" anchor="ctr"/>
+          <a:lstStyle/>
+          <a:p>
+            <a:pPr algn="ctr" indent="0" marL="0">
+              <a:buNone/>
+            </a:pPr>
+            <a:r>
+              <a:rPr lang="en-US" sz="1000" i="1" dirty="0">
+                <a:solidFill>
+                  <a:srgbClr val="8A7968"/>
+                </a:solidFill>
+                <a:latin typeface="Georgia" pitchFamily="34" charset="0"/>
+                <a:ea typeface="Georgia" pitchFamily="34" charset="-122"/>
+                <a:cs typeface="Georgia" pitchFamily="34" charset="-120"/>
+              </a:rPr>
+              <a:t>Staff per equity partner</a:t>
+            </a:r>
+            <a:endParaRPr lang="en-US" sz="1000" dirty="0"/>
+          </a:p>
+        </p:txBody>
+      </p:sp>
+      <p:pic>
+        <p:nvPicPr>
+          <p:cNvPr id="110" name="Image 5" descr="/Users/nathansaperia/Downloads/PPTX Chart Builder/claude-pptx-plot/assets/gauge_arc.png">    </p:cNvPr>
+          <p:cNvPicPr>
+            <a:picLocks noChangeAspect="1"/>
+          </p:cNvPicPr>
+          <p:nvPr/>
+        </p:nvPicPr>
+        <p:blipFill>
+          <a:blip r:embed="rId6"/>
+          <a:stretch>
+            <a:fillRect/>
+          </a:stretch>
+        </p:blipFill>
+        <p:spPr>
+          <a:xfrm>
+            <a:off x="8965692" y="5166360"/>
+            <a:ext cx="1828800" cy="914400"/>
+          </a:xfrm>
+          <a:prstGeom prst="rect">
+            <a:avLst/>
+          </a:prstGeom>
+        </p:spPr>
+      </p:pic>
+      <p:sp>
+        <p:nvSpPr>
+          <p:cNvPr id="111" name="Shape 103"/>
+          <p:cNvSpPr/>
+          <p:nvPr/>
+        </p:nvSpPr>
+        <p:spPr>
+          <a:xfrm flipH="1" flipV="1">
+            <a:off x="9081146" y="5500291"/>
+            <a:ext cx="59181" cy="42998"/>
+          </a:xfrm>
+          <a:prstGeom prst="line">
+            <a:avLst/>
+          </a:prstGeom>
+          <a:noFill/>
+          <a:ln w="6350">
+            <a:solidFill>
+              <a:srgbClr val="8A7968"/>
+            </a:solidFill>
+            <a:prstDash val="solid"/>
+          </a:ln>
+        </p:spPr>
+      </p:sp>
+      <p:sp>
+        <p:nvSpPr>
+          <p:cNvPr id="112" name="Text 104"/>
+          <p:cNvSpPr/>
+          <p:nvPr/>
+        </p:nvSpPr>
+        <p:spPr>
+          <a:xfrm>
+            <a:off x="8761615" y="5313712"/>
+            <a:ext cx="402336" cy="201168"/>
+          </a:xfrm>
+          <a:prstGeom prst="rect">
+            <a:avLst/>
+          </a:prstGeom>
+          <a:noFill/>
+          <a:ln/>
+        </p:spPr>
+        <p:txBody>
+          <a:bodyPr wrap="square" lIns="0" tIns="0" rIns="0" bIns="0" rtlCol="0" anchor="ctr"/>
+          <a:lstStyle/>
+          <a:p>
+            <a:pPr algn="ctr" indent="0" marL="0">
+              <a:buNone/>
+            </a:pPr>
+            <a:r>
+              <a:rPr lang="en-US" sz="800" dirty="0">
+                <a:solidFill>
+                  <a:srgbClr val="8A7968"/>
+                </a:solidFill>
+                <a:latin typeface="Calibri" pitchFamily="34" charset="0"/>
+                <a:ea typeface="Calibri" pitchFamily="34" charset="-122"/>
+                <a:cs typeface="Calibri" pitchFamily="34" charset="-120"/>
+              </a:rPr>
+              <a:t>3</a:t>
+            </a:r>
+            <a:endParaRPr lang="en-US" sz="800" dirty="0"/>
+          </a:p>
+        </p:txBody>
+      </p:sp>
+      <p:sp>
+        <p:nvSpPr>
+          <p:cNvPr id="113" name="Shape 105"/>
+          <p:cNvSpPr/>
+          <p:nvPr/>
+        </p:nvSpPr>
+        <p:spPr>
+          <a:xfrm flipH="1" flipV="1">
+            <a:off x="9574922" y="5141542"/>
+            <a:ext cx="22605" cy="69572"/>
+          </a:xfrm>
+          <a:prstGeom prst="line">
+            <a:avLst/>
+          </a:prstGeom>
+          <a:noFill/>
+          <a:ln w="6350">
+            <a:solidFill>
+              <a:srgbClr val="8A7968"/>
+            </a:solidFill>
+            <a:prstDash val="solid"/>
+          </a:ln>
+        </p:spPr>
+      </p:sp>
+      <p:sp>
+        <p:nvSpPr>
+          <p:cNvPr id="114" name="Text 106"/>
+          <p:cNvSpPr/>
+          <p:nvPr/>
+        </p:nvSpPr>
+        <p:spPr>
+          <a:xfrm>
+            <a:off x="9328543" y="4901815"/>
+            <a:ext cx="402336" cy="201168"/>
+          </a:xfrm>
+          <a:prstGeom prst="rect">
+            <a:avLst/>
+          </a:prstGeom>
+          <a:noFill/>
+          <a:ln/>
+        </p:spPr>
+        <p:txBody>
+          <a:bodyPr wrap="square" lIns="0" tIns="0" rIns="0" bIns="0" rtlCol="0" anchor="ctr"/>
+          <a:lstStyle/>
+          <a:p>
+            <a:pPr algn="ctr" indent="0" marL="0">
+              <a:buNone/>
+            </a:pPr>
+            <a:r>
+              <a:rPr lang="en-US" sz="800" dirty="0">
+                <a:solidFill>
+                  <a:srgbClr val="8A7968"/>
+                </a:solidFill>
+                <a:latin typeface="Calibri" pitchFamily="34" charset="0"/>
+                <a:ea typeface="Calibri" pitchFamily="34" charset="-122"/>
+                <a:cs typeface="Calibri" pitchFamily="34" charset="-120"/>
+              </a:rPr>
+              <a:t>6</a:t>
+            </a:r>
+            <a:endParaRPr lang="en-US" sz="800" dirty="0"/>
+          </a:p>
+        </p:txBody>
+      </p:sp>
+      <p:sp>
+        <p:nvSpPr>
+          <p:cNvPr id="115" name="Shape 107"/>
+          <p:cNvSpPr/>
+          <p:nvPr/>
+        </p:nvSpPr>
+        <p:spPr>
+          <a:xfrm flipV="1">
+            <a:off x="10162657" y="5141542"/>
+            <a:ext cx="22605" cy="69572"/>
+          </a:xfrm>
+          <a:prstGeom prst="line">
+            <a:avLst/>
+          </a:prstGeom>
+          <a:noFill/>
+          <a:ln w="6350">
+            <a:solidFill>
+              <a:srgbClr val="8A7968"/>
+            </a:solidFill>
+            <a:prstDash val="solid"/>
+          </a:ln>
+        </p:spPr>
+      </p:sp>
+      <p:sp>
+        <p:nvSpPr>
+          <p:cNvPr id="116" name="Text 108"/>
+          <p:cNvSpPr/>
+          <p:nvPr/>
+        </p:nvSpPr>
+        <p:spPr>
+          <a:xfrm>
+            <a:off x="10029305" y="4901815"/>
+            <a:ext cx="402336" cy="201168"/>
+          </a:xfrm>
+          <a:prstGeom prst="rect">
+            <a:avLst/>
+          </a:prstGeom>
+          <a:noFill/>
+          <a:ln/>
+        </p:spPr>
+        <p:txBody>
+          <a:bodyPr wrap="square" lIns="0" tIns="0" rIns="0" bIns="0" rtlCol="0" anchor="ctr"/>
+          <a:lstStyle/>
+          <a:p>
+            <a:pPr algn="ctr" indent="0" marL="0">
+              <a:buNone/>
+            </a:pPr>
+            <a:r>
+              <a:rPr lang="en-US" sz="800" dirty="0">
+                <a:solidFill>
+                  <a:srgbClr val="8A7968"/>
+                </a:solidFill>
+                <a:latin typeface="Calibri" pitchFamily="34" charset="0"/>
+                <a:ea typeface="Calibri" pitchFamily="34" charset="-122"/>
+                <a:cs typeface="Calibri" pitchFamily="34" charset="-120"/>
+              </a:rPr>
+              <a:t>9</a:t>
+            </a:r>
+            <a:endParaRPr lang="en-US" sz="800" dirty="0"/>
+          </a:p>
+        </p:txBody>
+      </p:sp>
+      <p:sp>
+        <p:nvSpPr>
+          <p:cNvPr id="117" name="Shape 109"/>
+          <p:cNvSpPr/>
+          <p:nvPr/>
+        </p:nvSpPr>
+        <p:spPr>
+          <a:xfrm flipV="1">
+            <a:off x="10619857" y="5500291"/>
+            <a:ext cx="59181" cy="42998"/>
+          </a:xfrm>
+          <a:prstGeom prst="line">
+            <a:avLst/>
+          </a:prstGeom>
+          <a:noFill/>
+          <a:ln w="6350">
+            <a:solidFill>
+              <a:srgbClr val="8A7968"/>
+            </a:solidFill>
+            <a:prstDash val="solid"/>
+          </a:ln>
+        </p:spPr>
+      </p:sp>
+      <p:sp>
+        <p:nvSpPr>
+          <p:cNvPr id="118" name="Text 110"/>
+          <p:cNvSpPr/>
+          <p:nvPr/>
+        </p:nvSpPr>
+        <p:spPr>
+          <a:xfrm>
+            <a:off x="10596233" y="5313712"/>
+            <a:ext cx="402336" cy="201168"/>
+          </a:xfrm>
+          <a:prstGeom prst="rect">
+            <a:avLst/>
+          </a:prstGeom>
+          <a:noFill/>
+          <a:ln/>
+        </p:spPr>
+        <p:txBody>
+          <a:bodyPr wrap="square" lIns="0" tIns="0" rIns="0" bIns="0" rtlCol="0" anchor="ctr"/>
+          <a:lstStyle/>
+          <a:p>
+            <a:pPr algn="ctr" indent="0" marL="0">
+              <a:buNone/>
+            </a:pPr>
+            <a:r>
+              <a:rPr lang="en-US" sz="800" dirty="0">
+                <a:solidFill>
+                  <a:srgbClr val="8A7968"/>
+                </a:solidFill>
+                <a:latin typeface="Calibri" pitchFamily="34" charset="0"/>
+                <a:ea typeface="Calibri" pitchFamily="34" charset="-122"/>
+                <a:cs typeface="Calibri" pitchFamily="34" charset="-120"/>
+              </a:rPr>
+              <a:t>12</a:t>
+            </a:r>
+            <a:endParaRPr lang="en-US" sz="800" dirty="0"/>
+          </a:p>
+        </p:txBody>
+      </p:sp>
+      <p:sp>
+        <p:nvSpPr>
+          <p:cNvPr id="119" name="Text 111"/>
+          <p:cNvSpPr/>
+          <p:nvPr/>
+        </p:nvSpPr>
+        <p:spPr>
+          <a:xfrm>
+            <a:off x="8727948" y="6007608"/>
+            <a:ext cx="228600" cy="201168"/>
+          </a:xfrm>
+          <a:prstGeom prst="rect">
+            <a:avLst/>
+          </a:prstGeom>
+          <a:noFill/>
+          <a:ln/>
+        </p:spPr>
+        <p:txBody>
+          <a:bodyPr wrap="square" lIns="0" tIns="0" rIns="0" bIns="0" rtlCol="0" anchor="ctr"/>
+          <a:lstStyle/>
+          <a:p>
+            <a:pPr algn="r" indent="0" marL="0">
+              <a:buNone/>
+            </a:pPr>
+            <a:r>
+              <a:rPr lang="en-US" sz="800" dirty="0">
+                <a:solidFill>
+                  <a:srgbClr val="8A7968"/>
+                </a:solidFill>
+                <a:latin typeface="Calibri" pitchFamily="34" charset="0"/>
+                <a:ea typeface="Calibri" pitchFamily="34" charset="-122"/>
+                <a:cs typeface="Calibri" pitchFamily="34" charset="-120"/>
+              </a:rPr>
+              <a:t>0</a:t>
+            </a:r>
+            <a:endParaRPr lang="en-US" sz="800" dirty="0"/>
+          </a:p>
+        </p:txBody>
+      </p:sp>
+      <p:sp>
+        <p:nvSpPr>
+          <p:cNvPr id="120" name="Text 112"/>
+          <p:cNvSpPr/>
+          <p:nvPr/>
+        </p:nvSpPr>
+        <p:spPr>
+          <a:xfrm>
+            <a:off x="10803636" y="6007608"/>
+            <a:ext cx="228600" cy="201168"/>
+          </a:xfrm>
+          <a:prstGeom prst="rect">
+            <a:avLst/>
+          </a:prstGeom>
+          <a:noFill/>
+          <a:ln/>
+        </p:spPr>
+        <p:txBody>
+          <a:bodyPr wrap="square" lIns="0" tIns="0" rIns="0" bIns="0" rtlCol="0" anchor="ctr"/>
+          <a:lstStyle/>
+          <a:p>
+            <a:pPr algn="l" indent="0" marL="0">
+              <a:buNone/>
+            </a:pPr>
+            <a:r>
+              <a:rPr lang="en-US" sz="800" dirty="0">
+                <a:solidFill>
+                  <a:srgbClr val="8A7968"/>
+                </a:solidFill>
+                <a:latin typeface="Calibri" pitchFamily="34" charset="0"/>
+                <a:ea typeface="Calibri" pitchFamily="34" charset="-122"/>
+                <a:cs typeface="Calibri" pitchFamily="34" charset="-120"/>
+              </a:rPr>
+              <a:t>15</a:t>
+            </a:r>
+            <a:endParaRPr lang="en-US" sz="800" dirty="0"/>
+          </a:p>
+        </p:txBody>
+      </p:sp>
+      <p:sp>
+        <p:nvSpPr>
+          <p:cNvPr id="121" name="Shape 113"/>
+          <p:cNvSpPr/>
+          <p:nvPr/>
+        </p:nvSpPr>
+        <p:spPr>
+          <a:xfrm rot="9720000">
+            <a:off x="9403539" y="4747069"/>
+            <a:ext cx="128016" cy="128016"/>
+          </a:xfrm>
+          <a:prstGeom prst="triangle">
+            <a:avLst/>
+          </a:prstGeom>
+          <a:solidFill>
+            <a:srgbClr val="2D5F7C"/>
+          </a:solidFill>
+          <a:ln/>
+        </p:spPr>
+      </p:sp>
+      <p:sp>
+        <p:nvSpPr>
+          <p:cNvPr id="122" name="Shape 114"/>
+          <p:cNvSpPr/>
+          <p:nvPr/>
+        </p:nvSpPr>
+        <p:spPr>
+          <a:xfrm flipV="1">
+            <a:off x="9880092" y="5344299"/>
+            <a:ext cx="425196" cy="736461"/>
+          </a:xfrm>
+          <a:prstGeom prst="line">
+            <a:avLst/>
+          </a:prstGeom>
+          <a:noFill/>
+          <a:ln w="27940">
+            <a:solidFill>
+              <a:srgbClr val="B84C65"/>
+            </a:solidFill>
+            <a:prstDash val="solid"/>
+          </a:ln>
+        </p:spPr>
+      </p:sp>
+      <p:sp>
+        <p:nvSpPr>
+          <p:cNvPr id="123" name="Shape 115"/>
+          <p:cNvSpPr/>
+          <p:nvPr/>
+        </p:nvSpPr>
+        <p:spPr>
+          <a:xfrm>
+            <a:off x="9779508" y="5980176"/>
+            <a:ext cx="201168" cy="201168"/>
+          </a:xfrm>
+          <a:prstGeom prst="ellipse">
+            <a:avLst/>
+          </a:prstGeom>
+          <a:solidFill>
+            <a:srgbClr val="353745"/>
+          </a:solidFill>
+          <a:ln/>
+        </p:spPr>
+      </p:sp>
+      <p:sp>
+        <p:nvSpPr>
+          <p:cNvPr id="124" name="Text 116"/>
+          <p:cNvSpPr/>
+          <p:nvPr/>
+        </p:nvSpPr>
+        <p:spPr>
+          <a:xfrm>
+            <a:off x="8119872" y="6208776"/>
+            <a:ext cx="3520440" cy="457200"/>
+          </a:xfrm>
+          <a:prstGeom prst="rect">
+            <a:avLst/>
+          </a:prstGeom>
+          <a:noFill/>
+          <a:ln/>
+        </p:spPr>
+        <p:txBody>
+          <a:bodyPr wrap="square" lIns="0" tIns="0" rIns="0" bIns="0" rtlCol="0" anchor="t"/>
+          <a:lstStyle/>
+          <a:p>
+            <a:pPr algn="ctr" indent="0" marL="0">
+              <a:buNone/>
+            </a:pPr>
+            <a:r>
+              <a:rPr lang="en-US" sz="2200" dirty="0">
+                <a:solidFill>
+                  <a:srgbClr val="353745"/>
+                </a:solidFill>
+                <a:latin typeface="Georgia" pitchFamily="34" charset="0"/>
+                <a:ea typeface="Georgia" pitchFamily="34" charset="-122"/>
+                <a:cs typeface="Georgia" pitchFamily="34" charset="-120"/>
+              </a:rPr>
+              <a:t>10.0×</a:t>
+            </a:r>
+            <a:endParaRPr lang="en-US" sz="2200" dirty="0"/>
+          </a:p>
+        </p:txBody>
+      </p:sp>
+      <p:sp>
+        <p:nvSpPr>
+          <p:cNvPr id="125" name="Text 117"/>
+          <p:cNvSpPr/>
+          <p:nvPr/>
+        </p:nvSpPr>
+        <p:spPr>
+          <a:xfrm>
+            <a:off x="8119872" y="6647688"/>
+            <a:ext cx="3520440" cy="219456"/>
+          </a:xfrm>
+          <a:prstGeom prst="rect">
+            <a:avLst/>
+          </a:prstGeom>
+          <a:noFill/>
+          <a:ln/>
+        </p:spPr>
+        <p:txBody>
+          <a:bodyPr wrap="square" lIns="0" tIns="0" rIns="0" bIns="0" rtlCol="0" anchor="t"/>
+          <a:lstStyle/>
+          <a:p>
+            <a:pPr algn="ctr" indent="0" marL="0">
+              <a:buNone/>
+            </a:pPr>
+            <a:r>
+              <a:rPr lang="en-US" sz="900" i="1" dirty="0">
+                <a:solidFill>
+                  <a:srgbClr val="353745"/>
+                </a:solidFill>
+                <a:latin typeface="Georgia" pitchFamily="34" charset="0"/>
+                <a:ea typeface="Georgia" pitchFamily="34" charset="-122"/>
+                <a:cs typeface="Georgia" pitchFamily="34" charset="-120"/>
+              </a:rPr>
+              <a:t>Target: 6×</a:t>
+            </a:r>
+            <a:endParaRPr lang="en-US" sz="900" dirty="0"/>
+          </a:p>
+        </p:txBody>
+      </p:sp>
+      <p:sp>
+        <p:nvSpPr>
+          <p:cNvPr id="126" name="Text 118"/>
+          <p:cNvSpPr/>
+          <p:nvPr/>
+        </p:nvSpPr>
+        <p:spPr>
+          <a:xfrm>
+            <a:off x="8119872" y="6894576"/>
+            <a:ext cx="3520440" cy="219456"/>
+          </a:xfrm>
+          <a:prstGeom prst="rect">
+            <a:avLst/>
+          </a:prstGeom>
+          <a:noFill/>
+          <a:ln/>
+        </p:spPr>
+        <p:txBody>
+          <a:bodyPr wrap="square" lIns="0" tIns="0" rIns="0" bIns="0" rtlCol="0" anchor="t"/>
+          <a:lstStyle/>
+          <a:p>
+            <a:pPr algn="ctr" indent="0" marL="0">
+              <a:buNone/>
+            </a:pPr>
+            <a:r>
+              <a:rPr lang="en-US" sz="900" b="1" dirty="0">
+                <a:solidFill>
+                  <a:srgbClr val="B84C65"/>
+                </a:solidFill>
+                <a:latin typeface="Calibri" pitchFamily="34" charset="0"/>
+                <a:ea typeface="Calibri" pitchFamily="34" charset="-122"/>
+                <a:cs typeface="Calibri" pitchFamily="34" charset="-120"/>
+              </a:rPr>
+              <a:t>+4.0 above target</a:t>
+            </a:r>
+            <a:endParaRPr lang="en-US" sz="900" dirty="0"/>
+          </a:p>
+        </p:txBody>
+      </p:sp>
     </p:spTree>
   </p:cSld>
   <p:clrMapOvr>
